--- a/a7/packages/A7 Unit 4 - Solving Problems with Rational Numbers/Lessons/4.02/A7 4.02 Multiplying and Dividing in Scientific Notation - Slides.pptx
+++ b/a7/packages/A7 Unit 4 - Solving Problems with Rational Numbers/Lessons/4.02/A7 4.02 Multiplying and Dividing in Scientific Notation - Slides.pptx
@@ -3129,7 +3129,7 @@
         </p:nvSpPr>
         <p:spPr>
           <a:xfrm>
-            <a:off x="777240" y="1691640"/>
+            <a:off x="777240" y="2148840"/>
             <a:ext cx="10607040" cy="347472"/>
           </a:xfrm>
           <a:prstGeom prst="rect">
@@ -3164,7 +3164,7 @@
         </p:nvSpPr>
         <p:spPr>
           <a:xfrm>
-            <a:off x="777240" y="2048256"/>
+            <a:off x="777240" y="2505456"/>
             <a:ext cx="10607040" cy="1005840"/>
           </a:xfrm>
           <a:prstGeom prst="rect">
@@ -3199,7 +3199,7 @@
         </p:nvCxnSpPr>
         <p:spPr>
           <a:xfrm>
-            <a:off x="3291840" y="3255264"/>
+            <a:off x="3291840" y="3712464"/>
             <a:ext cx="5577840" cy="0"/>
           </a:xfrm>
           <a:prstGeom prst="line">
@@ -3234,7 +3234,7 @@
         </p:nvCxnSpPr>
         <p:spPr>
           <a:xfrm>
-            <a:off x="3291840" y="3337560"/>
+            <a:off x="3291840" y="3794760"/>
             <a:ext cx="5577840" cy="0"/>
           </a:xfrm>
           <a:prstGeom prst="line">
@@ -3269,7 +3269,7 @@
         </p:nvSpPr>
         <p:spPr>
           <a:xfrm>
-            <a:off x="777240" y="3502152"/>
+            <a:off x="777240" y="3959352"/>
             <a:ext cx="10607040" cy="310896"/>
           </a:xfrm>
           <a:prstGeom prst="rect">
@@ -3304,7 +3304,7 @@
         </p:nvSpPr>
         <p:spPr>
           <a:xfrm>
-            <a:off x="777240" y="3840480"/>
+            <a:off x="777240" y="4297680"/>
             <a:ext cx="10607040" cy="731520"/>
           </a:xfrm>
           <a:prstGeom prst="rect">
@@ -3327,129 +3327,13 @@
                 <a:latin typeface="Century Schoolbook"/>
               </a:rPr>
               <a:t>I can multiply and divide two numbers written in scientific notation, and write the answer in scientific notation.</a:t>
-            </a:r>
-          </a:p>
-        </p:txBody>
-      </p:sp>
-      <p:sp>
-        <p:nvSpPr>
-          <p:cNvPr id="8" name="Rectangle 7"/>
-          <p:cNvSpPr/>
-          <p:nvPr/>
-        </p:nvSpPr>
-        <p:spPr>
-          <a:xfrm>
-            <a:off x="2377440" y="4736592"/>
-            <a:ext cx="7406640" cy="1051560"/>
-          </a:xfrm>
-          <a:prstGeom prst="rect">
-            <a:avLst/>
-          </a:prstGeom>
-          <a:solidFill>
-            <a:srgbClr val="F2F2F0"/>
-          </a:solidFill>
-          <a:ln w="9525">
-            <a:solidFill>
-              <a:srgbClr val="BFBFBF"/>
-            </a:solidFill>
-          </a:ln>
-          <a:effectLst/>
-        </p:spPr>
-        <p:style>
-          <a:lnRef idx="1">
-            <a:schemeClr val="accent1"/>
-          </a:lnRef>
-          <a:fillRef idx="3">
-            <a:schemeClr val="accent1"/>
-          </a:fillRef>
-          <a:effectRef idx="2">
-            <a:schemeClr val="accent1"/>
-          </a:effectRef>
-          <a:fontRef idx="minor">
-            <a:schemeClr val="lt1"/>
-          </a:fontRef>
-        </p:style>
-        <p:txBody>
-          <a:bodyPr rtlCol="0" anchor="ctr"/>
-          <a:lstStyle/>
-          <a:p>
-            <a:pPr algn="ctr"/>
-          </a:p>
-        </p:txBody>
-      </p:sp>
-      <p:sp>
-        <p:nvSpPr>
-          <p:cNvPr id="9" name="TextBox 8"/>
-          <p:cNvSpPr txBox="1"/>
-          <p:nvPr/>
-        </p:nvSpPr>
-        <p:spPr>
-          <a:xfrm>
-            <a:off x="2606040" y="4892040"/>
-            <a:ext cx="6949440" cy="365760"/>
-          </a:xfrm>
-          <a:prstGeom prst="rect">
-            <a:avLst/>
-          </a:prstGeom>
-          <a:noFill/>
-        </p:spPr>
-        <p:txBody>
-          <a:bodyPr wrap="square" lIns="45720" rIns="45720" tIns="18288" bIns="18288" anchor="t">
-            <a:spAutoFit/>
-          </a:bodyPr>
-          <a:lstStyle/>
-          <a:p>
-            <a:pPr algn="ctr"/>
-            <a:r>
-              <a:rPr sz="1700" b="0" i="1">
-                <a:solidFill>
-                  <a:srgbClr val="6B6B6B"/>
-                </a:solidFill>
-                <a:latin typeface="Century Schoolbook"/>
-              </a:rPr>
-              <a:t>Yesterday the powers of ten had to match before you could add.</a:t>
-            </a:r>
-          </a:p>
-        </p:txBody>
-      </p:sp>
-      <p:sp>
-        <p:nvSpPr>
-          <p:cNvPr id="10" name="TextBox 9"/>
-          <p:cNvSpPr txBox="1"/>
-          <p:nvPr/>
-        </p:nvSpPr>
-        <p:spPr>
-          <a:xfrm>
-            <a:off x="2606040" y="5276088"/>
-            <a:ext cx="6949440" cy="365760"/>
-          </a:xfrm>
-          <a:prstGeom prst="rect">
-            <a:avLst/>
-          </a:prstGeom>
-          <a:noFill/>
-        </p:spPr>
-        <p:txBody>
-          <a:bodyPr wrap="square" lIns="45720" rIns="45720" tIns="18288" bIns="18288" anchor="t">
-            <a:spAutoFit/>
-          </a:bodyPr>
-          <a:lstStyle/>
-          <a:p>
-            <a:pPr algn="ctr"/>
-            <a:r>
-              <a:rPr sz="1700" b="1" i="0">
-                <a:solidFill>
-                  <a:srgbClr val="1A1A1A"/>
-                </a:solidFill>
-                <a:latin typeface="Century Schoolbook"/>
-              </a:rPr>
-              <a:t>Today the powers of ten do not have to match at all.</a:t>
             </a:r>
           </a:p>
         </p:txBody>
       </p:sp>
       <p:cxnSp>
         <p:nvCxnSpPr>
-          <p:cNvPr id="11" name="Connector 10"/>
+          <p:cNvPr id="8" name="Connector 7"/>
           <p:cNvCxnSpPr/>
           <p:nvPr/>
         </p:nvCxnSpPr>
@@ -3484,7 +3368,7 @@
       </p:cxnSp>
       <p:sp>
         <p:nvSpPr>
-          <p:cNvPr id="12" name="TextBox 11"/>
+          <p:cNvPr id="9" name="TextBox 8"/>
           <p:cNvSpPr txBox="1"/>
           <p:nvPr/>
         </p:nvSpPr>
@@ -3519,7 +3403,7 @@
       </p:sp>
       <p:sp>
         <p:nvSpPr>
-          <p:cNvPr id="13" name="TextBox 12"/>
+          <p:cNvPr id="10" name="TextBox 9"/>
           <p:cNvSpPr txBox="1"/>
           <p:nvPr/>
         </p:nvSpPr>
@@ -3675,44 +3559,9 @@
           </a:fontRef>
         </p:style>
       </p:cxnSp>
-      <p:sp>
-        <p:nvSpPr>
-          <p:cNvPr id="5" name="TextBox 4"/>
-          <p:cNvSpPr txBox="1"/>
-          <p:nvPr/>
-        </p:nvSpPr>
-        <p:spPr>
-          <a:xfrm>
-            <a:off x="777240" y="1261872"/>
-            <a:ext cx="10607040" cy="310896"/>
-          </a:xfrm>
-          <a:prstGeom prst="rect">
-            <a:avLst/>
-          </a:prstGeom>
-          <a:noFill/>
-        </p:spPr>
-        <p:txBody>
-          <a:bodyPr wrap="square" lIns="45720" rIns="45720" tIns="18288" bIns="18288" anchor="t">
-            <a:spAutoFit/>
-          </a:bodyPr>
-          <a:lstStyle/>
-          <a:p>
-            <a:pPr algn="l"/>
-            <a:r>
-              <a:rPr sz="1700" b="0" i="1">
-                <a:solidFill>
-                  <a:srgbClr val="6B6B6B"/>
-                </a:solidFill>
-                <a:latin typeface="Century Schoolbook"/>
-              </a:rPr>
-              <a:t>Answer.</a:t>
-            </a:r>
-          </a:p>
-        </p:txBody>
-      </p:sp>
       <p:cxnSp>
         <p:nvCxnSpPr>
-          <p:cNvPr id="6" name="Connector 5"/>
+          <p:cNvPr id="5" name="Connector 4"/>
           <p:cNvCxnSpPr/>
           <p:nvPr/>
         </p:nvCxnSpPr>
@@ -3747,7 +3596,7 @@
       </p:cxnSp>
       <p:sp>
         <p:nvSpPr>
-          <p:cNvPr id="7" name="TextBox 6"/>
+          <p:cNvPr id="6" name="TextBox 5"/>
           <p:cNvSpPr txBox="1"/>
           <p:nvPr/>
         </p:nvSpPr>
@@ -3782,7 +3631,7 @@
       </p:sp>
       <p:sp>
         <p:nvSpPr>
-          <p:cNvPr id="8" name="TextBox 7"/>
+          <p:cNvPr id="7" name="TextBox 6"/>
           <p:cNvSpPr txBox="1"/>
           <p:nvPr/>
         </p:nvSpPr>
@@ -3817,7 +3666,7 @@
       </p:sp>
       <p:pic>
         <p:nvPicPr>
-          <p:cNvPr id="9" name="Picture 8" descr="02a20b9238011d7b.png"/>
+          <p:cNvPr id="8" name="Picture 7" descr="02a20b9238011d7b.png"/>
           <p:cNvPicPr>
             <a:picLocks noChangeAspect="1"/>
           </p:cNvPicPr>
@@ -3841,60 +3690,42 @@
       </p:pic>
       <p:sp>
         <p:nvSpPr>
+          <p:cNvPr id="9" name="TextBox 8"/>
+          <p:cNvSpPr txBox="1"/>
+          <p:nvPr/>
+        </p:nvSpPr>
+        <p:spPr>
+          <a:xfrm>
+            <a:off x="777240" y="3218688"/>
+            <a:ext cx="10607040" cy="429370"/>
+          </a:xfrm>
+          <a:prstGeom prst="rect">
+            <a:avLst/>
+          </a:prstGeom>
+          <a:noFill/>
+        </p:spPr>
+        <p:txBody>
+          <a:bodyPr wrap="square" lIns="45720" rIns="45720" tIns="18288" bIns="18288" anchor="t">
+            <a:spAutoFit/>
+          </a:bodyPr>
+          <a:lstStyle/>
+          <a:p>
+            <a:pPr algn="ctr"/>
+            <a:r>
+              <a:rPr sz="2400" b="1" i="0">
+                <a:solidFill>
+                  <a:srgbClr val="1A1A1A"/>
+                </a:solidFill>
+                <a:latin typeface="Century Schoolbook"/>
+              </a:rPr>
+              <a:t>Multiply. Write the answer in scientific notation.</a:t>
+            </a:r>
+          </a:p>
+        </p:txBody>
+      </p:sp>
+      <p:sp>
+        <p:nvSpPr>
           <p:cNvPr id="10" name="TextBox 9"/>
-          <p:cNvSpPr txBox="1"/>
-          <p:nvPr/>
-        </p:nvSpPr>
-        <p:spPr>
-          <a:xfrm>
-            <a:off x="777240" y="3035808"/>
-            <a:ext cx="10607040" cy="429370"/>
-          </a:xfrm>
-          <a:prstGeom prst="rect">
-            <a:avLst/>
-          </a:prstGeom>
-          <a:noFill/>
-        </p:spPr>
-        <p:txBody>
-          <a:bodyPr wrap="square" lIns="45720" rIns="45720" tIns="18288" bIns="18288" anchor="t">
-            <a:spAutoFit/>
-          </a:bodyPr>
-          <a:lstStyle/>
-          <a:p>
-            <a:pPr algn="ctr"/>
-            <a:r>
-              <a:rPr sz="2400" b="0" i="0">
-                <a:solidFill>
-                  <a:srgbClr val="6B6B6B"/>
-                </a:solidFill>
-                <a:latin typeface="Century Schoolbook"/>
-              </a:rPr>
-              <a:t>20 × 10</a:t>
-            </a:r>
-            <a:r>
-              <a:rPr sz="2400" b="0" i="0" baseline="30000">
-                <a:solidFill>
-                  <a:srgbClr val="6B6B6B"/>
-                </a:solidFill>
-                <a:latin typeface="Century Schoolbook"/>
-              </a:rPr>
-              <a:t>4</a:t>
-            </a:r>
-            <a:r>
-              <a:rPr sz="2400" b="0" i="0">
-                <a:solidFill>
-                  <a:srgbClr val="6B6B6B"/>
-                </a:solidFill>
-                <a:latin typeface="Century Schoolbook"/>
-              </a:rPr>
-              <a:t>, then repair</a:t>
-            </a:r>
-          </a:p>
-        </p:txBody>
-      </p:sp>
-      <p:sp>
-        <p:nvSpPr>
-          <p:cNvPr id="11" name="TextBox 10"/>
           <p:cNvSpPr txBox="1"/>
           <p:nvPr/>
         </p:nvSpPr>
@@ -4059,44 +3890,9 @@
           </a:fontRef>
         </p:style>
       </p:cxnSp>
-      <p:sp>
-        <p:nvSpPr>
-          <p:cNvPr id="5" name="TextBox 4"/>
-          <p:cNvSpPr txBox="1"/>
-          <p:nvPr/>
-        </p:nvSpPr>
-        <p:spPr>
-          <a:xfrm>
-            <a:off x="777240" y="1261872"/>
-            <a:ext cx="10607040" cy="310896"/>
-          </a:xfrm>
-          <a:prstGeom prst="rect">
-            <a:avLst/>
-          </a:prstGeom>
-          <a:noFill/>
-        </p:spPr>
-        <p:txBody>
-          <a:bodyPr wrap="square" lIns="45720" rIns="45720" tIns="18288" bIns="18288" anchor="t">
-            <a:spAutoFit/>
-          </a:bodyPr>
-          <a:lstStyle/>
-          <a:p>
-            <a:pPr algn="l"/>
-            <a:r>
-              <a:rPr sz="1700" b="0" i="1">
-                <a:solidFill>
-                  <a:srgbClr val="6B6B6B"/>
-                </a:solidFill>
-                <a:latin typeface="Century Schoolbook"/>
-              </a:rPr>
-              <a:t>Multiplication and division in one expression.</a:t>
-            </a:r>
-          </a:p>
-        </p:txBody>
-      </p:sp>
       <p:cxnSp>
         <p:nvCxnSpPr>
-          <p:cNvPr id="6" name="Connector 5"/>
+          <p:cNvPr id="5" name="Connector 4"/>
           <p:cNvCxnSpPr/>
           <p:nvPr/>
         </p:nvCxnSpPr>
@@ -4131,7 +3927,7 @@
       </p:cxnSp>
       <p:sp>
         <p:nvSpPr>
-          <p:cNvPr id="7" name="TextBox 6"/>
+          <p:cNvPr id="6" name="TextBox 5"/>
           <p:cNvSpPr txBox="1"/>
           <p:nvPr/>
         </p:nvSpPr>
@@ -4166,7 +3962,7 @@
       </p:sp>
       <p:sp>
         <p:nvSpPr>
-          <p:cNvPr id="8" name="TextBox 7"/>
+          <p:cNvPr id="7" name="TextBox 6"/>
           <p:cNvSpPr txBox="1"/>
           <p:nvPr/>
         </p:nvSpPr>
@@ -4201,7 +3997,7 @@
       </p:sp>
       <p:pic>
         <p:nvPicPr>
-          <p:cNvPr id="9" name="Picture 8" descr="d048c7fc436d6617.png"/>
+          <p:cNvPr id="8" name="Picture 7" descr="d048c7fc436d6617.png"/>
           <p:cNvPicPr>
             <a:picLocks noChangeAspect="1"/>
           </p:cNvPicPr>
@@ -4225,7 +4021,7 @@
       </p:pic>
       <p:sp>
         <p:nvSpPr>
-          <p:cNvPr id="10" name="TextBox 9"/>
+          <p:cNvPr id="9" name="TextBox 8"/>
           <p:cNvSpPr txBox="1"/>
           <p:nvPr/>
         </p:nvSpPr>
@@ -4381,44 +4177,9 @@
           </a:fontRef>
         </p:style>
       </p:cxnSp>
-      <p:sp>
-        <p:nvSpPr>
-          <p:cNvPr id="5" name="TextBox 4"/>
-          <p:cNvSpPr txBox="1"/>
-          <p:nvPr/>
-        </p:nvSpPr>
-        <p:spPr>
-          <a:xfrm>
-            <a:off x="777240" y="1261872"/>
-            <a:ext cx="10607040" cy="310896"/>
-          </a:xfrm>
-          <a:prstGeom prst="rect">
-            <a:avLst/>
-          </a:prstGeom>
-          <a:noFill/>
-        </p:spPr>
-        <p:txBody>
-          <a:bodyPr wrap="square" lIns="45720" rIns="45720" tIns="18288" bIns="18288" anchor="t">
-            <a:spAutoFit/>
-          </a:bodyPr>
-          <a:lstStyle/>
-          <a:p>
-            <a:pPr algn="l"/>
-            <a:r>
-              <a:rPr sz="1700" b="0" i="1">
-                <a:solidFill>
-                  <a:srgbClr val="6B6B6B"/>
-                </a:solidFill>
-                <a:latin typeface="Century Schoolbook"/>
-              </a:rPr>
-              <a:t>Worked.</a:t>
-            </a:r>
-          </a:p>
-        </p:txBody>
-      </p:sp>
       <p:cxnSp>
         <p:nvCxnSpPr>
-          <p:cNvPr id="6" name="Connector 5"/>
+          <p:cNvPr id="5" name="Connector 4"/>
           <p:cNvCxnSpPr/>
           <p:nvPr/>
         </p:nvCxnSpPr>
@@ -4453,7 +4214,7 @@
       </p:cxnSp>
       <p:sp>
         <p:nvSpPr>
-          <p:cNvPr id="7" name="TextBox 6"/>
+          <p:cNvPr id="6" name="TextBox 5"/>
           <p:cNvSpPr txBox="1"/>
           <p:nvPr/>
         </p:nvSpPr>
@@ -4488,7 +4249,7 @@
       </p:sp>
       <p:sp>
         <p:nvSpPr>
-          <p:cNvPr id="8" name="TextBox 7"/>
+          <p:cNvPr id="7" name="TextBox 6"/>
           <p:cNvSpPr txBox="1"/>
           <p:nvPr/>
         </p:nvSpPr>
@@ -4523,7 +4284,7 @@
       </p:sp>
       <p:pic>
         <p:nvPicPr>
-          <p:cNvPr id="9" name="Picture 8" descr="6b3f0849106cd4b7.png"/>
+          <p:cNvPr id="8" name="Picture 7" descr="6b3f0849106cd4b7.png"/>
           <p:cNvPicPr>
             <a:picLocks noChangeAspect="1"/>
           </p:cNvPicPr>
@@ -4545,44 +4306,9 @@
           </a:prstGeom>
         </p:spPr>
       </p:pic>
-      <p:sp>
-        <p:nvSpPr>
-          <p:cNvPr id="10" name="TextBox 9"/>
-          <p:cNvSpPr txBox="1"/>
-          <p:nvPr/>
-        </p:nvSpPr>
-        <p:spPr>
-          <a:xfrm>
-            <a:off x="7147560" y="1897380"/>
-            <a:ext cx="4236720" cy="502920"/>
-          </a:xfrm>
-          <a:prstGeom prst="rect">
-            <a:avLst/>
-          </a:prstGeom>
-          <a:noFill/>
-        </p:spPr>
-        <p:txBody>
-          <a:bodyPr wrap="square" lIns="45720" rIns="45720" tIns="18288" bIns="18288" anchor="ctr">
-            <a:spAutoFit/>
-          </a:bodyPr>
-          <a:lstStyle/>
-          <a:p>
-            <a:pPr algn="l"/>
-            <a:r>
-              <a:rPr sz="2100" b="0" i="1">
-                <a:solidFill>
-                  <a:srgbClr val="6B6B6B"/>
-                </a:solidFill>
-                <a:latin typeface="Century Schoolbook"/>
-              </a:rPr>
-              <a:t>the top, regrouped</a:t>
-            </a:r>
-          </a:p>
-        </p:txBody>
-      </p:sp>
       <p:pic>
         <p:nvPicPr>
-          <p:cNvPr id="11" name="Picture 10" descr="1c6ad9425b8dfd75.png"/>
+          <p:cNvPr id="9" name="Picture 8" descr="1c6ad9425b8dfd75.png"/>
           <p:cNvPicPr>
             <a:picLocks noChangeAspect="1"/>
           </p:cNvPicPr>
@@ -4604,44 +4330,9 @@
           </a:prstGeom>
         </p:spPr>
       </p:pic>
-      <p:sp>
-        <p:nvSpPr>
-          <p:cNvPr id="12" name="TextBox 11"/>
-          <p:cNvSpPr txBox="1"/>
-          <p:nvPr/>
-        </p:nvSpPr>
-        <p:spPr>
-          <a:xfrm>
-            <a:off x="5425440" y="2790444"/>
-            <a:ext cx="5958839" cy="502920"/>
-          </a:xfrm>
-          <a:prstGeom prst="rect">
-            <a:avLst/>
-          </a:prstGeom>
-          <a:noFill/>
-        </p:spPr>
-        <p:txBody>
-          <a:bodyPr wrap="square" lIns="45720" rIns="45720" tIns="18288" bIns="18288" anchor="ctr">
-            <a:spAutoFit/>
-          </a:bodyPr>
-          <a:lstStyle/>
-          <a:p>
-            <a:pPr algn="l"/>
-            <a:r>
-              <a:rPr sz="2100" b="0" i="1">
-                <a:solidFill>
-                  <a:srgbClr val="6B6B6B"/>
-                </a:solidFill>
-                <a:latin typeface="Century Schoolbook"/>
-              </a:rPr>
-              <a:t>divide the coefficients, subtract the exponents</a:t>
-            </a:r>
-          </a:p>
-        </p:txBody>
-      </p:sp>
       <p:pic>
         <p:nvPicPr>
-          <p:cNvPr id="13" name="Picture 12" descr="6aefb1689d23fb3c.png"/>
+          <p:cNvPr id="10" name="Picture 9" descr="6aefb1689d23fb3c.png"/>
           <p:cNvPicPr>
             <a:picLocks noChangeAspect="1"/>
           </p:cNvPicPr>
@@ -4665,42 +4356,7 @@
       </p:pic>
       <p:sp>
         <p:nvSpPr>
-          <p:cNvPr id="14" name="TextBox 13"/>
-          <p:cNvSpPr txBox="1"/>
-          <p:nvPr/>
-        </p:nvSpPr>
-        <p:spPr>
-          <a:xfrm>
-            <a:off x="5419344" y="3654552"/>
-            <a:ext cx="5964935" cy="502920"/>
-          </a:xfrm>
-          <a:prstGeom prst="rect">
-            <a:avLst/>
-          </a:prstGeom>
-          <a:noFill/>
-        </p:spPr>
-        <p:txBody>
-          <a:bodyPr wrap="square" lIns="45720" rIns="45720" tIns="18288" bIns="18288" anchor="ctr">
-            <a:spAutoFit/>
-          </a:bodyPr>
-          <a:lstStyle/>
-          <a:p>
-            <a:pPr algn="l"/>
-            <a:r>
-              <a:rPr sz="2100" b="0" i="1">
-                <a:solidFill>
-                  <a:srgbClr val="6B6B6B"/>
-                </a:solidFill>
-                <a:latin typeface="Century Schoolbook"/>
-              </a:rPr>
-              <a:t>finish</a:t>
-            </a:r>
-          </a:p>
-        </p:txBody>
-      </p:sp>
-      <p:sp>
-        <p:nvSpPr>
-          <p:cNvPr id="15" name="TextBox 14"/>
+          <p:cNvPr id="11" name="TextBox 10"/>
           <p:cNvSpPr txBox="1"/>
           <p:nvPr/>
         </p:nvSpPr>
@@ -4865,44 +4521,9 @@
           </a:fontRef>
         </p:style>
       </p:cxnSp>
-      <p:sp>
-        <p:nvSpPr>
-          <p:cNvPr id="5" name="TextBox 4"/>
-          <p:cNvSpPr txBox="1"/>
-          <p:nvPr/>
-        </p:nvSpPr>
-        <p:spPr>
-          <a:xfrm>
-            <a:off x="777240" y="1261872"/>
-            <a:ext cx="10607040" cy="310896"/>
-          </a:xfrm>
-          <a:prstGeom prst="rect">
-            <a:avLst/>
-          </a:prstGeom>
-          <a:noFill/>
-        </p:spPr>
-        <p:txBody>
-          <a:bodyPr wrap="square" lIns="45720" rIns="45720" tIns="18288" bIns="18288" anchor="t">
-            <a:spAutoFit/>
-          </a:bodyPr>
-          <a:lstStyle/>
-          <a:p>
-            <a:pPr algn="l"/>
-            <a:r>
-              <a:rPr sz="1700" b="0" i="1">
-                <a:solidFill>
-                  <a:srgbClr val="6B6B6B"/>
-                </a:solidFill>
-                <a:latin typeface="Century Schoolbook"/>
-              </a:rPr>
-              <a:t>Same steps, your numbers. Boards up when done.</a:t>
-            </a:r>
-          </a:p>
-        </p:txBody>
-      </p:sp>
       <p:cxnSp>
         <p:nvCxnSpPr>
-          <p:cNvPr id="6" name="Connector 5"/>
+          <p:cNvPr id="5" name="Connector 4"/>
           <p:cNvCxnSpPr/>
           <p:nvPr/>
         </p:nvCxnSpPr>
@@ -4937,7 +4558,7 @@
       </p:cxnSp>
       <p:sp>
         <p:nvSpPr>
-          <p:cNvPr id="7" name="TextBox 6"/>
+          <p:cNvPr id="6" name="TextBox 5"/>
           <p:cNvSpPr txBox="1"/>
           <p:nvPr/>
         </p:nvSpPr>
@@ -4972,7 +4593,7 @@
       </p:sp>
       <p:sp>
         <p:nvSpPr>
-          <p:cNvPr id="8" name="TextBox 7"/>
+          <p:cNvPr id="7" name="TextBox 6"/>
           <p:cNvSpPr txBox="1"/>
           <p:nvPr/>
         </p:nvSpPr>
@@ -5007,7 +4628,7 @@
       </p:sp>
       <p:pic>
         <p:nvPicPr>
-          <p:cNvPr id="9" name="Picture 8" descr="d9eedbeb2084bf5c.png"/>
+          <p:cNvPr id="8" name="Picture 7" descr="d9eedbeb2084bf5c.png"/>
           <p:cNvPicPr>
             <a:picLocks noChangeAspect="1"/>
           </p:cNvPicPr>
@@ -5029,6 +4650,41 @@
           </a:prstGeom>
         </p:spPr>
       </p:pic>
+      <p:sp>
+        <p:nvSpPr>
+          <p:cNvPr id="9" name="TextBox 8"/>
+          <p:cNvSpPr txBox="1"/>
+          <p:nvPr/>
+        </p:nvSpPr>
+        <p:spPr>
+          <a:xfrm>
+            <a:off x="777240" y="3806952"/>
+            <a:ext cx="10607040" cy="429370"/>
+          </a:xfrm>
+          <a:prstGeom prst="rect">
+            <a:avLst/>
+          </a:prstGeom>
+          <a:noFill/>
+        </p:spPr>
+        <p:txBody>
+          <a:bodyPr wrap="square" lIns="45720" rIns="45720" tIns="18288" bIns="18288" anchor="t">
+            <a:spAutoFit/>
+          </a:bodyPr>
+          <a:lstStyle/>
+          <a:p>
+            <a:pPr algn="ctr"/>
+            <a:r>
+              <a:rPr sz="2400" b="1" i="0">
+                <a:solidFill>
+                  <a:srgbClr val="1A1A1A"/>
+                </a:solidFill>
+                <a:latin typeface="Century Schoolbook"/>
+              </a:rPr>
+              <a:t>Evaluate. Write the answer in scientific notation.</a:t>
+            </a:r>
+          </a:p>
+        </p:txBody>
+      </p:sp>
     </p:spTree>
   </p:cSld>
   <p:clrMapOvr>
@@ -5152,44 +4808,9 @@
           </a:fontRef>
         </p:style>
       </p:cxnSp>
-      <p:sp>
-        <p:nvSpPr>
-          <p:cNvPr id="5" name="TextBox 4"/>
-          <p:cNvSpPr txBox="1"/>
-          <p:nvPr/>
-        </p:nvSpPr>
-        <p:spPr>
-          <a:xfrm>
-            <a:off x="777240" y="1261872"/>
-            <a:ext cx="10607040" cy="310896"/>
-          </a:xfrm>
-          <a:prstGeom prst="rect">
-            <a:avLst/>
-          </a:prstGeom>
-          <a:noFill/>
-        </p:spPr>
-        <p:txBody>
-          <a:bodyPr wrap="square" lIns="45720" rIns="45720" tIns="18288" bIns="18288" anchor="t">
-            <a:spAutoFit/>
-          </a:bodyPr>
-          <a:lstStyle/>
-          <a:p>
-            <a:pPr algn="l"/>
-            <a:r>
-              <a:rPr sz="1700" b="0" i="1">
-                <a:solidFill>
-                  <a:srgbClr val="6B6B6B"/>
-                </a:solidFill>
-                <a:latin typeface="Century Schoolbook"/>
-              </a:rPr>
-              <a:t>Answer.</a:t>
-            </a:r>
-          </a:p>
-        </p:txBody>
-      </p:sp>
       <p:cxnSp>
         <p:nvCxnSpPr>
-          <p:cNvPr id="6" name="Connector 5"/>
+          <p:cNvPr id="5" name="Connector 4"/>
           <p:cNvCxnSpPr/>
           <p:nvPr/>
         </p:nvCxnSpPr>
@@ -5224,7 +4845,7 @@
       </p:cxnSp>
       <p:sp>
         <p:nvSpPr>
-          <p:cNvPr id="7" name="TextBox 6"/>
+          <p:cNvPr id="6" name="TextBox 5"/>
           <p:cNvSpPr txBox="1"/>
           <p:nvPr/>
         </p:nvSpPr>
@@ -5259,7 +4880,7 @@
       </p:sp>
       <p:sp>
         <p:nvSpPr>
-          <p:cNvPr id="8" name="TextBox 7"/>
+          <p:cNvPr id="7" name="TextBox 6"/>
           <p:cNvSpPr txBox="1"/>
           <p:nvPr/>
         </p:nvSpPr>
@@ -5294,7 +4915,7 @@
       </p:sp>
       <p:pic>
         <p:nvPicPr>
-          <p:cNvPr id="9" name="Picture 8" descr="914658bc6d4d66f9.png"/>
+          <p:cNvPr id="8" name="Picture 7" descr="914658bc6d4d66f9.png"/>
           <p:cNvPicPr>
             <a:picLocks noChangeAspect="1"/>
           </p:cNvPicPr>
@@ -5318,69 +4939,42 @@
       </p:pic>
       <p:sp>
         <p:nvSpPr>
+          <p:cNvPr id="9" name="TextBox 8"/>
+          <p:cNvSpPr txBox="1"/>
+          <p:nvPr/>
+        </p:nvSpPr>
+        <p:spPr>
+          <a:xfrm>
+            <a:off x="777240" y="3806952"/>
+            <a:ext cx="10607040" cy="429370"/>
+          </a:xfrm>
+          <a:prstGeom prst="rect">
+            <a:avLst/>
+          </a:prstGeom>
+          <a:noFill/>
+        </p:spPr>
+        <p:txBody>
+          <a:bodyPr wrap="square" lIns="45720" rIns="45720" tIns="18288" bIns="18288" anchor="t">
+            <a:spAutoFit/>
+          </a:bodyPr>
+          <a:lstStyle/>
+          <a:p>
+            <a:pPr algn="ctr"/>
+            <a:r>
+              <a:rPr sz="2400" b="1" i="0">
+                <a:solidFill>
+                  <a:srgbClr val="1A1A1A"/>
+                </a:solidFill>
+                <a:latin typeface="Century Schoolbook"/>
+              </a:rPr>
+              <a:t>Evaluate. Write the answer in scientific notation.</a:t>
+            </a:r>
+          </a:p>
+        </p:txBody>
+      </p:sp>
+      <p:sp>
+        <p:nvSpPr>
           <p:cNvPr id="10" name="TextBox 9"/>
-          <p:cNvSpPr txBox="1"/>
-          <p:nvPr/>
-        </p:nvSpPr>
-        <p:spPr>
-          <a:xfrm>
-            <a:off x="777240" y="3624072"/>
-            <a:ext cx="10607040" cy="429370"/>
-          </a:xfrm>
-          <a:prstGeom prst="rect">
-            <a:avLst/>
-          </a:prstGeom>
-          <a:noFill/>
-        </p:spPr>
-        <p:txBody>
-          <a:bodyPr wrap="square" lIns="45720" rIns="45720" tIns="18288" bIns="18288" anchor="t">
-            <a:spAutoFit/>
-          </a:bodyPr>
-          <a:lstStyle/>
-          <a:p>
-            <a:pPr algn="ctr"/>
-            <a:r>
-              <a:rPr sz="2400" b="0" i="0">
-                <a:solidFill>
-                  <a:srgbClr val="6B6B6B"/>
-                </a:solidFill>
-                <a:latin typeface="Century Schoolbook"/>
-              </a:rPr>
-              <a:t>24 × 10</a:t>
-            </a:r>
-            <a:r>
-              <a:rPr sz="2400" b="0" i="0" baseline="30000">
-                <a:solidFill>
-                  <a:srgbClr val="6B6B6B"/>
-                </a:solidFill>
-                <a:latin typeface="Century Schoolbook"/>
-              </a:rPr>
-              <a:t>2</a:t>
-            </a:r>
-            <a:r>
-              <a:rPr sz="2400" b="0" i="0">
-                <a:solidFill>
-                  <a:srgbClr val="6B6B6B"/>
-                </a:solidFill>
-                <a:latin typeface="Century Schoolbook"/>
-              </a:rPr>
-              <a:t> over 8 × 10</a:t>
-            </a:r>
-            <a:r>
-              <a:rPr sz="2400" b="0" i="0" baseline="30000">
-                <a:solidFill>
-                  <a:srgbClr val="6B6B6B"/>
-                </a:solidFill>
-                <a:latin typeface="Century Schoolbook"/>
-              </a:rPr>
-              <a:t>4</a:t>
-            </a:r>
-          </a:p>
-        </p:txBody>
-      </p:sp>
-      <p:sp>
-        <p:nvSpPr>
-          <p:cNvPr id="11" name="TextBox 10"/>
           <p:cNvSpPr txBox="1"/>
           <p:nvPr/>
         </p:nvSpPr>
@@ -5545,44 +5139,9 @@
           </a:fontRef>
         </p:style>
       </p:cxnSp>
-      <p:sp>
-        <p:nvSpPr>
-          <p:cNvPr id="5" name="TextBox 4"/>
-          <p:cNvSpPr txBox="1"/>
-          <p:nvPr/>
-        </p:nvSpPr>
-        <p:spPr>
-          <a:xfrm>
-            <a:off x="777240" y="1261872"/>
-            <a:ext cx="10607040" cy="310896"/>
-          </a:xfrm>
-          <a:prstGeom prst="rect">
-            <a:avLst/>
-          </a:prstGeom>
-          <a:noFill/>
-        </p:spPr>
-        <p:txBody>
-          <a:bodyPr wrap="square" lIns="45720" rIns="45720" tIns="18288" bIns="18288" anchor="t">
-            <a:spAutoFit/>
-          </a:bodyPr>
-          <a:lstStyle/>
-          <a:p>
-            <a:pPr algn="l"/>
-            <a:r>
-              <a:rPr sz="1700" b="0" i="1">
-                <a:solidFill>
-                  <a:srgbClr val="6B6B6B"/>
-                </a:solidFill>
-                <a:latin typeface="Century Schoolbook"/>
-              </a:rPr>
-              <a:t>Boards up on three.</a:t>
-            </a:r>
-          </a:p>
-        </p:txBody>
-      </p:sp>
       <p:cxnSp>
         <p:nvCxnSpPr>
-          <p:cNvPr id="6" name="Connector 5"/>
+          <p:cNvPr id="5" name="Connector 4"/>
           <p:cNvCxnSpPr/>
           <p:nvPr/>
         </p:nvCxnSpPr>
@@ -5617,7 +5176,7 @@
       </p:cxnSp>
       <p:sp>
         <p:nvSpPr>
-          <p:cNvPr id="7" name="TextBox 6"/>
+          <p:cNvPr id="6" name="TextBox 5"/>
           <p:cNvSpPr txBox="1"/>
           <p:nvPr/>
         </p:nvSpPr>
@@ -5652,7 +5211,7 @@
       </p:sp>
       <p:sp>
         <p:nvSpPr>
-          <p:cNvPr id="8" name="TextBox 7"/>
+          <p:cNvPr id="7" name="TextBox 6"/>
           <p:cNvSpPr txBox="1"/>
           <p:nvPr/>
         </p:nvSpPr>
@@ -5687,7 +5246,7 @@
       </p:sp>
       <p:pic>
         <p:nvPicPr>
-          <p:cNvPr id="9" name="Picture 8" descr="a47a82f506d1e533.png"/>
+          <p:cNvPr id="8" name="Picture 7" descr="a47a82f506d1e533.png"/>
           <p:cNvPicPr>
             <a:picLocks noChangeAspect="1"/>
           </p:cNvPicPr>
@@ -5711,7 +5270,7 @@
       </p:pic>
       <p:sp>
         <p:nvSpPr>
-          <p:cNvPr id="10" name="TextBox 9"/>
+          <p:cNvPr id="9" name="TextBox 8"/>
           <p:cNvSpPr txBox="1"/>
           <p:nvPr/>
         </p:nvSpPr>
@@ -5740,41 +5299,6 @@
                 <a:latin typeface="Century Schoolbook"/>
               </a:rPr>
               <a:t>Answer it.</a:t>
-            </a:r>
-          </a:p>
-        </p:txBody>
-      </p:sp>
-      <p:sp>
-        <p:nvSpPr>
-          <p:cNvPr id="11" name="TextBox 10"/>
-          <p:cNvSpPr txBox="1"/>
-          <p:nvPr/>
-        </p:nvSpPr>
-        <p:spPr>
-          <a:xfrm>
-            <a:off x="777240" y="4828032"/>
-            <a:ext cx="10607040" cy="365760"/>
-          </a:xfrm>
-          <a:prstGeom prst="rect">
-            <a:avLst/>
-          </a:prstGeom>
-          <a:noFill/>
-        </p:spPr>
-        <p:txBody>
-          <a:bodyPr wrap="square" lIns="45720" rIns="45720" tIns="18288" bIns="18288" anchor="t">
-            <a:spAutoFit/>
-          </a:bodyPr>
-          <a:lstStyle/>
-          <a:p>
-            <a:pPr algn="ctr"/>
-            <a:r>
-              <a:rPr sz="1900" b="0" i="1">
-                <a:solidFill>
-                  <a:srgbClr val="6B6B6B"/>
-                </a:solidFill>
-                <a:latin typeface="Century Schoolbook"/>
-              </a:rPr>
-              <a:t>Multiply the fronts, add the backs.</a:t>
             </a:r>
           </a:p>
         </p:txBody>
@@ -5902,44 +5426,9 @@
           </a:fontRef>
         </p:style>
       </p:cxnSp>
-      <p:sp>
-        <p:nvSpPr>
-          <p:cNvPr id="5" name="TextBox 4"/>
-          <p:cNvSpPr txBox="1"/>
-          <p:nvPr/>
-        </p:nvSpPr>
-        <p:spPr>
-          <a:xfrm>
-            <a:off x="777240" y="1261872"/>
-            <a:ext cx="10607040" cy="310896"/>
-          </a:xfrm>
-          <a:prstGeom prst="rect">
-            <a:avLst/>
-          </a:prstGeom>
-          <a:noFill/>
-        </p:spPr>
-        <p:txBody>
-          <a:bodyPr wrap="square" lIns="45720" rIns="45720" tIns="18288" bIns="18288" anchor="t">
-            <a:spAutoFit/>
-          </a:bodyPr>
-          <a:lstStyle/>
-          <a:p>
-            <a:pPr algn="l"/>
-            <a:r>
-              <a:rPr sz="1700" b="0" i="1">
-                <a:solidFill>
-                  <a:srgbClr val="6B6B6B"/>
-                </a:solidFill>
-                <a:latin typeface="Century Schoolbook"/>
-              </a:rPr>
-              <a:t>Answer.</a:t>
-            </a:r>
-          </a:p>
-        </p:txBody>
-      </p:sp>
       <p:cxnSp>
         <p:nvCxnSpPr>
-          <p:cNvPr id="6" name="Connector 5"/>
+          <p:cNvPr id="5" name="Connector 4"/>
           <p:cNvCxnSpPr/>
           <p:nvPr/>
         </p:nvCxnSpPr>
@@ -5974,7 +5463,7 @@
       </p:cxnSp>
       <p:sp>
         <p:nvSpPr>
-          <p:cNvPr id="7" name="TextBox 6"/>
+          <p:cNvPr id="6" name="TextBox 5"/>
           <p:cNvSpPr txBox="1"/>
           <p:nvPr/>
         </p:nvSpPr>
@@ -6009,7 +5498,7 @@
       </p:sp>
       <p:sp>
         <p:nvSpPr>
-          <p:cNvPr id="8" name="TextBox 7"/>
+          <p:cNvPr id="7" name="TextBox 6"/>
           <p:cNvSpPr txBox="1"/>
           <p:nvPr/>
         </p:nvSpPr>
@@ -6044,7 +5533,7 @@
       </p:sp>
       <p:pic>
         <p:nvPicPr>
-          <p:cNvPr id="9" name="Picture 8" descr="31fb752d70c62789.png"/>
+          <p:cNvPr id="8" name="Picture 7" descr="31fb752d70c62789.png"/>
           <p:cNvPicPr>
             <a:picLocks noChangeAspect="1"/>
           </p:cNvPicPr>
@@ -6068,69 +5557,7 @@
       </p:pic>
       <p:sp>
         <p:nvSpPr>
-          <p:cNvPr id="10" name="TextBox 9"/>
-          <p:cNvSpPr txBox="1"/>
-          <p:nvPr/>
-        </p:nvSpPr>
-        <p:spPr>
-          <a:xfrm>
-            <a:off x="1828800" y="2834639"/>
-            <a:ext cx="8503920" cy="548640"/>
-          </a:xfrm>
-          <a:prstGeom prst="rect">
-            <a:avLst/>
-          </a:prstGeom>
-          <a:noFill/>
-        </p:spPr>
-        <p:txBody>
-          <a:bodyPr wrap="square" lIns="45720" rIns="45720" tIns="18288" bIns="18288" anchor="t">
-            <a:spAutoFit/>
-          </a:bodyPr>
-          <a:lstStyle/>
-          <a:p>
-            <a:pPr algn="ctr"/>
-            <a:r>
-              <a:rPr sz="2400" b="0" i="0">
-                <a:solidFill>
-                  <a:srgbClr val="6B6B6B"/>
-                </a:solidFill>
-                <a:latin typeface="Century Schoolbook"/>
-              </a:rPr>
-              <a:t>3 · 2 and 10</a:t>
-            </a:r>
-            <a:r>
-              <a:rPr sz="2400" b="0" i="0" baseline="30000">
-                <a:solidFill>
-                  <a:srgbClr val="6B6B6B"/>
-                </a:solidFill>
-                <a:latin typeface="Century Schoolbook"/>
-              </a:rPr>
-              <a:t>4</a:t>
-            </a:r>
-            <a:r>
-              <a:rPr sz="2400" b="0" i="0">
-                <a:solidFill>
-                  <a:srgbClr val="6B6B6B"/>
-                </a:solidFill>
-                <a:latin typeface="Century Schoolbook"/>
-              </a:rPr>
-              <a:t> · 10</a:t>
-            </a:r>
-            <a:r>
-              <a:rPr sz="2400" b="0" i="0" baseline="30000">
-                <a:solidFill>
-                  <a:srgbClr val="6B6B6B"/>
-                </a:solidFill>
-                <a:latin typeface="Century Schoolbook"/>
-              </a:rPr>
-              <a:t>5</a:t>
-            </a:r>
-          </a:p>
-        </p:txBody>
-      </p:sp>
-      <p:sp>
-        <p:nvSpPr>
-          <p:cNvPr id="11" name="TextBox 10"/>
+          <p:cNvPr id="9" name="TextBox 8"/>
           <p:cNvSpPr txBox="1"/>
           <p:nvPr/>
         </p:nvSpPr>
@@ -6295,44 +5722,9 @@
           </a:fontRef>
         </p:style>
       </p:cxnSp>
-      <p:sp>
-        <p:nvSpPr>
-          <p:cNvPr id="5" name="TextBox 4"/>
-          <p:cNvSpPr txBox="1"/>
-          <p:nvPr/>
-        </p:nvSpPr>
-        <p:spPr>
-          <a:xfrm>
-            <a:off x="777240" y="1261872"/>
-            <a:ext cx="10607040" cy="310896"/>
-          </a:xfrm>
-          <a:prstGeom prst="rect">
-            <a:avLst/>
-          </a:prstGeom>
-          <a:noFill/>
-        </p:spPr>
-        <p:txBody>
-          <a:bodyPr wrap="square" lIns="45720" rIns="45720" tIns="18288" bIns="18288" anchor="t">
-            <a:spAutoFit/>
-          </a:bodyPr>
-          <a:lstStyle/>
-          <a:p>
-            <a:pPr algn="l"/>
-            <a:r>
-              <a:rPr sz="1700" b="0" i="1">
-                <a:solidFill>
-                  <a:srgbClr val="6B6B6B"/>
-                </a:solidFill>
-                <a:latin typeface="Century Schoolbook"/>
-              </a:rPr>
-              <a:t>Boards up on three.</a:t>
-            </a:r>
-          </a:p>
-        </p:txBody>
-      </p:sp>
       <p:cxnSp>
         <p:nvCxnSpPr>
-          <p:cNvPr id="6" name="Connector 5"/>
+          <p:cNvPr id="5" name="Connector 4"/>
           <p:cNvCxnSpPr/>
           <p:nvPr/>
         </p:nvCxnSpPr>
@@ -6367,7 +5759,7 @@
       </p:cxnSp>
       <p:sp>
         <p:nvSpPr>
-          <p:cNvPr id="7" name="TextBox 6"/>
+          <p:cNvPr id="6" name="TextBox 5"/>
           <p:cNvSpPr txBox="1"/>
           <p:nvPr/>
         </p:nvSpPr>
@@ -6402,7 +5794,7 @@
       </p:sp>
       <p:sp>
         <p:nvSpPr>
-          <p:cNvPr id="8" name="TextBox 7"/>
+          <p:cNvPr id="7" name="TextBox 6"/>
           <p:cNvSpPr txBox="1"/>
           <p:nvPr/>
         </p:nvSpPr>
@@ -6437,7 +5829,7 @@
       </p:sp>
       <p:sp>
         <p:nvSpPr>
-          <p:cNvPr id="9" name="TextBox 8"/>
+          <p:cNvPr id="8" name="TextBox 7"/>
           <p:cNvSpPr txBox="1"/>
           <p:nvPr/>
         </p:nvSpPr>
@@ -6472,7 +5864,7 @@
       </p:sp>
       <p:pic>
         <p:nvPicPr>
-          <p:cNvPr id="10" name="Picture 9" descr="813d8c543037484b.png"/>
+          <p:cNvPr id="9" name="Picture 8" descr="813d8c543037484b.png"/>
           <p:cNvPicPr>
             <a:picLocks noChangeAspect="1"/>
           </p:cNvPicPr>
@@ -6496,7 +5888,7 @@
       </p:pic>
       <p:sp>
         <p:nvSpPr>
-          <p:cNvPr id="11" name="TextBox 10"/>
+          <p:cNvPr id="10" name="TextBox 9"/>
           <p:cNvSpPr txBox="1"/>
           <p:nvPr/>
         </p:nvSpPr>
@@ -6531,7 +5923,7 @@
       </p:sp>
       <p:sp>
         <p:nvSpPr>
-          <p:cNvPr id="12" name="TextBox 11"/>
+          <p:cNvPr id="11" name="TextBox 10"/>
           <p:cNvSpPr txBox="1"/>
           <p:nvPr/>
         </p:nvSpPr>
@@ -6566,7 +5958,7 @@
       </p:sp>
       <p:pic>
         <p:nvPicPr>
-          <p:cNvPr id="13" name="Picture 12" descr="39bd69d20e0cfe64.png"/>
+          <p:cNvPr id="12" name="Picture 11" descr="39bd69d20e0cfe64.png"/>
           <p:cNvPicPr>
             <a:picLocks noChangeAspect="1"/>
           </p:cNvPicPr>
@@ -6590,7 +5982,7 @@
       </p:pic>
       <p:sp>
         <p:nvSpPr>
-          <p:cNvPr id="14" name="TextBox 13"/>
+          <p:cNvPr id="13" name="TextBox 12"/>
           <p:cNvSpPr txBox="1"/>
           <p:nvPr/>
         </p:nvSpPr>
@@ -6625,7 +6017,7 @@
       </p:sp>
       <p:sp>
         <p:nvSpPr>
-          <p:cNvPr id="15" name="TextBox 14"/>
+          <p:cNvPr id="14" name="TextBox 13"/>
           <p:cNvSpPr txBox="1"/>
           <p:nvPr/>
         </p:nvSpPr>
@@ -6660,7 +6052,7 @@
       </p:sp>
       <p:sp>
         <p:nvSpPr>
-          <p:cNvPr id="16" name="TextBox 15"/>
+          <p:cNvPr id="15" name="TextBox 14"/>
           <p:cNvSpPr txBox="1"/>
           <p:nvPr/>
         </p:nvSpPr>
@@ -6816,44 +6208,9 @@
           </a:fontRef>
         </p:style>
       </p:cxnSp>
-      <p:sp>
-        <p:nvSpPr>
-          <p:cNvPr id="5" name="TextBox 4"/>
-          <p:cNvSpPr txBox="1"/>
-          <p:nvPr/>
-        </p:nvSpPr>
-        <p:spPr>
-          <a:xfrm>
-            <a:off x="777240" y="1261872"/>
-            <a:ext cx="10607040" cy="310896"/>
-          </a:xfrm>
-          <a:prstGeom prst="rect">
-            <a:avLst/>
-          </a:prstGeom>
-          <a:noFill/>
-        </p:spPr>
-        <p:txBody>
-          <a:bodyPr wrap="square" lIns="45720" rIns="45720" tIns="18288" bIns="18288" anchor="t">
-            <a:spAutoFit/>
-          </a:bodyPr>
-          <a:lstStyle/>
-          <a:p>
-            <a:pPr algn="l"/>
-            <a:r>
-              <a:rPr sz="1700" b="0" i="1">
-                <a:solidFill>
-                  <a:srgbClr val="6B6B6B"/>
-                </a:solidFill>
-                <a:latin typeface="Century Schoolbook"/>
-              </a:rPr>
-              <a:t>Answer.</a:t>
-            </a:r>
-          </a:p>
-        </p:txBody>
-      </p:sp>
       <p:cxnSp>
         <p:nvCxnSpPr>
-          <p:cNvPr id="6" name="Connector 5"/>
+          <p:cNvPr id="5" name="Connector 4"/>
           <p:cNvCxnSpPr/>
           <p:nvPr/>
         </p:nvCxnSpPr>
@@ -6888,7 +6245,7 @@
       </p:cxnSp>
       <p:sp>
         <p:nvSpPr>
-          <p:cNvPr id="7" name="TextBox 6"/>
+          <p:cNvPr id="6" name="TextBox 5"/>
           <p:cNvSpPr txBox="1"/>
           <p:nvPr/>
         </p:nvSpPr>
@@ -6923,7 +6280,7 @@
       </p:sp>
       <p:sp>
         <p:nvSpPr>
-          <p:cNvPr id="8" name="TextBox 7"/>
+          <p:cNvPr id="7" name="TextBox 6"/>
           <p:cNvSpPr txBox="1"/>
           <p:nvPr/>
         </p:nvSpPr>
@@ -6958,7 +6315,7 @@
       </p:sp>
       <p:sp>
         <p:nvSpPr>
-          <p:cNvPr id="9" name="TextBox 8"/>
+          <p:cNvPr id="8" name="TextBox 7"/>
           <p:cNvSpPr txBox="1"/>
           <p:nvPr/>
         </p:nvSpPr>
@@ -6993,7 +6350,7 @@
       </p:sp>
       <p:pic>
         <p:nvPicPr>
-          <p:cNvPr id="10" name="Picture 9" descr="00df9fb5b7ec9fd3.png"/>
+          <p:cNvPr id="9" name="Picture 8" descr="00df9fb5b7ec9fd3.png"/>
           <p:cNvPicPr>
             <a:picLocks noChangeAspect="1"/>
           </p:cNvPicPr>
@@ -7017,7 +6374,7 @@
       </p:pic>
       <p:sp>
         <p:nvSpPr>
-          <p:cNvPr id="11" name="TextBox 10"/>
+          <p:cNvPr id="10" name="TextBox 9"/>
           <p:cNvSpPr txBox="1"/>
           <p:nvPr/>
         </p:nvSpPr>
@@ -7052,7 +6409,7 @@
       </p:sp>
       <p:sp>
         <p:nvSpPr>
-          <p:cNvPr id="12" name="TextBox 11"/>
+          <p:cNvPr id="11" name="TextBox 10"/>
           <p:cNvSpPr txBox="1"/>
           <p:nvPr/>
         </p:nvSpPr>
@@ -7087,7 +6444,7 @@
       </p:sp>
       <p:pic>
         <p:nvPicPr>
-          <p:cNvPr id="13" name="Picture 12" descr="a80742e4b94b4b64.png"/>
+          <p:cNvPr id="12" name="Picture 11" descr="a80742e4b94b4b64.png"/>
           <p:cNvPicPr>
             <a:picLocks noChangeAspect="1"/>
           </p:cNvPicPr>
@@ -7111,7 +6468,7 @@
       </p:pic>
       <p:sp>
         <p:nvSpPr>
-          <p:cNvPr id="14" name="TextBox 13"/>
+          <p:cNvPr id="13" name="TextBox 12"/>
           <p:cNvSpPr txBox="1"/>
           <p:nvPr/>
         </p:nvSpPr>
@@ -7146,7 +6503,7 @@
       </p:sp>
       <p:sp>
         <p:nvSpPr>
-          <p:cNvPr id="15" name="TextBox 14"/>
+          <p:cNvPr id="14" name="TextBox 13"/>
           <p:cNvSpPr txBox="1"/>
           <p:nvPr/>
         </p:nvSpPr>
@@ -7181,60 +6538,7 @@
       </p:sp>
       <p:sp>
         <p:nvSpPr>
-          <p:cNvPr id="16" name="TextBox 15"/>
-          <p:cNvSpPr txBox="1"/>
-          <p:nvPr/>
-        </p:nvSpPr>
-        <p:spPr>
-          <a:xfrm>
-            <a:off x="1828800" y="3730354"/>
-            <a:ext cx="8503920" cy="548640"/>
-          </a:xfrm>
-          <a:prstGeom prst="rect">
-            <a:avLst/>
-          </a:prstGeom>
-          <a:noFill/>
-        </p:spPr>
-        <p:txBody>
-          <a:bodyPr wrap="square" lIns="45720" rIns="45720" tIns="18288" bIns="18288" anchor="t">
-            <a:spAutoFit/>
-          </a:bodyPr>
-          <a:lstStyle/>
-          <a:p>
-            <a:pPr algn="ctr"/>
-            <a:r>
-              <a:rPr sz="2400" b="0" i="0">
-                <a:solidFill>
-                  <a:srgbClr val="6B6B6B"/>
-                </a:solidFill>
-                <a:latin typeface="Century Schoolbook"/>
-              </a:rPr>
-              <a:t>10 × 10</a:t>
-            </a:r>
-            <a:r>
-              <a:rPr sz="2400" b="0" i="0" baseline="30000">
-                <a:solidFill>
-                  <a:srgbClr val="6B6B6B"/>
-                </a:solidFill>
-                <a:latin typeface="Century Schoolbook"/>
-              </a:rPr>
-              <a:t>5</a:t>
-            </a:r>
-            <a:r>
-              <a:rPr sz="2400" b="0" i="0">
-                <a:solidFill>
-                  <a:srgbClr val="6B6B6B"/>
-                </a:solidFill>
-                <a:latin typeface="Century Schoolbook"/>
-              </a:rPr>
-              <a:t>, then finish</a:t>
-            </a:r>
-          </a:p>
-        </p:txBody>
-      </p:sp>
-      <p:sp>
-        <p:nvSpPr>
-          <p:cNvPr id="17" name="TextBox 16"/>
+          <p:cNvPr id="15" name="TextBox 14"/>
           <p:cNvSpPr txBox="1"/>
           <p:nvPr/>
         </p:nvSpPr>
@@ -7399,44 +6703,9 @@
           </a:fontRef>
         </p:style>
       </p:cxnSp>
-      <p:sp>
-        <p:nvSpPr>
-          <p:cNvPr id="5" name="TextBox 4"/>
-          <p:cNvSpPr txBox="1"/>
-          <p:nvPr/>
-        </p:nvSpPr>
-        <p:spPr>
-          <a:xfrm>
-            <a:off x="777240" y="1261872"/>
-            <a:ext cx="10607040" cy="310896"/>
-          </a:xfrm>
-          <a:prstGeom prst="rect">
-            <a:avLst/>
-          </a:prstGeom>
-          <a:noFill/>
-        </p:spPr>
-        <p:txBody>
-          <a:bodyPr wrap="square" lIns="45720" rIns="45720" tIns="18288" bIns="18288" anchor="t">
-            <a:spAutoFit/>
-          </a:bodyPr>
-          <a:lstStyle/>
-          <a:p>
-            <a:pPr algn="l"/>
-            <a:r>
-              <a:rPr sz="1700" b="0" i="1">
-                <a:solidFill>
-                  <a:srgbClr val="6B6B6B"/>
-                </a:solidFill>
-                <a:latin typeface="Century Schoolbook"/>
-              </a:rPr>
-              <a:t>Boards up on three.</a:t>
-            </a:r>
-          </a:p>
-        </p:txBody>
-      </p:sp>
       <p:cxnSp>
         <p:nvCxnSpPr>
-          <p:cNvPr id="6" name="Connector 5"/>
+          <p:cNvPr id="5" name="Connector 4"/>
           <p:cNvCxnSpPr/>
           <p:nvPr/>
         </p:nvCxnSpPr>
@@ -7471,7 +6740,7 @@
       </p:cxnSp>
       <p:sp>
         <p:nvSpPr>
-          <p:cNvPr id="7" name="TextBox 6"/>
+          <p:cNvPr id="6" name="TextBox 5"/>
           <p:cNvSpPr txBox="1"/>
           <p:nvPr/>
         </p:nvSpPr>
@@ -7506,7 +6775,7 @@
       </p:sp>
       <p:sp>
         <p:nvSpPr>
-          <p:cNvPr id="8" name="TextBox 7"/>
+          <p:cNvPr id="7" name="TextBox 6"/>
           <p:cNvSpPr txBox="1"/>
           <p:nvPr/>
         </p:nvSpPr>
@@ -7541,7 +6810,7 @@
       </p:sp>
       <p:pic>
         <p:nvPicPr>
-          <p:cNvPr id="9" name="Picture 8" descr="f43a30d4653d07e7.png"/>
+          <p:cNvPr id="8" name="Picture 7" descr="f43a30d4653d07e7.png"/>
           <p:cNvPicPr>
             <a:picLocks noChangeAspect="1"/>
           </p:cNvPicPr>
@@ -7565,7 +6834,7 @@
       </p:pic>
       <p:sp>
         <p:nvSpPr>
-          <p:cNvPr id="10" name="TextBox 9"/>
+          <p:cNvPr id="9" name="TextBox 8"/>
           <p:cNvSpPr txBox="1"/>
           <p:nvPr/>
         </p:nvSpPr>
@@ -7594,41 +6863,6 @@
                 <a:latin typeface="Century Schoolbook"/>
               </a:rPr>
               <a:t>Answer it.</a:t>
-            </a:r>
-          </a:p>
-        </p:txBody>
-      </p:sp>
-      <p:sp>
-        <p:nvSpPr>
-          <p:cNvPr id="11" name="TextBox 10"/>
-          <p:cNvSpPr txBox="1"/>
-          <p:nvPr/>
-        </p:nvSpPr>
-        <p:spPr>
-          <a:xfrm>
-            <a:off x="777240" y="4828032"/>
-            <a:ext cx="10607040" cy="365760"/>
-          </a:xfrm>
-          <a:prstGeom prst="rect">
-            <a:avLst/>
-          </a:prstGeom>
-          <a:noFill/>
-        </p:spPr>
-        <p:txBody>
-          <a:bodyPr wrap="square" lIns="45720" rIns="45720" tIns="18288" bIns="18288" anchor="t">
-            <a:spAutoFit/>
-          </a:bodyPr>
-          <a:lstStyle/>
-          <a:p>
-            <a:pPr algn="ctr"/>
-            <a:r>
-              <a:rPr sz="1900" b="0" i="1">
-                <a:solidFill>
-                  <a:srgbClr val="6B6B6B"/>
-                </a:solidFill>
-                <a:latin typeface="Century Schoolbook"/>
-              </a:rPr>
-              <a:t>Top minus bottom.</a:t>
             </a:r>
           </a:p>
         </p:txBody>
@@ -7756,44 +6990,9 @@
           </a:fontRef>
         </p:style>
       </p:cxnSp>
-      <p:sp>
-        <p:nvSpPr>
-          <p:cNvPr id="5" name="TextBox 4"/>
-          <p:cNvSpPr txBox="1"/>
-          <p:nvPr/>
-        </p:nvSpPr>
-        <p:spPr>
-          <a:xfrm>
-            <a:off x="777240" y="1261872"/>
-            <a:ext cx="10607040" cy="310896"/>
-          </a:xfrm>
-          <a:prstGeom prst="rect">
-            <a:avLst/>
-          </a:prstGeom>
-          <a:noFill/>
-        </p:spPr>
-        <p:txBody>
-          <a:bodyPr wrap="square" lIns="45720" rIns="45720" tIns="18288" bIns="18288" anchor="t">
-            <a:spAutoFit/>
-          </a:bodyPr>
-          <a:lstStyle/>
-          <a:p>
-            <a:pPr algn="l"/>
-            <a:r>
-              <a:rPr sz="1700" b="0" i="1">
-                <a:solidFill>
-                  <a:srgbClr val="6B6B6B"/>
-                </a:solidFill>
-                <a:latin typeface="Century Schoolbook"/>
-              </a:rPr>
-              <a:t>On your own. Four minutes. No notes.</a:t>
-            </a:r>
-          </a:p>
-        </p:txBody>
-      </p:sp>
       <p:cxnSp>
         <p:nvCxnSpPr>
-          <p:cNvPr id="6" name="Connector 5"/>
+          <p:cNvPr id="5" name="Connector 4"/>
           <p:cNvCxnSpPr/>
           <p:nvPr/>
         </p:nvCxnSpPr>
@@ -7828,7 +7027,7 @@
       </p:cxnSp>
       <p:sp>
         <p:nvSpPr>
-          <p:cNvPr id="7" name="TextBox 6"/>
+          <p:cNvPr id="6" name="TextBox 5"/>
           <p:cNvSpPr txBox="1"/>
           <p:nvPr/>
         </p:nvSpPr>
@@ -7863,7 +7062,7 @@
       </p:sp>
       <p:sp>
         <p:nvSpPr>
-          <p:cNvPr id="8" name="TextBox 7"/>
+          <p:cNvPr id="7" name="TextBox 6"/>
           <p:cNvSpPr txBox="1"/>
           <p:nvPr/>
         </p:nvSpPr>
@@ -7898,13 +7097,13 @@
       </p:sp>
       <p:sp>
         <p:nvSpPr>
-          <p:cNvPr id="9" name="TextBox 8"/>
-          <p:cNvSpPr txBox="1"/>
-          <p:nvPr/>
-        </p:nvSpPr>
-        <p:spPr>
-          <a:xfrm>
-            <a:off x="1874519" y="1760220"/>
+          <p:cNvPr id="8" name="TextBox 7"/>
+          <p:cNvSpPr txBox="1"/>
+          <p:nvPr/>
+        </p:nvSpPr>
+        <p:spPr>
+          <a:xfrm>
+            <a:off x="1874519" y="1440180"/>
             <a:ext cx="720605" cy="457200"/>
           </a:xfrm>
           <a:prstGeom prst="rect">
@@ -7933,7 +7132,7 @@
       </p:sp>
       <p:pic>
         <p:nvPicPr>
-          <p:cNvPr id="10" name="Picture 9" descr="7655f1be3ef33831.png"/>
+          <p:cNvPr id="9" name="Picture 8" descr="7655f1be3ef33831.png"/>
           <p:cNvPicPr>
             <a:picLocks noChangeAspect="1"/>
           </p:cNvPicPr>
@@ -7947,7 +7146,7 @@
         </p:blipFill>
         <p:spPr>
           <a:xfrm>
-            <a:off x="2457965" y="1821180"/>
+            <a:off x="2457965" y="1501140"/>
             <a:ext cx="3099816" cy="335280"/>
           </a:xfrm>
           <a:prstGeom prst="rect">
@@ -7957,13 +7156,13 @@
       </p:pic>
       <p:sp>
         <p:nvSpPr>
-          <p:cNvPr id="11" name="TextBox 10"/>
-          <p:cNvSpPr txBox="1"/>
-          <p:nvPr/>
-        </p:nvSpPr>
-        <p:spPr>
-          <a:xfrm>
-            <a:off x="1874519" y="2500884"/>
+          <p:cNvPr id="10" name="TextBox 9"/>
+          <p:cNvSpPr txBox="1"/>
+          <p:nvPr/>
+        </p:nvSpPr>
+        <p:spPr>
+          <a:xfrm>
+            <a:off x="1874519" y="2180844"/>
             <a:ext cx="3704805" cy="457200"/>
           </a:xfrm>
           <a:prstGeom prst="rect">
@@ -7992,7 +7191,7 @@
       </p:sp>
       <p:pic>
         <p:nvPicPr>
-          <p:cNvPr id="12" name="Picture 11" descr="911d175e68347695.png"/>
+          <p:cNvPr id="11" name="Picture 10" descr="911d175e68347695.png"/>
           <p:cNvPicPr>
             <a:picLocks noChangeAspect="1"/>
           </p:cNvPicPr>
@@ -8006,7 +7205,7 @@
         </p:blipFill>
         <p:spPr>
           <a:xfrm>
-            <a:off x="5442165" y="2395728"/>
+            <a:off x="5442165" y="2075688"/>
             <a:ext cx="469392" cy="667512"/>
           </a:xfrm>
           <a:prstGeom prst="rect">
@@ -8016,13 +7215,13 @@
       </p:pic>
       <p:sp>
         <p:nvSpPr>
-          <p:cNvPr id="13" name="TextBox 12"/>
-          <p:cNvSpPr txBox="1"/>
-          <p:nvPr/>
-        </p:nvSpPr>
-        <p:spPr>
-          <a:xfrm>
-            <a:off x="1874519" y="3241548"/>
+          <p:cNvPr id="12" name="TextBox 11"/>
+          <p:cNvSpPr txBox="1"/>
+          <p:nvPr/>
+        </p:nvSpPr>
+        <p:spPr>
+          <a:xfrm>
+            <a:off x="1874519" y="2921508"/>
             <a:ext cx="3064939" cy="457200"/>
           </a:xfrm>
           <a:prstGeom prst="rect">
@@ -8051,7 +7250,7 @@
       </p:sp>
       <p:pic>
         <p:nvPicPr>
-          <p:cNvPr id="14" name="Picture 13" descr="d68e6e8f02f1f5eb.png"/>
+          <p:cNvPr id="13" name="Picture 12" descr="d68e6e8f02f1f5eb.png"/>
           <p:cNvPicPr>
             <a:picLocks noChangeAspect="1"/>
           </p:cNvPicPr>
@@ -8065,7 +7264,7 @@
         </p:blipFill>
         <p:spPr>
           <a:xfrm>
-            <a:off x="4802299" y="3265932"/>
+            <a:off x="4802299" y="2945892"/>
             <a:ext cx="853440" cy="408432"/>
           </a:xfrm>
           <a:prstGeom prst="rect">
@@ -8075,13 +7274,13 @@
       </p:pic>
       <p:sp>
         <p:nvSpPr>
-          <p:cNvPr id="15" name="TextBox 14"/>
-          <p:cNvSpPr txBox="1"/>
-          <p:nvPr/>
-        </p:nvSpPr>
-        <p:spPr>
-          <a:xfrm>
-            <a:off x="1874519" y="3930396"/>
+          <p:cNvPr id="14" name="TextBox 13"/>
+          <p:cNvSpPr txBox="1"/>
+          <p:nvPr/>
+        </p:nvSpPr>
+        <p:spPr>
+          <a:xfrm>
+            <a:off x="1874519" y="3610356"/>
             <a:ext cx="3474215" cy="457200"/>
           </a:xfrm>
           <a:prstGeom prst="rect">
@@ -8110,7 +7309,7 @@
       </p:sp>
       <p:pic>
         <p:nvPicPr>
-          <p:cNvPr id="16" name="Picture 15" descr="57c14efe46195709.png"/>
+          <p:cNvPr id="15" name="Picture 14" descr="57c14efe46195709.png"/>
           <p:cNvPicPr>
             <a:picLocks noChangeAspect="1"/>
           </p:cNvPicPr>
@@ -8124,7 +7323,7 @@
         </p:blipFill>
         <p:spPr>
           <a:xfrm>
-            <a:off x="5211575" y="3877056"/>
+            <a:off x="5211575" y="3557016"/>
             <a:ext cx="417576" cy="563880"/>
           </a:xfrm>
           <a:prstGeom prst="rect">
@@ -8255,44 +7454,9 @@
           </a:fontRef>
         </p:style>
       </p:cxnSp>
-      <p:sp>
-        <p:nvSpPr>
-          <p:cNvPr id="5" name="TextBox 4"/>
-          <p:cNvSpPr txBox="1"/>
-          <p:nvPr/>
-        </p:nvSpPr>
-        <p:spPr>
-          <a:xfrm>
-            <a:off x="777240" y="1261872"/>
-            <a:ext cx="10607040" cy="310896"/>
-          </a:xfrm>
-          <a:prstGeom prst="rect">
-            <a:avLst/>
-          </a:prstGeom>
-          <a:noFill/>
-        </p:spPr>
-        <p:txBody>
-          <a:bodyPr wrap="square" lIns="45720" rIns="45720" tIns="18288" bIns="18288" anchor="t">
-            <a:spAutoFit/>
-          </a:bodyPr>
-          <a:lstStyle/>
-          <a:p>
-            <a:pPr algn="l"/>
-            <a:r>
-              <a:rPr sz="1700" b="0" i="1">
-                <a:solidFill>
-                  <a:srgbClr val="6B6B6B"/>
-                </a:solidFill>
-                <a:latin typeface="Century Schoolbook"/>
-              </a:rPr>
-              <a:t>Answer.</a:t>
-            </a:r>
-          </a:p>
-        </p:txBody>
-      </p:sp>
       <p:cxnSp>
         <p:nvCxnSpPr>
-          <p:cNvPr id="6" name="Connector 5"/>
+          <p:cNvPr id="5" name="Connector 4"/>
           <p:cNvCxnSpPr/>
           <p:nvPr/>
         </p:nvCxnSpPr>
@@ -8327,7 +7491,7 @@
       </p:cxnSp>
       <p:sp>
         <p:nvSpPr>
-          <p:cNvPr id="7" name="TextBox 6"/>
+          <p:cNvPr id="6" name="TextBox 5"/>
           <p:cNvSpPr txBox="1"/>
           <p:nvPr/>
         </p:nvSpPr>
@@ -8362,7 +7526,7 @@
       </p:sp>
       <p:sp>
         <p:nvSpPr>
-          <p:cNvPr id="8" name="TextBox 7"/>
+          <p:cNvPr id="7" name="TextBox 6"/>
           <p:cNvSpPr txBox="1"/>
           <p:nvPr/>
         </p:nvSpPr>
@@ -8397,7 +7561,7 @@
       </p:sp>
       <p:pic>
         <p:nvPicPr>
-          <p:cNvPr id="9" name="Picture 8" descr="f69d270b84b83600.png"/>
+          <p:cNvPr id="8" name="Picture 7" descr="f69d270b84b83600.png"/>
           <p:cNvPicPr>
             <a:picLocks noChangeAspect="1"/>
           </p:cNvPicPr>
@@ -8421,69 +7585,7 @@
       </p:pic>
       <p:sp>
         <p:nvSpPr>
-          <p:cNvPr id="10" name="TextBox 9"/>
-          <p:cNvSpPr txBox="1"/>
-          <p:nvPr/>
-        </p:nvSpPr>
-        <p:spPr>
-          <a:xfrm>
-            <a:off x="1828800" y="3246119"/>
-            <a:ext cx="8503920" cy="548640"/>
-          </a:xfrm>
-          <a:prstGeom prst="rect">
-            <a:avLst/>
-          </a:prstGeom>
-          <a:noFill/>
-        </p:spPr>
-        <p:txBody>
-          <a:bodyPr wrap="square" lIns="45720" rIns="45720" tIns="18288" bIns="18288" anchor="t">
-            <a:spAutoFit/>
-          </a:bodyPr>
-          <a:lstStyle/>
-          <a:p>
-            <a:pPr algn="ctr"/>
-            <a:r>
-              <a:rPr sz="2400" b="0" i="0">
-                <a:solidFill>
-                  <a:srgbClr val="6B6B6B"/>
-                </a:solidFill>
-                <a:latin typeface="Century Schoolbook"/>
-              </a:rPr>
-              <a:t>9.6 ÷ 1.2 and 10</a:t>
-            </a:r>
-            <a:r>
-              <a:rPr sz="2400" b="0" i="0" baseline="30000">
-                <a:solidFill>
-                  <a:srgbClr val="6B6B6B"/>
-                </a:solidFill>
-                <a:latin typeface="Century Schoolbook"/>
-              </a:rPr>
-              <a:t>8</a:t>
-            </a:r>
-            <a:r>
-              <a:rPr sz="2400" b="0" i="0">
-                <a:solidFill>
-                  <a:srgbClr val="6B6B6B"/>
-                </a:solidFill>
-                <a:latin typeface="Century Schoolbook"/>
-              </a:rPr>
-              <a:t> ÷ 10</a:t>
-            </a:r>
-            <a:r>
-              <a:rPr sz="2400" b="0" i="0" baseline="30000">
-                <a:solidFill>
-                  <a:srgbClr val="6B6B6B"/>
-                </a:solidFill>
-                <a:latin typeface="Century Schoolbook"/>
-              </a:rPr>
-              <a:t>3</a:t>
-            </a:r>
-          </a:p>
-        </p:txBody>
-      </p:sp>
-      <p:sp>
-        <p:nvSpPr>
-          <p:cNvPr id="11" name="TextBox 10"/>
+          <p:cNvPr id="9" name="TextBox 8"/>
           <p:cNvSpPr txBox="1"/>
           <p:nvPr/>
         </p:nvSpPr>
@@ -8648,44 +7750,9 @@
           </a:fontRef>
         </p:style>
       </p:cxnSp>
-      <p:sp>
-        <p:nvSpPr>
-          <p:cNvPr id="5" name="TextBox 4"/>
-          <p:cNvSpPr txBox="1"/>
-          <p:nvPr/>
-        </p:nvSpPr>
-        <p:spPr>
-          <a:xfrm>
-            <a:off x="777240" y="1261872"/>
-            <a:ext cx="10607040" cy="310896"/>
-          </a:xfrm>
-          <a:prstGeom prst="rect">
-            <a:avLst/>
-          </a:prstGeom>
-          <a:noFill/>
-        </p:spPr>
-        <p:txBody>
-          <a:bodyPr wrap="square" lIns="45720" rIns="45720" tIns="18288" bIns="18288" anchor="t">
-            <a:spAutoFit/>
-          </a:bodyPr>
-          <a:lstStyle/>
-          <a:p>
-            <a:pPr algn="l"/>
-            <a:r>
-              <a:rPr sz="1700" b="0" i="1">
-                <a:solidFill>
-                  <a:srgbClr val="6B6B6B"/>
-                </a:solidFill>
-                <a:latin typeface="Century Schoolbook"/>
-              </a:rPr>
-              <a:t>Boards up on three.</a:t>
-            </a:r>
-          </a:p>
-        </p:txBody>
-      </p:sp>
       <p:cxnSp>
         <p:nvCxnSpPr>
-          <p:cNvPr id="6" name="Connector 5"/>
+          <p:cNvPr id="5" name="Connector 4"/>
           <p:cNvCxnSpPr/>
           <p:nvPr/>
         </p:nvCxnSpPr>
@@ -8720,7 +7787,7 @@
       </p:cxnSp>
       <p:sp>
         <p:nvSpPr>
-          <p:cNvPr id="7" name="TextBox 6"/>
+          <p:cNvPr id="6" name="TextBox 5"/>
           <p:cNvSpPr txBox="1"/>
           <p:nvPr/>
         </p:nvSpPr>
@@ -8755,7 +7822,7 @@
       </p:sp>
       <p:sp>
         <p:nvSpPr>
-          <p:cNvPr id="8" name="TextBox 7"/>
+          <p:cNvPr id="7" name="TextBox 6"/>
           <p:cNvSpPr txBox="1"/>
           <p:nvPr/>
         </p:nvSpPr>
@@ -8790,7 +7857,7 @@
       </p:sp>
       <p:pic>
         <p:nvPicPr>
-          <p:cNvPr id="9" name="Picture 8" descr="854a4a598c652712.png"/>
+          <p:cNvPr id="8" name="Picture 7" descr="854a4a598c652712.png"/>
           <p:cNvPicPr>
             <a:picLocks noChangeAspect="1"/>
           </p:cNvPicPr>
@@ -8814,7 +7881,7 @@
       </p:pic>
       <p:sp>
         <p:nvSpPr>
-          <p:cNvPr id="10" name="TextBox 9"/>
+          <p:cNvPr id="9" name="TextBox 8"/>
           <p:cNvSpPr txBox="1"/>
           <p:nvPr/>
         </p:nvSpPr>
@@ -8843,41 +7910,6 @@
                 <a:latin typeface="Century Schoolbook"/>
               </a:rPr>
               <a:t>Answer it.</a:t>
-            </a:r>
-          </a:p>
-        </p:txBody>
-      </p:sp>
-      <p:sp>
-        <p:nvSpPr>
-          <p:cNvPr id="11" name="TextBox 10"/>
-          <p:cNvSpPr txBox="1"/>
-          <p:nvPr/>
-        </p:nvSpPr>
-        <p:spPr>
-          <a:xfrm>
-            <a:off x="777240" y="4828032"/>
-            <a:ext cx="10607040" cy="365760"/>
-          </a:xfrm>
-          <a:prstGeom prst="rect">
-            <a:avLst/>
-          </a:prstGeom>
-          <a:noFill/>
-        </p:spPr>
-        <p:txBody>
-          <a:bodyPr wrap="square" lIns="45720" rIns="45720" tIns="18288" bIns="18288" anchor="t">
-            <a:spAutoFit/>
-          </a:bodyPr>
-          <a:lstStyle/>
-          <a:p>
-            <a:pPr algn="ctr"/>
-            <a:r>
-              <a:rPr sz="1900" b="0" i="1">
-                <a:solidFill>
-                  <a:srgbClr val="6B6B6B"/>
-                </a:solidFill>
-                <a:latin typeface="Century Schoolbook"/>
-              </a:rPr>
-              <a:t>Finish the answer.</a:t>
             </a:r>
           </a:p>
         </p:txBody>
@@ -9005,44 +8037,9 @@
           </a:fontRef>
         </p:style>
       </p:cxnSp>
-      <p:sp>
-        <p:nvSpPr>
-          <p:cNvPr id="5" name="TextBox 4"/>
-          <p:cNvSpPr txBox="1"/>
-          <p:nvPr/>
-        </p:nvSpPr>
-        <p:spPr>
-          <a:xfrm>
-            <a:off x="777240" y="1261872"/>
-            <a:ext cx="10607040" cy="310896"/>
-          </a:xfrm>
-          <a:prstGeom prst="rect">
-            <a:avLst/>
-          </a:prstGeom>
-          <a:noFill/>
-        </p:spPr>
-        <p:txBody>
-          <a:bodyPr wrap="square" lIns="45720" rIns="45720" tIns="18288" bIns="18288" anchor="t">
-            <a:spAutoFit/>
-          </a:bodyPr>
-          <a:lstStyle/>
-          <a:p>
-            <a:pPr algn="l"/>
-            <a:r>
-              <a:rPr sz="1700" b="0" i="1">
-                <a:solidFill>
-                  <a:srgbClr val="6B6B6B"/>
-                </a:solidFill>
-                <a:latin typeface="Century Schoolbook"/>
-              </a:rPr>
-              <a:t>Answer.</a:t>
-            </a:r>
-          </a:p>
-        </p:txBody>
-      </p:sp>
       <p:cxnSp>
         <p:nvCxnSpPr>
-          <p:cNvPr id="6" name="Connector 5"/>
+          <p:cNvPr id="5" name="Connector 4"/>
           <p:cNvCxnSpPr/>
           <p:nvPr/>
         </p:nvCxnSpPr>
@@ -9077,7 +8074,7 @@
       </p:cxnSp>
       <p:sp>
         <p:nvSpPr>
-          <p:cNvPr id="7" name="TextBox 6"/>
+          <p:cNvPr id="6" name="TextBox 5"/>
           <p:cNvSpPr txBox="1"/>
           <p:nvPr/>
         </p:nvSpPr>
@@ -9112,7 +8109,7 @@
       </p:sp>
       <p:sp>
         <p:nvSpPr>
-          <p:cNvPr id="8" name="TextBox 7"/>
+          <p:cNvPr id="7" name="TextBox 6"/>
           <p:cNvSpPr txBox="1"/>
           <p:nvPr/>
         </p:nvSpPr>
@@ -9147,7 +8144,7 @@
       </p:sp>
       <p:pic>
         <p:nvPicPr>
-          <p:cNvPr id="9" name="Picture 8" descr="8bc77f296de0cf4b.png"/>
+          <p:cNvPr id="8" name="Picture 7" descr="8bc77f296de0cf4b.png"/>
           <p:cNvPicPr>
             <a:picLocks noChangeAspect="1"/>
           </p:cNvPicPr>
@@ -9171,60 +8168,7 @@
       </p:pic>
       <p:sp>
         <p:nvSpPr>
-          <p:cNvPr id="10" name="TextBox 9"/>
-          <p:cNvSpPr txBox="1"/>
-          <p:nvPr/>
-        </p:nvSpPr>
-        <p:spPr>
-          <a:xfrm>
-            <a:off x="1828800" y="3246119"/>
-            <a:ext cx="8503920" cy="548640"/>
-          </a:xfrm>
-          <a:prstGeom prst="rect">
-            <a:avLst/>
-          </a:prstGeom>
-          <a:noFill/>
-        </p:spPr>
-        <p:txBody>
-          <a:bodyPr wrap="square" lIns="45720" rIns="45720" tIns="18288" bIns="18288" anchor="t">
-            <a:spAutoFit/>
-          </a:bodyPr>
-          <a:lstStyle/>
-          <a:p>
-            <a:pPr algn="ctr"/>
-            <a:r>
-              <a:rPr sz="2400" b="0" i="0">
-                <a:solidFill>
-                  <a:srgbClr val="6B6B6B"/>
-                </a:solidFill>
-                <a:latin typeface="Century Schoolbook"/>
-              </a:rPr>
-              <a:t>0.53 × 10</a:t>
-            </a:r>
-            <a:r>
-              <a:rPr sz="2400" b="0" i="0" baseline="30000">
-                <a:solidFill>
-                  <a:srgbClr val="6B6B6B"/>
-                </a:solidFill>
-                <a:latin typeface="Century Schoolbook"/>
-              </a:rPr>
-              <a:t>-2</a:t>
-            </a:r>
-            <a:r>
-              <a:rPr sz="2400" b="0" i="0">
-                <a:solidFill>
-                  <a:srgbClr val="6B6B6B"/>
-                </a:solidFill>
-                <a:latin typeface="Century Schoolbook"/>
-              </a:rPr>
-              <a:t> is not finished</a:t>
-            </a:r>
-          </a:p>
-        </p:txBody>
-      </p:sp>
-      <p:sp>
-        <p:nvSpPr>
-          <p:cNvPr id="11" name="TextBox 10"/>
+          <p:cNvPr id="9" name="TextBox 8"/>
           <p:cNvSpPr txBox="1"/>
           <p:nvPr/>
         </p:nvSpPr>
@@ -9389,44 +8333,9 @@
           </a:fontRef>
         </p:style>
       </p:cxnSp>
-      <p:sp>
-        <p:nvSpPr>
-          <p:cNvPr id="5" name="TextBox 4"/>
-          <p:cNvSpPr txBox="1"/>
-          <p:nvPr/>
-        </p:nvSpPr>
-        <p:spPr>
-          <a:xfrm>
-            <a:off x="777240" y="1261872"/>
-            <a:ext cx="10607040" cy="310896"/>
-          </a:xfrm>
-          <a:prstGeom prst="rect">
-            <a:avLst/>
-          </a:prstGeom>
-          <a:noFill/>
-        </p:spPr>
-        <p:txBody>
-          <a:bodyPr wrap="square" lIns="45720" rIns="45720" tIns="18288" bIns="18288" anchor="t">
-            <a:spAutoFit/>
-          </a:bodyPr>
-          <a:lstStyle/>
-          <a:p>
-            <a:pPr algn="l"/>
-            <a:r>
-              <a:rPr sz="1700" b="0" i="1">
-                <a:solidFill>
-                  <a:srgbClr val="6B6B6B"/>
-                </a:solidFill>
-                <a:latin typeface="Century Schoolbook"/>
-              </a:rPr>
-              <a:t>Boards up on three.</a:t>
-            </a:r>
-          </a:p>
-        </p:txBody>
-      </p:sp>
       <p:cxnSp>
         <p:nvCxnSpPr>
-          <p:cNvPr id="6" name="Connector 5"/>
+          <p:cNvPr id="5" name="Connector 4"/>
           <p:cNvCxnSpPr/>
           <p:nvPr/>
         </p:nvCxnSpPr>
@@ -9461,7 +8370,7 @@
       </p:cxnSp>
       <p:sp>
         <p:nvSpPr>
-          <p:cNvPr id="7" name="TextBox 6"/>
+          <p:cNvPr id="6" name="TextBox 5"/>
           <p:cNvSpPr txBox="1"/>
           <p:nvPr/>
         </p:nvSpPr>
@@ -9496,7 +8405,7 @@
       </p:sp>
       <p:sp>
         <p:nvSpPr>
-          <p:cNvPr id="8" name="TextBox 7"/>
+          <p:cNvPr id="7" name="TextBox 6"/>
           <p:cNvSpPr txBox="1"/>
           <p:nvPr/>
         </p:nvSpPr>
@@ -9531,7 +8440,7 @@
       </p:sp>
       <p:pic>
         <p:nvPicPr>
-          <p:cNvPr id="9" name="Picture 8" descr="c0f8266fbc7965d4.png"/>
+          <p:cNvPr id="8" name="Picture 7" descr="c0f8266fbc7965d4.png"/>
           <p:cNvPicPr>
             <a:picLocks noChangeAspect="1"/>
           </p:cNvPicPr>
@@ -9555,7 +8464,7 @@
       </p:pic>
       <p:sp>
         <p:nvSpPr>
-          <p:cNvPr id="10" name="TextBox 9"/>
+          <p:cNvPr id="9" name="TextBox 8"/>
           <p:cNvSpPr txBox="1"/>
           <p:nvPr/>
         </p:nvSpPr>
@@ -9590,7 +8499,7 @@
       </p:sp>
       <p:sp>
         <p:nvSpPr>
-          <p:cNvPr id="11" name="TextBox 10"/>
+          <p:cNvPr id="10" name="TextBox 9"/>
           <p:cNvSpPr txBox="1"/>
           <p:nvPr/>
         </p:nvSpPr>
@@ -9643,7 +8552,7 @@
       </p:sp>
       <p:sp>
         <p:nvSpPr>
-          <p:cNvPr id="12" name="TextBox 11"/>
+          <p:cNvPr id="11" name="TextBox 10"/>
           <p:cNvSpPr txBox="1"/>
           <p:nvPr/>
         </p:nvSpPr>
@@ -9696,7 +8605,7 @@
       </p:sp>
       <p:sp>
         <p:nvSpPr>
-          <p:cNvPr id="13" name="TextBox 12"/>
+          <p:cNvPr id="12" name="TextBox 11"/>
           <p:cNvSpPr txBox="1"/>
           <p:nvPr/>
         </p:nvSpPr>
@@ -9749,7 +8658,7 @@
       </p:sp>
       <p:sp>
         <p:nvSpPr>
-          <p:cNvPr id="14" name="TextBox 13"/>
+          <p:cNvPr id="13" name="TextBox 12"/>
           <p:cNvSpPr txBox="1"/>
           <p:nvPr/>
         </p:nvSpPr>
@@ -9802,7 +8711,7 @@
       </p:sp>
       <p:sp>
         <p:nvSpPr>
-          <p:cNvPr id="15" name="TextBox 14"/>
+          <p:cNvPr id="14" name="TextBox 13"/>
           <p:cNvSpPr txBox="1"/>
           <p:nvPr/>
         </p:nvSpPr>
@@ -9958,44 +8867,9 @@
           </a:fontRef>
         </p:style>
       </p:cxnSp>
-      <p:sp>
-        <p:nvSpPr>
-          <p:cNvPr id="5" name="TextBox 4"/>
-          <p:cNvSpPr txBox="1"/>
-          <p:nvPr/>
-        </p:nvSpPr>
-        <p:spPr>
-          <a:xfrm>
-            <a:off x="777240" y="1261872"/>
-            <a:ext cx="10607040" cy="310896"/>
-          </a:xfrm>
-          <a:prstGeom prst="rect">
-            <a:avLst/>
-          </a:prstGeom>
-          <a:noFill/>
-        </p:spPr>
-        <p:txBody>
-          <a:bodyPr wrap="square" lIns="45720" rIns="45720" tIns="18288" bIns="18288" anchor="t">
-            <a:spAutoFit/>
-          </a:bodyPr>
-          <a:lstStyle/>
-          <a:p>
-            <a:pPr algn="l"/>
-            <a:r>
-              <a:rPr sz="1700" b="0" i="1">
-                <a:solidFill>
-                  <a:srgbClr val="6B6B6B"/>
-                </a:solidFill>
-                <a:latin typeface="Century Schoolbook"/>
-              </a:rPr>
-              <a:t>Answer.</a:t>
-            </a:r>
-          </a:p>
-        </p:txBody>
-      </p:sp>
       <p:cxnSp>
         <p:nvCxnSpPr>
-          <p:cNvPr id="6" name="Connector 5"/>
+          <p:cNvPr id="5" name="Connector 4"/>
           <p:cNvCxnSpPr/>
           <p:nvPr/>
         </p:nvCxnSpPr>
@@ -10030,7 +8904,7 @@
       </p:cxnSp>
       <p:sp>
         <p:nvSpPr>
-          <p:cNvPr id="7" name="TextBox 6"/>
+          <p:cNvPr id="6" name="TextBox 5"/>
           <p:cNvSpPr txBox="1"/>
           <p:nvPr/>
         </p:nvSpPr>
@@ -10065,7 +8939,7 @@
       </p:sp>
       <p:sp>
         <p:nvSpPr>
-          <p:cNvPr id="8" name="TextBox 7"/>
+          <p:cNvPr id="7" name="TextBox 6"/>
           <p:cNvSpPr txBox="1"/>
           <p:nvPr/>
         </p:nvSpPr>
@@ -10100,7 +8974,7 @@
       </p:sp>
       <p:pic>
         <p:nvPicPr>
-          <p:cNvPr id="9" name="Picture 8" descr="64c6147c2ce0e22d.png"/>
+          <p:cNvPr id="8" name="Picture 7" descr="64c6147c2ce0e22d.png"/>
           <p:cNvPicPr>
             <a:picLocks noChangeAspect="1"/>
           </p:cNvPicPr>
@@ -10124,7 +8998,7 @@
       </p:pic>
       <p:sp>
         <p:nvSpPr>
-          <p:cNvPr id="10" name="TextBox 9"/>
+          <p:cNvPr id="9" name="TextBox 8"/>
           <p:cNvSpPr txBox="1"/>
           <p:nvPr/>
         </p:nvSpPr>
@@ -10159,7 +9033,7 @@
       </p:sp>
       <p:sp>
         <p:nvSpPr>
-          <p:cNvPr id="11" name="TextBox 10"/>
+          <p:cNvPr id="10" name="TextBox 9"/>
           <p:cNvSpPr txBox="1"/>
           <p:nvPr/>
         </p:nvSpPr>
@@ -10212,7 +9086,7 @@
       </p:sp>
       <p:sp>
         <p:nvSpPr>
-          <p:cNvPr id="12" name="TextBox 11"/>
+          <p:cNvPr id="11" name="TextBox 10"/>
           <p:cNvSpPr txBox="1"/>
           <p:nvPr/>
         </p:nvSpPr>
@@ -10265,7 +9139,7 @@
       </p:sp>
       <p:sp>
         <p:nvSpPr>
-          <p:cNvPr id="13" name="TextBox 12"/>
+          <p:cNvPr id="12" name="TextBox 11"/>
           <p:cNvSpPr txBox="1"/>
           <p:nvPr/>
         </p:nvSpPr>
@@ -10318,7 +9192,7 @@
       </p:sp>
       <p:sp>
         <p:nvSpPr>
-          <p:cNvPr id="14" name="TextBox 13"/>
+          <p:cNvPr id="13" name="TextBox 12"/>
           <p:cNvSpPr txBox="1"/>
           <p:nvPr/>
         </p:nvSpPr>
@@ -10371,7 +9245,7 @@
       </p:sp>
       <p:sp>
         <p:nvSpPr>
-          <p:cNvPr id="15" name="TextBox 14"/>
+          <p:cNvPr id="14" name="TextBox 13"/>
           <p:cNvSpPr txBox="1"/>
           <p:nvPr/>
         </p:nvSpPr>
@@ -10536,44 +9410,9 @@
           </a:fontRef>
         </p:style>
       </p:cxnSp>
-      <p:sp>
-        <p:nvSpPr>
-          <p:cNvPr id="5" name="TextBox 4"/>
-          <p:cNvSpPr txBox="1"/>
-          <p:nvPr/>
-        </p:nvSpPr>
-        <p:spPr>
-          <a:xfrm>
-            <a:off x="777240" y="1261872"/>
-            <a:ext cx="10607040" cy="310896"/>
-          </a:xfrm>
-          <a:prstGeom prst="rect">
-            <a:avLst/>
-          </a:prstGeom>
-          <a:noFill/>
-        </p:spPr>
-        <p:txBody>
-          <a:bodyPr wrap="square" lIns="45720" rIns="45720" tIns="18288" bIns="18288" anchor="t">
-            <a:spAutoFit/>
-          </a:bodyPr>
-          <a:lstStyle/>
-          <a:p>
-            <a:pPr algn="l"/>
-            <a:r>
-              <a:rPr sz="1700" b="0" i="1">
-                <a:solidFill>
-                  <a:srgbClr val="6B6B6B"/>
-                </a:solidFill>
-                <a:latin typeface="Century Schoolbook"/>
-              </a:rPr>
-              <a:t>Boards up on three.</a:t>
-            </a:r>
-          </a:p>
-        </p:txBody>
-      </p:sp>
       <p:cxnSp>
         <p:nvCxnSpPr>
-          <p:cNvPr id="6" name="Connector 5"/>
+          <p:cNvPr id="5" name="Connector 4"/>
           <p:cNvCxnSpPr/>
           <p:nvPr/>
         </p:nvCxnSpPr>
@@ -10608,7 +9447,7 @@
       </p:cxnSp>
       <p:sp>
         <p:nvSpPr>
-          <p:cNvPr id="7" name="TextBox 6"/>
+          <p:cNvPr id="6" name="TextBox 5"/>
           <p:cNvSpPr txBox="1"/>
           <p:nvPr/>
         </p:nvSpPr>
@@ -10643,7 +9482,7 @@
       </p:sp>
       <p:sp>
         <p:nvSpPr>
-          <p:cNvPr id="8" name="TextBox 7"/>
+          <p:cNvPr id="7" name="TextBox 6"/>
           <p:cNvSpPr txBox="1"/>
           <p:nvPr/>
         </p:nvSpPr>
@@ -10678,7 +9517,7 @@
       </p:sp>
       <p:pic>
         <p:nvPicPr>
-          <p:cNvPr id="9" name="Picture 8" descr="f125fe26b9d135b4.png"/>
+          <p:cNvPr id="8" name="Picture 7" descr="f125fe26b9d135b4.png"/>
           <p:cNvPicPr>
             <a:picLocks noChangeAspect="1"/>
           </p:cNvPicPr>
@@ -10702,7 +9541,7 @@
       </p:pic>
       <p:sp>
         <p:nvSpPr>
-          <p:cNvPr id="10" name="TextBox 9"/>
+          <p:cNvPr id="9" name="TextBox 8"/>
           <p:cNvSpPr txBox="1"/>
           <p:nvPr/>
         </p:nvSpPr>
@@ -10737,7 +9576,7 @@
       </p:sp>
       <p:sp>
         <p:nvSpPr>
-          <p:cNvPr id="11" name="TextBox 10"/>
+          <p:cNvPr id="10" name="TextBox 9"/>
           <p:cNvSpPr txBox="1"/>
           <p:nvPr/>
         </p:nvSpPr>
@@ -10790,7 +9629,7 @@
       </p:sp>
       <p:sp>
         <p:nvSpPr>
-          <p:cNvPr id="12" name="TextBox 11"/>
+          <p:cNvPr id="11" name="TextBox 10"/>
           <p:cNvSpPr txBox="1"/>
           <p:nvPr/>
         </p:nvSpPr>
@@ -10843,7 +9682,7 @@
       </p:sp>
       <p:sp>
         <p:nvSpPr>
-          <p:cNvPr id="13" name="TextBox 12"/>
+          <p:cNvPr id="12" name="TextBox 11"/>
           <p:cNvSpPr txBox="1"/>
           <p:nvPr/>
         </p:nvSpPr>
@@ -10896,7 +9735,7 @@
       </p:sp>
       <p:sp>
         <p:nvSpPr>
-          <p:cNvPr id="14" name="TextBox 13"/>
+          <p:cNvPr id="13" name="TextBox 12"/>
           <p:cNvSpPr txBox="1"/>
           <p:nvPr/>
         </p:nvSpPr>
@@ -10949,7 +9788,7 @@
       </p:sp>
       <p:sp>
         <p:nvSpPr>
-          <p:cNvPr id="15" name="TextBox 14"/>
+          <p:cNvPr id="14" name="TextBox 13"/>
           <p:cNvSpPr txBox="1"/>
           <p:nvPr/>
         </p:nvSpPr>
@@ -11105,44 +9944,9 @@
           </a:fontRef>
         </p:style>
       </p:cxnSp>
-      <p:sp>
-        <p:nvSpPr>
-          <p:cNvPr id="5" name="TextBox 4"/>
-          <p:cNvSpPr txBox="1"/>
-          <p:nvPr/>
-        </p:nvSpPr>
-        <p:spPr>
-          <a:xfrm>
-            <a:off x="777240" y="1261872"/>
-            <a:ext cx="10607040" cy="310896"/>
-          </a:xfrm>
-          <a:prstGeom prst="rect">
-            <a:avLst/>
-          </a:prstGeom>
-          <a:noFill/>
-        </p:spPr>
-        <p:txBody>
-          <a:bodyPr wrap="square" lIns="45720" rIns="45720" tIns="18288" bIns="18288" anchor="t">
-            <a:spAutoFit/>
-          </a:bodyPr>
-          <a:lstStyle/>
-          <a:p>
-            <a:pPr algn="l"/>
-            <a:r>
-              <a:rPr sz="1700" b="0" i="1">
-                <a:solidFill>
-                  <a:srgbClr val="6B6B6B"/>
-                </a:solidFill>
-                <a:latin typeface="Century Schoolbook"/>
-              </a:rPr>
-              <a:t>Answer.</a:t>
-            </a:r>
-          </a:p>
-        </p:txBody>
-      </p:sp>
       <p:cxnSp>
         <p:nvCxnSpPr>
-          <p:cNvPr id="6" name="Connector 5"/>
+          <p:cNvPr id="5" name="Connector 4"/>
           <p:cNvCxnSpPr/>
           <p:nvPr/>
         </p:nvCxnSpPr>
@@ -11177,7 +9981,7 @@
       </p:cxnSp>
       <p:sp>
         <p:nvSpPr>
-          <p:cNvPr id="7" name="TextBox 6"/>
+          <p:cNvPr id="6" name="TextBox 5"/>
           <p:cNvSpPr txBox="1"/>
           <p:nvPr/>
         </p:nvSpPr>
@@ -11212,7 +10016,7 @@
       </p:sp>
       <p:sp>
         <p:nvSpPr>
-          <p:cNvPr id="8" name="TextBox 7"/>
+          <p:cNvPr id="7" name="TextBox 6"/>
           <p:cNvSpPr txBox="1"/>
           <p:nvPr/>
         </p:nvSpPr>
@@ -11247,7 +10051,7 @@
       </p:sp>
       <p:pic>
         <p:nvPicPr>
-          <p:cNvPr id="9" name="Picture 8" descr="ffd33f95921b2446.png"/>
+          <p:cNvPr id="8" name="Picture 7" descr="ffd33f95921b2446.png"/>
           <p:cNvPicPr>
             <a:picLocks noChangeAspect="1"/>
           </p:cNvPicPr>
@@ -11271,7 +10075,7 @@
       </p:pic>
       <p:sp>
         <p:nvSpPr>
-          <p:cNvPr id="10" name="TextBox 9"/>
+          <p:cNvPr id="9" name="TextBox 8"/>
           <p:cNvSpPr txBox="1"/>
           <p:nvPr/>
         </p:nvSpPr>
@@ -11306,7 +10110,7 @@
       </p:sp>
       <p:sp>
         <p:nvSpPr>
-          <p:cNvPr id="11" name="TextBox 10"/>
+          <p:cNvPr id="10" name="TextBox 9"/>
           <p:cNvSpPr txBox="1"/>
           <p:nvPr/>
         </p:nvSpPr>
@@ -11359,7 +10163,7 @@
       </p:sp>
       <p:sp>
         <p:nvSpPr>
-          <p:cNvPr id="12" name="TextBox 11"/>
+          <p:cNvPr id="11" name="TextBox 10"/>
           <p:cNvSpPr txBox="1"/>
           <p:nvPr/>
         </p:nvSpPr>
@@ -11412,7 +10216,7 @@
       </p:sp>
       <p:sp>
         <p:nvSpPr>
-          <p:cNvPr id="13" name="TextBox 12"/>
+          <p:cNvPr id="12" name="TextBox 11"/>
           <p:cNvSpPr txBox="1"/>
           <p:nvPr/>
         </p:nvSpPr>
@@ -11465,7 +10269,7 @@
       </p:sp>
       <p:sp>
         <p:nvSpPr>
-          <p:cNvPr id="14" name="TextBox 13"/>
+          <p:cNvPr id="13" name="TextBox 12"/>
           <p:cNvSpPr txBox="1"/>
           <p:nvPr/>
         </p:nvSpPr>
@@ -11518,7 +10322,7 @@
       </p:sp>
       <p:sp>
         <p:nvSpPr>
-          <p:cNvPr id="15" name="TextBox 14"/>
+          <p:cNvPr id="14" name="TextBox 13"/>
           <p:cNvSpPr txBox="1"/>
           <p:nvPr/>
         </p:nvSpPr>
@@ -11683,44 +10487,9 @@
           </a:fontRef>
         </p:style>
       </p:cxnSp>
-      <p:sp>
-        <p:nvSpPr>
-          <p:cNvPr id="5" name="TextBox 4"/>
-          <p:cNvSpPr txBox="1"/>
-          <p:nvPr/>
-        </p:nvSpPr>
-        <p:spPr>
-          <a:xfrm>
-            <a:off x="777240" y="1261872"/>
-            <a:ext cx="10607040" cy="310896"/>
-          </a:xfrm>
-          <a:prstGeom prst="rect">
-            <a:avLst/>
-          </a:prstGeom>
-          <a:noFill/>
-        </p:spPr>
-        <p:txBody>
-          <a:bodyPr wrap="square" lIns="45720" rIns="45720" tIns="18288" bIns="18288" anchor="t">
-            <a:spAutoFit/>
-          </a:bodyPr>
-          <a:lstStyle/>
-          <a:p>
-            <a:pPr algn="l"/>
-            <a:r>
-              <a:rPr sz="1700" b="0" i="1">
-                <a:solidFill>
-                  <a:srgbClr val="6B6B6B"/>
-                </a:solidFill>
-                <a:latin typeface="Century Schoolbook"/>
-              </a:rPr>
-              <a:t>Boards up on three.</a:t>
-            </a:r>
-          </a:p>
-        </p:txBody>
-      </p:sp>
       <p:cxnSp>
         <p:nvCxnSpPr>
-          <p:cNvPr id="6" name="Connector 5"/>
+          <p:cNvPr id="5" name="Connector 4"/>
           <p:cNvCxnSpPr/>
           <p:nvPr/>
         </p:nvCxnSpPr>
@@ -11755,7 +10524,7 @@
       </p:cxnSp>
       <p:sp>
         <p:nvSpPr>
-          <p:cNvPr id="7" name="TextBox 6"/>
+          <p:cNvPr id="6" name="TextBox 5"/>
           <p:cNvSpPr txBox="1"/>
           <p:nvPr/>
         </p:nvSpPr>
@@ -11790,7 +10559,7 @@
       </p:sp>
       <p:sp>
         <p:nvSpPr>
-          <p:cNvPr id="8" name="TextBox 7"/>
+          <p:cNvPr id="7" name="TextBox 6"/>
           <p:cNvSpPr txBox="1"/>
           <p:nvPr/>
         </p:nvSpPr>
@@ -11825,7 +10594,7 @@
       </p:sp>
       <p:pic>
         <p:nvPicPr>
-          <p:cNvPr id="9" name="Picture 8" descr="e525d712acf4b16c.png"/>
+          <p:cNvPr id="8" name="Picture 7" descr="e525d712acf4b16c.png"/>
           <p:cNvPicPr>
             <a:picLocks noChangeAspect="1"/>
           </p:cNvPicPr>
@@ -11849,7 +10618,7 @@
       </p:pic>
       <p:sp>
         <p:nvSpPr>
-          <p:cNvPr id="10" name="TextBox 9"/>
+          <p:cNvPr id="9" name="TextBox 8"/>
           <p:cNvSpPr txBox="1"/>
           <p:nvPr/>
         </p:nvSpPr>
@@ -11878,41 +10647,6 @@
                 <a:latin typeface="Century Schoolbook"/>
               </a:rPr>
               <a:t>Answer it.</a:t>
-            </a:r>
-          </a:p>
-        </p:txBody>
-      </p:sp>
-      <p:sp>
-        <p:nvSpPr>
-          <p:cNvPr id="11" name="TextBox 10"/>
-          <p:cNvSpPr txBox="1"/>
-          <p:nvPr/>
-        </p:nvSpPr>
-        <p:spPr>
-          <a:xfrm>
-            <a:off x="777240" y="4828032"/>
-            <a:ext cx="10607040" cy="365760"/>
-          </a:xfrm>
-          <a:prstGeom prst="rect">
-            <a:avLst/>
-          </a:prstGeom>
-          <a:noFill/>
-        </p:spPr>
-        <p:txBody>
-          <a:bodyPr wrap="square" lIns="45720" rIns="45720" tIns="18288" bIns="18288" anchor="t">
-            <a:spAutoFit/>
-          </a:bodyPr>
-          <a:lstStyle/>
-          <a:p>
-            <a:pPr algn="ctr"/>
-            <a:r>
-              <a:rPr sz="1900" b="0" i="1">
-                <a:solidFill>
-                  <a:srgbClr val="6B6B6B"/>
-                </a:solidFill>
-                <a:latin typeface="Century Schoolbook"/>
-              </a:rPr>
-              <a:t>Top minus bottom, and the bottom is negative.</a:t>
             </a:r>
           </a:p>
         </p:txBody>
@@ -12040,44 +10774,9 @@
           </a:fontRef>
         </p:style>
       </p:cxnSp>
-      <p:sp>
-        <p:nvSpPr>
-          <p:cNvPr id="5" name="TextBox 4"/>
-          <p:cNvSpPr txBox="1"/>
-          <p:nvPr/>
-        </p:nvSpPr>
-        <p:spPr>
-          <a:xfrm>
-            <a:off x="777240" y="1261872"/>
-            <a:ext cx="10607040" cy="310896"/>
-          </a:xfrm>
-          <a:prstGeom prst="rect">
-            <a:avLst/>
-          </a:prstGeom>
-          <a:noFill/>
-        </p:spPr>
-        <p:txBody>
-          <a:bodyPr wrap="square" lIns="45720" rIns="45720" tIns="18288" bIns="18288" anchor="t">
-            <a:spAutoFit/>
-          </a:bodyPr>
-          <a:lstStyle/>
-          <a:p>
-            <a:pPr algn="l"/>
-            <a:r>
-              <a:rPr sz="1700" b="0" i="1">
-                <a:solidFill>
-                  <a:srgbClr val="6B6B6B"/>
-                </a:solidFill>
-                <a:latin typeface="Century Schoolbook"/>
-              </a:rPr>
-              <a:t>Answer.</a:t>
-            </a:r>
-          </a:p>
-        </p:txBody>
-      </p:sp>
       <p:cxnSp>
         <p:nvCxnSpPr>
-          <p:cNvPr id="6" name="Connector 5"/>
+          <p:cNvPr id="5" name="Connector 4"/>
           <p:cNvCxnSpPr/>
           <p:nvPr/>
         </p:nvCxnSpPr>
@@ -12112,7 +10811,7 @@
       </p:cxnSp>
       <p:sp>
         <p:nvSpPr>
-          <p:cNvPr id="7" name="TextBox 6"/>
+          <p:cNvPr id="6" name="TextBox 5"/>
           <p:cNvSpPr txBox="1"/>
           <p:nvPr/>
         </p:nvSpPr>
@@ -12147,7 +10846,7 @@
       </p:sp>
       <p:sp>
         <p:nvSpPr>
-          <p:cNvPr id="8" name="TextBox 7"/>
+          <p:cNvPr id="7" name="TextBox 6"/>
           <p:cNvSpPr txBox="1"/>
           <p:nvPr/>
         </p:nvSpPr>
@@ -12182,7 +10881,7 @@
       </p:sp>
       <p:pic>
         <p:nvPicPr>
-          <p:cNvPr id="9" name="Picture 8" descr="dd4e224a7fe9f3b4.png"/>
+          <p:cNvPr id="8" name="Picture 7" descr="dd4e224a7fe9f3b4.png"/>
           <p:cNvPicPr>
             <a:picLocks noChangeAspect="1"/>
           </p:cNvPicPr>
@@ -12206,42 +10905,7 @@
       </p:pic>
       <p:sp>
         <p:nvSpPr>
-          <p:cNvPr id="10" name="TextBox 9"/>
-          <p:cNvSpPr txBox="1"/>
-          <p:nvPr/>
-        </p:nvSpPr>
-        <p:spPr>
-          <a:xfrm>
-            <a:off x="1828800" y="3246119"/>
-            <a:ext cx="8503920" cy="548640"/>
-          </a:xfrm>
-          <a:prstGeom prst="rect">
-            <a:avLst/>
-          </a:prstGeom>
-          <a:noFill/>
-        </p:spPr>
-        <p:txBody>
-          <a:bodyPr wrap="square" lIns="45720" rIns="45720" tIns="18288" bIns="18288" anchor="t">
-            <a:spAutoFit/>
-          </a:bodyPr>
-          <a:lstStyle/>
-          <a:p>
-            <a:pPr algn="ctr"/>
-            <a:r>
-              <a:rPr sz="2400" b="0" i="0">
-                <a:solidFill>
-                  <a:srgbClr val="6B6B6B"/>
-                </a:solidFill>
-                <a:latin typeface="Century Schoolbook"/>
-              </a:rPr>
-              <a:t>8 − (−4) = 12</a:t>
-            </a:r>
-          </a:p>
-        </p:txBody>
-      </p:sp>
-      <p:sp>
-        <p:nvSpPr>
-          <p:cNvPr id="11" name="TextBox 10"/>
+          <p:cNvPr id="9" name="TextBox 8"/>
           <p:cNvSpPr txBox="1"/>
           <p:nvPr/>
         </p:nvSpPr>
@@ -12406,44 +11070,9 @@
           </a:fontRef>
         </p:style>
       </p:cxnSp>
-      <p:sp>
-        <p:nvSpPr>
-          <p:cNvPr id="5" name="TextBox 4"/>
-          <p:cNvSpPr txBox="1"/>
-          <p:nvPr/>
-        </p:nvSpPr>
-        <p:spPr>
-          <a:xfrm>
-            <a:off x="777240" y="1261872"/>
-            <a:ext cx="10607040" cy="310896"/>
-          </a:xfrm>
-          <a:prstGeom prst="rect">
-            <a:avLst/>
-          </a:prstGeom>
-          <a:noFill/>
-        </p:spPr>
-        <p:txBody>
-          <a:bodyPr wrap="square" lIns="45720" rIns="45720" tIns="18288" bIns="18288" anchor="t">
-            <a:spAutoFit/>
-          </a:bodyPr>
-          <a:lstStyle/>
-          <a:p>
-            <a:pPr algn="l"/>
-            <a:r>
-              <a:rPr sz="1700" b="0" i="1">
-                <a:solidFill>
-                  <a:srgbClr val="6B6B6B"/>
-                </a:solidFill>
-                <a:latin typeface="Century Schoolbook"/>
-              </a:rPr>
-              <a:t>Boards up on three.</a:t>
-            </a:r>
-          </a:p>
-        </p:txBody>
-      </p:sp>
       <p:cxnSp>
         <p:nvCxnSpPr>
-          <p:cNvPr id="6" name="Connector 5"/>
+          <p:cNvPr id="5" name="Connector 4"/>
           <p:cNvCxnSpPr/>
           <p:nvPr/>
         </p:nvCxnSpPr>
@@ -12478,7 +11107,7 @@
       </p:cxnSp>
       <p:sp>
         <p:nvSpPr>
-          <p:cNvPr id="7" name="TextBox 6"/>
+          <p:cNvPr id="6" name="TextBox 5"/>
           <p:cNvSpPr txBox="1"/>
           <p:nvPr/>
         </p:nvSpPr>
@@ -12513,7 +11142,7 @@
       </p:sp>
       <p:sp>
         <p:nvSpPr>
-          <p:cNvPr id="8" name="TextBox 7"/>
+          <p:cNvPr id="7" name="TextBox 6"/>
           <p:cNvSpPr txBox="1"/>
           <p:nvPr/>
         </p:nvSpPr>
@@ -12548,7 +11177,7 @@
       </p:sp>
       <p:pic>
         <p:nvPicPr>
-          <p:cNvPr id="9" name="Picture 8" descr="cf1acb8271e6df89.png"/>
+          <p:cNvPr id="8" name="Picture 7" descr="cf1acb8271e6df89.png"/>
           <p:cNvPicPr>
             <a:picLocks noChangeAspect="1"/>
           </p:cNvPicPr>
@@ -12572,7 +11201,7 @@
       </p:pic>
       <p:sp>
         <p:nvSpPr>
-          <p:cNvPr id="10" name="TextBox 9"/>
+          <p:cNvPr id="9" name="TextBox 8"/>
           <p:cNvSpPr txBox="1"/>
           <p:nvPr/>
         </p:nvSpPr>
@@ -12607,7 +11236,7 @@
       </p:sp>
       <p:pic>
         <p:nvPicPr>
-          <p:cNvPr id="11" name="Picture 10" descr="ce9b607ea85ce740.png"/>
+          <p:cNvPr id="10" name="Picture 9" descr="ce9b607ea85ce740.png"/>
           <p:cNvPicPr>
             <a:picLocks noChangeAspect="1"/>
           </p:cNvPicPr>
@@ -12631,7 +11260,7 @@
       </p:pic>
       <p:sp>
         <p:nvSpPr>
-          <p:cNvPr id="12" name="TextBox 11"/>
+          <p:cNvPr id="11" name="TextBox 10"/>
           <p:cNvSpPr txBox="1"/>
           <p:nvPr/>
         </p:nvSpPr>
@@ -12666,7 +11295,7 @@
       </p:sp>
       <p:sp>
         <p:nvSpPr>
-          <p:cNvPr id="13" name="TextBox 12"/>
+          <p:cNvPr id="12" name="TextBox 11"/>
           <p:cNvSpPr txBox="1"/>
           <p:nvPr/>
         </p:nvSpPr>
@@ -12695,41 +11324,6 @@
                 <a:latin typeface="Century Schoolbook"/>
               </a:rPr>
               <a:t>Answer it.</a:t>
-            </a:r>
-          </a:p>
-        </p:txBody>
-      </p:sp>
-      <p:sp>
-        <p:nvSpPr>
-          <p:cNvPr id="14" name="TextBox 13"/>
-          <p:cNvSpPr txBox="1"/>
-          <p:nvPr/>
-        </p:nvSpPr>
-        <p:spPr>
-          <a:xfrm>
-            <a:off x="777240" y="4828032"/>
-            <a:ext cx="10607040" cy="365760"/>
-          </a:xfrm>
-          <a:prstGeom prst="rect">
-            <a:avLst/>
-          </a:prstGeom>
-          <a:noFill/>
-        </p:spPr>
-        <p:txBody>
-          <a:bodyPr wrap="square" lIns="45720" rIns="45720" tIns="18288" bIns="18288" anchor="t">
-            <a:spAutoFit/>
-          </a:bodyPr>
-          <a:lstStyle/>
-          <a:p>
-            <a:pPr algn="ctr"/>
-            <a:r>
-              <a:rPr sz="1900" b="0" i="1">
-                <a:solidFill>
-                  <a:srgbClr val="6B6B6B"/>
-                </a:solidFill>
-                <a:latin typeface="Century Schoolbook"/>
-              </a:rPr>
-              <a:t>Look at the coefficients alone.</a:t>
             </a:r>
           </a:p>
         </p:txBody>
@@ -12857,44 +11451,9 @@
           </a:fontRef>
         </p:style>
       </p:cxnSp>
-      <p:sp>
-        <p:nvSpPr>
-          <p:cNvPr id="5" name="TextBox 4"/>
-          <p:cNvSpPr txBox="1"/>
-          <p:nvPr/>
-        </p:nvSpPr>
-        <p:spPr>
-          <a:xfrm>
-            <a:off x="777240" y="1261872"/>
-            <a:ext cx="10607040" cy="310896"/>
-          </a:xfrm>
-          <a:prstGeom prst="rect">
-            <a:avLst/>
-          </a:prstGeom>
-          <a:noFill/>
-        </p:spPr>
-        <p:txBody>
-          <a:bodyPr wrap="square" lIns="45720" rIns="45720" tIns="18288" bIns="18288" anchor="t">
-            <a:spAutoFit/>
-          </a:bodyPr>
-          <a:lstStyle/>
-          <a:p>
-            <a:pPr algn="l"/>
-            <a:r>
-              <a:rPr sz="1700" b="0" i="1">
-                <a:solidFill>
-                  <a:srgbClr val="6B6B6B"/>
-                </a:solidFill>
-                <a:latin typeface="Century Schoolbook"/>
-              </a:rPr>
-              <a:t>Answers.</a:t>
-            </a:r>
-          </a:p>
-        </p:txBody>
-      </p:sp>
       <p:cxnSp>
         <p:nvCxnSpPr>
-          <p:cNvPr id="6" name="Connector 5"/>
+          <p:cNvPr id="5" name="Connector 4"/>
           <p:cNvCxnSpPr/>
           <p:nvPr/>
         </p:nvCxnSpPr>
@@ -12929,7 +11488,7 @@
       </p:cxnSp>
       <p:sp>
         <p:nvSpPr>
-          <p:cNvPr id="7" name="TextBox 6"/>
+          <p:cNvPr id="6" name="TextBox 5"/>
           <p:cNvSpPr txBox="1"/>
           <p:nvPr/>
         </p:nvSpPr>
@@ -12964,7 +11523,7 @@
       </p:sp>
       <p:sp>
         <p:nvSpPr>
-          <p:cNvPr id="8" name="TextBox 7"/>
+          <p:cNvPr id="7" name="TextBox 6"/>
           <p:cNvSpPr txBox="1"/>
           <p:nvPr/>
         </p:nvSpPr>
@@ -12999,13 +11558,13 @@
       </p:sp>
       <p:sp>
         <p:nvSpPr>
-          <p:cNvPr id="9" name="TextBox 8"/>
-          <p:cNvSpPr txBox="1"/>
-          <p:nvPr/>
-        </p:nvSpPr>
-        <p:spPr>
-          <a:xfrm>
-            <a:off x="1874519" y="1760220"/>
+          <p:cNvPr id="8" name="TextBox 7"/>
+          <p:cNvSpPr txBox="1"/>
+          <p:nvPr/>
+        </p:nvSpPr>
+        <p:spPr>
+          <a:xfrm>
+            <a:off x="1874519" y="1440180"/>
             <a:ext cx="720605" cy="457200"/>
           </a:xfrm>
           <a:prstGeom prst="rect">
@@ -13034,7 +11593,7 @@
       </p:sp>
       <p:pic>
         <p:nvPicPr>
-          <p:cNvPr id="10" name="Picture 9" descr="7655f1be3ef33831.png"/>
+          <p:cNvPr id="9" name="Picture 8" descr="7655f1be3ef33831.png"/>
           <p:cNvPicPr>
             <a:picLocks noChangeAspect="1"/>
           </p:cNvPicPr>
@@ -13048,7 +11607,7 @@
         </p:blipFill>
         <p:spPr>
           <a:xfrm>
-            <a:off x="2457965" y="1821180"/>
+            <a:off x="2457965" y="1501140"/>
             <a:ext cx="3099816" cy="335280"/>
           </a:xfrm>
           <a:prstGeom prst="rect">
@@ -13058,13 +11617,13 @@
       </p:pic>
       <p:sp>
         <p:nvSpPr>
-          <p:cNvPr id="11" name="TextBox 10"/>
-          <p:cNvSpPr txBox="1"/>
-          <p:nvPr/>
-        </p:nvSpPr>
-        <p:spPr>
-          <a:xfrm>
-            <a:off x="6106421" y="1760220"/>
+          <p:cNvPr id="10" name="TextBox 9"/>
+          <p:cNvSpPr txBox="1"/>
+          <p:nvPr/>
+        </p:nvSpPr>
+        <p:spPr>
+          <a:xfrm>
+            <a:off x="6106421" y="1440180"/>
             <a:ext cx="1459438" cy="457200"/>
           </a:xfrm>
           <a:prstGeom prst="rect">
@@ -13102,13 +11661,13 @@
       </p:sp>
       <p:sp>
         <p:nvSpPr>
-          <p:cNvPr id="12" name="TextBox 11"/>
-          <p:cNvSpPr txBox="1"/>
-          <p:nvPr/>
-        </p:nvSpPr>
-        <p:spPr>
-          <a:xfrm>
-            <a:off x="1874519" y="2500884"/>
+          <p:cNvPr id="11" name="TextBox 10"/>
+          <p:cNvSpPr txBox="1"/>
+          <p:nvPr/>
+        </p:nvSpPr>
+        <p:spPr>
+          <a:xfrm>
+            <a:off x="1874519" y="2180844"/>
             <a:ext cx="3704805" cy="457200"/>
           </a:xfrm>
           <a:prstGeom prst="rect">
@@ -13137,7 +11696,7 @@
       </p:sp>
       <p:pic>
         <p:nvPicPr>
-          <p:cNvPr id="13" name="Picture 12" descr="911d175e68347695.png"/>
+          <p:cNvPr id="12" name="Picture 11" descr="911d175e68347695.png"/>
           <p:cNvPicPr>
             <a:picLocks noChangeAspect="1"/>
           </p:cNvPicPr>
@@ -13151,7 +11710,7 @@
         </p:blipFill>
         <p:spPr>
           <a:xfrm>
-            <a:off x="5442165" y="2395728"/>
+            <a:off x="5442165" y="2075688"/>
             <a:ext cx="469392" cy="667512"/>
           </a:xfrm>
           <a:prstGeom prst="rect">
@@ -13161,13 +11720,13 @@
       </p:pic>
       <p:sp>
         <p:nvSpPr>
-          <p:cNvPr id="14" name="TextBox 13"/>
-          <p:cNvSpPr txBox="1"/>
-          <p:nvPr/>
-        </p:nvSpPr>
-        <p:spPr>
-          <a:xfrm>
-            <a:off x="6460197" y="2372868"/>
+          <p:cNvPr id="13" name="TextBox 12"/>
+          <p:cNvSpPr txBox="1"/>
+          <p:nvPr/>
+        </p:nvSpPr>
+        <p:spPr>
+          <a:xfrm>
+            <a:off x="6460197" y="2052828"/>
             <a:ext cx="652507" cy="457200"/>
           </a:xfrm>
           <a:prstGeom prst="rect">
@@ -13205,13 +11764,13 @@
       </p:sp>
       <p:sp>
         <p:nvSpPr>
-          <p:cNvPr id="15" name="TextBox 14"/>
-          <p:cNvSpPr txBox="1"/>
-          <p:nvPr/>
-        </p:nvSpPr>
-        <p:spPr>
-          <a:xfrm>
-            <a:off x="1874519" y="3241548"/>
+          <p:cNvPr id="14" name="TextBox 13"/>
+          <p:cNvSpPr txBox="1"/>
+          <p:nvPr/>
+        </p:nvSpPr>
+        <p:spPr>
+          <a:xfrm>
+            <a:off x="1874519" y="2921508"/>
             <a:ext cx="3064939" cy="457200"/>
           </a:xfrm>
           <a:prstGeom prst="rect">
@@ -13240,7 +11799,7 @@
       </p:sp>
       <p:pic>
         <p:nvPicPr>
-          <p:cNvPr id="16" name="Picture 15" descr="d68e6e8f02f1f5eb.png"/>
+          <p:cNvPr id="15" name="Picture 14" descr="d68e6e8f02f1f5eb.png"/>
           <p:cNvPicPr>
             <a:picLocks noChangeAspect="1"/>
           </p:cNvPicPr>
@@ -13254,7 +11813,7 @@
         </p:blipFill>
         <p:spPr>
           <a:xfrm>
-            <a:off x="4802299" y="3265932"/>
+            <a:off x="4802299" y="2945892"/>
             <a:ext cx="853440" cy="408432"/>
           </a:xfrm>
           <a:prstGeom prst="rect">
@@ -13264,13 +11823,13 @@
       </p:pic>
       <p:sp>
         <p:nvSpPr>
-          <p:cNvPr id="17" name="TextBox 16"/>
-          <p:cNvSpPr txBox="1"/>
-          <p:nvPr/>
-        </p:nvSpPr>
-        <p:spPr>
-          <a:xfrm>
-            <a:off x="6204379" y="3241548"/>
+          <p:cNvPr id="16" name="TextBox 15"/>
+          <p:cNvSpPr txBox="1"/>
+          <p:nvPr/>
+        </p:nvSpPr>
+        <p:spPr>
+          <a:xfrm>
+            <a:off x="6204379" y="2921508"/>
             <a:ext cx="565792" cy="457200"/>
           </a:xfrm>
           <a:prstGeom prst="rect">
@@ -13299,13 +11858,13 @@
       </p:sp>
       <p:sp>
         <p:nvSpPr>
-          <p:cNvPr id="18" name="TextBox 17"/>
-          <p:cNvSpPr txBox="1"/>
-          <p:nvPr/>
-        </p:nvSpPr>
-        <p:spPr>
-          <a:xfrm>
-            <a:off x="1874519" y="3930396"/>
+          <p:cNvPr id="17" name="TextBox 16"/>
+          <p:cNvSpPr txBox="1"/>
+          <p:nvPr/>
+        </p:nvSpPr>
+        <p:spPr>
+          <a:xfrm>
+            <a:off x="1874519" y="3610356"/>
             <a:ext cx="3474215" cy="457200"/>
           </a:xfrm>
           <a:prstGeom prst="rect">
@@ -13334,7 +11893,7 @@
       </p:sp>
       <p:pic>
         <p:nvPicPr>
-          <p:cNvPr id="19" name="Picture 18" descr="57c14efe46195709.png"/>
+          <p:cNvPr id="18" name="Picture 17" descr="57c14efe46195709.png"/>
           <p:cNvPicPr>
             <a:picLocks noChangeAspect="1"/>
           </p:cNvPicPr>
@@ -13348,7 +11907,7 @@
         </p:blipFill>
         <p:spPr>
           <a:xfrm>
-            <a:off x="5211575" y="3877056"/>
+            <a:off x="5211575" y="3557016"/>
             <a:ext cx="417576" cy="563880"/>
           </a:xfrm>
           <a:prstGeom prst="rect">
@@ -13358,13 +11917,13 @@
       </p:pic>
       <p:sp>
         <p:nvSpPr>
-          <p:cNvPr id="20" name="TextBox 19"/>
-          <p:cNvSpPr txBox="1"/>
-          <p:nvPr/>
-        </p:nvSpPr>
-        <p:spPr>
-          <a:xfrm>
-            <a:off x="6177791" y="3854196"/>
+          <p:cNvPr id="19" name="TextBox 18"/>
+          <p:cNvSpPr txBox="1"/>
+          <p:nvPr/>
+        </p:nvSpPr>
+        <p:spPr>
+          <a:xfrm>
+            <a:off x="6177791" y="3534156"/>
             <a:ext cx="388052" cy="457200"/>
           </a:xfrm>
           <a:prstGeom prst="rect">
@@ -13514,44 +12073,9 @@
           </a:fontRef>
         </p:style>
       </p:cxnSp>
-      <p:sp>
-        <p:nvSpPr>
-          <p:cNvPr id="5" name="TextBox 4"/>
-          <p:cNvSpPr txBox="1"/>
-          <p:nvPr/>
-        </p:nvSpPr>
-        <p:spPr>
-          <a:xfrm>
-            <a:off x="777240" y="1261872"/>
-            <a:ext cx="10607040" cy="310896"/>
-          </a:xfrm>
-          <a:prstGeom prst="rect">
-            <a:avLst/>
-          </a:prstGeom>
-          <a:noFill/>
-        </p:spPr>
-        <p:txBody>
-          <a:bodyPr wrap="square" lIns="45720" rIns="45720" tIns="18288" bIns="18288" anchor="t">
-            <a:spAutoFit/>
-          </a:bodyPr>
-          <a:lstStyle/>
-          <a:p>
-            <a:pPr algn="l"/>
-            <a:r>
-              <a:rPr sz="1700" b="0" i="1">
-                <a:solidFill>
-                  <a:srgbClr val="6B6B6B"/>
-                </a:solidFill>
-                <a:latin typeface="Century Schoolbook"/>
-              </a:rPr>
-              <a:t>Answer.</a:t>
-            </a:r>
-          </a:p>
-        </p:txBody>
-      </p:sp>
       <p:cxnSp>
         <p:nvCxnSpPr>
-          <p:cNvPr id="6" name="Connector 5"/>
+          <p:cNvPr id="5" name="Connector 4"/>
           <p:cNvCxnSpPr/>
           <p:nvPr/>
         </p:nvCxnSpPr>
@@ -13586,7 +12110,7 @@
       </p:cxnSp>
       <p:sp>
         <p:nvSpPr>
-          <p:cNvPr id="7" name="TextBox 6"/>
+          <p:cNvPr id="6" name="TextBox 5"/>
           <p:cNvSpPr txBox="1"/>
           <p:nvPr/>
         </p:nvSpPr>
@@ -13621,7 +12145,7 @@
       </p:sp>
       <p:sp>
         <p:nvSpPr>
-          <p:cNvPr id="8" name="TextBox 7"/>
+          <p:cNvPr id="7" name="TextBox 6"/>
           <p:cNvSpPr txBox="1"/>
           <p:nvPr/>
         </p:nvSpPr>
@@ -13656,7 +12180,7 @@
       </p:sp>
       <p:pic>
         <p:nvPicPr>
-          <p:cNvPr id="9" name="Picture 8" descr="49829e386e3352b6.png"/>
+          <p:cNvPr id="8" name="Picture 7" descr="49829e386e3352b6.png"/>
           <p:cNvPicPr>
             <a:picLocks noChangeAspect="1"/>
           </p:cNvPicPr>
@@ -13680,7 +12204,7 @@
       </p:pic>
       <p:sp>
         <p:nvSpPr>
-          <p:cNvPr id="10" name="TextBox 9"/>
+          <p:cNvPr id="9" name="TextBox 8"/>
           <p:cNvSpPr txBox="1"/>
           <p:nvPr/>
         </p:nvSpPr>
@@ -13715,7 +12239,7 @@
       </p:sp>
       <p:pic>
         <p:nvPicPr>
-          <p:cNvPr id="11" name="Picture 10" descr="ce9b607ea85ce740.png"/>
+          <p:cNvPr id="10" name="Picture 9" descr="ce9b607ea85ce740.png"/>
           <p:cNvPicPr>
             <a:picLocks noChangeAspect="1"/>
           </p:cNvPicPr>
@@ -13739,7 +12263,7 @@
       </p:pic>
       <p:sp>
         <p:nvSpPr>
-          <p:cNvPr id="12" name="TextBox 11"/>
+          <p:cNvPr id="11" name="TextBox 10"/>
           <p:cNvSpPr txBox="1"/>
           <p:nvPr/>
         </p:nvSpPr>
@@ -13774,42 +12298,7 @@
       </p:sp>
       <p:sp>
         <p:nvSpPr>
-          <p:cNvPr id="13" name="TextBox 12"/>
-          <p:cNvSpPr txBox="1"/>
-          <p:nvPr/>
-        </p:nvSpPr>
-        <p:spPr>
-          <a:xfrm>
-            <a:off x="1828800" y="3925823"/>
-            <a:ext cx="8503920" cy="548640"/>
-          </a:xfrm>
-          <a:prstGeom prst="rect">
-            <a:avLst/>
-          </a:prstGeom>
-          <a:noFill/>
-        </p:spPr>
-        <p:txBody>
-          <a:bodyPr wrap="square" lIns="45720" rIns="45720" tIns="18288" bIns="18288" anchor="t">
-            <a:spAutoFit/>
-          </a:bodyPr>
-          <a:lstStyle/>
-          <a:p>
-            <a:pPr algn="ctr"/>
-            <a:r>
-              <a:rPr sz="2400" b="0" i="0">
-                <a:solidFill>
-                  <a:srgbClr val="6B6B6B"/>
-                </a:solidFill>
-                <a:latin typeface="Century Schoolbook"/>
-              </a:rPr>
-              <a:t>8.4 ÷ n = 4.2</a:t>
-            </a:r>
-          </a:p>
-        </p:txBody>
-      </p:sp>
-      <p:sp>
-        <p:nvSpPr>
-          <p:cNvPr id="14" name="TextBox 13"/>
+          <p:cNvPr id="12" name="TextBox 11"/>
           <p:cNvSpPr txBox="1"/>
           <p:nvPr/>
         </p:nvSpPr>
@@ -13965,44 +12454,9 @@
           </a:fontRef>
         </p:style>
       </p:cxnSp>
-      <p:sp>
-        <p:nvSpPr>
-          <p:cNvPr id="5" name="TextBox 4"/>
-          <p:cNvSpPr txBox="1"/>
-          <p:nvPr/>
-        </p:nvSpPr>
-        <p:spPr>
-          <a:xfrm>
-            <a:off x="777240" y="1261872"/>
-            <a:ext cx="10607040" cy="310896"/>
-          </a:xfrm>
-          <a:prstGeom prst="rect">
-            <a:avLst/>
-          </a:prstGeom>
-          <a:noFill/>
-        </p:spPr>
-        <p:txBody>
-          <a:bodyPr wrap="square" lIns="45720" rIns="45720" tIns="18288" bIns="18288" anchor="t">
-            <a:spAutoFit/>
-          </a:bodyPr>
-          <a:lstStyle/>
-          <a:p>
-            <a:pPr algn="l"/>
-            <a:r>
-              <a:rPr sz="1700" b="0" i="1">
-                <a:solidFill>
-                  <a:srgbClr val="6B6B6B"/>
-                </a:solidFill>
-                <a:latin typeface="Century Schoolbook"/>
-              </a:rPr>
-              <a:t>Take your time. Boards up when you have written it.</a:t>
-            </a:r>
-          </a:p>
-        </p:txBody>
-      </p:sp>
       <p:cxnSp>
         <p:nvCxnSpPr>
-          <p:cNvPr id="6" name="Connector 5"/>
+          <p:cNvPr id="5" name="Connector 4"/>
           <p:cNvCxnSpPr/>
           <p:nvPr/>
         </p:nvCxnSpPr>
@@ -14037,7 +12491,7 @@
       </p:cxnSp>
       <p:sp>
         <p:nvSpPr>
-          <p:cNvPr id="7" name="TextBox 6"/>
+          <p:cNvPr id="6" name="TextBox 5"/>
           <p:cNvSpPr txBox="1"/>
           <p:nvPr/>
         </p:nvSpPr>
@@ -14072,7 +12526,7 @@
       </p:sp>
       <p:sp>
         <p:nvSpPr>
-          <p:cNvPr id="8" name="TextBox 7"/>
+          <p:cNvPr id="7" name="TextBox 6"/>
           <p:cNvSpPr txBox="1"/>
           <p:nvPr/>
         </p:nvSpPr>
@@ -14107,7 +12561,7 @@
       </p:sp>
       <p:sp>
         <p:nvSpPr>
-          <p:cNvPr id="9" name="TextBox 8"/>
+          <p:cNvPr id="8" name="TextBox 7"/>
           <p:cNvSpPr txBox="1"/>
           <p:nvPr/>
         </p:nvSpPr>
@@ -14142,7 +12596,7 @@
       </p:sp>
       <p:pic>
         <p:nvPicPr>
-          <p:cNvPr id="10" name="Picture 9" descr="497afcee60275d61.png"/>
+          <p:cNvPr id="9" name="Picture 8" descr="497afcee60275d61.png"/>
           <p:cNvPicPr>
             <a:picLocks noChangeAspect="1"/>
           </p:cNvPicPr>
@@ -14166,7 +12620,7 @@
       </p:pic>
       <p:sp>
         <p:nvSpPr>
-          <p:cNvPr id="11" name="TextBox 10"/>
+          <p:cNvPr id="10" name="TextBox 9"/>
           <p:cNvSpPr txBox="1"/>
           <p:nvPr/>
         </p:nvSpPr>
@@ -14201,7 +12655,7 @@
       </p:sp>
       <p:pic>
         <p:nvPicPr>
-          <p:cNvPr id="12" name="Picture 11" descr="a61c108a2c4f32af.png"/>
+          <p:cNvPr id="11" name="Picture 10" descr="a61c108a2c4f32af.png"/>
           <p:cNvPicPr>
             <a:picLocks noChangeAspect="1"/>
           </p:cNvPicPr>
@@ -14225,7 +12679,7 @@
       </p:pic>
       <p:sp>
         <p:nvSpPr>
-          <p:cNvPr id="13" name="TextBox 12"/>
+          <p:cNvPr id="12" name="TextBox 11"/>
           <p:cNvSpPr txBox="1"/>
           <p:nvPr/>
         </p:nvSpPr>
@@ -14260,7 +12714,7 @@
       </p:sp>
       <p:pic>
         <p:nvPicPr>
-          <p:cNvPr id="14" name="Picture 13" descr="5029bb2e4362f29c.png"/>
+          <p:cNvPr id="13" name="Picture 12" descr="5029bb2e4362f29c.png"/>
           <p:cNvPicPr>
             <a:picLocks noChangeAspect="1"/>
           </p:cNvPicPr>
@@ -14284,7 +12738,7 @@
       </p:pic>
       <p:sp>
         <p:nvSpPr>
-          <p:cNvPr id="15" name="TextBox 14"/>
+          <p:cNvPr id="14" name="TextBox 13"/>
           <p:cNvSpPr txBox="1"/>
           <p:nvPr/>
         </p:nvSpPr>
@@ -14319,7 +12773,7 @@
       </p:sp>
       <p:sp>
         <p:nvSpPr>
-          <p:cNvPr id="16" name="TextBox 15"/>
+          <p:cNvPr id="15" name="TextBox 14"/>
           <p:cNvSpPr txBox="1"/>
           <p:nvPr/>
         </p:nvSpPr>
@@ -14348,41 +12802,6 @@
                 <a:latin typeface="Century Schoolbook"/>
               </a:rPr>
               <a:t>Write your answer in sentences.</a:t>
-            </a:r>
-          </a:p>
-        </p:txBody>
-      </p:sp>
-      <p:sp>
-        <p:nvSpPr>
-          <p:cNvPr id="17" name="TextBox 16"/>
-          <p:cNvSpPr txBox="1"/>
-          <p:nvPr/>
-        </p:nvSpPr>
-        <p:spPr>
-          <a:xfrm>
-            <a:off x="777240" y="5123688"/>
-            <a:ext cx="10607040" cy="365760"/>
-          </a:xfrm>
-          <a:prstGeom prst="rect">
-            <a:avLst/>
-          </a:prstGeom>
-          <a:noFill/>
-        </p:spPr>
-        <p:txBody>
-          <a:bodyPr wrap="square" lIns="45720" rIns="45720" tIns="18288" bIns="18288" anchor="t">
-            <a:spAutoFit/>
-          </a:bodyPr>
-          <a:lstStyle/>
-          <a:p>
-            <a:pPr algn="ctr"/>
-            <a:r>
-              <a:rPr sz="1900" b="0" i="1">
-                <a:solidFill>
-                  <a:srgbClr val="6B6B6B"/>
-                </a:solidFill>
-                <a:latin typeface="Century Schoolbook"/>
-              </a:rPr>
-              <a:t>Each one got exactly one half right.</a:t>
             </a:r>
           </a:p>
         </p:txBody>
@@ -14510,44 +12929,9 @@
           </a:fontRef>
         </p:style>
       </p:cxnSp>
-      <p:sp>
-        <p:nvSpPr>
-          <p:cNvPr id="5" name="TextBox 4"/>
-          <p:cNvSpPr txBox="1"/>
-          <p:nvPr/>
-        </p:nvSpPr>
-        <p:spPr>
-          <a:xfrm>
-            <a:off x="777240" y="1261872"/>
-            <a:ext cx="10607040" cy="310896"/>
-          </a:xfrm>
-          <a:prstGeom prst="rect">
-            <a:avLst/>
-          </a:prstGeom>
-          <a:noFill/>
-        </p:spPr>
-        <p:txBody>
-          <a:bodyPr wrap="square" lIns="45720" rIns="45720" tIns="18288" bIns="18288" anchor="t">
-            <a:spAutoFit/>
-          </a:bodyPr>
-          <a:lstStyle/>
-          <a:p>
-            <a:pPr algn="l"/>
-            <a:r>
-              <a:rPr sz="1700" b="0" i="1">
-                <a:solidFill>
-                  <a:srgbClr val="6B6B6B"/>
-                </a:solidFill>
-                <a:latin typeface="Century Schoolbook"/>
-              </a:rPr>
-              <a:t>Answer.</a:t>
-            </a:r>
-          </a:p>
-        </p:txBody>
-      </p:sp>
       <p:cxnSp>
         <p:nvCxnSpPr>
-          <p:cNvPr id="6" name="Connector 5"/>
+          <p:cNvPr id="5" name="Connector 4"/>
           <p:cNvCxnSpPr/>
           <p:nvPr/>
         </p:nvCxnSpPr>
@@ -14582,7 +12966,7 @@
       </p:cxnSp>
       <p:sp>
         <p:nvSpPr>
-          <p:cNvPr id="7" name="TextBox 6"/>
+          <p:cNvPr id="6" name="TextBox 5"/>
           <p:cNvSpPr txBox="1"/>
           <p:nvPr/>
         </p:nvSpPr>
@@ -14617,7 +13001,7 @@
       </p:sp>
       <p:sp>
         <p:nvSpPr>
-          <p:cNvPr id="8" name="TextBox 7"/>
+          <p:cNvPr id="7" name="TextBox 6"/>
           <p:cNvSpPr txBox="1"/>
           <p:nvPr/>
         </p:nvSpPr>
@@ -14652,7 +13036,7 @@
       </p:sp>
       <p:sp>
         <p:nvSpPr>
-          <p:cNvPr id="9" name="TextBox 8"/>
+          <p:cNvPr id="8" name="TextBox 7"/>
           <p:cNvSpPr txBox="1"/>
           <p:nvPr/>
         </p:nvSpPr>
@@ -14687,7 +13071,7 @@
       </p:sp>
       <p:pic>
         <p:nvPicPr>
-          <p:cNvPr id="10" name="Picture 9" descr="11453e40830bd3a9.png"/>
+          <p:cNvPr id="9" name="Picture 8" descr="11453e40830bd3a9.png"/>
           <p:cNvPicPr>
             <a:picLocks noChangeAspect="1"/>
           </p:cNvPicPr>
@@ -14711,7 +13095,7 @@
       </p:pic>
       <p:sp>
         <p:nvSpPr>
-          <p:cNvPr id="11" name="TextBox 10"/>
+          <p:cNvPr id="10" name="TextBox 9"/>
           <p:cNvSpPr txBox="1"/>
           <p:nvPr/>
         </p:nvSpPr>
@@ -14746,7 +13130,7 @@
       </p:sp>
       <p:pic>
         <p:nvPicPr>
-          <p:cNvPr id="12" name="Picture 11" descr="9220e587e37081e6.png"/>
+          <p:cNvPr id="11" name="Picture 10" descr="9220e587e37081e6.png"/>
           <p:cNvPicPr>
             <a:picLocks noChangeAspect="1"/>
           </p:cNvPicPr>
@@ -14770,7 +13154,7 @@
       </p:pic>
       <p:sp>
         <p:nvSpPr>
-          <p:cNvPr id="13" name="TextBox 12"/>
+          <p:cNvPr id="12" name="TextBox 11"/>
           <p:cNvSpPr txBox="1"/>
           <p:nvPr/>
         </p:nvSpPr>
@@ -14805,7 +13189,7 @@
       </p:sp>
       <p:pic>
         <p:nvPicPr>
-          <p:cNvPr id="14" name="Picture 13" descr="6afd167257bcd611.png"/>
+          <p:cNvPr id="13" name="Picture 12" descr="6afd167257bcd611.png"/>
           <p:cNvPicPr>
             <a:picLocks noChangeAspect="1"/>
           </p:cNvPicPr>
@@ -14829,7 +13213,7 @@
       </p:pic>
       <p:sp>
         <p:nvSpPr>
-          <p:cNvPr id="15" name="TextBox 14"/>
+          <p:cNvPr id="14" name="TextBox 13"/>
           <p:cNvSpPr txBox="1"/>
           <p:nvPr/>
         </p:nvSpPr>
@@ -14864,48 +13248,13 @@
       </p:sp>
       <p:sp>
         <p:nvSpPr>
-          <p:cNvPr id="16" name="TextBox 15"/>
-          <p:cNvSpPr txBox="1"/>
-          <p:nvPr/>
-        </p:nvSpPr>
-        <p:spPr>
-          <a:xfrm>
-            <a:off x="1828800" y="4450080"/>
-            <a:ext cx="8503920" cy="548640"/>
-          </a:xfrm>
-          <a:prstGeom prst="rect">
-            <a:avLst/>
-          </a:prstGeom>
-          <a:noFill/>
-        </p:spPr>
-        <p:txBody>
-          <a:bodyPr wrap="square" lIns="45720" rIns="45720" tIns="18288" bIns="18288" anchor="t">
-            <a:spAutoFit/>
-          </a:bodyPr>
-          <a:lstStyle/>
-          <a:p>
-            <a:pPr algn="ctr"/>
-            <a:r>
-              <a:rPr sz="2400" b="0" i="0">
-                <a:solidFill>
-                  <a:srgbClr val="6B6B6B"/>
-                </a:solidFill>
-                <a:latin typeface="Century Schoolbook"/>
-              </a:rPr>
-              <a:t>one wrong in front, one wrong behind</a:t>
-            </a:r>
-          </a:p>
-        </p:txBody>
-      </p:sp>
-      <p:sp>
-        <p:nvSpPr>
-          <p:cNvPr id="17" name="TextBox 16"/>
-          <p:cNvSpPr txBox="1"/>
-          <p:nvPr/>
-        </p:nvSpPr>
-        <p:spPr>
-          <a:xfrm>
-            <a:off x="777240" y="5181600"/>
+          <p:cNvPr id="15" name="TextBox 14"/>
+          <p:cNvSpPr txBox="1"/>
+          <p:nvPr/>
+        </p:nvSpPr>
+        <p:spPr>
+          <a:xfrm>
+            <a:off x="777240" y="4663440"/>
             <a:ext cx="10607040" cy="548640"/>
           </a:xfrm>
           <a:prstGeom prst="rect">
@@ -15064,44 +13413,9 @@
           </a:fontRef>
         </p:style>
       </p:cxnSp>
-      <p:sp>
-        <p:nvSpPr>
-          <p:cNvPr id="5" name="TextBox 4"/>
-          <p:cNvSpPr txBox="1"/>
-          <p:nvPr/>
-        </p:nvSpPr>
-        <p:spPr>
-          <a:xfrm>
-            <a:off x="777240" y="1261872"/>
-            <a:ext cx="10607040" cy="310896"/>
-          </a:xfrm>
-          <a:prstGeom prst="rect">
-            <a:avLst/>
-          </a:prstGeom>
-          <a:noFill/>
-        </p:spPr>
-        <p:txBody>
-          <a:bodyPr wrap="square" lIns="45720" rIns="45720" tIns="18288" bIns="18288" anchor="t">
-            <a:spAutoFit/>
-          </a:bodyPr>
-          <a:lstStyle/>
-          <a:p>
-            <a:pPr algn="l"/>
-            <a:r>
-              <a:rPr sz="1700" b="0" i="1">
-                <a:solidFill>
-                  <a:srgbClr val="6B6B6B"/>
-                </a:solidFill>
-                <a:latin typeface="Century Schoolbook"/>
-              </a:rPr>
-              <a:t>Six questions. On your own, in silence.</a:t>
-            </a:r>
-          </a:p>
-        </p:txBody>
-      </p:sp>
       <p:cxnSp>
         <p:nvCxnSpPr>
-          <p:cNvPr id="6" name="Connector 5"/>
+          <p:cNvPr id="5" name="Connector 4"/>
           <p:cNvCxnSpPr/>
           <p:nvPr/>
         </p:nvCxnSpPr>
@@ -15136,7 +13450,7 @@
       </p:cxnSp>
       <p:sp>
         <p:nvSpPr>
-          <p:cNvPr id="7" name="TextBox 6"/>
+          <p:cNvPr id="6" name="TextBox 5"/>
           <p:cNvSpPr txBox="1"/>
           <p:nvPr/>
         </p:nvSpPr>
@@ -15171,7 +13485,7 @@
       </p:sp>
       <p:sp>
         <p:nvSpPr>
-          <p:cNvPr id="8" name="TextBox 7"/>
+          <p:cNvPr id="7" name="TextBox 6"/>
           <p:cNvSpPr txBox="1"/>
           <p:nvPr/>
         </p:nvSpPr>
@@ -15206,7 +13520,7 @@
       </p:sp>
       <p:sp>
         <p:nvSpPr>
-          <p:cNvPr id="9" name="TextBox 8"/>
+          <p:cNvPr id="8" name="TextBox 7"/>
           <p:cNvSpPr txBox="1"/>
           <p:nvPr/>
         </p:nvSpPr>
@@ -15241,7 +13555,7 @@
       </p:sp>
       <p:sp>
         <p:nvSpPr>
-          <p:cNvPr id="10" name="TextBox 9"/>
+          <p:cNvPr id="9" name="TextBox 8"/>
           <p:cNvSpPr txBox="1"/>
           <p:nvPr/>
         </p:nvSpPr>
@@ -15276,7 +13590,7 @@
       </p:sp>
       <p:sp>
         <p:nvSpPr>
-          <p:cNvPr id="11" name="TextBox 10"/>
+          <p:cNvPr id="10" name="TextBox 9"/>
           <p:cNvSpPr txBox="1"/>
           <p:nvPr/>
         </p:nvSpPr>
@@ -15311,7 +13625,7 @@
       </p:sp>
       <p:sp>
         <p:nvSpPr>
-          <p:cNvPr id="12" name="TextBox 11"/>
+          <p:cNvPr id="11" name="TextBox 10"/>
           <p:cNvSpPr txBox="1"/>
           <p:nvPr/>
         </p:nvSpPr>
@@ -15346,7 +13660,7 @@
       </p:sp>
       <p:sp>
         <p:nvSpPr>
-          <p:cNvPr id="13" name="TextBox 12"/>
+          <p:cNvPr id="12" name="TextBox 11"/>
           <p:cNvSpPr txBox="1"/>
           <p:nvPr/>
         </p:nvSpPr>
@@ -15381,7 +13695,7 @@
       </p:sp>
       <p:sp>
         <p:nvSpPr>
-          <p:cNvPr id="14" name="TextBox 13"/>
+          <p:cNvPr id="13" name="TextBox 12"/>
           <p:cNvSpPr txBox="1"/>
           <p:nvPr/>
         </p:nvSpPr>
@@ -15537,44 +13851,9 @@
           </a:fontRef>
         </p:style>
       </p:cxnSp>
-      <p:sp>
-        <p:nvSpPr>
-          <p:cNvPr id="5" name="TextBox 4"/>
-          <p:cNvSpPr txBox="1"/>
-          <p:nvPr/>
-        </p:nvSpPr>
-        <p:spPr>
-          <a:xfrm>
-            <a:off x="777240" y="1261872"/>
-            <a:ext cx="10607040" cy="310896"/>
-          </a:xfrm>
-          <a:prstGeom prst="rect">
-            <a:avLst/>
-          </a:prstGeom>
-          <a:noFill/>
-        </p:spPr>
-        <p:txBody>
-          <a:bodyPr wrap="square" lIns="45720" rIns="45720" tIns="18288" bIns="18288" anchor="t">
-            <a:spAutoFit/>
-          </a:bodyPr>
-          <a:lstStyle/>
-          <a:p>
-            <a:pPr algn="l"/>
-            <a:r>
-              <a:rPr sz="1700" b="0" i="1">
-                <a:solidFill>
-                  <a:srgbClr val="6B6B6B"/>
-                </a:solidFill>
-                <a:latin typeface="Century Schoolbook"/>
-              </a:rPr>
-              <a:t>Last five minutes.</a:t>
-            </a:r>
-          </a:p>
-        </p:txBody>
-      </p:sp>
       <p:cxnSp>
         <p:nvCxnSpPr>
-          <p:cNvPr id="6" name="Connector 5"/>
+          <p:cNvPr id="5" name="Connector 4"/>
           <p:cNvCxnSpPr/>
           <p:nvPr/>
         </p:nvCxnSpPr>
@@ -15609,7 +13888,7 @@
       </p:cxnSp>
       <p:sp>
         <p:nvSpPr>
-          <p:cNvPr id="7" name="TextBox 6"/>
+          <p:cNvPr id="6" name="TextBox 5"/>
           <p:cNvSpPr txBox="1"/>
           <p:nvPr/>
         </p:nvSpPr>
@@ -15644,7 +13923,7 @@
       </p:sp>
       <p:sp>
         <p:nvSpPr>
-          <p:cNvPr id="8" name="TextBox 7"/>
+          <p:cNvPr id="7" name="TextBox 6"/>
           <p:cNvSpPr txBox="1"/>
           <p:nvPr/>
         </p:nvSpPr>
@@ -15679,7 +13958,7 @@
       </p:sp>
       <p:sp>
         <p:nvSpPr>
-          <p:cNvPr id="9" name="TextBox 8"/>
+          <p:cNvPr id="8" name="TextBox 7"/>
           <p:cNvSpPr txBox="1"/>
           <p:nvPr/>
         </p:nvSpPr>
@@ -15714,7 +13993,7 @@
       </p:sp>
       <p:sp>
         <p:nvSpPr>
-          <p:cNvPr id="10" name="TextBox 9"/>
+          <p:cNvPr id="9" name="TextBox 8"/>
           <p:cNvSpPr txBox="1"/>
           <p:nvPr/>
         </p:nvSpPr>
@@ -15749,7 +14028,7 @@
       </p:sp>
       <p:sp>
         <p:nvSpPr>
-          <p:cNvPr id="11" name="TextBox 10"/>
+          <p:cNvPr id="10" name="TextBox 9"/>
           <p:cNvSpPr txBox="1"/>
           <p:nvPr/>
         </p:nvSpPr>
@@ -15784,7 +14063,7 @@
       </p:sp>
       <p:sp>
         <p:nvSpPr>
-          <p:cNvPr id="12" name="TextBox 11"/>
+          <p:cNvPr id="11" name="TextBox 10"/>
           <p:cNvSpPr txBox="1"/>
           <p:nvPr/>
         </p:nvSpPr>
@@ -15819,7 +14098,7 @@
       </p:sp>
       <p:sp>
         <p:nvSpPr>
-          <p:cNvPr id="13" name="TextBox 12"/>
+          <p:cNvPr id="12" name="TextBox 11"/>
           <p:cNvSpPr txBox="1"/>
           <p:nvPr/>
         </p:nvSpPr>
@@ -15854,7 +14133,7 @@
       </p:sp>
       <p:sp>
         <p:nvSpPr>
-          <p:cNvPr id="14" name="TextBox 13"/>
+          <p:cNvPr id="13" name="TextBox 12"/>
           <p:cNvSpPr txBox="1"/>
           <p:nvPr/>
         </p:nvSpPr>
@@ -15889,7 +14168,7 @@
       </p:sp>
       <p:sp>
         <p:nvSpPr>
-          <p:cNvPr id="15" name="TextBox 14"/>
+          <p:cNvPr id="14" name="TextBox 13"/>
           <p:cNvSpPr txBox="1"/>
           <p:nvPr/>
         </p:nvSpPr>
@@ -15924,7 +14203,7 @@
       </p:sp>
       <p:sp>
         <p:nvSpPr>
-          <p:cNvPr id="16" name="TextBox 15"/>
+          <p:cNvPr id="15" name="TextBox 14"/>
           <p:cNvSpPr txBox="1"/>
           <p:nvPr/>
         </p:nvSpPr>
@@ -15959,7 +14238,7 @@
       </p:sp>
       <p:sp>
         <p:nvSpPr>
-          <p:cNvPr id="17" name="TextBox 16"/>
+          <p:cNvPr id="16" name="TextBox 15"/>
           <p:cNvSpPr txBox="1"/>
           <p:nvPr/>
         </p:nvSpPr>
@@ -16115,44 +14394,9 @@
           </a:fontRef>
         </p:style>
       </p:cxnSp>
-      <p:sp>
-        <p:nvSpPr>
-          <p:cNvPr id="5" name="TextBox 4"/>
-          <p:cNvSpPr txBox="1"/>
-          <p:nvPr/>
-        </p:nvSpPr>
-        <p:spPr>
-          <a:xfrm>
-            <a:off x="777240" y="1261872"/>
-            <a:ext cx="10607040" cy="310896"/>
-          </a:xfrm>
-          <a:prstGeom prst="rect">
-            <a:avLst/>
-          </a:prstGeom>
-          <a:noFill/>
-        </p:spPr>
-        <p:txBody>
-          <a:bodyPr wrap="square" lIns="45720" rIns="45720" tIns="18288" bIns="18288" anchor="t">
-            <a:spAutoFit/>
-          </a:bodyPr>
-          <a:lstStyle/>
-          <a:p>
-            <a:pPr algn="l"/>
-            <a:r>
-              <a:rPr sz="1700" b="0" i="1">
-                <a:solidFill>
-                  <a:srgbClr val="6B6B6B"/>
-                </a:solidFill>
-                <a:latin typeface="Century Schoolbook"/>
-              </a:rPr>
-              <a:t>Copy both lines.</a:t>
-            </a:r>
-          </a:p>
-        </p:txBody>
-      </p:sp>
       <p:cxnSp>
         <p:nvCxnSpPr>
-          <p:cNvPr id="6" name="Connector 5"/>
+          <p:cNvPr id="5" name="Connector 4"/>
           <p:cNvCxnSpPr/>
           <p:nvPr/>
         </p:nvCxnSpPr>
@@ -16187,7 +14431,7 @@
       </p:cxnSp>
       <p:sp>
         <p:nvSpPr>
-          <p:cNvPr id="7" name="TextBox 6"/>
+          <p:cNvPr id="6" name="TextBox 5"/>
           <p:cNvSpPr txBox="1"/>
           <p:nvPr/>
         </p:nvSpPr>
@@ -16222,7 +14466,7 @@
       </p:sp>
       <p:sp>
         <p:nvSpPr>
-          <p:cNvPr id="8" name="TextBox 7"/>
+          <p:cNvPr id="7" name="TextBox 6"/>
           <p:cNvSpPr txBox="1"/>
           <p:nvPr/>
         </p:nvSpPr>
@@ -16257,13 +14501,13 @@
       </p:sp>
       <p:sp>
         <p:nvSpPr>
-          <p:cNvPr id="9" name="TextBox 8"/>
-          <p:cNvSpPr txBox="1"/>
-          <p:nvPr/>
-        </p:nvSpPr>
-        <p:spPr>
-          <a:xfrm>
-            <a:off x="777240" y="1737360"/>
+          <p:cNvPr id="8" name="TextBox 7"/>
+          <p:cNvSpPr txBox="1"/>
+          <p:nvPr/>
+        </p:nvSpPr>
+        <p:spPr>
+          <a:xfrm>
+            <a:off x="777240" y="1389888"/>
             <a:ext cx="10607040" cy="402336"/>
           </a:xfrm>
           <a:prstGeom prst="rect">
@@ -16292,13 +14536,13 @@
       </p:sp>
       <p:cxnSp>
         <p:nvCxnSpPr>
-          <p:cNvPr id="10" name="Connector 9"/>
+          <p:cNvPr id="9" name="Connector 8"/>
           <p:cNvCxnSpPr/>
           <p:nvPr/>
         </p:nvCxnSpPr>
         <p:spPr>
           <a:xfrm>
-            <a:off x="777240" y="2176272"/>
+            <a:off x="777240" y="1828800"/>
             <a:ext cx="10607040" cy="0"/>
           </a:xfrm>
           <a:prstGeom prst="line">
@@ -16327,7 +14571,7 @@
       </p:cxnSp>
       <p:pic>
         <p:nvPicPr>
-          <p:cNvPr id="11" name="Picture 10" descr="3d98347d24a5e79c.png"/>
+          <p:cNvPr id="10" name="Picture 9" descr="3d98347d24a5e79c.png"/>
           <p:cNvPicPr>
             <a:picLocks noChangeAspect="1"/>
           </p:cNvPicPr>
@@ -16341,7 +14585,7 @@
         </p:blipFill>
         <p:spPr>
           <a:xfrm>
-            <a:off x="2424683" y="2340864"/>
+            <a:off x="2424683" y="1993392"/>
             <a:ext cx="7312152" cy="411480"/>
           </a:xfrm>
           <a:prstGeom prst="rect">
@@ -16351,7 +14595,7 @@
       </p:pic>
       <p:pic>
         <p:nvPicPr>
-          <p:cNvPr id="12" name="Picture 11" descr="cac393ebd07bcf14.png"/>
+          <p:cNvPr id="11" name="Picture 10" descr="cac393ebd07bcf14.png"/>
           <p:cNvPicPr>
             <a:picLocks noChangeAspect="1"/>
           </p:cNvPicPr>
@@ -16365,7 +14609,7 @@
         </p:blipFill>
         <p:spPr>
           <a:xfrm>
-            <a:off x="3971941" y="3058668"/>
+            <a:off x="3971941" y="2711196"/>
             <a:ext cx="1115568" cy="347472"/>
           </a:xfrm>
           <a:prstGeom prst="rect">
@@ -16375,13 +14619,13 @@
       </p:pic>
       <p:sp>
         <p:nvSpPr>
-          <p:cNvPr id="13" name="TextBox 12"/>
-          <p:cNvSpPr txBox="1"/>
-          <p:nvPr/>
-        </p:nvSpPr>
-        <p:spPr>
-          <a:xfrm>
-            <a:off x="5087509" y="3003804"/>
+          <p:cNvPr id="12" name="TextBox 11"/>
+          <p:cNvSpPr txBox="1"/>
+          <p:nvPr/>
+        </p:nvSpPr>
+        <p:spPr>
+          <a:xfrm>
+            <a:off x="5087509" y="2656332"/>
             <a:ext cx="1977357" cy="457200"/>
           </a:xfrm>
           <a:prstGeom prst="rect">
@@ -16410,7 +14654,7 @@
       </p:sp>
       <p:pic>
         <p:nvPicPr>
-          <p:cNvPr id="14" name="Picture 13" descr="d56fc73065e54a04.png"/>
+          <p:cNvPr id="13" name="Picture 12" descr="d56fc73065e54a04.png"/>
           <p:cNvPicPr>
             <a:picLocks noChangeAspect="1"/>
           </p:cNvPicPr>
@@ -16424,7 +14668,7 @@
         </p:blipFill>
         <p:spPr>
           <a:xfrm>
-            <a:off x="6927706" y="3057144"/>
+            <a:off x="6927706" y="2709672"/>
             <a:ext cx="1261872" cy="350520"/>
           </a:xfrm>
           <a:prstGeom prst="rect">
@@ -16434,13 +14678,13 @@
       </p:pic>
       <p:sp>
         <p:nvSpPr>
-          <p:cNvPr id="15" name="TextBox 14"/>
-          <p:cNvSpPr txBox="1"/>
-          <p:nvPr/>
-        </p:nvSpPr>
-        <p:spPr>
-          <a:xfrm>
-            <a:off x="987552" y="3776472"/>
+          <p:cNvPr id="14" name="TextBox 13"/>
+          <p:cNvSpPr txBox="1"/>
+          <p:nvPr/>
+        </p:nvSpPr>
+        <p:spPr>
+          <a:xfrm>
+            <a:off x="987552" y="3429000"/>
             <a:ext cx="10131551" cy="950976"/>
           </a:xfrm>
           <a:prstGeom prst="rect">
@@ -16703,7 +14947,7 @@
         </p:nvSpPr>
         <p:spPr>
           <a:xfrm>
-            <a:off x="777240" y="1737360"/>
+            <a:off x="777240" y="1389888"/>
             <a:ext cx="10607040" cy="402336"/>
           </a:xfrm>
           <a:prstGeom prst="rect">
@@ -16738,7 +14982,7 @@
         </p:nvCxnSpPr>
         <p:spPr>
           <a:xfrm>
-            <a:off x="777240" y="2176272"/>
+            <a:off x="777240" y="1828800"/>
             <a:ext cx="10607040" cy="0"/>
           </a:xfrm>
           <a:prstGeom prst="line">
@@ -16781,7 +15025,7 @@
         </p:blipFill>
         <p:spPr>
           <a:xfrm>
-            <a:off x="3404616" y="2340864"/>
+            <a:off x="3404616" y="1993392"/>
             <a:ext cx="5352288" cy="819912"/>
           </a:xfrm>
           <a:prstGeom prst="rect">
@@ -16805,7 +15049,7 @@
         </p:blipFill>
         <p:spPr>
           <a:xfrm>
-            <a:off x="3368040" y="3435095"/>
+            <a:off x="3368040" y="3087624"/>
             <a:ext cx="5425440" cy="822960"/>
           </a:xfrm>
           <a:prstGeom prst="rect">
@@ -16821,7 +15065,7 @@
         </p:nvSpPr>
         <p:spPr>
           <a:xfrm>
-            <a:off x="987552" y="4596384"/>
+            <a:off x="987552" y="4248912"/>
             <a:ext cx="10131551" cy="475488"/>
           </a:xfrm>
           <a:prstGeom prst="rect">
@@ -17084,7 +15328,7 @@
         </p:nvSpPr>
         <p:spPr>
           <a:xfrm>
-            <a:off x="777240" y="1737360"/>
+            <a:off x="777240" y="1389888"/>
             <a:ext cx="10607040" cy="402336"/>
           </a:xfrm>
           <a:prstGeom prst="rect">
@@ -17119,7 +15363,7 @@
         </p:nvCxnSpPr>
         <p:spPr>
           <a:xfrm>
-            <a:off x="777240" y="2176272"/>
+            <a:off x="777240" y="1828800"/>
             <a:ext cx="10607040" cy="0"/>
           </a:xfrm>
           <a:prstGeom prst="line">
@@ -17162,7 +15406,7 @@
         </p:blipFill>
         <p:spPr>
           <a:xfrm>
-            <a:off x="2875788" y="2340864"/>
+            <a:off x="2875788" y="1993392"/>
             <a:ext cx="6409944" cy="411480"/>
           </a:xfrm>
           <a:prstGeom prst="rect">
@@ -17186,7 +15430,7 @@
         </p:blipFill>
         <p:spPr>
           <a:xfrm>
-            <a:off x="3019044" y="3026664"/>
+            <a:off x="3019044" y="2679192"/>
             <a:ext cx="6123432" cy="822960"/>
           </a:xfrm>
           <a:prstGeom prst="rect">
@@ -17202,7 +15446,7 @@
         </p:nvSpPr>
         <p:spPr>
           <a:xfrm>
-            <a:off x="987552" y="4187952"/>
+            <a:off x="987552" y="3840480"/>
             <a:ext cx="10131551" cy="475488"/>
           </a:xfrm>
           <a:prstGeom prst="rect">
@@ -17352,44 +15596,9 @@
           </a:fontRef>
         </p:style>
       </p:cxnSp>
-      <p:sp>
-        <p:nvSpPr>
-          <p:cNvPr id="5" name="TextBox 4"/>
-          <p:cNvSpPr txBox="1"/>
-          <p:nvPr/>
-        </p:nvSpPr>
-        <p:spPr>
-          <a:xfrm>
-            <a:off x="777240" y="1261872"/>
-            <a:ext cx="10607040" cy="310896"/>
-          </a:xfrm>
-          <a:prstGeom prst="rect">
-            <a:avLst/>
-          </a:prstGeom>
-          <a:noFill/>
-        </p:spPr>
-        <p:txBody>
-          <a:bodyPr wrap="square" lIns="45720" rIns="45720" tIns="18288" bIns="18288" anchor="t">
-            <a:spAutoFit/>
-          </a:bodyPr>
-          <a:lstStyle/>
-          <a:p>
-            <a:pPr algn="l"/>
-            <a:r>
-              <a:rPr sz="1700" b="0" i="1">
-                <a:solidFill>
-                  <a:srgbClr val="6B6B6B"/>
-                </a:solidFill>
-                <a:latin typeface="Century Schoolbook"/>
-              </a:rPr>
-              <a:t>Multiplying, and the answer needs finishing.</a:t>
-            </a:r>
-          </a:p>
-        </p:txBody>
-      </p:sp>
       <p:cxnSp>
         <p:nvCxnSpPr>
-          <p:cNvPr id="6" name="Connector 5"/>
+          <p:cNvPr id="5" name="Connector 4"/>
           <p:cNvCxnSpPr/>
           <p:nvPr/>
         </p:nvCxnSpPr>
@@ -17424,7 +15633,7 @@
       </p:cxnSp>
       <p:sp>
         <p:nvSpPr>
-          <p:cNvPr id="7" name="TextBox 6"/>
+          <p:cNvPr id="6" name="TextBox 5"/>
           <p:cNvSpPr txBox="1"/>
           <p:nvPr/>
         </p:nvSpPr>
@@ -17459,7 +15668,7 @@
       </p:sp>
       <p:sp>
         <p:nvSpPr>
-          <p:cNvPr id="8" name="TextBox 7"/>
+          <p:cNvPr id="7" name="TextBox 6"/>
           <p:cNvSpPr txBox="1"/>
           <p:nvPr/>
         </p:nvSpPr>
@@ -17494,7 +15703,7 @@
       </p:sp>
       <p:pic>
         <p:nvPicPr>
-          <p:cNvPr id="9" name="Picture 8" descr="7b4ae14dd869224c.png"/>
+          <p:cNvPr id="8" name="Picture 7" descr="7b4ae14dd869224c.png"/>
           <p:cNvPicPr>
             <a:picLocks noChangeAspect="1"/>
           </p:cNvPicPr>
@@ -17518,7 +15727,7 @@
       </p:pic>
       <p:sp>
         <p:nvSpPr>
-          <p:cNvPr id="10" name="TextBox 9"/>
+          <p:cNvPr id="9" name="TextBox 8"/>
           <p:cNvSpPr txBox="1"/>
           <p:nvPr/>
         </p:nvSpPr>
@@ -17674,44 +15883,9 @@
           </a:fontRef>
         </p:style>
       </p:cxnSp>
-      <p:sp>
-        <p:nvSpPr>
-          <p:cNvPr id="5" name="TextBox 4"/>
-          <p:cNvSpPr txBox="1"/>
-          <p:nvPr/>
-        </p:nvSpPr>
-        <p:spPr>
-          <a:xfrm>
-            <a:off x="777240" y="1261872"/>
-            <a:ext cx="10607040" cy="310896"/>
-          </a:xfrm>
-          <a:prstGeom prst="rect">
-            <a:avLst/>
-          </a:prstGeom>
-          <a:noFill/>
-        </p:spPr>
-        <p:txBody>
-          <a:bodyPr wrap="square" lIns="45720" rIns="45720" tIns="18288" bIns="18288" anchor="t">
-            <a:spAutoFit/>
-          </a:bodyPr>
-          <a:lstStyle/>
-          <a:p>
-            <a:pPr algn="l"/>
-            <a:r>
-              <a:rPr sz="1700" b="0" i="1">
-                <a:solidFill>
-                  <a:srgbClr val="6B6B6B"/>
-                </a:solidFill>
-                <a:latin typeface="Century Schoolbook"/>
-              </a:rPr>
-              <a:t>Worked.</a:t>
-            </a:r>
-          </a:p>
-        </p:txBody>
-      </p:sp>
       <p:cxnSp>
         <p:nvCxnSpPr>
-          <p:cNvPr id="6" name="Connector 5"/>
+          <p:cNvPr id="5" name="Connector 4"/>
           <p:cNvCxnSpPr/>
           <p:nvPr/>
         </p:nvCxnSpPr>
@@ -17746,7 +15920,7 @@
       </p:cxnSp>
       <p:sp>
         <p:nvSpPr>
-          <p:cNvPr id="7" name="TextBox 6"/>
+          <p:cNvPr id="6" name="TextBox 5"/>
           <p:cNvSpPr txBox="1"/>
           <p:nvPr/>
         </p:nvSpPr>
@@ -17781,7 +15955,7 @@
       </p:sp>
       <p:sp>
         <p:nvSpPr>
-          <p:cNvPr id="8" name="TextBox 7"/>
+          <p:cNvPr id="7" name="TextBox 6"/>
           <p:cNvSpPr txBox="1"/>
           <p:nvPr/>
         </p:nvSpPr>
@@ -17816,7 +15990,7 @@
       </p:sp>
       <p:pic>
         <p:nvPicPr>
-          <p:cNvPr id="9" name="Picture 8" descr="255f5ba7a254ef28.png"/>
+          <p:cNvPr id="8" name="Picture 7" descr="255f5ba7a254ef28.png"/>
           <p:cNvPicPr>
             <a:picLocks noChangeAspect="1"/>
           </p:cNvPicPr>
@@ -17838,44 +16012,9 @@
           </a:prstGeom>
         </p:spPr>
       </p:pic>
-      <p:sp>
-        <p:nvSpPr>
-          <p:cNvPr id="10" name="TextBox 9"/>
-          <p:cNvSpPr txBox="1"/>
-          <p:nvPr/>
-        </p:nvSpPr>
-        <p:spPr>
-          <a:xfrm>
-            <a:off x="9055608" y="1895856"/>
-            <a:ext cx="2328672" cy="502920"/>
-          </a:xfrm>
-          <a:prstGeom prst="rect">
-            <a:avLst/>
-          </a:prstGeom>
-          <a:noFill/>
-        </p:spPr>
-        <p:txBody>
-          <a:bodyPr wrap="square" lIns="45720" rIns="45720" tIns="18288" bIns="18288" anchor="ctr">
-            <a:spAutoFit/>
-          </a:bodyPr>
-          <a:lstStyle/>
-          <a:p>
-            <a:pPr algn="l"/>
-            <a:r>
-              <a:rPr sz="2100" b="0" i="1">
-                <a:solidFill>
-                  <a:srgbClr val="6B6B6B"/>
-                </a:solidFill>
-                <a:latin typeface="Century Schoolbook"/>
-              </a:rPr>
-              <a:t>regroup</a:t>
-            </a:r>
-          </a:p>
-        </p:txBody>
-      </p:sp>
       <p:pic>
         <p:nvPicPr>
-          <p:cNvPr id="11" name="Picture 10" descr="6f84424baa8324fb.png"/>
+          <p:cNvPr id="9" name="Picture 8" descr="6f84424baa8324fb.png"/>
           <p:cNvPicPr>
             <a:picLocks noChangeAspect="1"/>
           </p:cNvPicPr>
@@ -17897,44 +16036,9 @@
           </a:prstGeom>
         </p:spPr>
       </p:pic>
-      <p:sp>
-        <p:nvSpPr>
-          <p:cNvPr id="12" name="TextBox 11"/>
-          <p:cNvSpPr txBox="1"/>
-          <p:nvPr/>
-        </p:nvSpPr>
-        <p:spPr>
-          <a:xfrm>
-            <a:off x="3938016" y="2551176"/>
-            <a:ext cx="6400800" cy="502920"/>
-          </a:xfrm>
-          <a:prstGeom prst="rect">
-            <a:avLst/>
-          </a:prstGeom>
-          <a:noFill/>
-        </p:spPr>
-        <p:txBody>
-          <a:bodyPr wrap="square" lIns="45720" rIns="45720" tIns="18288" bIns="18288" anchor="ctr">
-            <a:spAutoFit/>
-          </a:bodyPr>
-          <a:lstStyle/>
-          <a:p>
-            <a:pPr algn="l"/>
-            <a:r>
-              <a:rPr sz="2100" b="0" i="1">
-                <a:solidFill>
-                  <a:srgbClr val="6B6B6B"/>
-                </a:solidFill>
-                <a:latin typeface="Century Schoolbook"/>
-              </a:rPr>
-              <a:t>multiply the coefficients, add the exponents</a:t>
-            </a:r>
-          </a:p>
-        </p:txBody>
-      </p:sp>
       <p:pic>
         <p:nvPicPr>
-          <p:cNvPr id="13" name="Picture 12" descr="faf479a8541eeb60.png"/>
+          <p:cNvPr id="10" name="Picture 9" descr="faf479a8541eeb60.png"/>
           <p:cNvPicPr>
             <a:picLocks noChangeAspect="1"/>
           </p:cNvPicPr>
@@ -17958,42 +16062,7 @@
       </p:pic>
       <p:sp>
         <p:nvSpPr>
-          <p:cNvPr id="14" name="TextBox 13"/>
-          <p:cNvSpPr txBox="1"/>
-          <p:nvPr/>
-        </p:nvSpPr>
-        <p:spPr>
-          <a:xfrm>
-            <a:off x="5452872" y="3179064"/>
-            <a:ext cx="5931408" cy="502920"/>
-          </a:xfrm>
-          <a:prstGeom prst="rect">
-            <a:avLst/>
-          </a:prstGeom>
-          <a:noFill/>
-        </p:spPr>
-        <p:txBody>
-          <a:bodyPr wrap="square" lIns="45720" rIns="45720" tIns="18288" bIns="18288" anchor="ctr">
-            <a:spAutoFit/>
-          </a:bodyPr>
-          <a:lstStyle/>
-          <a:p>
-            <a:pPr algn="l"/>
-            <a:r>
-              <a:rPr sz="2100" b="0" i="1">
-                <a:solidFill>
-                  <a:srgbClr val="6B6B6B"/>
-                </a:solidFill>
-                <a:latin typeface="Century Schoolbook"/>
-              </a:rPr>
-              <a:t>27 is not less than 10: point one place left, exponent up one</a:t>
-            </a:r>
-          </a:p>
-        </p:txBody>
-      </p:sp>
-      <p:sp>
-        <p:nvSpPr>
-          <p:cNvPr id="15" name="TextBox 14"/>
+          <p:cNvPr id="11" name="TextBox 10"/>
           <p:cNvSpPr txBox="1"/>
           <p:nvPr/>
         </p:nvSpPr>
@@ -18158,44 +16227,9 @@
           </a:fontRef>
         </p:style>
       </p:cxnSp>
-      <p:sp>
-        <p:nvSpPr>
-          <p:cNvPr id="5" name="TextBox 4"/>
-          <p:cNvSpPr txBox="1"/>
-          <p:nvPr/>
-        </p:nvSpPr>
-        <p:spPr>
-          <a:xfrm>
-            <a:off x="777240" y="1261872"/>
-            <a:ext cx="10607040" cy="310896"/>
-          </a:xfrm>
-          <a:prstGeom prst="rect">
-            <a:avLst/>
-          </a:prstGeom>
-          <a:noFill/>
-        </p:spPr>
-        <p:txBody>
-          <a:bodyPr wrap="square" lIns="45720" rIns="45720" tIns="18288" bIns="18288" anchor="t">
-            <a:spAutoFit/>
-          </a:bodyPr>
-          <a:lstStyle/>
-          <a:p>
-            <a:pPr algn="l"/>
-            <a:r>
-              <a:rPr sz="1700" b="0" i="1">
-                <a:solidFill>
-                  <a:srgbClr val="6B6B6B"/>
-                </a:solidFill>
-                <a:latin typeface="Century Schoolbook"/>
-              </a:rPr>
-              <a:t>Same steps, your numbers. Boards up when done.</a:t>
-            </a:r>
-          </a:p>
-        </p:txBody>
-      </p:sp>
       <p:cxnSp>
         <p:nvCxnSpPr>
-          <p:cNvPr id="6" name="Connector 5"/>
+          <p:cNvPr id="5" name="Connector 4"/>
           <p:cNvCxnSpPr/>
           <p:nvPr/>
         </p:nvCxnSpPr>
@@ -18230,7 +16264,7 @@
       </p:cxnSp>
       <p:sp>
         <p:nvSpPr>
-          <p:cNvPr id="7" name="TextBox 6"/>
+          <p:cNvPr id="6" name="TextBox 5"/>
           <p:cNvSpPr txBox="1"/>
           <p:nvPr/>
         </p:nvSpPr>
@@ -18265,7 +16299,7 @@
       </p:sp>
       <p:sp>
         <p:nvSpPr>
-          <p:cNvPr id="8" name="TextBox 7"/>
+          <p:cNvPr id="7" name="TextBox 6"/>
           <p:cNvSpPr txBox="1"/>
           <p:nvPr/>
         </p:nvSpPr>
@@ -18300,7 +16334,7 @@
       </p:sp>
       <p:pic>
         <p:nvPicPr>
-          <p:cNvPr id="9" name="Picture 8" descr="945d13953f7af1b2.png"/>
+          <p:cNvPr id="8" name="Picture 7" descr="945d13953f7af1b2.png"/>
           <p:cNvPicPr>
             <a:picLocks noChangeAspect="1"/>
           </p:cNvPicPr>
@@ -18322,6 +16356,41 @@
           </a:prstGeom>
         </p:spPr>
       </p:pic>
+      <p:sp>
+        <p:nvSpPr>
+          <p:cNvPr id="9" name="TextBox 8"/>
+          <p:cNvSpPr txBox="1"/>
+          <p:nvPr/>
+        </p:nvSpPr>
+        <p:spPr>
+          <a:xfrm>
+            <a:off x="777240" y="3215640"/>
+            <a:ext cx="10607040" cy="429370"/>
+          </a:xfrm>
+          <a:prstGeom prst="rect">
+            <a:avLst/>
+          </a:prstGeom>
+          <a:noFill/>
+        </p:spPr>
+        <p:txBody>
+          <a:bodyPr wrap="square" lIns="45720" rIns="45720" tIns="18288" bIns="18288" anchor="t">
+            <a:spAutoFit/>
+          </a:bodyPr>
+          <a:lstStyle/>
+          <a:p>
+            <a:pPr algn="ctr"/>
+            <a:r>
+              <a:rPr sz="2400" b="1" i="0">
+                <a:solidFill>
+                  <a:srgbClr val="1A1A1A"/>
+                </a:solidFill>
+                <a:latin typeface="Century Schoolbook"/>
+              </a:rPr>
+              <a:t>Multiply. Write the answer in scientific notation.</a:t>
+            </a:r>
+          </a:p>
+        </p:txBody>
+      </p:sp>
     </p:spTree>
   </p:cSld>
   <p:clrMapOvr>

--- a/a7/packages/A7 Unit 4 - Solving Problems with Rational Numbers/Lessons/4.02/A7 4.02 Multiplying and Dividing in Scientific Notation - Slides.pptx
+++ b/a7/packages/A7 Unit 4 - Solving Problems with Rational Numbers/Lessons/4.02/A7 4.02 Multiplying and Dividing in Scientific Notation - Slides.pptx
@@ -13526,23 +13526,23 @@
         </p:nvSpPr>
         <p:spPr>
           <a:xfrm>
-            <a:off x="960120" y="2011680"/>
-            <a:ext cx="548640" cy="356616"/>
-          </a:xfrm>
-          <a:prstGeom prst="rect">
-            <a:avLst/>
-          </a:prstGeom>
-          <a:noFill/>
-        </p:spPr>
-        <p:txBody>
-          <a:bodyPr wrap="square" lIns="45720" rIns="45720" tIns="18288" bIns="18288" anchor="t">
+            <a:off x="960120" y="1495043"/>
+            <a:ext cx="548640" cy="457200"/>
+          </a:xfrm>
+          <a:prstGeom prst="rect">
+            <a:avLst/>
+          </a:prstGeom>
+          <a:noFill/>
+        </p:spPr>
+        <p:txBody>
+          <a:bodyPr wrap="square" lIns="45720" rIns="45720" tIns="18288" bIns="18288" anchor="ctr">
             <a:spAutoFit/>
           </a:bodyPr>
           <a:lstStyle/>
           <a:p>
             <a:pPr algn="l"/>
             <a:r>
-              <a:rPr sz="2100" b="1" i="0">
+              <a:rPr sz="2300" b="1" i="0">
                 <a:solidFill>
                   <a:srgbClr val="0B5394"/>
                 </a:solidFill>
@@ -13553,181 +13553,419 @@
           </a:p>
         </p:txBody>
       </p:sp>
-      <p:sp>
-        <p:nvSpPr>
-          <p:cNvPr id="9" name="TextBox 8"/>
-          <p:cNvSpPr txBox="1"/>
-          <p:nvPr/>
-        </p:nvSpPr>
-        <p:spPr>
-          <a:xfrm>
-            <a:off x="1554480" y="2011680"/>
-            <a:ext cx="9829800" cy="411480"/>
-          </a:xfrm>
-          <a:prstGeom prst="rect">
-            <a:avLst/>
-          </a:prstGeom>
-          <a:noFill/>
-        </p:spPr>
-        <p:txBody>
-          <a:bodyPr wrap="square" lIns="45720" rIns="45720" tIns="18288" bIns="18288" anchor="t">
+      <p:pic>
+        <p:nvPicPr>
+          <p:cNvPr id="9" name="Picture 8" descr="c49caa77206bc38d.png"/>
+          <p:cNvPicPr>
+            <a:picLocks noChangeAspect="1"/>
+          </p:cNvPicPr>
+          <p:nvPr/>
+        </p:nvPicPr>
+        <p:blipFill>
+          <a:blip r:embed="rId2"/>
+          <a:stretch>
+            <a:fillRect/>
+          </a:stretch>
+        </p:blipFill>
+        <p:spPr>
+          <a:xfrm>
+            <a:off x="1627632" y="1556004"/>
+            <a:ext cx="2282952" cy="335280"/>
+          </a:xfrm>
+          <a:prstGeom prst="rect">
+            <a:avLst/>
+          </a:prstGeom>
+        </p:spPr>
+      </p:pic>
+      <p:sp>
+        <p:nvSpPr>
+          <p:cNvPr id="10" name="TextBox 9"/>
+          <p:cNvSpPr txBox="1"/>
+          <p:nvPr/>
+        </p:nvSpPr>
+        <p:spPr>
+          <a:xfrm>
+            <a:off x="960120" y="2215895"/>
+            <a:ext cx="548640" cy="457200"/>
+          </a:xfrm>
+          <a:prstGeom prst="rect">
+            <a:avLst/>
+          </a:prstGeom>
+          <a:noFill/>
+        </p:spPr>
+        <p:txBody>
+          <a:bodyPr wrap="square" lIns="45720" rIns="45720" tIns="18288" bIns="18288" anchor="ctr">
             <a:spAutoFit/>
           </a:bodyPr>
           <a:lstStyle/>
           <a:p>
             <a:pPr algn="l"/>
             <a:r>
-              <a:rPr sz="2100" b="0" i="0">
+              <a:rPr sz="2300" b="1" i="0">
+                <a:solidFill>
+                  <a:srgbClr val="0B5394"/>
+                </a:solidFill>
+                <a:latin typeface="Century Schoolbook"/>
+              </a:rPr>
+              <a:t>2.</a:t>
+            </a:r>
+          </a:p>
+        </p:txBody>
+      </p:sp>
+      <p:pic>
+        <p:nvPicPr>
+          <p:cNvPr id="11" name="Picture 10" descr="17604f6e1003d2c7.png"/>
+          <p:cNvPicPr>
+            <a:picLocks noChangeAspect="1"/>
+          </p:cNvPicPr>
+          <p:nvPr/>
+        </p:nvPicPr>
+        <p:blipFill>
+          <a:blip r:embed="rId3"/>
+          <a:stretch>
+            <a:fillRect/>
+          </a:stretch>
+        </p:blipFill>
+        <p:spPr>
+          <a:xfrm>
+            <a:off x="1627632" y="2112263"/>
+            <a:ext cx="1188720" cy="664464"/>
+          </a:xfrm>
+          <a:prstGeom prst="rect">
+            <a:avLst/>
+          </a:prstGeom>
+        </p:spPr>
+      </p:pic>
+      <p:sp>
+        <p:nvSpPr>
+          <p:cNvPr id="12" name="TextBox 11"/>
+          <p:cNvSpPr txBox="1"/>
+          <p:nvPr/>
+        </p:nvSpPr>
+        <p:spPr>
+          <a:xfrm>
+            <a:off x="960120" y="2936748"/>
+            <a:ext cx="548640" cy="457200"/>
+          </a:xfrm>
+          <a:prstGeom prst="rect">
+            <a:avLst/>
+          </a:prstGeom>
+          <a:noFill/>
+        </p:spPr>
+        <p:txBody>
+          <a:bodyPr wrap="square" lIns="45720" rIns="45720" tIns="18288" bIns="18288" anchor="ctr">
+            <a:spAutoFit/>
+          </a:bodyPr>
+          <a:lstStyle/>
+          <a:p>
+            <a:pPr algn="l"/>
+            <a:r>
+              <a:rPr sz="2300" b="1" i="0">
+                <a:solidFill>
+                  <a:srgbClr val="0B5394"/>
+                </a:solidFill>
+                <a:latin typeface="Century Schoolbook"/>
+              </a:rPr>
+              <a:t>3.</a:t>
+            </a:r>
+          </a:p>
+        </p:txBody>
+      </p:sp>
+      <p:pic>
+        <p:nvPicPr>
+          <p:cNvPr id="13" name="Picture 12" descr="e2e26ee8dfa29483.png"/>
+          <p:cNvPicPr>
+            <a:picLocks noChangeAspect="1"/>
+          </p:cNvPicPr>
+          <p:nvPr/>
+        </p:nvPicPr>
+        <p:blipFill>
+          <a:blip r:embed="rId4"/>
+          <a:stretch>
+            <a:fillRect/>
+          </a:stretch>
+        </p:blipFill>
+        <p:spPr>
+          <a:xfrm>
+            <a:off x="1627632" y="2997707"/>
+            <a:ext cx="2441448" cy="335280"/>
+          </a:xfrm>
+          <a:prstGeom prst="rect">
+            <a:avLst/>
+          </a:prstGeom>
+        </p:spPr>
+      </p:pic>
+      <p:sp>
+        <p:nvSpPr>
+          <p:cNvPr id="14" name="TextBox 13"/>
+          <p:cNvSpPr txBox="1"/>
+          <p:nvPr/>
+        </p:nvSpPr>
+        <p:spPr>
+          <a:xfrm>
+            <a:off x="960120" y="3659123"/>
+            <a:ext cx="548640" cy="457200"/>
+          </a:xfrm>
+          <a:prstGeom prst="rect">
+            <a:avLst/>
+          </a:prstGeom>
+          <a:noFill/>
+        </p:spPr>
+        <p:txBody>
+          <a:bodyPr wrap="square" lIns="45720" rIns="45720" tIns="18288" bIns="18288" anchor="ctr">
+            <a:spAutoFit/>
+          </a:bodyPr>
+          <a:lstStyle/>
+          <a:p>
+            <a:pPr algn="l"/>
+            <a:r>
+              <a:rPr sz="2300" b="1" i="0">
+                <a:solidFill>
+                  <a:srgbClr val="0B5394"/>
+                </a:solidFill>
+                <a:latin typeface="Century Schoolbook"/>
+              </a:rPr>
+              <a:t>4.</a:t>
+            </a:r>
+          </a:p>
+        </p:txBody>
+      </p:sp>
+      <p:pic>
+        <p:nvPicPr>
+          <p:cNvPr id="15" name="Picture 14" descr="822dad32b0eba4a5.png"/>
+          <p:cNvPicPr>
+            <a:picLocks noChangeAspect="1"/>
+          </p:cNvPicPr>
+          <p:nvPr/>
+        </p:nvPicPr>
+        <p:blipFill>
+          <a:blip r:embed="rId5"/>
+          <a:stretch>
+            <a:fillRect/>
+          </a:stretch>
+        </p:blipFill>
+        <p:spPr>
+          <a:xfrm>
+            <a:off x="1627632" y="3553967"/>
+            <a:ext cx="1188720" cy="667512"/>
+          </a:xfrm>
+          <a:prstGeom prst="rect">
+            <a:avLst/>
+          </a:prstGeom>
+        </p:spPr>
+      </p:pic>
+      <p:sp>
+        <p:nvSpPr>
+          <p:cNvPr id="16" name="TextBox 15"/>
+          <p:cNvSpPr txBox="1"/>
+          <p:nvPr/>
+        </p:nvSpPr>
+        <p:spPr>
+          <a:xfrm>
+            <a:off x="960120" y="4511039"/>
+            <a:ext cx="548640" cy="457200"/>
+          </a:xfrm>
+          <a:prstGeom prst="rect">
+            <a:avLst/>
+          </a:prstGeom>
+          <a:noFill/>
+        </p:spPr>
+        <p:txBody>
+          <a:bodyPr wrap="square" lIns="45720" rIns="45720" tIns="18288" bIns="18288" anchor="ctr">
+            <a:spAutoFit/>
+          </a:bodyPr>
+          <a:lstStyle/>
+          <a:p>
+            <a:pPr algn="l"/>
+            <a:r>
+              <a:rPr sz="2300" b="1" i="0">
+                <a:solidFill>
+                  <a:srgbClr val="0B5394"/>
+                </a:solidFill>
+                <a:latin typeface="Century Schoolbook"/>
+              </a:rPr>
+              <a:t>5.</a:t>
+            </a:r>
+          </a:p>
+        </p:txBody>
+      </p:sp>
+      <p:pic>
+        <p:nvPicPr>
+          <p:cNvPr id="17" name="Picture 16" descr="7c5a8d7e4e4f2d60.png"/>
+          <p:cNvPicPr>
+            <a:picLocks noChangeAspect="1"/>
+          </p:cNvPicPr>
+          <p:nvPr/>
+        </p:nvPicPr>
+        <p:blipFill>
+          <a:blip r:embed="rId6"/>
+          <a:stretch>
+            <a:fillRect/>
+          </a:stretch>
+        </p:blipFill>
+        <p:spPr>
+          <a:xfrm>
+            <a:off x="1627632" y="4404360"/>
+            <a:ext cx="1100328" cy="670560"/>
+          </a:xfrm>
+          <a:prstGeom prst="rect">
+            <a:avLst/>
+          </a:prstGeom>
+        </p:spPr>
+      </p:pic>
+      <p:sp>
+        <p:nvSpPr>
+          <p:cNvPr id="18" name="TextBox 17"/>
+          <p:cNvSpPr txBox="1"/>
+          <p:nvPr/>
+        </p:nvSpPr>
+        <p:spPr>
+          <a:xfrm>
+            <a:off x="960120" y="5234940"/>
+            <a:ext cx="548640" cy="457200"/>
+          </a:xfrm>
+          <a:prstGeom prst="rect">
+            <a:avLst/>
+          </a:prstGeom>
+          <a:noFill/>
+        </p:spPr>
+        <p:txBody>
+          <a:bodyPr wrap="square" lIns="45720" rIns="45720" tIns="18288" bIns="18288" anchor="ctr">
+            <a:spAutoFit/>
+          </a:bodyPr>
+          <a:lstStyle/>
+          <a:p>
+            <a:pPr algn="l"/>
+            <a:r>
+              <a:rPr sz="2300" b="1" i="0">
+                <a:solidFill>
+                  <a:srgbClr val="0B5394"/>
+                </a:solidFill>
+                <a:latin typeface="Century Schoolbook"/>
+              </a:rPr>
+              <a:t>6.</a:t>
+            </a:r>
+          </a:p>
+        </p:txBody>
+      </p:sp>
+      <p:sp>
+        <p:nvSpPr>
+          <p:cNvPr id="19" name="TextBox 18"/>
+          <p:cNvSpPr txBox="1"/>
+          <p:nvPr/>
+        </p:nvSpPr>
+        <p:spPr>
+          <a:xfrm>
+            <a:off x="1554480" y="5234940"/>
+            <a:ext cx="967391" cy="457200"/>
+          </a:xfrm>
+          <a:prstGeom prst="rect">
+            <a:avLst/>
+          </a:prstGeom>
+          <a:noFill/>
+        </p:spPr>
+        <p:txBody>
+          <a:bodyPr wrap="none" lIns="45720" rIns="45720" tIns="18288" bIns="18288" anchor="ctr">
+            <a:noAutofit/>
+          </a:bodyPr>
+          <a:lstStyle/>
+          <a:p>
+            <a:pPr algn="l"/>
+            <a:r>
+              <a:rPr sz="2300" b="0" i="0">
                 <a:solidFill>
                   <a:srgbClr val="1A1A1A"/>
                 </a:solidFill>
                 <a:latin typeface="Century Schoolbook"/>
               </a:rPr>
-              <a:t>Six questions. Work down the page.</a:t>
-            </a:r>
-          </a:p>
-        </p:txBody>
-      </p:sp>
-      <p:sp>
-        <p:nvSpPr>
-          <p:cNvPr id="10" name="TextBox 9"/>
-          <p:cNvSpPr txBox="1"/>
-          <p:nvPr/>
-        </p:nvSpPr>
-        <p:spPr>
-          <a:xfrm>
-            <a:off x="960120" y="2551176"/>
-            <a:ext cx="548640" cy="356616"/>
-          </a:xfrm>
-          <a:prstGeom prst="rect">
-            <a:avLst/>
-          </a:prstGeom>
-          <a:noFill/>
-        </p:spPr>
-        <p:txBody>
-          <a:bodyPr wrap="square" lIns="45720" rIns="45720" tIns="18288" bIns="18288" anchor="t">
-            <a:spAutoFit/>
+              <a:t>Find </a:t>
+            </a:r>
+          </a:p>
+        </p:txBody>
+      </p:sp>
+      <p:pic>
+        <p:nvPicPr>
+          <p:cNvPr id="20" name="Picture 19" descr="0afe177f69dd5e06.png"/>
+          <p:cNvPicPr>
+            <a:picLocks noChangeAspect="1"/>
+          </p:cNvPicPr>
+          <p:nvPr/>
+        </p:nvPicPr>
+        <p:blipFill>
+          <a:blip r:embed="rId7"/>
+          <a:stretch>
+            <a:fillRect/>
+          </a:stretch>
+        </p:blipFill>
+        <p:spPr>
+          <a:xfrm>
+            <a:off x="2384711" y="5388864"/>
+            <a:ext cx="155448" cy="149352"/>
+          </a:xfrm>
+          <a:prstGeom prst="rect">
+            <a:avLst/>
+          </a:prstGeom>
+        </p:spPr>
+      </p:pic>
+      <p:sp>
+        <p:nvSpPr>
+          <p:cNvPr id="21" name="TextBox 20"/>
+          <p:cNvSpPr txBox="1"/>
+          <p:nvPr/>
+        </p:nvSpPr>
+        <p:spPr>
+          <a:xfrm>
+            <a:off x="2540159" y="5234940"/>
+            <a:ext cx="468561" cy="457200"/>
+          </a:xfrm>
+          <a:prstGeom prst="rect">
+            <a:avLst/>
+          </a:prstGeom>
+          <a:noFill/>
+        </p:spPr>
+        <p:txBody>
+          <a:bodyPr wrap="none" lIns="45720" rIns="45720" tIns="18288" bIns="18288" anchor="ctr">
+            <a:noAutofit/>
           </a:bodyPr>
           <a:lstStyle/>
           <a:p>
             <a:pPr algn="l"/>
             <a:r>
-              <a:rPr sz="2100" b="1" i="0">
-                <a:solidFill>
-                  <a:srgbClr val="0B5394"/>
-                </a:solidFill>
-                <a:latin typeface="Century Schoolbook"/>
-              </a:rPr>
-              <a:t>2.</a:t>
-            </a:r>
-          </a:p>
-        </p:txBody>
-      </p:sp>
-      <p:sp>
-        <p:nvSpPr>
-          <p:cNvPr id="11" name="TextBox 10"/>
-          <p:cNvSpPr txBox="1"/>
-          <p:nvPr/>
-        </p:nvSpPr>
-        <p:spPr>
-          <a:xfrm>
-            <a:off x="1554480" y="2551176"/>
-            <a:ext cx="9829800" cy="411480"/>
-          </a:xfrm>
-          <a:prstGeom prst="rect">
-            <a:avLst/>
-          </a:prstGeom>
-          <a:noFill/>
-        </p:spPr>
-        <p:txBody>
-          <a:bodyPr wrap="square" lIns="45720" rIns="45720" tIns="18288" bIns="18288" anchor="t">
-            <a:spAutoFit/>
-          </a:bodyPr>
-          <a:lstStyle/>
-          <a:p>
-            <a:pPr algn="l"/>
-            <a:r>
-              <a:rPr sz="2100" b="0" i="0">
+              <a:rPr sz="2300" b="0" i="0">
                 <a:solidFill>
                   <a:srgbClr val="1A1A1A"/>
                 </a:solidFill>
                 <a:latin typeface="Century Schoolbook"/>
               </a:rPr>
-              <a:t>Show the step that does the work, not just the answer.</a:t>
-            </a:r>
-          </a:p>
-        </p:txBody>
-      </p:sp>
-      <p:sp>
-        <p:nvSpPr>
-          <p:cNvPr id="12" name="TextBox 11"/>
-          <p:cNvSpPr txBox="1"/>
-          <p:nvPr/>
-        </p:nvSpPr>
-        <p:spPr>
-          <a:xfrm>
-            <a:off x="960120" y="3090672"/>
-            <a:ext cx="548640" cy="356616"/>
-          </a:xfrm>
-          <a:prstGeom prst="rect">
-            <a:avLst/>
-          </a:prstGeom>
-          <a:noFill/>
-        </p:spPr>
-        <p:txBody>
-          <a:bodyPr wrap="square" lIns="45720" rIns="45720" tIns="18288" bIns="18288" anchor="t">
-            <a:spAutoFit/>
-          </a:bodyPr>
-          <a:lstStyle/>
-          <a:p>
-            <a:pPr algn="l"/>
-            <a:r>
-              <a:rPr sz="2100" b="1" i="0">
-                <a:solidFill>
-                  <a:srgbClr val="0B5394"/>
-                </a:solidFill>
-                <a:latin typeface="Century Schoolbook"/>
-              </a:rPr>
-              <a:t>3.</a:t>
-            </a:r>
-          </a:p>
-        </p:txBody>
-      </p:sp>
-      <p:sp>
-        <p:nvSpPr>
-          <p:cNvPr id="13" name="TextBox 12"/>
-          <p:cNvSpPr txBox="1"/>
-          <p:nvPr/>
-        </p:nvSpPr>
-        <p:spPr>
-          <a:xfrm>
-            <a:off x="1554480" y="3090672"/>
-            <a:ext cx="9829800" cy="411480"/>
-          </a:xfrm>
-          <a:prstGeom prst="rect">
-            <a:avLst/>
-          </a:prstGeom>
-          <a:noFill/>
-        </p:spPr>
-        <p:txBody>
-          <a:bodyPr wrap="square" lIns="45720" rIns="45720" tIns="18288" bIns="18288" anchor="t">
-            <a:spAutoFit/>
-          </a:bodyPr>
-          <a:lstStyle/>
-          <a:p>
-            <a:pPr algn="l"/>
-            <a:r>
-              <a:rPr sz="2100" b="0" i="0">
-                <a:solidFill>
-                  <a:srgbClr val="1A1A1A"/>
-                </a:solidFill>
-                <a:latin typeface="Century Schoolbook"/>
-              </a:rPr>
-              <a:t>Silence until the six minutes are up.</a:t>
-            </a:r>
-          </a:p>
-        </p:txBody>
-      </p:sp>
+              <a:t>.  </a:t>
+            </a:r>
+          </a:p>
+        </p:txBody>
+      </p:sp>
+      <p:pic>
+        <p:nvPicPr>
+          <p:cNvPr id="22" name="Picture 21" descr="29f37f2eabf1cbac.png"/>
+          <p:cNvPicPr>
+            <a:picLocks noChangeAspect="1"/>
+          </p:cNvPicPr>
+          <p:nvPr/>
+        </p:nvPicPr>
+        <p:blipFill>
+          <a:blip r:embed="rId8"/>
+          <a:stretch>
+            <a:fillRect/>
+          </a:stretch>
+        </p:blipFill>
+        <p:spPr>
+          <a:xfrm>
+            <a:off x="2871561" y="5295900"/>
+            <a:ext cx="3654552" cy="335280"/>
+          </a:xfrm>
+          <a:prstGeom prst="rect">
+            <a:avLst/>
+          </a:prstGeom>
+        </p:spPr>
+      </p:pic>
     </p:spTree>
   </p:cSld>
   <p:clrMapOvr>

--- a/a7/packages/A7 Unit 4 - Solving Problems with Rational Numbers/Lessons/4.02/A7 4.02 Multiplying and Dividing in Scientific Notation - Slides.pptx
+++ b/a7/packages/A7 Unit 4 - Solving Problems with Rational Numbers/Lessons/4.02/A7 4.02 Multiplying and Dividing in Scientific Notation - Slides.pptx
@@ -3145,11 +3145,11 @@
           <a:p>
             <a:pPr algn="ctr"/>
             <a:r>
-              <a:rPr sz="1500" b="0" i="0">
+              <a:rPr sz="1420" b="0" i="0">
                 <a:solidFill>
                   <a:srgbClr val="6B6B6B"/>
                 </a:solidFill>
-                <a:latin typeface="Century Schoolbook"/>
+                <a:latin typeface="Lexend"/>
               </a:rPr>
               <a:t>GRADE 7 ACCELERATED  ·  UNIT 4  ·  LESSONS 2–3</a:t>
             </a:r>
@@ -3180,11 +3180,11 @@
           <a:p>
             <a:pPr algn="ctr"/>
             <a:r>
-              <a:rPr sz="3400" b="1" i="0">
+              <a:rPr sz="3229" b="1" i="0">
                 <a:solidFill>
                   <a:srgbClr val="1A1A1A"/>
                 </a:solidFill>
-                <a:latin typeface="Century Schoolbook"/>
+                <a:latin typeface="Lexend"/>
               </a:rPr>
               <a:t>Multiplying and Dividing in Scientific Notation</a:t>
             </a:r>
@@ -3285,11 +3285,11 @@
           <a:p>
             <a:pPr algn="ctr"/>
             <a:r>
-              <a:rPr sz="1600" b="1" i="0">
+              <a:rPr sz="1520" b="1" i="0">
                 <a:solidFill>
                   <a:srgbClr val="1A1A1A"/>
                 </a:solidFill>
-                <a:latin typeface="Century Schoolbook"/>
+                <a:latin typeface="Lexend"/>
               </a:rPr>
               <a:t>MA.8.NSO.1.5</a:t>
             </a:r>
@@ -3320,11 +3320,11 @@
           <a:p>
             <a:pPr algn="ctr"/>
             <a:r>
-              <a:rPr sz="1900" b="0" i="1">
+              <a:rPr sz="1810" b="0" i="0">
                 <a:solidFill>
                   <a:srgbClr val="1A1A1A"/>
                 </a:solidFill>
-                <a:latin typeface="Century Schoolbook"/>
+                <a:latin typeface="Lexend"/>
               </a:rPr>
               <a:t>I can multiply and divide two numbers written in scientific notation, and write the answer in scientific notation.</a:t>
             </a:r>
@@ -3390,11 +3390,11 @@
           <a:p>
             <a:pPr algn="l"/>
             <a:r>
-              <a:rPr sz="1100" b="0" i="1">
+              <a:rPr sz="1040" b="0" i="0">
                 <a:solidFill>
                   <a:srgbClr val="6B6B6B"/>
                 </a:solidFill>
-                <a:latin typeface="Century Schoolbook"/>
+                <a:latin typeface="Lexend"/>
               </a:rPr>
               <a:t>Grade 7 Accelerated · Unit 4 · Lessons 2–3 — Multiplying and Dividing in Scientific Notation</a:t>
             </a:r>
@@ -3425,11 +3425,11 @@
           <a:p>
             <a:pPr algn="r"/>
             <a:r>
-              <a:rPr sz="1100" b="0" i="0">
+              <a:rPr sz="1040" b="0" i="0">
                 <a:solidFill>
                   <a:srgbClr val="6B6B6B"/>
                 </a:solidFill>
-                <a:latin typeface="Century Schoolbook"/>
+                <a:latin typeface="Lexend"/>
               </a:rPr>
               <a:t>1</a:t>
             </a:r>
@@ -3478,11 +3478,11 @@
           <a:p>
             <a:pPr algn="l"/>
             <a:r>
-              <a:rPr sz="3600" b="1" i="0">
+              <a:rPr sz="3420" b="1" i="0">
                 <a:solidFill>
                   <a:srgbClr val="1A1A1A"/>
                 </a:solidFill>
-                <a:latin typeface="Century Schoolbook"/>
+                <a:latin typeface="Lexend"/>
               </a:rPr>
               <a:t>Your Turn</a:t>
             </a:r>
@@ -3618,11 +3618,11 @@
           <a:p>
             <a:pPr algn="l"/>
             <a:r>
-              <a:rPr sz="1100" b="0" i="1">
+              <a:rPr sz="1040" b="0" i="0">
                 <a:solidFill>
                   <a:srgbClr val="6B6B6B"/>
                 </a:solidFill>
-                <a:latin typeface="Century Schoolbook"/>
+                <a:latin typeface="Lexend"/>
               </a:rPr>
               <a:t>Grade 7 Accelerated · Unit 4 · Lessons 2–3 — Multiplying and Dividing in Scientific Notation</a:t>
             </a:r>
@@ -3653,11 +3653,11 @@
           <a:p>
             <a:pPr algn="r"/>
             <a:r>
-              <a:rPr sz="1100" b="0" i="0">
+              <a:rPr sz="1040" b="0" i="0">
                 <a:solidFill>
                   <a:srgbClr val="6B6B6B"/>
                 </a:solidFill>
-                <a:latin typeface="Century Schoolbook"/>
+                <a:latin typeface="Lexend"/>
               </a:rPr>
               <a:t>10</a:t>
             </a:r>
@@ -3666,7 +3666,7 @@
       </p:sp>
       <p:pic>
         <p:nvPicPr>
-          <p:cNvPr id="8" name="Picture 7" descr="02a20b9238011d7b.png"/>
+          <p:cNvPr id="8" name="Picture 7" descr="816312d3d4d78951.png"/>
           <p:cNvPicPr>
             <a:picLocks noChangeAspect="1"/>
           </p:cNvPicPr>
@@ -3680,8 +3680,8 @@
         </p:blipFill>
         <p:spPr>
           <a:xfrm>
-            <a:off x="4011168" y="2194560"/>
-            <a:ext cx="4139183" cy="521207"/>
+            <a:off x="4034027" y="1600200"/>
+            <a:ext cx="4093464" cy="512064"/>
           </a:xfrm>
           <a:prstGeom prst="rect">
             <a:avLst/>
@@ -3696,7 +3696,7 @@
         </p:nvSpPr>
         <p:spPr>
           <a:xfrm>
-            <a:off x="777240" y="3218688"/>
+            <a:off x="777240" y="2615184"/>
             <a:ext cx="10607040" cy="429370"/>
           </a:xfrm>
           <a:prstGeom prst="rect">
@@ -3712,11 +3712,11 @@
           <a:p>
             <a:pPr algn="ctr"/>
             <a:r>
-              <a:rPr sz="2400" b="1" i="0">
+              <a:rPr sz="2280" b="1" i="0">
                 <a:solidFill>
                   <a:srgbClr val="1A1A1A"/>
                 </a:solidFill>
-                <a:latin typeface="Century Schoolbook"/>
+                <a:latin typeface="Lexend"/>
               </a:rPr>
               <a:t>Multiply. Write the answer in scientific notation.</a:t>
             </a:r>
@@ -3731,7 +3731,149 @@
         </p:nvSpPr>
         <p:spPr>
           <a:xfrm>
-            <a:off x="777240" y="4572000"/>
+            <a:off x="3502505" y="3204574"/>
+            <a:ext cx="3220349" cy="457200"/>
+          </a:xfrm>
+          <a:prstGeom prst="rect">
+            <a:avLst/>
+          </a:prstGeom>
+          <a:noFill/>
+        </p:spPr>
+        <p:txBody>
+          <a:bodyPr wrap="none" lIns="45720" rIns="45720" tIns="18288" bIns="18288" anchor="ctr">
+            <a:noAutofit/>
+          </a:bodyPr>
+          <a:lstStyle/>
+          <a:p>
+            <a:pPr algn="l"/>
+            <a:r>
+              <a:rPr sz="2330" b="0" i="0">
+                <a:solidFill>
+                  <a:srgbClr val="1A1A1A"/>
+                </a:solidFill>
+                <a:latin typeface="Lexend"/>
+              </a:rPr>
+              <a:t>Multiply the fronts:  </a:t>
+            </a:r>
+          </a:p>
+        </p:txBody>
+      </p:sp>
+      <p:pic>
+        <p:nvPicPr>
+          <p:cNvPr id="11" name="Picture 10" descr="04263b59ab134a8d.png"/>
+          <p:cNvPicPr>
+            <a:picLocks noChangeAspect="1"/>
+          </p:cNvPicPr>
+          <p:nvPr/>
+        </p:nvPicPr>
+        <p:blipFill>
+          <a:blip r:embed="rId3"/>
+          <a:stretch>
+            <a:fillRect/>
+          </a:stretch>
+        </p:blipFill>
+        <p:spPr>
+          <a:xfrm>
+            <a:off x="6585695" y="3326494"/>
+            <a:ext cx="1414272" cy="213360"/>
+          </a:xfrm>
+          <a:prstGeom prst="rect">
+            <a:avLst/>
+          </a:prstGeom>
+        </p:spPr>
+      </p:pic>
+      <p:sp>
+        <p:nvSpPr>
+          <p:cNvPr id="12" name="TextBox 11"/>
+          <p:cNvSpPr txBox="1"/>
+          <p:nvPr/>
+        </p:nvSpPr>
+        <p:spPr>
+          <a:xfrm>
+            <a:off x="3502505" y="3707494"/>
+            <a:ext cx="3315516" cy="457200"/>
+          </a:xfrm>
+          <a:prstGeom prst="rect">
+            <a:avLst/>
+          </a:prstGeom>
+          <a:noFill/>
+        </p:spPr>
+        <p:txBody>
+          <a:bodyPr wrap="none" lIns="45720" rIns="45720" tIns="18288" bIns="18288" anchor="ctr">
+            <a:noAutofit/>
+          </a:bodyPr>
+          <a:lstStyle/>
+          <a:p>
+            <a:pPr algn="l"/>
+            <a:r>
+              <a:rPr sz="2330" b="0" i="0">
+                <a:solidFill>
+                  <a:srgbClr val="1A1A1A"/>
+                </a:solidFill>
+                <a:latin typeface="Lexend"/>
+              </a:rPr>
+              <a:t>Add the exponents:  </a:t>
+            </a:r>
+          </a:p>
+        </p:txBody>
+      </p:sp>
+      <p:pic>
+        <p:nvPicPr>
+          <p:cNvPr id="13" name="Picture 12" descr="2e6e8e2b001e1a7e.png"/>
+          <p:cNvPicPr>
+            <a:picLocks noChangeAspect="1"/>
+          </p:cNvPicPr>
+          <p:nvPr/>
+        </p:nvPicPr>
+        <p:blipFill>
+          <a:blip r:embed="rId4"/>
+          <a:stretch>
+            <a:fillRect/>
+          </a:stretch>
+        </p:blipFill>
+        <p:spPr>
+          <a:xfrm>
+            <a:off x="6680862" y="3805030"/>
+            <a:ext cx="1981199" cy="262128"/>
+          </a:xfrm>
+          <a:prstGeom prst="rect">
+            <a:avLst/>
+          </a:prstGeom>
+        </p:spPr>
+      </p:pic>
+      <p:pic>
+        <p:nvPicPr>
+          <p:cNvPr id="14" name="Picture 13" descr="52d05dcb8358be37.png"/>
+          <p:cNvPicPr>
+            <a:picLocks noChangeAspect="1"/>
+          </p:cNvPicPr>
+          <p:nvPr/>
+        </p:nvPicPr>
+        <p:blipFill>
+          <a:blip r:embed="rId5"/>
+          <a:stretch>
+            <a:fillRect/>
+          </a:stretch>
+        </p:blipFill>
+        <p:spPr>
+          <a:xfrm>
+            <a:off x="3557369" y="4310998"/>
+            <a:ext cx="2173224" cy="256032"/>
+          </a:xfrm>
+          <a:prstGeom prst="rect">
+            <a:avLst/>
+          </a:prstGeom>
+        </p:spPr>
+      </p:pic>
+      <p:sp>
+        <p:nvSpPr>
+          <p:cNvPr id="15" name="TextBox 14"/>
+          <p:cNvSpPr txBox="1"/>
+          <p:nvPr/>
+        </p:nvSpPr>
+        <p:spPr>
+          <a:xfrm>
+            <a:off x="777240" y="4781914"/>
             <a:ext cx="10607040" cy="548640"/>
           </a:xfrm>
           <a:prstGeom prst="rect">
@@ -3747,20 +3889,20 @@
           <a:p>
             <a:pPr algn="ctr"/>
             <a:r>
-              <a:rPr sz="3200" b="1" i="0">
+              <a:rPr sz="3040" b="1" i="0">
                 <a:solidFill>
                   <a:srgbClr val="9E1B32"/>
                 </a:solidFill>
-                <a:latin typeface="Century Schoolbook"/>
+                <a:latin typeface="Lexend"/>
               </a:rPr>
               <a:t>Answer:   2 × 10</a:t>
             </a:r>
             <a:r>
-              <a:rPr sz="3200" b="1" i="0" baseline="30000">
+              <a:rPr sz="3040" b="1" i="0" baseline="30000">
                 <a:solidFill>
                   <a:srgbClr val="9E1B32"/>
                 </a:solidFill>
-                <a:latin typeface="Century Schoolbook"/>
+                <a:latin typeface="Lexend"/>
               </a:rPr>
               <a:t>5</a:t>
             </a:r>
@@ -3809,11 +3951,11 @@
           <a:p>
             <a:pPr algn="l"/>
             <a:r>
-              <a:rPr sz="3600" b="1" i="0">
+              <a:rPr sz="3420" b="1" i="0">
                 <a:solidFill>
                   <a:srgbClr val="1A1A1A"/>
                 </a:solidFill>
-                <a:latin typeface="Century Schoolbook"/>
+                <a:latin typeface="Lexend"/>
               </a:rPr>
               <a:t>Example 2</a:t>
             </a:r>
@@ -3949,11 +4091,11 @@
           <a:p>
             <a:pPr algn="l"/>
             <a:r>
-              <a:rPr sz="1100" b="0" i="1">
+              <a:rPr sz="1040" b="0" i="0">
                 <a:solidFill>
                   <a:srgbClr val="6B6B6B"/>
                 </a:solidFill>
-                <a:latin typeface="Century Schoolbook"/>
+                <a:latin typeface="Lexend"/>
               </a:rPr>
               <a:t>Grade 7 Accelerated · Unit 4 · Lessons 2–3 — Multiplying and Dividing in Scientific Notation</a:t>
             </a:r>
@@ -3984,11 +4126,11 @@
           <a:p>
             <a:pPr algn="r"/>
             <a:r>
-              <a:rPr sz="1100" b="0" i="0">
+              <a:rPr sz="1040" b="0" i="0">
                 <a:solidFill>
                   <a:srgbClr val="6B6B6B"/>
                 </a:solidFill>
-                <a:latin typeface="Century Schoolbook"/>
+                <a:latin typeface="Lexend"/>
               </a:rPr>
               <a:t>11</a:t>
             </a:r>
@@ -3997,7 +4139,7 @@
       </p:sp>
       <p:pic>
         <p:nvPicPr>
-          <p:cNvPr id="8" name="Picture 7" descr="d048c7fc436d6617.png"/>
+          <p:cNvPr id="8" name="Picture 7" descr="99e2cda0670996ed.png"/>
           <p:cNvPicPr>
             <a:picLocks noChangeAspect="1"/>
           </p:cNvPicPr>
@@ -4011,8 +4153,8 @@
         </p:blipFill>
         <p:spPr>
           <a:xfrm>
-            <a:off x="4501896" y="2103120"/>
-            <a:ext cx="3157728" cy="886968"/>
+            <a:off x="4498848" y="2103120"/>
+            <a:ext cx="3163824" cy="868680"/>
           </a:xfrm>
           <a:prstGeom prst="rect">
             <a:avLst/>
@@ -4027,7 +4169,7 @@
         </p:nvSpPr>
         <p:spPr>
           <a:xfrm>
-            <a:off x="777240" y="3493008"/>
+            <a:off x="777240" y="3474720"/>
             <a:ext cx="10607040" cy="429370"/>
           </a:xfrm>
           <a:prstGeom prst="rect">
@@ -4043,11 +4185,11 @@
           <a:p>
             <a:pPr algn="ctr"/>
             <a:r>
-              <a:rPr sz="2400" b="1" i="0">
+              <a:rPr sz="2280" b="1" i="0">
                 <a:solidFill>
                   <a:srgbClr val="1A1A1A"/>
                 </a:solidFill>
-                <a:latin typeface="Century Schoolbook"/>
+                <a:latin typeface="Lexend"/>
               </a:rPr>
               <a:t>Evaluate. Write the answer in scientific notation.</a:t>
             </a:r>
@@ -4096,11 +4238,11 @@
           <a:p>
             <a:pPr algn="l"/>
             <a:r>
-              <a:rPr sz="3600" b="1" i="0">
+              <a:rPr sz="3420" b="1" i="0">
                 <a:solidFill>
                   <a:srgbClr val="1A1A1A"/>
                 </a:solidFill>
-                <a:latin typeface="Century Schoolbook"/>
+                <a:latin typeface="Lexend"/>
               </a:rPr>
               <a:t>Example 2</a:t>
             </a:r>
@@ -4236,11 +4378,11 @@
           <a:p>
             <a:pPr algn="l"/>
             <a:r>
-              <a:rPr sz="1100" b="0" i="1">
+              <a:rPr sz="1040" b="0" i="0">
                 <a:solidFill>
                   <a:srgbClr val="6B6B6B"/>
                 </a:solidFill>
-                <a:latin typeface="Century Schoolbook"/>
+                <a:latin typeface="Lexend"/>
               </a:rPr>
               <a:t>Grade 7 Accelerated · Unit 4 · Lessons 2–3 — Multiplying and Dividing in Scientific Notation</a:t>
             </a:r>
@@ -4271,11 +4413,11 @@
           <a:p>
             <a:pPr algn="r"/>
             <a:r>
-              <a:rPr sz="1100" b="0" i="0">
+              <a:rPr sz="1040" b="0" i="0">
                 <a:solidFill>
                   <a:srgbClr val="6B6B6B"/>
                 </a:solidFill>
-                <a:latin typeface="Century Schoolbook"/>
+                <a:latin typeface="Lexend"/>
               </a:rPr>
               <a:t>12</a:t>
             </a:r>
@@ -4284,7 +4426,7 @@
       </p:sp>
       <p:pic>
         <p:nvPicPr>
-          <p:cNvPr id="8" name="Picture 7" descr="6b3f0849106cd4b7.png"/>
+          <p:cNvPr id="8" name="Picture 7" descr="e1f7b5cd77abb910.png"/>
           <p:cNvPicPr>
             <a:picLocks noChangeAspect="1"/>
           </p:cNvPicPr>
@@ -4299,7 +4441,7 @@
         <p:spPr>
           <a:xfrm>
             <a:off x="1828800" y="1920240"/>
-            <a:ext cx="4861560" cy="411480"/>
+            <a:ext cx="4858512" cy="414528"/>
           </a:xfrm>
           <a:prstGeom prst="rect">
             <a:avLst/>
@@ -4308,7 +4450,7 @@
       </p:pic>
       <p:pic>
         <p:nvPicPr>
-          <p:cNvPr id="9" name="Picture 8" descr="1c6ad9425b8dfd75.png"/>
+          <p:cNvPr id="9" name="Picture 8" descr="cef6ad8a50815185.png"/>
           <p:cNvPicPr>
             <a:picLocks noChangeAspect="1"/>
           </p:cNvPicPr>
@@ -4322,8 +4464,8 @@
         </p:blipFill>
         <p:spPr>
           <a:xfrm>
-            <a:off x="1828800" y="2606040"/>
-            <a:ext cx="3139440" cy="826008"/>
+            <a:off x="1828800" y="2609087"/>
+            <a:ext cx="3102864" cy="801624"/>
           </a:xfrm>
           <a:prstGeom prst="rect">
             <a:avLst/>
@@ -4332,7 +4474,7 @@
       </p:pic>
       <p:pic>
         <p:nvPicPr>
-          <p:cNvPr id="10" name="Picture 9" descr="6aefb1689d23fb3c.png"/>
+          <p:cNvPr id="10" name="Picture 9" descr="06feb2f012fdd558.png"/>
           <p:cNvPicPr>
             <a:picLocks noChangeAspect="1"/>
           </p:cNvPicPr>
@@ -4346,8 +4488,8 @@
         </p:blipFill>
         <p:spPr>
           <a:xfrm>
-            <a:off x="1828800" y="3706368"/>
-            <a:ext cx="3133344" cy="353568"/>
+            <a:off x="1828800" y="3685031"/>
+            <a:ext cx="3057144" cy="338328"/>
           </a:xfrm>
           <a:prstGeom prst="rect">
             <a:avLst/>
@@ -4378,20 +4520,20 @@
           <a:p>
             <a:pPr algn="ctr"/>
             <a:r>
-              <a:rPr sz="3200" b="1" i="0">
+              <a:rPr sz="3040" b="1" i="0">
                 <a:solidFill>
                   <a:srgbClr val="9E1B32"/>
                 </a:solidFill>
-                <a:latin typeface="Century Schoolbook"/>
+                <a:latin typeface="Lexend"/>
               </a:rPr>
               <a:t>Answer:   1.2 × 10</a:t>
             </a:r>
             <a:r>
-              <a:rPr sz="3200" b="1" i="0" baseline="30000">
+              <a:rPr sz="3040" b="1" i="0" baseline="30000">
                 <a:solidFill>
                   <a:srgbClr val="9E1B32"/>
                 </a:solidFill>
-                <a:latin typeface="Century Schoolbook"/>
+                <a:latin typeface="Lexend"/>
               </a:rPr>
               <a:t>5</a:t>
             </a:r>
@@ -4440,11 +4582,11 @@
           <a:p>
             <a:pPr algn="l"/>
             <a:r>
-              <a:rPr sz="3600" b="1" i="0">
+              <a:rPr sz="3420" b="1" i="0">
                 <a:solidFill>
                   <a:srgbClr val="1A1A1A"/>
                 </a:solidFill>
-                <a:latin typeface="Century Schoolbook"/>
+                <a:latin typeface="Lexend"/>
               </a:rPr>
               <a:t>Your Turn</a:t>
             </a:r>
@@ -4580,11 +4722,11 @@
           <a:p>
             <a:pPr algn="l"/>
             <a:r>
-              <a:rPr sz="1100" b="0" i="1">
+              <a:rPr sz="1040" b="0" i="0">
                 <a:solidFill>
                   <a:srgbClr val="6B6B6B"/>
                 </a:solidFill>
-                <a:latin typeface="Century Schoolbook"/>
+                <a:latin typeface="Lexend"/>
               </a:rPr>
               <a:t>Grade 7 Accelerated · Unit 4 · Lessons 2–3 — Multiplying and Dividing in Scientific Notation</a:t>
             </a:r>
@@ -4615,11 +4757,11 @@
           <a:p>
             <a:pPr algn="r"/>
             <a:r>
-              <a:rPr sz="1100" b="0" i="0">
+              <a:rPr sz="1040" b="0" i="0">
                 <a:solidFill>
                   <a:srgbClr val="6B6B6B"/>
                 </a:solidFill>
-                <a:latin typeface="Century Schoolbook"/>
+                <a:latin typeface="Lexend"/>
               </a:rPr>
               <a:t>13</a:t>
             </a:r>
@@ -4628,7 +4770,7 @@
       </p:sp>
       <p:pic>
         <p:nvPicPr>
-          <p:cNvPr id="8" name="Picture 7" descr="d9eedbeb2084bf5c.png"/>
+          <p:cNvPr id="8" name="Picture 7" descr="af033f99401fce50.png"/>
           <p:cNvPicPr>
             <a:picLocks noChangeAspect="1"/>
           </p:cNvPicPr>
@@ -4642,8 +4784,8 @@
         </p:blipFill>
         <p:spPr>
           <a:xfrm>
-            <a:off x="4177284" y="2194560"/>
-            <a:ext cx="3806952" cy="1109472"/>
+            <a:off x="4194047" y="1600200"/>
+            <a:ext cx="3773424" cy="1075944"/>
           </a:xfrm>
           <a:prstGeom prst="rect">
             <a:avLst/>
@@ -4658,7 +4800,7 @@
         </p:nvSpPr>
         <p:spPr>
           <a:xfrm>
-            <a:off x="777240" y="3806952"/>
+            <a:off x="777240" y="3179064"/>
             <a:ext cx="10607040" cy="429370"/>
           </a:xfrm>
           <a:prstGeom prst="rect">
@@ -4674,11 +4816,11 @@
           <a:p>
             <a:pPr algn="ctr"/>
             <a:r>
-              <a:rPr sz="2400" b="1" i="0">
+              <a:rPr sz="2280" b="1" i="0">
                 <a:solidFill>
                   <a:srgbClr val="1A1A1A"/>
                 </a:solidFill>
-                <a:latin typeface="Century Schoolbook"/>
+                <a:latin typeface="Lexend"/>
               </a:rPr>
               <a:t>Evaluate. Write the answer in scientific notation.</a:t>
             </a:r>
@@ -4727,11 +4869,11 @@
           <a:p>
             <a:pPr algn="l"/>
             <a:r>
-              <a:rPr sz="3600" b="1" i="0">
+              <a:rPr sz="3420" b="1" i="0">
                 <a:solidFill>
                   <a:srgbClr val="1A1A1A"/>
                 </a:solidFill>
-                <a:latin typeface="Century Schoolbook"/>
+                <a:latin typeface="Lexend"/>
               </a:rPr>
               <a:t>Your Turn</a:t>
             </a:r>
@@ -4867,11 +5009,11 @@
           <a:p>
             <a:pPr algn="l"/>
             <a:r>
-              <a:rPr sz="1100" b="0" i="1">
+              <a:rPr sz="1040" b="0" i="0">
                 <a:solidFill>
                   <a:srgbClr val="6B6B6B"/>
                 </a:solidFill>
-                <a:latin typeface="Century Schoolbook"/>
+                <a:latin typeface="Lexend"/>
               </a:rPr>
               <a:t>Grade 7 Accelerated · Unit 4 · Lessons 2–3 — Multiplying and Dividing in Scientific Notation</a:t>
             </a:r>
@@ -4902,11 +5044,11 @@
           <a:p>
             <a:pPr algn="r"/>
             <a:r>
-              <a:rPr sz="1100" b="0" i="0">
+              <a:rPr sz="1040" b="0" i="0">
                 <a:solidFill>
                   <a:srgbClr val="6B6B6B"/>
                 </a:solidFill>
-                <a:latin typeface="Century Schoolbook"/>
+                <a:latin typeface="Lexend"/>
               </a:rPr>
               <a:t>14</a:t>
             </a:r>
@@ -4915,7 +5057,7 @@
       </p:sp>
       <p:pic>
         <p:nvPicPr>
-          <p:cNvPr id="8" name="Picture 7" descr="914658bc6d4d66f9.png"/>
+          <p:cNvPr id="8" name="Picture 7" descr="6065c2d5f71d0c16.png"/>
           <p:cNvPicPr>
             <a:picLocks noChangeAspect="1"/>
           </p:cNvPicPr>
@@ -4929,8 +5071,8 @@
         </p:blipFill>
         <p:spPr>
           <a:xfrm>
-            <a:off x="4178807" y="2194560"/>
-            <a:ext cx="3803904" cy="1109472"/>
+            <a:off x="4197096" y="1600200"/>
+            <a:ext cx="3767328" cy="1075944"/>
           </a:xfrm>
           <a:prstGeom prst="rect">
             <a:avLst/>
@@ -4945,7 +5087,7 @@
         </p:nvSpPr>
         <p:spPr>
           <a:xfrm>
-            <a:off x="777240" y="3806952"/>
+            <a:off x="777240" y="3179064"/>
             <a:ext cx="10607040" cy="429370"/>
           </a:xfrm>
           <a:prstGeom prst="rect">
@@ -4961,11 +5103,11 @@
           <a:p>
             <a:pPr algn="ctr"/>
             <a:r>
-              <a:rPr sz="2400" b="1" i="0">
+              <a:rPr sz="2280" b="1" i="0">
                 <a:solidFill>
                   <a:srgbClr val="1A1A1A"/>
                 </a:solidFill>
-                <a:latin typeface="Century Schoolbook"/>
+                <a:latin typeface="Lexend"/>
               </a:rPr>
               <a:t>Evaluate. Write the answer in scientific notation.</a:t>
             </a:r>
@@ -4980,7 +5122,267 @@
         </p:nvSpPr>
         <p:spPr>
           <a:xfrm>
-            <a:off x="777240" y="4572000"/>
+            <a:off x="3234773" y="3768454"/>
+            <a:ext cx="996779" cy="457200"/>
+          </a:xfrm>
+          <a:prstGeom prst="rect">
+            <a:avLst/>
+          </a:prstGeom>
+          <a:noFill/>
+        </p:spPr>
+        <p:txBody>
+          <a:bodyPr wrap="none" lIns="45720" rIns="45720" tIns="18288" bIns="18288" anchor="ctr">
+            <a:noAutofit/>
+          </a:bodyPr>
+          <a:lstStyle/>
+          <a:p>
+            <a:pPr algn="l"/>
+            <a:r>
+              <a:rPr sz="2330" b="0" i="0">
+                <a:solidFill>
+                  <a:srgbClr val="1A1A1A"/>
+                </a:solidFill>
+                <a:latin typeface="Lexend"/>
+              </a:rPr>
+              <a:t>Top:  </a:t>
+            </a:r>
+          </a:p>
+        </p:txBody>
+      </p:sp>
+      <p:pic>
+        <p:nvPicPr>
+          <p:cNvPr id="11" name="Picture 10" descr="a056522f38be1085.png"/>
+          <p:cNvPicPr>
+            <a:picLocks noChangeAspect="1"/>
+          </p:cNvPicPr>
+          <p:nvPr/>
+        </p:nvPicPr>
+        <p:blipFill>
+          <a:blip r:embed="rId3"/>
+          <a:stretch>
+            <a:fillRect/>
+          </a:stretch>
+        </p:blipFill>
+        <p:spPr>
+          <a:xfrm>
+            <a:off x="4094393" y="3891898"/>
+            <a:ext cx="1203960" cy="210312"/>
+          </a:xfrm>
+          <a:prstGeom prst="rect">
+            <a:avLst/>
+          </a:prstGeom>
+        </p:spPr>
+      </p:pic>
+      <p:sp>
+        <p:nvSpPr>
+          <p:cNvPr id="12" name="TextBox 11"/>
+          <p:cNvSpPr txBox="1"/>
+          <p:nvPr/>
+        </p:nvSpPr>
+        <p:spPr>
+          <a:xfrm>
+            <a:off x="5298353" y="3768454"/>
+            <a:ext cx="1320048" cy="457200"/>
+          </a:xfrm>
+          <a:prstGeom prst="rect">
+            <a:avLst/>
+          </a:prstGeom>
+          <a:noFill/>
+        </p:spPr>
+        <p:txBody>
+          <a:bodyPr wrap="none" lIns="45720" rIns="45720" tIns="18288" bIns="18288" anchor="ctr">
+            <a:noAutofit/>
+          </a:bodyPr>
+          <a:lstStyle/>
+          <a:p>
+            <a:pPr algn="l"/>
+            <a:r>
+              <a:rPr sz="2330" b="0" i="0">
+                <a:solidFill>
+                  <a:srgbClr val="1A1A1A"/>
+                </a:solidFill>
+                <a:latin typeface="Lexend"/>
+              </a:rPr>
+              <a:t>   and   </a:t>
+            </a:r>
+          </a:p>
+        </p:txBody>
+      </p:sp>
+      <p:pic>
+        <p:nvPicPr>
+          <p:cNvPr id="13" name="Picture 12" descr="d07cb81e712af369.png"/>
+          <p:cNvPicPr>
+            <a:picLocks noChangeAspect="1"/>
+          </p:cNvPicPr>
+          <p:nvPr/>
+        </p:nvPicPr>
+        <p:blipFill>
+          <a:blip r:embed="rId4"/>
+          <a:stretch>
+            <a:fillRect/>
+          </a:stretch>
+        </p:blipFill>
+        <p:spPr>
+          <a:xfrm>
+            <a:off x="6481242" y="3865990"/>
+            <a:ext cx="1965960" cy="262128"/>
+          </a:xfrm>
+          <a:prstGeom prst="rect">
+            <a:avLst/>
+          </a:prstGeom>
+        </p:spPr>
+      </p:pic>
+      <p:sp>
+        <p:nvSpPr>
+          <p:cNvPr id="14" name="TextBox 13"/>
+          <p:cNvSpPr txBox="1"/>
+          <p:nvPr/>
+        </p:nvSpPr>
+        <p:spPr>
+          <a:xfrm>
+            <a:off x="3234773" y="4271374"/>
+            <a:ext cx="1427555" cy="457200"/>
+          </a:xfrm>
+          <a:prstGeom prst="rect">
+            <a:avLst/>
+          </a:prstGeom>
+          <a:noFill/>
+        </p:spPr>
+        <p:txBody>
+          <a:bodyPr wrap="none" lIns="45720" rIns="45720" tIns="18288" bIns="18288" anchor="ctr">
+            <a:noAutofit/>
+          </a:bodyPr>
+          <a:lstStyle/>
+          <a:p>
+            <a:pPr algn="l"/>
+            <a:r>
+              <a:rPr sz="2330" b="0" i="0">
+                <a:solidFill>
+                  <a:srgbClr val="1A1A1A"/>
+                </a:solidFill>
+                <a:latin typeface="Lexend"/>
+              </a:rPr>
+              <a:t>Divide:  </a:t>
+            </a:r>
+          </a:p>
+        </p:txBody>
+      </p:sp>
+      <p:pic>
+        <p:nvPicPr>
+          <p:cNvPr id="15" name="Picture 14" descr="5bba082eb9d24892.png"/>
+          <p:cNvPicPr>
+            <a:picLocks noChangeAspect="1"/>
+          </p:cNvPicPr>
+          <p:nvPr/>
+        </p:nvPicPr>
+        <p:blipFill>
+          <a:blip r:embed="rId5"/>
+          <a:stretch>
+            <a:fillRect/>
+          </a:stretch>
+        </p:blipFill>
+        <p:spPr>
+          <a:xfrm>
+            <a:off x="4525169" y="4393294"/>
+            <a:ext cx="1213104" cy="213360"/>
+          </a:xfrm>
+          <a:prstGeom prst="rect">
+            <a:avLst/>
+          </a:prstGeom>
+        </p:spPr>
+      </p:pic>
+      <p:sp>
+        <p:nvSpPr>
+          <p:cNvPr id="16" name="TextBox 15"/>
+          <p:cNvSpPr txBox="1"/>
+          <p:nvPr/>
+        </p:nvSpPr>
+        <p:spPr>
+          <a:xfrm>
+            <a:off x="5738273" y="4271374"/>
+            <a:ext cx="1320048" cy="457200"/>
+          </a:xfrm>
+          <a:prstGeom prst="rect">
+            <a:avLst/>
+          </a:prstGeom>
+          <a:noFill/>
+        </p:spPr>
+        <p:txBody>
+          <a:bodyPr wrap="none" lIns="45720" rIns="45720" tIns="18288" bIns="18288" anchor="ctr">
+            <a:noAutofit/>
+          </a:bodyPr>
+          <a:lstStyle/>
+          <a:p>
+            <a:pPr algn="l"/>
+            <a:r>
+              <a:rPr sz="2330" b="0" i="0">
+                <a:solidFill>
+                  <a:srgbClr val="1A1A1A"/>
+                </a:solidFill>
+                <a:latin typeface="Lexend"/>
+              </a:rPr>
+              <a:t>   and   </a:t>
+            </a:r>
+          </a:p>
+        </p:txBody>
+      </p:sp>
+      <p:pic>
+        <p:nvPicPr>
+          <p:cNvPr id="17" name="Picture 16" descr="256bb6140aa7aee4.png"/>
+          <p:cNvPicPr>
+            <a:picLocks noChangeAspect="1"/>
+          </p:cNvPicPr>
+          <p:nvPr/>
+        </p:nvPicPr>
+        <p:blipFill>
+          <a:blip r:embed="rId6"/>
+          <a:stretch>
+            <a:fillRect/>
+          </a:stretch>
+        </p:blipFill>
+        <p:spPr>
+          <a:xfrm>
+            <a:off x="6921162" y="4368910"/>
+            <a:ext cx="2011680" cy="262128"/>
+          </a:xfrm>
+          <a:prstGeom prst="rect">
+            <a:avLst/>
+          </a:prstGeom>
+        </p:spPr>
+      </p:pic>
+      <p:pic>
+        <p:nvPicPr>
+          <p:cNvPr id="18" name="Picture 17" descr="28b3729f21e06ae4.png"/>
+          <p:cNvPicPr>
+            <a:picLocks noChangeAspect="1"/>
+          </p:cNvPicPr>
+          <p:nvPr/>
+        </p:nvPicPr>
+        <p:blipFill>
+          <a:blip r:embed="rId7"/>
+          <a:stretch>
+            <a:fillRect/>
+          </a:stretch>
+        </p:blipFill>
+        <p:spPr>
+          <a:xfrm>
+            <a:off x="3289637" y="4871830"/>
+            <a:ext cx="957072" cy="262128"/>
+          </a:xfrm>
+          <a:prstGeom prst="rect">
+            <a:avLst/>
+          </a:prstGeom>
+        </p:spPr>
+      </p:pic>
+      <p:sp>
+        <p:nvSpPr>
+          <p:cNvPr id="19" name="TextBox 18"/>
+          <p:cNvSpPr txBox="1"/>
+          <p:nvPr/>
+        </p:nvSpPr>
+        <p:spPr>
+          <a:xfrm>
+            <a:off x="777240" y="5345794"/>
             <a:ext cx="10607040" cy="548640"/>
           </a:xfrm>
           <a:prstGeom prst="rect">
@@ -4996,20 +5398,20 @@
           <a:p>
             <a:pPr algn="ctr"/>
             <a:r>
-              <a:rPr sz="3200" b="1" i="0">
+              <a:rPr sz="3040" b="1" i="0">
                 <a:solidFill>
                   <a:srgbClr val="9E1B32"/>
                 </a:solidFill>
-                <a:latin typeface="Century Schoolbook"/>
+                <a:latin typeface="Lexend"/>
               </a:rPr>
               <a:t>Answer:   3 × 10</a:t>
             </a:r>
             <a:r>
-              <a:rPr sz="3200" b="1" i="0" baseline="30000">
+              <a:rPr sz="3040" b="1" i="0" baseline="30000">
                 <a:solidFill>
                   <a:srgbClr val="9E1B32"/>
                 </a:solidFill>
-                <a:latin typeface="Century Schoolbook"/>
+                <a:latin typeface="Lexend"/>
               </a:rPr>
               <a:t>-2</a:t>
             </a:r>
@@ -5058,11 +5460,11 @@
           <a:p>
             <a:pPr algn="l"/>
             <a:r>
-              <a:rPr sz="3400" b="1" i="0">
+              <a:rPr sz="3229" b="1" i="0">
                 <a:solidFill>
                   <a:srgbClr val="1A1A1A"/>
                 </a:solidFill>
-                <a:latin typeface="Century Schoolbook"/>
+                <a:latin typeface="Lexend"/>
               </a:rPr>
               <a:t>Whiteboards   ·   Question 1 of 9</a:t>
             </a:r>
@@ -5198,11 +5600,11 @@
           <a:p>
             <a:pPr algn="l"/>
             <a:r>
-              <a:rPr sz="1100" b="0" i="1">
+              <a:rPr sz="1040" b="0" i="0">
                 <a:solidFill>
                   <a:srgbClr val="6B6B6B"/>
                 </a:solidFill>
-                <a:latin typeface="Century Schoolbook"/>
+                <a:latin typeface="Lexend"/>
               </a:rPr>
               <a:t>Grade 7 Accelerated · Unit 4 · Lessons 2–3 — Multiplying and Dividing in Scientific Notation</a:t>
             </a:r>
@@ -5233,11 +5635,11 @@
           <a:p>
             <a:pPr algn="r"/>
             <a:r>
-              <a:rPr sz="1100" b="0" i="0">
+              <a:rPr sz="1040" b="0" i="0">
                 <a:solidFill>
                   <a:srgbClr val="6B6B6B"/>
                 </a:solidFill>
-                <a:latin typeface="Century Schoolbook"/>
+                <a:latin typeface="Lexend"/>
               </a:rPr>
               <a:t>15</a:t>
             </a:r>
@@ -5246,7 +5648,7 @@
       </p:sp>
       <p:pic>
         <p:nvPicPr>
-          <p:cNvPr id="8" name="Picture 7" descr="a47a82f506d1e533.png"/>
+          <p:cNvPr id="8" name="Picture 7" descr="0b9390ce3cc09441.png"/>
           <p:cNvPicPr>
             <a:picLocks noChangeAspect="1"/>
           </p:cNvPicPr>
@@ -5260,8 +5662,8 @@
         </p:blipFill>
         <p:spPr>
           <a:xfrm>
-            <a:off x="4675632" y="2194560"/>
-            <a:ext cx="2810256" cy="414528"/>
+            <a:off x="4675632" y="2197608"/>
+            <a:ext cx="2810256" cy="405384"/>
           </a:xfrm>
           <a:prstGeom prst="rect">
             <a:avLst/>
@@ -5292,11 +5694,11 @@
           <a:p>
             <a:pPr algn="ctr"/>
             <a:r>
-              <a:rPr sz="2600" b="1" i="0">
+              <a:rPr sz="2470" b="1" i="0">
                 <a:solidFill>
                   <a:srgbClr val="1A1A1A"/>
                 </a:solidFill>
-                <a:latin typeface="Century Schoolbook"/>
+                <a:latin typeface="Lexend"/>
               </a:rPr>
               <a:t>Answer it.</a:t>
             </a:r>
@@ -5345,11 +5747,11 @@
           <a:p>
             <a:pPr algn="l"/>
             <a:r>
-              <a:rPr sz="3400" b="1" i="0">
+              <a:rPr sz="3229" b="1" i="0">
                 <a:solidFill>
                   <a:srgbClr val="1A1A1A"/>
                 </a:solidFill>
-                <a:latin typeface="Century Schoolbook"/>
+                <a:latin typeface="Lexend"/>
               </a:rPr>
               <a:t>Whiteboards   ·   Question 1 of 9</a:t>
             </a:r>
@@ -5485,11 +5887,11 @@
           <a:p>
             <a:pPr algn="l"/>
             <a:r>
-              <a:rPr sz="1100" b="0" i="1">
+              <a:rPr sz="1040" b="0" i="0">
                 <a:solidFill>
                   <a:srgbClr val="6B6B6B"/>
                 </a:solidFill>
-                <a:latin typeface="Century Schoolbook"/>
+                <a:latin typeface="Lexend"/>
               </a:rPr>
               <a:t>Grade 7 Accelerated · Unit 4 · Lessons 2–3 — Multiplying and Dividing in Scientific Notation</a:t>
             </a:r>
@@ -5520,11 +5922,11 @@
           <a:p>
             <a:pPr algn="r"/>
             <a:r>
-              <a:rPr sz="1100" b="0" i="0">
+              <a:rPr sz="1040" b="0" i="0">
                 <a:solidFill>
                   <a:srgbClr val="6B6B6B"/>
                 </a:solidFill>
-                <a:latin typeface="Century Schoolbook"/>
+                <a:latin typeface="Lexend"/>
               </a:rPr>
               <a:t>16</a:t>
             </a:r>
@@ -5533,7 +5935,7 @@
       </p:sp>
       <p:pic>
         <p:nvPicPr>
-          <p:cNvPr id="8" name="Picture 7" descr="31fb752d70c62789.png"/>
+          <p:cNvPr id="8" name="Picture 7" descr="8f72ce73375c8b2f.png"/>
           <p:cNvPicPr>
             <a:picLocks noChangeAspect="1"/>
           </p:cNvPicPr>
@@ -5547,8 +5949,8 @@
         </p:blipFill>
         <p:spPr>
           <a:xfrm>
-            <a:off x="4674108" y="2103120"/>
-            <a:ext cx="2813304" cy="411480"/>
+            <a:off x="4674108" y="2104643"/>
+            <a:ext cx="2813304" cy="408432"/>
           </a:xfrm>
           <a:prstGeom prst="rect">
             <a:avLst/>
@@ -5558,6 +5960,148 @@
       <p:sp>
         <p:nvSpPr>
           <p:cNvPr id="9" name="TextBox 8"/>
+          <p:cNvSpPr txBox="1"/>
+          <p:nvPr/>
+        </p:nvSpPr>
+        <p:spPr>
+          <a:xfrm>
+            <a:off x="3561941" y="2839212"/>
+            <a:ext cx="3220349" cy="457200"/>
+          </a:xfrm>
+          <a:prstGeom prst="rect">
+            <a:avLst/>
+          </a:prstGeom>
+          <a:noFill/>
+        </p:spPr>
+        <p:txBody>
+          <a:bodyPr wrap="none" lIns="45720" rIns="45720" tIns="18288" bIns="18288" anchor="ctr">
+            <a:noAutofit/>
+          </a:bodyPr>
+          <a:lstStyle/>
+          <a:p>
+            <a:pPr algn="l"/>
+            <a:r>
+              <a:rPr sz="2330" b="0" i="0">
+                <a:solidFill>
+                  <a:srgbClr val="1A1A1A"/>
+                </a:solidFill>
+                <a:latin typeface="Lexend"/>
+              </a:rPr>
+              <a:t>Multiply the fronts:  </a:t>
+            </a:r>
+          </a:p>
+        </p:txBody>
+      </p:sp>
+      <p:pic>
+        <p:nvPicPr>
+          <p:cNvPr id="10" name="Picture 9" descr="3b9f7aa917f3bc2f.png"/>
+          <p:cNvPicPr>
+            <a:picLocks noChangeAspect="1"/>
+          </p:cNvPicPr>
+          <p:nvPr/>
+        </p:nvPicPr>
+        <p:blipFill>
+          <a:blip r:embed="rId3"/>
+          <a:stretch>
+            <a:fillRect/>
+          </a:stretch>
+        </p:blipFill>
+        <p:spPr>
+          <a:xfrm>
+            <a:off x="6645131" y="2961132"/>
+            <a:ext cx="996696" cy="213360"/>
+          </a:xfrm>
+          <a:prstGeom prst="rect">
+            <a:avLst/>
+          </a:prstGeom>
+        </p:spPr>
+      </p:pic>
+      <p:sp>
+        <p:nvSpPr>
+          <p:cNvPr id="11" name="TextBox 10"/>
+          <p:cNvSpPr txBox="1"/>
+          <p:nvPr/>
+        </p:nvSpPr>
+        <p:spPr>
+          <a:xfrm>
+            <a:off x="3561941" y="3342132"/>
+            <a:ext cx="3315516" cy="457200"/>
+          </a:xfrm>
+          <a:prstGeom prst="rect">
+            <a:avLst/>
+          </a:prstGeom>
+          <a:noFill/>
+        </p:spPr>
+        <p:txBody>
+          <a:bodyPr wrap="none" lIns="45720" rIns="45720" tIns="18288" bIns="18288" anchor="ctr">
+            <a:noAutofit/>
+          </a:bodyPr>
+          <a:lstStyle/>
+          <a:p>
+            <a:pPr algn="l"/>
+            <a:r>
+              <a:rPr sz="2330" b="0" i="0">
+                <a:solidFill>
+                  <a:srgbClr val="1A1A1A"/>
+                </a:solidFill>
+                <a:latin typeface="Lexend"/>
+              </a:rPr>
+              <a:t>Add the exponents:  </a:t>
+            </a:r>
+          </a:p>
+        </p:txBody>
+      </p:sp>
+      <p:pic>
+        <p:nvPicPr>
+          <p:cNvPr id="12" name="Picture 11" descr="e3276e3a1387ee5a.png"/>
+          <p:cNvPicPr>
+            <a:picLocks noChangeAspect="1"/>
+          </p:cNvPicPr>
+          <p:nvPr/>
+        </p:nvPicPr>
+        <p:blipFill>
+          <a:blip r:embed="rId4"/>
+          <a:stretch>
+            <a:fillRect/>
+          </a:stretch>
+        </p:blipFill>
+        <p:spPr>
+          <a:xfrm>
+            <a:off x="6740298" y="3439667"/>
+            <a:ext cx="1862328" cy="262128"/>
+          </a:xfrm>
+          <a:prstGeom prst="rect">
+            <a:avLst/>
+          </a:prstGeom>
+        </p:spPr>
+      </p:pic>
+      <p:pic>
+        <p:nvPicPr>
+          <p:cNvPr id="13" name="Picture 12" descr="1c75541c26ca2203.png"/>
+          <p:cNvPicPr>
+            <a:picLocks noChangeAspect="1"/>
+          </p:cNvPicPr>
+          <p:nvPr/>
+        </p:nvPicPr>
+        <p:blipFill>
+          <a:blip r:embed="rId5"/>
+          <a:stretch>
+            <a:fillRect/>
+          </a:stretch>
+        </p:blipFill>
+        <p:spPr>
+          <a:xfrm>
+            <a:off x="3616805" y="3942588"/>
+            <a:ext cx="841248" cy="262128"/>
+          </a:xfrm>
+          <a:prstGeom prst="rect">
+            <a:avLst/>
+          </a:prstGeom>
+        </p:spPr>
+      </p:pic>
+      <p:sp>
+        <p:nvSpPr>
+          <p:cNvPr id="14" name="TextBox 13"/>
           <p:cNvSpPr txBox="1"/>
           <p:nvPr/>
         </p:nvSpPr>
@@ -5579,20 +6123,20 @@
           <a:p>
             <a:pPr algn="ctr"/>
             <a:r>
-              <a:rPr sz="3200" b="1" i="0">
+              <a:rPr sz="3040" b="1" i="0">
                 <a:solidFill>
                   <a:srgbClr val="9E1B32"/>
                 </a:solidFill>
-                <a:latin typeface="Century Schoolbook"/>
+                <a:latin typeface="Lexend"/>
               </a:rPr>
               <a:t>Answer:   6 × 10</a:t>
             </a:r>
             <a:r>
-              <a:rPr sz="3200" b="1" i="0" baseline="30000">
+              <a:rPr sz="3040" b="1" i="0" baseline="30000">
                 <a:solidFill>
                   <a:srgbClr val="9E1B32"/>
                 </a:solidFill>
-                <a:latin typeface="Century Schoolbook"/>
+                <a:latin typeface="Lexend"/>
               </a:rPr>
               <a:t>9</a:t>
             </a:r>
@@ -5641,11 +6185,11 @@
           <a:p>
             <a:pPr algn="l"/>
             <a:r>
-              <a:rPr sz="3400" b="1" i="0">
+              <a:rPr sz="3229" b="1" i="0">
                 <a:solidFill>
                   <a:srgbClr val="1A1A1A"/>
                 </a:solidFill>
-                <a:latin typeface="Century Schoolbook"/>
+                <a:latin typeface="Lexend"/>
               </a:rPr>
               <a:t>Whiteboards   ·   Question 2 of 9</a:t>
             </a:r>
@@ -5781,11 +6325,11 @@
           <a:p>
             <a:pPr algn="l"/>
             <a:r>
-              <a:rPr sz="1100" b="0" i="1">
+              <a:rPr sz="1040" b="0" i="0">
                 <a:solidFill>
                   <a:srgbClr val="6B6B6B"/>
                 </a:solidFill>
-                <a:latin typeface="Century Schoolbook"/>
+                <a:latin typeface="Lexend"/>
               </a:rPr>
               <a:t>Grade 7 Accelerated · Unit 4 · Lessons 2–3 — Multiplying and Dividing in Scientific Notation</a:t>
             </a:r>
@@ -5816,11 +6360,11 @@
           <a:p>
             <a:pPr algn="r"/>
             <a:r>
-              <a:rPr sz="1100" b="0" i="0">
+              <a:rPr sz="1040" b="0" i="0">
                 <a:solidFill>
                   <a:srgbClr val="6B6B6B"/>
                 </a:solidFill>
-                <a:latin typeface="Century Schoolbook"/>
+                <a:latin typeface="Lexend"/>
               </a:rPr>
               <a:t>17</a:t>
             </a:r>
@@ -5836,7 +6380,7 @@
         <p:spPr>
           <a:xfrm>
             <a:off x="1234440" y="1851660"/>
-            <a:ext cx="2824727" cy="457200"/>
+            <a:ext cx="2745511" cy="457200"/>
           </a:xfrm>
           <a:prstGeom prst="rect">
             <a:avLst/>
@@ -5851,11 +6395,11 @@
           <a:p>
             <a:pPr algn="l"/>
             <a:r>
-              <a:rPr sz="2400" b="0" i="0">
+              <a:rPr sz="2280" b="0" i="0">
                 <a:solidFill>
                   <a:srgbClr val="1A1A1A"/>
                 </a:solidFill>
-                <a:latin typeface="Century Schoolbook"/>
+                <a:latin typeface="Lexend"/>
               </a:rPr>
               <a:t>A printer makes  </a:t>
             </a:r>
@@ -5864,7 +6408,7 @@
       </p:sp>
       <p:pic>
         <p:nvPicPr>
-          <p:cNvPr id="9" name="Picture 8" descr="813d8c543037484b.png"/>
+          <p:cNvPr id="9" name="Picture 8" descr="63d362095a3f347d.png"/>
           <p:cNvPicPr>
             <a:picLocks noChangeAspect="1"/>
           </p:cNvPicPr>
@@ -5878,8 +6422,8 @@
         </p:blipFill>
         <p:spPr>
           <a:xfrm>
-            <a:off x="3922007" y="1938527"/>
-            <a:ext cx="902208" cy="283464"/>
+            <a:off x="3842791" y="1944623"/>
+            <a:ext cx="911352" cy="271272"/>
           </a:xfrm>
           <a:prstGeom prst="rect">
             <a:avLst/>
@@ -5894,8 +6438,8 @@
         </p:nvSpPr>
         <p:spPr>
           <a:xfrm>
-            <a:off x="4824215" y="1851660"/>
-            <a:ext cx="2728810" cy="457200"/>
+            <a:off x="4754143" y="1851660"/>
+            <a:ext cx="2725928" cy="457200"/>
           </a:xfrm>
           <a:prstGeom prst="rect">
             <a:avLst/>
@@ -5910,11 +6454,11 @@
           <a:p>
             <a:pPr algn="l"/>
             <a:r>
-              <a:rPr sz="2400" b="0" i="0">
+              <a:rPr sz="2280" b="0" i="0">
                 <a:solidFill>
                   <a:srgbClr val="1A1A1A"/>
                 </a:solidFill>
-                <a:latin typeface="Century Schoolbook"/>
+                <a:latin typeface="Lexend"/>
               </a:rPr>
               <a:t>  copies per hour.</a:t>
             </a:r>
@@ -5930,7 +6474,7 @@
         <p:spPr>
           <a:xfrm>
             <a:off x="1234440" y="2464308"/>
-            <a:ext cx="1927242" cy="457200"/>
+            <a:ext cx="1884608" cy="457200"/>
           </a:xfrm>
           <a:prstGeom prst="rect">
             <a:avLst/>
@@ -5945,11 +6489,11 @@
           <a:p>
             <a:pPr algn="l"/>
             <a:r>
-              <a:rPr sz="2400" b="0" i="0">
+              <a:rPr sz="2280" b="0" i="0">
                 <a:solidFill>
                   <a:srgbClr val="1A1A1A"/>
                 </a:solidFill>
-                <a:latin typeface="Century Schoolbook"/>
+                <a:latin typeface="Lexend"/>
               </a:rPr>
               <a:t>It runs for  </a:t>
             </a:r>
@@ -5958,7 +6502,7 @@
       </p:sp>
       <p:pic>
         <p:nvPicPr>
-          <p:cNvPr id="12" name="Picture 11" descr="39bd69d20e0cfe64.png"/>
+          <p:cNvPr id="12" name="Picture 11" descr="9fc66bb1f34c491c.png"/>
           <p:cNvPicPr>
             <a:picLocks noChangeAspect="1"/>
           </p:cNvPicPr>
@@ -5972,8 +6516,8 @@
         </p:blipFill>
         <p:spPr>
           <a:xfrm>
-            <a:off x="3024522" y="2551176"/>
-            <a:ext cx="1155192" cy="283464"/>
+            <a:off x="2981888" y="2554224"/>
+            <a:ext cx="1136904" cy="277368"/>
           </a:xfrm>
           <a:prstGeom prst="rect">
             <a:avLst/>
@@ -5988,8 +6532,8 @@
         </p:nvSpPr>
         <p:spPr>
           <a:xfrm>
-            <a:off x="4179714" y="2464308"/>
-            <a:ext cx="5488362" cy="457200"/>
+            <a:off x="4118792" y="2464308"/>
+            <a:ext cx="5481137" cy="457200"/>
           </a:xfrm>
           <a:prstGeom prst="rect">
             <a:avLst/>
@@ -6004,11 +6548,11 @@
           <a:p>
             <a:pPr algn="l"/>
             <a:r>
-              <a:rPr sz="2400" b="0" i="0">
+              <a:rPr sz="2280" b="0" i="0">
                 <a:solidFill>
                   <a:srgbClr val="1A1A1A"/>
                 </a:solidFill>
-                <a:latin typeface="Century Schoolbook"/>
+                <a:latin typeface="Lexend"/>
               </a:rPr>
               <a:t>  hours. Paper costs 3 cents a sheet.</a:t>
             </a:r>
@@ -6039,11 +6583,11 @@
           <a:p>
             <a:pPr algn="l"/>
             <a:r>
-              <a:rPr sz="2400" b="1" i="0">
+              <a:rPr sz="2280" b="1" i="0">
                 <a:solidFill>
                   <a:srgbClr val="1A1A1A"/>
                 </a:solidFill>
-                <a:latin typeface="Century Schoolbook"/>
+                <a:latin typeface="Lexend"/>
               </a:rPr>
               <a:t>How many copies does it make?</a:t>
             </a:r>
@@ -6074,11 +6618,11 @@
           <a:p>
             <a:pPr algn="ctr"/>
             <a:r>
-              <a:rPr sz="2600" b="1" i="0">
+              <a:rPr sz="2470" b="1" i="0">
                 <a:solidFill>
                   <a:srgbClr val="1A1A1A"/>
                 </a:solidFill>
-                <a:latin typeface="Century Schoolbook"/>
+                <a:latin typeface="Lexend"/>
               </a:rPr>
               <a:t>Answer it.</a:t>
             </a:r>
@@ -6127,11 +6671,11 @@
           <a:p>
             <a:pPr algn="l"/>
             <a:r>
-              <a:rPr sz="3400" b="1" i="0">
+              <a:rPr sz="3229" b="1" i="0">
                 <a:solidFill>
                   <a:srgbClr val="1A1A1A"/>
                 </a:solidFill>
-                <a:latin typeface="Century Schoolbook"/>
+                <a:latin typeface="Lexend"/>
               </a:rPr>
               <a:t>Whiteboards   ·   Question 2 of 9</a:t>
             </a:r>
@@ -6267,11 +6811,11 @@
           <a:p>
             <a:pPr algn="l"/>
             <a:r>
-              <a:rPr sz="1100" b="0" i="1">
+              <a:rPr sz="1040" b="0" i="0">
                 <a:solidFill>
                   <a:srgbClr val="6B6B6B"/>
                 </a:solidFill>
-                <a:latin typeface="Century Schoolbook"/>
+                <a:latin typeface="Lexend"/>
               </a:rPr>
               <a:t>Grade 7 Accelerated · Unit 4 · Lessons 2–3 — Multiplying and Dividing in Scientific Notation</a:t>
             </a:r>
@@ -6302,11 +6846,11 @@
           <a:p>
             <a:pPr algn="r"/>
             <a:r>
-              <a:rPr sz="1100" b="0" i="0">
+              <a:rPr sz="1040" b="0" i="0">
                 <a:solidFill>
                   <a:srgbClr val="6B6B6B"/>
                 </a:solidFill>
-                <a:latin typeface="Century Schoolbook"/>
+                <a:latin typeface="Lexend"/>
               </a:rPr>
               <a:t>18</a:t>
             </a:r>
@@ -6322,7 +6866,7 @@
         <p:spPr>
           <a:xfrm>
             <a:off x="1234440" y="1851660"/>
-            <a:ext cx="2824727" cy="457200"/>
+            <a:ext cx="2745511" cy="457200"/>
           </a:xfrm>
           <a:prstGeom prst="rect">
             <a:avLst/>
@@ -6337,11 +6881,11 @@
           <a:p>
             <a:pPr algn="l"/>
             <a:r>
-              <a:rPr sz="2400" b="0" i="0">
+              <a:rPr sz="2280" b="0" i="0">
                 <a:solidFill>
                   <a:srgbClr val="1A1A1A"/>
                 </a:solidFill>
-                <a:latin typeface="Century Schoolbook"/>
+                <a:latin typeface="Lexend"/>
               </a:rPr>
               <a:t>A printer makes  </a:t>
             </a:r>
@@ -6350,7 +6894,7 @@
       </p:sp>
       <p:pic>
         <p:nvPicPr>
-          <p:cNvPr id="9" name="Picture 8" descr="00df9fb5b7ec9fd3.png"/>
+          <p:cNvPr id="9" name="Picture 8" descr="e21453500b587993.png"/>
           <p:cNvPicPr>
             <a:picLocks noChangeAspect="1"/>
           </p:cNvPicPr>
@@ -6364,8 +6908,8 @@
         </p:blipFill>
         <p:spPr>
           <a:xfrm>
-            <a:off x="3922007" y="1938527"/>
-            <a:ext cx="905256" cy="283464"/>
+            <a:off x="3842791" y="1944623"/>
+            <a:ext cx="914400" cy="271272"/>
           </a:xfrm>
           <a:prstGeom prst="rect">
             <a:avLst/>
@@ -6380,8 +6924,8 @@
         </p:nvSpPr>
         <p:spPr>
           <a:xfrm>
-            <a:off x="4827263" y="1851660"/>
-            <a:ext cx="2728810" cy="457200"/>
+            <a:off x="4757191" y="1851660"/>
+            <a:ext cx="2725928" cy="457200"/>
           </a:xfrm>
           <a:prstGeom prst="rect">
             <a:avLst/>
@@ -6396,11 +6940,11 @@
           <a:p>
             <a:pPr algn="l"/>
             <a:r>
-              <a:rPr sz="2400" b="0" i="0">
+              <a:rPr sz="2280" b="0" i="0">
                 <a:solidFill>
                   <a:srgbClr val="1A1A1A"/>
                 </a:solidFill>
-                <a:latin typeface="Century Schoolbook"/>
+                <a:latin typeface="Lexend"/>
               </a:rPr>
               <a:t>  copies per hour.</a:t>
             </a:r>
@@ -6416,7 +6960,7 @@
         <p:spPr>
           <a:xfrm>
             <a:off x="1234440" y="2464308"/>
-            <a:ext cx="1927242" cy="457200"/>
+            <a:ext cx="1884608" cy="457200"/>
           </a:xfrm>
           <a:prstGeom prst="rect">
             <a:avLst/>
@@ -6431,11 +6975,11 @@
           <a:p>
             <a:pPr algn="l"/>
             <a:r>
-              <a:rPr sz="2400" b="0" i="0">
+              <a:rPr sz="2280" b="0" i="0">
                 <a:solidFill>
                   <a:srgbClr val="1A1A1A"/>
                 </a:solidFill>
-                <a:latin typeface="Century Schoolbook"/>
+                <a:latin typeface="Lexend"/>
               </a:rPr>
               <a:t>It runs for  </a:t>
             </a:r>
@@ -6444,7 +6988,7 @@
       </p:sp>
       <p:pic>
         <p:nvPicPr>
-          <p:cNvPr id="12" name="Picture 11" descr="a80742e4b94b4b64.png"/>
+          <p:cNvPr id="12" name="Picture 11" descr="dcfe01e2266e7d45.png"/>
           <p:cNvPicPr>
             <a:picLocks noChangeAspect="1"/>
           </p:cNvPicPr>
@@ -6458,8 +7002,8 @@
         </p:blipFill>
         <p:spPr>
           <a:xfrm>
-            <a:off x="3024522" y="2551176"/>
-            <a:ext cx="1155192" cy="283464"/>
+            <a:off x="2981888" y="2554224"/>
+            <a:ext cx="1143000" cy="277368"/>
           </a:xfrm>
           <a:prstGeom prst="rect">
             <a:avLst/>
@@ -6474,8 +7018,8 @@
         </p:nvSpPr>
         <p:spPr>
           <a:xfrm>
-            <a:off x="4179714" y="2464308"/>
-            <a:ext cx="5488362" cy="457200"/>
+            <a:off x="4124888" y="2464308"/>
+            <a:ext cx="5481137" cy="457200"/>
           </a:xfrm>
           <a:prstGeom prst="rect">
             <a:avLst/>
@@ -6490,11 +7034,11 @@
           <a:p>
             <a:pPr algn="l"/>
             <a:r>
-              <a:rPr sz="2400" b="0" i="0">
+              <a:rPr sz="2280" b="0" i="0">
                 <a:solidFill>
                   <a:srgbClr val="1A1A1A"/>
                 </a:solidFill>
-                <a:latin typeface="Century Schoolbook"/>
+                <a:latin typeface="Lexend"/>
               </a:rPr>
               <a:t>  hours. Paper costs 3 cents a sheet.</a:t>
             </a:r>
@@ -6525,11 +7069,11 @@
           <a:p>
             <a:pPr algn="l"/>
             <a:r>
-              <a:rPr sz="2400" b="1" i="0">
+              <a:rPr sz="2280" b="1" i="0">
                 <a:solidFill>
                   <a:srgbClr val="1A1A1A"/>
                 </a:solidFill>
-                <a:latin typeface="Century Schoolbook"/>
+                <a:latin typeface="Lexend"/>
               </a:rPr>
               <a:t>How many copies does it make?</a:t>
             </a:r>
@@ -6544,7 +7088,149 @@
         </p:nvSpPr>
         <p:spPr>
           <a:xfrm>
-            <a:off x="777240" y="4663440"/>
+            <a:off x="3572609" y="3734926"/>
+            <a:ext cx="3220349" cy="457200"/>
+          </a:xfrm>
+          <a:prstGeom prst="rect">
+            <a:avLst/>
+          </a:prstGeom>
+          <a:noFill/>
+        </p:spPr>
+        <p:txBody>
+          <a:bodyPr wrap="none" lIns="45720" rIns="45720" tIns="18288" bIns="18288" anchor="ctr">
+            <a:noAutofit/>
+          </a:bodyPr>
+          <a:lstStyle/>
+          <a:p>
+            <a:pPr algn="l"/>
+            <a:r>
+              <a:rPr sz="2330" b="0" i="0">
+                <a:solidFill>
+                  <a:srgbClr val="1A1A1A"/>
+                </a:solidFill>
+                <a:latin typeface="Lexend"/>
+              </a:rPr>
+              <a:t>Multiply the fronts:  </a:t>
+            </a:r>
+          </a:p>
+        </p:txBody>
+      </p:sp>
+      <p:pic>
+        <p:nvPicPr>
+          <p:cNvPr id="16" name="Picture 15" descr="4841b499496deb7b.png"/>
+          <p:cNvPicPr>
+            <a:picLocks noChangeAspect="1"/>
+          </p:cNvPicPr>
+          <p:nvPr/>
+        </p:nvPicPr>
+        <p:blipFill>
+          <a:blip r:embed="rId4"/>
+          <a:stretch>
+            <a:fillRect/>
+          </a:stretch>
+        </p:blipFill>
+        <p:spPr>
+          <a:xfrm>
+            <a:off x="6655799" y="3856846"/>
+            <a:ext cx="1417320" cy="213360"/>
+          </a:xfrm>
+          <a:prstGeom prst="rect">
+            <a:avLst/>
+          </a:prstGeom>
+        </p:spPr>
+      </p:pic>
+      <p:sp>
+        <p:nvSpPr>
+          <p:cNvPr id="17" name="TextBox 16"/>
+          <p:cNvSpPr txBox="1"/>
+          <p:nvPr/>
+        </p:nvSpPr>
+        <p:spPr>
+          <a:xfrm>
+            <a:off x="3572609" y="4237846"/>
+            <a:ext cx="3315516" cy="457200"/>
+          </a:xfrm>
+          <a:prstGeom prst="rect">
+            <a:avLst/>
+          </a:prstGeom>
+          <a:noFill/>
+        </p:spPr>
+        <p:txBody>
+          <a:bodyPr wrap="none" lIns="45720" rIns="45720" tIns="18288" bIns="18288" anchor="ctr">
+            <a:noAutofit/>
+          </a:bodyPr>
+          <a:lstStyle/>
+          <a:p>
+            <a:pPr algn="l"/>
+            <a:r>
+              <a:rPr sz="2330" b="0" i="0">
+                <a:solidFill>
+                  <a:srgbClr val="1A1A1A"/>
+                </a:solidFill>
+                <a:latin typeface="Lexend"/>
+              </a:rPr>
+              <a:t>Add the exponents:  </a:t>
+            </a:r>
+          </a:p>
+        </p:txBody>
+      </p:sp>
+      <p:pic>
+        <p:nvPicPr>
+          <p:cNvPr id="18" name="Picture 17" descr="a2fcaba2a23dd202.png"/>
+          <p:cNvPicPr>
+            <a:picLocks noChangeAspect="1"/>
+          </p:cNvPicPr>
+          <p:nvPr/>
+        </p:nvPicPr>
+        <p:blipFill>
+          <a:blip r:embed="rId5"/>
+          <a:stretch>
+            <a:fillRect/>
+          </a:stretch>
+        </p:blipFill>
+        <p:spPr>
+          <a:xfrm>
+            <a:off x="6750966" y="4335382"/>
+            <a:ext cx="1840991" cy="262128"/>
+          </a:xfrm>
+          <a:prstGeom prst="rect">
+            <a:avLst/>
+          </a:prstGeom>
+        </p:spPr>
+      </p:pic>
+      <p:pic>
+        <p:nvPicPr>
+          <p:cNvPr id="19" name="Picture 18" descr="2a1f3e18aef4b3d9.png"/>
+          <p:cNvPicPr>
+            <a:picLocks noChangeAspect="1"/>
+          </p:cNvPicPr>
+          <p:nvPr/>
+        </p:nvPicPr>
+        <p:blipFill>
+          <a:blip r:embed="rId6"/>
+          <a:stretch>
+            <a:fillRect/>
+          </a:stretch>
+        </p:blipFill>
+        <p:spPr>
+          <a:xfrm>
+            <a:off x="3627473" y="4838302"/>
+            <a:ext cx="2127504" cy="262128"/>
+          </a:xfrm>
+          <a:prstGeom prst="rect">
+            <a:avLst/>
+          </a:prstGeom>
+        </p:spPr>
+      </p:pic>
+      <p:sp>
+        <p:nvSpPr>
+          <p:cNvPr id="20" name="TextBox 19"/>
+          <p:cNvSpPr txBox="1"/>
+          <p:nvPr/>
+        </p:nvSpPr>
+        <p:spPr>
+          <a:xfrm>
+            <a:off x="777240" y="5312266"/>
             <a:ext cx="10607040" cy="548640"/>
           </a:xfrm>
           <a:prstGeom prst="rect">
@@ -6560,20 +7246,20 @@
           <a:p>
             <a:pPr algn="ctr"/>
             <a:r>
-              <a:rPr sz="3200" b="1" i="0">
+              <a:rPr sz="3040" b="1" i="0">
                 <a:solidFill>
                   <a:srgbClr val="9E1B32"/>
                 </a:solidFill>
-                <a:latin typeface="Century Schoolbook"/>
+                <a:latin typeface="Lexend"/>
               </a:rPr>
               <a:t>Answer:   1 × 10</a:t>
             </a:r>
             <a:r>
-              <a:rPr sz="3200" b="1" i="0" baseline="30000">
+              <a:rPr sz="3040" b="1" i="0" baseline="30000">
                 <a:solidFill>
                   <a:srgbClr val="9E1B32"/>
                 </a:solidFill>
-                <a:latin typeface="Century Schoolbook"/>
+                <a:latin typeface="Lexend"/>
               </a:rPr>
               <a:t>6</a:t>
             </a:r>
@@ -6622,11 +7308,11 @@
           <a:p>
             <a:pPr algn="l"/>
             <a:r>
-              <a:rPr sz="3400" b="1" i="0">
+              <a:rPr sz="3229" b="1" i="0">
                 <a:solidFill>
                   <a:srgbClr val="1A1A1A"/>
                 </a:solidFill>
-                <a:latin typeface="Century Schoolbook"/>
+                <a:latin typeface="Lexend"/>
               </a:rPr>
               <a:t>Whiteboards   ·   Question 3 of 9</a:t>
             </a:r>
@@ -6762,11 +7448,11 @@
           <a:p>
             <a:pPr algn="l"/>
             <a:r>
-              <a:rPr sz="1100" b="0" i="1">
+              <a:rPr sz="1040" b="0" i="0">
                 <a:solidFill>
                   <a:srgbClr val="6B6B6B"/>
                 </a:solidFill>
-                <a:latin typeface="Century Schoolbook"/>
+                <a:latin typeface="Lexend"/>
               </a:rPr>
               <a:t>Grade 7 Accelerated · Unit 4 · Lessons 2–3 — Multiplying and Dividing in Scientific Notation</a:t>
             </a:r>
@@ -6797,11 +7483,11 @@
           <a:p>
             <a:pPr algn="r"/>
             <a:r>
-              <a:rPr sz="1100" b="0" i="0">
+              <a:rPr sz="1040" b="0" i="0">
                 <a:solidFill>
                   <a:srgbClr val="6B6B6B"/>
                 </a:solidFill>
-                <a:latin typeface="Century Schoolbook"/>
+                <a:latin typeface="Lexend"/>
               </a:rPr>
               <a:t>19</a:t>
             </a:r>
@@ -6810,7 +7496,7 @@
       </p:sp>
       <p:pic>
         <p:nvPicPr>
-          <p:cNvPr id="8" name="Picture 7" descr="f43a30d4653d07e7.png"/>
+          <p:cNvPr id="8" name="Picture 7" descr="aa8aaa91edd783f6.png"/>
           <p:cNvPicPr>
             <a:picLocks noChangeAspect="1"/>
           </p:cNvPicPr>
@@ -6824,8 +7510,8 @@
         </p:blipFill>
         <p:spPr>
           <a:xfrm>
-            <a:off x="5349240" y="2194560"/>
-            <a:ext cx="1463040" cy="822960"/>
+            <a:off x="5356859" y="2194560"/>
+            <a:ext cx="1447800" cy="795528"/>
           </a:xfrm>
           <a:prstGeom prst="rect">
             <a:avLst/>
@@ -6856,11 +7542,11 @@
           <a:p>
             <a:pPr algn="ctr"/>
             <a:r>
-              <a:rPr sz="2600" b="1" i="0">
+              <a:rPr sz="2470" b="1" i="0">
                 <a:solidFill>
                   <a:srgbClr val="1A1A1A"/>
                 </a:solidFill>
-                <a:latin typeface="Century Schoolbook"/>
+                <a:latin typeface="Lexend"/>
               </a:rPr>
               <a:t>Answer it.</a:t>
             </a:r>
@@ -6909,11 +7595,11 @@
           <a:p>
             <a:pPr algn="l"/>
             <a:r>
-              <a:rPr sz="3600" b="1" i="0">
+              <a:rPr sz="3420" b="1" i="0">
                 <a:solidFill>
                   <a:srgbClr val="1A1A1A"/>
                 </a:solidFill>
-                <a:latin typeface="Century Schoolbook"/>
+                <a:latin typeface="Lexend"/>
               </a:rPr>
               <a:t>Warm-Up</a:t>
             </a:r>
@@ -7049,11 +7735,11 @@
           <a:p>
             <a:pPr algn="l"/>
             <a:r>
-              <a:rPr sz="1100" b="0" i="1">
+              <a:rPr sz="1040" b="0" i="0">
                 <a:solidFill>
                   <a:srgbClr val="6B6B6B"/>
                 </a:solidFill>
-                <a:latin typeface="Century Schoolbook"/>
+                <a:latin typeface="Lexend"/>
               </a:rPr>
               <a:t>Grade 7 Accelerated · Unit 4 · Lessons 2–3 — Multiplying and Dividing in Scientific Notation</a:t>
             </a:r>
@@ -7084,11 +7770,11 @@
           <a:p>
             <a:pPr algn="r"/>
             <a:r>
-              <a:rPr sz="1100" b="0" i="0">
+              <a:rPr sz="1040" b="0" i="0">
                 <a:solidFill>
                   <a:srgbClr val="6B6B6B"/>
                 </a:solidFill>
-                <a:latin typeface="Century Schoolbook"/>
+                <a:latin typeface="Lexend"/>
               </a:rPr>
               <a:t>2</a:t>
             </a:r>
@@ -7104,7 +7790,7 @@
         <p:spPr>
           <a:xfrm>
             <a:off x="1874519" y="1440180"/>
-            <a:ext cx="720605" cy="457200"/>
+            <a:ext cx="671561" cy="457200"/>
           </a:xfrm>
           <a:prstGeom prst="rect">
             <a:avLst/>
@@ -7119,11 +7805,11 @@
           <a:p>
             <a:pPr algn="l"/>
             <a:r>
-              <a:rPr sz="2300" b="0" i="0">
+              <a:rPr sz="2180" b="0" i="0">
                 <a:solidFill>
                   <a:srgbClr val="1A1A1A"/>
                 </a:solidFill>
-                <a:latin typeface="Century Schoolbook"/>
+                <a:latin typeface="Lexend"/>
               </a:rPr>
               <a:t>1.   </a:t>
             </a:r>
@@ -7132,7 +7818,7 @@
       </p:sp>
       <p:pic>
         <p:nvPicPr>
-          <p:cNvPr id="9" name="Picture 8" descr="7655f1be3ef33831.png"/>
+          <p:cNvPr id="9" name="Picture 8" descr="ffd4838a463a73e1.png"/>
           <p:cNvPicPr>
             <a:picLocks noChangeAspect="1"/>
           </p:cNvPicPr>
@@ -7146,8 +7832,8 @@
         </p:blipFill>
         <p:spPr>
           <a:xfrm>
-            <a:off x="2457965" y="1501140"/>
-            <a:ext cx="3099816" cy="335280"/>
+            <a:off x="2408921" y="1502664"/>
+            <a:ext cx="3087624" cy="332232"/>
           </a:xfrm>
           <a:prstGeom prst="rect">
             <a:avLst/>
@@ -7162,8 +7848,8 @@
         </p:nvSpPr>
         <p:spPr>
           <a:xfrm>
-            <a:off x="1874519" y="2180844"/>
-            <a:ext cx="3704805" cy="457200"/>
+            <a:off x="1874519" y="2170176"/>
+            <a:ext cx="3678551" cy="457200"/>
           </a:xfrm>
           <a:prstGeom prst="rect">
             <a:avLst/>
@@ -7178,11 +7864,11 @@
           <a:p>
             <a:pPr algn="l"/>
             <a:r>
-              <a:rPr sz="2300" b="0" i="0">
+              <a:rPr sz="2180" b="0" i="0">
                 <a:solidFill>
                   <a:srgbClr val="1A1A1A"/>
                 </a:solidFill>
-                <a:latin typeface="Century Schoolbook"/>
+                <a:latin typeface="Lexend"/>
               </a:rPr>
               <a:t>2.   Write as one power:  </a:t>
             </a:r>
@@ -7191,7 +7877,7 @@
       </p:sp>
       <p:pic>
         <p:nvPicPr>
-          <p:cNvPr id="11" name="Picture 10" descr="911d175e68347695.png"/>
+          <p:cNvPr id="11" name="Picture 10" descr="164f8cc20815187e.png"/>
           <p:cNvPicPr>
             <a:picLocks noChangeAspect="1"/>
           </p:cNvPicPr>
@@ -7205,8 +7891,8 @@
         </p:blipFill>
         <p:spPr>
           <a:xfrm>
-            <a:off x="5442165" y="2075688"/>
-            <a:ext cx="469392" cy="667512"/>
+            <a:off x="5415911" y="2075688"/>
+            <a:ext cx="499871" cy="646176"/>
           </a:xfrm>
           <a:prstGeom prst="rect">
             <a:avLst/>
@@ -7221,8 +7907,8 @@
         </p:nvSpPr>
         <p:spPr>
           <a:xfrm>
-            <a:off x="1874519" y="2921508"/>
-            <a:ext cx="3064939" cy="457200"/>
+            <a:off x="1874519" y="2900172"/>
+            <a:ext cx="2930351" cy="457200"/>
           </a:xfrm>
           <a:prstGeom prst="rect">
             <a:avLst/>
@@ -7237,11 +7923,11 @@
           <a:p>
             <a:pPr algn="l"/>
             <a:r>
-              <a:rPr sz="2300" b="0" i="0">
+              <a:rPr sz="2180" b="0" i="0">
                 <a:solidFill>
                   <a:srgbClr val="1A1A1A"/>
                 </a:solidFill>
-                <a:latin typeface="Century Schoolbook"/>
+                <a:latin typeface="Lexend"/>
               </a:rPr>
               <a:t>3.   Find the value:  </a:t>
             </a:r>
@@ -7250,7 +7936,7 @@
       </p:sp>
       <p:pic>
         <p:nvPicPr>
-          <p:cNvPr id="13" name="Picture 12" descr="d68e6e8f02f1f5eb.png"/>
+          <p:cNvPr id="13" name="Picture 12" descr="1cd87bae707e9a4b.png"/>
           <p:cNvPicPr>
             <a:picLocks noChangeAspect="1"/>
           </p:cNvPicPr>
@@ -7264,8 +7950,8 @@
         </p:blipFill>
         <p:spPr>
           <a:xfrm>
-            <a:off x="4802299" y="2945892"/>
-            <a:ext cx="853440" cy="408432"/>
+            <a:off x="4667711" y="2933700"/>
+            <a:ext cx="844296" cy="390144"/>
           </a:xfrm>
           <a:prstGeom prst="rect">
             <a:avLst/>
@@ -7280,8 +7966,8 @@
         </p:nvSpPr>
         <p:spPr>
           <a:xfrm>
-            <a:off x="1874519" y="3610356"/>
-            <a:ext cx="3474215" cy="457200"/>
+            <a:off x="1874519" y="3579876"/>
+            <a:ext cx="3383258" cy="457200"/>
           </a:xfrm>
           <a:prstGeom prst="rect">
             <a:avLst/>
@@ -7296,11 +7982,11 @@
           <a:p>
             <a:pPr algn="l"/>
             <a:r>
-              <a:rPr sz="2300" b="0" i="0">
+              <a:rPr sz="2180" b="0" i="0">
                 <a:solidFill>
                   <a:srgbClr val="1A1A1A"/>
                 </a:solidFill>
-                <a:latin typeface="Century Schoolbook"/>
+                <a:latin typeface="Lexend"/>
               </a:rPr>
               <a:t>4.   Find the quotient:  </a:t>
             </a:r>
@@ -7309,7 +7995,7 @@
       </p:sp>
       <p:pic>
         <p:nvPicPr>
-          <p:cNvPr id="15" name="Picture 14" descr="57c14efe46195709.png"/>
+          <p:cNvPr id="15" name="Picture 14" descr="fe7c9d77350b9ea3.png"/>
           <p:cNvPicPr>
             <a:picLocks noChangeAspect="1"/>
           </p:cNvPicPr>
@@ -7323,8 +8009,8 @@
         </p:blipFill>
         <p:spPr>
           <a:xfrm>
-            <a:off x="5211575" y="3557016"/>
-            <a:ext cx="417576" cy="563880"/>
+            <a:off x="5120618" y="3535680"/>
+            <a:ext cx="451104" cy="545592"/>
           </a:xfrm>
           <a:prstGeom prst="rect">
             <a:avLst/>
@@ -7373,11 +8059,11 @@
           <a:p>
             <a:pPr algn="l"/>
             <a:r>
-              <a:rPr sz="3400" b="1" i="0">
+              <a:rPr sz="3229" b="1" i="0">
                 <a:solidFill>
                   <a:srgbClr val="1A1A1A"/>
                 </a:solidFill>
-                <a:latin typeface="Century Schoolbook"/>
+                <a:latin typeface="Lexend"/>
               </a:rPr>
               <a:t>Whiteboards   ·   Question 3 of 9</a:t>
             </a:r>
@@ -7513,11 +8199,11 @@
           <a:p>
             <a:pPr algn="l"/>
             <a:r>
-              <a:rPr sz="1100" b="0" i="1">
+              <a:rPr sz="1040" b="0" i="0">
                 <a:solidFill>
                   <a:srgbClr val="6B6B6B"/>
                 </a:solidFill>
-                <a:latin typeface="Century Schoolbook"/>
+                <a:latin typeface="Lexend"/>
               </a:rPr>
               <a:t>Grade 7 Accelerated · Unit 4 · Lessons 2–3 — Multiplying and Dividing in Scientific Notation</a:t>
             </a:r>
@@ -7548,11 +8234,11 @@
           <a:p>
             <a:pPr algn="r"/>
             <a:r>
-              <a:rPr sz="1100" b="0" i="0">
+              <a:rPr sz="1040" b="0" i="0">
                 <a:solidFill>
                   <a:srgbClr val="6B6B6B"/>
                 </a:solidFill>
-                <a:latin typeface="Century Schoolbook"/>
+                <a:latin typeface="Lexend"/>
               </a:rPr>
               <a:t>20</a:t>
             </a:r>
@@ -7561,7 +8247,7 @@
       </p:sp>
       <p:pic>
         <p:nvPicPr>
-          <p:cNvPr id="8" name="Picture 7" descr="f69d270b84b83600.png"/>
+          <p:cNvPr id="8" name="Picture 7" descr="3b2db2bf563f5fdc.png"/>
           <p:cNvPicPr>
             <a:picLocks noChangeAspect="1"/>
           </p:cNvPicPr>
@@ -7575,8 +8261,8 @@
         </p:blipFill>
         <p:spPr>
           <a:xfrm>
-            <a:off x="5350764" y="2103120"/>
-            <a:ext cx="1459992" cy="822960"/>
+            <a:off x="5359908" y="2103120"/>
+            <a:ext cx="1441704" cy="795528"/>
           </a:xfrm>
           <a:prstGeom prst="rect">
             <a:avLst/>
@@ -7591,7 +8277,149 @@
         </p:nvSpPr>
         <p:spPr>
           <a:xfrm>
-            <a:off x="777240" y="4663440"/>
+            <a:off x="3203725" y="3223260"/>
+            <a:ext cx="2991598" cy="457200"/>
+          </a:xfrm>
+          <a:prstGeom prst="rect">
+            <a:avLst/>
+          </a:prstGeom>
+          <a:noFill/>
+        </p:spPr>
+        <p:txBody>
+          <a:bodyPr wrap="none" lIns="45720" rIns="45720" tIns="18288" bIns="18288" anchor="ctr">
+            <a:noAutofit/>
+          </a:bodyPr>
+          <a:lstStyle/>
+          <a:p>
+            <a:pPr algn="l"/>
+            <a:r>
+              <a:rPr sz="2330" b="0" i="0">
+                <a:solidFill>
+                  <a:srgbClr val="1A1A1A"/>
+                </a:solidFill>
+                <a:latin typeface="Lexend"/>
+              </a:rPr>
+              <a:t>Divide the fronts:  </a:t>
+            </a:r>
+          </a:p>
+        </p:txBody>
+      </p:sp>
+      <p:pic>
+        <p:nvPicPr>
+          <p:cNvPr id="10" name="Picture 9" descr="68d052e64ee55838.png"/>
+          <p:cNvPicPr>
+            <a:picLocks noChangeAspect="1"/>
+          </p:cNvPicPr>
+          <p:nvPr/>
+        </p:nvPicPr>
+        <p:blipFill>
+          <a:blip r:embed="rId3"/>
+          <a:stretch>
+            <a:fillRect/>
+          </a:stretch>
+        </p:blipFill>
+        <p:spPr>
+          <a:xfrm>
+            <a:off x="6058163" y="3345180"/>
+            <a:ext cx="1481328" cy="213360"/>
+          </a:xfrm>
+          <a:prstGeom prst="rect">
+            <a:avLst/>
+          </a:prstGeom>
+        </p:spPr>
+      </p:pic>
+      <p:sp>
+        <p:nvSpPr>
+          <p:cNvPr id="11" name="TextBox 10"/>
+          <p:cNvSpPr txBox="1"/>
+          <p:nvPr/>
+        </p:nvSpPr>
+        <p:spPr>
+          <a:xfrm>
+            <a:off x="3203725" y="3726179"/>
+            <a:ext cx="4013660" cy="457200"/>
+          </a:xfrm>
+          <a:prstGeom prst="rect">
+            <a:avLst/>
+          </a:prstGeom>
+          <a:noFill/>
+        </p:spPr>
+        <p:txBody>
+          <a:bodyPr wrap="none" lIns="45720" rIns="45720" tIns="18288" bIns="18288" anchor="ctr">
+            <a:noAutofit/>
+          </a:bodyPr>
+          <a:lstStyle/>
+          <a:p>
+            <a:pPr algn="l"/>
+            <a:r>
+              <a:rPr sz="2330" b="0" i="0">
+                <a:solidFill>
+                  <a:srgbClr val="1A1A1A"/>
+                </a:solidFill>
+                <a:latin typeface="Lexend"/>
+              </a:rPr>
+              <a:t>Subtract the exponents:  </a:t>
+            </a:r>
+          </a:p>
+        </p:txBody>
+      </p:sp>
+      <p:pic>
+        <p:nvPicPr>
+          <p:cNvPr id="12" name="Picture 11" descr="93ba4e388683b6a2.png"/>
+          <p:cNvPicPr>
+            <a:picLocks noChangeAspect="1"/>
+          </p:cNvPicPr>
+          <p:nvPr/>
+        </p:nvPicPr>
+        <p:blipFill>
+          <a:blip r:embed="rId4"/>
+          <a:stretch>
+            <a:fillRect/>
+          </a:stretch>
+        </p:blipFill>
+        <p:spPr>
+          <a:xfrm>
+            <a:off x="7080226" y="3826763"/>
+            <a:ext cx="1880616" cy="256032"/>
+          </a:xfrm>
+          <a:prstGeom prst="rect">
+            <a:avLst/>
+          </a:prstGeom>
+        </p:spPr>
+      </p:pic>
+      <p:pic>
+        <p:nvPicPr>
+          <p:cNvPr id="13" name="Picture 12" descr="c6369a2a18532f76.png"/>
+          <p:cNvPicPr>
+            <a:picLocks noChangeAspect="1"/>
+          </p:cNvPicPr>
+          <p:nvPr/>
+        </p:nvPicPr>
+        <p:blipFill>
+          <a:blip r:embed="rId5"/>
+          <a:stretch>
+            <a:fillRect/>
+          </a:stretch>
+        </p:blipFill>
+        <p:spPr>
+          <a:xfrm>
+            <a:off x="3258589" y="4329683"/>
+            <a:ext cx="847344" cy="256032"/>
+          </a:xfrm>
+          <a:prstGeom prst="rect">
+            <a:avLst/>
+          </a:prstGeom>
+        </p:spPr>
+      </p:pic>
+      <p:sp>
+        <p:nvSpPr>
+          <p:cNvPr id="14" name="TextBox 13"/>
+          <p:cNvSpPr txBox="1"/>
+          <p:nvPr/>
+        </p:nvSpPr>
+        <p:spPr>
+          <a:xfrm>
+            <a:off x="777240" y="4800600"/>
             <a:ext cx="10607040" cy="548640"/>
           </a:xfrm>
           <a:prstGeom prst="rect">
@@ -7607,20 +8435,20 @@
           <a:p>
             <a:pPr algn="ctr"/>
             <a:r>
-              <a:rPr sz="3200" b="1" i="0">
+              <a:rPr sz="3040" b="1" i="0">
                 <a:solidFill>
                   <a:srgbClr val="9E1B32"/>
                 </a:solidFill>
-                <a:latin typeface="Century Schoolbook"/>
+                <a:latin typeface="Lexend"/>
               </a:rPr>
               <a:t>Answer:   8 × 10</a:t>
             </a:r>
             <a:r>
-              <a:rPr sz="3200" b="1" i="0" baseline="30000">
+              <a:rPr sz="3040" b="1" i="0" baseline="30000">
                 <a:solidFill>
                   <a:srgbClr val="9E1B32"/>
                 </a:solidFill>
-                <a:latin typeface="Century Schoolbook"/>
+                <a:latin typeface="Lexend"/>
               </a:rPr>
               <a:t>5</a:t>
             </a:r>
@@ -7669,11 +8497,11 @@
           <a:p>
             <a:pPr algn="l"/>
             <a:r>
-              <a:rPr sz="3400" b="1" i="0">
+              <a:rPr sz="3229" b="1" i="0">
                 <a:solidFill>
                   <a:srgbClr val="1A1A1A"/>
                 </a:solidFill>
-                <a:latin typeface="Century Schoolbook"/>
+                <a:latin typeface="Lexend"/>
               </a:rPr>
               <a:t>Whiteboards   ·   Question 4 of 9</a:t>
             </a:r>
@@ -7809,11 +8637,11 @@
           <a:p>
             <a:pPr algn="l"/>
             <a:r>
-              <a:rPr sz="1100" b="0" i="1">
+              <a:rPr sz="1040" b="0" i="0">
                 <a:solidFill>
                   <a:srgbClr val="6B6B6B"/>
                 </a:solidFill>
-                <a:latin typeface="Century Schoolbook"/>
+                <a:latin typeface="Lexend"/>
               </a:rPr>
               <a:t>Grade 7 Accelerated · Unit 4 · Lessons 2–3 — Multiplying and Dividing in Scientific Notation</a:t>
             </a:r>
@@ -7844,11 +8672,11 @@
           <a:p>
             <a:pPr algn="r"/>
             <a:r>
-              <a:rPr sz="1100" b="0" i="0">
+              <a:rPr sz="1040" b="0" i="0">
                 <a:solidFill>
                   <a:srgbClr val="6B6B6B"/>
                 </a:solidFill>
-                <a:latin typeface="Century Schoolbook"/>
+                <a:latin typeface="Lexend"/>
               </a:rPr>
               <a:t>21</a:t>
             </a:r>
@@ -7857,7 +8685,7 @@
       </p:sp>
       <p:pic>
         <p:nvPicPr>
-          <p:cNvPr id="8" name="Picture 7" descr="854a4a598c652712.png"/>
+          <p:cNvPr id="8" name="Picture 7" descr="2a802e9bc79b2838.png"/>
           <p:cNvPicPr>
             <a:picLocks noChangeAspect="1"/>
           </p:cNvPicPr>
@@ -7871,8 +8699,8 @@
         </p:blipFill>
         <p:spPr>
           <a:xfrm>
-            <a:off x="5177028" y="2194560"/>
-            <a:ext cx="1807464" cy="826008"/>
+            <a:off x="5192267" y="2194560"/>
+            <a:ext cx="1776984" cy="798576"/>
           </a:xfrm>
           <a:prstGeom prst="rect">
             <a:avLst/>
@@ -7903,11 +8731,11 @@
           <a:p>
             <a:pPr algn="ctr"/>
             <a:r>
-              <a:rPr sz="2600" b="1" i="0">
+              <a:rPr sz="2470" b="1" i="0">
                 <a:solidFill>
                   <a:srgbClr val="1A1A1A"/>
                 </a:solidFill>
-                <a:latin typeface="Century Schoolbook"/>
+                <a:latin typeface="Lexend"/>
               </a:rPr>
               <a:t>Answer it.</a:t>
             </a:r>
@@ -7956,11 +8784,11 @@
           <a:p>
             <a:pPr algn="l"/>
             <a:r>
-              <a:rPr sz="3400" b="1" i="0">
+              <a:rPr sz="3229" b="1" i="0">
                 <a:solidFill>
                   <a:srgbClr val="1A1A1A"/>
                 </a:solidFill>
-                <a:latin typeface="Century Schoolbook"/>
+                <a:latin typeface="Lexend"/>
               </a:rPr>
               <a:t>Whiteboards   ·   Question 4 of 9</a:t>
             </a:r>
@@ -8096,11 +8924,11 @@
           <a:p>
             <a:pPr algn="l"/>
             <a:r>
-              <a:rPr sz="1100" b="0" i="1">
+              <a:rPr sz="1040" b="0" i="0">
                 <a:solidFill>
                   <a:srgbClr val="6B6B6B"/>
                 </a:solidFill>
-                <a:latin typeface="Century Schoolbook"/>
+                <a:latin typeface="Lexend"/>
               </a:rPr>
               <a:t>Grade 7 Accelerated · Unit 4 · Lessons 2–3 — Multiplying and Dividing in Scientific Notation</a:t>
             </a:r>
@@ -8131,11 +8959,11 @@
           <a:p>
             <a:pPr algn="r"/>
             <a:r>
-              <a:rPr sz="1100" b="0" i="0">
+              <a:rPr sz="1040" b="0" i="0">
                 <a:solidFill>
                   <a:srgbClr val="6B6B6B"/>
                 </a:solidFill>
-                <a:latin typeface="Century Schoolbook"/>
+                <a:latin typeface="Lexend"/>
               </a:rPr>
               <a:t>22</a:t>
             </a:r>
@@ -8144,7 +8972,7 @@
       </p:sp>
       <p:pic>
         <p:nvPicPr>
-          <p:cNvPr id="8" name="Picture 7" descr="8bc77f296de0cf4b.png"/>
+          <p:cNvPr id="8" name="Picture 7" descr="a13b79c4b3b988f2.png"/>
           <p:cNvPicPr>
             <a:picLocks noChangeAspect="1"/>
           </p:cNvPicPr>
@@ -8158,8 +8986,8 @@
         </p:blipFill>
         <p:spPr>
           <a:xfrm>
-            <a:off x="5178552" y="2103120"/>
-            <a:ext cx="1804416" cy="822960"/>
+            <a:off x="5193792" y="2103120"/>
+            <a:ext cx="1773936" cy="801624"/>
           </a:xfrm>
           <a:prstGeom prst="rect">
             <a:avLst/>
@@ -8174,7 +9002,149 @@
         </p:nvSpPr>
         <p:spPr>
           <a:xfrm>
-            <a:off x="777240" y="4663440"/>
+            <a:off x="3048277" y="3229356"/>
+            <a:ext cx="2991598" cy="457200"/>
+          </a:xfrm>
+          <a:prstGeom prst="rect">
+            <a:avLst/>
+          </a:prstGeom>
+          <a:noFill/>
+        </p:spPr>
+        <p:txBody>
+          <a:bodyPr wrap="none" lIns="45720" rIns="45720" tIns="18288" bIns="18288" anchor="ctr">
+            <a:noAutofit/>
+          </a:bodyPr>
+          <a:lstStyle/>
+          <a:p>
+            <a:pPr algn="l"/>
+            <a:r>
+              <a:rPr sz="2330" b="0" i="0">
+                <a:solidFill>
+                  <a:srgbClr val="1A1A1A"/>
+                </a:solidFill>
+                <a:latin typeface="Lexend"/>
+              </a:rPr>
+              <a:t>Divide the fronts:  </a:t>
+            </a:r>
+          </a:p>
+        </p:txBody>
+      </p:sp>
+      <p:pic>
+        <p:nvPicPr>
+          <p:cNvPr id="10" name="Picture 9" descr="d5a4b760a6c3fb95.png"/>
+          <p:cNvPicPr>
+            <a:picLocks noChangeAspect="1"/>
+          </p:cNvPicPr>
+          <p:nvPr/>
+        </p:nvPicPr>
+        <p:blipFill>
+          <a:blip r:embed="rId3"/>
+          <a:stretch>
+            <a:fillRect/>
+          </a:stretch>
+        </p:blipFill>
+        <p:spPr>
+          <a:xfrm>
+            <a:off x="5902715" y="3351276"/>
+            <a:ext cx="1840991" cy="213360"/>
+          </a:xfrm>
+          <a:prstGeom prst="rect">
+            <a:avLst/>
+          </a:prstGeom>
+        </p:spPr>
+      </p:pic>
+      <p:sp>
+        <p:nvSpPr>
+          <p:cNvPr id="11" name="TextBox 10"/>
+          <p:cNvSpPr txBox="1"/>
+          <p:nvPr/>
+        </p:nvSpPr>
+        <p:spPr>
+          <a:xfrm>
+            <a:off x="3048277" y="3732275"/>
+            <a:ext cx="4013660" cy="457200"/>
+          </a:xfrm>
+          <a:prstGeom prst="rect">
+            <a:avLst/>
+          </a:prstGeom>
+          <a:noFill/>
+        </p:spPr>
+        <p:txBody>
+          <a:bodyPr wrap="none" lIns="45720" rIns="45720" tIns="18288" bIns="18288" anchor="ctr">
+            <a:noAutofit/>
+          </a:bodyPr>
+          <a:lstStyle/>
+          <a:p>
+            <a:pPr algn="l"/>
+            <a:r>
+              <a:rPr sz="2330" b="0" i="0">
+                <a:solidFill>
+                  <a:srgbClr val="1A1A1A"/>
+                </a:solidFill>
+                <a:latin typeface="Lexend"/>
+              </a:rPr>
+              <a:t>Subtract the exponents:  </a:t>
+            </a:r>
+          </a:p>
+        </p:txBody>
+      </p:sp>
+      <p:pic>
+        <p:nvPicPr>
+          <p:cNvPr id="12" name="Picture 11" descr="aac9d927f81bb71f.png"/>
+          <p:cNvPicPr>
+            <a:picLocks noChangeAspect="1"/>
+          </p:cNvPicPr>
+          <p:nvPr/>
+        </p:nvPicPr>
+        <p:blipFill>
+          <a:blip r:embed="rId4"/>
+          <a:stretch>
+            <a:fillRect/>
+          </a:stretch>
+        </p:blipFill>
+        <p:spPr>
+          <a:xfrm>
+            <a:off x="6924778" y="3829812"/>
+            <a:ext cx="2191512" cy="262128"/>
+          </a:xfrm>
+          <a:prstGeom prst="rect">
+            <a:avLst/>
+          </a:prstGeom>
+        </p:spPr>
+      </p:pic>
+      <p:pic>
+        <p:nvPicPr>
+          <p:cNvPr id="13" name="Picture 12" descr="1e24bf9c6552dd3d.png"/>
+          <p:cNvPicPr>
+            <a:picLocks noChangeAspect="1"/>
+          </p:cNvPicPr>
+          <p:nvPr/>
+        </p:nvPicPr>
+        <p:blipFill>
+          <a:blip r:embed="rId5"/>
+          <a:stretch>
+            <a:fillRect/>
+          </a:stretch>
+        </p:blipFill>
+        <p:spPr>
+          <a:xfrm>
+            <a:off x="3103141" y="4332732"/>
+            <a:ext cx="2855976" cy="262128"/>
+          </a:xfrm>
+          <a:prstGeom prst="rect">
+            <a:avLst/>
+          </a:prstGeom>
+        </p:spPr>
+      </p:pic>
+      <p:sp>
+        <p:nvSpPr>
+          <p:cNvPr id="14" name="TextBox 13"/>
+          <p:cNvSpPr txBox="1"/>
+          <p:nvPr/>
+        </p:nvSpPr>
+        <p:spPr>
+          <a:xfrm>
+            <a:off x="777240" y="4806696"/>
             <a:ext cx="10607040" cy="548640"/>
           </a:xfrm>
           <a:prstGeom prst="rect">
@@ -8190,20 +9160,20 @@
           <a:p>
             <a:pPr algn="ctr"/>
             <a:r>
-              <a:rPr sz="3200" b="1" i="0">
+              <a:rPr sz="3040" b="1" i="0">
                 <a:solidFill>
                   <a:srgbClr val="9E1B32"/>
                 </a:solidFill>
-                <a:latin typeface="Century Schoolbook"/>
+                <a:latin typeface="Lexend"/>
               </a:rPr>
               <a:t>Answer:   5.3 × 10</a:t>
             </a:r>
             <a:r>
-              <a:rPr sz="3200" b="1" i="0" baseline="30000">
+              <a:rPr sz="3040" b="1" i="0" baseline="30000">
                 <a:solidFill>
                   <a:srgbClr val="9E1B32"/>
                 </a:solidFill>
-                <a:latin typeface="Century Schoolbook"/>
+                <a:latin typeface="Lexend"/>
               </a:rPr>
               <a:t>-3</a:t>
             </a:r>
@@ -8252,11 +9222,11 @@
           <a:p>
             <a:pPr algn="l"/>
             <a:r>
-              <a:rPr sz="3400" b="1" i="0">
+              <a:rPr sz="3229" b="1" i="0">
                 <a:solidFill>
                   <a:srgbClr val="1A1A1A"/>
                 </a:solidFill>
-                <a:latin typeface="Century Schoolbook"/>
+                <a:latin typeface="Lexend"/>
               </a:rPr>
               <a:t>Whiteboards   ·   Question 5 of 9</a:t>
             </a:r>
@@ -8392,11 +9362,11 @@
           <a:p>
             <a:pPr algn="l"/>
             <a:r>
-              <a:rPr sz="1100" b="0" i="1">
+              <a:rPr sz="1040" b="0" i="0">
                 <a:solidFill>
                   <a:srgbClr val="6B6B6B"/>
                 </a:solidFill>
-                <a:latin typeface="Century Schoolbook"/>
+                <a:latin typeface="Lexend"/>
               </a:rPr>
               <a:t>Grade 7 Accelerated · Unit 4 · Lessons 2–3 — Multiplying and Dividing in Scientific Notation</a:t>
             </a:r>
@@ -8427,11 +9397,11 @@
           <a:p>
             <a:pPr algn="r"/>
             <a:r>
-              <a:rPr sz="1100" b="0" i="0">
+              <a:rPr sz="1040" b="0" i="0">
                 <a:solidFill>
                   <a:srgbClr val="6B6B6B"/>
                 </a:solidFill>
-                <a:latin typeface="Century Schoolbook"/>
+                <a:latin typeface="Lexend"/>
               </a:rPr>
               <a:t>23</a:t>
             </a:r>
@@ -8440,7 +9410,7 @@
       </p:sp>
       <p:pic>
         <p:nvPicPr>
-          <p:cNvPr id="8" name="Picture 7" descr="c0f8266fbc7965d4.png"/>
+          <p:cNvPr id="8" name="Picture 7" descr="030f336ef028bc09.png"/>
           <p:cNvPicPr>
             <a:picLocks noChangeAspect="1"/>
           </p:cNvPicPr>
@@ -8454,8 +9424,8 @@
         </p:blipFill>
         <p:spPr>
           <a:xfrm>
-            <a:off x="4675632" y="2194560"/>
-            <a:ext cx="2810256" cy="414528"/>
+            <a:off x="4675632" y="2197608"/>
+            <a:ext cx="2810256" cy="405384"/>
           </a:xfrm>
           <a:prstGeom prst="rect">
             <a:avLst/>
@@ -8470,7 +9440,7 @@
         </p:nvSpPr>
         <p:spPr>
           <a:xfrm>
-            <a:off x="777240" y="2883407"/>
+            <a:off x="777240" y="2880360"/>
             <a:ext cx="10607040" cy="465151"/>
           </a:xfrm>
           <a:prstGeom prst="rect">
@@ -8486,11 +9456,11 @@
           <a:p>
             <a:pPr algn="ctr"/>
             <a:r>
-              <a:rPr sz="2600" b="0" i="0">
+              <a:rPr sz="2470" b="0" i="0">
                 <a:solidFill>
                   <a:srgbClr val="1A1A1A"/>
                 </a:solidFill>
-                <a:latin typeface="Century Schoolbook"/>
+                <a:latin typeface="Lexend"/>
               </a:rPr>
               <a:t>Which is the product?</a:t>
             </a:r>
@@ -8505,7 +9475,7 @@
         </p:nvSpPr>
         <p:spPr>
           <a:xfrm>
-            <a:off x="1874519" y="3549727"/>
+            <a:off x="1874519" y="3546679"/>
             <a:ext cx="4572000" cy="548640"/>
           </a:xfrm>
           <a:prstGeom prst="rect">
@@ -8521,29 +9491,29 @@
           <a:p>
             <a:pPr algn="l"/>
             <a:r>
-              <a:rPr sz="2400" b="1" i="0">
+              <a:rPr sz="2280" b="1" i="0">
                 <a:solidFill>
                   <a:srgbClr val="1A1A1A"/>
                 </a:solidFill>
-                <a:latin typeface="Century Schoolbook"/>
+                <a:latin typeface="Lexend"/>
               </a:rPr>
               <a:t>A.   </a:t>
             </a:r>
             <a:r>
-              <a:rPr sz="2400" b="0" i="0">
+              <a:rPr sz="2280" b="0" i="0">
                 <a:solidFill>
                   <a:srgbClr val="1A1A1A"/>
                 </a:solidFill>
-                <a:latin typeface="Century Schoolbook"/>
+                <a:latin typeface="Lexend"/>
               </a:rPr>
               <a:t>6 × 10</a:t>
             </a:r>
             <a:r>
-              <a:rPr sz="2400" b="0" i="0" baseline="30000">
+              <a:rPr sz="2280" b="0" i="0" baseline="30000">
                 <a:solidFill>
                   <a:srgbClr val="1A1A1A"/>
                 </a:solidFill>
-                <a:latin typeface="Century Schoolbook"/>
+                <a:latin typeface="Lexend"/>
               </a:rPr>
               <a:t>-1</a:t>
             </a:r>
@@ -8558,7 +9528,7 @@
         </p:nvSpPr>
         <p:spPr>
           <a:xfrm>
-            <a:off x="6629400" y="3549727"/>
+            <a:off x="6629400" y="3546679"/>
             <a:ext cx="4572000" cy="548640"/>
           </a:xfrm>
           <a:prstGeom prst="rect">
@@ -8574,29 +9544,29 @@
           <a:p>
             <a:pPr algn="l"/>
             <a:r>
-              <a:rPr sz="2400" b="1" i="0">
+              <a:rPr sz="2280" b="1" i="0">
                 <a:solidFill>
                   <a:srgbClr val="1A1A1A"/>
                 </a:solidFill>
-                <a:latin typeface="Century Schoolbook"/>
+                <a:latin typeface="Lexend"/>
               </a:rPr>
               <a:t>B.   </a:t>
             </a:r>
             <a:r>
-              <a:rPr sz="2400" b="0" i="0">
+              <a:rPr sz="2280" b="0" i="0">
                 <a:solidFill>
                   <a:srgbClr val="1A1A1A"/>
                 </a:solidFill>
-                <a:latin typeface="Century Schoolbook"/>
+                <a:latin typeface="Lexend"/>
               </a:rPr>
               <a:t>6 × 10</a:t>
             </a:r>
             <a:r>
-              <a:rPr sz="2400" b="0" i="0" baseline="30000">
+              <a:rPr sz="2280" b="0" i="0" baseline="30000">
                 <a:solidFill>
                   <a:srgbClr val="1A1A1A"/>
                 </a:solidFill>
-                <a:latin typeface="Century Schoolbook"/>
+                <a:latin typeface="Lexend"/>
               </a:rPr>
               <a:t>20</a:t>
             </a:r>
@@ -8611,7 +9581,7 @@
         </p:nvSpPr>
         <p:spPr>
           <a:xfrm>
-            <a:off x="1874519" y="4235527"/>
+            <a:off x="1874519" y="4232479"/>
             <a:ext cx="4572000" cy="548640"/>
           </a:xfrm>
           <a:prstGeom prst="rect">
@@ -8627,29 +9597,29 @@
           <a:p>
             <a:pPr algn="l"/>
             <a:r>
-              <a:rPr sz="2400" b="1" i="0">
+              <a:rPr sz="2280" b="1" i="0">
                 <a:solidFill>
                   <a:srgbClr val="1A1A1A"/>
                 </a:solidFill>
-                <a:latin typeface="Century Schoolbook"/>
+                <a:latin typeface="Lexend"/>
               </a:rPr>
               <a:t>C.   </a:t>
             </a:r>
             <a:r>
-              <a:rPr sz="2400" b="0" i="0">
+              <a:rPr sz="2280" b="0" i="0">
                 <a:solidFill>
                   <a:srgbClr val="1A1A1A"/>
                 </a:solidFill>
-                <a:latin typeface="Century Schoolbook"/>
+                <a:latin typeface="Lexend"/>
               </a:rPr>
               <a:t>6 × 10</a:t>
             </a:r>
             <a:r>
-              <a:rPr sz="2400" b="0" i="0" baseline="30000">
+              <a:rPr sz="2280" b="0" i="0" baseline="30000">
                 <a:solidFill>
                   <a:srgbClr val="1A1A1A"/>
                 </a:solidFill>
-                <a:latin typeface="Century Schoolbook"/>
+                <a:latin typeface="Lexend"/>
               </a:rPr>
               <a:t>9</a:t>
             </a:r>
@@ -8664,7 +9634,7 @@
         </p:nvSpPr>
         <p:spPr>
           <a:xfrm>
-            <a:off x="6629400" y="4235527"/>
+            <a:off x="6629400" y="4232479"/>
             <a:ext cx="4572000" cy="548640"/>
           </a:xfrm>
           <a:prstGeom prst="rect">
@@ -8680,29 +9650,29 @@
           <a:p>
             <a:pPr algn="l"/>
             <a:r>
-              <a:rPr sz="2400" b="1" i="0">
+              <a:rPr sz="2280" b="1" i="0">
                 <a:solidFill>
                   <a:srgbClr val="1A1A1A"/>
                 </a:solidFill>
-                <a:latin typeface="Century Schoolbook"/>
+                <a:latin typeface="Lexend"/>
               </a:rPr>
               <a:t>D.   </a:t>
             </a:r>
             <a:r>
-              <a:rPr sz="2400" b="0" i="0">
+              <a:rPr sz="2280" b="0" i="0">
                 <a:solidFill>
                   <a:srgbClr val="1A1A1A"/>
                 </a:solidFill>
-                <a:latin typeface="Century Schoolbook"/>
+                <a:latin typeface="Lexend"/>
               </a:rPr>
               <a:t>5 × 10</a:t>
             </a:r>
             <a:r>
-              <a:rPr sz="2400" b="0" i="0" baseline="30000">
+              <a:rPr sz="2280" b="0" i="0" baseline="30000">
                 <a:solidFill>
                   <a:srgbClr val="1A1A1A"/>
                 </a:solidFill>
-                <a:latin typeface="Century Schoolbook"/>
+                <a:latin typeface="Lexend"/>
               </a:rPr>
               <a:t>9</a:t>
             </a:r>
@@ -8717,7 +9687,7 @@
         </p:nvSpPr>
         <p:spPr>
           <a:xfrm>
-            <a:off x="777240" y="5241367"/>
+            <a:off x="777240" y="5238319"/>
             <a:ext cx="10607040" cy="457200"/>
           </a:xfrm>
           <a:prstGeom prst="rect">
@@ -8733,11 +9703,11 @@
           <a:p>
             <a:pPr algn="ctr"/>
             <a:r>
-              <a:rPr sz="2600" b="1" i="0">
+              <a:rPr sz="2470" b="1" i="0">
                 <a:solidFill>
                   <a:srgbClr val="1A1A1A"/>
                 </a:solidFill>
-                <a:latin typeface="Century Schoolbook"/>
+                <a:latin typeface="Lexend"/>
               </a:rPr>
               <a:t>Answer it.</a:t>
             </a:r>
@@ -8786,11 +9756,11 @@
           <a:p>
             <a:pPr algn="l"/>
             <a:r>
-              <a:rPr sz="3400" b="1" i="0">
+              <a:rPr sz="3229" b="1" i="0">
                 <a:solidFill>
                   <a:srgbClr val="1A1A1A"/>
                 </a:solidFill>
-                <a:latin typeface="Century Schoolbook"/>
+                <a:latin typeface="Lexend"/>
               </a:rPr>
               <a:t>Whiteboards   ·   Question 5 of 9</a:t>
             </a:r>
@@ -8926,11 +9896,11 @@
           <a:p>
             <a:pPr algn="l"/>
             <a:r>
-              <a:rPr sz="1100" b="0" i="1">
+              <a:rPr sz="1040" b="0" i="0">
                 <a:solidFill>
                   <a:srgbClr val="6B6B6B"/>
                 </a:solidFill>
-                <a:latin typeface="Century Schoolbook"/>
+                <a:latin typeface="Lexend"/>
               </a:rPr>
               <a:t>Grade 7 Accelerated · Unit 4 · Lessons 2–3 — Multiplying and Dividing in Scientific Notation</a:t>
             </a:r>
@@ -8961,11 +9931,11 @@
           <a:p>
             <a:pPr algn="r"/>
             <a:r>
-              <a:rPr sz="1100" b="0" i="0">
+              <a:rPr sz="1040" b="0" i="0">
                 <a:solidFill>
                   <a:srgbClr val="6B6B6B"/>
                 </a:solidFill>
-                <a:latin typeface="Century Schoolbook"/>
+                <a:latin typeface="Lexend"/>
               </a:rPr>
               <a:t>24</a:t>
             </a:r>
@@ -8974,7 +9944,7 @@
       </p:sp>
       <p:pic>
         <p:nvPicPr>
-          <p:cNvPr id="8" name="Picture 7" descr="64c6147c2ce0e22d.png"/>
+          <p:cNvPr id="8" name="Picture 7" descr="7b4d89c05f0f21ed.png"/>
           <p:cNvPicPr>
             <a:picLocks noChangeAspect="1"/>
           </p:cNvPicPr>
@@ -8988,8 +9958,8 @@
         </p:blipFill>
         <p:spPr>
           <a:xfrm>
-            <a:off x="4674108" y="2103120"/>
-            <a:ext cx="2813304" cy="411480"/>
+            <a:off x="4674108" y="2104643"/>
+            <a:ext cx="2813304" cy="408432"/>
           </a:xfrm>
           <a:prstGeom prst="rect">
             <a:avLst/>
@@ -9020,11 +9990,11 @@
           <a:p>
             <a:pPr algn="ctr"/>
             <a:r>
-              <a:rPr sz="2600" b="0" i="0">
+              <a:rPr sz="2470" b="0" i="0">
                 <a:solidFill>
                   <a:srgbClr val="1A1A1A"/>
                 </a:solidFill>
-                <a:latin typeface="Century Schoolbook"/>
+                <a:latin typeface="Lexend"/>
               </a:rPr>
               <a:t>Which is the product?</a:t>
             </a:r>
@@ -9039,8 +10009,150 @@
         </p:nvSpPr>
         <p:spPr>
           <a:xfrm>
-            <a:off x="1874519" y="3455239"/>
-            <a:ext cx="4572000" cy="548640"/>
+            <a:off x="3561941" y="3414091"/>
+            <a:ext cx="3220349" cy="457200"/>
+          </a:xfrm>
+          <a:prstGeom prst="rect">
+            <a:avLst/>
+          </a:prstGeom>
+          <a:noFill/>
+        </p:spPr>
+        <p:txBody>
+          <a:bodyPr wrap="none" lIns="45720" rIns="45720" tIns="18288" bIns="18288" anchor="ctr">
+            <a:noAutofit/>
+          </a:bodyPr>
+          <a:lstStyle/>
+          <a:p>
+            <a:pPr algn="l"/>
+            <a:r>
+              <a:rPr sz="2330" b="0" i="0">
+                <a:solidFill>
+                  <a:srgbClr val="1A1A1A"/>
+                </a:solidFill>
+                <a:latin typeface="Lexend"/>
+              </a:rPr>
+              <a:t>Multiply the fronts:  </a:t>
+            </a:r>
+          </a:p>
+        </p:txBody>
+      </p:sp>
+      <p:pic>
+        <p:nvPicPr>
+          <p:cNvPr id="11" name="Picture 10" descr="ad6a10c37df82be6.png"/>
+          <p:cNvPicPr>
+            <a:picLocks noChangeAspect="1"/>
+          </p:cNvPicPr>
+          <p:nvPr/>
+        </p:nvPicPr>
+        <p:blipFill>
+          <a:blip r:embed="rId3"/>
+          <a:stretch>
+            <a:fillRect/>
+          </a:stretch>
+        </p:blipFill>
+        <p:spPr>
+          <a:xfrm>
+            <a:off x="6645131" y="3536011"/>
+            <a:ext cx="990599" cy="213360"/>
+          </a:xfrm>
+          <a:prstGeom prst="rect">
+            <a:avLst/>
+          </a:prstGeom>
+        </p:spPr>
+      </p:pic>
+      <p:sp>
+        <p:nvSpPr>
+          <p:cNvPr id="12" name="TextBox 11"/>
+          <p:cNvSpPr txBox="1"/>
+          <p:nvPr/>
+        </p:nvSpPr>
+        <p:spPr>
+          <a:xfrm>
+            <a:off x="3561941" y="3917011"/>
+            <a:ext cx="3315516" cy="457200"/>
+          </a:xfrm>
+          <a:prstGeom prst="rect">
+            <a:avLst/>
+          </a:prstGeom>
+          <a:noFill/>
+        </p:spPr>
+        <p:txBody>
+          <a:bodyPr wrap="none" lIns="45720" rIns="45720" tIns="18288" bIns="18288" anchor="ctr">
+            <a:noAutofit/>
+          </a:bodyPr>
+          <a:lstStyle/>
+          <a:p>
+            <a:pPr algn="l"/>
+            <a:r>
+              <a:rPr sz="2330" b="0" i="0">
+                <a:solidFill>
+                  <a:srgbClr val="1A1A1A"/>
+                </a:solidFill>
+                <a:latin typeface="Lexend"/>
+              </a:rPr>
+              <a:t>Add the exponents:  </a:t>
+            </a:r>
+          </a:p>
+        </p:txBody>
+      </p:sp>
+      <p:pic>
+        <p:nvPicPr>
+          <p:cNvPr id="13" name="Picture 12" descr="e3276e3a1387ee5a.png"/>
+          <p:cNvPicPr>
+            <a:picLocks noChangeAspect="1"/>
+          </p:cNvPicPr>
+          <p:nvPr/>
+        </p:nvPicPr>
+        <p:blipFill>
+          <a:blip r:embed="rId4"/>
+          <a:stretch>
+            <a:fillRect/>
+          </a:stretch>
+        </p:blipFill>
+        <p:spPr>
+          <a:xfrm>
+            <a:off x="6740298" y="4014547"/>
+            <a:ext cx="1862328" cy="262128"/>
+          </a:xfrm>
+          <a:prstGeom prst="rect">
+            <a:avLst/>
+          </a:prstGeom>
+        </p:spPr>
+      </p:pic>
+      <p:pic>
+        <p:nvPicPr>
+          <p:cNvPr id="14" name="Picture 13" descr="1c75541c26ca2203.png"/>
+          <p:cNvPicPr>
+            <a:picLocks noChangeAspect="1"/>
+          </p:cNvPicPr>
+          <p:nvPr/>
+        </p:nvPicPr>
+        <p:blipFill>
+          <a:blip r:embed="rId5"/>
+          <a:stretch>
+            <a:fillRect/>
+          </a:stretch>
+        </p:blipFill>
+        <p:spPr>
+          <a:xfrm>
+            <a:off x="3616805" y="4517467"/>
+            <a:ext cx="841248" cy="262128"/>
+          </a:xfrm>
+          <a:prstGeom prst="rect">
+            <a:avLst/>
+          </a:prstGeom>
+        </p:spPr>
+      </p:pic>
+      <p:sp>
+        <p:nvSpPr>
+          <p:cNvPr id="15" name="TextBox 14"/>
+          <p:cNvSpPr txBox="1"/>
+          <p:nvPr/>
+        </p:nvSpPr>
+        <p:spPr>
+          <a:xfrm>
+            <a:off x="777240" y="4991431"/>
+            <a:ext cx="10607040" cy="548640"/>
           </a:xfrm>
           <a:prstGeom prst="rect">
             <a:avLst/>
@@ -9053,234 +10165,22 @@
           </a:bodyPr>
           <a:lstStyle/>
           <a:p>
-            <a:pPr algn="l"/>
-            <a:r>
-              <a:rPr sz="2400" b="1" i="0">
-                <a:solidFill>
-                  <a:srgbClr val="1A1A1A"/>
-                </a:solidFill>
-                <a:latin typeface="Century Schoolbook"/>
-              </a:rPr>
-              <a:t>A.   </a:t>
-            </a:r>
-            <a:r>
-              <a:rPr sz="2400" b="0" i="0">
-                <a:solidFill>
-                  <a:srgbClr val="1A1A1A"/>
-                </a:solidFill>
-                <a:latin typeface="Century Schoolbook"/>
-              </a:rPr>
-              <a:t>6 × 10</a:t>
-            </a:r>
-            <a:r>
-              <a:rPr sz="2400" b="0" i="0" baseline="30000">
-                <a:solidFill>
-                  <a:srgbClr val="1A1A1A"/>
-                </a:solidFill>
-                <a:latin typeface="Century Schoolbook"/>
-              </a:rPr>
-              <a:t>-1</a:t>
-            </a:r>
-          </a:p>
-        </p:txBody>
-      </p:sp>
-      <p:sp>
-        <p:nvSpPr>
-          <p:cNvPr id="11" name="TextBox 10"/>
-          <p:cNvSpPr txBox="1"/>
-          <p:nvPr/>
-        </p:nvSpPr>
-        <p:spPr>
-          <a:xfrm>
-            <a:off x="6629400" y="3455239"/>
-            <a:ext cx="4572000" cy="548640"/>
-          </a:xfrm>
-          <a:prstGeom prst="rect">
-            <a:avLst/>
-          </a:prstGeom>
-          <a:noFill/>
-        </p:spPr>
-        <p:txBody>
-          <a:bodyPr wrap="square" lIns="45720" rIns="45720" tIns="18288" bIns="18288" anchor="t">
-            <a:spAutoFit/>
-          </a:bodyPr>
-          <a:lstStyle/>
-          <a:p>
-            <a:pPr algn="l"/>
-            <a:r>
-              <a:rPr sz="2400" b="1" i="0">
-                <a:solidFill>
-                  <a:srgbClr val="1A1A1A"/>
-                </a:solidFill>
-                <a:latin typeface="Century Schoolbook"/>
-              </a:rPr>
-              <a:t>B.   </a:t>
-            </a:r>
-            <a:r>
-              <a:rPr sz="2400" b="0" i="0">
-                <a:solidFill>
-                  <a:srgbClr val="1A1A1A"/>
-                </a:solidFill>
-                <a:latin typeface="Century Schoolbook"/>
-              </a:rPr>
-              <a:t>6 × 10</a:t>
-            </a:r>
-            <a:r>
-              <a:rPr sz="2400" b="0" i="0" baseline="30000">
-                <a:solidFill>
-                  <a:srgbClr val="1A1A1A"/>
-                </a:solidFill>
-                <a:latin typeface="Century Schoolbook"/>
-              </a:rPr>
-              <a:t>20</a:t>
-            </a:r>
-          </a:p>
-        </p:txBody>
-      </p:sp>
-      <p:sp>
-        <p:nvSpPr>
-          <p:cNvPr id="12" name="TextBox 11"/>
-          <p:cNvSpPr txBox="1"/>
-          <p:nvPr/>
-        </p:nvSpPr>
-        <p:spPr>
-          <a:xfrm>
-            <a:off x="1874519" y="4141039"/>
-            <a:ext cx="4572000" cy="548640"/>
-          </a:xfrm>
-          <a:prstGeom prst="rect">
-            <a:avLst/>
-          </a:prstGeom>
-          <a:noFill/>
-        </p:spPr>
-        <p:txBody>
-          <a:bodyPr wrap="square" lIns="45720" rIns="45720" tIns="18288" bIns="18288" anchor="t">
-            <a:spAutoFit/>
-          </a:bodyPr>
-          <a:lstStyle/>
-          <a:p>
-            <a:pPr algn="l"/>
-            <a:r>
-              <a:rPr sz="2400" b="1" i="0">
+            <a:pPr algn="ctr"/>
+            <a:r>
+              <a:rPr sz="3040" b="1" i="0">
                 <a:solidFill>
                   <a:srgbClr val="9E1B32"/>
                 </a:solidFill>
-                <a:latin typeface="Century Schoolbook"/>
-              </a:rPr>
-              <a:t>C.   </a:t>
-            </a:r>
-            <a:r>
-              <a:rPr sz="2400" b="1" i="0">
+                <a:latin typeface="Lexend"/>
+              </a:rPr>
+              <a:t>Answer:   C — 6 × 10</a:t>
+            </a:r>
+            <a:r>
+              <a:rPr sz="3040" b="1" i="0" baseline="30000">
                 <a:solidFill>
                   <a:srgbClr val="9E1B32"/>
                 </a:solidFill>
-                <a:latin typeface="Century Schoolbook"/>
-              </a:rPr>
-              <a:t>6 × 10</a:t>
-            </a:r>
-            <a:r>
-              <a:rPr sz="2400" b="1" i="0" baseline="30000">
-                <a:solidFill>
-                  <a:srgbClr val="9E1B32"/>
-                </a:solidFill>
-                <a:latin typeface="Century Schoolbook"/>
-              </a:rPr>
-              <a:t>9</a:t>
-            </a:r>
-          </a:p>
-        </p:txBody>
-      </p:sp>
-      <p:sp>
-        <p:nvSpPr>
-          <p:cNvPr id="13" name="TextBox 12"/>
-          <p:cNvSpPr txBox="1"/>
-          <p:nvPr/>
-        </p:nvSpPr>
-        <p:spPr>
-          <a:xfrm>
-            <a:off x="6629400" y="4141039"/>
-            <a:ext cx="4572000" cy="548640"/>
-          </a:xfrm>
-          <a:prstGeom prst="rect">
-            <a:avLst/>
-          </a:prstGeom>
-          <a:noFill/>
-        </p:spPr>
-        <p:txBody>
-          <a:bodyPr wrap="square" lIns="45720" rIns="45720" tIns="18288" bIns="18288" anchor="t">
-            <a:spAutoFit/>
-          </a:bodyPr>
-          <a:lstStyle/>
-          <a:p>
-            <a:pPr algn="l"/>
-            <a:r>
-              <a:rPr sz="2400" b="1" i="0">
-                <a:solidFill>
-                  <a:srgbClr val="1A1A1A"/>
-                </a:solidFill>
-                <a:latin typeface="Century Schoolbook"/>
-              </a:rPr>
-              <a:t>D.   </a:t>
-            </a:r>
-            <a:r>
-              <a:rPr sz="2400" b="0" i="0">
-                <a:solidFill>
-                  <a:srgbClr val="1A1A1A"/>
-                </a:solidFill>
-                <a:latin typeface="Century Schoolbook"/>
-              </a:rPr>
-              <a:t>5 × 10</a:t>
-            </a:r>
-            <a:r>
-              <a:rPr sz="2400" b="0" i="0" baseline="30000">
-                <a:solidFill>
-                  <a:srgbClr val="1A1A1A"/>
-                </a:solidFill>
-                <a:latin typeface="Century Schoolbook"/>
-              </a:rPr>
-              <a:t>9</a:t>
-            </a:r>
-          </a:p>
-        </p:txBody>
-      </p:sp>
-      <p:sp>
-        <p:nvSpPr>
-          <p:cNvPr id="14" name="TextBox 13"/>
-          <p:cNvSpPr txBox="1"/>
-          <p:nvPr/>
-        </p:nvSpPr>
-        <p:spPr>
-          <a:xfrm>
-            <a:off x="777240" y="5146879"/>
-            <a:ext cx="10607040" cy="548640"/>
-          </a:xfrm>
-          <a:prstGeom prst="rect">
-            <a:avLst/>
-          </a:prstGeom>
-          <a:noFill/>
-        </p:spPr>
-        <p:txBody>
-          <a:bodyPr wrap="square" lIns="45720" rIns="45720" tIns="18288" bIns="18288" anchor="t">
-            <a:spAutoFit/>
-          </a:bodyPr>
-          <a:lstStyle/>
-          <a:p>
-            <a:pPr algn="ctr"/>
-            <a:r>
-              <a:rPr sz="3200" b="1" i="0">
-                <a:solidFill>
-                  <a:srgbClr val="9E1B32"/>
-                </a:solidFill>
-                <a:latin typeface="Century Schoolbook"/>
-              </a:rPr>
-              <a:t>Answer:   C — 6 × 10</a:t>
-            </a:r>
-            <a:r>
-              <a:rPr sz="3200" b="1" i="0" baseline="30000">
-                <a:solidFill>
-                  <a:srgbClr val="9E1B32"/>
-                </a:solidFill>
-                <a:latin typeface="Century Schoolbook"/>
+                <a:latin typeface="Lexend"/>
               </a:rPr>
               <a:t>9</a:t>
             </a:r>
@@ -9329,11 +10229,11 @@
           <a:p>
             <a:pPr algn="l"/>
             <a:r>
-              <a:rPr sz="3400" b="1" i="0">
+              <a:rPr sz="3229" b="1" i="0">
                 <a:solidFill>
                   <a:srgbClr val="1A1A1A"/>
                 </a:solidFill>
-                <a:latin typeface="Century Schoolbook"/>
+                <a:latin typeface="Lexend"/>
               </a:rPr>
               <a:t>Whiteboards   ·   Question 6 of 9</a:t>
             </a:r>
@@ -9469,11 +10369,11 @@
           <a:p>
             <a:pPr algn="l"/>
             <a:r>
-              <a:rPr sz="1100" b="0" i="1">
+              <a:rPr sz="1040" b="0" i="0">
                 <a:solidFill>
                   <a:srgbClr val="6B6B6B"/>
                 </a:solidFill>
-                <a:latin typeface="Century Schoolbook"/>
+                <a:latin typeface="Lexend"/>
               </a:rPr>
               <a:t>Grade 7 Accelerated · Unit 4 · Lessons 2–3 — Multiplying and Dividing in Scientific Notation</a:t>
             </a:r>
@@ -9504,11 +10404,11 @@
           <a:p>
             <a:pPr algn="r"/>
             <a:r>
-              <a:rPr sz="1100" b="0" i="0">
+              <a:rPr sz="1040" b="0" i="0">
                 <a:solidFill>
                   <a:srgbClr val="6B6B6B"/>
                 </a:solidFill>
-                <a:latin typeface="Century Schoolbook"/>
+                <a:latin typeface="Lexend"/>
               </a:rPr>
               <a:t>25</a:t>
             </a:r>
@@ -9517,7 +10417,7 @@
       </p:sp>
       <p:pic>
         <p:nvPicPr>
-          <p:cNvPr id="8" name="Picture 7" descr="f125fe26b9d135b4.png"/>
+          <p:cNvPr id="8" name="Picture 7" descr="811d128c9a4cb37b.png"/>
           <p:cNvPicPr>
             <a:picLocks noChangeAspect="1"/>
           </p:cNvPicPr>
@@ -9531,8 +10431,8 @@
         </p:blipFill>
         <p:spPr>
           <a:xfrm>
-            <a:off x="4675632" y="2194560"/>
-            <a:ext cx="2810256" cy="414528"/>
+            <a:off x="4668012" y="2196083"/>
+            <a:ext cx="2825496" cy="408432"/>
           </a:xfrm>
           <a:prstGeom prst="rect">
             <a:avLst/>
@@ -9547,7 +10447,7 @@
         </p:nvSpPr>
         <p:spPr>
           <a:xfrm>
-            <a:off x="777240" y="2883407"/>
+            <a:off x="777240" y="2880360"/>
             <a:ext cx="10607040" cy="465151"/>
           </a:xfrm>
           <a:prstGeom prst="rect">
@@ -9563,11 +10463,11 @@
           <a:p>
             <a:pPr algn="ctr"/>
             <a:r>
-              <a:rPr sz="2600" b="0" i="0">
+              <a:rPr sz="2470" b="0" i="0">
                 <a:solidFill>
                   <a:srgbClr val="1A1A1A"/>
                 </a:solidFill>
-                <a:latin typeface="Century Schoolbook"/>
+                <a:latin typeface="Lexend"/>
               </a:rPr>
               <a:t>Which is the product, written in scientific notation?</a:t>
             </a:r>
@@ -9582,7 +10482,7 @@
         </p:nvSpPr>
         <p:spPr>
           <a:xfrm>
-            <a:off x="1874519" y="3549727"/>
+            <a:off x="1874519" y="3546679"/>
             <a:ext cx="4572000" cy="548640"/>
           </a:xfrm>
           <a:prstGeom prst="rect">
@@ -9598,29 +10498,29 @@
           <a:p>
             <a:pPr algn="l"/>
             <a:r>
-              <a:rPr sz="2400" b="1" i="0">
+              <a:rPr sz="2280" b="1" i="0">
                 <a:solidFill>
                   <a:srgbClr val="1A1A1A"/>
                 </a:solidFill>
-                <a:latin typeface="Century Schoolbook"/>
+                <a:latin typeface="Lexend"/>
               </a:rPr>
               <a:t>A.   </a:t>
             </a:r>
             <a:r>
-              <a:rPr sz="2400" b="0" i="0">
+              <a:rPr sz="2280" b="0" i="0">
                 <a:solidFill>
                   <a:srgbClr val="1A1A1A"/>
                 </a:solidFill>
-                <a:latin typeface="Century Schoolbook"/>
+                <a:latin typeface="Lexend"/>
               </a:rPr>
               <a:t>2 × 10</a:t>
             </a:r>
             <a:r>
-              <a:rPr sz="2400" b="0" i="0" baseline="30000">
+              <a:rPr sz="2280" b="0" i="0" baseline="30000">
                 <a:solidFill>
                   <a:srgbClr val="1A1A1A"/>
                 </a:solidFill>
-                <a:latin typeface="Century Schoolbook"/>
+                <a:latin typeface="Lexend"/>
               </a:rPr>
               <a:t>9</a:t>
             </a:r>
@@ -9635,7 +10535,7 @@
         </p:nvSpPr>
         <p:spPr>
           <a:xfrm>
-            <a:off x="6629400" y="3549727"/>
+            <a:off x="6629400" y="3546679"/>
             <a:ext cx="4572000" cy="548640"/>
           </a:xfrm>
           <a:prstGeom prst="rect">
@@ -9651,29 +10551,29 @@
           <a:p>
             <a:pPr algn="l"/>
             <a:r>
-              <a:rPr sz="2400" b="1" i="0">
+              <a:rPr sz="2280" b="1" i="0">
                 <a:solidFill>
                   <a:srgbClr val="1A1A1A"/>
                 </a:solidFill>
-                <a:latin typeface="Century Schoolbook"/>
+                <a:latin typeface="Lexend"/>
               </a:rPr>
               <a:t>B.   </a:t>
             </a:r>
             <a:r>
-              <a:rPr sz="2400" b="0" i="0">
+              <a:rPr sz="2280" b="0" i="0">
                 <a:solidFill>
                   <a:srgbClr val="1A1A1A"/>
                 </a:solidFill>
-                <a:latin typeface="Century Schoolbook"/>
+                <a:latin typeface="Lexend"/>
               </a:rPr>
               <a:t>20 × 10</a:t>
             </a:r>
             <a:r>
-              <a:rPr sz="2400" b="0" i="0" baseline="30000">
+              <a:rPr sz="2280" b="0" i="0" baseline="30000">
                 <a:solidFill>
                   <a:srgbClr val="1A1A1A"/>
                 </a:solidFill>
-                <a:latin typeface="Century Schoolbook"/>
+                <a:latin typeface="Lexend"/>
               </a:rPr>
               <a:t>9</a:t>
             </a:r>
@@ -9688,7 +10588,7 @@
         </p:nvSpPr>
         <p:spPr>
           <a:xfrm>
-            <a:off x="1874519" y="4235527"/>
+            <a:off x="1874519" y="4232479"/>
             <a:ext cx="4572000" cy="548640"/>
           </a:xfrm>
           <a:prstGeom prst="rect">
@@ -9704,29 +10604,29 @@
           <a:p>
             <a:pPr algn="l"/>
             <a:r>
-              <a:rPr sz="2400" b="1" i="0">
+              <a:rPr sz="2280" b="1" i="0">
                 <a:solidFill>
                   <a:srgbClr val="1A1A1A"/>
                 </a:solidFill>
-                <a:latin typeface="Century Schoolbook"/>
+                <a:latin typeface="Lexend"/>
               </a:rPr>
               <a:t>C.   </a:t>
             </a:r>
             <a:r>
-              <a:rPr sz="2400" b="0" i="0">
+              <a:rPr sz="2280" b="0" i="0">
                 <a:solidFill>
                   <a:srgbClr val="1A1A1A"/>
                 </a:solidFill>
-                <a:latin typeface="Century Schoolbook"/>
+                <a:latin typeface="Lexend"/>
               </a:rPr>
               <a:t>20 × 10</a:t>
             </a:r>
             <a:r>
-              <a:rPr sz="2400" b="0" i="0" baseline="30000">
+              <a:rPr sz="2280" b="0" i="0" baseline="30000">
                 <a:solidFill>
                   <a:srgbClr val="1A1A1A"/>
                 </a:solidFill>
-                <a:latin typeface="Century Schoolbook"/>
+                <a:latin typeface="Lexend"/>
               </a:rPr>
               <a:t>18</a:t>
             </a:r>
@@ -9741,7 +10641,7 @@
         </p:nvSpPr>
         <p:spPr>
           <a:xfrm>
-            <a:off x="6629400" y="4235527"/>
+            <a:off x="6629400" y="4232479"/>
             <a:ext cx="4572000" cy="548640"/>
           </a:xfrm>
           <a:prstGeom prst="rect">
@@ -9757,29 +10657,29 @@
           <a:p>
             <a:pPr algn="l"/>
             <a:r>
-              <a:rPr sz="2400" b="1" i="0">
+              <a:rPr sz="2280" b="1" i="0">
                 <a:solidFill>
                   <a:srgbClr val="1A1A1A"/>
                 </a:solidFill>
-                <a:latin typeface="Century Schoolbook"/>
+                <a:latin typeface="Lexend"/>
               </a:rPr>
               <a:t>D.   </a:t>
             </a:r>
             <a:r>
-              <a:rPr sz="2400" b="0" i="0">
+              <a:rPr sz="2280" b="0" i="0">
                 <a:solidFill>
                   <a:srgbClr val="1A1A1A"/>
                 </a:solidFill>
-                <a:latin typeface="Century Schoolbook"/>
+                <a:latin typeface="Lexend"/>
               </a:rPr>
               <a:t>2 × 10</a:t>
             </a:r>
             <a:r>
-              <a:rPr sz="2400" b="0" i="0" baseline="30000">
+              <a:rPr sz="2280" b="0" i="0" baseline="30000">
                 <a:solidFill>
                   <a:srgbClr val="1A1A1A"/>
                 </a:solidFill>
-                <a:latin typeface="Century Schoolbook"/>
+                <a:latin typeface="Lexend"/>
               </a:rPr>
               <a:t>10</a:t>
             </a:r>
@@ -9794,7 +10694,7 @@
         </p:nvSpPr>
         <p:spPr>
           <a:xfrm>
-            <a:off x="777240" y="5241367"/>
+            <a:off x="777240" y="5238319"/>
             <a:ext cx="10607040" cy="457200"/>
           </a:xfrm>
           <a:prstGeom prst="rect">
@@ -9810,11 +10710,11 @@
           <a:p>
             <a:pPr algn="ctr"/>
             <a:r>
-              <a:rPr sz="2600" b="1" i="0">
+              <a:rPr sz="2470" b="1" i="0">
                 <a:solidFill>
                   <a:srgbClr val="1A1A1A"/>
                 </a:solidFill>
-                <a:latin typeface="Century Schoolbook"/>
+                <a:latin typeface="Lexend"/>
               </a:rPr>
               <a:t>Answer it.</a:t>
             </a:r>
@@ -9863,11 +10763,11 @@
           <a:p>
             <a:pPr algn="l"/>
             <a:r>
-              <a:rPr sz="3400" b="1" i="0">
+              <a:rPr sz="3229" b="1" i="0">
                 <a:solidFill>
                   <a:srgbClr val="1A1A1A"/>
                 </a:solidFill>
-                <a:latin typeface="Century Schoolbook"/>
+                <a:latin typeface="Lexend"/>
               </a:rPr>
               <a:t>Whiteboards   ·   Question 6 of 9</a:t>
             </a:r>
@@ -10003,11 +10903,11 @@
           <a:p>
             <a:pPr algn="l"/>
             <a:r>
-              <a:rPr sz="1100" b="0" i="1">
+              <a:rPr sz="1040" b="0" i="0">
                 <a:solidFill>
                   <a:srgbClr val="6B6B6B"/>
                 </a:solidFill>
-                <a:latin typeface="Century Schoolbook"/>
+                <a:latin typeface="Lexend"/>
               </a:rPr>
               <a:t>Grade 7 Accelerated · Unit 4 · Lessons 2–3 — Multiplying and Dividing in Scientific Notation</a:t>
             </a:r>
@@ -10038,11 +10938,11 @@
           <a:p>
             <a:pPr algn="r"/>
             <a:r>
-              <a:rPr sz="1100" b="0" i="0">
+              <a:rPr sz="1040" b="0" i="0">
                 <a:solidFill>
                   <a:srgbClr val="6B6B6B"/>
                 </a:solidFill>
-                <a:latin typeface="Century Schoolbook"/>
+                <a:latin typeface="Lexend"/>
               </a:rPr>
               <a:t>26</a:t>
             </a:r>
@@ -10051,7 +10951,7 @@
       </p:sp>
       <p:pic>
         <p:nvPicPr>
-          <p:cNvPr id="8" name="Picture 7" descr="ffd33f95921b2446.png"/>
+          <p:cNvPr id="8" name="Picture 7" descr="d3ea7b9b7f4f766c.png"/>
           <p:cNvPicPr>
             <a:picLocks noChangeAspect="1"/>
           </p:cNvPicPr>
@@ -10065,8 +10965,8 @@
         </p:blipFill>
         <p:spPr>
           <a:xfrm>
-            <a:off x="4674108" y="2103120"/>
-            <a:ext cx="2813304" cy="411480"/>
+            <a:off x="4666487" y="2103120"/>
+            <a:ext cx="2828544" cy="414528"/>
           </a:xfrm>
           <a:prstGeom prst="rect">
             <a:avLst/>
@@ -10081,7 +10981,7 @@
         </p:nvSpPr>
         <p:spPr>
           <a:xfrm>
-            <a:off x="777240" y="2788920"/>
+            <a:off x="777240" y="2791967"/>
             <a:ext cx="10607040" cy="465151"/>
           </a:xfrm>
           <a:prstGeom prst="rect">
@@ -10097,11 +10997,11 @@
           <a:p>
             <a:pPr algn="ctr"/>
             <a:r>
-              <a:rPr sz="2600" b="0" i="0">
+              <a:rPr sz="2470" b="0" i="0">
                 <a:solidFill>
                   <a:srgbClr val="1A1A1A"/>
                 </a:solidFill>
-                <a:latin typeface="Century Schoolbook"/>
+                <a:latin typeface="Lexend"/>
               </a:rPr>
               <a:t>Which is the product, written in scientific notation?</a:t>
             </a:r>
@@ -10116,8 +11016,150 @@
         </p:nvSpPr>
         <p:spPr>
           <a:xfrm>
-            <a:off x="1874519" y="3455239"/>
-            <a:ext cx="4572000" cy="548640"/>
+            <a:off x="3572609" y="3417139"/>
+            <a:ext cx="3220349" cy="457200"/>
+          </a:xfrm>
+          <a:prstGeom prst="rect">
+            <a:avLst/>
+          </a:prstGeom>
+          <a:noFill/>
+        </p:spPr>
+        <p:txBody>
+          <a:bodyPr wrap="none" lIns="45720" rIns="45720" tIns="18288" bIns="18288" anchor="ctr">
+            <a:noAutofit/>
+          </a:bodyPr>
+          <a:lstStyle/>
+          <a:p>
+            <a:pPr algn="l"/>
+            <a:r>
+              <a:rPr sz="2330" b="0" i="0">
+                <a:solidFill>
+                  <a:srgbClr val="1A1A1A"/>
+                </a:solidFill>
+                <a:latin typeface="Lexend"/>
+              </a:rPr>
+              <a:t>Multiply the fronts:  </a:t>
+            </a:r>
+          </a:p>
+        </p:txBody>
+      </p:sp>
+      <p:pic>
+        <p:nvPicPr>
+          <p:cNvPr id="11" name="Picture 10" descr="95ecba0795db8e3b.png"/>
+          <p:cNvPicPr>
+            <a:picLocks noChangeAspect="1"/>
+          </p:cNvPicPr>
+          <p:nvPr/>
+        </p:nvPicPr>
+        <p:blipFill>
+          <a:blip r:embed="rId3"/>
+          <a:stretch>
+            <a:fillRect/>
+          </a:stretch>
+        </p:blipFill>
+        <p:spPr>
+          <a:xfrm>
+            <a:off x="6655799" y="3539059"/>
+            <a:ext cx="1197864" cy="213360"/>
+          </a:xfrm>
+          <a:prstGeom prst="rect">
+            <a:avLst/>
+          </a:prstGeom>
+        </p:spPr>
+      </p:pic>
+      <p:sp>
+        <p:nvSpPr>
+          <p:cNvPr id="12" name="TextBox 11"/>
+          <p:cNvSpPr txBox="1"/>
+          <p:nvPr/>
+        </p:nvSpPr>
+        <p:spPr>
+          <a:xfrm>
+            <a:off x="3572609" y="3920059"/>
+            <a:ext cx="3315516" cy="457200"/>
+          </a:xfrm>
+          <a:prstGeom prst="rect">
+            <a:avLst/>
+          </a:prstGeom>
+          <a:noFill/>
+        </p:spPr>
+        <p:txBody>
+          <a:bodyPr wrap="none" lIns="45720" rIns="45720" tIns="18288" bIns="18288" anchor="ctr">
+            <a:noAutofit/>
+          </a:bodyPr>
+          <a:lstStyle/>
+          <a:p>
+            <a:pPr algn="l"/>
+            <a:r>
+              <a:rPr sz="2330" b="0" i="0">
+                <a:solidFill>
+                  <a:srgbClr val="1A1A1A"/>
+                </a:solidFill>
+                <a:latin typeface="Lexend"/>
+              </a:rPr>
+              <a:t>Add the exponents:  </a:t>
+            </a:r>
+          </a:p>
+        </p:txBody>
+      </p:sp>
+      <p:pic>
+        <p:nvPicPr>
+          <p:cNvPr id="13" name="Picture 12" descr="d8f8e59949bbed45.png"/>
+          <p:cNvPicPr>
+            <a:picLocks noChangeAspect="1"/>
+          </p:cNvPicPr>
+          <p:nvPr/>
+        </p:nvPicPr>
+        <p:blipFill>
+          <a:blip r:embed="rId4"/>
+          <a:stretch>
+            <a:fillRect/>
+          </a:stretch>
+        </p:blipFill>
+        <p:spPr>
+          <a:xfrm>
+            <a:off x="6750966" y="4017595"/>
+            <a:ext cx="1840991" cy="262128"/>
+          </a:xfrm>
+          <a:prstGeom prst="rect">
+            <a:avLst/>
+          </a:prstGeom>
+        </p:spPr>
+      </p:pic>
+      <p:pic>
+        <p:nvPicPr>
+          <p:cNvPr id="14" name="Picture 13" descr="a7b20829de9c08ed.png"/>
+          <p:cNvPicPr>
+            <a:picLocks noChangeAspect="1"/>
+          </p:cNvPicPr>
+          <p:nvPr/>
+        </p:nvPicPr>
+        <p:blipFill>
+          <a:blip r:embed="rId5"/>
+          <a:stretch>
+            <a:fillRect/>
+          </a:stretch>
+        </p:blipFill>
+        <p:spPr>
+          <a:xfrm>
+            <a:off x="3627473" y="4520515"/>
+            <a:ext cx="2273808" cy="262128"/>
+          </a:xfrm>
+          <a:prstGeom prst="rect">
+            <a:avLst/>
+          </a:prstGeom>
+        </p:spPr>
+      </p:pic>
+      <p:sp>
+        <p:nvSpPr>
+          <p:cNvPr id="15" name="TextBox 14"/>
+          <p:cNvSpPr txBox="1"/>
+          <p:nvPr/>
+        </p:nvSpPr>
+        <p:spPr>
+          <a:xfrm>
+            <a:off x="777240" y="4994479"/>
+            <a:ext cx="10607040" cy="548640"/>
           </a:xfrm>
           <a:prstGeom prst="rect">
             <a:avLst/>
@@ -10130,234 +11172,22 @@
           </a:bodyPr>
           <a:lstStyle/>
           <a:p>
-            <a:pPr algn="l"/>
-            <a:r>
-              <a:rPr sz="2400" b="1" i="0">
-                <a:solidFill>
-                  <a:srgbClr val="1A1A1A"/>
-                </a:solidFill>
-                <a:latin typeface="Century Schoolbook"/>
-              </a:rPr>
-              <a:t>A.   </a:t>
-            </a:r>
-            <a:r>
-              <a:rPr sz="2400" b="0" i="0">
-                <a:solidFill>
-                  <a:srgbClr val="1A1A1A"/>
-                </a:solidFill>
-                <a:latin typeface="Century Schoolbook"/>
-              </a:rPr>
-              <a:t>2 × 10</a:t>
-            </a:r>
-            <a:r>
-              <a:rPr sz="2400" b="0" i="0" baseline="30000">
-                <a:solidFill>
-                  <a:srgbClr val="1A1A1A"/>
-                </a:solidFill>
-                <a:latin typeface="Century Schoolbook"/>
-              </a:rPr>
-              <a:t>9</a:t>
-            </a:r>
-          </a:p>
-        </p:txBody>
-      </p:sp>
-      <p:sp>
-        <p:nvSpPr>
-          <p:cNvPr id="11" name="TextBox 10"/>
-          <p:cNvSpPr txBox="1"/>
-          <p:nvPr/>
-        </p:nvSpPr>
-        <p:spPr>
-          <a:xfrm>
-            <a:off x="6629400" y="3455239"/>
-            <a:ext cx="4572000" cy="548640"/>
-          </a:xfrm>
-          <a:prstGeom prst="rect">
-            <a:avLst/>
-          </a:prstGeom>
-          <a:noFill/>
-        </p:spPr>
-        <p:txBody>
-          <a:bodyPr wrap="square" lIns="45720" rIns="45720" tIns="18288" bIns="18288" anchor="t">
-            <a:spAutoFit/>
-          </a:bodyPr>
-          <a:lstStyle/>
-          <a:p>
-            <a:pPr algn="l"/>
-            <a:r>
-              <a:rPr sz="2400" b="1" i="0">
-                <a:solidFill>
-                  <a:srgbClr val="1A1A1A"/>
-                </a:solidFill>
-                <a:latin typeface="Century Schoolbook"/>
-              </a:rPr>
-              <a:t>B.   </a:t>
-            </a:r>
-            <a:r>
-              <a:rPr sz="2400" b="0" i="0">
-                <a:solidFill>
-                  <a:srgbClr val="1A1A1A"/>
-                </a:solidFill>
-                <a:latin typeface="Century Schoolbook"/>
-              </a:rPr>
-              <a:t>20 × 10</a:t>
-            </a:r>
-            <a:r>
-              <a:rPr sz="2400" b="0" i="0" baseline="30000">
-                <a:solidFill>
-                  <a:srgbClr val="1A1A1A"/>
-                </a:solidFill>
-                <a:latin typeface="Century Schoolbook"/>
-              </a:rPr>
-              <a:t>9</a:t>
-            </a:r>
-          </a:p>
-        </p:txBody>
-      </p:sp>
-      <p:sp>
-        <p:nvSpPr>
-          <p:cNvPr id="12" name="TextBox 11"/>
-          <p:cNvSpPr txBox="1"/>
-          <p:nvPr/>
-        </p:nvSpPr>
-        <p:spPr>
-          <a:xfrm>
-            <a:off x="1874519" y="4141039"/>
-            <a:ext cx="4572000" cy="548640"/>
-          </a:xfrm>
-          <a:prstGeom prst="rect">
-            <a:avLst/>
-          </a:prstGeom>
-          <a:noFill/>
-        </p:spPr>
-        <p:txBody>
-          <a:bodyPr wrap="square" lIns="45720" rIns="45720" tIns="18288" bIns="18288" anchor="t">
-            <a:spAutoFit/>
-          </a:bodyPr>
-          <a:lstStyle/>
-          <a:p>
-            <a:pPr algn="l"/>
-            <a:r>
-              <a:rPr sz="2400" b="1" i="0">
-                <a:solidFill>
-                  <a:srgbClr val="1A1A1A"/>
-                </a:solidFill>
-                <a:latin typeface="Century Schoolbook"/>
-              </a:rPr>
-              <a:t>C.   </a:t>
-            </a:r>
-            <a:r>
-              <a:rPr sz="2400" b="0" i="0">
-                <a:solidFill>
-                  <a:srgbClr val="1A1A1A"/>
-                </a:solidFill>
-                <a:latin typeface="Century Schoolbook"/>
-              </a:rPr>
-              <a:t>20 × 10</a:t>
-            </a:r>
-            <a:r>
-              <a:rPr sz="2400" b="0" i="0" baseline="30000">
-                <a:solidFill>
-                  <a:srgbClr val="1A1A1A"/>
-                </a:solidFill>
-                <a:latin typeface="Century Schoolbook"/>
-              </a:rPr>
-              <a:t>18</a:t>
-            </a:r>
-          </a:p>
-        </p:txBody>
-      </p:sp>
-      <p:sp>
-        <p:nvSpPr>
-          <p:cNvPr id="13" name="TextBox 12"/>
-          <p:cNvSpPr txBox="1"/>
-          <p:nvPr/>
-        </p:nvSpPr>
-        <p:spPr>
-          <a:xfrm>
-            <a:off x="6629400" y="4141039"/>
-            <a:ext cx="4572000" cy="548640"/>
-          </a:xfrm>
-          <a:prstGeom prst="rect">
-            <a:avLst/>
-          </a:prstGeom>
-          <a:noFill/>
-        </p:spPr>
-        <p:txBody>
-          <a:bodyPr wrap="square" lIns="45720" rIns="45720" tIns="18288" bIns="18288" anchor="t">
-            <a:spAutoFit/>
-          </a:bodyPr>
-          <a:lstStyle/>
-          <a:p>
-            <a:pPr algn="l"/>
-            <a:r>
-              <a:rPr sz="2400" b="1" i="0">
+            <a:pPr algn="ctr"/>
+            <a:r>
+              <a:rPr sz="3040" b="1" i="0">
                 <a:solidFill>
                   <a:srgbClr val="9E1B32"/>
                 </a:solidFill>
-                <a:latin typeface="Century Schoolbook"/>
-              </a:rPr>
-              <a:t>D.   </a:t>
-            </a:r>
-            <a:r>
-              <a:rPr sz="2400" b="1" i="0">
+                <a:latin typeface="Lexend"/>
+              </a:rPr>
+              <a:t>Answer:   D — 2 × 10</a:t>
+            </a:r>
+            <a:r>
+              <a:rPr sz="3040" b="1" i="0" baseline="30000">
                 <a:solidFill>
                   <a:srgbClr val="9E1B32"/>
                 </a:solidFill>
-                <a:latin typeface="Century Schoolbook"/>
-              </a:rPr>
-              <a:t>2 × 10</a:t>
-            </a:r>
-            <a:r>
-              <a:rPr sz="2400" b="1" i="0" baseline="30000">
-                <a:solidFill>
-                  <a:srgbClr val="9E1B32"/>
-                </a:solidFill>
-                <a:latin typeface="Century Schoolbook"/>
-              </a:rPr>
-              <a:t>10</a:t>
-            </a:r>
-          </a:p>
-        </p:txBody>
-      </p:sp>
-      <p:sp>
-        <p:nvSpPr>
-          <p:cNvPr id="14" name="TextBox 13"/>
-          <p:cNvSpPr txBox="1"/>
-          <p:nvPr/>
-        </p:nvSpPr>
-        <p:spPr>
-          <a:xfrm>
-            <a:off x="777240" y="5146879"/>
-            <a:ext cx="10607040" cy="548640"/>
-          </a:xfrm>
-          <a:prstGeom prst="rect">
-            <a:avLst/>
-          </a:prstGeom>
-          <a:noFill/>
-        </p:spPr>
-        <p:txBody>
-          <a:bodyPr wrap="square" lIns="45720" rIns="45720" tIns="18288" bIns="18288" anchor="t">
-            <a:spAutoFit/>
-          </a:bodyPr>
-          <a:lstStyle/>
-          <a:p>
-            <a:pPr algn="ctr"/>
-            <a:r>
-              <a:rPr sz="3200" b="1" i="0">
-                <a:solidFill>
-                  <a:srgbClr val="9E1B32"/>
-                </a:solidFill>
-                <a:latin typeface="Century Schoolbook"/>
-              </a:rPr>
-              <a:t>Answer:   D — 2 × 10</a:t>
-            </a:r>
-            <a:r>
-              <a:rPr sz="3200" b="1" i="0" baseline="30000">
-                <a:solidFill>
-                  <a:srgbClr val="9E1B32"/>
-                </a:solidFill>
-                <a:latin typeface="Century Schoolbook"/>
+                <a:latin typeface="Lexend"/>
               </a:rPr>
               <a:t>10</a:t>
             </a:r>
@@ -10406,11 +11236,11 @@
           <a:p>
             <a:pPr algn="l"/>
             <a:r>
-              <a:rPr sz="3400" b="1" i="0">
+              <a:rPr sz="3229" b="1" i="0">
                 <a:solidFill>
                   <a:srgbClr val="1A1A1A"/>
                 </a:solidFill>
-                <a:latin typeface="Century Schoolbook"/>
+                <a:latin typeface="Lexend"/>
               </a:rPr>
               <a:t>Whiteboards   ·   Question 7 of 9</a:t>
             </a:r>
@@ -10546,11 +11376,11 @@
           <a:p>
             <a:pPr algn="l"/>
             <a:r>
-              <a:rPr sz="1100" b="0" i="1">
+              <a:rPr sz="1040" b="0" i="0">
                 <a:solidFill>
                   <a:srgbClr val="6B6B6B"/>
                 </a:solidFill>
-                <a:latin typeface="Century Schoolbook"/>
+                <a:latin typeface="Lexend"/>
               </a:rPr>
               <a:t>Grade 7 Accelerated · Unit 4 · Lessons 2–3 — Multiplying and Dividing in Scientific Notation</a:t>
             </a:r>
@@ -10581,11 +11411,11 @@
           <a:p>
             <a:pPr algn="r"/>
             <a:r>
-              <a:rPr sz="1100" b="0" i="0">
+              <a:rPr sz="1040" b="0" i="0">
                 <a:solidFill>
                   <a:srgbClr val="6B6B6B"/>
                 </a:solidFill>
-                <a:latin typeface="Century Schoolbook"/>
+                <a:latin typeface="Lexend"/>
               </a:rPr>
               <a:t>27</a:t>
             </a:r>
@@ -10594,7 +11424,7 @@
       </p:sp>
       <p:pic>
         <p:nvPicPr>
-          <p:cNvPr id="8" name="Picture 7" descr="e525d712acf4b16c.png"/>
+          <p:cNvPr id="8" name="Picture 7" descr="931110f4c672e97b.png"/>
           <p:cNvPicPr>
             <a:picLocks noChangeAspect="1"/>
           </p:cNvPicPr>
@@ -10608,8 +11438,8 @@
         </p:blipFill>
         <p:spPr>
           <a:xfrm>
-            <a:off x="5404103" y="2194560"/>
-            <a:ext cx="1353312" cy="826008"/>
+            <a:off x="5430011" y="2194560"/>
+            <a:ext cx="1301496" cy="795528"/>
           </a:xfrm>
           <a:prstGeom prst="rect">
             <a:avLst/>
@@ -10640,11 +11470,11 @@
           <a:p>
             <a:pPr algn="ctr"/>
             <a:r>
-              <a:rPr sz="2600" b="1" i="0">
+              <a:rPr sz="2470" b="1" i="0">
                 <a:solidFill>
                   <a:srgbClr val="1A1A1A"/>
                 </a:solidFill>
-                <a:latin typeface="Century Schoolbook"/>
+                <a:latin typeface="Lexend"/>
               </a:rPr>
               <a:t>Answer it.</a:t>
             </a:r>
@@ -10693,11 +11523,11 @@
           <a:p>
             <a:pPr algn="l"/>
             <a:r>
-              <a:rPr sz="3400" b="1" i="0">
+              <a:rPr sz="3229" b="1" i="0">
                 <a:solidFill>
                   <a:srgbClr val="1A1A1A"/>
                 </a:solidFill>
-                <a:latin typeface="Century Schoolbook"/>
+                <a:latin typeface="Lexend"/>
               </a:rPr>
               <a:t>Whiteboards   ·   Question 7 of 9</a:t>
             </a:r>
@@ -10833,11 +11663,11 @@
           <a:p>
             <a:pPr algn="l"/>
             <a:r>
-              <a:rPr sz="1100" b="0" i="1">
+              <a:rPr sz="1040" b="0" i="0">
                 <a:solidFill>
                   <a:srgbClr val="6B6B6B"/>
                 </a:solidFill>
-                <a:latin typeface="Century Schoolbook"/>
+                <a:latin typeface="Lexend"/>
               </a:rPr>
               <a:t>Grade 7 Accelerated · Unit 4 · Lessons 2–3 — Multiplying and Dividing in Scientific Notation</a:t>
             </a:r>
@@ -10868,11 +11698,11 @@
           <a:p>
             <a:pPr algn="r"/>
             <a:r>
-              <a:rPr sz="1100" b="0" i="0">
+              <a:rPr sz="1040" b="0" i="0">
                 <a:solidFill>
                   <a:srgbClr val="6B6B6B"/>
                 </a:solidFill>
-                <a:latin typeface="Century Schoolbook"/>
+                <a:latin typeface="Lexend"/>
               </a:rPr>
               <a:t>28</a:t>
             </a:r>
@@ -10881,7 +11711,7 @@
       </p:sp>
       <p:pic>
         <p:nvPicPr>
-          <p:cNvPr id="8" name="Picture 7" descr="dd4e224a7fe9f3b4.png"/>
+          <p:cNvPr id="8" name="Picture 7" descr="7b155a9c422bffab.png"/>
           <p:cNvPicPr>
             <a:picLocks noChangeAspect="1"/>
           </p:cNvPicPr>
@@ -10895,8 +11725,8 @@
         </p:blipFill>
         <p:spPr>
           <a:xfrm>
-            <a:off x="5407152" y="2103120"/>
-            <a:ext cx="1347216" cy="822960"/>
+            <a:off x="5431536" y="2103120"/>
+            <a:ext cx="1298448" cy="795528"/>
           </a:xfrm>
           <a:prstGeom prst="rect">
             <a:avLst/>
@@ -10911,7 +11741,149 @@
         </p:nvSpPr>
         <p:spPr>
           <a:xfrm>
-            <a:off x="777240" y="4663440"/>
+            <a:off x="2417341" y="3223260"/>
+            <a:ext cx="2991598" cy="457200"/>
+          </a:xfrm>
+          <a:prstGeom prst="rect">
+            <a:avLst/>
+          </a:prstGeom>
+          <a:noFill/>
+        </p:spPr>
+        <p:txBody>
+          <a:bodyPr wrap="none" lIns="45720" rIns="45720" tIns="18288" bIns="18288" anchor="ctr">
+            <a:noAutofit/>
+          </a:bodyPr>
+          <a:lstStyle/>
+          <a:p>
+            <a:pPr algn="l"/>
+            <a:r>
+              <a:rPr sz="2330" b="0" i="0">
+                <a:solidFill>
+                  <a:srgbClr val="1A1A1A"/>
+                </a:solidFill>
+                <a:latin typeface="Lexend"/>
+              </a:rPr>
+              <a:t>Divide the fronts:  </a:t>
+            </a:r>
+          </a:p>
+        </p:txBody>
+      </p:sp>
+      <p:pic>
+        <p:nvPicPr>
+          <p:cNvPr id="10" name="Picture 9" descr="c05e318526891889.png"/>
+          <p:cNvPicPr>
+            <a:picLocks noChangeAspect="1"/>
+          </p:cNvPicPr>
+          <p:nvPr/>
+        </p:nvPicPr>
+        <p:blipFill>
+          <a:blip r:embed="rId3"/>
+          <a:stretch>
+            <a:fillRect/>
+          </a:stretch>
+        </p:blipFill>
+        <p:spPr>
+          <a:xfrm>
+            <a:off x="5271779" y="3345180"/>
+            <a:ext cx="996696" cy="213360"/>
+          </a:xfrm>
+          <a:prstGeom prst="rect">
+            <a:avLst/>
+          </a:prstGeom>
+        </p:spPr>
+      </p:pic>
+      <p:sp>
+        <p:nvSpPr>
+          <p:cNvPr id="11" name="TextBox 10"/>
+          <p:cNvSpPr txBox="1"/>
+          <p:nvPr/>
+        </p:nvSpPr>
+        <p:spPr>
+          <a:xfrm>
+            <a:off x="2417341" y="3726179"/>
+            <a:ext cx="4013660" cy="457200"/>
+          </a:xfrm>
+          <a:prstGeom prst="rect">
+            <a:avLst/>
+          </a:prstGeom>
+          <a:noFill/>
+        </p:spPr>
+        <p:txBody>
+          <a:bodyPr wrap="none" lIns="45720" rIns="45720" tIns="18288" bIns="18288" anchor="ctr">
+            <a:noAutofit/>
+          </a:bodyPr>
+          <a:lstStyle/>
+          <a:p>
+            <a:pPr algn="l"/>
+            <a:r>
+              <a:rPr sz="2330" b="0" i="0">
+                <a:solidFill>
+                  <a:srgbClr val="1A1A1A"/>
+                </a:solidFill>
+                <a:latin typeface="Lexend"/>
+              </a:rPr>
+              <a:t>Subtract the exponents:  </a:t>
+            </a:r>
+          </a:p>
+        </p:txBody>
+      </p:sp>
+      <p:pic>
+        <p:nvPicPr>
+          <p:cNvPr id="12" name="Picture 11" descr="6fb71a276e50135a.png"/>
+          <p:cNvPicPr>
+            <a:picLocks noChangeAspect="1"/>
+          </p:cNvPicPr>
+          <p:nvPr/>
+        </p:nvPicPr>
+        <p:blipFill>
+          <a:blip r:embed="rId4"/>
+          <a:stretch>
+            <a:fillRect/>
+          </a:stretch>
+        </p:blipFill>
+        <p:spPr>
+          <a:xfrm>
+            <a:off x="6293842" y="3823716"/>
+            <a:ext cx="3453384" cy="262128"/>
+          </a:xfrm>
+          <a:prstGeom prst="rect">
+            <a:avLst/>
+          </a:prstGeom>
+        </p:spPr>
+      </p:pic>
+      <p:pic>
+        <p:nvPicPr>
+          <p:cNvPr id="13" name="Picture 12" descr="c4122c07f8250b6d.png"/>
+          <p:cNvPicPr>
+            <a:picLocks noChangeAspect="1"/>
+          </p:cNvPicPr>
+          <p:nvPr/>
+        </p:nvPicPr>
+        <p:blipFill>
+          <a:blip r:embed="rId5"/>
+          <a:stretch>
+            <a:fillRect/>
+          </a:stretch>
+        </p:blipFill>
+        <p:spPr>
+          <a:xfrm>
+            <a:off x="2472205" y="4326636"/>
+            <a:ext cx="917448" cy="262128"/>
+          </a:xfrm>
+          <a:prstGeom prst="rect">
+            <a:avLst/>
+          </a:prstGeom>
+        </p:spPr>
+      </p:pic>
+      <p:sp>
+        <p:nvSpPr>
+          <p:cNvPr id="14" name="TextBox 13"/>
+          <p:cNvSpPr txBox="1"/>
+          <p:nvPr/>
+        </p:nvSpPr>
+        <p:spPr>
+          <a:xfrm>
+            <a:off x="777240" y="4800600"/>
             <a:ext cx="10607040" cy="548640"/>
           </a:xfrm>
           <a:prstGeom prst="rect">
@@ -10927,20 +11899,20 @@
           <a:p>
             <a:pPr algn="ctr"/>
             <a:r>
-              <a:rPr sz="3200" b="1" i="0">
+              <a:rPr sz="3040" b="1" i="0">
                 <a:solidFill>
                   <a:srgbClr val="9E1B32"/>
                 </a:solidFill>
-                <a:latin typeface="Century Schoolbook"/>
+                <a:latin typeface="Lexend"/>
               </a:rPr>
               <a:t>Answer:   1 × 10</a:t>
             </a:r>
             <a:r>
-              <a:rPr sz="3200" b="1" i="0" baseline="30000">
+              <a:rPr sz="3040" b="1" i="0" baseline="30000">
                 <a:solidFill>
                   <a:srgbClr val="9E1B32"/>
                 </a:solidFill>
-                <a:latin typeface="Century Schoolbook"/>
+                <a:latin typeface="Lexend"/>
               </a:rPr>
               <a:t>12</a:t>
             </a:r>
@@ -10989,11 +11961,11 @@
           <a:p>
             <a:pPr algn="l"/>
             <a:r>
-              <a:rPr sz="3400" b="1" i="0">
+              <a:rPr sz="3229" b="1" i="0">
                 <a:solidFill>
                   <a:srgbClr val="1A1A1A"/>
                 </a:solidFill>
-                <a:latin typeface="Century Schoolbook"/>
+                <a:latin typeface="Lexend"/>
               </a:rPr>
               <a:t>Whiteboards   ·   Question 8 of 9</a:t>
             </a:r>
@@ -11129,11 +12101,11 @@
           <a:p>
             <a:pPr algn="l"/>
             <a:r>
-              <a:rPr sz="1100" b="0" i="1">
+              <a:rPr sz="1040" b="0" i="0">
                 <a:solidFill>
                   <a:srgbClr val="6B6B6B"/>
                 </a:solidFill>
-                <a:latin typeface="Century Schoolbook"/>
+                <a:latin typeface="Lexend"/>
               </a:rPr>
               <a:t>Grade 7 Accelerated · Unit 4 · Lessons 2–3 — Multiplying and Dividing in Scientific Notation</a:t>
             </a:r>
@@ -11164,11 +12136,11 @@
           <a:p>
             <a:pPr algn="r"/>
             <a:r>
-              <a:rPr sz="1100" b="0" i="0">
+              <a:rPr sz="1040" b="0" i="0">
                 <a:solidFill>
                   <a:srgbClr val="6B6B6B"/>
                 </a:solidFill>
-                <a:latin typeface="Century Schoolbook"/>
+                <a:latin typeface="Lexend"/>
               </a:rPr>
               <a:t>29</a:t>
             </a:r>
@@ -11177,7 +12149,7 @@
       </p:sp>
       <p:pic>
         <p:nvPicPr>
-          <p:cNvPr id="8" name="Picture 7" descr="cf1acb8271e6df89.png"/>
+          <p:cNvPr id="8" name="Picture 7" descr="dfc728df3a4406c3.png"/>
           <p:cNvPicPr>
             <a:picLocks noChangeAspect="1"/>
           </p:cNvPicPr>
@@ -11191,8 +12163,8 @@
         </p:blipFill>
         <p:spPr>
           <a:xfrm>
-            <a:off x="4416551" y="2194560"/>
-            <a:ext cx="3328416" cy="819912"/>
+            <a:off x="4425696" y="2194560"/>
+            <a:ext cx="3310128" cy="795528"/>
           </a:xfrm>
           <a:prstGeom prst="rect">
             <a:avLst/>
@@ -11207,8 +12179,8 @@
         </p:nvSpPr>
         <p:spPr>
           <a:xfrm>
-            <a:off x="4117100" y="3265931"/>
-            <a:ext cx="3546626" cy="457200"/>
+            <a:off x="4134140" y="3241548"/>
+            <a:ext cx="3517441" cy="457200"/>
           </a:xfrm>
           <a:prstGeom prst="rect">
             <a:avLst/>
@@ -11223,11 +12195,11 @@
           <a:p>
             <a:pPr algn="l"/>
             <a:r>
-              <a:rPr sz="2600" b="0" i="0">
+              <a:rPr sz="2470" b="0" i="0">
                 <a:solidFill>
                   <a:srgbClr val="1A1A1A"/>
                 </a:solidFill>
-                <a:latin typeface="Century Schoolbook"/>
+                <a:latin typeface="Lexend"/>
               </a:rPr>
               <a:t>What is the value of </a:t>
             </a:r>
@@ -11236,7 +12208,7 @@
       </p:sp>
       <p:pic>
         <p:nvPicPr>
-          <p:cNvPr id="10" name="Picture 9" descr="ce9b607ea85ce740.png"/>
+          <p:cNvPr id="10" name="Picture 9" descr="f14fce7cf077cd07.png"/>
           <p:cNvPicPr>
             <a:picLocks noChangeAspect="1"/>
           </p:cNvPicPr>
@@ -11250,8 +12222,8 @@
         </p:blipFill>
         <p:spPr>
           <a:xfrm>
-            <a:off x="7526567" y="3403091"/>
-            <a:ext cx="192024" cy="182880"/>
+            <a:off x="7514421" y="3366516"/>
+            <a:ext cx="176784" cy="207264"/>
           </a:xfrm>
           <a:prstGeom prst="rect">
             <a:avLst/>
@@ -11266,8 +12238,8 @@
         </p:nvSpPr>
         <p:spPr>
           <a:xfrm>
-            <a:off x="7718591" y="3265931"/>
-            <a:ext cx="462987" cy="457200"/>
+            <a:off x="7691205" y="3241548"/>
+            <a:ext cx="473333" cy="457200"/>
           </a:xfrm>
           <a:prstGeom prst="rect">
             <a:avLst/>
@@ -11282,11 +12254,11 @@
           <a:p>
             <a:pPr algn="l"/>
             <a:r>
-              <a:rPr sz="2600" b="0" i="0">
+              <a:rPr sz="2470" b="0" i="0">
                 <a:solidFill>
                   <a:srgbClr val="1A1A1A"/>
                 </a:solidFill>
-                <a:latin typeface="Century Schoolbook"/>
+                <a:latin typeface="Lexend"/>
               </a:rPr>
               <a:t> ?</a:t>
             </a:r>
@@ -11317,11 +12289,11 @@
           <a:p>
             <a:pPr algn="ctr"/>
             <a:r>
-              <a:rPr sz="2600" b="1" i="0">
+              <a:rPr sz="2470" b="1" i="0">
                 <a:solidFill>
                   <a:srgbClr val="1A1A1A"/>
                 </a:solidFill>
-                <a:latin typeface="Century Schoolbook"/>
+                <a:latin typeface="Lexend"/>
               </a:rPr>
               <a:t>Answer it.</a:t>
             </a:r>
@@ -11370,11 +12342,11 @@
           <a:p>
             <a:pPr algn="l"/>
             <a:r>
-              <a:rPr sz="3600" b="1" i="0">
+              <a:rPr sz="3420" b="1" i="0">
                 <a:solidFill>
                   <a:srgbClr val="1A1A1A"/>
                 </a:solidFill>
-                <a:latin typeface="Century Schoolbook"/>
+                <a:latin typeface="Lexend"/>
               </a:rPr>
               <a:t>Warm-Up</a:t>
             </a:r>
@@ -11510,11 +12482,11 @@
           <a:p>
             <a:pPr algn="l"/>
             <a:r>
-              <a:rPr sz="1100" b="0" i="1">
+              <a:rPr sz="1040" b="0" i="0">
                 <a:solidFill>
                   <a:srgbClr val="6B6B6B"/>
                 </a:solidFill>
-                <a:latin typeface="Century Schoolbook"/>
+                <a:latin typeface="Lexend"/>
               </a:rPr>
               <a:t>Grade 7 Accelerated · Unit 4 · Lessons 2–3 — Multiplying and Dividing in Scientific Notation</a:t>
             </a:r>
@@ -11545,11 +12517,11 @@
           <a:p>
             <a:pPr algn="r"/>
             <a:r>
-              <a:rPr sz="1100" b="0" i="0">
+              <a:rPr sz="1040" b="0" i="0">
                 <a:solidFill>
                   <a:srgbClr val="6B6B6B"/>
                 </a:solidFill>
-                <a:latin typeface="Century Schoolbook"/>
+                <a:latin typeface="Lexend"/>
               </a:rPr>
               <a:t>3</a:t>
             </a:r>
@@ -11565,7 +12537,7 @@
         <p:spPr>
           <a:xfrm>
             <a:off x="1874519" y="1440180"/>
-            <a:ext cx="720605" cy="457200"/>
+            <a:ext cx="671561" cy="457200"/>
           </a:xfrm>
           <a:prstGeom prst="rect">
             <a:avLst/>
@@ -11580,11 +12552,11 @@
           <a:p>
             <a:pPr algn="l"/>
             <a:r>
-              <a:rPr sz="2300" b="0" i="0">
+              <a:rPr sz="2180" b="0" i="0">
                 <a:solidFill>
                   <a:srgbClr val="1A1A1A"/>
                 </a:solidFill>
-                <a:latin typeface="Century Schoolbook"/>
+                <a:latin typeface="Lexend"/>
               </a:rPr>
               <a:t>1.   </a:t>
             </a:r>
@@ -11593,7 +12565,7 @@
       </p:sp>
       <p:pic>
         <p:nvPicPr>
-          <p:cNvPr id="9" name="Picture 8" descr="7655f1be3ef33831.png"/>
+          <p:cNvPr id="9" name="Picture 8" descr="ffd4838a463a73e1.png"/>
           <p:cNvPicPr>
             <a:picLocks noChangeAspect="1"/>
           </p:cNvPicPr>
@@ -11607,8 +12579,8 @@
         </p:blipFill>
         <p:spPr>
           <a:xfrm>
-            <a:off x="2457965" y="1501140"/>
-            <a:ext cx="3099816" cy="335280"/>
+            <a:off x="2408921" y="1502664"/>
+            <a:ext cx="3087624" cy="332232"/>
           </a:xfrm>
           <a:prstGeom prst="rect">
             <a:avLst/>
@@ -11623,8 +12595,8 @@
         </p:nvSpPr>
         <p:spPr>
           <a:xfrm>
-            <a:off x="6106421" y="1440180"/>
-            <a:ext cx="1459438" cy="457200"/>
+            <a:off x="6045185" y="1440180"/>
+            <a:ext cx="1436547" cy="457200"/>
           </a:xfrm>
           <a:prstGeom prst="rect">
             <a:avLst/>
@@ -11639,20 +12611,20 @@
           <a:p>
             <a:pPr algn="l"/>
             <a:r>
-              <a:rPr sz="2300" b="1" i="0">
+              <a:rPr sz="2180" b="1" i="0">
                 <a:solidFill>
                   <a:srgbClr val="9E1B32"/>
                 </a:solidFill>
-                <a:latin typeface="Century Schoolbook"/>
+                <a:latin typeface="Lexend"/>
               </a:rPr>
               <a:t>6.2 × 10</a:t>
             </a:r>
             <a:r>
-              <a:rPr sz="2300" b="1" i="0" baseline="30000">
+              <a:rPr sz="2180" b="1" i="0" baseline="30000">
                 <a:solidFill>
                   <a:srgbClr val="9E1B32"/>
                 </a:solidFill>
-                <a:latin typeface="Century Schoolbook"/>
+                <a:latin typeface="Lexend"/>
               </a:rPr>
               <a:t>6</a:t>
             </a:r>
@@ -11667,8 +12639,8 @@
         </p:nvSpPr>
         <p:spPr>
           <a:xfrm>
-            <a:off x="1874519" y="2180844"/>
-            <a:ext cx="3704805" cy="457200"/>
+            <a:off x="1874519" y="2170176"/>
+            <a:ext cx="3678551" cy="457200"/>
           </a:xfrm>
           <a:prstGeom prst="rect">
             <a:avLst/>
@@ -11683,11 +12655,11 @@
           <a:p>
             <a:pPr algn="l"/>
             <a:r>
-              <a:rPr sz="2300" b="0" i="0">
+              <a:rPr sz="2180" b="0" i="0">
                 <a:solidFill>
                   <a:srgbClr val="1A1A1A"/>
                 </a:solidFill>
-                <a:latin typeface="Century Schoolbook"/>
+                <a:latin typeface="Lexend"/>
               </a:rPr>
               <a:t>2.   Write as one power:  </a:t>
             </a:r>
@@ -11696,7 +12668,7 @@
       </p:sp>
       <p:pic>
         <p:nvPicPr>
-          <p:cNvPr id="12" name="Picture 11" descr="911d175e68347695.png"/>
+          <p:cNvPr id="12" name="Picture 11" descr="164f8cc20815187e.png"/>
           <p:cNvPicPr>
             <a:picLocks noChangeAspect="1"/>
           </p:cNvPicPr>
@@ -11710,8 +12682,8 @@
         </p:blipFill>
         <p:spPr>
           <a:xfrm>
-            <a:off x="5442165" y="2075688"/>
-            <a:ext cx="469392" cy="667512"/>
+            <a:off x="5415911" y="2075688"/>
+            <a:ext cx="499871" cy="646176"/>
           </a:xfrm>
           <a:prstGeom prst="rect">
             <a:avLst/>
@@ -11726,8 +12698,8 @@
         </p:nvSpPr>
         <p:spPr>
           <a:xfrm>
-            <a:off x="6460197" y="2052828"/>
-            <a:ext cx="652507" cy="457200"/>
+            <a:off x="6464423" y="2052828"/>
+            <a:ext cx="682102" cy="457200"/>
           </a:xfrm>
           <a:prstGeom prst="rect">
             <a:avLst/>
@@ -11742,20 +12714,20 @@
           <a:p>
             <a:pPr algn="l"/>
             <a:r>
-              <a:rPr sz="2300" b="1" i="0">
+              <a:rPr sz="2180" b="1" i="0">
                 <a:solidFill>
                   <a:srgbClr val="9E1B32"/>
                 </a:solidFill>
-                <a:latin typeface="Century Schoolbook"/>
+                <a:latin typeface="Lexend"/>
               </a:rPr>
               <a:t>10</a:t>
             </a:r>
             <a:r>
-              <a:rPr sz="2300" b="1" i="0" baseline="30000">
+              <a:rPr sz="2180" b="1" i="0" baseline="30000">
                 <a:solidFill>
                   <a:srgbClr val="9E1B32"/>
                 </a:solidFill>
-                <a:latin typeface="Century Schoolbook"/>
+                <a:latin typeface="Lexend"/>
               </a:rPr>
               <a:t>5</a:t>
             </a:r>
@@ -11770,8 +12742,8 @@
         </p:nvSpPr>
         <p:spPr>
           <a:xfrm>
-            <a:off x="1874519" y="2921508"/>
-            <a:ext cx="3064939" cy="457200"/>
+            <a:off x="1874519" y="2900172"/>
+            <a:ext cx="2930351" cy="457200"/>
           </a:xfrm>
           <a:prstGeom prst="rect">
             <a:avLst/>
@@ -11786,11 +12758,11 @@
           <a:p>
             <a:pPr algn="l"/>
             <a:r>
-              <a:rPr sz="2300" b="0" i="0">
+              <a:rPr sz="2180" b="0" i="0">
                 <a:solidFill>
                   <a:srgbClr val="1A1A1A"/>
                 </a:solidFill>
-                <a:latin typeface="Century Schoolbook"/>
+                <a:latin typeface="Lexend"/>
               </a:rPr>
               <a:t>3.   Find the value:  </a:t>
             </a:r>
@@ -11799,7 +12771,7 @@
       </p:sp>
       <p:pic>
         <p:nvPicPr>
-          <p:cNvPr id="15" name="Picture 14" descr="d68e6e8f02f1f5eb.png"/>
+          <p:cNvPr id="15" name="Picture 14" descr="1cd87bae707e9a4b.png"/>
           <p:cNvPicPr>
             <a:picLocks noChangeAspect="1"/>
           </p:cNvPicPr>
@@ -11813,8 +12785,8 @@
         </p:blipFill>
         <p:spPr>
           <a:xfrm>
-            <a:off x="4802299" y="2945892"/>
-            <a:ext cx="853440" cy="408432"/>
+            <a:off x="4667711" y="2933700"/>
+            <a:ext cx="844296" cy="390144"/>
           </a:xfrm>
           <a:prstGeom prst="rect">
             <a:avLst/>
@@ -11829,8 +12801,8 @@
         </p:nvSpPr>
         <p:spPr>
           <a:xfrm>
-            <a:off x="6204379" y="2921508"/>
-            <a:ext cx="565792" cy="457200"/>
+            <a:off x="6060647" y="2900172"/>
+            <a:ext cx="549167" cy="457200"/>
           </a:xfrm>
           <a:prstGeom prst="rect">
             <a:avLst/>
@@ -11845,11 +12817,11 @@
           <a:p>
             <a:pPr algn="l"/>
             <a:r>
-              <a:rPr sz="2300" b="1" i="0">
+              <a:rPr sz="2180" b="1" i="0">
                 <a:solidFill>
                   <a:srgbClr val="9E1B32"/>
                 </a:solidFill>
-                <a:latin typeface="Century Schoolbook"/>
+                <a:latin typeface="Lexend"/>
               </a:rPr>
               <a:t>13</a:t>
             </a:r>
@@ -11864,8 +12836,8 @@
         </p:nvSpPr>
         <p:spPr>
           <a:xfrm>
-            <a:off x="1874519" y="3610356"/>
-            <a:ext cx="3474215" cy="457200"/>
+            <a:off x="1874519" y="3579876"/>
+            <a:ext cx="3383258" cy="457200"/>
           </a:xfrm>
           <a:prstGeom prst="rect">
             <a:avLst/>
@@ -11880,11 +12852,11 @@
           <a:p>
             <a:pPr algn="l"/>
             <a:r>
-              <a:rPr sz="2300" b="0" i="0">
+              <a:rPr sz="2180" b="0" i="0">
                 <a:solidFill>
                   <a:srgbClr val="1A1A1A"/>
                 </a:solidFill>
-                <a:latin typeface="Century Schoolbook"/>
+                <a:latin typeface="Lexend"/>
               </a:rPr>
               <a:t>4.   Find the quotient:  </a:t>
             </a:r>
@@ -11893,7 +12865,7 @@
       </p:sp>
       <p:pic>
         <p:nvPicPr>
-          <p:cNvPr id="18" name="Picture 17" descr="57c14efe46195709.png"/>
+          <p:cNvPr id="18" name="Picture 17" descr="fe7c9d77350b9ea3.png"/>
           <p:cNvPicPr>
             <a:picLocks noChangeAspect="1"/>
           </p:cNvPicPr>
@@ -11907,8 +12879,8 @@
         </p:blipFill>
         <p:spPr>
           <a:xfrm>
-            <a:off x="5211575" y="3557016"/>
-            <a:ext cx="417576" cy="563880"/>
+            <a:off x="5120618" y="3535680"/>
+            <a:ext cx="451104" cy="545592"/>
           </a:xfrm>
           <a:prstGeom prst="rect">
             <a:avLst/>
@@ -11923,8 +12895,8 @@
         </p:nvSpPr>
         <p:spPr>
           <a:xfrm>
-            <a:off x="6177791" y="3534156"/>
-            <a:ext cx="388052" cy="457200"/>
+            <a:off x="6120362" y="3512820"/>
+            <a:ext cx="384161" cy="457200"/>
           </a:xfrm>
           <a:prstGeom prst="rect">
             <a:avLst/>
@@ -11939,11 +12911,11 @@
           <a:p>
             <a:pPr algn="l"/>
             <a:r>
-              <a:rPr sz="2300" b="1" i="0">
+              <a:rPr sz="2180" b="1" i="0">
                 <a:solidFill>
                   <a:srgbClr val="9E1B32"/>
                 </a:solidFill>
-                <a:latin typeface="Century Schoolbook"/>
+                <a:latin typeface="Lexend"/>
               </a:rPr>
               <a:t>3</a:t>
             </a:r>
@@ -11992,11 +12964,11 @@
           <a:p>
             <a:pPr algn="l"/>
             <a:r>
-              <a:rPr sz="3400" b="1" i="0">
+              <a:rPr sz="3229" b="1" i="0">
                 <a:solidFill>
                   <a:srgbClr val="1A1A1A"/>
                 </a:solidFill>
-                <a:latin typeface="Century Schoolbook"/>
+                <a:latin typeface="Lexend"/>
               </a:rPr>
               <a:t>Whiteboards   ·   Question 8 of 9</a:t>
             </a:r>
@@ -12132,11 +13104,11 @@
           <a:p>
             <a:pPr algn="l"/>
             <a:r>
-              <a:rPr sz="1100" b="0" i="1">
+              <a:rPr sz="1040" b="0" i="0">
                 <a:solidFill>
                   <a:srgbClr val="6B6B6B"/>
                 </a:solidFill>
-                <a:latin typeface="Century Schoolbook"/>
+                <a:latin typeface="Lexend"/>
               </a:rPr>
               <a:t>Grade 7 Accelerated · Unit 4 · Lessons 2–3 — Multiplying and Dividing in Scientific Notation</a:t>
             </a:r>
@@ -12167,11 +13139,11 @@
           <a:p>
             <a:pPr algn="r"/>
             <a:r>
-              <a:rPr sz="1100" b="0" i="0">
+              <a:rPr sz="1040" b="0" i="0">
                 <a:solidFill>
                   <a:srgbClr val="6B6B6B"/>
                 </a:solidFill>
-                <a:latin typeface="Century Schoolbook"/>
+                <a:latin typeface="Lexend"/>
               </a:rPr>
               <a:t>30</a:t>
             </a:r>
@@ -12180,7 +13152,7 @@
       </p:sp>
       <p:pic>
         <p:nvPicPr>
-          <p:cNvPr id="8" name="Picture 7" descr="49829e386e3352b6.png"/>
+          <p:cNvPr id="8" name="Picture 7" descr="594e88537557ceb2.png"/>
           <p:cNvPicPr>
             <a:picLocks noChangeAspect="1"/>
           </p:cNvPicPr>
@@ -12194,8 +13166,8 @@
         </p:blipFill>
         <p:spPr>
           <a:xfrm>
-            <a:off x="4415028" y="2103120"/>
-            <a:ext cx="3331464" cy="816864"/>
+            <a:off x="4424172" y="2103120"/>
+            <a:ext cx="3313176" cy="795528"/>
           </a:xfrm>
           <a:prstGeom prst="rect">
             <a:avLst/>
@@ -12210,8 +13182,8 @@
         </p:nvSpPr>
         <p:spPr>
           <a:xfrm>
-            <a:off x="4117100" y="3171444"/>
-            <a:ext cx="3546626" cy="457200"/>
+            <a:off x="4134140" y="3150108"/>
+            <a:ext cx="3517441" cy="457200"/>
           </a:xfrm>
           <a:prstGeom prst="rect">
             <a:avLst/>
@@ -12226,11 +13198,11 @@
           <a:p>
             <a:pPr algn="l"/>
             <a:r>
-              <a:rPr sz="2600" b="0" i="0">
+              <a:rPr sz="2470" b="0" i="0">
                 <a:solidFill>
                   <a:srgbClr val="1A1A1A"/>
                 </a:solidFill>
-                <a:latin typeface="Century Schoolbook"/>
+                <a:latin typeface="Lexend"/>
               </a:rPr>
               <a:t>What is the value of </a:t>
             </a:r>
@@ -12239,7 +13211,7 @@
       </p:sp>
       <p:pic>
         <p:nvPicPr>
-          <p:cNvPr id="10" name="Picture 9" descr="ce9b607ea85ce740.png"/>
+          <p:cNvPr id="10" name="Picture 9" descr="f14fce7cf077cd07.png"/>
           <p:cNvPicPr>
             <a:picLocks noChangeAspect="1"/>
           </p:cNvPicPr>
@@ -12253,8 +13225,8 @@
         </p:blipFill>
         <p:spPr>
           <a:xfrm>
-            <a:off x="7526567" y="3308604"/>
-            <a:ext cx="192024" cy="182880"/>
+            <a:off x="7514421" y="3275076"/>
+            <a:ext cx="176784" cy="207264"/>
           </a:xfrm>
           <a:prstGeom prst="rect">
             <a:avLst/>
@@ -12269,8 +13241,8 @@
         </p:nvSpPr>
         <p:spPr>
           <a:xfrm>
-            <a:off x="7718591" y="3171444"/>
-            <a:ext cx="462987" cy="457200"/>
+            <a:off x="7691205" y="3150108"/>
+            <a:ext cx="473333" cy="457200"/>
           </a:xfrm>
           <a:prstGeom prst="rect">
             <a:avLst/>
@@ -12285,11 +13257,11 @@
           <a:p>
             <a:pPr algn="l"/>
             <a:r>
-              <a:rPr sz="2600" b="0" i="0">
+              <a:rPr sz="2470" b="0" i="0">
                 <a:solidFill>
                   <a:srgbClr val="1A1A1A"/>
                 </a:solidFill>
-                <a:latin typeface="Century Schoolbook"/>
+                <a:latin typeface="Lexend"/>
               </a:rPr>
               <a:t> ?</a:t>
             </a:r>
@@ -12304,7 +13276,184 @@
         </p:nvSpPr>
         <p:spPr>
           <a:xfrm>
-            <a:off x="777240" y="4663440"/>
+            <a:off x="2640887" y="3909059"/>
+            <a:ext cx="1640071" cy="457200"/>
+          </a:xfrm>
+          <a:prstGeom prst="rect">
+            <a:avLst/>
+          </a:prstGeom>
+          <a:noFill/>
+        </p:spPr>
+        <p:txBody>
+          <a:bodyPr wrap="none" lIns="45720" rIns="45720" tIns="18288" bIns="18288" anchor="ctr">
+            <a:noAutofit/>
+          </a:bodyPr>
+          <a:lstStyle/>
+          <a:p>
+            <a:pPr algn="l"/>
+            <a:r>
+              <a:rPr sz="2750" b="0" i="0">
+                <a:solidFill>
+                  <a:srgbClr val="1A1A1A"/>
+                </a:solidFill>
+                <a:latin typeface="Lexend"/>
+              </a:rPr>
+              <a:t>Fronts:  </a:t>
+            </a:r>
+          </a:p>
+        </p:txBody>
+      </p:sp>
+      <p:pic>
+        <p:nvPicPr>
+          <p:cNvPr id="13" name="Picture 12" descr="e920add2c6370e50.png"/>
+          <p:cNvPicPr>
+            <a:picLocks noChangeAspect="1"/>
+          </p:cNvPicPr>
+          <p:nvPr/>
+        </p:nvPicPr>
+        <p:blipFill>
+          <a:blip r:embed="rId4"/>
+          <a:stretch>
+            <a:fillRect/>
+          </a:stretch>
+        </p:blipFill>
+        <p:spPr>
+          <a:xfrm>
+            <a:off x="4143799" y="4011168"/>
+            <a:ext cx="1834896" cy="252984"/>
+          </a:xfrm>
+          <a:prstGeom prst="rect">
+            <a:avLst/>
+          </a:prstGeom>
+        </p:spPr>
+      </p:pic>
+      <p:sp>
+        <p:nvSpPr>
+          <p:cNvPr id="14" name="TextBox 13"/>
+          <p:cNvSpPr txBox="1"/>
+          <p:nvPr/>
+        </p:nvSpPr>
+        <p:spPr>
+          <a:xfrm>
+            <a:off x="5978695" y="3909059"/>
+            <a:ext cx="1338233" cy="457200"/>
+          </a:xfrm>
+          <a:prstGeom prst="rect">
+            <a:avLst/>
+          </a:prstGeom>
+          <a:noFill/>
+        </p:spPr>
+        <p:txBody>
+          <a:bodyPr wrap="none" lIns="45720" rIns="45720" tIns="18288" bIns="18288" anchor="ctr">
+            <a:noAutofit/>
+          </a:bodyPr>
+          <a:lstStyle/>
+          <a:p>
+            <a:pPr algn="l"/>
+            <a:r>
+              <a:rPr sz="2750" b="0" i="0">
+                <a:solidFill>
+                  <a:srgbClr val="1A1A1A"/>
+                </a:solidFill>
+                <a:latin typeface="Lexend"/>
+              </a:rPr>
+              <a:t>,   so   </a:t>
+            </a:r>
+          </a:p>
+        </p:txBody>
+      </p:sp>
+      <p:pic>
+        <p:nvPicPr>
+          <p:cNvPr id="15" name="Picture 14" descr="8691e6c5c0ab487f.png"/>
+          <p:cNvPicPr>
+            <a:picLocks noChangeAspect="1"/>
+          </p:cNvPicPr>
+          <p:nvPr/>
+        </p:nvPicPr>
+        <p:blipFill>
+          <a:blip r:embed="rId5"/>
+          <a:stretch>
+            <a:fillRect/>
+          </a:stretch>
+        </p:blipFill>
+        <p:spPr>
+          <a:xfrm>
+            <a:off x="7179768" y="4011168"/>
+            <a:ext cx="2346960" cy="252984"/>
+          </a:xfrm>
+          <a:prstGeom prst="rect">
+            <a:avLst/>
+          </a:prstGeom>
+        </p:spPr>
+      </p:pic>
+      <p:sp>
+        <p:nvSpPr>
+          <p:cNvPr id="16" name="TextBox 15"/>
+          <p:cNvSpPr txBox="1"/>
+          <p:nvPr/>
+        </p:nvSpPr>
+        <p:spPr>
+          <a:xfrm>
+            <a:off x="2640887" y="4602480"/>
+            <a:ext cx="1601504" cy="457200"/>
+          </a:xfrm>
+          <a:prstGeom prst="rect">
+            <a:avLst/>
+          </a:prstGeom>
+          <a:noFill/>
+        </p:spPr>
+        <p:txBody>
+          <a:bodyPr wrap="none" lIns="45720" rIns="45720" tIns="18288" bIns="18288" anchor="ctr">
+            <a:noAutofit/>
+          </a:bodyPr>
+          <a:lstStyle/>
+          <a:p>
+            <a:pPr algn="l"/>
+            <a:r>
+              <a:rPr sz="2750" b="0" i="0">
+                <a:solidFill>
+                  <a:srgbClr val="1A1A1A"/>
+                </a:solidFill>
+                <a:latin typeface="Lexend"/>
+              </a:rPr>
+              <a:t>Check:  </a:t>
+            </a:r>
+          </a:p>
+        </p:txBody>
+      </p:sp>
+      <p:pic>
+        <p:nvPicPr>
+          <p:cNvPr id="17" name="Picture 16" descr="dedb3e2327f40b65.png"/>
+          <p:cNvPicPr>
+            <a:picLocks noChangeAspect="1"/>
+          </p:cNvPicPr>
+          <p:nvPr/>
+        </p:nvPicPr>
+        <p:blipFill>
+          <a:blip r:embed="rId6"/>
+          <a:stretch>
+            <a:fillRect/>
+          </a:stretch>
+        </p:blipFill>
+        <p:spPr>
+          <a:xfrm>
+            <a:off x="4105232" y="4471416"/>
+            <a:ext cx="3002280" cy="719328"/>
+          </a:xfrm>
+          <a:prstGeom prst="rect">
+            <a:avLst/>
+          </a:prstGeom>
+        </p:spPr>
+      </p:pic>
+      <p:sp>
+        <p:nvSpPr>
+          <p:cNvPr id="18" name="TextBox 17"/>
+          <p:cNvSpPr txBox="1"/>
+          <p:nvPr/>
+        </p:nvSpPr>
+        <p:spPr>
+          <a:xfrm>
+            <a:off x="777240" y="5327904"/>
             <a:ext cx="10607040" cy="548640"/>
           </a:xfrm>
           <a:prstGeom prst="rect">
@@ -12320,11 +13469,11 @@
           <a:p>
             <a:pPr algn="ctr"/>
             <a:r>
-              <a:rPr sz="3200" b="1" i="0">
+              <a:rPr sz="3040" b="1" i="0">
                 <a:solidFill>
                   <a:srgbClr val="9E1B32"/>
                 </a:solidFill>
-                <a:latin typeface="Century Schoolbook"/>
+                <a:latin typeface="Lexend"/>
               </a:rPr>
               <a:t>Answer:   n = 2</a:t>
             </a:r>
@@ -12373,11 +13522,11 @@
           <a:p>
             <a:pPr algn="l"/>
             <a:r>
-              <a:rPr sz="3400" b="1" i="0">
+              <a:rPr sz="3229" b="1" i="0">
                 <a:solidFill>
                   <a:srgbClr val="1A1A1A"/>
                 </a:solidFill>
-                <a:latin typeface="Century Schoolbook"/>
+                <a:latin typeface="Lexend"/>
               </a:rPr>
               <a:t>Whiteboards   ·   Question 9 of 9</a:t>
             </a:r>
@@ -12513,11 +13662,11 @@
           <a:p>
             <a:pPr algn="l"/>
             <a:r>
-              <a:rPr sz="1100" b="0" i="1">
+              <a:rPr sz="1040" b="0" i="0">
                 <a:solidFill>
                   <a:srgbClr val="6B6B6B"/>
                 </a:solidFill>
-                <a:latin typeface="Century Schoolbook"/>
+                <a:latin typeface="Lexend"/>
               </a:rPr>
               <a:t>Grade 7 Accelerated · Unit 4 · Lessons 2–3 — Multiplying and Dividing in Scientific Notation</a:t>
             </a:r>
@@ -12548,11 +13697,11 @@
           <a:p>
             <a:pPr algn="r"/>
             <a:r>
-              <a:rPr sz="1100" b="0" i="0">
+              <a:rPr sz="1040" b="0" i="0">
                 <a:solidFill>
                   <a:srgbClr val="6B6B6B"/>
                 </a:solidFill>
-                <a:latin typeface="Century Schoolbook"/>
+                <a:latin typeface="Lexend"/>
               </a:rPr>
               <a:t>31</a:t>
             </a:r>
@@ -12567,8 +13716,8 @@
         </p:nvSpPr>
         <p:spPr>
           <a:xfrm>
-            <a:off x="2838140" y="2378964"/>
-            <a:ext cx="954771" cy="457200"/>
+            <a:off x="2888731" y="1815084"/>
+            <a:ext cx="930187" cy="457200"/>
           </a:xfrm>
           <a:prstGeom prst="rect">
             <a:avLst/>
@@ -12583,11 +13732,11 @@
           <a:p>
             <a:pPr algn="l"/>
             <a:r>
-              <a:rPr sz="2600" b="0" i="0">
+              <a:rPr sz="2470" b="0" i="0">
                 <a:solidFill>
                   <a:srgbClr val="1A1A1A"/>
                 </a:solidFill>
-                <a:latin typeface="Century Schoolbook"/>
+                <a:latin typeface="Lexend"/>
               </a:rPr>
               <a:t>For  </a:t>
             </a:r>
@@ -12596,7 +13745,7 @@
       </p:sp>
       <p:pic>
         <p:nvPicPr>
-          <p:cNvPr id="9" name="Picture 8" descr="497afcee60275d61.png"/>
+          <p:cNvPr id="9" name="Picture 8" descr="e3c0f930fcb43cb0.png"/>
           <p:cNvPicPr>
             <a:picLocks noChangeAspect="1"/>
           </p:cNvPicPr>
@@ -12610,8 +13759,8 @@
         </p:blipFill>
         <p:spPr>
           <a:xfrm>
-            <a:off x="3655751" y="2194560"/>
-            <a:ext cx="1463040" cy="826008"/>
+            <a:off x="3681758" y="1645920"/>
+            <a:ext cx="1481328" cy="795528"/>
           </a:xfrm>
           <a:prstGeom prst="rect">
             <a:avLst/>
@@ -12626,8 +13775,8 @@
         </p:nvSpPr>
         <p:spPr>
           <a:xfrm>
-            <a:off x="5118791" y="2378964"/>
-            <a:ext cx="2921380" cy="457200"/>
+            <a:off x="5163086" y="1815084"/>
+            <a:ext cx="2811254" cy="457200"/>
           </a:xfrm>
           <a:prstGeom prst="rect">
             <a:avLst/>
@@ -12642,11 +13791,11 @@
           <a:p>
             <a:pPr algn="l"/>
             <a:r>
-              <a:rPr sz="2600" b="0" i="0">
+              <a:rPr sz="2470" b="0" i="0">
                 <a:solidFill>
                   <a:srgbClr val="1A1A1A"/>
                 </a:solidFill>
-                <a:latin typeface="Century Schoolbook"/>
+                <a:latin typeface="Lexend"/>
               </a:rPr>
               <a:t>  Marcus writes  </a:t>
             </a:r>
@@ -12655,7 +13804,7 @@
       </p:sp>
       <p:pic>
         <p:nvPicPr>
-          <p:cNvPr id="11" name="Picture 10" descr="a61c108a2c4f32af.png"/>
+          <p:cNvPr id="11" name="Picture 10" descr="201859fe582e568a.png"/>
           <p:cNvPicPr>
             <a:picLocks noChangeAspect="1"/>
           </p:cNvPicPr>
@@ -12669,8 +13818,8 @@
         </p:blipFill>
         <p:spPr>
           <a:xfrm>
-            <a:off x="7903011" y="2430780"/>
-            <a:ext cx="1420368" cy="353568"/>
+            <a:off x="7837180" y="1876044"/>
+            <a:ext cx="1435608" cy="335280"/>
           </a:xfrm>
           <a:prstGeom prst="rect">
             <a:avLst/>
@@ -12685,8 +13834,8 @@
         </p:nvSpPr>
         <p:spPr>
           <a:xfrm>
-            <a:off x="4034964" y="3272028"/>
-            <a:ext cx="2985166" cy="457200"/>
+            <a:off x="4071916" y="2692908"/>
+            <a:ext cx="2929551" cy="457200"/>
           </a:xfrm>
           <a:prstGeom prst="rect">
             <a:avLst/>
@@ -12701,11 +13850,11 @@
           <a:p>
             <a:pPr algn="l"/>
             <a:r>
-              <a:rPr sz="2600" b="0" i="0">
+              <a:rPr sz="2470" b="0" i="0">
                 <a:solidFill>
                   <a:srgbClr val="1A1A1A"/>
                 </a:solidFill>
-                <a:latin typeface="Century Schoolbook"/>
+                <a:latin typeface="Lexend"/>
               </a:rPr>
               <a:t>and Sara writes  </a:t>
             </a:r>
@@ -12714,7 +13863,7 @@
       </p:sp>
       <p:pic>
         <p:nvPicPr>
-          <p:cNvPr id="13" name="Picture 12" descr="5029bb2e4362f29c.png"/>
+          <p:cNvPr id="13" name="Picture 12" descr="af7ef3b3737f0a42.png"/>
           <p:cNvPicPr>
             <a:picLocks noChangeAspect="1"/>
           </p:cNvPicPr>
@@ -12728,8 +13877,8 @@
         </p:blipFill>
         <p:spPr>
           <a:xfrm>
-            <a:off x="6882971" y="3325367"/>
-            <a:ext cx="1243584" cy="350520"/>
+            <a:off x="6864307" y="2750819"/>
+            <a:ext cx="1225296" cy="341376"/>
           </a:xfrm>
           <a:prstGeom prst="rect">
             <a:avLst/>
@@ -12744,7 +13893,7 @@
         </p:nvSpPr>
         <p:spPr>
           <a:xfrm>
-            <a:off x="777240" y="3980687"/>
+            <a:off x="777240" y="3401568"/>
             <a:ext cx="10607040" cy="411480"/>
           </a:xfrm>
           <a:prstGeom prst="rect">
@@ -12760,11 +13909,11 @@
           <a:p>
             <a:pPr algn="ctr"/>
             <a:r>
-              <a:rPr sz="2300" b="0" i="0">
+              <a:rPr sz="2180" b="0" i="0">
                 <a:solidFill>
                   <a:srgbClr val="1A1A1A"/>
                 </a:solidFill>
-                <a:latin typeface="Century Schoolbook"/>
+                <a:latin typeface="Lexend"/>
               </a:rPr>
               <a:t>Name what each one did wrong, and give the correct quotient.</a:t>
             </a:r>
@@ -12779,7 +13928,7 @@
         </p:nvSpPr>
         <p:spPr>
           <a:xfrm>
-            <a:off x="777240" y="4639056"/>
+            <a:off x="777240" y="4343400"/>
             <a:ext cx="10607040" cy="457200"/>
           </a:xfrm>
           <a:prstGeom prst="rect">
@@ -12795,11 +13944,11 @@
           <a:p>
             <a:pPr algn="ctr"/>
             <a:r>
-              <a:rPr sz="2600" b="1" i="0">
+              <a:rPr sz="2470" b="1" i="0">
                 <a:solidFill>
                   <a:srgbClr val="1A1A1A"/>
                 </a:solidFill>
-                <a:latin typeface="Century Schoolbook"/>
+                <a:latin typeface="Lexend"/>
               </a:rPr>
               <a:t>Write your answer in sentences.</a:t>
             </a:r>
@@ -12848,11 +13997,11 @@
           <a:p>
             <a:pPr algn="l"/>
             <a:r>
-              <a:rPr sz="3400" b="1" i="0">
+              <a:rPr sz="3229" b="1" i="0">
                 <a:solidFill>
                   <a:srgbClr val="1A1A1A"/>
                 </a:solidFill>
-                <a:latin typeface="Century Schoolbook"/>
+                <a:latin typeface="Lexend"/>
               </a:rPr>
               <a:t>Whiteboards   ·   Question 9 of 9</a:t>
             </a:r>
@@ -12988,11 +14137,11 @@
           <a:p>
             <a:pPr algn="l"/>
             <a:r>
-              <a:rPr sz="1100" b="0" i="1">
+              <a:rPr sz="1040" b="0" i="0">
                 <a:solidFill>
                   <a:srgbClr val="6B6B6B"/>
                 </a:solidFill>
-                <a:latin typeface="Century Schoolbook"/>
+                <a:latin typeface="Lexend"/>
               </a:rPr>
               <a:t>Grade 7 Accelerated · Unit 4 · Lessons 2–3 — Multiplying and Dividing in Scientific Notation</a:t>
             </a:r>
@@ -13023,11 +14172,11 @@
           <a:p>
             <a:pPr algn="r"/>
             <a:r>
-              <a:rPr sz="1100" b="0" i="0">
+              <a:rPr sz="1040" b="0" i="0">
                 <a:solidFill>
                   <a:srgbClr val="6B6B6B"/>
                 </a:solidFill>
-                <a:latin typeface="Century Schoolbook"/>
+                <a:latin typeface="Lexend"/>
               </a:rPr>
               <a:t>32</a:t>
             </a:r>
@@ -13042,8 +14191,8 @@
         </p:nvSpPr>
         <p:spPr>
           <a:xfrm>
-            <a:off x="2839664" y="2284475"/>
-            <a:ext cx="954771" cy="457200"/>
+            <a:off x="2891779" y="1816608"/>
+            <a:ext cx="930187" cy="457200"/>
           </a:xfrm>
           <a:prstGeom prst="rect">
             <a:avLst/>
@@ -13058,11 +14207,11 @@
           <a:p>
             <a:pPr algn="l"/>
             <a:r>
-              <a:rPr sz="2600" b="0" i="0">
+              <a:rPr sz="2470" b="0" i="0">
                 <a:solidFill>
                   <a:srgbClr val="1A1A1A"/>
                 </a:solidFill>
-                <a:latin typeface="Century Schoolbook"/>
+                <a:latin typeface="Lexend"/>
               </a:rPr>
               <a:t>For  </a:t>
             </a:r>
@@ -13071,7 +14220,7 @@
       </p:sp>
       <p:pic>
         <p:nvPicPr>
-          <p:cNvPr id="9" name="Picture 8" descr="11453e40830bd3a9.png"/>
+          <p:cNvPr id="9" name="Picture 8" descr="727390f8bf62070d.png"/>
           <p:cNvPicPr>
             <a:picLocks noChangeAspect="1"/>
           </p:cNvPicPr>
@@ -13085,8 +14234,8 @@
         </p:blipFill>
         <p:spPr>
           <a:xfrm>
-            <a:off x="3657275" y="2103120"/>
-            <a:ext cx="1459992" cy="819912"/>
+            <a:off x="3684806" y="1645920"/>
+            <a:ext cx="1475232" cy="798576"/>
           </a:xfrm>
           <a:prstGeom prst="rect">
             <a:avLst/>
@@ -13101,8 +14250,8 @@
         </p:nvSpPr>
         <p:spPr>
           <a:xfrm>
-            <a:off x="5117267" y="2284475"/>
-            <a:ext cx="2921380" cy="457200"/>
+            <a:off x="5160038" y="1816608"/>
+            <a:ext cx="2811254" cy="457200"/>
           </a:xfrm>
           <a:prstGeom prst="rect">
             <a:avLst/>
@@ -13117,11 +14266,11 @@
           <a:p>
             <a:pPr algn="l"/>
             <a:r>
-              <a:rPr sz="2600" b="0" i="0">
+              <a:rPr sz="2470" b="0" i="0">
                 <a:solidFill>
                   <a:srgbClr val="1A1A1A"/>
                 </a:solidFill>
-                <a:latin typeface="Century Schoolbook"/>
+                <a:latin typeface="Lexend"/>
               </a:rPr>
               <a:t>  Marcus writes  </a:t>
             </a:r>
@@ -13130,7 +14279,7 @@
       </p:sp>
       <p:pic>
         <p:nvPicPr>
-          <p:cNvPr id="11" name="Picture 10" descr="9220e587e37081e6.png"/>
+          <p:cNvPr id="11" name="Picture 10" descr="9573c27959607365.png"/>
           <p:cNvPicPr>
             <a:picLocks noChangeAspect="1"/>
           </p:cNvPicPr>
@@ -13144,8 +14293,8 @@
         </p:blipFill>
         <p:spPr>
           <a:xfrm>
-            <a:off x="7901487" y="2336291"/>
-            <a:ext cx="1420368" cy="353568"/>
+            <a:off x="7834132" y="1877568"/>
+            <a:ext cx="1435608" cy="335280"/>
           </a:xfrm>
           <a:prstGeom prst="rect">
             <a:avLst/>
@@ -13160,8 +14309,8 @@
         </p:nvSpPr>
         <p:spPr>
           <a:xfrm>
-            <a:off x="4033440" y="3174491"/>
-            <a:ext cx="2985166" cy="457200"/>
+            <a:off x="4070392" y="2695956"/>
+            <a:ext cx="2929551" cy="457200"/>
           </a:xfrm>
           <a:prstGeom prst="rect">
             <a:avLst/>
@@ -13176,11 +14325,11 @@
           <a:p>
             <a:pPr algn="l"/>
             <a:r>
-              <a:rPr sz="2600" b="0" i="0">
+              <a:rPr sz="2470" b="0" i="0">
                 <a:solidFill>
                   <a:srgbClr val="1A1A1A"/>
                 </a:solidFill>
-                <a:latin typeface="Century Schoolbook"/>
+                <a:latin typeface="Lexend"/>
               </a:rPr>
               <a:t>and Sara writes  </a:t>
             </a:r>
@@ -13189,7 +14338,7 @@
       </p:sp>
       <p:pic>
         <p:nvPicPr>
-          <p:cNvPr id="13" name="Picture 12" descr="6afd167257bcd611.png"/>
+          <p:cNvPr id="13" name="Picture 12" descr="efd4e5357231d289.png"/>
           <p:cNvPicPr>
             <a:picLocks noChangeAspect="1"/>
           </p:cNvPicPr>
@@ -13203,8 +14352,8 @@
         </p:blipFill>
         <p:spPr>
           <a:xfrm>
-            <a:off x="6881447" y="3227831"/>
-            <a:ext cx="1246632" cy="350520"/>
+            <a:off x="6862783" y="2753868"/>
+            <a:ext cx="1228344" cy="341376"/>
           </a:xfrm>
           <a:prstGeom prst="rect">
             <a:avLst/>
@@ -13219,7 +14368,7 @@
         </p:nvSpPr>
         <p:spPr>
           <a:xfrm>
-            <a:off x="777240" y="3883151"/>
+            <a:off x="777240" y="3404616"/>
             <a:ext cx="10607040" cy="411480"/>
           </a:xfrm>
           <a:prstGeom prst="rect">
@@ -13235,11 +14384,11 @@
           <a:p>
             <a:pPr algn="ctr"/>
             <a:r>
-              <a:rPr sz="2300" b="0" i="0">
+              <a:rPr sz="2180" b="0" i="0">
                 <a:solidFill>
                   <a:srgbClr val="1A1A1A"/>
                 </a:solidFill>
-                <a:latin typeface="Century Schoolbook"/>
+                <a:latin typeface="Lexend"/>
               </a:rPr>
               <a:t>Name what each one did wrong, and give the correct quotient.</a:t>
             </a:r>
@@ -13254,7 +14403,149 @@
         </p:nvSpPr>
         <p:spPr>
           <a:xfrm>
-            <a:off x="777240" y="4663440"/>
+            <a:off x="1720736" y="3976115"/>
+            <a:ext cx="8857207" cy="457200"/>
+          </a:xfrm>
+          <a:prstGeom prst="rect">
+            <a:avLst/>
+          </a:prstGeom>
+          <a:noFill/>
+        </p:spPr>
+        <p:txBody>
+          <a:bodyPr wrap="none" lIns="45720" rIns="45720" tIns="18288" bIns="18288" anchor="ctr">
+            <a:noAutofit/>
+          </a:bodyPr>
+          <a:lstStyle/>
+          <a:p>
+            <a:pPr algn="l"/>
+            <a:r>
+              <a:rPr sz="2330" b="0" i="0">
+                <a:solidFill>
+                  <a:srgbClr val="1A1A1A"/>
+                </a:solidFill>
+                <a:latin typeface="Lexend"/>
+              </a:rPr>
+              <a:t>Marcus subtracted the fronts. Sara added the exponents.</a:t>
+            </a:r>
+          </a:p>
+        </p:txBody>
+      </p:sp>
+      <p:pic>
+        <p:nvPicPr>
+          <p:cNvPr id="16" name="Picture 15" descr="da3880d224472433.png"/>
+          <p:cNvPicPr>
+            <a:picLocks noChangeAspect="1"/>
+          </p:cNvPicPr>
+          <p:nvPr/>
+        </p:nvPicPr>
+        <p:blipFill>
+          <a:blip r:embed="rId5"/>
+          <a:stretch>
+            <a:fillRect/>
+          </a:stretch>
+        </p:blipFill>
+        <p:spPr>
+          <a:xfrm>
+            <a:off x="1775600" y="4600956"/>
+            <a:ext cx="1496568" cy="213360"/>
+          </a:xfrm>
+          <a:prstGeom prst="rect">
+            <a:avLst/>
+          </a:prstGeom>
+        </p:spPr>
+      </p:pic>
+      <p:sp>
+        <p:nvSpPr>
+          <p:cNvPr id="17" name="TextBox 16"/>
+          <p:cNvSpPr txBox="1"/>
+          <p:nvPr/>
+        </p:nvSpPr>
+        <p:spPr>
+          <a:xfrm>
+            <a:off x="3272168" y="4479035"/>
+            <a:ext cx="1320048" cy="457200"/>
+          </a:xfrm>
+          <a:prstGeom prst="rect">
+            <a:avLst/>
+          </a:prstGeom>
+          <a:noFill/>
+        </p:spPr>
+        <p:txBody>
+          <a:bodyPr wrap="none" lIns="45720" rIns="45720" tIns="18288" bIns="18288" anchor="ctr">
+            <a:noAutofit/>
+          </a:bodyPr>
+          <a:lstStyle/>
+          <a:p>
+            <a:pPr algn="l"/>
+            <a:r>
+              <a:rPr sz="2330" b="0" i="0">
+                <a:solidFill>
+                  <a:srgbClr val="1A1A1A"/>
+                </a:solidFill>
+                <a:latin typeface="Lexend"/>
+              </a:rPr>
+              <a:t>   and   </a:t>
+            </a:r>
+          </a:p>
+        </p:txBody>
+      </p:sp>
+      <p:pic>
+        <p:nvPicPr>
+          <p:cNvPr id="18" name="Picture 17" descr="7db60f7f6057b18a.png"/>
+          <p:cNvPicPr>
+            <a:picLocks noChangeAspect="1"/>
+          </p:cNvPicPr>
+          <p:nvPr/>
+        </p:nvPicPr>
+        <p:blipFill>
+          <a:blip r:embed="rId6"/>
+          <a:stretch>
+            <a:fillRect/>
+          </a:stretch>
+        </p:blipFill>
+        <p:spPr>
+          <a:xfrm>
+            <a:off x="4455057" y="4576572"/>
+            <a:ext cx="1892807" cy="262128"/>
+          </a:xfrm>
+          <a:prstGeom prst="rect">
+            <a:avLst/>
+          </a:prstGeom>
+        </p:spPr>
+      </p:pic>
+      <p:pic>
+        <p:nvPicPr>
+          <p:cNvPr id="19" name="Picture 18" descr="b42c305db1deb8a1.png"/>
+          <p:cNvPicPr>
+            <a:picLocks noChangeAspect="1"/>
+          </p:cNvPicPr>
+          <p:nvPr/>
+        </p:nvPicPr>
+        <p:blipFill>
+          <a:blip r:embed="rId7"/>
+          <a:stretch>
+            <a:fillRect/>
+          </a:stretch>
+        </p:blipFill>
+        <p:spPr>
+          <a:xfrm>
+            <a:off x="1775600" y="5082539"/>
+            <a:ext cx="838200" cy="256032"/>
+          </a:xfrm>
+          <a:prstGeom prst="rect">
+            <a:avLst/>
+          </a:prstGeom>
+        </p:spPr>
+      </p:pic>
+      <p:sp>
+        <p:nvSpPr>
+          <p:cNvPr id="20" name="TextBox 19"/>
+          <p:cNvSpPr txBox="1"/>
+          <p:nvPr/>
+        </p:nvSpPr>
+        <p:spPr>
+          <a:xfrm>
+            <a:off x="777240" y="5553456"/>
             <a:ext cx="10607040" cy="548640"/>
           </a:xfrm>
           <a:prstGeom prst="rect">
@@ -13270,20 +14561,20 @@
           <a:p>
             <a:pPr algn="ctr"/>
             <a:r>
-              <a:rPr sz="3200" b="1" i="0">
+              <a:rPr sz="3040" b="1" i="0">
                 <a:solidFill>
                   <a:srgbClr val="9E1B32"/>
                 </a:solidFill>
-                <a:latin typeface="Century Schoolbook"/>
+                <a:latin typeface="Lexend"/>
               </a:rPr>
               <a:t>Answer:   3 × 10</a:t>
             </a:r>
             <a:r>
-              <a:rPr sz="3200" b="1" i="0" baseline="30000">
+              <a:rPr sz="3040" b="1" i="0" baseline="30000">
                 <a:solidFill>
                   <a:srgbClr val="9E1B32"/>
                 </a:solidFill>
-                <a:latin typeface="Century Schoolbook"/>
+                <a:latin typeface="Lexend"/>
               </a:rPr>
               <a:t>5</a:t>
             </a:r>
@@ -13332,11 +14623,11 @@
           <a:p>
             <a:pPr algn="l"/>
             <a:r>
-              <a:rPr sz="3600" b="1" i="0">
+              <a:rPr sz="3420" b="1" i="0">
                 <a:solidFill>
                   <a:srgbClr val="1A1A1A"/>
                 </a:solidFill>
-                <a:latin typeface="Century Schoolbook"/>
+                <a:latin typeface="Lexend"/>
               </a:rPr>
               <a:t>Independent Set</a:t>
             </a:r>
@@ -13472,11 +14763,11 @@
           <a:p>
             <a:pPr algn="l"/>
             <a:r>
-              <a:rPr sz="1100" b="0" i="1">
+              <a:rPr sz="1040" b="0" i="0">
                 <a:solidFill>
                   <a:srgbClr val="6B6B6B"/>
                 </a:solidFill>
-                <a:latin typeface="Century Schoolbook"/>
+                <a:latin typeface="Lexend"/>
               </a:rPr>
               <a:t>Grade 7 Accelerated · Unit 4 · Lessons 2–3 — Multiplying and Dividing in Scientific Notation</a:t>
             </a:r>
@@ -13507,11 +14798,11 @@
           <a:p>
             <a:pPr algn="r"/>
             <a:r>
-              <a:rPr sz="1100" b="0" i="0">
+              <a:rPr sz="1040" b="0" i="0">
                 <a:solidFill>
                   <a:srgbClr val="6B6B6B"/>
                 </a:solidFill>
-                <a:latin typeface="Century Schoolbook"/>
+                <a:latin typeface="Lexend"/>
               </a:rPr>
               <a:t>33</a:t>
             </a:r>
@@ -13542,11 +14833,11 @@
           <a:p>
             <a:pPr algn="l"/>
             <a:r>
-              <a:rPr sz="2300" b="1" i="0">
+              <a:rPr sz="2180" b="1" i="0">
                 <a:solidFill>
                   <a:srgbClr val="0B5394"/>
                 </a:solidFill>
-                <a:latin typeface="Century Schoolbook"/>
+                <a:latin typeface="Lexend"/>
               </a:rPr>
               <a:t>1.</a:t>
             </a:r>
@@ -13555,7 +14846,7 @@
       </p:sp>
       <p:pic>
         <p:nvPicPr>
-          <p:cNvPr id="9" name="Picture 8" descr="c49caa77206bc38d.png"/>
+          <p:cNvPr id="9" name="Picture 8" descr="6e0be8365ac4f5b7.png"/>
           <p:cNvPicPr>
             <a:picLocks noChangeAspect="1"/>
           </p:cNvPicPr>
@@ -13569,8 +14860,8 @@
         </p:blipFill>
         <p:spPr>
           <a:xfrm>
-            <a:off x="1627632" y="1556004"/>
-            <a:ext cx="2282952" cy="335280"/>
+            <a:off x="1627632" y="1559051"/>
+            <a:ext cx="2292096" cy="329184"/>
           </a:xfrm>
           <a:prstGeom prst="rect">
             <a:avLst/>
@@ -13585,7 +14876,7 @@
         </p:nvSpPr>
         <p:spPr>
           <a:xfrm>
-            <a:off x="960120" y="2215895"/>
+            <a:off x="960120" y="2205227"/>
             <a:ext cx="548640" cy="457200"/>
           </a:xfrm>
           <a:prstGeom prst="rect">
@@ -13601,11 +14892,11 @@
           <a:p>
             <a:pPr algn="l"/>
             <a:r>
-              <a:rPr sz="2300" b="1" i="0">
+              <a:rPr sz="2180" b="1" i="0">
                 <a:solidFill>
                   <a:srgbClr val="0B5394"/>
                 </a:solidFill>
-                <a:latin typeface="Century Schoolbook"/>
+                <a:latin typeface="Lexend"/>
               </a:rPr>
               <a:t>2.</a:t>
             </a:r>
@@ -13614,7 +14905,7 @@
       </p:sp>
       <p:pic>
         <p:nvPicPr>
-          <p:cNvPr id="11" name="Picture 10" descr="17604f6e1003d2c7.png"/>
+          <p:cNvPr id="11" name="Picture 10" descr="62a20c5f23ea4ba0.png"/>
           <p:cNvPicPr>
             <a:picLocks noChangeAspect="1"/>
           </p:cNvPicPr>
@@ -13629,7 +14920,7 @@
         <p:spPr>
           <a:xfrm>
             <a:off x="1627632" y="2112263"/>
-            <a:ext cx="1188720" cy="664464"/>
+            <a:ext cx="1167384" cy="643128"/>
           </a:xfrm>
           <a:prstGeom prst="rect">
             <a:avLst/>
@@ -13644,7 +14935,7 @@
         </p:nvSpPr>
         <p:spPr>
           <a:xfrm>
-            <a:off x="960120" y="2936748"/>
+            <a:off x="960120" y="2915411"/>
             <a:ext cx="548640" cy="457200"/>
           </a:xfrm>
           <a:prstGeom prst="rect">
@@ -13660,11 +14951,11 @@
           <a:p>
             <a:pPr algn="l"/>
             <a:r>
-              <a:rPr sz="2300" b="1" i="0">
+              <a:rPr sz="2180" b="1" i="0">
                 <a:solidFill>
                   <a:srgbClr val="0B5394"/>
                 </a:solidFill>
-                <a:latin typeface="Century Schoolbook"/>
+                <a:latin typeface="Lexend"/>
               </a:rPr>
               <a:t>3.</a:t>
             </a:r>
@@ -13673,7 +14964,7 @@
       </p:sp>
       <p:pic>
         <p:nvPicPr>
-          <p:cNvPr id="13" name="Picture 12" descr="e2e26ee8dfa29483.png"/>
+          <p:cNvPr id="13" name="Picture 12" descr="d61c32ba4971b571.png"/>
           <p:cNvPicPr>
             <a:picLocks noChangeAspect="1"/>
           </p:cNvPicPr>
@@ -13687,8 +14978,8 @@
         </p:blipFill>
         <p:spPr>
           <a:xfrm>
-            <a:off x="1627632" y="2997707"/>
-            <a:ext cx="2441448" cy="335280"/>
+            <a:off x="1627632" y="2977895"/>
+            <a:ext cx="2407920" cy="332232"/>
           </a:xfrm>
           <a:prstGeom prst="rect">
             <a:avLst/>
@@ -13703,7 +14994,7 @@
         </p:nvSpPr>
         <p:spPr>
           <a:xfrm>
-            <a:off x="960120" y="3659123"/>
+            <a:off x="960120" y="3625595"/>
             <a:ext cx="548640" cy="457200"/>
           </a:xfrm>
           <a:prstGeom prst="rect">
@@ -13719,11 +15010,11 @@
           <a:p>
             <a:pPr algn="l"/>
             <a:r>
-              <a:rPr sz="2300" b="1" i="0">
+              <a:rPr sz="2180" b="1" i="0">
                 <a:solidFill>
                   <a:srgbClr val="0B5394"/>
                 </a:solidFill>
-                <a:latin typeface="Century Schoolbook"/>
+                <a:latin typeface="Lexend"/>
               </a:rPr>
               <a:t>4.</a:t>
             </a:r>
@@ -13732,7 +15023,7 @@
       </p:sp>
       <p:pic>
         <p:nvPicPr>
-          <p:cNvPr id="15" name="Picture 14" descr="822dad32b0eba4a5.png"/>
+          <p:cNvPr id="15" name="Picture 14" descr="8867f8a3b1816d89.png"/>
           <p:cNvPicPr>
             <a:picLocks noChangeAspect="1"/>
           </p:cNvPicPr>
@@ -13746,8 +15037,8 @@
         </p:blipFill>
         <p:spPr>
           <a:xfrm>
-            <a:off x="1627632" y="3553967"/>
-            <a:ext cx="1188720" cy="667512"/>
+            <a:off x="1627632" y="3532631"/>
+            <a:ext cx="1155192" cy="643128"/>
           </a:xfrm>
           <a:prstGeom prst="rect">
             <a:avLst/>
@@ -13762,7 +15053,7 @@
         </p:nvSpPr>
         <p:spPr>
           <a:xfrm>
-            <a:off x="960120" y="4511039"/>
+            <a:off x="960120" y="4454651"/>
             <a:ext cx="548640" cy="457200"/>
           </a:xfrm>
           <a:prstGeom prst="rect">
@@ -13778,11 +15069,11 @@
           <a:p>
             <a:pPr algn="l"/>
             <a:r>
-              <a:rPr sz="2300" b="1" i="0">
+              <a:rPr sz="2180" b="1" i="0">
                 <a:solidFill>
                   <a:srgbClr val="0B5394"/>
                 </a:solidFill>
-                <a:latin typeface="Century Schoolbook"/>
+                <a:latin typeface="Lexend"/>
               </a:rPr>
               <a:t>5.</a:t>
             </a:r>
@@ -13791,7 +15082,7 @@
       </p:sp>
       <p:pic>
         <p:nvPicPr>
-          <p:cNvPr id="17" name="Picture 16" descr="7c5a8d7e4e4f2d60.png"/>
+          <p:cNvPr id="17" name="Picture 16" descr="b725906188c6ae12.png"/>
           <p:cNvPicPr>
             <a:picLocks noChangeAspect="1"/>
           </p:cNvPicPr>
@@ -13805,8 +15096,8 @@
         </p:blipFill>
         <p:spPr>
           <a:xfrm>
-            <a:off x="1627632" y="4404360"/>
-            <a:ext cx="1100328" cy="670560"/>
+            <a:off x="1627632" y="4358639"/>
+            <a:ext cx="1060704" cy="649224"/>
           </a:xfrm>
           <a:prstGeom prst="rect">
             <a:avLst/>
@@ -13821,7 +15112,7 @@
         </p:nvSpPr>
         <p:spPr>
           <a:xfrm>
-            <a:off x="960120" y="5234940"/>
+            <a:off x="960120" y="5167883"/>
             <a:ext cx="548640" cy="457200"/>
           </a:xfrm>
           <a:prstGeom prst="rect">
@@ -13837,11 +15128,11 @@
           <a:p>
             <a:pPr algn="l"/>
             <a:r>
-              <a:rPr sz="2300" b="1" i="0">
+              <a:rPr sz="2180" b="1" i="0">
                 <a:solidFill>
                   <a:srgbClr val="0B5394"/>
                 </a:solidFill>
-                <a:latin typeface="Century Schoolbook"/>
+                <a:latin typeface="Lexend"/>
               </a:rPr>
               <a:t>6.</a:t>
             </a:r>
@@ -13856,8 +15147,8 @@
         </p:nvSpPr>
         <p:spPr>
           <a:xfrm>
-            <a:off x="1554480" y="5234940"/>
-            <a:ext cx="967391" cy="457200"/>
+            <a:off x="1554480" y="5167883"/>
+            <a:ext cx="913052" cy="457200"/>
           </a:xfrm>
           <a:prstGeom prst="rect">
             <a:avLst/>
@@ -13872,11 +15163,11 @@
           <a:p>
             <a:pPr algn="l"/>
             <a:r>
-              <a:rPr sz="2300" b="0" i="0">
+              <a:rPr sz="2180" b="0" i="0">
                 <a:solidFill>
                   <a:srgbClr val="1A1A1A"/>
                 </a:solidFill>
-                <a:latin typeface="Century Schoolbook"/>
+                <a:latin typeface="Lexend"/>
               </a:rPr>
               <a:t>Find </a:t>
             </a:r>
@@ -13885,7 +15176,7 @@
       </p:sp>
       <p:pic>
         <p:nvPicPr>
-          <p:cNvPr id="20" name="Picture 19" descr="0afe177f69dd5e06.png"/>
+          <p:cNvPr id="20" name="Picture 19" descr="6d78c2be12150bf5.png"/>
           <p:cNvPicPr>
             <a:picLocks noChangeAspect="1"/>
           </p:cNvPicPr>
@@ -13899,8 +15190,8 @@
         </p:blipFill>
         <p:spPr>
           <a:xfrm>
-            <a:off x="2384711" y="5388864"/>
-            <a:ext cx="155448" cy="149352"/>
+            <a:off x="2330372" y="5312664"/>
+            <a:ext cx="146304" cy="167640"/>
           </a:xfrm>
           <a:prstGeom prst="rect">
             <a:avLst/>
@@ -13915,8 +15206,8 @@
         </p:nvSpPr>
         <p:spPr>
           <a:xfrm>
-            <a:off x="2540159" y="5234940"/>
-            <a:ext cx="468561" cy="457200"/>
+            <a:off x="2476676" y="5167883"/>
+            <a:ext cx="442110" cy="457200"/>
           </a:xfrm>
           <a:prstGeom prst="rect">
             <a:avLst/>
@@ -13931,11 +15222,11 @@
           <a:p>
             <a:pPr algn="l"/>
             <a:r>
-              <a:rPr sz="2300" b="0" i="0">
+              <a:rPr sz="2180" b="0" i="0">
                 <a:solidFill>
                   <a:srgbClr val="1A1A1A"/>
                 </a:solidFill>
-                <a:latin typeface="Century Schoolbook"/>
+                <a:latin typeface="Lexend"/>
               </a:rPr>
               <a:t>.  </a:t>
             </a:r>
@@ -13944,7 +15235,7 @@
       </p:sp>
       <p:pic>
         <p:nvPicPr>
-          <p:cNvPr id="22" name="Picture 21" descr="29f37f2eabf1cbac.png"/>
+          <p:cNvPr id="22" name="Picture 21" descr="d7bf46933a52690e.png"/>
           <p:cNvPicPr>
             <a:picLocks noChangeAspect="1"/>
           </p:cNvPicPr>
@@ -13958,8 +15249,8 @@
         </p:blipFill>
         <p:spPr>
           <a:xfrm>
-            <a:off x="2871561" y="5295900"/>
-            <a:ext cx="3654552" cy="335280"/>
+            <a:off x="2781626" y="5228844"/>
+            <a:ext cx="3621024" cy="335280"/>
           </a:xfrm>
           <a:prstGeom prst="rect">
             <a:avLst/>
@@ -14008,11 +15299,11 @@
           <a:p>
             <a:pPr algn="l"/>
             <a:r>
-              <a:rPr sz="3600" b="1" i="0">
+              <a:rPr sz="3420" b="1" i="0">
                 <a:solidFill>
                   <a:srgbClr val="1A1A1A"/>
                 </a:solidFill>
-                <a:latin typeface="Century Schoolbook"/>
+                <a:latin typeface="Lexend"/>
               </a:rPr>
               <a:t>IXL</a:t>
             </a:r>
@@ -14148,11 +15439,11 @@
           <a:p>
             <a:pPr algn="l"/>
             <a:r>
-              <a:rPr sz="1100" b="0" i="1">
+              <a:rPr sz="1040" b="0" i="0">
                 <a:solidFill>
                   <a:srgbClr val="6B6B6B"/>
                 </a:solidFill>
-                <a:latin typeface="Century Schoolbook"/>
+                <a:latin typeface="Lexend"/>
               </a:rPr>
               <a:t>Grade 7 Accelerated · Unit 4 · Lessons 2–3 — Multiplying and Dividing in Scientific Notation</a:t>
             </a:r>
@@ -14183,11 +15474,11 @@
           <a:p>
             <a:pPr algn="r"/>
             <a:r>
-              <a:rPr sz="1100" b="0" i="0">
+              <a:rPr sz="1040" b="0" i="0">
                 <a:solidFill>
                   <a:srgbClr val="6B6B6B"/>
                 </a:solidFill>
-                <a:latin typeface="Century Schoolbook"/>
+                <a:latin typeface="Lexend"/>
               </a:rPr>
               <a:t>34</a:t>
             </a:r>
@@ -14218,11 +15509,11 @@
           <a:p>
             <a:pPr algn="l"/>
             <a:r>
-              <a:rPr sz="2100" b="1" i="0">
+              <a:rPr sz="1989" b="1" i="0">
                 <a:solidFill>
                   <a:srgbClr val="0B5394"/>
                 </a:solidFill>
-                <a:latin typeface="Century Schoolbook"/>
+                <a:latin typeface="Lexend"/>
               </a:rPr>
               <a:t>1.</a:t>
             </a:r>
@@ -14253,11 +15544,11 @@
           <a:p>
             <a:pPr algn="l"/>
             <a:r>
-              <a:rPr sz="2100" b="0" i="0">
+              <a:rPr sz="1989" b="0" i="0">
                 <a:solidFill>
                   <a:srgbClr val="1A1A1A"/>
                 </a:solidFill>
-                <a:latin typeface="Century Schoolbook"/>
+                <a:latin typeface="Lexend"/>
               </a:rPr>
               <a:t>Open IXL and start today's skills.</a:t>
             </a:r>
@@ -14288,11 +15579,11 @@
           <a:p>
             <a:pPr algn="l"/>
             <a:r>
-              <a:rPr sz="2100" b="1" i="0">
+              <a:rPr sz="1989" b="1" i="0">
                 <a:solidFill>
                   <a:srgbClr val="0B5394"/>
                 </a:solidFill>
-                <a:latin typeface="Century Schoolbook"/>
+                <a:latin typeface="Lexend"/>
               </a:rPr>
               <a:t>2.</a:t>
             </a:r>
@@ -14323,11 +15614,11 @@
           <a:p>
             <a:pPr algn="l"/>
             <a:r>
-              <a:rPr sz="2100" b="0" i="0">
+              <a:rPr sz="1989" b="0" i="0">
                 <a:solidFill>
                   <a:srgbClr val="1A1A1A"/>
                 </a:solidFill>
-                <a:latin typeface="Century Schoolbook"/>
+                <a:latin typeface="Lexend"/>
               </a:rPr>
               <a:t>Work on paper where the question needs work. The answer box does not show it.</a:t>
             </a:r>
@@ -14358,11 +15649,11 @@
           <a:p>
             <a:pPr algn="l"/>
             <a:r>
-              <a:rPr sz="2100" b="1" i="0">
+              <a:rPr sz="1989" b="1" i="0">
                 <a:solidFill>
                   <a:srgbClr val="0B5394"/>
                 </a:solidFill>
-                <a:latin typeface="Century Schoolbook"/>
+                <a:latin typeface="Lexend"/>
               </a:rPr>
               <a:t>3.</a:t>
             </a:r>
@@ -14393,11 +15684,11 @@
           <a:p>
             <a:pPr algn="l"/>
             <a:r>
-              <a:rPr sz="2100" b="0" i="0">
+              <a:rPr sz="1989" b="0" i="0">
                 <a:solidFill>
                   <a:srgbClr val="1A1A1A"/>
                 </a:solidFill>
-                <a:latin typeface="Century Schoolbook"/>
+                <a:latin typeface="Lexend"/>
               </a:rPr>
               <a:t>Every skill listed is required, to a SmartScore of 67. Due at the start of the next class.</a:t>
             </a:r>
@@ -14428,11 +15719,11 @@
           <a:p>
             <a:pPr algn="l"/>
             <a:r>
-              <a:rPr sz="2100" b="1" i="0">
+              <a:rPr sz="1989" b="1" i="0">
                 <a:solidFill>
                   <a:srgbClr val="1A1A1A"/>
                 </a:solidFill>
-                <a:latin typeface="Century Schoolbook"/>
+                <a:latin typeface="Lexend"/>
               </a:rPr>
               <a:t>Today's skills — all required</a:t>
             </a:r>
@@ -14463,11 +15754,11 @@
           <a:p>
             <a:pPr algn="l"/>
             <a:r>
-              <a:rPr sz="1900" b="0" i="0">
+              <a:rPr sz="1810" b="0" i="0">
                 <a:solidFill>
                   <a:srgbClr val="1A1A1A"/>
                 </a:solidFill>
-                <a:latin typeface="Century Schoolbook"/>
+                <a:latin typeface="Lexend"/>
               </a:rPr>
               <a:t>Multiply numbers written in scientific notation — YZU</a:t>
             </a:r>
@@ -14498,11 +15789,11 @@
           <a:p>
             <a:pPr algn="l"/>
             <a:r>
-              <a:rPr sz="1900" b="0" i="0">
+              <a:rPr sz="1810" b="0" i="0">
                 <a:solidFill>
                   <a:srgbClr val="1A1A1A"/>
                 </a:solidFill>
-                <a:latin typeface="Century Schoolbook"/>
+                <a:latin typeface="Lexend"/>
               </a:rPr>
               <a:t>Divide numbers written in scientific notation — SGT</a:t>
             </a:r>
@@ -14551,11 +15842,11 @@
           <a:p>
             <a:pPr algn="l"/>
             <a:r>
-              <a:rPr sz="3600" b="1" i="0">
+              <a:rPr sz="3420" b="1" i="0">
                 <a:solidFill>
                   <a:srgbClr val="1A1A1A"/>
                 </a:solidFill>
-                <a:latin typeface="Century Schoolbook"/>
+                <a:latin typeface="Lexend"/>
               </a:rPr>
               <a:t>Notes</a:t>
             </a:r>
@@ -14691,11 +15982,11 @@
           <a:p>
             <a:pPr algn="l"/>
             <a:r>
-              <a:rPr sz="1100" b="0" i="1">
+              <a:rPr sz="1040" b="0" i="0">
                 <a:solidFill>
                   <a:srgbClr val="6B6B6B"/>
                 </a:solidFill>
-                <a:latin typeface="Century Schoolbook"/>
+                <a:latin typeface="Lexend"/>
               </a:rPr>
               <a:t>Grade 7 Accelerated · Unit 4 · Lessons 2–3 — Multiplying and Dividing in Scientific Notation</a:t>
             </a:r>
@@ -14726,11 +16017,11 @@
           <a:p>
             <a:pPr algn="r"/>
             <a:r>
-              <a:rPr sz="1100" b="0" i="0">
+              <a:rPr sz="1040" b="0" i="0">
                 <a:solidFill>
                   <a:srgbClr val="6B6B6B"/>
                 </a:solidFill>
-                <a:latin typeface="Century Schoolbook"/>
+                <a:latin typeface="Lexend"/>
               </a:rPr>
               <a:t>4</a:t>
             </a:r>
@@ -14761,11 +16052,11 @@
           <a:p>
             <a:pPr algn="l"/>
             <a:r>
-              <a:rPr sz="2500" b="1" i="0">
+              <a:rPr sz="2380" b="1" i="0">
                 <a:solidFill>
                   <a:srgbClr val="1A1A1A"/>
                 </a:solidFill>
-                <a:latin typeface="Century Schoolbook"/>
+                <a:latin typeface="Lexend"/>
               </a:rPr>
               <a:t>I.  Multiplying: regroup, then use the laws</a:t>
             </a:r>
@@ -14809,7 +16100,7 @@
       </p:cxnSp>
       <p:pic>
         <p:nvPicPr>
-          <p:cNvPr id="10" name="Picture 9" descr="3d98347d24a5e79c.png"/>
+          <p:cNvPr id="10" name="Picture 9" descr="24f6cc700f63110a.png"/>
           <p:cNvPicPr>
             <a:picLocks noChangeAspect="1"/>
           </p:cNvPicPr>
@@ -14823,8 +16114,8 @@
         </p:blipFill>
         <p:spPr>
           <a:xfrm>
-            <a:off x="2424683" y="1993392"/>
-            <a:ext cx="7312152" cy="411480"/>
+            <a:off x="2420112" y="1993392"/>
+            <a:ext cx="7321295" cy="414528"/>
           </a:xfrm>
           <a:prstGeom prst="rect">
             <a:avLst/>
@@ -14833,7 +16124,7 @@
       </p:pic>
       <p:pic>
         <p:nvPicPr>
-          <p:cNvPr id="11" name="Picture 10" descr="cac393ebd07bcf14.png"/>
+          <p:cNvPr id="11" name="Picture 10" descr="d894b08558ca6ca2.png"/>
           <p:cNvPicPr>
             <a:picLocks noChangeAspect="1"/>
           </p:cNvPicPr>
@@ -14847,8 +16138,8 @@
         </p:blipFill>
         <p:spPr>
           <a:xfrm>
-            <a:off x="3971941" y="2711196"/>
-            <a:ext cx="1115568" cy="347472"/>
+            <a:off x="3994387" y="2717292"/>
+            <a:ext cx="1100328" cy="341376"/>
           </a:xfrm>
           <a:prstGeom prst="rect">
             <a:avLst/>
@@ -14863,8 +16154,8 @@
         </p:nvSpPr>
         <p:spPr>
           <a:xfrm>
-            <a:off x="5087509" y="2656332"/>
-            <a:ext cx="1977357" cy="457200"/>
+            <a:off x="5094715" y="2659380"/>
+            <a:ext cx="1947704" cy="457200"/>
           </a:xfrm>
           <a:prstGeom prst="rect">
             <a:avLst/>
@@ -14879,11 +16170,11 @@
           <a:p>
             <a:pPr algn="l"/>
             <a:r>
-              <a:rPr sz="2600" b="0" i="0">
+              <a:rPr sz="2470" b="0" i="0">
                 <a:solidFill>
                   <a:srgbClr val="1A1A1A"/>
                 </a:solidFill>
-                <a:latin typeface="Century Schoolbook"/>
+                <a:latin typeface="Lexend"/>
               </a:rPr>
               <a:t>,    never    </a:t>
             </a:r>
@@ -14892,7 +16183,7 @@
       </p:sp>
       <p:pic>
         <p:nvPicPr>
-          <p:cNvPr id="13" name="Picture 12" descr="d56fc73065e54a04.png"/>
+          <p:cNvPr id="13" name="Picture 12" descr="f59bf4b41a85edbd.png"/>
           <p:cNvPicPr>
             <a:picLocks noChangeAspect="1"/>
           </p:cNvPicPr>
@@ -14906,8 +16197,8 @@
         </p:blipFill>
         <p:spPr>
           <a:xfrm>
-            <a:off x="6927706" y="2709672"/>
-            <a:ext cx="1261872" cy="350520"/>
+            <a:off x="6905260" y="2717292"/>
+            <a:ext cx="1261872" cy="341376"/>
           </a:xfrm>
           <a:prstGeom prst="rect">
             <a:avLst/>
@@ -14922,7 +16213,7 @@
         </p:nvSpPr>
         <p:spPr>
           <a:xfrm>
-            <a:off x="987552" y="3429000"/>
+            <a:off x="987552" y="3432047"/>
             <a:ext cx="10131551" cy="950976"/>
           </a:xfrm>
           <a:prstGeom prst="rect">
@@ -14938,11 +16229,11 @@
           <a:p>
             <a:pPr algn="l"/>
             <a:r>
-              <a:rPr sz="2300" b="1" i="0">
+              <a:rPr sz="2180" b="1" i="0">
                 <a:solidFill>
                   <a:srgbClr val="1A1A1A"/>
                 </a:solidFill>
-                <a:latin typeface="Century Schoolbook"/>
+                <a:latin typeface="Lexend"/>
               </a:rPr>
               <a:t>Multiply the coefficients. Add the exponents — that is the product of powers law, not a new rule.</a:t>
             </a:r>
@@ -14991,11 +16282,11 @@
           <a:p>
             <a:pPr algn="l"/>
             <a:r>
-              <a:rPr sz="3600" b="1" i="0">
+              <a:rPr sz="3420" b="1" i="0">
                 <a:solidFill>
                   <a:srgbClr val="1A1A1A"/>
                 </a:solidFill>
-                <a:latin typeface="Century Schoolbook"/>
+                <a:latin typeface="Lexend"/>
               </a:rPr>
               <a:t>Notes</a:t>
             </a:r>
@@ -15131,11 +16422,11 @@
           <a:p>
             <a:pPr algn="l"/>
             <a:r>
-              <a:rPr sz="1100" b="0" i="1">
+              <a:rPr sz="1040" b="0" i="0">
                 <a:solidFill>
                   <a:srgbClr val="6B6B6B"/>
                 </a:solidFill>
-                <a:latin typeface="Century Schoolbook"/>
+                <a:latin typeface="Lexend"/>
               </a:rPr>
               <a:t>Grade 7 Accelerated · Unit 4 · Lessons 2–3 — Multiplying and Dividing in Scientific Notation</a:t>
             </a:r>
@@ -15166,11 +16457,11 @@
           <a:p>
             <a:pPr algn="r"/>
             <a:r>
-              <a:rPr sz="1100" b="0" i="0">
+              <a:rPr sz="1040" b="0" i="0">
                 <a:solidFill>
                   <a:srgbClr val="6B6B6B"/>
                 </a:solidFill>
-                <a:latin typeface="Century Schoolbook"/>
+                <a:latin typeface="Lexend"/>
               </a:rPr>
               <a:t>5</a:t>
             </a:r>
@@ -15201,11 +16492,11 @@
           <a:p>
             <a:pPr algn="l"/>
             <a:r>
-              <a:rPr sz="2500" b="1" i="0">
+              <a:rPr sz="2380" b="1" i="0">
                 <a:solidFill>
                   <a:srgbClr val="1A1A1A"/>
                 </a:solidFill>
-                <a:latin typeface="Century Schoolbook"/>
+                <a:latin typeface="Lexend"/>
               </a:rPr>
               <a:t>II.  Dividing: the same move with the quotient law</a:t>
             </a:r>
@@ -15249,7 +16540,7 @@
       </p:cxnSp>
       <p:pic>
         <p:nvPicPr>
-          <p:cNvPr id="10" name="Picture 9" descr="1a3a168722c51cc1.png"/>
+          <p:cNvPr id="10" name="Picture 9" descr="5efa08aa797f4490.png"/>
           <p:cNvPicPr>
             <a:picLocks noChangeAspect="1"/>
           </p:cNvPicPr>
@@ -15263,8 +16554,8 @@
         </p:blipFill>
         <p:spPr>
           <a:xfrm>
-            <a:off x="3404616" y="1993392"/>
-            <a:ext cx="5352288" cy="819912"/>
+            <a:off x="3421380" y="1993392"/>
+            <a:ext cx="5318760" cy="798576"/>
           </a:xfrm>
           <a:prstGeom prst="rect">
             <a:avLst/>
@@ -15273,7 +16564,7 @@
       </p:pic>
       <p:pic>
         <p:nvPicPr>
-          <p:cNvPr id="11" name="Picture 10" descr="a2db9260e2659194.png"/>
+          <p:cNvPr id="11" name="Picture 10" descr="44f28ecf0a9cf88b.png"/>
           <p:cNvPicPr>
             <a:picLocks noChangeAspect="1"/>
           </p:cNvPicPr>
@@ -15287,8 +16578,8 @@
         </p:blipFill>
         <p:spPr>
           <a:xfrm>
-            <a:off x="3368040" y="3087624"/>
-            <a:ext cx="5425440" cy="822960"/>
+            <a:off x="3483864" y="3066288"/>
+            <a:ext cx="5193792" cy="795528"/>
           </a:xfrm>
           <a:prstGeom prst="rect">
             <a:avLst/>
@@ -15303,7 +16594,7 @@
         </p:nvSpPr>
         <p:spPr>
           <a:xfrm>
-            <a:off x="987552" y="4248912"/>
+            <a:off x="987552" y="4200144"/>
             <a:ext cx="10131551" cy="475488"/>
           </a:xfrm>
           <a:prstGeom prst="rect">
@@ -15319,11 +16610,11 @@
           <a:p>
             <a:pPr algn="l"/>
             <a:r>
-              <a:rPr sz="2300" b="1" i="0">
+              <a:rPr sz="2180" b="1" i="0">
                 <a:solidFill>
                   <a:srgbClr val="1A1A1A"/>
                 </a:solidFill>
-                <a:latin typeface="Century Schoolbook"/>
+                <a:latin typeface="Lexend"/>
               </a:rPr>
               <a:t>Divide the coefficients. Subtract the exponents, top minus bottom.</a:t>
             </a:r>
@@ -15372,11 +16663,11 @@
           <a:p>
             <a:pPr algn="l"/>
             <a:r>
-              <a:rPr sz="3600" b="1" i="0">
+              <a:rPr sz="3420" b="1" i="0">
                 <a:solidFill>
                   <a:srgbClr val="1A1A1A"/>
                 </a:solidFill>
-                <a:latin typeface="Century Schoolbook"/>
+                <a:latin typeface="Lexend"/>
               </a:rPr>
               <a:t>Notes</a:t>
             </a:r>
@@ -15512,11 +16803,11 @@
           <a:p>
             <a:pPr algn="l"/>
             <a:r>
-              <a:rPr sz="1100" b="0" i="1">
+              <a:rPr sz="1040" b="0" i="0">
                 <a:solidFill>
                   <a:srgbClr val="6B6B6B"/>
                 </a:solidFill>
-                <a:latin typeface="Century Schoolbook"/>
+                <a:latin typeface="Lexend"/>
               </a:rPr>
               <a:t>Grade 7 Accelerated · Unit 4 · Lessons 2–3 — Multiplying and Dividing in Scientific Notation</a:t>
             </a:r>
@@ -15547,11 +16838,11 @@
           <a:p>
             <a:pPr algn="r"/>
             <a:r>
-              <a:rPr sz="1100" b="0" i="0">
+              <a:rPr sz="1040" b="0" i="0">
                 <a:solidFill>
                   <a:srgbClr val="6B6B6B"/>
                 </a:solidFill>
-                <a:latin typeface="Century Schoolbook"/>
+                <a:latin typeface="Lexend"/>
               </a:rPr>
               <a:t>6</a:t>
             </a:r>
@@ -15582,11 +16873,11 @@
           <a:p>
             <a:pPr algn="l"/>
             <a:r>
-              <a:rPr sz="2500" b="1" i="0">
+              <a:rPr sz="2380" b="1" i="0">
                 <a:solidFill>
                   <a:srgbClr val="1A1A1A"/>
                 </a:solidFill>
-                <a:latin typeface="Century Schoolbook"/>
+                <a:latin typeface="Lexend"/>
               </a:rPr>
               <a:t>III.  Finish the answer — both directions</a:t>
             </a:r>
@@ -15630,7 +16921,7 @@
       </p:cxnSp>
       <p:pic>
         <p:nvPicPr>
-          <p:cNvPr id="10" name="Picture 9" descr="0c79c2afc3e4714d.png"/>
+          <p:cNvPr id="10" name="Picture 9" descr="040551c03da2cd15.png"/>
           <p:cNvPicPr>
             <a:picLocks noChangeAspect="1"/>
           </p:cNvPicPr>
@@ -15644,8 +16935,8 @@
         </p:blipFill>
         <p:spPr>
           <a:xfrm>
-            <a:off x="2875788" y="1993392"/>
-            <a:ext cx="6409944" cy="411480"/>
+            <a:off x="2906268" y="1993392"/>
+            <a:ext cx="6348984" cy="414528"/>
           </a:xfrm>
           <a:prstGeom prst="rect">
             <a:avLst/>
@@ -15654,7 +16945,7 @@
       </p:pic>
       <p:pic>
         <p:nvPicPr>
-          <p:cNvPr id="11" name="Picture 10" descr="6e3a2fa74bbe542d.png"/>
+          <p:cNvPr id="11" name="Picture 10" descr="acee3a8d1b672089.png"/>
           <p:cNvPicPr>
             <a:picLocks noChangeAspect="1"/>
           </p:cNvPicPr>
@@ -15668,8 +16959,8 @@
         </p:blipFill>
         <p:spPr>
           <a:xfrm>
-            <a:off x="3019044" y="2679192"/>
-            <a:ext cx="6123432" cy="822960"/>
+            <a:off x="3116580" y="2682240"/>
+            <a:ext cx="5928360" cy="801624"/>
           </a:xfrm>
           <a:prstGeom prst="rect">
             <a:avLst/>
@@ -15684,7 +16975,7 @@
         </p:nvSpPr>
         <p:spPr>
           <a:xfrm>
-            <a:off x="987552" y="3840480"/>
+            <a:off x="987552" y="3822191"/>
             <a:ext cx="10131551" cy="475488"/>
           </a:xfrm>
           <a:prstGeom prst="rect">
@@ -15700,11 +16991,11 @@
           <a:p>
             <a:pPr algn="l"/>
             <a:r>
-              <a:rPr sz="2300" b="1" i="0">
+              <a:rPr sz="2180" b="1" i="0">
                 <a:solidFill>
                   <a:srgbClr val="1A1A1A"/>
                 </a:solidFill>
-                <a:latin typeface="Century Schoolbook"/>
+                <a:latin typeface="Lexend"/>
               </a:rPr>
               <a:t>Every answer ends with a coefficient at least 1 and less than 10.</a:t>
             </a:r>
@@ -15753,11 +17044,11 @@
           <a:p>
             <a:pPr algn="l"/>
             <a:r>
-              <a:rPr sz="3600" b="1" i="0">
+              <a:rPr sz="3420" b="1" i="0">
                 <a:solidFill>
                   <a:srgbClr val="1A1A1A"/>
                 </a:solidFill>
-                <a:latin typeface="Century Schoolbook"/>
+                <a:latin typeface="Lexend"/>
               </a:rPr>
               <a:t>Example 1</a:t>
             </a:r>
@@ -15893,11 +17184,11 @@
           <a:p>
             <a:pPr algn="l"/>
             <a:r>
-              <a:rPr sz="1100" b="0" i="1">
+              <a:rPr sz="1040" b="0" i="0">
                 <a:solidFill>
                   <a:srgbClr val="6B6B6B"/>
                 </a:solidFill>
-                <a:latin typeface="Century Schoolbook"/>
+                <a:latin typeface="Lexend"/>
               </a:rPr>
               <a:t>Grade 7 Accelerated · Unit 4 · Lessons 2–3 — Multiplying and Dividing in Scientific Notation</a:t>
             </a:r>
@@ -15928,11 +17219,11 @@
           <a:p>
             <a:pPr algn="r"/>
             <a:r>
-              <a:rPr sz="1100" b="0" i="0">
+              <a:rPr sz="1040" b="0" i="0">
                 <a:solidFill>
                   <a:srgbClr val="6B6B6B"/>
                 </a:solidFill>
-                <a:latin typeface="Century Schoolbook"/>
+                <a:latin typeface="Lexend"/>
               </a:rPr>
               <a:t>7</a:t>
             </a:r>
@@ -15941,7 +17232,7 @@
       </p:sp>
       <p:pic>
         <p:nvPicPr>
-          <p:cNvPr id="8" name="Picture 7" descr="7b4ae14dd869224c.png"/>
+          <p:cNvPr id="8" name="Picture 7" descr="c7ebac9815df250f.png"/>
           <p:cNvPicPr>
             <a:picLocks noChangeAspect="1"/>
           </p:cNvPicPr>
@@ -15955,8 +17246,8 @@
         </p:blipFill>
         <p:spPr>
           <a:xfrm>
-            <a:off x="4425696" y="2103120"/>
-            <a:ext cx="3310128" cy="411480"/>
+            <a:off x="4439412" y="2104643"/>
+            <a:ext cx="3282696" cy="408432"/>
           </a:xfrm>
           <a:prstGeom prst="rect">
             <a:avLst/>
@@ -15987,11 +17278,11 @@
           <a:p>
             <a:pPr algn="ctr"/>
             <a:r>
-              <a:rPr sz="2400" b="1" i="0">
+              <a:rPr sz="2280" b="1" i="0">
                 <a:solidFill>
                   <a:srgbClr val="1A1A1A"/>
                 </a:solidFill>
-                <a:latin typeface="Century Schoolbook"/>
+                <a:latin typeface="Lexend"/>
               </a:rPr>
               <a:t>Multiply. Write the answer in scientific notation.</a:t>
             </a:r>
@@ -16040,11 +17331,11 @@
           <a:p>
             <a:pPr algn="l"/>
             <a:r>
-              <a:rPr sz="3600" b="1" i="0">
+              <a:rPr sz="3420" b="1" i="0">
                 <a:solidFill>
                   <a:srgbClr val="1A1A1A"/>
                 </a:solidFill>
-                <a:latin typeface="Century Schoolbook"/>
+                <a:latin typeface="Lexend"/>
               </a:rPr>
               <a:t>Example 1</a:t>
             </a:r>
@@ -16180,11 +17471,11 @@
           <a:p>
             <a:pPr algn="l"/>
             <a:r>
-              <a:rPr sz="1100" b="0" i="1">
+              <a:rPr sz="1040" b="0" i="0">
                 <a:solidFill>
                   <a:srgbClr val="6B6B6B"/>
                 </a:solidFill>
-                <a:latin typeface="Century Schoolbook"/>
+                <a:latin typeface="Lexend"/>
               </a:rPr>
               <a:t>Grade 7 Accelerated · Unit 4 · Lessons 2–3 — Multiplying and Dividing in Scientific Notation</a:t>
             </a:r>
@@ -16215,11 +17506,11 @@
           <a:p>
             <a:pPr algn="r"/>
             <a:r>
-              <a:rPr sz="1100" b="0" i="0">
+              <a:rPr sz="1040" b="0" i="0">
                 <a:solidFill>
                   <a:srgbClr val="6B6B6B"/>
                 </a:solidFill>
-                <a:latin typeface="Century Schoolbook"/>
+                <a:latin typeface="Lexend"/>
               </a:rPr>
               <a:t>8</a:t>
             </a:r>
@@ -16228,7 +17519,7 @@
       </p:sp>
       <p:pic>
         <p:nvPicPr>
-          <p:cNvPr id="8" name="Picture 7" descr="255f5ba7a254ef28.png"/>
+          <p:cNvPr id="8" name="Picture 7" descr="25f7ed4f25353ce0.png"/>
           <p:cNvPicPr>
             <a:picLocks noChangeAspect="1"/>
           </p:cNvPicPr>
@@ -16243,7 +17534,7 @@
         <p:spPr>
           <a:xfrm>
             <a:off x="1828800" y="1920240"/>
-            <a:ext cx="6769608" cy="408432"/>
+            <a:ext cx="6772656" cy="408432"/>
           </a:xfrm>
           <a:prstGeom prst="rect">
             <a:avLst/>
@@ -16252,7 +17543,7 @@
       </p:pic>
       <p:pic>
         <p:nvPicPr>
-          <p:cNvPr id="9" name="Picture 8" descr="6f84424baa8324fb.png"/>
+          <p:cNvPr id="9" name="Picture 8" descr="54ffb222fc56be80.png"/>
           <p:cNvPicPr>
             <a:picLocks noChangeAspect="1"/>
           </p:cNvPicPr>
@@ -16267,7 +17558,7 @@
         <p:spPr>
           <a:xfrm>
             <a:off x="1828800" y="2602992"/>
-            <a:ext cx="1652016" cy="353568"/>
+            <a:ext cx="1609344" cy="338328"/>
           </a:xfrm>
           <a:prstGeom prst="rect">
             <a:avLst/>
@@ -16276,7 +17567,7 @@
       </p:pic>
       <p:pic>
         <p:nvPicPr>
-          <p:cNvPr id="10" name="Picture 9" descr="faf479a8541eeb60.png"/>
+          <p:cNvPr id="10" name="Picture 9" descr="bb053a1b63579351.png"/>
           <p:cNvPicPr>
             <a:picLocks noChangeAspect="1"/>
           </p:cNvPicPr>
@@ -16290,8 +17581,8 @@
         </p:blipFill>
         <p:spPr>
           <a:xfrm>
-            <a:off x="1828800" y="3230880"/>
-            <a:ext cx="3166872" cy="353568"/>
+            <a:off x="1828800" y="3215640"/>
+            <a:ext cx="3108960" cy="338328"/>
           </a:xfrm>
           <a:prstGeom prst="rect">
             <a:avLst/>
@@ -16322,20 +17613,20 @@
           <a:p>
             <a:pPr algn="ctr"/>
             <a:r>
-              <a:rPr sz="3200" b="1" i="0">
+              <a:rPr sz="3040" b="1" i="0">
                 <a:solidFill>
                   <a:srgbClr val="9E1B32"/>
                 </a:solidFill>
-                <a:latin typeface="Century Schoolbook"/>
+                <a:latin typeface="Lexend"/>
               </a:rPr>
               <a:t>Answer:   2.7 × 10</a:t>
             </a:r>
             <a:r>
-              <a:rPr sz="3200" b="1" i="0" baseline="30000">
+              <a:rPr sz="3040" b="1" i="0" baseline="30000">
                 <a:solidFill>
                   <a:srgbClr val="9E1B32"/>
                 </a:solidFill>
-                <a:latin typeface="Century Schoolbook"/>
+                <a:latin typeface="Lexend"/>
               </a:rPr>
               <a:t>5</a:t>
             </a:r>
@@ -16384,11 +17675,11 @@
           <a:p>
             <a:pPr algn="l"/>
             <a:r>
-              <a:rPr sz="3600" b="1" i="0">
+              <a:rPr sz="3420" b="1" i="0">
                 <a:solidFill>
                   <a:srgbClr val="1A1A1A"/>
                 </a:solidFill>
-                <a:latin typeface="Century Schoolbook"/>
+                <a:latin typeface="Lexend"/>
               </a:rPr>
               <a:t>Your Turn</a:t>
             </a:r>
@@ -16524,11 +17815,11 @@
           <a:p>
             <a:pPr algn="l"/>
             <a:r>
-              <a:rPr sz="1100" b="0" i="1">
+              <a:rPr sz="1040" b="0" i="0">
                 <a:solidFill>
                   <a:srgbClr val="6B6B6B"/>
                 </a:solidFill>
-                <a:latin typeface="Century Schoolbook"/>
+                <a:latin typeface="Lexend"/>
               </a:rPr>
               <a:t>Grade 7 Accelerated · Unit 4 · Lessons 2–3 — Multiplying and Dividing in Scientific Notation</a:t>
             </a:r>
@@ -16559,11 +17850,11 @@
           <a:p>
             <a:pPr algn="r"/>
             <a:r>
-              <a:rPr sz="1100" b="0" i="0">
+              <a:rPr sz="1040" b="0" i="0">
                 <a:solidFill>
                   <a:srgbClr val="6B6B6B"/>
                 </a:solidFill>
-                <a:latin typeface="Century Schoolbook"/>
+                <a:latin typeface="Lexend"/>
               </a:rPr>
               <a:t>9</a:t>
             </a:r>
@@ -16572,7 +17863,7 @@
       </p:sp>
       <p:pic>
         <p:nvPicPr>
-          <p:cNvPr id="8" name="Picture 7" descr="945d13953f7af1b2.png"/>
+          <p:cNvPr id="8" name="Picture 7" descr="a28d7c387e5fd6b7.png"/>
           <p:cNvPicPr>
             <a:picLocks noChangeAspect="1"/>
           </p:cNvPicPr>
@@ -16586,8 +17877,8 @@
         </p:blipFill>
         <p:spPr>
           <a:xfrm>
-            <a:off x="4012691" y="2194560"/>
-            <a:ext cx="4136136" cy="518160"/>
+            <a:off x="4034027" y="1600200"/>
+            <a:ext cx="4093464" cy="512064"/>
           </a:xfrm>
           <a:prstGeom prst="rect">
             <a:avLst/>
@@ -16602,7 +17893,7 @@
         </p:nvSpPr>
         <p:spPr>
           <a:xfrm>
-            <a:off x="777240" y="3215640"/>
+            <a:off x="777240" y="2615184"/>
             <a:ext cx="10607040" cy="429370"/>
           </a:xfrm>
           <a:prstGeom prst="rect">
@@ -16618,11 +17909,11 @@
           <a:p>
             <a:pPr algn="ctr"/>
             <a:r>
-              <a:rPr sz="2400" b="1" i="0">
+              <a:rPr sz="2280" b="1" i="0">
                 <a:solidFill>
                   <a:srgbClr val="1A1A1A"/>
                 </a:solidFill>
-                <a:latin typeface="Century Schoolbook"/>
+                <a:latin typeface="Lexend"/>
               </a:rPr>
               <a:t>Multiply. Write the answer in scientific notation.</a:t>
             </a:r>

--- a/a7/packages/A7 Unit 4 - Solving Problems with Rational Numbers/Lessons/4.02/A7 4.02 Multiplying and Dividing in Scientific Notation - Slides.pptx
+++ b/a7/packages/A7 Unit 4 - Solving Problems with Rational Numbers/Lessons/4.02/A7 4.02 Multiplying and Dividing in Scientific Notation - Slides.pptx
@@ -5648,7 +5648,7 @@
       </p:sp>
       <p:pic>
         <p:nvPicPr>
-          <p:cNvPr id="8" name="Picture 7" descr="0b9390ce3cc09441.png"/>
+          <p:cNvPr id="8" name="Picture 7" descr="71829a44e81d1062.png"/>
           <p:cNvPicPr>
             <a:picLocks noChangeAspect="1"/>
           </p:cNvPicPr>
@@ -5662,8 +5662,8 @@
         </p:blipFill>
         <p:spPr>
           <a:xfrm>
-            <a:off x="4675632" y="2197608"/>
-            <a:ext cx="2810256" cy="405384"/>
+            <a:off x="4687823" y="2196083"/>
+            <a:ext cx="2785872" cy="408432"/>
           </a:xfrm>
           <a:prstGeom prst="rect">
             <a:avLst/>
@@ -5935,7 +5935,7 @@
       </p:sp>
       <p:pic>
         <p:nvPicPr>
-          <p:cNvPr id="8" name="Picture 7" descr="8f72ce73375c8b2f.png"/>
+          <p:cNvPr id="8" name="Picture 7" descr="9a64fed63dd04098.png"/>
           <p:cNvPicPr>
             <a:picLocks noChangeAspect="1"/>
           </p:cNvPicPr>
@@ -5949,8 +5949,8 @@
         </p:blipFill>
         <p:spPr>
           <a:xfrm>
-            <a:off x="4674108" y="2104643"/>
-            <a:ext cx="2813304" cy="408432"/>
+            <a:off x="4686300" y="2103120"/>
+            <a:ext cx="2788920" cy="414528"/>
           </a:xfrm>
           <a:prstGeom prst="rect">
             <a:avLst/>
@@ -5965,7 +5965,7 @@
         </p:nvSpPr>
         <p:spPr>
           <a:xfrm>
-            <a:off x="3561941" y="2839212"/>
+            <a:off x="3523841" y="2842259"/>
             <a:ext cx="3220349" cy="457200"/>
           </a:xfrm>
           <a:prstGeom prst="rect">
@@ -5994,7 +5994,7 @@
       </p:sp>
       <p:pic>
         <p:nvPicPr>
-          <p:cNvPr id="10" name="Picture 9" descr="3b9f7aa917f3bc2f.png"/>
+          <p:cNvPr id="10" name="Picture 9" descr="515cb46100c89924.png"/>
           <p:cNvPicPr>
             <a:picLocks noChangeAspect="1"/>
           </p:cNvPicPr>
@@ -6008,8 +6008,8 @@
         </p:blipFill>
         <p:spPr>
           <a:xfrm>
-            <a:off x="6645131" y="2961132"/>
-            <a:ext cx="996696" cy="213360"/>
+            <a:off x="6607031" y="2964179"/>
+            <a:ext cx="987552" cy="213360"/>
           </a:xfrm>
           <a:prstGeom prst="rect">
             <a:avLst/>
@@ -6024,7 +6024,7 @@
         </p:nvSpPr>
         <p:spPr>
           <a:xfrm>
-            <a:off x="3561941" y="3342132"/>
+            <a:off x="3523841" y="3345179"/>
             <a:ext cx="3315516" cy="457200"/>
           </a:xfrm>
           <a:prstGeom prst="rect">
@@ -6053,7 +6053,7 @@
       </p:sp>
       <p:pic>
         <p:nvPicPr>
-          <p:cNvPr id="12" name="Picture 11" descr="e3276e3a1387ee5a.png"/>
+          <p:cNvPr id="12" name="Picture 11" descr="b08638df285abcbf.png"/>
           <p:cNvPicPr>
             <a:picLocks noChangeAspect="1"/>
           </p:cNvPicPr>
@@ -6067,8 +6067,8 @@
         </p:blipFill>
         <p:spPr>
           <a:xfrm>
-            <a:off x="6740298" y="3439667"/>
-            <a:ext cx="1862328" cy="262128"/>
+            <a:off x="6702198" y="3442715"/>
+            <a:ext cx="1941576" cy="262128"/>
           </a:xfrm>
           <a:prstGeom prst="rect">
             <a:avLst/>
@@ -6077,7 +6077,7 @@
       </p:pic>
       <p:pic>
         <p:nvPicPr>
-          <p:cNvPr id="13" name="Picture 12" descr="1c75541c26ca2203.png"/>
+          <p:cNvPr id="13" name="Picture 12" descr="f2052183a017b136.png"/>
           <p:cNvPicPr>
             <a:picLocks noChangeAspect="1"/>
           </p:cNvPicPr>
@@ -6091,8 +6091,8 @@
         </p:blipFill>
         <p:spPr>
           <a:xfrm>
-            <a:off x="3616805" y="3942588"/>
-            <a:ext cx="841248" cy="262128"/>
+            <a:off x="3578705" y="3945635"/>
+            <a:ext cx="932688" cy="262128"/>
           </a:xfrm>
           <a:prstGeom prst="rect">
             <a:avLst/>
@@ -6129,7 +6129,7 @@
                 </a:solidFill>
                 <a:latin typeface="Lexend"/>
               </a:rPr>
-              <a:t>Answer:   6 × 10</a:t>
+              <a:t>Answer:   9 × 10</a:t>
             </a:r>
             <a:r>
               <a:rPr sz="3040" b="1" i="0" baseline="30000">
@@ -6138,7 +6138,7 @@
                 </a:solidFill>
                 <a:latin typeface="Lexend"/>
               </a:rPr>
-              <a:t>9</a:t>
+              <a:t>11</a:t>
             </a:r>
           </a:p>
         </p:txBody>
@@ -8685,7 +8685,7 @@
       </p:sp>
       <p:pic>
         <p:nvPicPr>
-          <p:cNvPr id="8" name="Picture 7" descr="2a802e9bc79b2838.png"/>
+          <p:cNvPr id="8" name="Picture 7" descr="ffdc47127232dd72.png"/>
           <p:cNvPicPr>
             <a:picLocks noChangeAspect="1"/>
           </p:cNvPicPr>
@@ -8699,8 +8699,8 @@
         </p:blipFill>
         <p:spPr>
           <a:xfrm>
-            <a:off x="5192267" y="2194560"/>
-            <a:ext cx="1776984" cy="798576"/>
+            <a:off x="5256276" y="2194560"/>
+            <a:ext cx="1648968" cy="795528"/>
           </a:xfrm>
           <a:prstGeom prst="rect">
             <a:avLst/>
@@ -8972,7 +8972,7 @@
       </p:sp>
       <p:pic>
         <p:nvPicPr>
-          <p:cNvPr id="8" name="Picture 7" descr="a13b79c4b3b988f2.png"/>
+          <p:cNvPr id="8" name="Picture 7" descr="e0912071a11b6e8e.png"/>
           <p:cNvPicPr>
             <a:picLocks noChangeAspect="1"/>
           </p:cNvPicPr>
@@ -8986,8 +8986,8 @@
         </p:blipFill>
         <p:spPr>
           <a:xfrm>
-            <a:off x="5193792" y="2103120"/>
-            <a:ext cx="1773936" cy="801624"/>
+            <a:off x="5259323" y="2103120"/>
+            <a:ext cx="1642872" cy="795528"/>
           </a:xfrm>
           <a:prstGeom prst="rect">
             <a:avLst/>
@@ -9002,7 +9002,7 @@
         </p:nvSpPr>
         <p:spPr>
           <a:xfrm>
-            <a:off x="3048277" y="3229356"/>
+            <a:off x="3089425" y="3223260"/>
             <a:ext cx="2991598" cy="457200"/>
           </a:xfrm>
           <a:prstGeom prst="rect">
@@ -9031,7 +9031,7 @@
       </p:sp>
       <p:pic>
         <p:nvPicPr>
-          <p:cNvPr id="10" name="Picture 9" descr="d5a4b760a6c3fb95.png"/>
+          <p:cNvPr id="10" name="Picture 9" descr="b4106f1670f34932.png"/>
           <p:cNvPicPr>
             <a:picLocks noChangeAspect="1"/>
           </p:cNvPicPr>
@@ -9045,8 +9045,8 @@
         </p:blipFill>
         <p:spPr>
           <a:xfrm>
-            <a:off x="5902715" y="3351276"/>
-            <a:ext cx="1840991" cy="213360"/>
+            <a:off x="5943863" y="3345180"/>
+            <a:ext cx="1865376" cy="213360"/>
           </a:xfrm>
           <a:prstGeom prst="rect">
             <a:avLst/>
@@ -9061,7 +9061,7 @@
         </p:nvSpPr>
         <p:spPr>
           <a:xfrm>
-            <a:off x="3048277" y="3732275"/>
+            <a:off x="3089425" y="3726179"/>
             <a:ext cx="4013660" cy="457200"/>
           </a:xfrm>
           <a:prstGeom prst="rect">
@@ -9090,7 +9090,7 @@
       </p:sp>
       <p:pic>
         <p:nvPicPr>
-          <p:cNvPr id="12" name="Picture 11" descr="aac9d927f81bb71f.png"/>
+          <p:cNvPr id="12" name="Picture 11" descr="006020145e462521.png"/>
           <p:cNvPicPr>
             <a:picLocks noChangeAspect="1"/>
           </p:cNvPicPr>
@@ -9104,8 +9104,8 @@
         </p:blipFill>
         <p:spPr>
           <a:xfrm>
-            <a:off x="6924778" y="3829812"/>
-            <a:ext cx="2191512" cy="262128"/>
+            <a:off x="6965926" y="3823716"/>
+            <a:ext cx="2109216" cy="262128"/>
           </a:xfrm>
           <a:prstGeom prst="rect">
             <a:avLst/>
@@ -9114,7 +9114,7 @@
       </p:pic>
       <p:pic>
         <p:nvPicPr>
-          <p:cNvPr id="13" name="Picture 12" descr="1e24bf9c6552dd3d.png"/>
+          <p:cNvPr id="13" name="Picture 12" descr="c559c147ffe46a93.png"/>
           <p:cNvPicPr>
             <a:picLocks noChangeAspect="1"/>
           </p:cNvPicPr>
@@ -9128,8 +9128,8 @@
         </p:blipFill>
         <p:spPr>
           <a:xfrm>
-            <a:off x="3103141" y="4332732"/>
-            <a:ext cx="2855976" cy="262128"/>
+            <a:off x="3144289" y="4329683"/>
+            <a:ext cx="2889504" cy="256032"/>
           </a:xfrm>
           <a:prstGeom prst="rect">
             <a:avLst/>
@@ -9144,7 +9144,7 @@
         </p:nvSpPr>
         <p:spPr>
           <a:xfrm>
-            <a:off x="777240" y="4806696"/>
+            <a:off x="777240" y="4800600"/>
             <a:ext cx="10607040" cy="548640"/>
           </a:xfrm>
           <a:prstGeom prst="rect">
@@ -9166,7 +9166,7 @@
                 </a:solidFill>
                 <a:latin typeface="Lexend"/>
               </a:rPr>
-              <a:t>Answer:   5.3 × 10</a:t>
+              <a:t>Answer:   8.2 × 10</a:t>
             </a:r>
             <a:r>
               <a:rPr sz="3040" b="1" i="0" baseline="30000">
@@ -9175,7 +9175,7 @@
                 </a:solidFill>
                 <a:latin typeface="Lexend"/>
               </a:rPr>
-              <a:t>-3</a:t>
+              <a:t>-4</a:t>
             </a:r>
           </a:p>
         </p:txBody>
@@ -9410,7 +9410,7 @@
       </p:sp>
       <p:pic>
         <p:nvPicPr>
-          <p:cNvPr id="8" name="Picture 7" descr="030f336ef028bc09.png"/>
+          <p:cNvPr id="8" name="Picture 7" descr="3853590bf4416720.png"/>
           <p:cNvPicPr>
             <a:picLocks noChangeAspect="1"/>
           </p:cNvPicPr>
@@ -9424,8 +9424,8 @@
         </p:blipFill>
         <p:spPr>
           <a:xfrm>
-            <a:off x="4675632" y="2197608"/>
-            <a:ext cx="2810256" cy="405384"/>
+            <a:off x="4669536" y="2196083"/>
+            <a:ext cx="2822448" cy="408432"/>
           </a:xfrm>
           <a:prstGeom prst="rect">
             <a:avLst/>
@@ -9506,7 +9506,7 @@
                 </a:solidFill>
                 <a:latin typeface="Lexend"/>
               </a:rPr>
-              <a:t>6 × 10</a:t>
+              <a:t>8 × 10</a:t>
             </a:r>
             <a:r>
               <a:rPr sz="2280" b="0" i="0" baseline="30000">
@@ -9515,7 +9515,7 @@
                 </a:solidFill>
                 <a:latin typeface="Lexend"/>
               </a:rPr>
-              <a:t>-1</a:t>
+              <a:t>-2</a:t>
             </a:r>
           </a:p>
         </p:txBody>
@@ -9559,7 +9559,7 @@
                 </a:solidFill>
                 <a:latin typeface="Lexend"/>
               </a:rPr>
-              <a:t>6 × 10</a:t>
+              <a:t>8 × 10</a:t>
             </a:r>
             <a:r>
               <a:rPr sz="2280" b="0" i="0" baseline="30000">
@@ -9568,7 +9568,7 @@
                 </a:solidFill>
                 <a:latin typeface="Lexend"/>
               </a:rPr>
-              <a:t>20</a:t>
+              <a:t>63</a:t>
             </a:r>
           </a:p>
         </p:txBody>
@@ -9612,7 +9612,7 @@
                 </a:solidFill>
                 <a:latin typeface="Lexend"/>
               </a:rPr>
-              <a:t>6 × 10</a:t>
+              <a:t>8 × 10</a:t>
             </a:r>
             <a:r>
               <a:rPr sz="2280" b="0" i="0" baseline="30000">
@@ -9621,7 +9621,7 @@
                 </a:solidFill>
                 <a:latin typeface="Lexend"/>
               </a:rPr>
-              <a:t>9</a:t>
+              <a:t>16</a:t>
             </a:r>
           </a:p>
         </p:txBody>
@@ -9665,7 +9665,7 @@
                 </a:solidFill>
                 <a:latin typeface="Lexend"/>
               </a:rPr>
-              <a:t>5 × 10</a:t>
+              <a:t>6 × 10</a:t>
             </a:r>
             <a:r>
               <a:rPr sz="2280" b="0" i="0" baseline="30000">
@@ -9674,7 +9674,7 @@
                 </a:solidFill>
                 <a:latin typeface="Lexend"/>
               </a:rPr>
-              <a:t>9</a:t>
+              <a:t>16</a:t>
             </a:r>
           </a:p>
         </p:txBody>
@@ -9944,7 +9944,7 @@
       </p:sp>
       <p:pic>
         <p:nvPicPr>
-          <p:cNvPr id="8" name="Picture 7" descr="7b4d89c05f0f21ed.png"/>
+          <p:cNvPr id="8" name="Picture 7" descr="172da9cf6bf1b71a.png"/>
           <p:cNvPicPr>
             <a:picLocks noChangeAspect="1"/>
           </p:cNvPicPr>
@@ -9958,8 +9958,8 @@
         </p:blipFill>
         <p:spPr>
           <a:xfrm>
-            <a:off x="4674108" y="2104643"/>
-            <a:ext cx="2813304" cy="408432"/>
+            <a:off x="4668012" y="2103120"/>
+            <a:ext cx="2825496" cy="414528"/>
           </a:xfrm>
           <a:prstGeom prst="rect">
             <a:avLst/>
@@ -9974,7 +9974,7 @@
         </p:nvSpPr>
         <p:spPr>
           <a:xfrm>
-            <a:off x="777240" y="2788920"/>
+            <a:off x="777240" y="2791967"/>
             <a:ext cx="10607040" cy="465151"/>
           </a:xfrm>
           <a:prstGeom prst="rect">
@@ -10009,7 +10009,7 @@
         </p:nvSpPr>
         <p:spPr>
           <a:xfrm>
-            <a:off x="3561941" y="3414091"/>
+            <a:off x="3517745" y="3417139"/>
             <a:ext cx="3220349" cy="457200"/>
           </a:xfrm>
           <a:prstGeom prst="rect">
@@ -10038,7 +10038,7 @@
       </p:sp>
       <p:pic>
         <p:nvPicPr>
-          <p:cNvPr id="11" name="Picture 10" descr="ad6a10c37df82be6.png"/>
+          <p:cNvPr id="11" name="Picture 10" descr="441dd60a023e07e4.png"/>
           <p:cNvPicPr>
             <a:picLocks noChangeAspect="1"/>
           </p:cNvPicPr>
@@ -10052,8 +10052,8 @@
         </p:blipFill>
         <p:spPr>
           <a:xfrm>
-            <a:off x="6645131" y="3536011"/>
-            <a:ext cx="990599" cy="213360"/>
+            <a:off x="6600935" y="3540583"/>
+            <a:ext cx="1021080" cy="210312"/>
           </a:xfrm>
           <a:prstGeom prst="rect">
             <a:avLst/>
@@ -10068,7 +10068,7 @@
         </p:nvSpPr>
         <p:spPr>
           <a:xfrm>
-            <a:off x="3561941" y="3917011"/>
+            <a:off x="3517745" y="3920059"/>
             <a:ext cx="3315516" cy="457200"/>
           </a:xfrm>
           <a:prstGeom prst="rect">
@@ -10097,7 +10097,7 @@
       </p:sp>
       <p:pic>
         <p:nvPicPr>
-          <p:cNvPr id="13" name="Picture 12" descr="e3276e3a1387ee5a.png"/>
+          <p:cNvPr id="13" name="Picture 12" descr="579cc9c9ffeab55b.png"/>
           <p:cNvPicPr>
             <a:picLocks noChangeAspect="1"/>
           </p:cNvPicPr>
@@ -10111,8 +10111,8 @@
         </p:blipFill>
         <p:spPr>
           <a:xfrm>
-            <a:off x="6740298" y="4014547"/>
-            <a:ext cx="1862328" cy="262128"/>
+            <a:off x="6696102" y="4017595"/>
+            <a:ext cx="1950720" cy="262128"/>
           </a:xfrm>
           <a:prstGeom prst="rect">
             <a:avLst/>
@@ -10121,7 +10121,7 @@
       </p:pic>
       <p:pic>
         <p:nvPicPr>
-          <p:cNvPr id="14" name="Picture 13" descr="1c75541c26ca2203.png"/>
+          <p:cNvPr id="14" name="Picture 13" descr="10c89d61f9e09d40.png"/>
           <p:cNvPicPr>
             <a:picLocks noChangeAspect="1"/>
           </p:cNvPicPr>
@@ -10135,8 +10135,8 @@
         </p:blipFill>
         <p:spPr>
           <a:xfrm>
-            <a:off x="3616805" y="4517467"/>
-            <a:ext cx="841248" cy="262128"/>
+            <a:off x="3572609" y="4520515"/>
+            <a:ext cx="954023" cy="262128"/>
           </a:xfrm>
           <a:prstGeom prst="rect">
             <a:avLst/>
@@ -10151,7 +10151,7 @@
         </p:nvSpPr>
         <p:spPr>
           <a:xfrm>
-            <a:off x="777240" y="4991431"/>
+            <a:off x="777240" y="4994479"/>
             <a:ext cx="10607040" cy="548640"/>
           </a:xfrm>
           <a:prstGeom prst="rect">
@@ -10173,7 +10173,7 @@
                 </a:solidFill>
                 <a:latin typeface="Lexend"/>
               </a:rPr>
-              <a:t>Answer:   C — 6 × 10</a:t>
+              <a:t>Answer:   C — 8 × 10</a:t>
             </a:r>
             <a:r>
               <a:rPr sz="3040" b="1" i="0" baseline="30000">
@@ -10182,7 +10182,7 @@
                 </a:solidFill>
                 <a:latin typeface="Lexend"/>
               </a:rPr>
-              <a:t>9</a:t>
+              <a:t>16</a:t>
             </a:r>
           </a:p>
         </p:txBody>
@@ -11424,7 +11424,7 @@
       </p:sp>
       <p:pic>
         <p:nvPicPr>
-          <p:cNvPr id="8" name="Picture 7" descr="931110f4c672e97b.png"/>
+          <p:cNvPr id="8" name="Picture 7" descr="c4bdb38362d4edfd.png"/>
           <p:cNvPicPr>
             <a:picLocks noChangeAspect="1"/>
           </p:cNvPicPr>
@@ -11438,8 +11438,8 @@
         </p:blipFill>
         <p:spPr>
           <a:xfrm>
-            <a:off x="5430011" y="2194560"/>
-            <a:ext cx="1301496" cy="795528"/>
+            <a:off x="5434583" y="2194560"/>
+            <a:ext cx="1292352" cy="801624"/>
           </a:xfrm>
           <a:prstGeom prst="rect">
             <a:avLst/>
@@ -11711,7 +11711,7 @@
       </p:sp>
       <p:pic>
         <p:nvPicPr>
-          <p:cNvPr id="8" name="Picture 7" descr="7b155a9c422bffab.png"/>
+          <p:cNvPr id="8" name="Picture 7" descr="117d387ca555e41b.png"/>
           <p:cNvPicPr>
             <a:picLocks noChangeAspect="1"/>
           </p:cNvPicPr>
@@ -11725,8 +11725,8 @@
         </p:blipFill>
         <p:spPr>
           <a:xfrm>
-            <a:off x="5431536" y="2103120"/>
-            <a:ext cx="1298448" cy="795528"/>
+            <a:off x="5437632" y="2103120"/>
+            <a:ext cx="1286256" cy="801624"/>
           </a:xfrm>
           <a:prstGeom prst="rect">
             <a:avLst/>
@@ -11741,7 +11741,7 @@
         </p:nvSpPr>
         <p:spPr>
           <a:xfrm>
-            <a:off x="2417341" y="3223260"/>
+            <a:off x="2437153" y="3229356"/>
             <a:ext cx="2991598" cy="457200"/>
           </a:xfrm>
           <a:prstGeom prst="rect">
@@ -11770,7 +11770,7 @@
       </p:sp>
       <p:pic>
         <p:nvPicPr>
-          <p:cNvPr id="10" name="Picture 9" descr="c05e318526891889.png"/>
+          <p:cNvPr id="10" name="Picture 9" descr="e20244de15a0b935.png"/>
           <p:cNvPicPr>
             <a:picLocks noChangeAspect="1"/>
           </p:cNvPicPr>
@@ -11784,8 +11784,8 @@
         </p:blipFill>
         <p:spPr>
           <a:xfrm>
-            <a:off x="5271779" y="3345180"/>
-            <a:ext cx="996696" cy="213360"/>
+            <a:off x="5291591" y="3352800"/>
+            <a:ext cx="996696" cy="210312"/>
           </a:xfrm>
           <a:prstGeom prst="rect">
             <a:avLst/>
@@ -11800,7 +11800,7 @@
         </p:nvSpPr>
         <p:spPr>
           <a:xfrm>
-            <a:off x="2417341" y="3726179"/>
+            <a:off x="2437153" y="3732275"/>
             <a:ext cx="4013660" cy="457200"/>
           </a:xfrm>
           <a:prstGeom prst="rect">
@@ -11829,7 +11829,7 @@
       </p:sp>
       <p:pic>
         <p:nvPicPr>
-          <p:cNvPr id="12" name="Picture 11" descr="6fb71a276e50135a.png"/>
+          <p:cNvPr id="12" name="Picture 11" descr="03a763d23ef38bc8.png"/>
           <p:cNvPicPr>
             <a:picLocks noChangeAspect="1"/>
           </p:cNvPicPr>
@@ -11843,8 +11843,8 @@
         </p:blipFill>
         <p:spPr>
           <a:xfrm>
-            <a:off x="6293842" y="3823716"/>
-            <a:ext cx="3453384" cy="262128"/>
+            <a:off x="6313654" y="3829812"/>
+            <a:ext cx="3416808" cy="262128"/>
           </a:xfrm>
           <a:prstGeom prst="rect">
             <a:avLst/>
@@ -11853,7 +11853,7 @@
       </p:pic>
       <p:pic>
         <p:nvPicPr>
-          <p:cNvPr id="13" name="Picture 12" descr="c4122c07f8250b6d.png"/>
+          <p:cNvPr id="13" name="Picture 12" descr="9b9b4517e7c627da.png"/>
           <p:cNvPicPr>
             <a:picLocks noChangeAspect="1"/>
           </p:cNvPicPr>
@@ -11867,7 +11867,7 @@
         </p:blipFill>
         <p:spPr>
           <a:xfrm>
-            <a:off x="2472205" y="4326636"/>
+            <a:off x="2492017" y="4332732"/>
             <a:ext cx="917448" cy="262128"/>
           </a:xfrm>
           <a:prstGeom prst="rect">
@@ -11883,7 +11883,7 @@
         </p:nvSpPr>
         <p:spPr>
           <a:xfrm>
-            <a:off x="777240" y="4800600"/>
+            <a:off x="777240" y="4806696"/>
             <a:ext cx="10607040" cy="548640"/>
           </a:xfrm>
           <a:prstGeom prst="rect">
@@ -11914,7 +11914,7 @@
                 </a:solidFill>
                 <a:latin typeface="Lexend"/>
               </a:rPr>
-              <a:t>12</a:t>
+              <a:t>15</a:t>
             </a:r>
           </a:p>
         </p:txBody>

--- a/a7/packages/A7 Unit 4 - Solving Problems with Rational Numbers/Lessons/4.02/A7 4.02 Multiplying and Dividing in Scientific Notation - Slides.pptx
+++ b/a7/packages/A7 Unit 4 - Solving Problems with Rational Numbers/Lessons/4.02/A7 4.02 Multiplying and Dividing in Scientific Notation - Slides.pptx
@@ -13716,7 +13716,7 @@
         </p:nvSpPr>
         <p:spPr>
           <a:xfrm>
-            <a:off x="2888731" y="1815084"/>
+            <a:off x="2849107" y="1816608"/>
             <a:ext cx="930187" cy="457200"/>
           </a:xfrm>
           <a:prstGeom prst="rect">
@@ -13745,7 +13745,7 @@
       </p:sp>
       <p:pic>
         <p:nvPicPr>
-          <p:cNvPr id="9" name="Picture 8" descr="e3c0f930fcb43cb0.png"/>
+          <p:cNvPr id="9" name="Picture 8" descr="60ccdbf79261551b.png"/>
           <p:cNvPicPr>
             <a:picLocks noChangeAspect="1"/>
           </p:cNvPicPr>
@@ -13759,8 +13759,8 @@
         </p:blipFill>
         <p:spPr>
           <a:xfrm>
-            <a:off x="3681758" y="1645920"/>
-            <a:ext cx="1481328" cy="795528"/>
+            <a:off x="3642134" y="1645920"/>
+            <a:ext cx="1554480" cy="798576"/>
           </a:xfrm>
           <a:prstGeom prst="rect">
             <a:avLst/>
@@ -13775,7 +13775,7 @@
         </p:nvSpPr>
         <p:spPr>
           <a:xfrm>
-            <a:off x="5163086" y="1815084"/>
+            <a:off x="5196614" y="1816608"/>
             <a:ext cx="2811254" cy="457200"/>
           </a:xfrm>
           <a:prstGeom prst="rect">
@@ -13804,7 +13804,7 @@
       </p:sp>
       <p:pic>
         <p:nvPicPr>
-          <p:cNvPr id="11" name="Picture 10" descr="201859fe582e568a.png"/>
+          <p:cNvPr id="11" name="Picture 10" descr="7f9ab9ea310fee82.png"/>
           <p:cNvPicPr>
             <a:picLocks noChangeAspect="1"/>
           </p:cNvPicPr>
@@ -13818,8 +13818,8 @@
         </p:blipFill>
         <p:spPr>
           <a:xfrm>
-            <a:off x="7837180" y="1876044"/>
-            <a:ext cx="1435608" cy="335280"/>
+            <a:off x="7870708" y="1876044"/>
+            <a:ext cx="1441704" cy="338328"/>
           </a:xfrm>
           <a:prstGeom prst="rect">
             <a:avLst/>
@@ -13834,7 +13834,7 @@
         </p:nvSpPr>
         <p:spPr>
           <a:xfrm>
-            <a:off x="4071916" y="2692908"/>
+            <a:off x="4059724" y="2695956"/>
             <a:ext cx="2929551" cy="457200"/>
           </a:xfrm>
           <a:prstGeom prst="rect">
@@ -13863,7 +13863,7 @@
       </p:sp>
       <p:pic>
         <p:nvPicPr>
-          <p:cNvPr id="13" name="Picture 12" descr="af7ef3b3737f0a42.png"/>
+          <p:cNvPr id="13" name="Picture 12" descr="f48b4bb2456d3556.png"/>
           <p:cNvPicPr>
             <a:picLocks noChangeAspect="1"/>
           </p:cNvPicPr>
@@ -13877,8 +13877,8 @@
         </p:blipFill>
         <p:spPr>
           <a:xfrm>
-            <a:off x="6864307" y="2750819"/>
-            <a:ext cx="1225296" cy="341376"/>
+            <a:off x="6852115" y="2753868"/>
+            <a:ext cx="1249680" cy="341376"/>
           </a:xfrm>
           <a:prstGeom prst="rect">
             <a:avLst/>
@@ -13893,7 +13893,7 @@
         </p:nvSpPr>
         <p:spPr>
           <a:xfrm>
-            <a:off x="777240" y="3401568"/>
+            <a:off x="777240" y="3404616"/>
             <a:ext cx="10607040" cy="411480"/>
           </a:xfrm>
           <a:prstGeom prst="rect">
@@ -14191,7 +14191,7 @@
         </p:nvSpPr>
         <p:spPr>
           <a:xfrm>
-            <a:off x="2891779" y="1816608"/>
+            <a:off x="2850631" y="1816608"/>
             <a:ext cx="930187" cy="457200"/>
           </a:xfrm>
           <a:prstGeom prst="rect">
@@ -14220,7 +14220,7 @@
       </p:sp>
       <p:pic>
         <p:nvPicPr>
-          <p:cNvPr id="9" name="Picture 8" descr="727390f8bf62070d.png"/>
+          <p:cNvPr id="9" name="Picture 8" descr="eb274165a95bfcd1.png"/>
           <p:cNvPicPr>
             <a:picLocks noChangeAspect="1"/>
           </p:cNvPicPr>
@@ -14234,8 +14234,8 @@
         </p:blipFill>
         <p:spPr>
           <a:xfrm>
-            <a:off x="3684806" y="1645920"/>
-            <a:ext cx="1475232" cy="798576"/>
+            <a:off x="3643658" y="1645920"/>
+            <a:ext cx="1548384" cy="798576"/>
           </a:xfrm>
           <a:prstGeom prst="rect">
             <a:avLst/>
@@ -14250,7 +14250,7 @@
         </p:nvSpPr>
         <p:spPr>
           <a:xfrm>
-            <a:off x="5160038" y="1816608"/>
+            <a:off x="5192042" y="1816608"/>
             <a:ext cx="2811254" cy="457200"/>
           </a:xfrm>
           <a:prstGeom prst="rect">
@@ -14279,7 +14279,7 @@
       </p:sp>
       <p:pic>
         <p:nvPicPr>
-          <p:cNvPr id="11" name="Picture 10" descr="9573c27959607365.png"/>
+          <p:cNvPr id="11" name="Picture 10" descr="031963a342c3fd42.png"/>
           <p:cNvPicPr>
             <a:picLocks noChangeAspect="1"/>
           </p:cNvPicPr>
@@ -14293,8 +14293,8 @@
         </p:blipFill>
         <p:spPr>
           <a:xfrm>
-            <a:off x="7834132" y="1877568"/>
-            <a:ext cx="1435608" cy="335280"/>
+            <a:off x="7866136" y="1876044"/>
+            <a:ext cx="1444752" cy="338328"/>
           </a:xfrm>
           <a:prstGeom prst="rect">
             <a:avLst/>
@@ -14309,7 +14309,7 @@
         </p:nvSpPr>
         <p:spPr>
           <a:xfrm>
-            <a:off x="4070392" y="2695956"/>
+            <a:off x="4058200" y="2695956"/>
             <a:ext cx="2929551" cy="457200"/>
           </a:xfrm>
           <a:prstGeom prst="rect">
@@ -14338,7 +14338,7 @@
       </p:sp>
       <p:pic>
         <p:nvPicPr>
-          <p:cNvPr id="13" name="Picture 12" descr="efd4e5357231d289.png"/>
+          <p:cNvPr id="13" name="Picture 12" descr="f762cb430573f291.png"/>
           <p:cNvPicPr>
             <a:picLocks noChangeAspect="1"/>
           </p:cNvPicPr>
@@ -14352,8 +14352,8 @@
         </p:blipFill>
         <p:spPr>
           <a:xfrm>
-            <a:off x="6862783" y="2753868"/>
-            <a:ext cx="1228344" cy="341376"/>
+            <a:off x="6850591" y="2753868"/>
+            <a:ext cx="1252728" cy="341376"/>
           </a:xfrm>
           <a:prstGeom prst="rect">
             <a:avLst/>
@@ -14491,7 +14491,7 @@
       </p:sp>
       <p:pic>
         <p:nvPicPr>
-          <p:cNvPr id="18" name="Picture 17" descr="7db60f7f6057b18a.png"/>
+          <p:cNvPr id="18" name="Picture 17" descr="e5d4b81feea7d9a0.png"/>
           <p:cNvPicPr>
             <a:picLocks noChangeAspect="1"/>
           </p:cNvPicPr>
@@ -14506,7 +14506,7 @@
         <p:spPr>
           <a:xfrm>
             <a:off x="4455057" y="4576572"/>
-            <a:ext cx="1892807" cy="262128"/>
+            <a:ext cx="1972056" cy="262128"/>
           </a:xfrm>
           <a:prstGeom prst="rect">
             <a:avLst/>
@@ -14515,7 +14515,7 @@
       </p:pic>
       <p:pic>
         <p:nvPicPr>
-          <p:cNvPr id="19" name="Picture 18" descr="b42c305db1deb8a1.png"/>
+          <p:cNvPr id="19" name="Picture 18" descr="9fe0ce93fe0b7e96.png"/>
           <p:cNvPicPr>
             <a:picLocks noChangeAspect="1"/>
           </p:cNvPicPr>
@@ -14530,7 +14530,7 @@
         <p:spPr>
           <a:xfrm>
             <a:off x="1775600" y="5082539"/>
-            <a:ext cx="838200" cy="256032"/>
+            <a:ext cx="841248" cy="256032"/>
           </a:xfrm>
           <a:prstGeom prst="rect">
             <a:avLst/>
@@ -14576,7 +14576,7 @@
                 </a:solidFill>
                 <a:latin typeface="Lexend"/>
               </a:rPr>
-              <a:t>5</a:t>
+              <a:t>8</a:t>
             </a:r>
           </a:p>
         </p:txBody>

--- a/a7/packages/A7 Unit 4 - Solving Problems with Rational Numbers/Lessons/4.02/A7 4.02 Multiplying and Dividing in Scientific Notation - Slides.pptx
+++ b/a7/packages/A7 Unit 4 - Solving Problems with Rational Numbers/Lessons/4.02/A7 4.02 Multiplying and Dividing in Scientific Notation - Slides.pptx
@@ -39,6 +39,7 @@
     <p:sldId id="287" r:id="rId38"/>
     <p:sldId id="288" r:id="rId39"/>
     <p:sldId id="289" r:id="rId40"/>
+    <p:sldId id="290" r:id="rId41"/>
   </p:sldIdLst>
   <p:sldSz cx="12191969" cy="6858000" type="screen4x3"/>
   <p:notesSz cx="6858000" cy="9144000"/>
@@ -3666,7 +3667,7 @@
       </p:sp>
       <p:pic>
         <p:nvPicPr>
-          <p:cNvPr id="8" name="Picture 7" descr="816312d3d4d78951.png"/>
+          <p:cNvPr id="8" name="Picture 7" descr="a28d7c387e5fd6b7.png"/>
           <p:cNvPicPr>
             <a:picLocks noChangeAspect="1"/>
           </p:cNvPicPr>
@@ -3719,192 +3720,6 @@
                 <a:latin typeface="Lexend"/>
               </a:rPr>
               <a:t>Multiply. Write the answer in scientific notation.</a:t>
-            </a:r>
-          </a:p>
-        </p:txBody>
-      </p:sp>
-      <p:sp>
-        <p:nvSpPr>
-          <p:cNvPr id="10" name="TextBox 9"/>
-          <p:cNvSpPr txBox="1"/>
-          <p:nvPr/>
-        </p:nvSpPr>
-        <p:spPr>
-          <a:xfrm>
-            <a:off x="3502505" y="3204574"/>
-            <a:ext cx="3220349" cy="457200"/>
-          </a:xfrm>
-          <a:prstGeom prst="rect">
-            <a:avLst/>
-          </a:prstGeom>
-          <a:noFill/>
-        </p:spPr>
-        <p:txBody>
-          <a:bodyPr wrap="none" lIns="45720" rIns="45720" tIns="18288" bIns="18288" anchor="ctr">
-            <a:noAutofit/>
-          </a:bodyPr>
-          <a:lstStyle/>
-          <a:p>
-            <a:pPr algn="l"/>
-            <a:r>
-              <a:rPr sz="2330" b="0" i="0">
-                <a:solidFill>
-                  <a:srgbClr val="1A1A1A"/>
-                </a:solidFill>
-                <a:latin typeface="Lexend"/>
-              </a:rPr>
-              <a:t>Multiply the fronts:  </a:t>
-            </a:r>
-          </a:p>
-        </p:txBody>
-      </p:sp>
-      <p:pic>
-        <p:nvPicPr>
-          <p:cNvPr id="11" name="Picture 10" descr="04263b59ab134a8d.png"/>
-          <p:cNvPicPr>
-            <a:picLocks noChangeAspect="1"/>
-          </p:cNvPicPr>
-          <p:nvPr/>
-        </p:nvPicPr>
-        <p:blipFill>
-          <a:blip r:embed="rId3"/>
-          <a:stretch>
-            <a:fillRect/>
-          </a:stretch>
-        </p:blipFill>
-        <p:spPr>
-          <a:xfrm>
-            <a:off x="6585695" y="3326494"/>
-            <a:ext cx="1414272" cy="213360"/>
-          </a:xfrm>
-          <a:prstGeom prst="rect">
-            <a:avLst/>
-          </a:prstGeom>
-        </p:spPr>
-      </p:pic>
-      <p:sp>
-        <p:nvSpPr>
-          <p:cNvPr id="12" name="TextBox 11"/>
-          <p:cNvSpPr txBox="1"/>
-          <p:nvPr/>
-        </p:nvSpPr>
-        <p:spPr>
-          <a:xfrm>
-            <a:off x="3502505" y="3707494"/>
-            <a:ext cx="3315516" cy="457200"/>
-          </a:xfrm>
-          <a:prstGeom prst="rect">
-            <a:avLst/>
-          </a:prstGeom>
-          <a:noFill/>
-        </p:spPr>
-        <p:txBody>
-          <a:bodyPr wrap="none" lIns="45720" rIns="45720" tIns="18288" bIns="18288" anchor="ctr">
-            <a:noAutofit/>
-          </a:bodyPr>
-          <a:lstStyle/>
-          <a:p>
-            <a:pPr algn="l"/>
-            <a:r>
-              <a:rPr sz="2330" b="0" i="0">
-                <a:solidFill>
-                  <a:srgbClr val="1A1A1A"/>
-                </a:solidFill>
-                <a:latin typeface="Lexend"/>
-              </a:rPr>
-              <a:t>Add the exponents:  </a:t>
-            </a:r>
-          </a:p>
-        </p:txBody>
-      </p:sp>
-      <p:pic>
-        <p:nvPicPr>
-          <p:cNvPr id="13" name="Picture 12" descr="2e6e8e2b001e1a7e.png"/>
-          <p:cNvPicPr>
-            <a:picLocks noChangeAspect="1"/>
-          </p:cNvPicPr>
-          <p:nvPr/>
-        </p:nvPicPr>
-        <p:blipFill>
-          <a:blip r:embed="rId4"/>
-          <a:stretch>
-            <a:fillRect/>
-          </a:stretch>
-        </p:blipFill>
-        <p:spPr>
-          <a:xfrm>
-            <a:off x="6680862" y="3805030"/>
-            <a:ext cx="1981199" cy="262128"/>
-          </a:xfrm>
-          <a:prstGeom prst="rect">
-            <a:avLst/>
-          </a:prstGeom>
-        </p:spPr>
-      </p:pic>
-      <p:pic>
-        <p:nvPicPr>
-          <p:cNvPr id="14" name="Picture 13" descr="52d05dcb8358be37.png"/>
-          <p:cNvPicPr>
-            <a:picLocks noChangeAspect="1"/>
-          </p:cNvPicPr>
-          <p:nvPr/>
-        </p:nvPicPr>
-        <p:blipFill>
-          <a:blip r:embed="rId5"/>
-          <a:stretch>
-            <a:fillRect/>
-          </a:stretch>
-        </p:blipFill>
-        <p:spPr>
-          <a:xfrm>
-            <a:off x="3557369" y="4310998"/>
-            <a:ext cx="2173224" cy="256032"/>
-          </a:xfrm>
-          <a:prstGeom prst="rect">
-            <a:avLst/>
-          </a:prstGeom>
-        </p:spPr>
-      </p:pic>
-      <p:sp>
-        <p:nvSpPr>
-          <p:cNvPr id="15" name="TextBox 14"/>
-          <p:cNvSpPr txBox="1"/>
-          <p:nvPr/>
-        </p:nvSpPr>
-        <p:spPr>
-          <a:xfrm>
-            <a:off x="777240" y="4781914"/>
-            <a:ext cx="10607040" cy="548640"/>
-          </a:xfrm>
-          <a:prstGeom prst="rect">
-            <a:avLst/>
-          </a:prstGeom>
-          <a:noFill/>
-        </p:spPr>
-        <p:txBody>
-          <a:bodyPr wrap="square" lIns="45720" rIns="45720" tIns="18288" bIns="18288" anchor="t">
-            <a:spAutoFit/>
-          </a:bodyPr>
-          <a:lstStyle/>
-          <a:p>
-            <a:pPr algn="ctr"/>
-            <a:r>
-              <a:rPr sz="3040" b="1" i="0">
-                <a:solidFill>
-                  <a:srgbClr val="9E1B32"/>
-                </a:solidFill>
-                <a:latin typeface="Lexend"/>
-              </a:rPr>
-              <a:t>Answer:   2 × 10</a:t>
-            </a:r>
-            <a:r>
-              <a:rPr sz="3040" b="1" i="0" baseline="30000">
-                <a:solidFill>
-                  <a:srgbClr val="9E1B32"/>
-                </a:solidFill>
-                <a:latin typeface="Lexend"/>
-              </a:rPr>
-              <a:t>5</a:t>
             </a:r>
           </a:p>
         </p:txBody>
@@ -3957,7 +3772,7 @@
                 </a:solidFill>
                 <a:latin typeface="Lexend"/>
               </a:rPr>
-              <a:t>Example 2</a:t>
+              <a:t>Your Turn</a:t>
             </a:r>
           </a:p>
         </p:txBody>
@@ -4139,7 +3954,7 @@
       </p:sp>
       <p:pic>
         <p:nvPicPr>
-          <p:cNvPr id="8" name="Picture 7" descr="99e2cda0670996ed.png"/>
+          <p:cNvPr id="8" name="Picture 7" descr="816312d3d4d78951.png"/>
           <p:cNvPicPr>
             <a:picLocks noChangeAspect="1"/>
           </p:cNvPicPr>
@@ -4153,8 +3968,8 @@
         </p:blipFill>
         <p:spPr>
           <a:xfrm>
-            <a:off x="4498848" y="2103120"/>
-            <a:ext cx="3163824" cy="868680"/>
+            <a:off x="4034027" y="1600200"/>
+            <a:ext cx="4093464" cy="512064"/>
           </a:xfrm>
           <a:prstGeom prst="rect">
             <a:avLst/>
@@ -4169,7 +3984,7 @@
         </p:nvSpPr>
         <p:spPr>
           <a:xfrm>
-            <a:off x="777240" y="3474720"/>
+            <a:off x="777240" y="2615184"/>
             <a:ext cx="10607040" cy="429370"/>
           </a:xfrm>
           <a:prstGeom prst="rect">
@@ -4191,7 +4006,193 @@
                 </a:solidFill>
                 <a:latin typeface="Lexend"/>
               </a:rPr>
-              <a:t>Evaluate. Write the answer in scientific notation.</a:t>
+              <a:t>Multiply. Write the answer in scientific notation.</a:t>
+            </a:r>
+          </a:p>
+        </p:txBody>
+      </p:sp>
+      <p:sp>
+        <p:nvSpPr>
+          <p:cNvPr id="10" name="TextBox 9"/>
+          <p:cNvSpPr txBox="1"/>
+          <p:nvPr/>
+        </p:nvSpPr>
+        <p:spPr>
+          <a:xfrm>
+            <a:off x="3502505" y="3204574"/>
+            <a:ext cx="3220349" cy="457200"/>
+          </a:xfrm>
+          <a:prstGeom prst="rect">
+            <a:avLst/>
+          </a:prstGeom>
+          <a:noFill/>
+        </p:spPr>
+        <p:txBody>
+          <a:bodyPr wrap="none" lIns="45720" rIns="45720" tIns="18288" bIns="18288" anchor="ctr">
+            <a:noAutofit/>
+          </a:bodyPr>
+          <a:lstStyle/>
+          <a:p>
+            <a:pPr algn="l"/>
+            <a:r>
+              <a:rPr sz="2330" b="0" i="0">
+                <a:solidFill>
+                  <a:srgbClr val="1A1A1A"/>
+                </a:solidFill>
+                <a:latin typeface="Lexend"/>
+              </a:rPr>
+              <a:t>Multiply the fronts:  </a:t>
+            </a:r>
+          </a:p>
+        </p:txBody>
+      </p:sp>
+      <p:pic>
+        <p:nvPicPr>
+          <p:cNvPr id="11" name="Picture 10" descr="04263b59ab134a8d.png"/>
+          <p:cNvPicPr>
+            <a:picLocks noChangeAspect="1"/>
+          </p:cNvPicPr>
+          <p:nvPr/>
+        </p:nvPicPr>
+        <p:blipFill>
+          <a:blip r:embed="rId3"/>
+          <a:stretch>
+            <a:fillRect/>
+          </a:stretch>
+        </p:blipFill>
+        <p:spPr>
+          <a:xfrm>
+            <a:off x="6585695" y="3326494"/>
+            <a:ext cx="1414272" cy="213360"/>
+          </a:xfrm>
+          <a:prstGeom prst="rect">
+            <a:avLst/>
+          </a:prstGeom>
+        </p:spPr>
+      </p:pic>
+      <p:sp>
+        <p:nvSpPr>
+          <p:cNvPr id="12" name="TextBox 11"/>
+          <p:cNvSpPr txBox="1"/>
+          <p:nvPr/>
+        </p:nvSpPr>
+        <p:spPr>
+          <a:xfrm>
+            <a:off x="3502505" y="3707494"/>
+            <a:ext cx="3315516" cy="457200"/>
+          </a:xfrm>
+          <a:prstGeom prst="rect">
+            <a:avLst/>
+          </a:prstGeom>
+          <a:noFill/>
+        </p:spPr>
+        <p:txBody>
+          <a:bodyPr wrap="none" lIns="45720" rIns="45720" tIns="18288" bIns="18288" anchor="ctr">
+            <a:noAutofit/>
+          </a:bodyPr>
+          <a:lstStyle/>
+          <a:p>
+            <a:pPr algn="l"/>
+            <a:r>
+              <a:rPr sz="2330" b="0" i="0">
+                <a:solidFill>
+                  <a:srgbClr val="1A1A1A"/>
+                </a:solidFill>
+                <a:latin typeface="Lexend"/>
+              </a:rPr>
+              <a:t>Add the exponents:  </a:t>
+            </a:r>
+          </a:p>
+        </p:txBody>
+      </p:sp>
+      <p:pic>
+        <p:nvPicPr>
+          <p:cNvPr id="13" name="Picture 12" descr="2e6e8e2b001e1a7e.png"/>
+          <p:cNvPicPr>
+            <a:picLocks noChangeAspect="1"/>
+          </p:cNvPicPr>
+          <p:nvPr/>
+        </p:nvPicPr>
+        <p:blipFill>
+          <a:blip r:embed="rId4"/>
+          <a:stretch>
+            <a:fillRect/>
+          </a:stretch>
+        </p:blipFill>
+        <p:spPr>
+          <a:xfrm>
+            <a:off x="6680862" y="3805030"/>
+            <a:ext cx="1981199" cy="262128"/>
+          </a:xfrm>
+          <a:prstGeom prst="rect">
+            <a:avLst/>
+          </a:prstGeom>
+        </p:spPr>
+      </p:pic>
+      <p:pic>
+        <p:nvPicPr>
+          <p:cNvPr id="14" name="Picture 13" descr="52d05dcb8358be37.png"/>
+          <p:cNvPicPr>
+            <a:picLocks noChangeAspect="1"/>
+          </p:cNvPicPr>
+          <p:nvPr/>
+        </p:nvPicPr>
+        <p:blipFill>
+          <a:blip r:embed="rId5"/>
+          <a:stretch>
+            <a:fillRect/>
+          </a:stretch>
+        </p:blipFill>
+        <p:spPr>
+          <a:xfrm>
+            <a:off x="3557369" y="4310998"/>
+            <a:ext cx="2173224" cy="256032"/>
+          </a:xfrm>
+          <a:prstGeom prst="rect">
+            <a:avLst/>
+          </a:prstGeom>
+        </p:spPr>
+      </p:pic>
+      <p:sp>
+        <p:nvSpPr>
+          <p:cNvPr id="15" name="TextBox 14"/>
+          <p:cNvSpPr txBox="1"/>
+          <p:nvPr/>
+        </p:nvSpPr>
+        <p:spPr>
+          <a:xfrm>
+            <a:off x="777240" y="4781914"/>
+            <a:ext cx="10607040" cy="548640"/>
+          </a:xfrm>
+          <a:prstGeom prst="rect">
+            <a:avLst/>
+          </a:prstGeom>
+          <a:noFill/>
+        </p:spPr>
+        <p:txBody>
+          <a:bodyPr wrap="square" lIns="45720" rIns="45720" tIns="18288" bIns="18288" anchor="t">
+            <a:spAutoFit/>
+          </a:bodyPr>
+          <a:lstStyle/>
+          <a:p>
+            <a:pPr algn="ctr"/>
+            <a:r>
+              <a:rPr sz="3040" b="1" i="0">
+                <a:solidFill>
+                  <a:srgbClr val="9E1B32"/>
+                </a:solidFill>
+                <a:latin typeface="Lexend"/>
+              </a:rPr>
+              <a:t>Answer:   2 × 10</a:t>
+            </a:r>
+            <a:r>
+              <a:rPr sz="3040" b="1" i="0" baseline="30000">
+                <a:solidFill>
+                  <a:srgbClr val="9E1B32"/>
+                </a:solidFill>
+                <a:latin typeface="Lexend"/>
+              </a:rPr>
+              <a:t>5</a:t>
             </a:r>
           </a:p>
         </p:txBody>
@@ -4426,7 +4427,7 @@
       </p:sp>
       <p:pic>
         <p:nvPicPr>
-          <p:cNvPr id="8" name="Picture 7" descr="e1f7b5cd77abb910.png"/>
+          <p:cNvPr id="8" name="Picture 7" descr="99e2cda0670996ed.png"/>
           <p:cNvPicPr>
             <a:picLocks noChangeAspect="1"/>
           </p:cNvPicPr>
@@ -4440,72 +4441,24 @@
         </p:blipFill>
         <p:spPr>
           <a:xfrm>
-            <a:off x="1828800" y="1920240"/>
-            <a:ext cx="4858512" cy="414528"/>
+            <a:off x="4498848" y="2103120"/>
+            <a:ext cx="3163824" cy="868680"/>
           </a:xfrm>
           <a:prstGeom prst="rect">
             <a:avLst/>
           </a:prstGeom>
         </p:spPr>
       </p:pic>
-      <p:pic>
-        <p:nvPicPr>
-          <p:cNvPr id="9" name="Picture 8" descr="cef6ad8a50815185.png"/>
-          <p:cNvPicPr>
-            <a:picLocks noChangeAspect="1"/>
-          </p:cNvPicPr>
-          <p:nvPr/>
-        </p:nvPicPr>
-        <p:blipFill>
-          <a:blip r:embed="rId3"/>
-          <a:stretch>
-            <a:fillRect/>
-          </a:stretch>
-        </p:blipFill>
-        <p:spPr>
-          <a:xfrm>
-            <a:off x="1828800" y="2609087"/>
-            <a:ext cx="3102864" cy="801624"/>
-          </a:xfrm>
-          <a:prstGeom prst="rect">
-            <a:avLst/>
-          </a:prstGeom>
-        </p:spPr>
-      </p:pic>
-      <p:pic>
-        <p:nvPicPr>
-          <p:cNvPr id="10" name="Picture 9" descr="06feb2f012fdd558.png"/>
-          <p:cNvPicPr>
-            <a:picLocks noChangeAspect="1"/>
-          </p:cNvPicPr>
-          <p:nvPr/>
-        </p:nvPicPr>
-        <p:blipFill>
-          <a:blip r:embed="rId4"/>
-          <a:stretch>
-            <a:fillRect/>
-          </a:stretch>
-        </p:blipFill>
-        <p:spPr>
-          <a:xfrm>
-            <a:off x="1828800" y="3685031"/>
-            <a:ext cx="3057144" cy="338328"/>
-          </a:xfrm>
-          <a:prstGeom prst="rect">
-            <a:avLst/>
-          </a:prstGeom>
-        </p:spPr>
-      </p:pic>
-      <p:sp>
-        <p:nvSpPr>
-          <p:cNvPr id="11" name="TextBox 10"/>
-          <p:cNvSpPr txBox="1"/>
-          <p:nvPr/>
-        </p:nvSpPr>
-        <p:spPr>
-          <a:xfrm>
-            <a:off x="777240" y="4572000"/>
-            <a:ext cx="10607040" cy="548640"/>
+      <p:sp>
+        <p:nvSpPr>
+          <p:cNvPr id="9" name="TextBox 8"/>
+          <p:cNvSpPr txBox="1"/>
+          <p:nvPr/>
+        </p:nvSpPr>
+        <p:spPr>
+          <a:xfrm>
+            <a:off x="777240" y="3474720"/>
+            <a:ext cx="10607040" cy="429370"/>
           </a:xfrm>
           <a:prstGeom prst="rect">
             <a:avLst/>
@@ -4520,22 +4473,13 @@
           <a:p>
             <a:pPr algn="ctr"/>
             <a:r>
-              <a:rPr sz="3040" b="1" i="0">
-                <a:solidFill>
-                  <a:srgbClr val="9E1B32"/>
-                </a:solidFill>
-                <a:latin typeface="Lexend"/>
-              </a:rPr>
-              <a:t>Answer:   1.2 × 10</a:t>
-            </a:r>
-            <a:r>
-              <a:rPr sz="3040" b="1" i="0" baseline="30000">
-                <a:solidFill>
-                  <a:srgbClr val="9E1B32"/>
-                </a:solidFill>
-                <a:latin typeface="Lexend"/>
-              </a:rPr>
-              <a:t>5</a:t>
+              <a:rPr sz="2280" b="1" i="0">
+                <a:solidFill>
+                  <a:srgbClr val="1A1A1A"/>
+                </a:solidFill>
+                <a:latin typeface="Lexend"/>
+              </a:rPr>
+              <a:t>Evaluate. Write the answer in scientific notation.</a:t>
             </a:r>
           </a:p>
         </p:txBody>
@@ -4588,7 +4532,7 @@
                 </a:solidFill>
                 <a:latin typeface="Lexend"/>
               </a:rPr>
-              <a:t>Your Turn</a:t>
+              <a:t>Example 2</a:t>
             </a:r>
           </a:p>
         </p:txBody>
@@ -4770,7 +4714,7 @@
       </p:sp>
       <p:pic>
         <p:nvPicPr>
-          <p:cNvPr id="8" name="Picture 7" descr="af033f99401fce50.png"/>
+          <p:cNvPr id="8" name="Picture 7" descr="e1f7b5cd77abb910.png"/>
           <p:cNvPicPr>
             <a:picLocks noChangeAspect="1"/>
           </p:cNvPicPr>
@@ -4784,24 +4728,72 @@
         </p:blipFill>
         <p:spPr>
           <a:xfrm>
-            <a:off x="4194047" y="1600200"/>
-            <a:ext cx="3773424" cy="1075944"/>
+            <a:off x="1828800" y="1920240"/>
+            <a:ext cx="4858512" cy="414528"/>
           </a:xfrm>
           <a:prstGeom prst="rect">
             <a:avLst/>
           </a:prstGeom>
         </p:spPr>
       </p:pic>
-      <p:sp>
-        <p:nvSpPr>
-          <p:cNvPr id="9" name="TextBox 8"/>
-          <p:cNvSpPr txBox="1"/>
-          <p:nvPr/>
-        </p:nvSpPr>
-        <p:spPr>
-          <a:xfrm>
-            <a:off x="777240" y="3179064"/>
-            <a:ext cx="10607040" cy="429370"/>
+      <p:pic>
+        <p:nvPicPr>
+          <p:cNvPr id="9" name="Picture 8" descr="cef6ad8a50815185.png"/>
+          <p:cNvPicPr>
+            <a:picLocks noChangeAspect="1"/>
+          </p:cNvPicPr>
+          <p:nvPr/>
+        </p:nvPicPr>
+        <p:blipFill>
+          <a:blip r:embed="rId3"/>
+          <a:stretch>
+            <a:fillRect/>
+          </a:stretch>
+        </p:blipFill>
+        <p:spPr>
+          <a:xfrm>
+            <a:off x="1828800" y="2609087"/>
+            <a:ext cx="3102864" cy="801624"/>
+          </a:xfrm>
+          <a:prstGeom prst="rect">
+            <a:avLst/>
+          </a:prstGeom>
+        </p:spPr>
+      </p:pic>
+      <p:pic>
+        <p:nvPicPr>
+          <p:cNvPr id="10" name="Picture 9" descr="06feb2f012fdd558.png"/>
+          <p:cNvPicPr>
+            <a:picLocks noChangeAspect="1"/>
+          </p:cNvPicPr>
+          <p:nvPr/>
+        </p:nvPicPr>
+        <p:blipFill>
+          <a:blip r:embed="rId4"/>
+          <a:stretch>
+            <a:fillRect/>
+          </a:stretch>
+        </p:blipFill>
+        <p:spPr>
+          <a:xfrm>
+            <a:off x="1828800" y="3685031"/>
+            <a:ext cx="3057144" cy="338328"/>
+          </a:xfrm>
+          <a:prstGeom prst="rect">
+            <a:avLst/>
+          </a:prstGeom>
+        </p:spPr>
+      </p:pic>
+      <p:sp>
+        <p:nvSpPr>
+          <p:cNvPr id="11" name="TextBox 10"/>
+          <p:cNvSpPr txBox="1"/>
+          <p:nvPr/>
+        </p:nvSpPr>
+        <p:spPr>
+          <a:xfrm>
+            <a:off x="777240" y="4572000"/>
+            <a:ext cx="10607040" cy="548640"/>
           </a:xfrm>
           <a:prstGeom prst="rect">
             <a:avLst/>
@@ -4816,13 +4808,22 @@
           <a:p>
             <a:pPr algn="ctr"/>
             <a:r>
-              <a:rPr sz="2280" b="1" i="0">
-                <a:solidFill>
-                  <a:srgbClr val="1A1A1A"/>
-                </a:solidFill>
-                <a:latin typeface="Lexend"/>
-              </a:rPr>
-              <a:t>Evaluate. Write the answer in scientific notation.</a:t>
+              <a:rPr sz="3040" b="1" i="0">
+                <a:solidFill>
+                  <a:srgbClr val="9E1B32"/>
+                </a:solidFill>
+                <a:latin typeface="Lexend"/>
+              </a:rPr>
+              <a:t>Answer:   1.2 × 10</a:t>
+            </a:r>
+            <a:r>
+              <a:rPr sz="3040" b="1" i="0" baseline="30000">
+                <a:solidFill>
+                  <a:srgbClr val="9E1B32"/>
+                </a:solidFill>
+                <a:latin typeface="Lexend"/>
+              </a:rPr>
+              <a:t>5</a:t>
             </a:r>
           </a:p>
         </p:txBody>
@@ -5057,7 +5058,7 @@
       </p:sp>
       <p:pic>
         <p:nvPicPr>
-          <p:cNvPr id="8" name="Picture 7" descr="6065c2d5f71d0c16.png"/>
+          <p:cNvPr id="8" name="Picture 7" descr="af033f99401fce50.png"/>
           <p:cNvPicPr>
             <a:picLocks noChangeAspect="1"/>
           </p:cNvPicPr>
@@ -5071,8 +5072,8 @@
         </p:blipFill>
         <p:spPr>
           <a:xfrm>
-            <a:off x="4197096" y="1600200"/>
-            <a:ext cx="3767328" cy="1075944"/>
+            <a:off x="4194047" y="1600200"/>
+            <a:ext cx="3773424" cy="1075944"/>
           </a:xfrm>
           <a:prstGeom prst="rect">
             <a:avLst/>
@@ -5110,310 +5111,6 @@
                 <a:latin typeface="Lexend"/>
               </a:rPr>
               <a:t>Evaluate. Write the answer in scientific notation.</a:t>
-            </a:r>
-          </a:p>
-        </p:txBody>
-      </p:sp>
-      <p:sp>
-        <p:nvSpPr>
-          <p:cNvPr id="10" name="TextBox 9"/>
-          <p:cNvSpPr txBox="1"/>
-          <p:nvPr/>
-        </p:nvSpPr>
-        <p:spPr>
-          <a:xfrm>
-            <a:off x="3234773" y="3768454"/>
-            <a:ext cx="996779" cy="457200"/>
-          </a:xfrm>
-          <a:prstGeom prst="rect">
-            <a:avLst/>
-          </a:prstGeom>
-          <a:noFill/>
-        </p:spPr>
-        <p:txBody>
-          <a:bodyPr wrap="none" lIns="45720" rIns="45720" tIns="18288" bIns="18288" anchor="ctr">
-            <a:noAutofit/>
-          </a:bodyPr>
-          <a:lstStyle/>
-          <a:p>
-            <a:pPr algn="l"/>
-            <a:r>
-              <a:rPr sz="2330" b="0" i="0">
-                <a:solidFill>
-                  <a:srgbClr val="1A1A1A"/>
-                </a:solidFill>
-                <a:latin typeface="Lexend"/>
-              </a:rPr>
-              <a:t>Top:  </a:t>
-            </a:r>
-          </a:p>
-        </p:txBody>
-      </p:sp>
-      <p:pic>
-        <p:nvPicPr>
-          <p:cNvPr id="11" name="Picture 10" descr="a056522f38be1085.png"/>
-          <p:cNvPicPr>
-            <a:picLocks noChangeAspect="1"/>
-          </p:cNvPicPr>
-          <p:nvPr/>
-        </p:nvPicPr>
-        <p:blipFill>
-          <a:blip r:embed="rId3"/>
-          <a:stretch>
-            <a:fillRect/>
-          </a:stretch>
-        </p:blipFill>
-        <p:spPr>
-          <a:xfrm>
-            <a:off x="4094393" y="3891898"/>
-            <a:ext cx="1203960" cy="210312"/>
-          </a:xfrm>
-          <a:prstGeom prst="rect">
-            <a:avLst/>
-          </a:prstGeom>
-        </p:spPr>
-      </p:pic>
-      <p:sp>
-        <p:nvSpPr>
-          <p:cNvPr id="12" name="TextBox 11"/>
-          <p:cNvSpPr txBox="1"/>
-          <p:nvPr/>
-        </p:nvSpPr>
-        <p:spPr>
-          <a:xfrm>
-            <a:off x="5298353" y="3768454"/>
-            <a:ext cx="1320048" cy="457200"/>
-          </a:xfrm>
-          <a:prstGeom prst="rect">
-            <a:avLst/>
-          </a:prstGeom>
-          <a:noFill/>
-        </p:spPr>
-        <p:txBody>
-          <a:bodyPr wrap="none" lIns="45720" rIns="45720" tIns="18288" bIns="18288" anchor="ctr">
-            <a:noAutofit/>
-          </a:bodyPr>
-          <a:lstStyle/>
-          <a:p>
-            <a:pPr algn="l"/>
-            <a:r>
-              <a:rPr sz="2330" b="0" i="0">
-                <a:solidFill>
-                  <a:srgbClr val="1A1A1A"/>
-                </a:solidFill>
-                <a:latin typeface="Lexend"/>
-              </a:rPr>
-              <a:t>   and   </a:t>
-            </a:r>
-          </a:p>
-        </p:txBody>
-      </p:sp>
-      <p:pic>
-        <p:nvPicPr>
-          <p:cNvPr id="13" name="Picture 12" descr="d07cb81e712af369.png"/>
-          <p:cNvPicPr>
-            <a:picLocks noChangeAspect="1"/>
-          </p:cNvPicPr>
-          <p:nvPr/>
-        </p:nvPicPr>
-        <p:blipFill>
-          <a:blip r:embed="rId4"/>
-          <a:stretch>
-            <a:fillRect/>
-          </a:stretch>
-        </p:blipFill>
-        <p:spPr>
-          <a:xfrm>
-            <a:off x="6481242" y="3865990"/>
-            <a:ext cx="1965960" cy="262128"/>
-          </a:xfrm>
-          <a:prstGeom prst="rect">
-            <a:avLst/>
-          </a:prstGeom>
-        </p:spPr>
-      </p:pic>
-      <p:sp>
-        <p:nvSpPr>
-          <p:cNvPr id="14" name="TextBox 13"/>
-          <p:cNvSpPr txBox="1"/>
-          <p:nvPr/>
-        </p:nvSpPr>
-        <p:spPr>
-          <a:xfrm>
-            <a:off x="3234773" y="4271374"/>
-            <a:ext cx="1427555" cy="457200"/>
-          </a:xfrm>
-          <a:prstGeom prst="rect">
-            <a:avLst/>
-          </a:prstGeom>
-          <a:noFill/>
-        </p:spPr>
-        <p:txBody>
-          <a:bodyPr wrap="none" lIns="45720" rIns="45720" tIns="18288" bIns="18288" anchor="ctr">
-            <a:noAutofit/>
-          </a:bodyPr>
-          <a:lstStyle/>
-          <a:p>
-            <a:pPr algn="l"/>
-            <a:r>
-              <a:rPr sz="2330" b="0" i="0">
-                <a:solidFill>
-                  <a:srgbClr val="1A1A1A"/>
-                </a:solidFill>
-                <a:latin typeface="Lexend"/>
-              </a:rPr>
-              <a:t>Divide:  </a:t>
-            </a:r>
-          </a:p>
-        </p:txBody>
-      </p:sp>
-      <p:pic>
-        <p:nvPicPr>
-          <p:cNvPr id="15" name="Picture 14" descr="5bba082eb9d24892.png"/>
-          <p:cNvPicPr>
-            <a:picLocks noChangeAspect="1"/>
-          </p:cNvPicPr>
-          <p:nvPr/>
-        </p:nvPicPr>
-        <p:blipFill>
-          <a:blip r:embed="rId5"/>
-          <a:stretch>
-            <a:fillRect/>
-          </a:stretch>
-        </p:blipFill>
-        <p:spPr>
-          <a:xfrm>
-            <a:off x="4525169" y="4393294"/>
-            <a:ext cx="1213104" cy="213360"/>
-          </a:xfrm>
-          <a:prstGeom prst="rect">
-            <a:avLst/>
-          </a:prstGeom>
-        </p:spPr>
-      </p:pic>
-      <p:sp>
-        <p:nvSpPr>
-          <p:cNvPr id="16" name="TextBox 15"/>
-          <p:cNvSpPr txBox="1"/>
-          <p:nvPr/>
-        </p:nvSpPr>
-        <p:spPr>
-          <a:xfrm>
-            <a:off x="5738273" y="4271374"/>
-            <a:ext cx="1320048" cy="457200"/>
-          </a:xfrm>
-          <a:prstGeom prst="rect">
-            <a:avLst/>
-          </a:prstGeom>
-          <a:noFill/>
-        </p:spPr>
-        <p:txBody>
-          <a:bodyPr wrap="none" lIns="45720" rIns="45720" tIns="18288" bIns="18288" anchor="ctr">
-            <a:noAutofit/>
-          </a:bodyPr>
-          <a:lstStyle/>
-          <a:p>
-            <a:pPr algn="l"/>
-            <a:r>
-              <a:rPr sz="2330" b="0" i="0">
-                <a:solidFill>
-                  <a:srgbClr val="1A1A1A"/>
-                </a:solidFill>
-                <a:latin typeface="Lexend"/>
-              </a:rPr>
-              <a:t>   and   </a:t>
-            </a:r>
-          </a:p>
-        </p:txBody>
-      </p:sp>
-      <p:pic>
-        <p:nvPicPr>
-          <p:cNvPr id="17" name="Picture 16" descr="256bb6140aa7aee4.png"/>
-          <p:cNvPicPr>
-            <a:picLocks noChangeAspect="1"/>
-          </p:cNvPicPr>
-          <p:nvPr/>
-        </p:nvPicPr>
-        <p:blipFill>
-          <a:blip r:embed="rId6"/>
-          <a:stretch>
-            <a:fillRect/>
-          </a:stretch>
-        </p:blipFill>
-        <p:spPr>
-          <a:xfrm>
-            <a:off x="6921162" y="4368910"/>
-            <a:ext cx="2011680" cy="262128"/>
-          </a:xfrm>
-          <a:prstGeom prst="rect">
-            <a:avLst/>
-          </a:prstGeom>
-        </p:spPr>
-      </p:pic>
-      <p:pic>
-        <p:nvPicPr>
-          <p:cNvPr id="18" name="Picture 17" descr="28b3729f21e06ae4.png"/>
-          <p:cNvPicPr>
-            <a:picLocks noChangeAspect="1"/>
-          </p:cNvPicPr>
-          <p:nvPr/>
-        </p:nvPicPr>
-        <p:blipFill>
-          <a:blip r:embed="rId7"/>
-          <a:stretch>
-            <a:fillRect/>
-          </a:stretch>
-        </p:blipFill>
-        <p:spPr>
-          <a:xfrm>
-            <a:off x="3289637" y="4871830"/>
-            <a:ext cx="957072" cy="262128"/>
-          </a:xfrm>
-          <a:prstGeom prst="rect">
-            <a:avLst/>
-          </a:prstGeom>
-        </p:spPr>
-      </p:pic>
-      <p:sp>
-        <p:nvSpPr>
-          <p:cNvPr id="19" name="TextBox 18"/>
-          <p:cNvSpPr txBox="1"/>
-          <p:nvPr/>
-        </p:nvSpPr>
-        <p:spPr>
-          <a:xfrm>
-            <a:off x="777240" y="5345794"/>
-            <a:ext cx="10607040" cy="548640"/>
-          </a:xfrm>
-          <a:prstGeom prst="rect">
-            <a:avLst/>
-          </a:prstGeom>
-          <a:noFill/>
-        </p:spPr>
-        <p:txBody>
-          <a:bodyPr wrap="square" lIns="45720" rIns="45720" tIns="18288" bIns="18288" anchor="t">
-            <a:spAutoFit/>
-          </a:bodyPr>
-          <a:lstStyle/>
-          <a:p>
-            <a:pPr algn="ctr"/>
-            <a:r>
-              <a:rPr sz="3040" b="1" i="0">
-                <a:solidFill>
-                  <a:srgbClr val="9E1B32"/>
-                </a:solidFill>
-                <a:latin typeface="Lexend"/>
-              </a:rPr>
-              <a:t>Answer:   3 × 10</a:t>
-            </a:r>
-            <a:r>
-              <a:rPr sz="3040" b="1" i="0" baseline="30000">
-                <a:solidFill>
-                  <a:srgbClr val="9E1B32"/>
-                </a:solidFill>
-                <a:latin typeface="Lexend"/>
-              </a:rPr>
-              <a:t>-2</a:t>
             </a:r>
           </a:p>
         </p:txBody>
@@ -5460,13 +5157,13 @@
           <a:p>
             <a:pPr algn="l"/>
             <a:r>
-              <a:rPr sz="3229" b="1" i="0">
+              <a:rPr sz="3420" b="1" i="0">
                 <a:solidFill>
                   <a:srgbClr val="1A1A1A"/>
                 </a:solidFill>
                 <a:latin typeface="Lexend"/>
               </a:rPr>
-              <a:t>Whiteboards   ·   Question 1 of 9</a:t>
+              <a:t>Your Turn</a:t>
             </a:r>
           </a:p>
         </p:txBody>
@@ -5648,7 +5345,7 @@
       </p:sp>
       <p:pic>
         <p:nvPicPr>
-          <p:cNvPr id="8" name="Picture 7" descr="71829a44e81d1062.png"/>
+          <p:cNvPr id="8" name="Picture 7" descr="6065c2d5f71d0c16.png"/>
           <p:cNvPicPr>
             <a:picLocks noChangeAspect="1"/>
           </p:cNvPicPr>
@@ -5662,8 +5359,8 @@
         </p:blipFill>
         <p:spPr>
           <a:xfrm>
-            <a:off x="4687823" y="2196083"/>
-            <a:ext cx="2785872" cy="408432"/>
+            <a:off x="4197096" y="1600200"/>
+            <a:ext cx="3767328" cy="1075944"/>
           </a:xfrm>
           <a:prstGeom prst="rect">
             <a:avLst/>
@@ -5678,8 +5375,8 @@
         </p:nvSpPr>
         <p:spPr>
           <a:xfrm>
-            <a:off x="777240" y="4343400"/>
-            <a:ext cx="10607040" cy="457200"/>
+            <a:off x="777240" y="3179064"/>
+            <a:ext cx="10607040" cy="429370"/>
           </a:xfrm>
           <a:prstGeom prst="rect">
             <a:avLst/>
@@ -5694,13 +5391,317 @@
           <a:p>
             <a:pPr algn="ctr"/>
             <a:r>
-              <a:rPr sz="2470" b="1" i="0">
+              <a:rPr sz="2280" b="1" i="0">
                 <a:solidFill>
                   <a:srgbClr val="1A1A1A"/>
                 </a:solidFill>
                 <a:latin typeface="Lexend"/>
               </a:rPr>
-              <a:t>Answer it.</a:t>
+              <a:t>Evaluate. Write the answer in scientific notation.</a:t>
+            </a:r>
+          </a:p>
+        </p:txBody>
+      </p:sp>
+      <p:sp>
+        <p:nvSpPr>
+          <p:cNvPr id="10" name="TextBox 9"/>
+          <p:cNvSpPr txBox="1"/>
+          <p:nvPr/>
+        </p:nvSpPr>
+        <p:spPr>
+          <a:xfrm>
+            <a:off x="3234773" y="3768454"/>
+            <a:ext cx="996779" cy="457200"/>
+          </a:xfrm>
+          <a:prstGeom prst="rect">
+            <a:avLst/>
+          </a:prstGeom>
+          <a:noFill/>
+        </p:spPr>
+        <p:txBody>
+          <a:bodyPr wrap="none" lIns="45720" rIns="45720" tIns="18288" bIns="18288" anchor="ctr">
+            <a:noAutofit/>
+          </a:bodyPr>
+          <a:lstStyle/>
+          <a:p>
+            <a:pPr algn="l"/>
+            <a:r>
+              <a:rPr sz="2330" b="0" i="0">
+                <a:solidFill>
+                  <a:srgbClr val="1A1A1A"/>
+                </a:solidFill>
+                <a:latin typeface="Lexend"/>
+              </a:rPr>
+              <a:t>Top:  </a:t>
+            </a:r>
+          </a:p>
+        </p:txBody>
+      </p:sp>
+      <p:pic>
+        <p:nvPicPr>
+          <p:cNvPr id="11" name="Picture 10" descr="a056522f38be1085.png"/>
+          <p:cNvPicPr>
+            <a:picLocks noChangeAspect="1"/>
+          </p:cNvPicPr>
+          <p:nvPr/>
+        </p:nvPicPr>
+        <p:blipFill>
+          <a:blip r:embed="rId3"/>
+          <a:stretch>
+            <a:fillRect/>
+          </a:stretch>
+        </p:blipFill>
+        <p:spPr>
+          <a:xfrm>
+            <a:off x="4094393" y="3891898"/>
+            <a:ext cx="1203960" cy="210312"/>
+          </a:xfrm>
+          <a:prstGeom prst="rect">
+            <a:avLst/>
+          </a:prstGeom>
+        </p:spPr>
+      </p:pic>
+      <p:sp>
+        <p:nvSpPr>
+          <p:cNvPr id="12" name="TextBox 11"/>
+          <p:cNvSpPr txBox="1"/>
+          <p:nvPr/>
+        </p:nvSpPr>
+        <p:spPr>
+          <a:xfrm>
+            <a:off x="5298353" y="3768454"/>
+            <a:ext cx="1320048" cy="457200"/>
+          </a:xfrm>
+          <a:prstGeom prst="rect">
+            <a:avLst/>
+          </a:prstGeom>
+          <a:noFill/>
+        </p:spPr>
+        <p:txBody>
+          <a:bodyPr wrap="none" lIns="45720" rIns="45720" tIns="18288" bIns="18288" anchor="ctr">
+            <a:noAutofit/>
+          </a:bodyPr>
+          <a:lstStyle/>
+          <a:p>
+            <a:pPr algn="l"/>
+            <a:r>
+              <a:rPr sz="2330" b="0" i="0">
+                <a:solidFill>
+                  <a:srgbClr val="1A1A1A"/>
+                </a:solidFill>
+                <a:latin typeface="Lexend"/>
+              </a:rPr>
+              <a:t>   and   </a:t>
+            </a:r>
+          </a:p>
+        </p:txBody>
+      </p:sp>
+      <p:pic>
+        <p:nvPicPr>
+          <p:cNvPr id="13" name="Picture 12" descr="d07cb81e712af369.png"/>
+          <p:cNvPicPr>
+            <a:picLocks noChangeAspect="1"/>
+          </p:cNvPicPr>
+          <p:nvPr/>
+        </p:nvPicPr>
+        <p:blipFill>
+          <a:blip r:embed="rId4"/>
+          <a:stretch>
+            <a:fillRect/>
+          </a:stretch>
+        </p:blipFill>
+        <p:spPr>
+          <a:xfrm>
+            <a:off x="6481242" y="3865990"/>
+            <a:ext cx="1965960" cy="262128"/>
+          </a:xfrm>
+          <a:prstGeom prst="rect">
+            <a:avLst/>
+          </a:prstGeom>
+        </p:spPr>
+      </p:pic>
+      <p:sp>
+        <p:nvSpPr>
+          <p:cNvPr id="14" name="TextBox 13"/>
+          <p:cNvSpPr txBox="1"/>
+          <p:nvPr/>
+        </p:nvSpPr>
+        <p:spPr>
+          <a:xfrm>
+            <a:off x="3234773" y="4271374"/>
+            <a:ext cx="1427555" cy="457200"/>
+          </a:xfrm>
+          <a:prstGeom prst="rect">
+            <a:avLst/>
+          </a:prstGeom>
+          <a:noFill/>
+        </p:spPr>
+        <p:txBody>
+          <a:bodyPr wrap="none" lIns="45720" rIns="45720" tIns="18288" bIns="18288" anchor="ctr">
+            <a:noAutofit/>
+          </a:bodyPr>
+          <a:lstStyle/>
+          <a:p>
+            <a:pPr algn="l"/>
+            <a:r>
+              <a:rPr sz="2330" b="0" i="0">
+                <a:solidFill>
+                  <a:srgbClr val="1A1A1A"/>
+                </a:solidFill>
+                <a:latin typeface="Lexend"/>
+              </a:rPr>
+              <a:t>Divide:  </a:t>
+            </a:r>
+          </a:p>
+        </p:txBody>
+      </p:sp>
+      <p:pic>
+        <p:nvPicPr>
+          <p:cNvPr id="15" name="Picture 14" descr="5bba082eb9d24892.png"/>
+          <p:cNvPicPr>
+            <a:picLocks noChangeAspect="1"/>
+          </p:cNvPicPr>
+          <p:nvPr/>
+        </p:nvPicPr>
+        <p:blipFill>
+          <a:blip r:embed="rId5"/>
+          <a:stretch>
+            <a:fillRect/>
+          </a:stretch>
+        </p:blipFill>
+        <p:spPr>
+          <a:xfrm>
+            <a:off x="4525169" y="4393294"/>
+            <a:ext cx="1213104" cy="213360"/>
+          </a:xfrm>
+          <a:prstGeom prst="rect">
+            <a:avLst/>
+          </a:prstGeom>
+        </p:spPr>
+      </p:pic>
+      <p:sp>
+        <p:nvSpPr>
+          <p:cNvPr id="16" name="TextBox 15"/>
+          <p:cNvSpPr txBox="1"/>
+          <p:nvPr/>
+        </p:nvSpPr>
+        <p:spPr>
+          <a:xfrm>
+            <a:off x="5738273" y="4271374"/>
+            <a:ext cx="1320048" cy="457200"/>
+          </a:xfrm>
+          <a:prstGeom prst="rect">
+            <a:avLst/>
+          </a:prstGeom>
+          <a:noFill/>
+        </p:spPr>
+        <p:txBody>
+          <a:bodyPr wrap="none" lIns="45720" rIns="45720" tIns="18288" bIns="18288" anchor="ctr">
+            <a:noAutofit/>
+          </a:bodyPr>
+          <a:lstStyle/>
+          <a:p>
+            <a:pPr algn="l"/>
+            <a:r>
+              <a:rPr sz="2330" b="0" i="0">
+                <a:solidFill>
+                  <a:srgbClr val="1A1A1A"/>
+                </a:solidFill>
+                <a:latin typeface="Lexend"/>
+              </a:rPr>
+              <a:t>   and   </a:t>
+            </a:r>
+          </a:p>
+        </p:txBody>
+      </p:sp>
+      <p:pic>
+        <p:nvPicPr>
+          <p:cNvPr id="17" name="Picture 16" descr="256bb6140aa7aee4.png"/>
+          <p:cNvPicPr>
+            <a:picLocks noChangeAspect="1"/>
+          </p:cNvPicPr>
+          <p:nvPr/>
+        </p:nvPicPr>
+        <p:blipFill>
+          <a:blip r:embed="rId6"/>
+          <a:stretch>
+            <a:fillRect/>
+          </a:stretch>
+        </p:blipFill>
+        <p:spPr>
+          <a:xfrm>
+            <a:off x="6921162" y="4368910"/>
+            <a:ext cx="2011680" cy="262128"/>
+          </a:xfrm>
+          <a:prstGeom prst="rect">
+            <a:avLst/>
+          </a:prstGeom>
+        </p:spPr>
+      </p:pic>
+      <p:pic>
+        <p:nvPicPr>
+          <p:cNvPr id="18" name="Picture 17" descr="28b3729f21e06ae4.png"/>
+          <p:cNvPicPr>
+            <a:picLocks noChangeAspect="1"/>
+          </p:cNvPicPr>
+          <p:nvPr/>
+        </p:nvPicPr>
+        <p:blipFill>
+          <a:blip r:embed="rId7"/>
+          <a:stretch>
+            <a:fillRect/>
+          </a:stretch>
+        </p:blipFill>
+        <p:spPr>
+          <a:xfrm>
+            <a:off x="3289637" y="4871830"/>
+            <a:ext cx="957072" cy="262128"/>
+          </a:xfrm>
+          <a:prstGeom prst="rect">
+            <a:avLst/>
+          </a:prstGeom>
+        </p:spPr>
+      </p:pic>
+      <p:sp>
+        <p:nvSpPr>
+          <p:cNvPr id="19" name="TextBox 18"/>
+          <p:cNvSpPr txBox="1"/>
+          <p:nvPr/>
+        </p:nvSpPr>
+        <p:spPr>
+          <a:xfrm>
+            <a:off x="777240" y="5345794"/>
+            <a:ext cx="10607040" cy="548640"/>
+          </a:xfrm>
+          <a:prstGeom prst="rect">
+            <a:avLst/>
+          </a:prstGeom>
+          <a:noFill/>
+        </p:spPr>
+        <p:txBody>
+          <a:bodyPr wrap="square" lIns="45720" rIns="45720" tIns="18288" bIns="18288" anchor="t">
+            <a:spAutoFit/>
+          </a:bodyPr>
+          <a:lstStyle/>
+          <a:p>
+            <a:pPr algn="ctr"/>
+            <a:r>
+              <a:rPr sz="3040" b="1" i="0">
+                <a:solidFill>
+                  <a:srgbClr val="9E1B32"/>
+                </a:solidFill>
+                <a:latin typeface="Lexend"/>
+              </a:rPr>
+              <a:t>Answer:   3 × 10</a:t>
+            </a:r>
+            <a:r>
+              <a:rPr sz="3040" b="1" i="0" baseline="30000">
+                <a:solidFill>
+                  <a:srgbClr val="9E1B32"/>
+                </a:solidFill>
+                <a:latin typeface="Lexend"/>
+              </a:rPr>
+              <a:t>-2</a:t>
             </a:r>
           </a:p>
         </p:txBody>
@@ -5935,7 +5936,7 @@
       </p:sp>
       <p:pic>
         <p:nvPicPr>
-          <p:cNvPr id="8" name="Picture 7" descr="9a64fed63dd04098.png"/>
+          <p:cNvPr id="8" name="Picture 7" descr="71829a44e81d1062.png"/>
           <p:cNvPicPr>
             <a:picLocks noChangeAspect="1"/>
           </p:cNvPicPr>
@@ -5949,8 +5950,8 @@
         </p:blipFill>
         <p:spPr>
           <a:xfrm>
-            <a:off x="4686300" y="2103120"/>
-            <a:ext cx="2788920" cy="414528"/>
+            <a:off x="4687823" y="2196083"/>
+            <a:ext cx="2785872" cy="408432"/>
           </a:xfrm>
           <a:prstGeom prst="rect">
             <a:avLst/>
@@ -5965,150 +5966,8 @@
         </p:nvSpPr>
         <p:spPr>
           <a:xfrm>
-            <a:off x="3523841" y="2842259"/>
-            <a:ext cx="3220349" cy="457200"/>
-          </a:xfrm>
-          <a:prstGeom prst="rect">
-            <a:avLst/>
-          </a:prstGeom>
-          <a:noFill/>
-        </p:spPr>
-        <p:txBody>
-          <a:bodyPr wrap="none" lIns="45720" rIns="45720" tIns="18288" bIns="18288" anchor="ctr">
-            <a:noAutofit/>
-          </a:bodyPr>
-          <a:lstStyle/>
-          <a:p>
-            <a:pPr algn="l"/>
-            <a:r>
-              <a:rPr sz="2330" b="0" i="0">
-                <a:solidFill>
-                  <a:srgbClr val="1A1A1A"/>
-                </a:solidFill>
-                <a:latin typeface="Lexend"/>
-              </a:rPr>
-              <a:t>Multiply the fronts:  </a:t>
-            </a:r>
-          </a:p>
-        </p:txBody>
-      </p:sp>
-      <p:pic>
-        <p:nvPicPr>
-          <p:cNvPr id="10" name="Picture 9" descr="515cb46100c89924.png"/>
-          <p:cNvPicPr>
-            <a:picLocks noChangeAspect="1"/>
-          </p:cNvPicPr>
-          <p:nvPr/>
-        </p:nvPicPr>
-        <p:blipFill>
-          <a:blip r:embed="rId3"/>
-          <a:stretch>
-            <a:fillRect/>
-          </a:stretch>
-        </p:blipFill>
-        <p:spPr>
-          <a:xfrm>
-            <a:off x="6607031" y="2964179"/>
-            <a:ext cx="987552" cy="213360"/>
-          </a:xfrm>
-          <a:prstGeom prst="rect">
-            <a:avLst/>
-          </a:prstGeom>
-        </p:spPr>
-      </p:pic>
-      <p:sp>
-        <p:nvSpPr>
-          <p:cNvPr id="11" name="TextBox 10"/>
-          <p:cNvSpPr txBox="1"/>
-          <p:nvPr/>
-        </p:nvSpPr>
-        <p:spPr>
-          <a:xfrm>
-            <a:off x="3523841" y="3345179"/>
-            <a:ext cx="3315516" cy="457200"/>
-          </a:xfrm>
-          <a:prstGeom prst="rect">
-            <a:avLst/>
-          </a:prstGeom>
-          <a:noFill/>
-        </p:spPr>
-        <p:txBody>
-          <a:bodyPr wrap="none" lIns="45720" rIns="45720" tIns="18288" bIns="18288" anchor="ctr">
-            <a:noAutofit/>
-          </a:bodyPr>
-          <a:lstStyle/>
-          <a:p>
-            <a:pPr algn="l"/>
-            <a:r>
-              <a:rPr sz="2330" b="0" i="0">
-                <a:solidFill>
-                  <a:srgbClr val="1A1A1A"/>
-                </a:solidFill>
-                <a:latin typeface="Lexend"/>
-              </a:rPr>
-              <a:t>Add the exponents:  </a:t>
-            </a:r>
-          </a:p>
-        </p:txBody>
-      </p:sp>
-      <p:pic>
-        <p:nvPicPr>
-          <p:cNvPr id="12" name="Picture 11" descr="b08638df285abcbf.png"/>
-          <p:cNvPicPr>
-            <a:picLocks noChangeAspect="1"/>
-          </p:cNvPicPr>
-          <p:nvPr/>
-        </p:nvPicPr>
-        <p:blipFill>
-          <a:blip r:embed="rId4"/>
-          <a:stretch>
-            <a:fillRect/>
-          </a:stretch>
-        </p:blipFill>
-        <p:spPr>
-          <a:xfrm>
-            <a:off x="6702198" y="3442715"/>
-            <a:ext cx="1941576" cy="262128"/>
-          </a:xfrm>
-          <a:prstGeom prst="rect">
-            <a:avLst/>
-          </a:prstGeom>
-        </p:spPr>
-      </p:pic>
-      <p:pic>
-        <p:nvPicPr>
-          <p:cNvPr id="13" name="Picture 12" descr="f2052183a017b136.png"/>
-          <p:cNvPicPr>
-            <a:picLocks noChangeAspect="1"/>
-          </p:cNvPicPr>
-          <p:nvPr/>
-        </p:nvPicPr>
-        <p:blipFill>
-          <a:blip r:embed="rId5"/>
-          <a:stretch>
-            <a:fillRect/>
-          </a:stretch>
-        </p:blipFill>
-        <p:spPr>
-          <a:xfrm>
-            <a:off x="3578705" y="3945635"/>
-            <a:ext cx="932688" cy="262128"/>
-          </a:xfrm>
-          <a:prstGeom prst="rect">
-            <a:avLst/>
-          </a:prstGeom>
-        </p:spPr>
-      </p:pic>
-      <p:sp>
-        <p:nvSpPr>
-          <p:cNvPr id="14" name="TextBox 13"/>
-          <p:cNvSpPr txBox="1"/>
-          <p:nvPr/>
-        </p:nvSpPr>
-        <p:spPr>
-          <a:xfrm>
-            <a:off x="777240" y="4663440"/>
-            <a:ext cx="10607040" cy="548640"/>
+            <a:off x="777240" y="4343400"/>
+            <a:ext cx="10607040" cy="457200"/>
           </a:xfrm>
           <a:prstGeom prst="rect">
             <a:avLst/>
@@ -6123,22 +5982,13 @@
           <a:p>
             <a:pPr algn="ctr"/>
             <a:r>
-              <a:rPr sz="3040" b="1" i="0">
-                <a:solidFill>
-                  <a:srgbClr val="9E1B32"/>
-                </a:solidFill>
-                <a:latin typeface="Lexend"/>
-              </a:rPr>
-              <a:t>Answer:   9 × 10</a:t>
-            </a:r>
-            <a:r>
-              <a:rPr sz="3040" b="1" i="0" baseline="30000">
-                <a:solidFill>
-                  <a:srgbClr val="9E1B32"/>
-                </a:solidFill>
-                <a:latin typeface="Lexend"/>
-              </a:rPr>
-              <a:t>11</a:t>
+              <a:rPr sz="2470" b="1" i="0">
+                <a:solidFill>
+                  <a:srgbClr val="1A1A1A"/>
+                </a:solidFill>
+                <a:latin typeface="Lexend"/>
+              </a:rPr>
+              <a:t>Answer it.</a:t>
             </a:r>
           </a:p>
         </p:txBody>
@@ -6191,7 +6041,7 @@
                 </a:solidFill>
                 <a:latin typeface="Lexend"/>
               </a:rPr>
-              <a:t>Whiteboards   ·   Question 2 of 9</a:t>
+              <a:t>Whiteboards   ·   Question 1 of 9</a:t>
             </a:r>
           </a:p>
         </p:txBody>
@@ -6371,44 +6221,9 @@
           </a:p>
         </p:txBody>
       </p:sp>
-      <p:sp>
-        <p:nvSpPr>
-          <p:cNvPr id="8" name="TextBox 7"/>
-          <p:cNvSpPr txBox="1"/>
-          <p:nvPr/>
-        </p:nvSpPr>
-        <p:spPr>
-          <a:xfrm>
-            <a:off x="1234440" y="1851660"/>
-            <a:ext cx="2745511" cy="457200"/>
-          </a:xfrm>
-          <a:prstGeom prst="rect">
-            <a:avLst/>
-          </a:prstGeom>
-          <a:noFill/>
-        </p:spPr>
-        <p:txBody>
-          <a:bodyPr wrap="none" lIns="45720" rIns="45720" tIns="18288" bIns="18288" anchor="ctr">
-            <a:noAutofit/>
-          </a:bodyPr>
-          <a:lstStyle/>
-          <a:p>
-            <a:pPr algn="l"/>
-            <a:r>
-              <a:rPr sz="2280" b="0" i="0">
-                <a:solidFill>
-                  <a:srgbClr val="1A1A1A"/>
-                </a:solidFill>
-                <a:latin typeface="Lexend"/>
-              </a:rPr>
-              <a:t>A printer makes  </a:t>
-            </a:r>
-          </a:p>
-        </p:txBody>
-      </p:sp>
       <p:pic>
         <p:nvPicPr>
-          <p:cNvPr id="9" name="Picture 8" descr="63d362095a3f347d.png"/>
+          <p:cNvPr id="8" name="Picture 7" descr="9a64fed63dd04098.png"/>
           <p:cNvPicPr>
             <a:picLocks noChangeAspect="1"/>
           </p:cNvPicPr>
@@ -6422,8 +6237,8 @@
         </p:blipFill>
         <p:spPr>
           <a:xfrm>
-            <a:off x="3842791" y="1944623"/>
-            <a:ext cx="911352" cy="271272"/>
+            <a:off x="4686300" y="2103120"/>
+            <a:ext cx="2788920" cy="414528"/>
           </a:xfrm>
           <a:prstGeom prst="rect">
             <a:avLst/>
@@ -6432,14 +6247,14 @@
       </p:pic>
       <p:sp>
         <p:nvSpPr>
-          <p:cNvPr id="10" name="TextBox 9"/>
-          <p:cNvSpPr txBox="1"/>
-          <p:nvPr/>
-        </p:nvSpPr>
-        <p:spPr>
-          <a:xfrm>
-            <a:off x="4754143" y="1851660"/>
-            <a:ext cx="2725928" cy="457200"/>
+          <p:cNvPr id="9" name="TextBox 8"/>
+          <p:cNvSpPr txBox="1"/>
+          <p:nvPr/>
+        </p:nvSpPr>
+        <p:spPr>
+          <a:xfrm>
+            <a:off x="3523841" y="2842259"/>
+            <a:ext cx="3220349" cy="457200"/>
           </a:xfrm>
           <a:prstGeom prst="rect">
             <a:avLst/>
@@ -6454,55 +6269,20 @@
           <a:p>
             <a:pPr algn="l"/>
             <a:r>
-              <a:rPr sz="2280" b="0" i="0">
+              <a:rPr sz="2330" b="0" i="0">
                 <a:solidFill>
                   <a:srgbClr val="1A1A1A"/>
                 </a:solidFill>
                 <a:latin typeface="Lexend"/>
               </a:rPr>
-              <a:t>  copies per hour.</a:t>
-            </a:r>
-          </a:p>
-        </p:txBody>
-      </p:sp>
-      <p:sp>
-        <p:nvSpPr>
-          <p:cNvPr id="11" name="TextBox 10"/>
-          <p:cNvSpPr txBox="1"/>
-          <p:nvPr/>
-        </p:nvSpPr>
-        <p:spPr>
-          <a:xfrm>
-            <a:off x="1234440" y="2464308"/>
-            <a:ext cx="1884608" cy="457200"/>
-          </a:xfrm>
-          <a:prstGeom prst="rect">
-            <a:avLst/>
-          </a:prstGeom>
-          <a:noFill/>
-        </p:spPr>
-        <p:txBody>
-          <a:bodyPr wrap="none" lIns="45720" rIns="45720" tIns="18288" bIns="18288" anchor="ctr">
-            <a:noAutofit/>
-          </a:bodyPr>
-          <a:lstStyle/>
-          <a:p>
-            <a:pPr algn="l"/>
-            <a:r>
-              <a:rPr sz="2280" b="0" i="0">
-                <a:solidFill>
-                  <a:srgbClr val="1A1A1A"/>
-                </a:solidFill>
-                <a:latin typeface="Lexend"/>
-              </a:rPr>
-              <a:t>It runs for  </a:t>
+              <a:t>Multiply the fronts:  </a:t>
             </a:r>
           </a:p>
         </p:txBody>
       </p:sp>
       <p:pic>
         <p:nvPicPr>
-          <p:cNvPr id="12" name="Picture 11" descr="9fc66bb1f34c491c.png"/>
+          <p:cNvPr id="10" name="Picture 9" descr="515cb46100c89924.png"/>
           <p:cNvPicPr>
             <a:picLocks noChangeAspect="1"/>
           </p:cNvPicPr>
@@ -6516,8 +6296,8 @@
         </p:blipFill>
         <p:spPr>
           <a:xfrm>
-            <a:off x="2981888" y="2554224"/>
-            <a:ext cx="1136904" cy="277368"/>
+            <a:off x="6607031" y="2964179"/>
+            <a:ext cx="987552" cy="213360"/>
           </a:xfrm>
           <a:prstGeom prst="rect">
             <a:avLst/>
@@ -6526,14 +6306,14 @@
       </p:pic>
       <p:sp>
         <p:nvSpPr>
-          <p:cNvPr id="13" name="TextBox 12"/>
-          <p:cNvSpPr txBox="1"/>
-          <p:nvPr/>
-        </p:nvSpPr>
-        <p:spPr>
-          <a:xfrm>
-            <a:off x="4118792" y="2464308"/>
-            <a:ext cx="5481137" cy="457200"/>
+          <p:cNvPr id="11" name="TextBox 10"/>
+          <p:cNvSpPr txBox="1"/>
+          <p:nvPr/>
+        </p:nvSpPr>
+        <p:spPr>
+          <a:xfrm>
+            <a:off x="3523841" y="3345179"/>
+            <a:ext cx="3315516" cy="457200"/>
           </a:xfrm>
           <a:prstGeom prst="rect">
             <a:avLst/>
@@ -6548,17 +6328,65 @@
           <a:p>
             <a:pPr algn="l"/>
             <a:r>
-              <a:rPr sz="2280" b="0" i="0">
+              <a:rPr sz="2330" b="0" i="0">
                 <a:solidFill>
                   <a:srgbClr val="1A1A1A"/>
                 </a:solidFill>
                 <a:latin typeface="Lexend"/>
               </a:rPr>
-              <a:t>  hours. Paper costs 3 cents a sheet.</a:t>
-            </a:r>
-          </a:p>
-        </p:txBody>
-      </p:sp>
+              <a:t>Add the exponents:  </a:t>
+            </a:r>
+          </a:p>
+        </p:txBody>
+      </p:sp>
+      <p:pic>
+        <p:nvPicPr>
+          <p:cNvPr id="12" name="Picture 11" descr="b08638df285abcbf.png"/>
+          <p:cNvPicPr>
+            <a:picLocks noChangeAspect="1"/>
+          </p:cNvPicPr>
+          <p:nvPr/>
+        </p:nvPicPr>
+        <p:blipFill>
+          <a:blip r:embed="rId4"/>
+          <a:stretch>
+            <a:fillRect/>
+          </a:stretch>
+        </p:blipFill>
+        <p:spPr>
+          <a:xfrm>
+            <a:off x="6702198" y="3442715"/>
+            <a:ext cx="1941576" cy="262128"/>
+          </a:xfrm>
+          <a:prstGeom prst="rect">
+            <a:avLst/>
+          </a:prstGeom>
+        </p:spPr>
+      </p:pic>
+      <p:pic>
+        <p:nvPicPr>
+          <p:cNvPr id="13" name="Picture 12" descr="f2052183a017b136.png"/>
+          <p:cNvPicPr>
+            <a:picLocks noChangeAspect="1"/>
+          </p:cNvPicPr>
+          <p:nvPr/>
+        </p:nvPicPr>
+        <p:blipFill>
+          <a:blip r:embed="rId5"/>
+          <a:stretch>
+            <a:fillRect/>
+          </a:stretch>
+        </p:blipFill>
+        <p:spPr>
+          <a:xfrm>
+            <a:off x="3578705" y="3945635"/>
+            <a:ext cx="932688" cy="262128"/>
+          </a:xfrm>
+          <a:prstGeom prst="rect">
+            <a:avLst/>
+          </a:prstGeom>
+        </p:spPr>
+      </p:pic>
       <p:sp>
         <p:nvSpPr>
           <p:cNvPr id="14" name="TextBox 13"/>
@@ -6567,8 +6395,8 @@
         </p:nvSpPr>
         <p:spPr>
           <a:xfrm>
-            <a:off x="1234440" y="3099816"/>
-            <a:ext cx="10058400" cy="429370"/>
+            <a:off x="777240" y="4663440"/>
+            <a:ext cx="10607040" cy="548640"/>
           </a:xfrm>
           <a:prstGeom prst="rect">
             <a:avLst/>
@@ -6581,50 +6409,24 @@
           </a:bodyPr>
           <a:lstStyle/>
           <a:p>
-            <a:pPr algn="l"/>
-            <a:r>
-              <a:rPr sz="2280" b="1" i="0">
-                <a:solidFill>
-                  <a:srgbClr val="1A1A1A"/>
-                </a:solidFill>
-                <a:latin typeface="Lexend"/>
-              </a:rPr>
-              <a:t>How many copies does it make?</a:t>
-            </a:r>
-          </a:p>
-        </p:txBody>
-      </p:sp>
-      <p:sp>
-        <p:nvSpPr>
-          <p:cNvPr id="15" name="TextBox 14"/>
-          <p:cNvSpPr txBox="1"/>
-          <p:nvPr/>
-        </p:nvSpPr>
-        <p:spPr>
-          <a:xfrm>
-            <a:off x="777240" y="4343400"/>
-            <a:ext cx="10607040" cy="457200"/>
-          </a:xfrm>
-          <a:prstGeom prst="rect">
-            <a:avLst/>
-          </a:prstGeom>
-          <a:noFill/>
-        </p:spPr>
-        <p:txBody>
-          <a:bodyPr wrap="square" lIns="45720" rIns="45720" tIns="18288" bIns="18288" anchor="t">
-            <a:spAutoFit/>
-          </a:bodyPr>
-          <a:lstStyle/>
-          <a:p>
             <a:pPr algn="ctr"/>
             <a:r>
-              <a:rPr sz="2470" b="1" i="0">
-                <a:solidFill>
-                  <a:srgbClr val="1A1A1A"/>
-                </a:solidFill>
-                <a:latin typeface="Lexend"/>
-              </a:rPr>
-              <a:t>Answer it.</a:t>
+              <a:rPr sz="3040" b="1" i="0">
+                <a:solidFill>
+                  <a:srgbClr val="9E1B32"/>
+                </a:solidFill>
+                <a:latin typeface="Lexend"/>
+              </a:rPr>
+              <a:t>Answer:   9 × 10</a:t>
+            </a:r>
+            <a:r>
+              <a:rPr sz="3040" b="1" i="0" baseline="30000">
+                <a:solidFill>
+                  <a:srgbClr val="9E1B32"/>
+                </a:solidFill>
+                <a:latin typeface="Lexend"/>
+              </a:rPr>
+              <a:t>11</a:t>
             </a:r>
           </a:p>
         </p:txBody>
@@ -6894,7 +6696,7 @@
       </p:sp>
       <p:pic>
         <p:nvPicPr>
-          <p:cNvPr id="9" name="Picture 8" descr="e21453500b587993.png"/>
+          <p:cNvPr id="9" name="Picture 8" descr="63d362095a3f347d.png"/>
           <p:cNvPicPr>
             <a:picLocks noChangeAspect="1"/>
           </p:cNvPicPr>
@@ -6909,7 +6711,7 @@
         <p:spPr>
           <a:xfrm>
             <a:off x="3842791" y="1944623"/>
-            <a:ext cx="914400" cy="271272"/>
+            <a:ext cx="911352" cy="271272"/>
           </a:xfrm>
           <a:prstGeom prst="rect">
             <a:avLst/>
@@ -6924,7 +6726,7 @@
         </p:nvSpPr>
         <p:spPr>
           <a:xfrm>
-            <a:off x="4757191" y="1851660"/>
+            <a:off x="4754143" y="1851660"/>
             <a:ext cx="2725928" cy="457200"/>
           </a:xfrm>
           <a:prstGeom prst="rect">
@@ -6988,7 +6790,7 @@
       </p:sp>
       <p:pic>
         <p:nvPicPr>
-          <p:cNvPr id="12" name="Picture 11" descr="dcfe01e2266e7d45.png"/>
+          <p:cNvPr id="12" name="Picture 11" descr="9fc66bb1f34c491c.png"/>
           <p:cNvPicPr>
             <a:picLocks noChangeAspect="1"/>
           </p:cNvPicPr>
@@ -7003,7 +6805,7 @@
         <p:spPr>
           <a:xfrm>
             <a:off x="2981888" y="2554224"/>
-            <a:ext cx="1143000" cy="277368"/>
+            <a:ext cx="1136904" cy="277368"/>
           </a:xfrm>
           <a:prstGeom prst="rect">
             <a:avLst/>
@@ -7018,7 +6820,7 @@
         </p:nvSpPr>
         <p:spPr>
           <a:xfrm>
-            <a:off x="4124888" y="2464308"/>
+            <a:off x="4118792" y="2464308"/>
             <a:ext cx="5481137" cy="457200"/>
           </a:xfrm>
           <a:prstGeom prst="rect">
@@ -7088,150 +6890,8 @@
         </p:nvSpPr>
         <p:spPr>
           <a:xfrm>
-            <a:off x="3572609" y="3734926"/>
-            <a:ext cx="3220349" cy="457200"/>
-          </a:xfrm>
-          <a:prstGeom prst="rect">
-            <a:avLst/>
-          </a:prstGeom>
-          <a:noFill/>
-        </p:spPr>
-        <p:txBody>
-          <a:bodyPr wrap="none" lIns="45720" rIns="45720" tIns="18288" bIns="18288" anchor="ctr">
-            <a:noAutofit/>
-          </a:bodyPr>
-          <a:lstStyle/>
-          <a:p>
-            <a:pPr algn="l"/>
-            <a:r>
-              <a:rPr sz="2330" b="0" i="0">
-                <a:solidFill>
-                  <a:srgbClr val="1A1A1A"/>
-                </a:solidFill>
-                <a:latin typeface="Lexend"/>
-              </a:rPr>
-              <a:t>Multiply the fronts:  </a:t>
-            </a:r>
-          </a:p>
-        </p:txBody>
-      </p:sp>
-      <p:pic>
-        <p:nvPicPr>
-          <p:cNvPr id="16" name="Picture 15" descr="4841b499496deb7b.png"/>
-          <p:cNvPicPr>
-            <a:picLocks noChangeAspect="1"/>
-          </p:cNvPicPr>
-          <p:nvPr/>
-        </p:nvPicPr>
-        <p:blipFill>
-          <a:blip r:embed="rId4"/>
-          <a:stretch>
-            <a:fillRect/>
-          </a:stretch>
-        </p:blipFill>
-        <p:spPr>
-          <a:xfrm>
-            <a:off x="6655799" y="3856846"/>
-            <a:ext cx="1417320" cy="213360"/>
-          </a:xfrm>
-          <a:prstGeom prst="rect">
-            <a:avLst/>
-          </a:prstGeom>
-        </p:spPr>
-      </p:pic>
-      <p:sp>
-        <p:nvSpPr>
-          <p:cNvPr id="17" name="TextBox 16"/>
-          <p:cNvSpPr txBox="1"/>
-          <p:nvPr/>
-        </p:nvSpPr>
-        <p:spPr>
-          <a:xfrm>
-            <a:off x="3572609" y="4237846"/>
-            <a:ext cx="3315516" cy="457200"/>
-          </a:xfrm>
-          <a:prstGeom prst="rect">
-            <a:avLst/>
-          </a:prstGeom>
-          <a:noFill/>
-        </p:spPr>
-        <p:txBody>
-          <a:bodyPr wrap="none" lIns="45720" rIns="45720" tIns="18288" bIns="18288" anchor="ctr">
-            <a:noAutofit/>
-          </a:bodyPr>
-          <a:lstStyle/>
-          <a:p>
-            <a:pPr algn="l"/>
-            <a:r>
-              <a:rPr sz="2330" b="0" i="0">
-                <a:solidFill>
-                  <a:srgbClr val="1A1A1A"/>
-                </a:solidFill>
-                <a:latin typeface="Lexend"/>
-              </a:rPr>
-              <a:t>Add the exponents:  </a:t>
-            </a:r>
-          </a:p>
-        </p:txBody>
-      </p:sp>
-      <p:pic>
-        <p:nvPicPr>
-          <p:cNvPr id="18" name="Picture 17" descr="a2fcaba2a23dd202.png"/>
-          <p:cNvPicPr>
-            <a:picLocks noChangeAspect="1"/>
-          </p:cNvPicPr>
-          <p:nvPr/>
-        </p:nvPicPr>
-        <p:blipFill>
-          <a:blip r:embed="rId5"/>
-          <a:stretch>
-            <a:fillRect/>
-          </a:stretch>
-        </p:blipFill>
-        <p:spPr>
-          <a:xfrm>
-            <a:off x="6750966" y="4335382"/>
-            <a:ext cx="1840991" cy="262128"/>
-          </a:xfrm>
-          <a:prstGeom prst="rect">
-            <a:avLst/>
-          </a:prstGeom>
-        </p:spPr>
-      </p:pic>
-      <p:pic>
-        <p:nvPicPr>
-          <p:cNvPr id="19" name="Picture 18" descr="2a1f3e18aef4b3d9.png"/>
-          <p:cNvPicPr>
-            <a:picLocks noChangeAspect="1"/>
-          </p:cNvPicPr>
-          <p:nvPr/>
-        </p:nvPicPr>
-        <p:blipFill>
-          <a:blip r:embed="rId6"/>
-          <a:stretch>
-            <a:fillRect/>
-          </a:stretch>
-        </p:blipFill>
-        <p:spPr>
-          <a:xfrm>
-            <a:off x="3627473" y="4838302"/>
-            <a:ext cx="2127504" cy="262128"/>
-          </a:xfrm>
-          <a:prstGeom prst="rect">
-            <a:avLst/>
-          </a:prstGeom>
-        </p:spPr>
-      </p:pic>
-      <p:sp>
-        <p:nvSpPr>
-          <p:cNvPr id="20" name="TextBox 19"/>
-          <p:cNvSpPr txBox="1"/>
-          <p:nvPr/>
-        </p:nvSpPr>
-        <p:spPr>
-          <a:xfrm>
-            <a:off x="777240" y="5312266"/>
-            <a:ext cx="10607040" cy="548640"/>
+            <a:off x="777240" y="4343400"/>
+            <a:ext cx="10607040" cy="457200"/>
           </a:xfrm>
           <a:prstGeom prst="rect">
             <a:avLst/>
@@ -7246,22 +6906,13 @@
           <a:p>
             <a:pPr algn="ctr"/>
             <a:r>
-              <a:rPr sz="3040" b="1" i="0">
-                <a:solidFill>
-                  <a:srgbClr val="9E1B32"/>
-                </a:solidFill>
-                <a:latin typeface="Lexend"/>
-              </a:rPr>
-              <a:t>Answer:   1 × 10</a:t>
-            </a:r>
-            <a:r>
-              <a:rPr sz="3040" b="1" i="0" baseline="30000">
-                <a:solidFill>
-                  <a:srgbClr val="9E1B32"/>
-                </a:solidFill>
-                <a:latin typeface="Lexend"/>
-              </a:rPr>
-              <a:t>6</a:t>
+              <a:rPr sz="2470" b="1" i="0">
+                <a:solidFill>
+                  <a:srgbClr val="1A1A1A"/>
+                </a:solidFill>
+                <a:latin typeface="Lexend"/>
+              </a:rPr>
+              <a:t>Answer it.</a:t>
             </a:r>
           </a:p>
         </p:txBody>
@@ -7314,7 +6965,7 @@
                 </a:solidFill>
                 <a:latin typeface="Lexend"/>
               </a:rPr>
-              <a:t>Whiteboards   ·   Question 3 of 9</a:t>
+              <a:t>Whiteboards   ·   Question 2 of 9</a:t>
             </a:r>
           </a:p>
         </p:txBody>
@@ -7494,9 +7145,44 @@
           </a:p>
         </p:txBody>
       </p:sp>
+      <p:sp>
+        <p:nvSpPr>
+          <p:cNvPr id="8" name="TextBox 7"/>
+          <p:cNvSpPr txBox="1"/>
+          <p:nvPr/>
+        </p:nvSpPr>
+        <p:spPr>
+          <a:xfrm>
+            <a:off x="1234440" y="1851660"/>
+            <a:ext cx="2745511" cy="457200"/>
+          </a:xfrm>
+          <a:prstGeom prst="rect">
+            <a:avLst/>
+          </a:prstGeom>
+          <a:noFill/>
+        </p:spPr>
+        <p:txBody>
+          <a:bodyPr wrap="none" lIns="45720" rIns="45720" tIns="18288" bIns="18288" anchor="ctr">
+            <a:noAutofit/>
+          </a:bodyPr>
+          <a:lstStyle/>
+          <a:p>
+            <a:pPr algn="l"/>
+            <a:r>
+              <a:rPr sz="2280" b="0" i="0">
+                <a:solidFill>
+                  <a:srgbClr val="1A1A1A"/>
+                </a:solidFill>
+                <a:latin typeface="Lexend"/>
+              </a:rPr>
+              <a:t>A printer makes  </a:t>
+            </a:r>
+          </a:p>
+        </p:txBody>
+      </p:sp>
       <p:pic>
         <p:nvPicPr>
-          <p:cNvPr id="8" name="Picture 7" descr="aa8aaa91edd783f6.png"/>
+          <p:cNvPr id="9" name="Picture 8" descr="e21453500b587993.png"/>
           <p:cNvPicPr>
             <a:picLocks noChangeAspect="1"/>
           </p:cNvPicPr>
@@ -7510,8 +7196,8 @@
         </p:blipFill>
         <p:spPr>
           <a:xfrm>
-            <a:off x="5356859" y="2194560"/>
-            <a:ext cx="1447800" cy="795528"/>
+            <a:off x="3842791" y="1944623"/>
+            <a:ext cx="914400" cy="271272"/>
           </a:xfrm>
           <a:prstGeom prst="rect">
             <a:avLst/>
@@ -7520,14 +7206,143 @@
       </p:pic>
       <p:sp>
         <p:nvSpPr>
-          <p:cNvPr id="9" name="TextBox 8"/>
-          <p:cNvSpPr txBox="1"/>
-          <p:nvPr/>
-        </p:nvSpPr>
-        <p:spPr>
-          <a:xfrm>
-            <a:off x="777240" y="4343400"/>
-            <a:ext cx="10607040" cy="457200"/>
+          <p:cNvPr id="10" name="TextBox 9"/>
+          <p:cNvSpPr txBox="1"/>
+          <p:nvPr/>
+        </p:nvSpPr>
+        <p:spPr>
+          <a:xfrm>
+            <a:off x="4757191" y="1851660"/>
+            <a:ext cx="2725928" cy="457200"/>
+          </a:xfrm>
+          <a:prstGeom prst="rect">
+            <a:avLst/>
+          </a:prstGeom>
+          <a:noFill/>
+        </p:spPr>
+        <p:txBody>
+          <a:bodyPr wrap="none" lIns="45720" rIns="45720" tIns="18288" bIns="18288" anchor="ctr">
+            <a:noAutofit/>
+          </a:bodyPr>
+          <a:lstStyle/>
+          <a:p>
+            <a:pPr algn="l"/>
+            <a:r>
+              <a:rPr sz="2280" b="0" i="0">
+                <a:solidFill>
+                  <a:srgbClr val="1A1A1A"/>
+                </a:solidFill>
+                <a:latin typeface="Lexend"/>
+              </a:rPr>
+              <a:t>  copies per hour.</a:t>
+            </a:r>
+          </a:p>
+        </p:txBody>
+      </p:sp>
+      <p:sp>
+        <p:nvSpPr>
+          <p:cNvPr id="11" name="TextBox 10"/>
+          <p:cNvSpPr txBox="1"/>
+          <p:nvPr/>
+        </p:nvSpPr>
+        <p:spPr>
+          <a:xfrm>
+            <a:off x="1234440" y="2464308"/>
+            <a:ext cx="1884608" cy="457200"/>
+          </a:xfrm>
+          <a:prstGeom prst="rect">
+            <a:avLst/>
+          </a:prstGeom>
+          <a:noFill/>
+        </p:spPr>
+        <p:txBody>
+          <a:bodyPr wrap="none" lIns="45720" rIns="45720" tIns="18288" bIns="18288" anchor="ctr">
+            <a:noAutofit/>
+          </a:bodyPr>
+          <a:lstStyle/>
+          <a:p>
+            <a:pPr algn="l"/>
+            <a:r>
+              <a:rPr sz="2280" b="0" i="0">
+                <a:solidFill>
+                  <a:srgbClr val="1A1A1A"/>
+                </a:solidFill>
+                <a:latin typeface="Lexend"/>
+              </a:rPr>
+              <a:t>It runs for  </a:t>
+            </a:r>
+          </a:p>
+        </p:txBody>
+      </p:sp>
+      <p:pic>
+        <p:nvPicPr>
+          <p:cNvPr id="12" name="Picture 11" descr="dcfe01e2266e7d45.png"/>
+          <p:cNvPicPr>
+            <a:picLocks noChangeAspect="1"/>
+          </p:cNvPicPr>
+          <p:nvPr/>
+        </p:nvPicPr>
+        <p:blipFill>
+          <a:blip r:embed="rId3"/>
+          <a:stretch>
+            <a:fillRect/>
+          </a:stretch>
+        </p:blipFill>
+        <p:spPr>
+          <a:xfrm>
+            <a:off x="2981888" y="2554224"/>
+            <a:ext cx="1143000" cy="277368"/>
+          </a:xfrm>
+          <a:prstGeom prst="rect">
+            <a:avLst/>
+          </a:prstGeom>
+        </p:spPr>
+      </p:pic>
+      <p:sp>
+        <p:nvSpPr>
+          <p:cNvPr id="13" name="TextBox 12"/>
+          <p:cNvSpPr txBox="1"/>
+          <p:nvPr/>
+        </p:nvSpPr>
+        <p:spPr>
+          <a:xfrm>
+            <a:off x="4124888" y="2464308"/>
+            <a:ext cx="5481137" cy="457200"/>
+          </a:xfrm>
+          <a:prstGeom prst="rect">
+            <a:avLst/>
+          </a:prstGeom>
+          <a:noFill/>
+        </p:spPr>
+        <p:txBody>
+          <a:bodyPr wrap="none" lIns="45720" rIns="45720" tIns="18288" bIns="18288" anchor="ctr">
+            <a:noAutofit/>
+          </a:bodyPr>
+          <a:lstStyle/>
+          <a:p>
+            <a:pPr algn="l"/>
+            <a:r>
+              <a:rPr sz="2280" b="0" i="0">
+                <a:solidFill>
+                  <a:srgbClr val="1A1A1A"/>
+                </a:solidFill>
+                <a:latin typeface="Lexend"/>
+              </a:rPr>
+              <a:t>  hours. Paper costs 3 cents a sheet.</a:t>
+            </a:r>
+          </a:p>
+        </p:txBody>
+      </p:sp>
+      <p:sp>
+        <p:nvSpPr>
+          <p:cNvPr id="14" name="TextBox 13"/>
+          <p:cNvSpPr txBox="1"/>
+          <p:nvPr/>
+        </p:nvSpPr>
+        <p:spPr>
+          <a:xfrm>
+            <a:off x="1234440" y="3099816"/>
+            <a:ext cx="10058400" cy="429370"/>
           </a:xfrm>
           <a:prstGeom prst="rect">
             <a:avLst/>
@@ -7540,15 +7355,201 @@
           </a:bodyPr>
           <a:lstStyle/>
           <a:p>
+            <a:pPr algn="l"/>
+            <a:r>
+              <a:rPr sz="2280" b="1" i="0">
+                <a:solidFill>
+                  <a:srgbClr val="1A1A1A"/>
+                </a:solidFill>
+                <a:latin typeface="Lexend"/>
+              </a:rPr>
+              <a:t>How many copies does it make?</a:t>
+            </a:r>
+          </a:p>
+        </p:txBody>
+      </p:sp>
+      <p:sp>
+        <p:nvSpPr>
+          <p:cNvPr id="15" name="TextBox 14"/>
+          <p:cNvSpPr txBox="1"/>
+          <p:nvPr/>
+        </p:nvSpPr>
+        <p:spPr>
+          <a:xfrm>
+            <a:off x="3572609" y="3734926"/>
+            <a:ext cx="3220349" cy="457200"/>
+          </a:xfrm>
+          <a:prstGeom prst="rect">
+            <a:avLst/>
+          </a:prstGeom>
+          <a:noFill/>
+        </p:spPr>
+        <p:txBody>
+          <a:bodyPr wrap="none" lIns="45720" rIns="45720" tIns="18288" bIns="18288" anchor="ctr">
+            <a:noAutofit/>
+          </a:bodyPr>
+          <a:lstStyle/>
+          <a:p>
+            <a:pPr algn="l"/>
+            <a:r>
+              <a:rPr sz="2330" b="0" i="0">
+                <a:solidFill>
+                  <a:srgbClr val="1A1A1A"/>
+                </a:solidFill>
+                <a:latin typeface="Lexend"/>
+              </a:rPr>
+              <a:t>Multiply the fronts:  </a:t>
+            </a:r>
+          </a:p>
+        </p:txBody>
+      </p:sp>
+      <p:pic>
+        <p:nvPicPr>
+          <p:cNvPr id="16" name="Picture 15" descr="4841b499496deb7b.png"/>
+          <p:cNvPicPr>
+            <a:picLocks noChangeAspect="1"/>
+          </p:cNvPicPr>
+          <p:nvPr/>
+        </p:nvPicPr>
+        <p:blipFill>
+          <a:blip r:embed="rId4"/>
+          <a:stretch>
+            <a:fillRect/>
+          </a:stretch>
+        </p:blipFill>
+        <p:spPr>
+          <a:xfrm>
+            <a:off x="6655799" y="3856846"/>
+            <a:ext cx="1417320" cy="213360"/>
+          </a:xfrm>
+          <a:prstGeom prst="rect">
+            <a:avLst/>
+          </a:prstGeom>
+        </p:spPr>
+      </p:pic>
+      <p:sp>
+        <p:nvSpPr>
+          <p:cNvPr id="17" name="TextBox 16"/>
+          <p:cNvSpPr txBox="1"/>
+          <p:nvPr/>
+        </p:nvSpPr>
+        <p:spPr>
+          <a:xfrm>
+            <a:off x="3572609" y="4237846"/>
+            <a:ext cx="3315516" cy="457200"/>
+          </a:xfrm>
+          <a:prstGeom prst="rect">
+            <a:avLst/>
+          </a:prstGeom>
+          <a:noFill/>
+        </p:spPr>
+        <p:txBody>
+          <a:bodyPr wrap="none" lIns="45720" rIns="45720" tIns="18288" bIns="18288" anchor="ctr">
+            <a:noAutofit/>
+          </a:bodyPr>
+          <a:lstStyle/>
+          <a:p>
+            <a:pPr algn="l"/>
+            <a:r>
+              <a:rPr sz="2330" b="0" i="0">
+                <a:solidFill>
+                  <a:srgbClr val="1A1A1A"/>
+                </a:solidFill>
+                <a:latin typeface="Lexend"/>
+              </a:rPr>
+              <a:t>Add the exponents:  </a:t>
+            </a:r>
+          </a:p>
+        </p:txBody>
+      </p:sp>
+      <p:pic>
+        <p:nvPicPr>
+          <p:cNvPr id="18" name="Picture 17" descr="a2fcaba2a23dd202.png"/>
+          <p:cNvPicPr>
+            <a:picLocks noChangeAspect="1"/>
+          </p:cNvPicPr>
+          <p:nvPr/>
+        </p:nvPicPr>
+        <p:blipFill>
+          <a:blip r:embed="rId5"/>
+          <a:stretch>
+            <a:fillRect/>
+          </a:stretch>
+        </p:blipFill>
+        <p:spPr>
+          <a:xfrm>
+            <a:off x="6750966" y="4335382"/>
+            <a:ext cx="1840991" cy="262128"/>
+          </a:xfrm>
+          <a:prstGeom prst="rect">
+            <a:avLst/>
+          </a:prstGeom>
+        </p:spPr>
+      </p:pic>
+      <p:pic>
+        <p:nvPicPr>
+          <p:cNvPr id="19" name="Picture 18" descr="2a1f3e18aef4b3d9.png"/>
+          <p:cNvPicPr>
+            <a:picLocks noChangeAspect="1"/>
+          </p:cNvPicPr>
+          <p:nvPr/>
+        </p:nvPicPr>
+        <p:blipFill>
+          <a:blip r:embed="rId6"/>
+          <a:stretch>
+            <a:fillRect/>
+          </a:stretch>
+        </p:blipFill>
+        <p:spPr>
+          <a:xfrm>
+            <a:off x="3627473" y="4838302"/>
+            <a:ext cx="2127504" cy="262128"/>
+          </a:xfrm>
+          <a:prstGeom prst="rect">
+            <a:avLst/>
+          </a:prstGeom>
+        </p:spPr>
+      </p:pic>
+      <p:sp>
+        <p:nvSpPr>
+          <p:cNvPr id="20" name="TextBox 19"/>
+          <p:cNvSpPr txBox="1"/>
+          <p:nvPr/>
+        </p:nvSpPr>
+        <p:spPr>
+          <a:xfrm>
+            <a:off x="777240" y="5312266"/>
+            <a:ext cx="10607040" cy="548640"/>
+          </a:xfrm>
+          <a:prstGeom prst="rect">
+            <a:avLst/>
+          </a:prstGeom>
+          <a:noFill/>
+        </p:spPr>
+        <p:txBody>
+          <a:bodyPr wrap="square" lIns="45720" rIns="45720" tIns="18288" bIns="18288" anchor="t">
+            <a:spAutoFit/>
+          </a:bodyPr>
+          <a:lstStyle/>
+          <a:p>
             <a:pPr algn="ctr"/>
             <a:r>
-              <a:rPr sz="2470" b="1" i="0">
-                <a:solidFill>
-                  <a:srgbClr val="1A1A1A"/>
-                </a:solidFill>
-                <a:latin typeface="Lexend"/>
-              </a:rPr>
-              <a:t>Answer it.</a:t>
+              <a:rPr sz="3040" b="1" i="0">
+                <a:solidFill>
+                  <a:srgbClr val="9E1B32"/>
+                </a:solidFill>
+                <a:latin typeface="Lexend"/>
+              </a:rPr>
+              <a:t>Answer:   1 × 10</a:t>
+            </a:r>
+            <a:r>
+              <a:rPr sz="3040" b="1" i="0" baseline="30000">
+                <a:solidFill>
+                  <a:srgbClr val="9E1B32"/>
+                </a:solidFill>
+                <a:latin typeface="Lexend"/>
+              </a:rPr>
+              <a:t>6</a:t>
             </a:r>
           </a:p>
         </p:txBody>
@@ -8247,7 +8248,7 @@
       </p:sp>
       <p:pic>
         <p:nvPicPr>
-          <p:cNvPr id="8" name="Picture 7" descr="3b2db2bf563f5fdc.png"/>
+          <p:cNvPr id="8" name="Picture 7" descr="aa8aaa91edd783f6.png"/>
           <p:cNvPicPr>
             <a:picLocks noChangeAspect="1"/>
           </p:cNvPicPr>
@@ -8261,8 +8262,8 @@
         </p:blipFill>
         <p:spPr>
           <a:xfrm>
-            <a:off x="5359908" y="2103120"/>
-            <a:ext cx="1441704" cy="795528"/>
+            <a:off x="5356859" y="2194560"/>
+            <a:ext cx="1447800" cy="795528"/>
           </a:xfrm>
           <a:prstGeom prst="rect">
             <a:avLst/>
@@ -8277,150 +8278,8 @@
         </p:nvSpPr>
         <p:spPr>
           <a:xfrm>
-            <a:off x="3203725" y="3223260"/>
-            <a:ext cx="2991598" cy="457200"/>
-          </a:xfrm>
-          <a:prstGeom prst="rect">
-            <a:avLst/>
-          </a:prstGeom>
-          <a:noFill/>
-        </p:spPr>
-        <p:txBody>
-          <a:bodyPr wrap="none" lIns="45720" rIns="45720" tIns="18288" bIns="18288" anchor="ctr">
-            <a:noAutofit/>
-          </a:bodyPr>
-          <a:lstStyle/>
-          <a:p>
-            <a:pPr algn="l"/>
-            <a:r>
-              <a:rPr sz="2330" b="0" i="0">
-                <a:solidFill>
-                  <a:srgbClr val="1A1A1A"/>
-                </a:solidFill>
-                <a:latin typeface="Lexend"/>
-              </a:rPr>
-              <a:t>Divide the fronts:  </a:t>
-            </a:r>
-          </a:p>
-        </p:txBody>
-      </p:sp>
-      <p:pic>
-        <p:nvPicPr>
-          <p:cNvPr id="10" name="Picture 9" descr="68d052e64ee55838.png"/>
-          <p:cNvPicPr>
-            <a:picLocks noChangeAspect="1"/>
-          </p:cNvPicPr>
-          <p:nvPr/>
-        </p:nvPicPr>
-        <p:blipFill>
-          <a:blip r:embed="rId3"/>
-          <a:stretch>
-            <a:fillRect/>
-          </a:stretch>
-        </p:blipFill>
-        <p:spPr>
-          <a:xfrm>
-            <a:off x="6058163" y="3345180"/>
-            <a:ext cx="1481328" cy="213360"/>
-          </a:xfrm>
-          <a:prstGeom prst="rect">
-            <a:avLst/>
-          </a:prstGeom>
-        </p:spPr>
-      </p:pic>
-      <p:sp>
-        <p:nvSpPr>
-          <p:cNvPr id="11" name="TextBox 10"/>
-          <p:cNvSpPr txBox="1"/>
-          <p:nvPr/>
-        </p:nvSpPr>
-        <p:spPr>
-          <a:xfrm>
-            <a:off x="3203725" y="3726179"/>
-            <a:ext cx="4013660" cy="457200"/>
-          </a:xfrm>
-          <a:prstGeom prst="rect">
-            <a:avLst/>
-          </a:prstGeom>
-          <a:noFill/>
-        </p:spPr>
-        <p:txBody>
-          <a:bodyPr wrap="none" lIns="45720" rIns="45720" tIns="18288" bIns="18288" anchor="ctr">
-            <a:noAutofit/>
-          </a:bodyPr>
-          <a:lstStyle/>
-          <a:p>
-            <a:pPr algn="l"/>
-            <a:r>
-              <a:rPr sz="2330" b="0" i="0">
-                <a:solidFill>
-                  <a:srgbClr val="1A1A1A"/>
-                </a:solidFill>
-                <a:latin typeface="Lexend"/>
-              </a:rPr>
-              <a:t>Subtract the exponents:  </a:t>
-            </a:r>
-          </a:p>
-        </p:txBody>
-      </p:sp>
-      <p:pic>
-        <p:nvPicPr>
-          <p:cNvPr id="12" name="Picture 11" descr="93ba4e388683b6a2.png"/>
-          <p:cNvPicPr>
-            <a:picLocks noChangeAspect="1"/>
-          </p:cNvPicPr>
-          <p:nvPr/>
-        </p:nvPicPr>
-        <p:blipFill>
-          <a:blip r:embed="rId4"/>
-          <a:stretch>
-            <a:fillRect/>
-          </a:stretch>
-        </p:blipFill>
-        <p:spPr>
-          <a:xfrm>
-            <a:off x="7080226" y="3826763"/>
-            <a:ext cx="1880616" cy="256032"/>
-          </a:xfrm>
-          <a:prstGeom prst="rect">
-            <a:avLst/>
-          </a:prstGeom>
-        </p:spPr>
-      </p:pic>
-      <p:pic>
-        <p:nvPicPr>
-          <p:cNvPr id="13" name="Picture 12" descr="c6369a2a18532f76.png"/>
-          <p:cNvPicPr>
-            <a:picLocks noChangeAspect="1"/>
-          </p:cNvPicPr>
-          <p:nvPr/>
-        </p:nvPicPr>
-        <p:blipFill>
-          <a:blip r:embed="rId5"/>
-          <a:stretch>
-            <a:fillRect/>
-          </a:stretch>
-        </p:blipFill>
-        <p:spPr>
-          <a:xfrm>
-            <a:off x="3258589" y="4329683"/>
-            <a:ext cx="847344" cy="256032"/>
-          </a:xfrm>
-          <a:prstGeom prst="rect">
-            <a:avLst/>
-          </a:prstGeom>
-        </p:spPr>
-      </p:pic>
-      <p:sp>
-        <p:nvSpPr>
-          <p:cNvPr id="14" name="TextBox 13"/>
-          <p:cNvSpPr txBox="1"/>
-          <p:nvPr/>
-        </p:nvSpPr>
-        <p:spPr>
-          <a:xfrm>
-            <a:off x="777240" y="4800600"/>
-            <a:ext cx="10607040" cy="548640"/>
+            <a:off x="777240" y="4343400"/>
+            <a:ext cx="10607040" cy="457200"/>
           </a:xfrm>
           <a:prstGeom prst="rect">
             <a:avLst/>
@@ -8435,22 +8294,13 @@
           <a:p>
             <a:pPr algn="ctr"/>
             <a:r>
-              <a:rPr sz="3040" b="1" i="0">
-                <a:solidFill>
-                  <a:srgbClr val="9E1B32"/>
-                </a:solidFill>
-                <a:latin typeface="Lexend"/>
-              </a:rPr>
-              <a:t>Answer:   8 × 10</a:t>
-            </a:r>
-            <a:r>
-              <a:rPr sz="3040" b="1" i="0" baseline="30000">
-                <a:solidFill>
-                  <a:srgbClr val="9E1B32"/>
-                </a:solidFill>
-                <a:latin typeface="Lexend"/>
-              </a:rPr>
-              <a:t>5</a:t>
+              <a:rPr sz="2470" b="1" i="0">
+                <a:solidFill>
+                  <a:srgbClr val="1A1A1A"/>
+                </a:solidFill>
+                <a:latin typeface="Lexend"/>
+              </a:rPr>
+              <a:t>Answer it.</a:t>
             </a:r>
           </a:p>
         </p:txBody>
@@ -8503,7 +8353,7 @@
                 </a:solidFill>
                 <a:latin typeface="Lexend"/>
               </a:rPr>
-              <a:t>Whiteboards   ·   Question 4 of 9</a:t>
+              <a:t>Whiteboards   ·   Question 3 of 9</a:t>
             </a:r>
           </a:p>
         </p:txBody>
@@ -8685,7 +8535,7 @@
       </p:sp>
       <p:pic>
         <p:nvPicPr>
-          <p:cNvPr id="8" name="Picture 7" descr="ffdc47127232dd72.png"/>
+          <p:cNvPr id="8" name="Picture 7" descr="3b2db2bf563f5fdc.png"/>
           <p:cNvPicPr>
             <a:picLocks noChangeAspect="1"/>
           </p:cNvPicPr>
@@ -8699,8 +8549,8 @@
         </p:blipFill>
         <p:spPr>
           <a:xfrm>
-            <a:off x="5256276" y="2194560"/>
-            <a:ext cx="1648968" cy="795528"/>
+            <a:off x="5359908" y="2103120"/>
+            <a:ext cx="1441704" cy="795528"/>
           </a:xfrm>
           <a:prstGeom prst="rect">
             <a:avLst/>
@@ -8715,8 +8565,150 @@
         </p:nvSpPr>
         <p:spPr>
           <a:xfrm>
-            <a:off x="777240" y="4343400"/>
-            <a:ext cx="10607040" cy="457200"/>
+            <a:off x="3203725" y="3223260"/>
+            <a:ext cx="2991598" cy="457200"/>
+          </a:xfrm>
+          <a:prstGeom prst="rect">
+            <a:avLst/>
+          </a:prstGeom>
+          <a:noFill/>
+        </p:spPr>
+        <p:txBody>
+          <a:bodyPr wrap="none" lIns="45720" rIns="45720" tIns="18288" bIns="18288" anchor="ctr">
+            <a:noAutofit/>
+          </a:bodyPr>
+          <a:lstStyle/>
+          <a:p>
+            <a:pPr algn="l"/>
+            <a:r>
+              <a:rPr sz="2330" b="0" i="0">
+                <a:solidFill>
+                  <a:srgbClr val="1A1A1A"/>
+                </a:solidFill>
+                <a:latin typeface="Lexend"/>
+              </a:rPr>
+              <a:t>Divide the fronts:  </a:t>
+            </a:r>
+          </a:p>
+        </p:txBody>
+      </p:sp>
+      <p:pic>
+        <p:nvPicPr>
+          <p:cNvPr id="10" name="Picture 9" descr="68d052e64ee55838.png"/>
+          <p:cNvPicPr>
+            <a:picLocks noChangeAspect="1"/>
+          </p:cNvPicPr>
+          <p:nvPr/>
+        </p:nvPicPr>
+        <p:blipFill>
+          <a:blip r:embed="rId3"/>
+          <a:stretch>
+            <a:fillRect/>
+          </a:stretch>
+        </p:blipFill>
+        <p:spPr>
+          <a:xfrm>
+            <a:off x="6058163" y="3345180"/>
+            <a:ext cx="1481328" cy="213360"/>
+          </a:xfrm>
+          <a:prstGeom prst="rect">
+            <a:avLst/>
+          </a:prstGeom>
+        </p:spPr>
+      </p:pic>
+      <p:sp>
+        <p:nvSpPr>
+          <p:cNvPr id="11" name="TextBox 10"/>
+          <p:cNvSpPr txBox="1"/>
+          <p:nvPr/>
+        </p:nvSpPr>
+        <p:spPr>
+          <a:xfrm>
+            <a:off x="3203725" y="3726179"/>
+            <a:ext cx="4013660" cy="457200"/>
+          </a:xfrm>
+          <a:prstGeom prst="rect">
+            <a:avLst/>
+          </a:prstGeom>
+          <a:noFill/>
+        </p:spPr>
+        <p:txBody>
+          <a:bodyPr wrap="none" lIns="45720" rIns="45720" tIns="18288" bIns="18288" anchor="ctr">
+            <a:noAutofit/>
+          </a:bodyPr>
+          <a:lstStyle/>
+          <a:p>
+            <a:pPr algn="l"/>
+            <a:r>
+              <a:rPr sz="2330" b="0" i="0">
+                <a:solidFill>
+                  <a:srgbClr val="1A1A1A"/>
+                </a:solidFill>
+                <a:latin typeface="Lexend"/>
+              </a:rPr>
+              <a:t>Subtract the exponents:  </a:t>
+            </a:r>
+          </a:p>
+        </p:txBody>
+      </p:sp>
+      <p:pic>
+        <p:nvPicPr>
+          <p:cNvPr id="12" name="Picture 11" descr="93ba4e388683b6a2.png"/>
+          <p:cNvPicPr>
+            <a:picLocks noChangeAspect="1"/>
+          </p:cNvPicPr>
+          <p:nvPr/>
+        </p:nvPicPr>
+        <p:blipFill>
+          <a:blip r:embed="rId4"/>
+          <a:stretch>
+            <a:fillRect/>
+          </a:stretch>
+        </p:blipFill>
+        <p:spPr>
+          <a:xfrm>
+            <a:off x="7080226" y="3826763"/>
+            <a:ext cx="1880616" cy="256032"/>
+          </a:xfrm>
+          <a:prstGeom prst="rect">
+            <a:avLst/>
+          </a:prstGeom>
+        </p:spPr>
+      </p:pic>
+      <p:pic>
+        <p:nvPicPr>
+          <p:cNvPr id="13" name="Picture 12" descr="c6369a2a18532f76.png"/>
+          <p:cNvPicPr>
+            <a:picLocks noChangeAspect="1"/>
+          </p:cNvPicPr>
+          <p:nvPr/>
+        </p:nvPicPr>
+        <p:blipFill>
+          <a:blip r:embed="rId5"/>
+          <a:stretch>
+            <a:fillRect/>
+          </a:stretch>
+        </p:blipFill>
+        <p:spPr>
+          <a:xfrm>
+            <a:off x="3258589" y="4329683"/>
+            <a:ext cx="847344" cy="256032"/>
+          </a:xfrm>
+          <a:prstGeom prst="rect">
+            <a:avLst/>
+          </a:prstGeom>
+        </p:spPr>
+      </p:pic>
+      <p:sp>
+        <p:nvSpPr>
+          <p:cNvPr id="14" name="TextBox 13"/>
+          <p:cNvSpPr txBox="1"/>
+          <p:nvPr/>
+        </p:nvSpPr>
+        <p:spPr>
+          <a:xfrm>
+            <a:off x="777240" y="4800600"/>
+            <a:ext cx="10607040" cy="548640"/>
           </a:xfrm>
           <a:prstGeom prst="rect">
             <a:avLst/>
@@ -8731,13 +8723,22 @@
           <a:p>
             <a:pPr algn="ctr"/>
             <a:r>
-              <a:rPr sz="2470" b="1" i="0">
-                <a:solidFill>
-                  <a:srgbClr val="1A1A1A"/>
-                </a:solidFill>
-                <a:latin typeface="Lexend"/>
-              </a:rPr>
-              <a:t>Answer it.</a:t>
+              <a:rPr sz="3040" b="1" i="0">
+                <a:solidFill>
+                  <a:srgbClr val="9E1B32"/>
+                </a:solidFill>
+                <a:latin typeface="Lexend"/>
+              </a:rPr>
+              <a:t>Answer:   8 × 10</a:t>
+            </a:r>
+            <a:r>
+              <a:rPr sz="3040" b="1" i="0" baseline="30000">
+                <a:solidFill>
+                  <a:srgbClr val="9E1B32"/>
+                </a:solidFill>
+                <a:latin typeface="Lexend"/>
+              </a:rPr>
+              <a:t>5</a:t>
             </a:r>
           </a:p>
         </p:txBody>
@@ -8972,7 +8973,7 @@
       </p:sp>
       <p:pic>
         <p:nvPicPr>
-          <p:cNvPr id="8" name="Picture 7" descr="e0912071a11b6e8e.png"/>
+          <p:cNvPr id="8" name="Picture 7" descr="ffdc47127232dd72.png"/>
           <p:cNvPicPr>
             <a:picLocks noChangeAspect="1"/>
           </p:cNvPicPr>
@@ -8986,8 +8987,8 @@
         </p:blipFill>
         <p:spPr>
           <a:xfrm>
-            <a:off x="5259323" y="2103120"/>
-            <a:ext cx="1642872" cy="795528"/>
+            <a:off x="5256276" y="2194560"/>
+            <a:ext cx="1648968" cy="795528"/>
           </a:xfrm>
           <a:prstGeom prst="rect">
             <a:avLst/>
@@ -9002,150 +9003,8 @@
         </p:nvSpPr>
         <p:spPr>
           <a:xfrm>
-            <a:off x="3089425" y="3223260"/>
-            <a:ext cx="2991598" cy="457200"/>
-          </a:xfrm>
-          <a:prstGeom prst="rect">
-            <a:avLst/>
-          </a:prstGeom>
-          <a:noFill/>
-        </p:spPr>
-        <p:txBody>
-          <a:bodyPr wrap="none" lIns="45720" rIns="45720" tIns="18288" bIns="18288" anchor="ctr">
-            <a:noAutofit/>
-          </a:bodyPr>
-          <a:lstStyle/>
-          <a:p>
-            <a:pPr algn="l"/>
-            <a:r>
-              <a:rPr sz="2330" b="0" i="0">
-                <a:solidFill>
-                  <a:srgbClr val="1A1A1A"/>
-                </a:solidFill>
-                <a:latin typeface="Lexend"/>
-              </a:rPr>
-              <a:t>Divide the fronts:  </a:t>
-            </a:r>
-          </a:p>
-        </p:txBody>
-      </p:sp>
-      <p:pic>
-        <p:nvPicPr>
-          <p:cNvPr id="10" name="Picture 9" descr="b4106f1670f34932.png"/>
-          <p:cNvPicPr>
-            <a:picLocks noChangeAspect="1"/>
-          </p:cNvPicPr>
-          <p:nvPr/>
-        </p:nvPicPr>
-        <p:blipFill>
-          <a:blip r:embed="rId3"/>
-          <a:stretch>
-            <a:fillRect/>
-          </a:stretch>
-        </p:blipFill>
-        <p:spPr>
-          <a:xfrm>
-            <a:off x="5943863" y="3345180"/>
-            <a:ext cx="1865376" cy="213360"/>
-          </a:xfrm>
-          <a:prstGeom prst="rect">
-            <a:avLst/>
-          </a:prstGeom>
-        </p:spPr>
-      </p:pic>
-      <p:sp>
-        <p:nvSpPr>
-          <p:cNvPr id="11" name="TextBox 10"/>
-          <p:cNvSpPr txBox="1"/>
-          <p:nvPr/>
-        </p:nvSpPr>
-        <p:spPr>
-          <a:xfrm>
-            <a:off x="3089425" y="3726179"/>
-            <a:ext cx="4013660" cy="457200"/>
-          </a:xfrm>
-          <a:prstGeom prst="rect">
-            <a:avLst/>
-          </a:prstGeom>
-          <a:noFill/>
-        </p:spPr>
-        <p:txBody>
-          <a:bodyPr wrap="none" lIns="45720" rIns="45720" tIns="18288" bIns="18288" anchor="ctr">
-            <a:noAutofit/>
-          </a:bodyPr>
-          <a:lstStyle/>
-          <a:p>
-            <a:pPr algn="l"/>
-            <a:r>
-              <a:rPr sz="2330" b="0" i="0">
-                <a:solidFill>
-                  <a:srgbClr val="1A1A1A"/>
-                </a:solidFill>
-                <a:latin typeface="Lexend"/>
-              </a:rPr>
-              <a:t>Subtract the exponents:  </a:t>
-            </a:r>
-          </a:p>
-        </p:txBody>
-      </p:sp>
-      <p:pic>
-        <p:nvPicPr>
-          <p:cNvPr id="12" name="Picture 11" descr="006020145e462521.png"/>
-          <p:cNvPicPr>
-            <a:picLocks noChangeAspect="1"/>
-          </p:cNvPicPr>
-          <p:nvPr/>
-        </p:nvPicPr>
-        <p:blipFill>
-          <a:blip r:embed="rId4"/>
-          <a:stretch>
-            <a:fillRect/>
-          </a:stretch>
-        </p:blipFill>
-        <p:spPr>
-          <a:xfrm>
-            <a:off x="6965926" y="3823716"/>
-            <a:ext cx="2109216" cy="262128"/>
-          </a:xfrm>
-          <a:prstGeom prst="rect">
-            <a:avLst/>
-          </a:prstGeom>
-        </p:spPr>
-      </p:pic>
-      <p:pic>
-        <p:nvPicPr>
-          <p:cNvPr id="13" name="Picture 12" descr="c559c147ffe46a93.png"/>
-          <p:cNvPicPr>
-            <a:picLocks noChangeAspect="1"/>
-          </p:cNvPicPr>
-          <p:nvPr/>
-        </p:nvPicPr>
-        <p:blipFill>
-          <a:blip r:embed="rId5"/>
-          <a:stretch>
-            <a:fillRect/>
-          </a:stretch>
-        </p:blipFill>
-        <p:spPr>
-          <a:xfrm>
-            <a:off x="3144289" y="4329683"/>
-            <a:ext cx="2889504" cy="256032"/>
-          </a:xfrm>
-          <a:prstGeom prst="rect">
-            <a:avLst/>
-          </a:prstGeom>
-        </p:spPr>
-      </p:pic>
-      <p:sp>
-        <p:nvSpPr>
-          <p:cNvPr id="14" name="TextBox 13"/>
-          <p:cNvSpPr txBox="1"/>
-          <p:nvPr/>
-        </p:nvSpPr>
-        <p:spPr>
-          <a:xfrm>
-            <a:off x="777240" y="4800600"/>
-            <a:ext cx="10607040" cy="548640"/>
+            <a:off x="777240" y="4343400"/>
+            <a:ext cx="10607040" cy="457200"/>
           </a:xfrm>
           <a:prstGeom prst="rect">
             <a:avLst/>
@@ -9160,22 +9019,13 @@
           <a:p>
             <a:pPr algn="ctr"/>
             <a:r>
-              <a:rPr sz="3040" b="1" i="0">
-                <a:solidFill>
-                  <a:srgbClr val="9E1B32"/>
-                </a:solidFill>
-                <a:latin typeface="Lexend"/>
-              </a:rPr>
-              <a:t>Answer:   8.2 × 10</a:t>
-            </a:r>
-            <a:r>
-              <a:rPr sz="3040" b="1" i="0" baseline="30000">
-                <a:solidFill>
-                  <a:srgbClr val="9E1B32"/>
-                </a:solidFill>
-                <a:latin typeface="Lexend"/>
-              </a:rPr>
-              <a:t>-4</a:t>
+              <a:rPr sz="2470" b="1" i="0">
+                <a:solidFill>
+                  <a:srgbClr val="1A1A1A"/>
+                </a:solidFill>
+                <a:latin typeface="Lexend"/>
+              </a:rPr>
+              <a:t>Answer it.</a:t>
             </a:r>
           </a:p>
         </p:txBody>
@@ -9228,7 +9078,7 @@
                 </a:solidFill>
                 <a:latin typeface="Lexend"/>
               </a:rPr>
-              <a:t>Whiteboards   ·   Question 5 of 9</a:t>
+              <a:t>Whiteboards   ·   Question 4 of 9</a:t>
             </a:r>
           </a:p>
         </p:txBody>
@@ -9410,7 +9260,7 @@
       </p:sp>
       <p:pic>
         <p:nvPicPr>
-          <p:cNvPr id="8" name="Picture 7" descr="3853590bf4416720.png"/>
+          <p:cNvPr id="8" name="Picture 7" descr="e0912071a11b6e8e.png"/>
           <p:cNvPicPr>
             <a:picLocks noChangeAspect="1"/>
           </p:cNvPicPr>
@@ -9424,8 +9274,8 @@
         </p:blipFill>
         <p:spPr>
           <a:xfrm>
-            <a:off x="4669536" y="2196083"/>
-            <a:ext cx="2822448" cy="408432"/>
+            <a:off x="5259323" y="2103120"/>
+            <a:ext cx="1642872" cy="795528"/>
           </a:xfrm>
           <a:prstGeom prst="rect">
             <a:avLst/>
@@ -9440,8 +9290,150 @@
         </p:nvSpPr>
         <p:spPr>
           <a:xfrm>
-            <a:off x="777240" y="2880360"/>
-            <a:ext cx="10607040" cy="465151"/>
+            <a:off x="3089425" y="3223260"/>
+            <a:ext cx="2991598" cy="457200"/>
+          </a:xfrm>
+          <a:prstGeom prst="rect">
+            <a:avLst/>
+          </a:prstGeom>
+          <a:noFill/>
+        </p:spPr>
+        <p:txBody>
+          <a:bodyPr wrap="none" lIns="45720" rIns="45720" tIns="18288" bIns="18288" anchor="ctr">
+            <a:noAutofit/>
+          </a:bodyPr>
+          <a:lstStyle/>
+          <a:p>
+            <a:pPr algn="l"/>
+            <a:r>
+              <a:rPr sz="2330" b="0" i="0">
+                <a:solidFill>
+                  <a:srgbClr val="1A1A1A"/>
+                </a:solidFill>
+                <a:latin typeface="Lexend"/>
+              </a:rPr>
+              <a:t>Divide the fronts:  </a:t>
+            </a:r>
+          </a:p>
+        </p:txBody>
+      </p:sp>
+      <p:pic>
+        <p:nvPicPr>
+          <p:cNvPr id="10" name="Picture 9" descr="b4106f1670f34932.png"/>
+          <p:cNvPicPr>
+            <a:picLocks noChangeAspect="1"/>
+          </p:cNvPicPr>
+          <p:nvPr/>
+        </p:nvPicPr>
+        <p:blipFill>
+          <a:blip r:embed="rId3"/>
+          <a:stretch>
+            <a:fillRect/>
+          </a:stretch>
+        </p:blipFill>
+        <p:spPr>
+          <a:xfrm>
+            <a:off x="5943863" y="3345180"/>
+            <a:ext cx="1865376" cy="213360"/>
+          </a:xfrm>
+          <a:prstGeom prst="rect">
+            <a:avLst/>
+          </a:prstGeom>
+        </p:spPr>
+      </p:pic>
+      <p:sp>
+        <p:nvSpPr>
+          <p:cNvPr id="11" name="TextBox 10"/>
+          <p:cNvSpPr txBox="1"/>
+          <p:nvPr/>
+        </p:nvSpPr>
+        <p:spPr>
+          <a:xfrm>
+            <a:off x="3089425" y="3726179"/>
+            <a:ext cx="4013660" cy="457200"/>
+          </a:xfrm>
+          <a:prstGeom prst="rect">
+            <a:avLst/>
+          </a:prstGeom>
+          <a:noFill/>
+        </p:spPr>
+        <p:txBody>
+          <a:bodyPr wrap="none" lIns="45720" rIns="45720" tIns="18288" bIns="18288" anchor="ctr">
+            <a:noAutofit/>
+          </a:bodyPr>
+          <a:lstStyle/>
+          <a:p>
+            <a:pPr algn="l"/>
+            <a:r>
+              <a:rPr sz="2330" b="0" i="0">
+                <a:solidFill>
+                  <a:srgbClr val="1A1A1A"/>
+                </a:solidFill>
+                <a:latin typeface="Lexend"/>
+              </a:rPr>
+              <a:t>Subtract the exponents:  </a:t>
+            </a:r>
+          </a:p>
+        </p:txBody>
+      </p:sp>
+      <p:pic>
+        <p:nvPicPr>
+          <p:cNvPr id="12" name="Picture 11" descr="006020145e462521.png"/>
+          <p:cNvPicPr>
+            <a:picLocks noChangeAspect="1"/>
+          </p:cNvPicPr>
+          <p:nvPr/>
+        </p:nvPicPr>
+        <p:blipFill>
+          <a:blip r:embed="rId4"/>
+          <a:stretch>
+            <a:fillRect/>
+          </a:stretch>
+        </p:blipFill>
+        <p:spPr>
+          <a:xfrm>
+            <a:off x="6965926" y="3823716"/>
+            <a:ext cx="2109216" cy="262128"/>
+          </a:xfrm>
+          <a:prstGeom prst="rect">
+            <a:avLst/>
+          </a:prstGeom>
+        </p:spPr>
+      </p:pic>
+      <p:pic>
+        <p:nvPicPr>
+          <p:cNvPr id="13" name="Picture 12" descr="c559c147ffe46a93.png"/>
+          <p:cNvPicPr>
+            <a:picLocks noChangeAspect="1"/>
+          </p:cNvPicPr>
+          <p:nvPr/>
+        </p:nvPicPr>
+        <p:blipFill>
+          <a:blip r:embed="rId5"/>
+          <a:stretch>
+            <a:fillRect/>
+          </a:stretch>
+        </p:blipFill>
+        <p:spPr>
+          <a:xfrm>
+            <a:off x="3144289" y="4329683"/>
+            <a:ext cx="2889504" cy="256032"/>
+          </a:xfrm>
+          <a:prstGeom prst="rect">
+            <a:avLst/>
+          </a:prstGeom>
+        </p:spPr>
+      </p:pic>
+      <p:sp>
+        <p:nvSpPr>
+          <p:cNvPr id="14" name="TextBox 13"/>
+          <p:cNvSpPr txBox="1"/>
+          <p:nvPr/>
+        </p:nvSpPr>
+        <p:spPr>
+          <a:xfrm>
+            <a:off x="777240" y="4800600"/>
+            <a:ext cx="10607040" cy="548640"/>
           </a:xfrm>
           <a:prstGeom prst="rect">
             <a:avLst/>
@@ -9456,260 +9448,22 @@
           <a:p>
             <a:pPr algn="ctr"/>
             <a:r>
-              <a:rPr sz="2470" b="0" i="0">
-                <a:solidFill>
-                  <a:srgbClr val="1A1A1A"/>
-                </a:solidFill>
-                <a:latin typeface="Lexend"/>
-              </a:rPr>
-              <a:t>Which is the product?</a:t>
-            </a:r>
-          </a:p>
-        </p:txBody>
-      </p:sp>
-      <p:sp>
-        <p:nvSpPr>
-          <p:cNvPr id="10" name="TextBox 9"/>
-          <p:cNvSpPr txBox="1"/>
-          <p:nvPr/>
-        </p:nvSpPr>
-        <p:spPr>
-          <a:xfrm>
-            <a:off x="1874519" y="3546679"/>
-            <a:ext cx="4572000" cy="548640"/>
-          </a:xfrm>
-          <a:prstGeom prst="rect">
-            <a:avLst/>
-          </a:prstGeom>
-          <a:noFill/>
-        </p:spPr>
-        <p:txBody>
-          <a:bodyPr wrap="square" lIns="45720" rIns="45720" tIns="18288" bIns="18288" anchor="t">
-            <a:spAutoFit/>
-          </a:bodyPr>
-          <a:lstStyle/>
-          <a:p>
-            <a:pPr algn="l"/>
-            <a:r>
-              <a:rPr sz="2280" b="1" i="0">
-                <a:solidFill>
-                  <a:srgbClr val="1A1A1A"/>
-                </a:solidFill>
-                <a:latin typeface="Lexend"/>
-              </a:rPr>
-              <a:t>A.   </a:t>
-            </a:r>
-            <a:r>
-              <a:rPr sz="2280" b="0" i="0">
-                <a:solidFill>
-                  <a:srgbClr val="1A1A1A"/>
-                </a:solidFill>
-                <a:latin typeface="Lexend"/>
-              </a:rPr>
-              <a:t>8 × 10</a:t>
-            </a:r>
-            <a:r>
-              <a:rPr sz="2280" b="0" i="0" baseline="30000">
-                <a:solidFill>
-                  <a:srgbClr val="1A1A1A"/>
-                </a:solidFill>
-                <a:latin typeface="Lexend"/>
-              </a:rPr>
-              <a:t>-2</a:t>
-            </a:r>
-          </a:p>
-        </p:txBody>
-      </p:sp>
-      <p:sp>
-        <p:nvSpPr>
-          <p:cNvPr id="11" name="TextBox 10"/>
-          <p:cNvSpPr txBox="1"/>
-          <p:nvPr/>
-        </p:nvSpPr>
-        <p:spPr>
-          <a:xfrm>
-            <a:off x="6629400" y="3546679"/>
-            <a:ext cx="4572000" cy="548640"/>
-          </a:xfrm>
-          <a:prstGeom prst="rect">
-            <a:avLst/>
-          </a:prstGeom>
-          <a:noFill/>
-        </p:spPr>
-        <p:txBody>
-          <a:bodyPr wrap="square" lIns="45720" rIns="45720" tIns="18288" bIns="18288" anchor="t">
-            <a:spAutoFit/>
-          </a:bodyPr>
-          <a:lstStyle/>
-          <a:p>
-            <a:pPr algn="l"/>
-            <a:r>
-              <a:rPr sz="2280" b="1" i="0">
-                <a:solidFill>
-                  <a:srgbClr val="1A1A1A"/>
-                </a:solidFill>
-                <a:latin typeface="Lexend"/>
-              </a:rPr>
-              <a:t>B.   </a:t>
-            </a:r>
-            <a:r>
-              <a:rPr sz="2280" b="0" i="0">
-                <a:solidFill>
-                  <a:srgbClr val="1A1A1A"/>
-                </a:solidFill>
-                <a:latin typeface="Lexend"/>
-              </a:rPr>
-              <a:t>8 × 10</a:t>
-            </a:r>
-            <a:r>
-              <a:rPr sz="2280" b="0" i="0" baseline="30000">
-                <a:solidFill>
-                  <a:srgbClr val="1A1A1A"/>
-                </a:solidFill>
-                <a:latin typeface="Lexend"/>
-              </a:rPr>
-              <a:t>63</a:t>
-            </a:r>
-          </a:p>
-        </p:txBody>
-      </p:sp>
-      <p:sp>
-        <p:nvSpPr>
-          <p:cNvPr id="12" name="TextBox 11"/>
-          <p:cNvSpPr txBox="1"/>
-          <p:nvPr/>
-        </p:nvSpPr>
-        <p:spPr>
-          <a:xfrm>
-            <a:off x="1874519" y="4232479"/>
-            <a:ext cx="4572000" cy="548640"/>
-          </a:xfrm>
-          <a:prstGeom prst="rect">
-            <a:avLst/>
-          </a:prstGeom>
-          <a:noFill/>
-        </p:spPr>
-        <p:txBody>
-          <a:bodyPr wrap="square" lIns="45720" rIns="45720" tIns="18288" bIns="18288" anchor="t">
-            <a:spAutoFit/>
-          </a:bodyPr>
-          <a:lstStyle/>
-          <a:p>
-            <a:pPr algn="l"/>
-            <a:r>
-              <a:rPr sz="2280" b="1" i="0">
-                <a:solidFill>
-                  <a:srgbClr val="1A1A1A"/>
-                </a:solidFill>
-                <a:latin typeface="Lexend"/>
-              </a:rPr>
-              <a:t>C.   </a:t>
-            </a:r>
-            <a:r>
-              <a:rPr sz="2280" b="0" i="0">
-                <a:solidFill>
-                  <a:srgbClr val="1A1A1A"/>
-                </a:solidFill>
-                <a:latin typeface="Lexend"/>
-              </a:rPr>
-              <a:t>8 × 10</a:t>
-            </a:r>
-            <a:r>
-              <a:rPr sz="2280" b="0" i="0" baseline="30000">
-                <a:solidFill>
-                  <a:srgbClr val="1A1A1A"/>
-                </a:solidFill>
-                <a:latin typeface="Lexend"/>
-              </a:rPr>
-              <a:t>16</a:t>
-            </a:r>
-          </a:p>
-        </p:txBody>
-      </p:sp>
-      <p:sp>
-        <p:nvSpPr>
-          <p:cNvPr id="13" name="TextBox 12"/>
-          <p:cNvSpPr txBox="1"/>
-          <p:nvPr/>
-        </p:nvSpPr>
-        <p:spPr>
-          <a:xfrm>
-            <a:off x="6629400" y="4232479"/>
-            <a:ext cx="4572000" cy="548640"/>
-          </a:xfrm>
-          <a:prstGeom prst="rect">
-            <a:avLst/>
-          </a:prstGeom>
-          <a:noFill/>
-        </p:spPr>
-        <p:txBody>
-          <a:bodyPr wrap="square" lIns="45720" rIns="45720" tIns="18288" bIns="18288" anchor="t">
-            <a:spAutoFit/>
-          </a:bodyPr>
-          <a:lstStyle/>
-          <a:p>
-            <a:pPr algn="l"/>
-            <a:r>
-              <a:rPr sz="2280" b="1" i="0">
-                <a:solidFill>
-                  <a:srgbClr val="1A1A1A"/>
-                </a:solidFill>
-                <a:latin typeface="Lexend"/>
-              </a:rPr>
-              <a:t>D.   </a:t>
-            </a:r>
-            <a:r>
-              <a:rPr sz="2280" b="0" i="0">
-                <a:solidFill>
-                  <a:srgbClr val="1A1A1A"/>
-                </a:solidFill>
-                <a:latin typeface="Lexend"/>
-              </a:rPr>
-              <a:t>6 × 10</a:t>
-            </a:r>
-            <a:r>
-              <a:rPr sz="2280" b="0" i="0" baseline="30000">
-                <a:solidFill>
-                  <a:srgbClr val="1A1A1A"/>
-                </a:solidFill>
-                <a:latin typeface="Lexend"/>
-              </a:rPr>
-              <a:t>16</a:t>
-            </a:r>
-          </a:p>
-        </p:txBody>
-      </p:sp>
-      <p:sp>
-        <p:nvSpPr>
-          <p:cNvPr id="14" name="TextBox 13"/>
-          <p:cNvSpPr txBox="1"/>
-          <p:nvPr/>
-        </p:nvSpPr>
-        <p:spPr>
-          <a:xfrm>
-            <a:off x="777240" y="5238319"/>
-            <a:ext cx="10607040" cy="457200"/>
-          </a:xfrm>
-          <a:prstGeom prst="rect">
-            <a:avLst/>
-          </a:prstGeom>
-          <a:noFill/>
-        </p:spPr>
-        <p:txBody>
-          <a:bodyPr wrap="square" lIns="45720" rIns="45720" tIns="18288" bIns="18288" anchor="t">
-            <a:spAutoFit/>
-          </a:bodyPr>
-          <a:lstStyle/>
-          <a:p>
-            <a:pPr algn="ctr"/>
-            <a:r>
-              <a:rPr sz="2470" b="1" i="0">
-                <a:solidFill>
-                  <a:srgbClr val="1A1A1A"/>
-                </a:solidFill>
-                <a:latin typeface="Lexend"/>
-              </a:rPr>
-              <a:t>Answer it.</a:t>
+              <a:rPr sz="3040" b="1" i="0">
+                <a:solidFill>
+                  <a:srgbClr val="9E1B32"/>
+                </a:solidFill>
+                <a:latin typeface="Lexend"/>
+              </a:rPr>
+              <a:t>Answer:   8.2 × 10</a:t>
+            </a:r>
+            <a:r>
+              <a:rPr sz="3040" b="1" i="0" baseline="30000">
+                <a:solidFill>
+                  <a:srgbClr val="9E1B32"/>
+                </a:solidFill>
+                <a:latin typeface="Lexend"/>
+              </a:rPr>
+              <a:t>-4</a:t>
             </a:r>
           </a:p>
         </p:txBody>
@@ -9944,7 +9698,7 @@
       </p:sp>
       <p:pic>
         <p:nvPicPr>
-          <p:cNvPr id="8" name="Picture 7" descr="172da9cf6bf1b71a.png"/>
+          <p:cNvPr id="8" name="Picture 7" descr="3853590bf4416720.png"/>
           <p:cNvPicPr>
             <a:picLocks noChangeAspect="1"/>
           </p:cNvPicPr>
@@ -9958,8 +9712,8 @@
         </p:blipFill>
         <p:spPr>
           <a:xfrm>
-            <a:off x="4668012" y="2103120"/>
-            <a:ext cx="2825496" cy="414528"/>
+            <a:off x="4669536" y="2196083"/>
+            <a:ext cx="2822448" cy="408432"/>
           </a:xfrm>
           <a:prstGeom prst="rect">
             <a:avLst/>
@@ -9974,7 +9728,7 @@
         </p:nvSpPr>
         <p:spPr>
           <a:xfrm>
-            <a:off x="777240" y="2791967"/>
+            <a:off x="777240" y="2880360"/>
             <a:ext cx="10607040" cy="465151"/>
           </a:xfrm>
           <a:prstGeom prst="rect">
@@ -10009,150 +9763,8 @@
         </p:nvSpPr>
         <p:spPr>
           <a:xfrm>
-            <a:off x="3517745" y="3417139"/>
-            <a:ext cx="3220349" cy="457200"/>
-          </a:xfrm>
-          <a:prstGeom prst="rect">
-            <a:avLst/>
-          </a:prstGeom>
-          <a:noFill/>
-        </p:spPr>
-        <p:txBody>
-          <a:bodyPr wrap="none" lIns="45720" rIns="45720" tIns="18288" bIns="18288" anchor="ctr">
-            <a:noAutofit/>
-          </a:bodyPr>
-          <a:lstStyle/>
-          <a:p>
-            <a:pPr algn="l"/>
-            <a:r>
-              <a:rPr sz="2330" b="0" i="0">
-                <a:solidFill>
-                  <a:srgbClr val="1A1A1A"/>
-                </a:solidFill>
-                <a:latin typeface="Lexend"/>
-              </a:rPr>
-              <a:t>Multiply the fronts:  </a:t>
-            </a:r>
-          </a:p>
-        </p:txBody>
-      </p:sp>
-      <p:pic>
-        <p:nvPicPr>
-          <p:cNvPr id="11" name="Picture 10" descr="441dd60a023e07e4.png"/>
-          <p:cNvPicPr>
-            <a:picLocks noChangeAspect="1"/>
-          </p:cNvPicPr>
-          <p:nvPr/>
-        </p:nvPicPr>
-        <p:blipFill>
-          <a:blip r:embed="rId3"/>
-          <a:stretch>
-            <a:fillRect/>
-          </a:stretch>
-        </p:blipFill>
-        <p:spPr>
-          <a:xfrm>
-            <a:off x="6600935" y="3540583"/>
-            <a:ext cx="1021080" cy="210312"/>
-          </a:xfrm>
-          <a:prstGeom prst="rect">
-            <a:avLst/>
-          </a:prstGeom>
-        </p:spPr>
-      </p:pic>
-      <p:sp>
-        <p:nvSpPr>
-          <p:cNvPr id="12" name="TextBox 11"/>
-          <p:cNvSpPr txBox="1"/>
-          <p:nvPr/>
-        </p:nvSpPr>
-        <p:spPr>
-          <a:xfrm>
-            <a:off x="3517745" y="3920059"/>
-            <a:ext cx="3315516" cy="457200"/>
-          </a:xfrm>
-          <a:prstGeom prst="rect">
-            <a:avLst/>
-          </a:prstGeom>
-          <a:noFill/>
-        </p:spPr>
-        <p:txBody>
-          <a:bodyPr wrap="none" lIns="45720" rIns="45720" tIns="18288" bIns="18288" anchor="ctr">
-            <a:noAutofit/>
-          </a:bodyPr>
-          <a:lstStyle/>
-          <a:p>
-            <a:pPr algn="l"/>
-            <a:r>
-              <a:rPr sz="2330" b="0" i="0">
-                <a:solidFill>
-                  <a:srgbClr val="1A1A1A"/>
-                </a:solidFill>
-                <a:latin typeface="Lexend"/>
-              </a:rPr>
-              <a:t>Add the exponents:  </a:t>
-            </a:r>
-          </a:p>
-        </p:txBody>
-      </p:sp>
-      <p:pic>
-        <p:nvPicPr>
-          <p:cNvPr id="13" name="Picture 12" descr="579cc9c9ffeab55b.png"/>
-          <p:cNvPicPr>
-            <a:picLocks noChangeAspect="1"/>
-          </p:cNvPicPr>
-          <p:nvPr/>
-        </p:nvPicPr>
-        <p:blipFill>
-          <a:blip r:embed="rId4"/>
-          <a:stretch>
-            <a:fillRect/>
-          </a:stretch>
-        </p:blipFill>
-        <p:spPr>
-          <a:xfrm>
-            <a:off x="6696102" y="4017595"/>
-            <a:ext cx="1950720" cy="262128"/>
-          </a:xfrm>
-          <a:prstGeom prst="rect">
-            <a:avLst/>
-          </a:prstGeom>
-        </p:spPr>
-      </p:pic>
-      <p:pic>
-        <p:nvPicPr>
-          <p:cNvPr id="14" name="Picture 13" descr="10c89d61f9e09d40.png"/>
-          <p:cNvPicPr>
-            <a:picLocks noChangeAspect="1"/>
-          </p:cNvPicPr>
-          <p:nvPr/>
-        </p:nvPicPr>
-        <p:blipFill>
-          <a:blip r:embed="rId5"/>
-          <a:stretch>
-            <a:fillRect/>
-          </a:stretch>
-        </p:blipFill>
-        <p:spPr>
-          <a:xfrm>
-            <a:off x="3572609" y="4520515"/>
-            <a:ext cx="954023" cy="262128"/>
-          </a:xfrm>
-          <a:prstGeom prst="rect">
-            <a:avLst/>
-          </a:prstGeom>
-        </p:spPr>
-      </p:pic>
-      <p:sp>
-        <p:nvSpPr>
-          <p:cNvPr id="15" name="TextBox 14"/>
-          <p:cNvSpPr txBox="1"/>
-          <p:nvPr/>
-        </p:nvSpPr>
-        <p:spPr>
-          <a:xfrm>
-            <a:off x="777240" y="4994479"/>
-            <a:ext cx="10607040" cy="548640"/>
+            <a:off x="1874519" y="3546679"/>
+            <a:ext cx="4572000" cy="548640"/>
           </a:xfrm>
           <a:prstGeom prst="rect">
             <a:avLst/>
@@ -10165,24 +9777,227 @@
           </a:bodyPr>
           <a:lstStyle/>
           <a:p>
+            <a:pPr algn="l"/>
+            <a:r>
+              <a:rPr sz="2280" b="1" i="0">
+                <a:solidFill>
+                  <a:srgbClr val="1A1A1A"/>
+                </a:solidFill>
+                <a:latin typeface="Lexend"/>
+              </a:rPr>
+              <a:t>A.   </a:t>
+            </a:r>
+            <a:r>
+              <a:rPr sz="2280" b="0" i="0">
+                <a:solidFill>
+                  <a:srgbClr val="1A1A1A"/>
+                </a:solidFill>
+                <a:latin typeface="Lexend"/>
+              </a:rPr>
+              <a:t>8 × 10</a:t>
+            </a:r>
+            <a:r>
+              <a:rPr sz="2280" b="0" i="0" baseline="30000">
+                <a:solidFill>
+                  <a:srgbClr val="1A1A1A"/>
+                </a:solidFill>
+                <a:latin typeface="Lexend"/>
+              </a:rPr>
+              <a:t>-2</a:t>
+            </a:r>
+          </a:p>
+        </p:txBody>
+      </p:sp>
+      <p:sp>
+        <p:nvSpPr>
+          <p:cNvPr id="11" name="TextBox 10"/>
+          <p:cNvSpPr txBox="1"/>
+          <p:nvPr/>
+        </p:nvSpPr>
+        <p:spPr>
+          <a:xfrm>
+            <a:off x="6629400" y="3546679"/>
+            <a:ext cx="4572000" cy="548640"/>
+          </a:xfrm>
+          <a:prstGeom prst="rect">
+            <a:avLst/>
+          </a:prstGeom>
+          <a:noFill/>
+        </p:spPr>
+        <p:txBody>
+          <a:bodyPr wrap="square" lIns="45720" rIns="45720" tIns="18288" bIns="18288" anchor="t">
+            <a:spAutoFit/>
+          </a:bodyPr>
+          <a:lstStyle/>
+          <a:p>
+            <a:pPr algn="l"/>
+            <a:r>
+              <a:rPr sz="2280" b="1" i="0">
+                <a:solidFill>
+                  <a:srgbClr val="1A1A1A"/>
+                </a:solidFill>
+                <a:latin typeface="Lexend"/>
+              </a:rPr>
+              <a:t>B.   </a:t>
+            </a:r>
+            <a:r>
+              <a:rPr sz="2280" b="0" i="0">
+                <a:solidFill>
+                  <a:srgbClr val="1A1A1A"/>
+                </a:solidFill>
+                <a:latin typeface="Lexend"/>
+              </a:rPr>
+              <a:t>8 × 10</a:t>
+            </a:r>
+            <a:r>
+              <a:rPr sz="2280" b="0" i="0" baseline="30000">
+                <a:solidFill>
+                  <a:srgbClr val="1A1A1A"/>
+                </a:solidFill>
+                <a:latin typeface="Lexend"/>
+              </a:rPr>
+              <a:t>63</a:t>
+            </a:r>
+          </a:p>
+        </p:txBody>
+      </p:sp>
+      <p:sp>
+        <p:nvSpPr>
+          <p:cNvPr id="12" name="TextBox 11"/>
+          <p:cNvSpPr txBox="1"/>
+          <p:nvPr/>
+        </p:nvSpPr>
+        <p:spPr>
+          <a:xfrm>
+            <a:off x="1874519" y="4232479"/>
+            <a:ext cx="4572000" cy="548640"/>
+          </a:xfrm>
+          <a:prstGeom prst="rect">
+            <a:avLst/>
+          </a:prstGeom>
+          <a:noFill/>
+        </p:spPr>
+        <p:txBody>
+          <a:bodyPr wrap="square" lIns="45720" rIns="45720" tIns="18288" bIns="18288" anchor="t">
+            <a:spAutoFit/>
+          </a:bodyPr>
+          <a:lstStyle/>
+          <a:p>
+            <a:pPr algn="l"/>
+            <a:r>
+              <a:rPr sz="2280" b="1" i="0">
+                <a:solidFill>
+                  <a:srgbClr val="1A1A1A"/>
+                </a:solidFill>
+                <a:latin typeface="Lexend"/>
+              </a:rPr>
+              <a:t>C.   </a:t>
+            </a:r>
+            <a:r>
+              <a:rPr sz="2280" b="0" i="0">
+                <a:solidFill>
+                  <a:srgbClr val="1A1A1A"/>
+                </a:solidFill>
+                <a:latin typeface="Lexend"/>
+              </a:rPr>
+              <a:t>8 × 10</a:t>
+            </a:r>
+            <a:r>
+              <a:rPr sz="2280" b="0" i="0" baseline="30000">
+                <a:solidFill>
+                  <a:srgbClr val="1A1A1A"/>
+                </a:solidFill>
+                <a:latin typeface="Lexend"/>
+              </a:rPr>
+              <a:t>16</a:t>
+            </a:r>
+          </a:p>
+        </p:txBody>
+      </p:sp>
+      <p:sp>
+        <p:nvSpPr>
+          <p:cNvPr id="13" name="TextBox 12"/>
+          <p:cNvSpPr txBox="1"/>
+          <p:nvPr/>
+        </p:nvSpPr>
+        <p:spPr>
+          <a:xfrm>
+            <a:off x="6629400" y="4232479"/>
+            <a:ext cx="4572000" cy="548640"/>
+          </a:xfrm>
+          <a:prstGeom prst="rect">
+            <a:avLst/>
+          </a:prstGeom>
+          <a:noFill/>
+        </p:spPr>
+        <p:txBody>
+          <a:bodyPr wrap="square" lIns="45720" rIns="45720" tIns="18288" bIns="18288" anchor="t">
+            <a:spAutoFit/>
+          </a:bodyPr>
+          <a:lstStyle/>
+          <a:p>
+            <a:pPr algn="l"/>
+            <a:r>
+              <a:rPr sz="2280" b="1" i="0">
+                <a:solidFill>
+                  <a:srgbClr val="1A1A1A"/>
+                </a:solidFill>
+                <a:latin typeface="Lexend"/>
+              </a:rPr>
+              <a:t>D.   </a:t>
+            </a:r>
+            <a:r>
+              <a:rPr sz="2280" b="0" i="0">
+                <a:solidFill>
+                  <a:srgbClr val="1A1A1A"/>
+                </a:solidFill>
+                <a:latin typeface="Lexend"/>
+              </a:rPr>
+              <a:t>6 × 10</a:t>
+            </a:r>
+            <a:r>
+              <a:rPr sz="2280" b="0" i="0" baseline="30000">
+                <a:solidFill>
+                  <a:srgbClr val="1A1A1A"/>
+                </a:solidFill>
+                <a:latin typeface="Lexend"/>
+              </a:rPr>
+              <a:t>16</a:t>
+            </a:r>
+          </a:p>
+        </p:txBody>
+      </p:sp>
+      <p:sp>
+        <p:nvSpPr>
+          <p:cNvPr id="14" name="TextBox 13"/>
+          <p:cNvSpPr txBox="1"/>
+          <p:nvPr/>
+        </p:nvSpPr>
+        <p:spPr>
+          <a:xfrm>
+            <a:off x="777240" y="5238319"/>
+            <a:ext cx="10607040" cy="457200"/>
+          </a:xfrm>
+          <a:prstGeom prst="rect">
+            <a:avLst/>
+          </a:prstGeom>
+          <a:noFill/>
+        </p:spPr>
+        <p:txBody>
+          <a:bodyPr wrap="square" lIns="45720" rIns="45720" tIns="18288" bIns="18288" anchor="t">
+            <a:spAutoFit/>
+          </a:bodyPr>
+          <a:lstStyle/>
+          <a:p>
             <a:pPr algn="ctr"/>
             <a:r>
-              <a:rPr sz="3040" b="1" i="0">
-                <a:solidFill>
-                  <a:srgbClr val="9E1B32"/>
-                </a:solidFill>
-                <a:latin typeface="Lexend"/>
-              </a:rPr>
-              <a:t>Answer:   C — 8 × 10</a:t>
-            </a:r>
-            <a:r>
-              <a:rPr sz="3040" b="1" i="0" baseline="30000">
-                <a:solidFill>
-                  <a:srgbClr val="9E1B32"/>
-                </a:solidFill>
-                <a:latin typeface="Lexend"/>
-              </a:rPr>
-              <a:t>16</a:t>
+              <a:rPr sz="2470" b="1" i="0">
+                <a:solidFill>
+                  <a:srgbClr val="1A1A1A"/>
+                </a:solidFill>
+                <a:latin typeface="Lexend"/>
+              </a:rPr>
+              <a:t>Answer it.</a:t>
             </a:r>
           </a:p>
         </p:txBody>
@@ -10235,7 +10050,7 @@
                 </a:solidFill>
                 <a:latin typeface="Lexend"/>
               </a:rPr>
-              <a:t>Whiteboards   ·   Question 6 of 9</a:t>
+              <a:t>Whiteboards   ·   Question 5 of 9</a:t>
             </a:r>
           </a:p>
         </p:txBody>
@@ -10417,7 +10232,7 @@
       </p:sp>
       <p:pic>
         <p:nvPicPr>
-          <p:cNvPr id="8" name="Picture 7" descr="811d128c9a4cb37b.png"/>
+          <p:cNvPr id="8" name="Picture 7" descr="172da9cf6bf1b71a.png"/>
           <p:cNvPicPr>
             <a:picLocks noChangeAspect="1"/>
           </p:cNvPicPr>
@@ -10431,8 +10246,8 @@
         </p:blipFill>
         <p:spPr>
           <a:xfrm>
-            <a:off x="4668012" y="2196083"/>
-            <a:ext cx="2825496" cy="408432"/>
+            <a:off x="4668012" y="2103120"/>
+            <a:ext cx="2825496" cy="414528"/>
           </a:xfrm>
           <a:prstGeom prst="rect">
             <a:avLst/>
@@ -10447,7 +10262,7 @@
         </p:nvSpPr>
         <p:spPr>
           <a:xfrm>
-            <a:off x="777240" y="2880360"/>
+            <a:off x="777240" y="2791967"/>
             <a:ext cx="10607040" cy="465151"/>
           </a:xfrm>
           <a:prstGeom prst="rect">
@@ -10469,7 +10284,7 @@
                 </a:solidFill>
                 <a:latin typeface="Lexend"/>
               </a:rPr>
-              <a:t>Which is the product, written in scientific notation?</a:t>
+              <a:t>Which is the product?</a:t>
             </a:r>
           </a:p>
         </p:txBody>
@@ -10482,8 +10297,150 @@
         </p:nvSpPr>
         <p:spPr>
           <a:xfrm>
-            <a:off x="1874519" y="3546679"/>
-            <a:ext cx="4572000" cy="548640"/>
+            <a:off x="3517745" y="3417139"/>
+            <a:ext cx="3220349" cy="457200"/>
+          </a:xfrm>
+          <a:prstGeom prst="rect">
+            <a:avLst/>
+          </a:prstGeom>
+          <a:noFill/>
+        </p:spPr>
+        <p:txBody>
+          <a:bodyPr wrap="none" lIns="45720" rIns="45720" tIns="18288" bIns="18288" anchor="ctr">
+            <a:noAutofit/>
+          </a:bodyPr>
+          <a:lstStyle/>
+          <a:p>
+            <a:pPr algn="l"/>
+            <a:r>
+              <a:rPr sz="2330" b="0" i="0">
+                <a:solidFill>
+                  <a:srgbClr val="1A1A1A"/>
+                </a:solidFill>
+                <a:latin typeface="Lexend"/>
+              </a:rPr>
+              <a:t>Multiply the fronts:  </a:t>
+            </a:r>
+          </a:p>
+        </p:txBody>
+      </p:sp>
+      <p:pic>
+        <p:nvPicPr>
+          <p:cNvPr id="11" name="Picture 10" descr="441dd60a023e07e4.png"/>
+          <p:cNvPicPr>
+            <a:picLocks noChangeAspect="1"/>
+          </p:cNvPicPr>
+          <p:nvPr/>
+        </p:nvPicPr>
+        <p:blipFill>
+          <a:blip r:embed="rId3"/>
+          <a:stretch>
+            <a:fillRect/>
+          </a:stretch>
+        </p:blipFill>
+        <p:spPr>
+          <a:xfrm>
+            <a:off x="6600935" y="3540583"/>
+            <a:ext cx="1021080" cy="210312"/>
+          </a:xfrm>
+          <a:prstGeom prst="rect">
+            <a:avLst/>
+          </a:prstGeom>
+        </p:spPr>
+      </p:pic>
+      <p:sp>
+        <p:nvSpPr>
+          <p:cNvPr id="12" name="TextBox 11"/>
+          <p:cNvSpPr txBox="1"/>
+          <p:nvPr/>
+        </p:nvSpPr>
+        <p:spPr>
+          <a:xfrm>
+            <a:off x="3517745" y="3920059"/>
+            <a:ext cx="3315516" cy="457200"/>
+          </a:xfrm>
+          <a:prstGeom prst="rect">
+            <a:avLst/>
+          </a:prstGeom>
+          <a:noFill/>
+        </p:spPr>
+        <p:txBody>
+          <a:bodyPr wrap="none" lIns="45720" rIns="45720" tIns="18288" bIns="18288" anchor="ctr">
+            <a:noAutofit/>
+          </a:bodyPr>
+          <a:lstStyle/>
+          <a:p>
+            <a:pPr algn="l"/>
+            <a:r>
+              <a:rPr sz="2330" b="0" i="0">
+                <a:solidFill>
+                  <a:srgbClr val="1A1A1A"/>
+                </a:solidFill>
+                <a:latin typeface="Lexend"/>
+              </a:rPr>
+              <a:t>Add the exponents:  </a:t>
+            </a:r>
+          </a:p>
+        </p:txBody>
+      </p:sp>
+      <p:pic>
+        <p:nvPicPr>
+          <p:cNvPr id="13" name="Picture 12" descr="579cc9c9ffeab55b.png"/>
+          <p:cNvPicPr>
+            <a:picLocks noChangeAspect="1"/>
+          </p:cNvPicPr>
+          <p:nvPr/>
+        </p:nvPicPr>
+        <p:blipFill>
+          <a:blip r:embed="rId4"/>
+          <a:stretch>
+            <a:fillRect/>
+          </a:stretch>
+        </p:blipFill>
+        <p:spPr>
+          <a:xfrm>
+            <a:off x="6696102" y="4017595"/>
+            <a:ext cx="1950720" cy="262128"/>
+          </a:xfrm>
+          <a:prstGeom prst="rect">
+            <a:avLst/>
+          </a:prstGeom>
+        </p:spPr>
+      </p:pic>
+      <p:pic>
+        <p:nvPicPr>
+          <p:cNvPr id="14" name="Picture 13" descr="10c89d61f9e09d40.png"/>
+          <p:cNvPicPr>
+            <a:picLocks noChangeAspect="1"/>
+          </p:cNvPicPr>
+          <p:nvPr/>
+        </p:nvPicPr>
+        <p:blipFill>
+          <a:blip r:embed="rId5"/>
+          <a:stretch>
+            <a:fillRect/>
+          </a:stretch>
+        </p:blipFill>
+        <p:spPr>
+          <a:xfrm>
+            <a:off x="3572609" y="4520515"/>
+            <a:ext cx="954023" cy="262128"/>
+          </a:xfrm>
+          <a:prstGeom prst="rect">
+            <a:avLst/>
+          </a:prstGeom>
+        </p:spPr>
+      </p:pic>
+      <p:sp>
+        <p:nvSpPr>
+          <p:cNvPr id="15" name="TextBox 14"/>
+          <p:cNvSpPr txBox="1"/>
+          <p:nvPr/>
+        </p:nvSpPr>
+        <p:spPr>
+          <a:xfrm>
+            <a:off x="777240" y="4994479"/>
+            <a:ext cx="10607040" cy="548640"/>
           </a:xfrm>
           <a:prstGeom prst="rect">
             <a:avLst/>
@@ -10496,227 +10453,24 @@
           </a:bodyPr>
           <a:lstStyle/>
           <a:p>
-            <a:pPr algn="l"/>
-            <a:r>
-              <a:rPr sz="2280" b="1" i="0">
-                <a:solidFill>
-                  <a:srgbClr val="1A1A1A"/>
-                </a:solidFill>
-                <a:latin typeface="Lexend"/>
-              </a:rPr>
-              <a:t>A.   </a:t>
-            </a:r>
-            <a:r>
-              <a:rPr sz="2280" b="0" i="0">
-                <a:solidFill>
-                  <a:srgbClr val="1A1A1A"/>
-                </a:solidFill>
-                <a:latin typeface="Lexend"/>
-              </a:rPr>
-              <a:t>2 × 10</a:t>
-            </a:r>
-            <a:r>
-              <a:rPr sz="2280" b="0" i="0" baseline="30000">
-                <a:solidFill>
-                  <a:srgbClr val="1A1A1A"/>
-                </a:solidFill>
-                <a:latin typeface="Lexend"/>
-              </a:rPr>
-              <a:t>9</a:t>
-            </a:r>
-          </a:p>
-        </p:txBody>
-      </p:sp>
-      <p:sp>
-        <p:nvSpPr>
-          <p:cNvPr id="11" name="TextBox 10"/>
-          <p:cNvSpPr txBox="1"/>
-          <p:nvPr/>
-        </p:nvSpPr>
-        <p:spPr>
-          <a:xfrm>
-            <a:off x="6629400" y="3546679"/>
-            <a:ext cx="4572000" cy="548640"/>
-          </a:xfrm>
-          <a:prstGeom prst="rect">
-            <a:avLst/>
-          </a:prstGeom>
-          <a:noFill/>
-        </p:spPr>
-        <p:txBody>
-          <a:bodyPr wrap="square" lIns="45720" rIns="45720" tIns="18288" bIns="18288" anchor="t">
-            <a:spAutoFit/>
-          </a:bodyPr>
-          <a:lstStyle/>
-          <a:p>
-            <a:pPr algn="l"/>
-            <a:r>
-              <a:rPr sz="2280" b="1" i="0">
-                <a:solidFill>
-                  <a:srgbClr val="1A1A1A"/>
-                </a:solidFill>
-                <a:latin typeface="Lexend"/>
-              </a:rPr>
-              <a:t>B.   </a:t>
-            </a:r>
-            <a:r>
-              <a:rPr sz="2280" b="0" i="0">
-                <a:solidFill>
-                  <a:srgbClr val="1A1A1A"/>
-                </a:solidFill>
-                <a:latin typeface="Lexend"/>
-              </a:rPr>
-              <a:t>20 × 10</a:t>
-            </a:r>
-            <a:r>
-              <a:rPr sz="2280" b="0" i="0" baseline="30000">
-                <a:solidFill>
-                  <a:srgbClr val="1A1A1A"/>
-                </a:solidFill>
-                <a:latin typeface="Lexend"/>
-              </a:rPr>
-              <a:t>9</a:t>
-            </a:r>
-          </a:p>
-        </p:txBody>
-      </p:sp>
-      <p:sp>
-        <p:nvSpPr>
-          <p:cNvPr id="12" name="TextBox 11"/>
-          <p:cNvSpPr txBox="1"/>
-          <p:nvPr/>
-        </p:nvSpPr>
-        <p:spPr>
-          <a:xfrm>
-            <a:off x="1874519" y="4232479"/>
-            <a:ext cx="4572000" cy="548640"/>
-          </a:xfrm>
-          <a:prstGeom prst="rect">
-            <a:avLst/>
-          </a:prstGeom>
-          <a:noFill/>
-        </p:spPr>
-        <p:txBody>
-          <a:bodyPr wrap="square" lIns="45720" rIns="45720" tIns="18288" bIns="18288" anchor="t">
-            <a:spAutoFit/>
-          </a:bodyPr>
-          <a:lstStyle/>
-          <a:p>
-            <a:pPr algn="l"/>
-            <a:r>
-              <a:rPr sz="2280" b="1" i="0">
-                <a:solidFill>
-                  <a:srgbClr val="1A1A1A"/>
-                </a:solidFill>
-                <a:latin typeface="Lexend"/>
-              </a:rPr>
-              <a:t>C.   </a:t>
-            </a:r>
-            <a:r>
-              <a:rPr sz="2280" b="0" i="0">
-                <a:solidFill>
-                  <a:srgbClr val="1A1A1A"/>
-                </a:solidFill>
-                <a:latin typeface="Lexend"/>
-              </a:rPr>
-              <a:t>20 × 10</a:t>
-            </a:r>
-            <a:r>
-              <a:rPr sz="2280" b="0" i="0" baseline="30000">
-                <a:solidFill>
-                  <a:srgbClr val="1A1A1A"/>
-                </a:solidFill>
-                <a:latin typeface="Lexend"/>
-              </a:rPr>
-              <a:t>18</a:t>
-            </a:r>
-          </a:p>
-        </p:txBody>
-      </p:sp>
-      <p:sp>
-        <p:nvSpPr>
-          <p:cNvPr id="13" name="TextBox 12"/>
-          <p:cNvSpPr txBox="1"/>
-          <p:nvPr/>
-        </p:nvSpPr>
-        <p:spPr>
-          <a:xfrm>
-            <a:off x="6629400" y="4232479"/>
-            <a:ext cx="4572000" cy="548640"/>
-          </a:xfrm>
-          <a:prstGeom prst="rect">
-            <a:avLst/>
-          </a:prstGeom>
-          <a:noFill/>
-        </p:spPr>
-        <p:txBody>
-          <a:bodyPr wrap="square" lIns="45720" rIns="45720" tIns="18288" bIns="18288" anchor="t">
-            <a:spAutoFit/>
-          </a:bodyPr>
-          <a:lstStyle/>
-          <a:p>
-            <a:pPr algn="l"/>
-            <a:r>
-              <a:rPr sz="2280" b="1" i="0">
-                <a:solidFill>
-                  <a:srgbClr val="1A1A1A"/>
-                </a:solidFill>
-                <a:latin typeface="Lexend"/>
-              </a:rPr>
-              <a:t>D.   </a:t>
-            </a:r>
-            <a:r>
-              <a:rPr sz="2280" b="0" i="0">
-                <a:solidFill>
-                  <a:srgbClr val="1A1A1A"/>
-                </a:solidFill>
-                <a:latin typeface="Lexend"/>
-              </a:rPr>
-              <a:t>2 × 10</a:t>
-            </a:r>
-            <a:r>
-              <a:rPr sz="2280" b="0" i="0" baseline="30000">
-                <a:solidFill>
-                  <a:srgbClr val="1A1A1A"/>
-                </a:solidFill>
-                <a:latin typeface="Lexend"/>
-              </a:rPr>
-              <a:t>10</a:t>
-            </a:r>
-          </a:p>
-        </p:txBody>
-      </p:sp>
-      <p:sp>
-        <p:nvSpPr>
-          <p:cNvPr id="14" name="TextBox 13"/>
-          <p:cNvSpPr txBox="1"/>
-          <p:nvPr/>
-        </p:nvSpPr>
-        <p:spPr>
-          <a:xfrm>
-            <a:off x="777240" y="5238319"/>
-            <a:ext cx="10607040" cy="457200"/>
-          </a:xfrm>
-          <a:prstGeom prst="rect">
-            <a:avLst/>
-          </a:prstGeom>
-          <a:noFill/>
-        </p:spPr>
-        <p:txBody>
-          <a:bodyPr wrap="square" lIns="45720" rIns="45720" tIns="18288" bIns="18288" anchor="t">
-            <a:spAutoFit/>
-          </a:bodyPr>
-          <a:lstStyle/>
-          <a:p>
             <a:pPr algn="ctr"/>
             <a:r>
-              <a:rPr sz="2470" b="1" i="0">
-                <a:solidFill>
-                  <a:srgbClr val="1A1A1A"/>
-                </a:solidFill>
-                <a:latin typeface="Lexend"/>
-              </a:rPr>
-              <a:t>Answer it.</a:t>
+              <a:rPr sz="3040" b="1" i="0">
+                <a:solidFill>
+                  <a:srgbClr val="9E1B32"/>
+                </a:solidFill>
+                <a:latin typeface="Lexend"/>
+              </a:rPr>
+              <a:t>Answer:   C — 8 × 10</a:t>
+            </a:r>
+            <a:r>
+              <a:rPr sz="3040" b="1" i="0" baseline="30000">
+                <a:solidFill>
+                  <a:srgbClr val="9E1B32"/>
+                </a:solidFill>
+                <a:latin typeface="Lexend"/>
+              </a:rPr>
+              <a:t>16</a:t>
             </a:r>
           </a:p>
         </p:txBody>
@@ -10951,7 +10705,7 @@
       </p:sp>
       <p:pic>
         <p:nvPicPr>
-          <p:cNvPr id="8" name="Picture 7" descr="d3ea7b9b7f4f766c.png"/>
+          <p:cNvPr id="8" name="Picture 7" descr="811d128c9a4cb37b.png"/>
           <p:cNvPicPr>
             <a:picLocks noChangeAspect="1"/>
           </p:cNvPicPr>
@@ -10965,8 +10719,8 @@
         </p:blipFill>
         <p:spPr>
           <a:xfrm>
-            <a:off x="4666487" y="2103120"/>
-            <a:ext cx="2828544" cy="414528"/>
+            <a:off x="4668012" y="2196083"/>
+            <a:ext cx="2825496" cy="408432"/>
           </a:xfrm>
           <a:prstGeom prst="rect">
             <a:avLst/>
@@ -10981,7 +10735,7 @@
         </p:nvSpPr>
         <p:spPr>
           <a:xfrm>
-            <a:off x="777240" y="2791967"/>
+            <a:off x="777240" y="2880360"/>
             <a:ext cx="10607040" cy="465151"/>
           </a:xfrm>
           <a:prstGeom prst="rect">
@@ -11016,150 +10770,8 @@
         </p:nvSpPr>
         <p:spPr>
           <a:xfrm>
-            <a:off x="3572609" y="3417139"/>
-            <a:ext cx="3220349" cy="457200"/>
-          </a:xfrm>
-          <a:prstGeom prst="rect">
-            <a:avLst/>
-          </a:prstGeom>
-          <a:noFill/>
-        </p:spPr>
-        <p:txBody>
-          <a:bodyPr wrap="none" lIns="45720" rIns="45720" tIns="18288" bIns="18288" anchor="ctr">
-            <a:noAutofit/>
-          </a:bodyPr>
-          <a:lstStyle/>
-          <a:p>
-            <a:pPr algn="l"/>
-            <a:r>
-              <a:rPr sz="2330" b="0" i="0">
-                <a:solidFill>
-                  <a:srgbClr val="1A1A1A"/>
-                </a:solidFill>
-                <a:latin typeface="Lexend"/>
-              </a:rPr>
-              <a:t>Multiply the fronts:  </a:t>
-            </a:r>
-          </a:p>
-        </p:txBody>
-      </p:sp>
-      <p:pic>
-        <p:nvPicPr>
-          <p:cNvPr id="11" name="Picture 10" descr="95ecba0795db8e3b.png"/>
-          <p:cNvPicPr>
-            <a:picLocks noChangeAspect="1"/>
-          </p:cNvPicPr>
-          <p:nvPr/>
-        </p:nvPicPr>
-        <p:blipFill>
-          <a:blip r:embed="rId3"/>
-          <a:stretch>
-            <a:fillRect/>
-          </a:stretch>
-        </p:blipFill>
-        <p:spPr>
-          <a:xfrm>
-            <a:off x="6655799" y="3539059"/>
-            <a:ext cx="1197864" cy="213360"/>
-          </a:xfrm>
-          <a:prstGeom prst="rect">
-            <a:avLst/>
-          </a:prstGeom>
-        </p:spPr>
-      </p:pic>
-      <p:sp>
-        <p:nvSpPr>
-          <p:cNvPr id="12" name="TextBox 11"/>
-          <p:cNvSpPr txBox="1"/>
-          <p:nvPr/>
-        </p:nvSpPr>
-        <p:spPr>
-          <a:xfrm>
-            <a:off x="3572609" y="3920059"/>
-            <a:ext cx="3315516" cy="457200"/>
-          </a:xfrm>
-          <a:prstGeom prst="rect">
-            <a:avLst/>
-          </a:prstGeom>
-          <a:noFill/>
-        </p:spPr>
-        <p:txBody>
-          <a:bodyPr wrap="none" lIns="45720" rIns="45720" tIns="18288" bIns="18288" anchor="ctr">
-            <a:noAutofit/>
-          </a:bodyPr>
-          <a:lstStyle/>
-          <a:p>
-            <a:pPr algn="l"/>
-            <a:r>
-              <a:rPr sz="2330" b="0" i="0">
-                <a:solidFill>
-                  <a:srgbClr val="1A1A1A"/>
-                </a:solidFill>
-                <a:latin typeface="Lexend"/>
-              </a:rPr>
-              <a:t>Add the exponents:  </a:t>
-            </a:r>
-          </a:p>
-        </p:txBody>
-      </p:sp>
-      <p:pic>
-        <p:nvPicPr>
-          <p:cNvPr id="13" name="Picture 12" descr="d8f8e59949bbed45.png"/>
-          <p:cNvPicPr>
-            <a:picLocks noChangeAspect="1"/>
-          </p:cNvPicPr>
-          <p:nvPr/>
-        </p:nvPicPr>
-        <p:blipFill>
-          <a:blip r:embed="rId4"/>
-          <a:stretch>
-            <a:fillRect/>
-          </a:stretch>
-        </p:blipFill>
-        <p:spPr>
-          <a:xfrm>
-            <a:off x="6750966" y="4017595"/>
-            <a:ext cx="1840991" cy="262128"/>
-          </a:xfrm>
-          <a:prstGeom prst="rect">
-            <a:avLst/>
-          </a:prstGeom>
-        </p:spPr>
-      </p:pic>
-      <p:pic>
-        <p:nvPicPr>
-          <p:cNvPr id="14" name="Picture 13" descr="a7b20829de9c08ed.png"/>
-          <p:cNvPicPr>
-            <a:picLocks noChangeAspect="1"/>
-          </p:cNvPicPr>
-          <p:nvPr/>
-        </p:nvPicPr>
-        <p:blipFill>
-          <a:blip r:embed="rId5"/>
-          <a:stretch>
-            <a:fillRect/>
-          </a:stretch>
-        </p:blipFill>
-        <p:spPr>
-          <a:xfrm>
-            <a:off x="3627473" y="4520515"/>
-            <a:ext cx="2273808" cy="262128"/>
-          </a:xfrm>
-          <a:prstGeom prst="rect">
-            <a:avLst/>
-          </a:prstGeom>
-        </p:spPr>
-      </p:pic>
-      <p:sp>
-        <p:nvSpPr>
-          <p:cNvPr id="15" name="TextBox 14"/>
-          <p:cNvSpPr txBox="1"/>
-          <p:nvPr/>
-        </p:nvSpPr>
-        <p:spPr>
-          <a:xfrm>
-            <a:off x="777240" y="4994479"/>
-            <a:ext cx="10607040" cy="548640"/>
+            <a:off x="1874519" y="3546679"/>
+            <a:ext cx="4572000" cy="548640"/>
           </a:xfrm>
           <a:prstGeom prst="rect">
             <a:avLst/>
@@ -11172,24 +10784,227 @@
           </a:bodyPr>
           <a:lstStyle/>
           <a:p>
+            <a:pPr algn="l"/>
+            <a:r>
+              <a:rPr sz="2280" b="1" i="0">
+                <a:solidFill>
+                  <a:srgbClr val="1A1A1A"/>
+                </a:solidFill>
+                <a:latin typeface="Lexend"/>
+              </a:rPr>
+              <a:t>A.   </a:t>
+            </a:r>
+            <a:r>
+              <a:rPr sz="2280" b="0" i="0">
+                <a:solidFill>
+                  <a:srgbClr val="1A1A1A"/>
+                </a:solidFill>
+                <a:latin typeface="Lexend"/>
+              </a:rPr>
+              <a:t>2 × 10</a:t>
+            </a:r>
+            <a:r>
+              <a:rPr sz="2280" b="0" i="0" baseline="30000">
+                <a:solidFill>
+                  <a:srgbClr val="1A1A1A"/>
+                </a:solidFill>
+                <a:latin typeface="Lexend"/>
+              </a:rPr>
+              <a:t>9</a:t>
+            </a:r>
+          </a:p>
+        </p:txBody>
+      </p:sp>
+      <p:sp>
+        <p:nvSpPr>
+          <p:cNvPr id="11" name="TextBox 10"/>
+          <p:cNvSpPr txBox="1"/>
+          <p:nvPr/>
+        </p:nvSpPr>
+        <p:spPr>
+          <a:xfrm>
+            <a:off x="6629400" y="3546679"/>
+            <a:ext cx="4572000" cy="548640"/>
+          </a:xfrm>
+          <a:prstGeom prst="rect">
+            <a:avLst/>
+          </a:prstGeom>
+          <a:noFill/>
+        </p:spPr>
+        <p:txBody>
+          <a:bodyPr wrap="square" lIns="45720" rIns="45720" tIns="18288" bIns="18288" anchor="t">
+            <a:spAutoFit/>
+          </a:bodyPr>
+          <a:lstStyle/>
+          <a:p>
+            <a:pPr algn="l"/>
+            <a:r>
+              <a:rPr sz="2280" b="1" i="0">
+                <a:solidFill>
+                  <a:srgbClr val="1A1A1A"/>
+                </a:solidFill>
+                <a:latin typeface="Lexend"/>
+              </a:rPr>
+              <a:t>B.   </a:t>
+            </a:r>
+            <a:r>
+              <a:rPr sz="2280" b="0" i="0">
+                <a:solidFill>
+                  <a:srgbClr val="1A1A1A"/>
+                </a:solidFill>
+                <a:latin typeface="Lexend"/>
+              </a:rPr>
+              <a:t>20 × 10</a:t>
+            </a:r>
+            <a:r>
+              <a:rPr sz="2280" b="0" i="0" baseline="30000">
+                <a:solidFill>
+                  <a:srgbClr val="1A1A1A"/>
+                </a:solidFill>
+                <a:latin typeface="Lexend"/>
+              </a:rPr>
+              <a:t>9</a:t>
+            </a:r>
+          </a:p>
+        </p:txBody>
+      </p:sp>
+      <p:sp>
+        <p:nvSpPr>
+          <p:cNvPr id="12" name="TextBox 11"/>
+          <p:cNvSpPr txBox="1"/>
+          <p:nvPr/>
+        </p:nvSpPr>
+        <p:spPr>
+          <a:xfrm>
+            <a:off x="1874519" y="4232479"/>
+            <a:ext cx="4572000" cy="548640"/>
+          </a:xfrm>
+          <a:prstGeom prst="rect">
+            <a:avLst/>
+          </a:prstGeom>
+          <a:noFill/>
+        </p:spPr>
+        <p:txBody>
+          <a:bodyPr wrap="square" lIns="45720" rIns="45720" tIns="18288" bIns="18288" anchor="t">
+            <a:spAutoFit/>
+          </a:bodyPr>
+          <a:lstStyle/>
+          <a:p>
+            <a:pPr algn="l"/>
+            <a:r>
+              <a:rPr sz="2280" b="1" i="0">
+                <a:solidFill>
+                  <a:srgbClr val="1A1A1A"/>
+                </a:solidFill>
+                <a:latin typeface="Lexend"/>
+              </a:rPr>
+              <a:t>C.   </a:t>
+            </a:r>
+            <a:r>
+              <a:rPr sz="2280" b="0" i="0">
+                <a:solidFill>
+                  <a:srgbClr val="1A1A1A"/>
+                </a:solidFill>
+                <a:latin typeface="Lexend"/>
+              </a:rPr>
+              <a:t>20 × 10</a:t>
+            </a:r>
+            <a:r>
+              <a:rPr sz="2280" b="0" i="0" baseline="30000">
+                <a:solidFill>
+                  <a:srgbClr val="1A1A1A"/>
+                </a:solidFill>
+                <a:latin typeface="Lexend"/>
+              </a:rPr>
+              <a:t>18</a:t>
+            </a:r>
+          </a:p>
+        </p:txBody>
+      </p:sp>
+      <p:sp>
+        <p:nvSpPr>
+          <p:cNvPr id="13" name="TextBox 12"/>
+          <p:cNvSpPr txBox="1"/>
+          <p:nvPr/>
+        </p:nvSpPr>
+        <p:spPr>
+          <a:xfrm>
+            <a:off x="6629400" y="4232479"/>
+            <a:ext cx="4572000" cy="548640"/>
+          </a:xfrm>
+          <a:prstGeom prst="rect">
+            <a:avLst/>
+          </a:prstGeom>
+          <a:noFill/>
+        </p:spPr>
+        <p:txBody>
+          <a:bodyPr wrap="square" lIns="45720" rIns="45720" tIns="18288" bIns="18288" anchor="t">
+            <a:spAutoFit/>
+          </a:bodyPr>
+          <a:lstStyle/>
+          <a:p>
+            <a:pPr algn="l"/>
+            <a:r>
+              <a:rPr sz="2280" b="1" i="0">
+                <a:solidFill>
+                  <a:srgbClr val="1A1A1A"/>
+                </a:solidFill>
+                <a:latin typeface="Lexend"/>
+              </a:rPr>
+              <a:t>D.   </a:t>
+            </a:r>
+            <a:r>
+              <a:rPr sz="2280" b="0" i="0">
+                <a:solidFill>
+                  <a:srgbClr val="1A1A1A"/>
+                </a:solidFill>
+                <a:latin typeface="Lexend"/>
+              </a:rPr>
+              <a:t>2 × 10</a:t>
+            </a:r>
+            <a:r>
+              <a:rPr sz="2280" b="0" i="0" baseline="30000">
+                <a:solidFill>
+                  <a:srgbClr val="1A1A1A"/>
+                </a:solidFill>
+                <a:latin typeface="Lexend"/>
+              </a:rPr>
+              <a:t>10</a:t>
+            </a:r>
+          </a:p>
+        </p:txBody>
+      </p:sp>
+      <p:sp>
+        <p:nvSpPr>
+          <p:cNvPr id="14" name="TextBox 13"/>
+          <p:cNvSpPr txBox="1"/>
+          <p:nvPr/>
+        </p:nvSpPr>
+        <p:spPr>
+          <a:xfrm>
+            <a:off x="777240" y="5238319"/>
+            <a:ext cx="10607040" cy="457200"/>
+          </a:xfrm>
+          <a:prstGeom prst="rect">
+            <a:avLst/>
+          </a:prstGeom>
+          <a:noFill/>
+        </p:spPr>
+        <p:txBody>
+          <a:bodyPr wrap="square" lIns="45720" rIns="45720" tIns="18288" bIns="18288" anchor="t">
+            <a:spAutoFit/>
+          </a:bodyPr>
+          <a:lstStyle/>
+          <a:p>
             <a:pPr algn="ctr"/>
             <a:r>
-              <a:rPr sz="3040" b="1" i="0">
-                <a:solidFill>
-                  <a:srgbClr val="9E1B32"/>
-                </a:solidFill>
-                <a:latin typeface="Lexend"/>
-              </a:rPr>
-              <a:t>Answer:   D — 2 × 10</a:t>
-            </a:r>
-            <a:r>
-              <a:rPr sz="3040" b="1" i="0" baseline="30000">
-                <a:solidFill>
-                  <a:srgbClr val="9E1B32"/>
-                </a:solidFill>
-                <a:latin typeface="Lexend"/>
-              </a:rPr>
-              <a:t>10</a:t>
+              <a:rPr sz="2470" b="1" i="0">
+                <a:solidFill>
+                  <a:srgbClr val="1A1A1A"/>
+                </a:solidFill>
+                <a:latin typeface="Lexend"/>
+              </a:rPr>
+              <a:t>Answer it.</a:t>
             </a:r>
           </a:p>
         </p:txBody>
@@ -11242,7 +11057,7 @@
                 </a:solidFill>
                 <a:latin typeface="Lexend"/>
               </a:rPr>
-              <a:t>Whiteboards   ·   Question 7 of 9</a:t>
+              <a:t>Whiteboards   ·   Question 6 of 9</a:t>
             </a:r>
           </a:p>
         </p:txBody>
@@ -11424,7 +11239,7 @@
       </p:sp>
       <p:pic>
         <p:nvPicPr>
-          <p:cNvPr id="8" name="Picture 7" descr="c4bdb38362d4edfd.png"/>
+          <p:cNvPr id="8" name="Picture 7" descr="d3ea7b9b7f4f766c.png"/>
           <p:cNvPicPr>
             <a:picLocks noChangeAspect="1"/>
           </p:cNvPicPr>
@@ -11438,8 +11253,8 @@
         </p:blipFill>
         <p:spPr>
           <a:xfrm>
-            <a:off x="5434583" y="2194560"/>
-            <a:ext cx="1292352" cy="801624"/>
+            <a:off x="4666487" y="2103120"/>
+            <a:ext cx="2828544" cy="414528"/>
           </a:xfrm>
           <a:prstGeom prst="rect">
             <a:avLst/>
@@ -11454,8 +11269,8 @@
         </p:nvSpPr>
         <p:spPr>
           <a:xfrm>
-            <a:off x="777240" y="4343400"/>
-            <a:ext cx="10607040" cy="457200"/>
+            <a:off x="777240" y="2791967"/>
+            <a:ext cx="10607040" cy="465151"/>
           </a:xfrm>
           <a:prstGeom prst="rect">
             <a:avLst/>
@@ -11470,13 +11285,199 @@
           <a:p>
             <a:pPr algn="ctr"/>
             <a:r>
-              <a:rPr sz="2470" b="1" i="0">
+              <a:rPr sz="2470" b="0" i="0">
                 <a:solidFill>
                   <a:srgbClr val="1A1A1A"/>
                 </a:solidFill>
                 <a:latin typeface="Lexend"/>
               </a:rPr>
-              <a:t>Answer it.</a:t>
+              <a:t>Which is the product, written in scientific notation?</a:t>
+            </a:r>
+          </a:p>
+        </p:txBody>
+      </p:sp>
+      <p:sp>
+        <p:nvSpPr>
+          <p:cNvPr id="10" name="TextBox 9"/>
+          <p:cNvSpPr txBox="1"/>
+          <p:nvPr/>
+        </p:nvSpPr>
+        <p:spPr>
+          <a:xfrm>
+            <a:off x="3572609" y="3417139"/>
+            <a:ext cx="3220349" cy="457200"/>
+          </a:xfrm>
+          <a:prstGeom prst="rect">
+            <a:avLst/>
+          </a:prstGeom>
+          <a:noFill/>
+        </p:spPr>
+        <p:txBody>
+          <a:bodyPr wrap="none" lIns="45720" rIns="45720" tIns="18288" bIns="18288" anchor="ctr">
+            <a:noAutofit/>
+          </a:bodyPr>
+          <a:lstStyle/>
+          <a:p>
+            <a:pPr algn="l"/>
+            <a:r>
+              <a:rPr sz="2330" b="0" i="0">
+                <a:solidFill>
+                  <a:srgbClr val="1A1A1A"/>
+                </a:solidFill>
+                <a:latin typeface="Lexend"/>
+              </a:rPr>
+              <a:t>Multiply the fronts:  </a:t>
+            </a:r>
+          </a:p>
+        </p:txBody>
+      </p:sp>
+      <p:pic>
+        <p:nvPicPr>
+          <p:cNvPr id="11" name="Picture 10" descr="95ecba0795db8e3b.png"/>
+          <p:cNvPicPr>
+            <a:picLocks noChangeAspect="1"/>
+          </p:cNvPicPr>
+          <p:nvPr/>
+        </p:nvPicPr>
+        <p:blipFill>
+          <a:blip r:embed="rId3"/>
+          <a:stretch>
+            <a:fillRect/>
+          </a:stretch>
+        </p:blipFill>
+        <p:spPr>
+          <a:xfrm>
+            <a:off x="6655799" y="3539059"/>
+            <a:ext cx="1197864" cy="213360"/>
+          </a:xfrm>
+          <a:prstGeom prst="rect">
+            <a:avLst/>
+          </a:prstGeom>
+        </p:spPr>
+      </p:pic>
+      <p:sp>
+        <p:nvSpPr>
+          <p:cNvPr id="12" name="TextBox 11"/>
+          <p:cNvSpPr txBox="1"/>
+          <p:nvPr/>
+        </p:nvSpPr>
+        <p:spPr>
+          <a:xfrm>
+            <a:off x="3572609" y="3920059"/>
+            <a:ext cx="3315516" cy="457200"/>
+          </a:xfrm>
+          <a:prstGeom prst="rect">
+            <a:avLst/>
+          </a:prstGeom>
+          <a:noFill/>
+        </p:spPr>
+        <p:txBody>
+          <a:bodyPr wrap="none" lIns="45720" rIns="45720" tIns="18288" bIns="18288" anchor="ctr">
+            <a:noAutofit/>
+          </a:bodyPr>
+          <a:lstStyle/>
+          <a:p>
+            <a:pPr algn="l"/>
+            <a:r>
+              <a:rPr sz="2330" b="0" i="0">
+                <a:solidFill>
+                  <a:srgbClr val="1A1A1A"/>
+                </a:solidFill>
+                <a:latin typeface="Lexend"/>
+              </a:rPr>
+              <a:t>Add the exponents:  </a:t>
+            </a:r>
+          </a:p>
+        </p:txBody>
+      </p:sp>
+      <p:pic>
+        <p:nvPicPr>
+          <p:cNvPr id="13" name="Picture 12" descr="d8f8e59949bbed45.png"/>
+          <p:cNvPicPr>
+            <a:picLocks noChangeAspect="1"/>
+          </p:cNvPicPr>
+          <p:nvPr/>
+        </p:nvPicPr>
+        <p:blipFill>
+          <a:blip r:embed="rId4"/>
+          <a:stretch>
+            <a:fillRect/>
+          </a:stretch>
+        </p:blipFill>
+        <p:spPr>
+          <a:xfrm>
+            <a:off x="6750966" y="4017595"/>
+            <a:ext cx="1840991" cy="262128"/>
+          </a:xfrm>
+          <a:prstGeom prst="rect">
+            <a:avLst/>
+          </a:prstGeom>
+        </p:spPr>
+      </p:pic>
+      <p:pic>
+        <p:nvPicPr>
+          <p:cNvPr id="14" name="Picture 13" descr="a7b20829de9c08ed.png"/>
+          <p:cNvPicPr>
+            <a:picLocks noChangeAspect="1"/>
+          </p:cNvPicPr>
+          <p:nvPr/>
+        </p:nvPicPr>
+        <p:blipFill>
+          <a:blip r:embed="rId5"/>
+          <a:stretch>
+            <a:fillRect/>
+          </a:stretch>
+        </p:blipFill>
+        <p:spPr>
+          <a:xfrm>
+            <a:off x="3627473" y="4520515"/>
+            <a:ext cx="2273808" cy="262128"/>
+          </a:xfrm>
+          <a:prstGeom prst="rect">
+            <a:avLst/>
+          </a:prstGeom>
+        </p:spPr>
+      </p:pic>
+      <p:sp>
+        <p:nvSpPr>
+          <p:cNvPr id="15" name="TextBox 14"/>
+          <p:cNvSpPr txBox="1"/>
+          <p:nvPr/>
+        </p:nvSpPr>
+        <p:spPr>
+          <a:xfrm>
+            <a:off x="777240" y="4994479"/>
+            <a:ext cx="10607040" cy="548640"/>
+          </a:xfrm>
+          <a:prstGeom prst="rect">
+            <a:avLst/>
+          </a:prstGeom>
+          <a:noFill/>
+        </p:spPr>
+        <p:txBody>
+          <a:bodyPr wrap="square" lIns="45720" rIns="45720" tIns="18288" bIns="18288" anchor="t">
+            <a:spAutoFit/>
+          </a:bodyPr>
+          <a:lstStyle/>
+          <a:p>
+            <a:pPr algn="ctr"/>
+            <a:r>
+              <a:rPr sz="3040" b="1" i="0">
+                <a:solidFill>
+                  <a:srgbClr val="9E1B32"/>
+                </a:solidFill>
+                <a:latin typeface="Lexend"/>
+              </a:rPr>
+              <a:t>Answer:   D — 2 × 10</a:t>
+            </a:r>
+            <a:r>
+              <a:rPr sz="3040" b="1" i="0" baseline="30000">
+                <a:solidFill>
+                  <a:srgbClr val="9E1B32"/>
+                </a:solidFill>
+                <a:latin typeface="Lexend"/>
+              </a:rPr>
+              <a:t>10</a:t>
             </a:r>
           </a:p>
         </p:txBody>
@@ -11711,7 +11712,7 @@
       </p:sp>
       <p:pic>
         <p:nvPicPr>
-          <p:cNvPr id="8" name="Picture 7" descr="117d387ca555e41b.png"/>
+          <p:cNvPr id="8" name="Picture 7" descr="c4bdb38362d4edfd.png"/>
           <p:cNvPicPr>
             <a:picLocks noChangeAspect="1"/>
           </p:cNvPicPr>
@@ -11725,8 +11726,8 @@
         </p:blipFill>
         <p:spPr>
           <a:xfrm>
-            <a:off x="5437632" y="2103120"/>
-            <a:ext cx="1286256" cy="801624"/>
+            <a:off x="5434583" y="2194560"/>
+            <a:ext cx="1292352" cy="801624"/>
           </a:xfrm>
           <a:prstGeom prst="rect">
             <a:avLst/>
@@ -11741,150 +11742,8 @@
         </p:nvSpPr>
         <p:spPr>
           <a:xfrm>
-            <a:off x="2437153" y="3229356"/>
-            <a:ext cx="2991598" cy="457200"/>
-          </a:xfrm>
-          <a:prstGeom prst="rect">
-            <a:avLst/>
-          </a:prstGeom>
-          <a:noFill/>
-        </p:spPr>
-        <p:txBody>
-          <a:bodyPr wrap="none" lIns="45720" rIns="45720" tIns="18288" bIns="18288" anchor="ctr">
-            <a:noAutofit/>
-          </a:bodyPr>
-          <a:lstStyle/>
-          <a:p>
-            <a:pPr algn="l"/>
-            <a:r>
-              <a:rPr sz="2330" b="0" i="0">
-                <a:solidFill>
-                  <a:srgbClr val="1A1A1A"/>
-                </a:solidFill>
-                <a:latin typeface="Lexend"/>
-              </a:rPr>
-              <a:t>Divide the fronts:  </a:t>
-            </a:r>
-          </a:p>
-        </p:txBody>
-      </p:sp>
-      <p:pic>
-        <p:nvPicPr>
-          <p:cNvPr id="10" name="Picture 9" descr="e20244de15a0b935.png"/>
-          <p:cNvPicPr>
-            <a:picLocks noChangeAspect="1"/>
-          </p:cNvPicPr>
-          <p:nvPr/>
-        </p:nvPicPr>
-        <p:blipFill>
-          <a:blip r:embed="rId3"/>
-          <a:stretch>
-            <a:fillRect/>
-          </a:stretch>
-        </p:blipFill>
-        <p:spPr>
-          <a:xfrm>
-            <a:off x="5291591" y="3352800"/>
-            <a:ext cx="996696" cy="210312"/>
-          </a:xfrm>
-          <a:prstGeom prst="rect">
-            <a:avLst/>
-          </a:prstGeom>
-        </p:spPr>
-      </p:pic>
-      <p:sp>
-        <p:nvSpPr>
-          <p:cNvPr id="11" name="TextBox 10"/>
-          <p:cNvSpPr txBox="1"/>
-          <p:nvPr/>
-        </p:nvSpPr>
-        <p:spPr>
-          <a:xfrm>
-            <a:off x="2437153" y="3732275"/>
-            <a:ext cx="4013660" cy="457200"/>
-          </a:xfrm>
-          <a:prstGeom prst="rect">
-            <a:avLst/>
-          </a:prstGeom>
-          <a:noFill/>
-        </p:spPr>
-        <p:txBody>
-          <a:bodyPr wrap="none" lIns="45720" rIns="45720" tIns="18288" bIns="18288" anchor="ctr">
-            <a:noAutofit/>
-          </a:bodyPr>
-          <a:lstStyle/>
-          <a:p>
-            <a:pPr algn="l"/>
-            <a:r>
-              <a:rPr sz="2330" b="0" i="0">
-                <a:solidFill>
-                  <a:srgbClr val="1A1A1A"/>
-                </a:solidFill>
-                <a:latin typeface="Lexend"/>
-              </a:rPr>
-              <a:t>Subtract the exponents:  </a:t>
-            </a:r>
-          </a:p>
-        </p:txBody>
-      </p:sp>
-      <p:pic>
-        <p:nvPicPr>
-          <p:cNvPr id="12" name="Picture 11" descr="03a763d23ef38bc8.png"/>
-          <p:cNvPicPr>
-            <a:picLocks noChangeAspect="1"/>
-          </p:cNvPicPr>
-          <p:nvPr/>
-        </p:nvPicPr>
-        <p:blipFill>
-          <a:blip r:embed="rId4"/>
-          <a:stretch>
-            <a:fillRect/>
-          </a:stretch>
-        </p:blipFill>
-        <p:spPr>
-          <a:xfrm>
-            <a:off x="6313654" y="3829812"/>
-            <a:ext cx="3416808" cy="262128"/>
-          </a:xfrm>
-          <a:prstGeom prst="rect">
-            <a:avLst/>
-          </a:prstGeom>
-        </p:spPr>
-      </p:pic>
-      <p:pic>
-        <p:nvPicPr>
-          <p:cNvPr id="13" name="Picture 12" descr="9b9b4517e7c627da.png"/>
-          <p:cNvPicPr>
-            <a:picLocks noChangeAspect="1"/>
-          </p:cNvPicPr>
-          <p:nvPr/>
-        </p:nvPicPr>
-        <p:blipFill>
-          <a:blip r:embed="rId5"/>
-          <a:stretch>
-            <a:fillRect/>
-          </a:stretch>
-        </p:blipFill>
-        <p:spPr>
-          <a:xfrm>
-            <a:off x="2492017" y="4332732"/>
-            <a:ext cx="917448" cy="262128"/>
-          </a:xfrm>
-          <a:prstGeom prst="rect">
-            <a:avLst/>
-          </a:prstGeom>
-        </p:spPr>
-      </p:pic>
-      <p:sp>
-        <p:nvSpPr>
-          <p:cNvPr id="14" name="TextBox 13"/>
-          <p:cNvSpPr txBox="1"/>
-          <p:nvPr/>
-        </p:nvSpPr>
-        <p:spPr>
-          <a:xfrm>
-            <a:off x="777240" y="4806696"/>
-            <a:ext cx="10607040" cy="548640"/>
+            <a:off x="777240" y="4343400"/>
+            <a:ext cx="10607040" cy="457200"/>
           </a:xfrm>
           <a:prstGeom prst="rect">
             <a:avLst/>
@@ -11899,22 +11758,13 @@
           <a:p>
             <a:pPr algn="ctr"/>
             <a:r>
-              <a:rPr sz="3040" b="1" i="0">
-                <a:solidFill>
-                  <a:srgbClr val="9E1B32"/>
-                </a:solidFill>
-                <a:latin typeface="Lexend"/>
-              </a:rPr>
-              <a:t>Answer:   1 × 10</a:t>
-            </a:r>
-            <a:r>
-              <a:rPr sz="3040" b="1" i="0" baseline="30000">
-                <a:solidFill>
-                  <a:srgbClr val="9E1B32"/>
-                </a:solidFill>
-                <a:latin typeface="Lexend"/>
-              </a:rPr>
-              <a:t>15</a:t>
+              <a:rPr sz="2470" b="1" i="0">
+                <a:solidFill>
+                  <a:srgbClr val="1A1A1A"/>
+                </a:solidFill>
+                <a:latin typeface="Lexend"/>
+              </a:rPr>
+              <a:t>Answer it.</a:t>
             </a:r>
           </a:p>
         </p:txBody>
@@ -11967,7 +11817,7 @@
                 </a:solidFill>
                 <a:latin typeface="Lexend"/>
               </a:rPr>
-              <a:t>Whiteboards   ·   Question 8 of 9</a:t>
+              <a:t>Whiteboards   ·   Question 7 of 9</a:t>
             </a:r>
           </a:p>
         </p:txBody>
@@ -12149,7 +11999,7 @@
       </p:sp>
       <p:pic>
         <p:nvPicPr>
-          <p:cNvPr id="8" name="Picture 7" descr="dfc728df3a4406c3.png"/>
+          <p:cNvPr id="8" name="Picture 7" descr="117d387ca555e41b.png"/>
           <p:cNvPicPr>
             <a:picLocks noChangeAspect="1"/>
           </p:cNvPicPr>
@@ -12163,8 +12013,8 @@
         </p:blipFill>
         <p:spPr>
           <a:xfrm>
-            <a:off x="4425696" y="2194560"/>
-            <a:ext cx="3310128" cy="795528"/>
+            <a:off x="5437632" y="2103120"/>
+            <a:ext cx="1286256" cy="801624"/>
           </a:xfrm>
           <a:prstGeom prst="rect">
             <a:avLst/>
@@ -12179,8 +12029,8 @@
         </p:nvSpPr>
         <p:spPr>
           <a:xfrm>
-            <a:off x="4134140" y="3241548"/>
-            <a:ext cx="3517441" cy="457200"/>
+            <a:off x="2437153" y="3229356"/>
+            <a:ext cx="2991598" cy="457200"/>
           </a:xfrm>
           <a:prstGeom prst="rect">
             <a:avLst/>
@@ -12195,20 +12045,20 @@
           <a:p>
             <a:pPr algn="l"/>
             <a:r>
-              <a:rPr sz="2470" b="0" i="0">
+              <a:rPr sz="2330" b="0" i="0">
                 <a:solidFill>
                   <a:srgbClr val="1A1A1A"/>
                 </a:solidFill>
                 <a:latin typeface="Lexend"/>
               </a:rPr>
-              <a:t>What is the value of </a:t>
+              <a:t>Divide the fronts:  </a:t>
             </a:r>
           </a:p>
         </p:txBody>
       </p:sp>
       <p:pic>
         <p:nvPicPr>
-          <p:cNvPr id="10" name="Picture 9" descr="f14fce7cf077cd07.png"/>
+          <p:cNvPr id="10" name="Picture 9" descr="e20244de15a0b935.png"/>
           <p:cNvPicPr>
             <a:picLocks noChangeAspect="1"/>
           </p:cNvPicPr>
@@ -12222,8 +12072,8 @@
         </p:blipFill>
         <p:spPr>
           <a:xfrm>
-            <a:off x="7514421" y="3366516"/>
-            <a:ext cx="176784" cy="207264"/>
+            <a:off x="5291591" y="3352800"/>
+            <a:ext cx="996696" cy="210312"/>
           </a:xfrm>
           <a:prstGeom prst="rect">
             <a:avLst/>
@@ -12238,8 +12088,8 @@
         </p:nvSpPr>
         <p:spPr>
           <a:xfrm>
-            <a:off x="7691205" y="3241548"/>
-            <a:ext cx="473333" cy="457200"/>
+            <a:off x="2437153" y="3732275"/>
+            <a:ext cx="4013660" cy="457200"/>
           </a:xfrm>
           <a:prstGeom prst="rect">
             <a:avLst/>
@@ -12254,27 +12104,75 @@
           <a:p>
             <a:pPr algn="l"/>
             <a:r>
-              <a:rPr sz="2470" b="0" i="0">
+              <a:rPr sz="2330" b="0" i="0">
                 <a:solidFill>
                   <a:srgbClr val="1A1A1A"/>
                 </a:solidFill>
                 <a:latin typeface="Lexend"/>
               </a:rPr>
-              <a:t> ?</a:t>
-            </a:r>
-          </a:p>
-        </p:txBody>
-      </p:sp>
-      <p:sp>
-        <p:nvSpPr>
-          <p:cNvPr id="12" name="TextBox 11"/>
-          <p:cNvSpPr txBox="1"/>
-          <p:nvPr/>
-        </p:nvSpPr>
-        <p:spPr>
-          <a:xfrm>
-            <a:off x="777240" y="4343400"/>
-            <a:ext cx="10607040" cy="457200"/>
+              <a:t>Subtract the exponents:  </a:t>
+            </a:r>
+          </a:p>
+        </p:txBody>
+      </p:sp>
+      <p:pic>
+        <p:nvPicPr>
+          <p:cNvPr id="12" name="Picture 11" descr="03a763d23ef38bc8.png"/>
+          <p:cNvPicPr>
+            <a:picLocks noChangeAspect="1"/>
+          </p:cNvPicPr>
+          <p:nvPr/>
+        </p:nvPicPr>
+        <p:blipFill>
+          <a:blip r:embed="rId4"/>
+          <a:stretch>
+            <a:fillRect/>
+          </a:stretch>
+        </p:blipFill>
+        <p:spPr>
+          <a:xfrm>
+            <a:off x="6313654" y="3829812"/>
+            <a:ext cx="3416808" cy="262128"/>
+          </a:xfrm>
+          <a:prstGeom prst="rect">
+            <a:avLst/>
+          </a:prstGeom>
+        </p:spPr>
+      </p:pic>
+      <p:pic>
+        <p:nvPicPr>
+          <p:cNvPr id="13" name="Picture 12" descr="9b9b4517e7c627da.png"/>
+          <p:cNvPicPr>
+            <a:picLocks noChangeAspect="1"/>
+          </p:cNvPicPr>
+          <p:nvPr/>
+        </p:nvPicPr>
+        <p:blipFill>
+          <a:blip r:embed="rId5"/>
+          <a:stretch>
+            <a:fillRect/>
+          </a:stretch>
+        </p:blipFill>
+        <p:spPr>
+          <a:xfrm>
+            <a:off x="2492017" y="4332732"/>
+            <a:ext cx="917448" cy="262128"/>
+          </a:xfrm>
+          <a:prstGeom prst="rect">
+            <a:avLst/>
+          </a:prstGeom>
+        </p:spPr>
+      </p:pic>
+      <p:sp>
+        <p:nvSpPr>
+          <p:cNvPr id="14" name="TextBox 13"/>
+          <p:cNvSpPr txBox="1"/>
+          <p:nvPr/>
+        </p:nvSpPr>
+        <p:spPr>
+          <a:xfrm>
+            <a:off x="777240" y="4806696"/>
+            <a:ext cx="10607040" cy="548640"/>
           </a:xfrm>
           <a:prstGeom prst="rect">
             <a:avLst/>
@@ -12289,13 +12187,22 @@
           <a:p>
             <a:pPr algn="ctr"/>
             <a:r>
-              <a:rPr sz="2470" b="1" i="0">
-                <a:solidFill>
-                  <a:srgbClr val="1A1A1A"/>
-                </a:solidFill>
-                <a:latin typeface="Lexend"/>
-              </a:rPr>
-              <a:t>Answer it.</a:t>
+              <a:rPr sz="3040" b="1" i="0">
+                <a:solidFill>
+                  <a:srgbClr val="9E1B32"/>
+                </a:solidFill>
+                <a:latin typeface="Lexend"/>
+              </a:rPr>
+              <a:t>Answer:   1 × 10</a:t>
+            </a:r>
+            <a:r>
+              <a:rPr sz="3040" b="1" i="0" baseline="30000">
+                <a:solidFill>
+                  <a:srgbClr val="9E1B32"/>
+                </a:solidFill>
+                <a:latin typeface="Lexend"/>
+              </a:rPr>
+              <a:t>15</a:t>
             </a:r>
           </a:p>
         </p:txBody>
@@ -13152,7 +13059,7 @@
       </p:sp>
       <p:pic>
         <p:nvPicPr>
-          <p:cNvPr id="8" name="Picture 7" descr="594e88537557ceb2.png"/>
+          <p:cNvPr id="8" name="Picture 7" descr="dfc728df3a4406c3.png"/>
           <p:cNvPicPr>
             <a:picLocks noChangeAspect="1"/>
           </p:cNvPicPr>
@@ -13166,8 +13073,8 @@
         </p:blipFill>
         <p:spPr>
           <a:xfrm>
-            <a:off x="4424172" y="2103120"/>
-            <a:ext cx="3313176" cy="795528"/>
+            <a:off x="4425696" y="2194560"/>
+            <a:ext cx="3310128" cy="795528"/>
           </a:xfrm>
           <a:prstGeom prst="rect">
             <a:avLst/>
@@ -13182,7 +13089,7 @@
         </p:nvSpPr>
         <p:spPr>
           <a:xfrm>
-            <a:off x="4134140" y="3150108"/>
+            <a:off x="4134140" y="3241548"/>
             <a:ext cx="3517441" cy="457200"/>
           </a:xfrm>
           <a:prstGeom prst="rect">
@@ -13225,7 +13132,7 @@
         </p:blipFill>
         <p:spPr>
           <a:xfrm>
-            <a:off x="7514421" y="3275076"/>
+            <a:off x="7514421" y="3366516"/>
             <a:ext cx="176784" cy="207264"/>
           </a:xfrm>
           <a:prstGeom prst="rect">
@@ -13241,7 +13148,7 @@
         </p:nvSpPr>
         <p:spPr>
           <a:xfrm>
-            <a:off x="7691205" y="3150108"/>
+            <a:off x="7691205" y="3241548"/>
             <a:ext cx="473333" cy="457200"/>
           </a:xfrm>
           <a:prstGeom prst="rect">
@@ -13276,185 +13183,8 @@
         </p:nvSpPr>
         <p:spPr>
           <a:xfrm>
-            <a:off x="2640887" y="3909059"/>
-            <a:ext cx="1640071" cy="457200"/>
-          </a:xfrm>
-          <a:prstGeom prst="rect">
-            <a:avLst/>
-          </a:prstGeom>
-          <a:noFill/>
-        </p:spPr>
-        <p:txBody>
-          <a:bodyPr wrap="none" lIns="45720" rIns="45720" tIns="18288" bIns="18288" anchor="ctr">
-            <a:noAutofit/>
-          </a:bodyPr>
-          <a:lstStyle/>
-          <a:p>
-            <a:pPr algn="l"/>
-            <a:r>
-              <a:rPr sz="2750" b="0" i="0">
-                <a:solidFill>
-                  <a:srgbClr val="1A1A1A"/>
-                </a:solidFill>
-                <a:latin typeface="Lexend"/>
-              </a:rPr>
-              <a:t>Fronts:  </a:t>
-            </a:r>
-          </a:p>
-        </p:txBody>
-      </p:sp>
-      <p:pic>
-        <p:nvPicPr>
-          <p:cNvPr id="13" name="Picture 12" descr="e920add2c6370e50.png"/>
-          <p:cNvPicPr>
-            <a:picLocks noChangeAspect="1"/>
-          </p:cNvPicPr>
-          <p:nvPr/>
-        </p:nvPicPr>
-        <p:blipFill>
-          <a:blip r:embed="rId4"/>
-          <a:stretch>
-            <a:fillRect/>
-          </a:stretch>
-        </p:blipFill>
-        <p:spPr>
-          <a:xfrm>
-            <a:off x="4143799" y="4011168"/>
-            <a:ext cx="1834896" cy="252984"/>
-          </a:xfrm>
-          <a:prstGeom prst="rect">
-            <a:avLst/>
-          </a:prstGeom>
-        </p:spPr>
-      </p:pic>
-      <p:sp>
-        <p:nvSpPr>
-          <p:cNvPr id="14" name="TextBox 13"/>
-          <p:cNvSpPr txBox="1"/>
-          <p:nvPr/>
-        </p:nvSpPr>
-        <p:spPr>
-          <a:xfrm>
-            <a:off x="5978695" y="3909059"/>
-            <a:ext cx="1338233" cy="457200"/>
-          </a:xfrm>
-          <a:prstGeom prst="rect">
-            <a:avLst/>
-          </a:prstGeom>
-          <a:noFill/>
-        </p:spPr>
-        <p:txBody>
-          <a:bodyPr wrap="none" lIns="45720" rIns="45720" tIns="18288" bIns="18288" anchor="ctr">
-            <a:noAutofit/>
-          </a:bodyPr>
-          <a:lstStyle/>
-          <a:p>
-            <a:pPr algn="l"/>
-            <a:r>
-              <a:rPr sz="2750" b="0" i="0">
-                <a:solidFill>
-                  <a:srgbClr val="1A1A1A"/>
-                </a:solidFill>
-                <a:latin typeface="Lexend"/>
-              </a:rPr>
-              <a:t>,   so   </a:t>
-            </a:r>
-          </a:p>
-        </p:txBody>
-      </p:sp>
-      <p:pic>
-        <p:nvPicPr>
-          <p:cNvPr id="15" name="Picture 14" descr="8691e6c5c0ab487f.png"/>
-          <p:cNvPicPr>
-            <a:picLocks noChangeAspect="1"/>
-          </p:cNvPicPr>
-          <p:nvPr/>
-        </p:nvPicPr>
-        <p:blipFill>
-          <a:blip r:embed="rId5"/>
-          <a:stretch>
-            <a:fillRect/>
-          </a:stretch>
-        </p:blipFill>
-        <p:spPr>
-          <a:xfrm>
-            <a:off x="7179768" y="4011168"/>
-            <a:ext cx="2346960" cy="252984"/>
-          </a:xfrm>
-          <a:prstGeom prst="rect">
-            <a:avLst/>
-          </a:prstGeom>
-        </p:spPr>
-      </p:pic>
-      <p:sp>
-        <p:nvSpPr>
-          <p:cNvPr id="16" name="TextBox 15"/>
-          <p:cNvSpPr txBox="1"/>
-          <p:nvPr/>
-        </p:nvSpPr>
-        <p:spPr>
-          <a:xfrm>
-            <a:off x="2640887" y="4602480"/>
-            <a:ext cx="1601504" cy="457200"/>
-          </a:xfrm>
-          <a:prstGeom prst="rect">
-            <a:avLst/>
-          </a:prstGeom>
-          <a:noFill/>
-        </p:spPr>
-        <p:txBody>
-          <a:bodyPr wrap="none" lIns="45720" rIns="45720" tIns="18288" bIns="18288" anchor="ctr">
-            <a:noAutofit/>
-          </a:bodyPr>
-          <a:lstStyle/>
-          <a:p>
-            <a:pPr algn="l"/>
-            <a:r>
-              <a:rPr sz="2750" b="0" i="0">
-                <a:solidFill>
-                  <a:srgbClr val="1A1A1A"/>
-                </a:solidFill>
-                <a:latin typeface="Lexend"/>
-              </a:rPr>
-              <a:t>Check:  </a:t>
-            </a:r>
-          </a:p>
-        </p:txBody>
-      </p:sp>
-      <p:pic>
-        <p:nvPicPr>
-          <p:cNvPr id="17" name="Picture 16" descr="dedb3e2327f40b65.png"/>
-          <p:cNvPicPr>
-            <a:picLocks noChangeAspect="1"/>
-          </p:cNvPicPr>
-          <p:nvPr/>
-        </p:nvPicPr>
-        <p:blipFill>
-          <a:blip r:embed="rId6"/>
-          <a:stretch>
-            <a:fillRect/>
-          </a:stretch>
-        </p:blipFill>
-        <p:spPr>
-          <a:xfrm>
-            <a:off x="4105232" y="4471416"/>
-            <a:ext cx="3002280" cy="719328"/>
-          </a:xfrm>
-          <a:prstGeom prst="rect">
-            <a:avLst/>
-          </a:prstGeom>
-        </p:spPr>
-      </p:pic>
-      <p:sp>
-        <p:nvSpPr>
-          <p:cNvPr id="18" name="TextBox 17"/>
-          <p:cNvSpPr txBox="1"/>
-          <p:nvPr/>
-        </p:nvSpPr>
-        <p:spPr>
-          <a:xfrm>
-            <a:off x="777240" y="5327904"/>
-            <a:ext cx="10607040" cy="548640"/>
+            <a:off x="777240" y="4343400"/>
+            <a:ext cx="10607040" cy="457200"/>
           </a:xfrm>
           <a:prstGeom prst="rect">
             <a:avLst/>
@@ -13469,13 +13199,13 @@
           <a:p>
             <a:pPr algn="ctr"/>
             <a:r>
-              <a:rPr sz="3040" b="1" i="0">
-                <a:solidFill>
-                  <a:srgbClr val="9E1B32"/>
-                </a:solidFill>
-                <a:latin typeface="Lexend"/>
-              </a:rPr>
-              <a:t>Answer:   n = 2</a:t>
+              <a:rPr sz="2470" b="1" i="0">
+                <a:solidFill>
+                  <a:srgbClr val="1A1A1A"/>
+                </a:solidFill>
+                <a:latin typeface="Lexend"/>
+              </a:rPr>
+              <a:t>Answer it.</a:t>
             </a:r>
           </a:p>
         </p:txBody>
@@ -13528,7 +13258,7 @@
                 </a:solidFill>
                 <a:latin typeface="Lexend"/>
               </a:rPr>
-              <a:t>Whiteboards   ·   Question 9 of 9</a:t>
+              <a:t>Whiteboards   ·   Question 8 of 9</a:t>
             </a:r>
           </a:p>
         </p:txBody>
@@ -13708,44 +13438,9 @@
           </a:p>
         </p:txBody>
       </p:sp>
-      <p:sp>
-        <p:nvSpPr>
-          <p:cNvPr id="8" name="TextBox 7"/>
-          <p:cNvSpPr txBox="1"/>
-          <p:nvPr/>
-        </p:nvSpPr>
-        <p:spPr>
-          <a:xfrm>
-            <a:off x="2849107" y="1816608"/>
-            <a:ext cx="930187" cy="457200"/>
-          </a:xfrm>
-          <a:prstGeom prst="rect">
-            <a:avLst/>
-          </a:prstGeom>
-          <a:noFill/>
-        </p:spPr>
-        <p:txBody>
-          <a:bodyPr wrap="none" lIns="45720" rIns="45720" tIns="18288" bIns="18288" anchor="ctr">
-            <a:noAutofit/>
-          </a:bodyPr>
-          <a:lstStyle/>
-          <a:p>
-            <a:pPr algn="l"/>
-            <a:r>
-              <a:rPr sz="2470" b="0" i="0">
-                <a:solidFill>
-                  <a:srgbClr val="1A1A1A"/>
-                </a:solidFill>
-                <a:latin typeface="Lexend"/>
-              </a:rPr>
-              <a:t>For  </a:t>
-            </a:r>
-          </a:p>
-        </p:txBody>
-      </p:sp>
       <p:pic>
         <p:nvPicPr>
-          <p:cNvPr id="9" name="Picture 8" descr="60ccdbf79261551b.png"/>
+          <p:cNvPr id="8" name="Picture 7" descr="594e88537557ceb2.png"/>
           <p:cNvPicPr>
             <a:picLocks noChangeAspect="1"/>
           </p:cNvPicPr>
@@ -13759,8 +13454,8 @@
         </p:blipFill>
         <p:spPr>
           <a:xfrm>
-            <a:off x="3642134" y="1645920"/>
-            <a:ext cx="1554480" cy="798576"/>
+            <a:off x="4424172" y="2103120"/>
+            <a:ext cx="3313176" cy="795528"/>
           </a:xfrm>
           <a:prstGeom prst="rect">
             <a:avLst/>
@@ -13769,14 +13464,14 @@
       </p:pic>
       <p:sp>
         <p:nvSpPr>
-          <p:cNvPr id="10" name="TextBox 9"/>
-          <p:cNvSpPr txBox="1"/>
-          <p:nvPr/>
-        </p:nvSpPr>
-        <p:spPr>
-          <a:xfrm>
-            <a:off x="5196614" y="1816608"/>
-            <a:ext cx="2811254" cy="457200"/>
+          <p:cNvPr id="9" name="TextBox 8"/>
+          <p:cNvSpPr txBox="1"/>
+          <p:nvPr/>
+        </p:nvSpPr>
+        <p:spPr>
+          <a:xfrm>
+            <a:off x="4134140" y="3150108"/>
+            <a:ext cx="3517441" cy="457200"/>
           </a:xfrm>
           <a:prstGeom prst="rect">
             <a:avLst/>
@@ -13797,14 +13492,14 @@
                 </a:solidFill>
                 <a:latin typeface="Lexend"/>
               </a:rPr>
-              <a:t>  Marcus writes  </a:t>
+              <a:t>What is the value of </a:t>
             </a:r>
           </a:p>
         </p:txBody>
       </p:sp>
       <p:pic>
         <p:nvPicPr>
-          <p:cNvPr id="11" name="Picture 10" descr="7f9ab9ea310fee82.png"/>
+          <p:cNvPr id="10" name="Picture 9" descr="f14fce7cf077cd07.png"/>
           <p:cNvPicPr>
             <a:picLocks noChangeAspect="1"/>
           </p:cNvPicPr>
@@ -13818,8 +13513,8 @@
         </p:blipFill>
         <p:spPr>
           <a:xfrm>
-            <a:off x="7870708" y="1876044"/>
-            <a:ext cx="1441704" cy="338328"/>
+            <a:off x="7514421" y="3275076"/>
+            <a:ext cx="176784" cy="207264"/>
           </a:xfrm>
           <a:prstGeom prst="rect">
             <a:avLst/>
@@ -13828,14 +13523,14 @@
       </p:pic>
       <p:sp>
         <p:nvSpPr>
-          <p:cNvPr id="12" name="TextBox 11"/>
-          <p:cNvSpPr txBox="1"/>
-          <p:nvPr/>
-        </p:nvSpPr>
-        <p:spPr>
-          <a:xfrm>
-            <a:off x="4059724" y="2695956"/>
-            <a:ext cx="2929551" cy="457200"/>
+          <p:cNvPr id="11" name="TextBox 10"/>
+          <p:cNvSpPr txBox="1"/>
+          <p:nvPr/>
+        </p:nvSpPr>
+        <p:spPr>
+          <a:xfrm>
+            <a:off x="7691205" y="3150108"/>
+            <a:ext cx="473333" cy="457200"/>
           </a:xfrm>
           <a:prstGeom prst="rect">
             <a:avLst/>
@@ -13856,14 +13551,49 @@
                 </a:solidFill>
                 <a:latin typeface="Lexend"/>
               </a:rPr>
-              <a:t>and Sara writes  </a:t>
+              <a:t> ?</a:t>
+            </a:r>
+          </a:p>
+        </p:txBody>
+      </p:sp>
+      <p:sp>
+        <p:nvSpPr>
+          <p:cNvPr id="12" name="TextBox 11"/>
+          <p:cNvSpPr txBox="1"/>
+          <p:nvPr/>
+        </p:nvSpPr>
+        <p:spPr>
+          <a:xfrm>
+            <a:off x="2640887" y="3909059"/>
+            <a:ext cx="1640071" cy="457200"/>
+          </a:xfrm>
+          <a:prstGeom prst="rect">
+            <a:avLst/>
+          </a:prstGeom>
+          <a:noFill/>
+        </p:spPr>
+        <p:txBody>
+          <a:bodyPr wrap="none" lIns="45720" rIns="45720" tIns="18288" bIns="18288" anchor="ctr">
+            <a:noAutofit/>
+          </a:bodyPr>
+          <a:lstStyle/>
+          <a:p>
+            <a:pPr algn="l"/>
+            <a:r>
+              <a:rPr sz="2750" b="0" i="0">
+                <a:solidFill>
+                  <a:srgbClr val="1A1A1A"/>
+                </a:solidFill>
+                <a:latin typeface="Lexend"/>
+              </a:rPr>
+              <a:t>Fronts:  </a:t>
             </a:r>
           </a:p>
         </p:txBody>
       </p:sp>
       <p:pic>
         <p:nvPicPr>
-          <p:cNvPr id="13" name="Picture 12" descr="f48b4bb2456d3556.png"/>
+          <p:cNvPr id="13" name="Picture 12" descr="e920add2c6370e50.png"/>
           <p:cNvPicPr>
             <a:picLocks noChangeAspect="1"/>
           </p:cNvPicPr>
@@ -13877,8 +13607,8 @@
         </p:blipFill>
         <p:spPr>
           <a:xfrm>
-            <a:off x="6852115" y="2753868"/>
-            <a:ext cx="1249680" cy="341376"/>
+            <a:off x="4143799" y="4011168"/>
+            <a:ext cx="1834896" cy="252984"/>
           </a:xfrm>
           <a:prstGeom prst="rect">
             <a:avLst/>
@@ -13893,8 +13623,126 @@
         </p:nvSpPr>
         <p:spPr>
           <a:xfrm>
-            <a:off x="777240" y="3404616"/>
-            <a:ext cx="10607040" cy="411480"/>
+            <a:off x="5978695" y="3909059"/>
+            <a:ext cx="1338233" cy="457200"/>
+          </a:xfrm>
+          <a:prstGeom prst="rect">
+            <a:avLst/>
+          </a:prstGeom>
+          <a:noFill/>
+        </p:spPr>
+        <p:txBody>
+          <a:bodyPr wrap="none" lIns="45720" rIns="45720" tIns="18288" bIns="18288" anchor="ctr">
+            <a:noAutofit/>
+          </a:bodyPr>
+          <a:lstStyle/>
+          <a:p>
+            <a:pPr algn="l"/>
+            <a:r>
+              <a:rPr sz="2750" b="0" i="0">
+                <a:solidFill>
+                  <a:srgbClr val="1A1A1A"/>
+                </a:solidFill>
+                <a:latin typeface="Lexend"/>
+              </a:rPr>
+              <a:t>,   so   </a:t>
+            </a:r>
+          </a:p>
+        </p:txBody>
+      </p:sp>
+      <p:pic>
+        <p:nvPicPr>
+          <p:cNvPr id="15" name="Picture 14" descr="8691e6c5c0ab487f.png"/>
+          <p:cNvPicPr>
+            <a:picLocks noChangeAspect="1"/>
+          </p:cNvPicPr>
+          <p:nvPr/>
+        </p:nvPicPr>
+        <p:blipFill>
+          <a:blip r:embed="rId5"/>
+          <a:stretch>
+            <a:fillRect/>
+          </a:stretch>
+        </p:blipFill>
+        <p:spPr>
+          <a:xfrm>
+            <a:off x="7179768" y="4011168"/>
+            <a:ext cx="2346960" cy="252984"/>
+          </a:xfrm>
+          <a:prstGeom prst="rect">
+            <a:avLst/>
+          </a:prstGeom>
+        </p:spPr>
+      </p:pic>
+      <p:sp>
+        <p:nvSpPr>
+          <p:cNvPr id="16" name="TextBox 15"/>
+          <p:cNvSpPr txBox="1"/>
+          <p:nvPr/>
+        </p:nvSpPr>
+        <p:spPr>
+          <a:xfrm>
+            <a:off x="2640887" y="4602480"/>
+            <a:ext cx="1601504" cy="457200"/>
+          </a:xfrm>
+          <a:prstGeom prst="rect">
+            <a:avLst/>
+          </a:prstGeom>
+          <a:noFill/>
+        </p:spPr>
+        <p:txBody>
+          <a:bodyPr wrap="none" lIns="45720" rIns="45720" tIns="18288" bIns="18288" anchor="ctr">
+            <a:noAutofit/>
+          </a:bodyPr>
+          <a:lstStyle/>
+          <a:p>
+            <a:pPr algn="l"/>
+            <a:r>
+              <a:rPr sz="2750" b="0" i="0">
+                <a:solidFill>
+                  <a:srgbClr val="1A1A1A"/>
+                </a:solidFill>
+                <a:latin typeface="Lexend"/>
+              </a:rPr>
+              <a:t>Check:  </a:t>
+            </a:r>
+          </a:p>
+        </p:txBody>
+      </p:sp>
+      <p:pic>
+        <p:nvPicPr>
+          <p:cNvPr id="17" name="Picture 16" descr="dedb3e2327f40b65.png"/>
+          <p:cNvPicPr>
+            <a:picLocks noChangeAspect="1"/>
+          </p:cNvPicPr>
+          <p:nvPr/>
+        </p:nvPicPr>
+        <p:blipFill>
+          <a:blip r:embed="rId6"/>
+          <a:stretch>
+            <a:fillRect/>
+          </a:stretch>
+        </p:blipFill>
+        <p:spPr>
+          <a:xfrm>
+            <a:off x="4105232" y="4471416"/>
+            <a:ext cx="3002280" cy="719328"/>
+          </a:xfrm>
+          <a:prstGeom prst="rect">
+            <a:avLst/>
+          </a:prstGeom>
+        </p:spPr>
+      </p:pic>
+      <p:sp>
+        <p:nvSpPr>
+          <p:cNvPr id="18" name="TextBox 17"/>
+          <p:cNvSpPr txBox="1"/>
+          <p:nvPr/>
+        </p:nvSpPr>
+        <p:spPr>
+          <a:xfrm>
+            <a:off x="777240" y="5327904"/>
+            <a:ext cx="10607040" cy="548640"/>
           </a:xfrm>
           <a:prstGeom prst="rect">
             <a:avLst/>
@@ -13909,48 +13757,13 @@
           <a:p>
             <a:pPr algn="ctr"/>
             <a:r>
-              <a:rPr sz="2180" b="0" i="0">
-                <a:solidFill>
-                  <a:srgbClr val="1A1A1A"/>
-                </a:solidFill>
-                <a:latin typeface="Lexend"/>
-              </a:rPr>
-              <a:t>Name what each one did wrong, and give the correct quotient.</a:t>
-            </a:r>
-          </a:p>
-        </p:txBody>
-      </p:sp>
-      <p:sp>
-        <p:nvSpPr>
-          <p:cNvPr id="15" name="TextBox 14"/>
-          <p:cNvSpPr txBox="1"/>
-          <p:nvPr/>
-        </p:nvSpPr>
-        <p:spPr>
-          <a:xfrm>
-            <a:off x="777240" y="4343400"/>
-            <a:ext cx="10607040" cy="457200"/>
-          </a:xfrm>
-          <a:prstGeom prst="rect">
-            <a:avLst/>
-          </a:prstGeom>
-          <a:noFill/>
-        </p:spPr>
-        <p:txBody>
-          <a:bodyPr wrap="square" lIns="45720" rIns="45720" tIns="18288" bIns="18288" anchor="t">
-            <a:spAutoFit/>
-          </a:bodyPr>
-          <a:lstStyle/>
-          <a:p>
-            <a:pPr algn="ctr"/>
-            <a:r>
-              <a:rPr sz="2470" b="1" i="0">
-                <a:solidFill>
-                  <a:srgbClr val="1A1A1A"/>
-                </a:solidFill>
-                <a:latin typeface="Lexend"/>
-              </a:rPr>
-              <a:t>Write your answer in sentences.</a:t>
+              <a:rPr sz="3040" b="1" i="0">
+                <a:solidFill>
+                  <a:srgbClr val="9E1B32"/>
+                </a:solidFill>
+                <a:latin typeface="Lexend"/>
+              </a:rPr>
+              <a:t>Answer:   n = 2</a:t>
             </a:r>
           </a:p>
         </p:txBody>
@@ -14191,7 +14004,7 @@
         </p:nvSpPr>
         <p:spPr>
           <a:xfrm>
-            <a:off x="2850631" y="1816608"/>
+            <a:off x="2849107" y="1816608"/>
             <a:ext cx="930187" cy="457200"/>
           </a:xfrm>
           <a:prstGeom prst="rect">
@@ -14220,7 +14033,7 @@
       </p:sp>
       <p:pic>
         <p:nvPicPr>
-          <p:cNvPr id="9" name="Picture 8" descr="eb274165a95bfcd1.png"/>
+          <p:cNvPr id="9" name="Picture 8" descr="60ccdbf79261551b.png"/>
           <p:cNvPicPr>
             <a:picLocks noChangeAspect="1"/>
           </p:cNvPicPr>
@@ -14234,8 +14047,8 @@
         </p:blipFill>
         <p:spPr>
           <a:xfrm>
-            <a:off x="3643658" y="1645920"/>
-            <a:ext cx="1548384" cy="798576"/>
+            <a:off x="3642134" y="1645920"/>
+            <a:ext cx="1554480" cy="798576"/>
           </a:xfrm>
           <a:prstGeom prst="rect">
             <a:avLst/>
@@ -14250,7 +14063,7 @@
         </p:nvSpPr>
         <p:spPr>
           <a:xfrm>
-            <a:off x="5192042" y="1816608"/>
+            <a:off x="5196614" y="1816608"/>
             <a:ext cx="2811254" cy="457200"/>
           </a:xfrm>
           <a:prstGeom prst="rect">
@@ -14279,7 +14092,7 @@
       </p:sp>
       <p:pic>
         <p:nvPicPr>
-          <p:cNvPr id="11" name="Picture 10" descr="031963a342c3fd42.png"/>
+          <p:cNvPr id="11" name="Picture 10" descr="7f9ab9ea310fee82.png"/>
           <p:cNvPicPr>
             <a:picLocks noChangeAspect="1"/>
           </p:cNvPicPr>
@@ -14293,8 +14106,8 @@
         </p:blipFill>
         <p:spPr>
           <a:xfrm>
-            <a:off x="7866136" y="1876044"/>
-            <a:ext cx="1444752" cy="338328"/>
+            <a:off x="7870708" y="1876044"/>
+            <a:ext cx="1441704" cy="338328"/>
           </a:xfrm>
           <a:prstGeom prst="rect">
             <a:avLst/>
@@ -14309,7 +14122,7 @@
         </p:nvSpPr>
         <p:spPr>
           <a:xfrm>
-            <a:off x="4058200" y="2695956"/>
+            <a:off x="4059724" y="2695956"/>
             <a:ext cx="2929551" cy="457200"/>
           </a:xfrm>
           <a:prstGeom prst="rect">
@@ -14338,7 +14151,7 @@
       </p:sp>
       <p:pic>
         <p:nvPicPr>
-          <p:cNvPr id="13" name="Picture 12" descr="f762cb430573f291.png"/>
+          <p:cNvPr id="13" name="Picture 12" descr="f48b4bb2456d3556.png"/>
           <p:cNvPicPr>
             <a:picLocks noChangeAspect="1"/>
           </p:cNvPicPr>
@@ -14352,8 +14165,8 @@
         </p:blipFill>
         <p:spPr>
           <a:xfrm>
-            <a:off x="6850591" y="2753868"/>
-            <a:ext cx="1252728" cy="341376"/>
+            <a:off x="6852115" y="2753868"/>
+            <a:ext cx="1249680" cy="341376"/>
           </a:xfrm>
           <a:prstGeom prst="rect">
             <a:avLst/>
@@ -14403,150 +14216,8 @@
         </p:nvSpPr>
         <p:spPr>
           <a:xfrm>
-            <a:off x="1720736" y="3976115"/>
-            <a:ext cx="8857207" cy="457200"/>
-          </a:xfrm>
-          <a:prstGeom prst="rect">
-            <a:avLst/>
-          </a:prstGeom>
-          <a:noFill/>
-        </p:spPr>
-        <p:txBody>
-          <a:bodyPr wrap="none" lIns="45720" rIns="45720" tIns="18288" bIns="18288" anchor="ctr">
-            <a:noAutofit/>
-          </a:bodyPr>
-          <a:lstStyle/>
-          <a:p>
-            <a:pPr algn="l"/>
-            <a:r>
-              <a:rPr sz="2330" b="0" i="0">
-                <a:solidFill>
-                  <a:srgbClr val="1A1A1A"/>
-                </a:solidFill>
-                <a:latin typeface="Lexend"/>
-              </a:rPr>
-              <a:t>Marcus subtracted the fronts. Sara added the exponents.</a:t>
-            </a:r>
-          </a:p>
-        </p:txBody>
-      </p:sp>
-      <p:pic>
-        <p:nvPicPr>
-          <p:cNvPr id="16" name="Picture 15" descr="da3880d224472433.png"/>
-          <p:cNvPicPr>
-            <a:picLocks noChangeAspect="1"/>
-          </p:cNvPicPr>
-          <p:nvPr/>
-        </p:nvPicPr>
-        <p:blipFill>
-          <a:blip r:embed="rId5"/>
-          <a:stretch>
-            <a:fillRect/>
-          </a:stretch>
-        </p:blipFill>
-        <p:spPr>
-          <a:xfrm>
-            <a:off x="1775600" y="4600956"/>
-            <a:ext cx="1496568" cy="213360"/>
-          </a:xfrm>
-          <a:prstGeom prst="rect">
-            <a:avLst/>
-          </a:prstGeom>
-        </p:spPr>
-      </p:pic>
-      <p:sp>
-        <p:nvSpPr>
-          <p:cNvPr id="17" name="TextBox 16"/>
-          <p:cNvSpPr txBox="1"/>
-          <p:nvPr/>
-        </p:nvSpPr>
-        <p:spPr>
-          <a:xfrm>
-            <a:off x="3272168" y="4479035"/>
-            <a:ext cx="1320048" cy="457200"/>
-          </a:xfrm>
-          <a:prstGeom prst="rect">
-            <a:avLst/>
-          </a:prstGeom>
-          <a:noFill/>
-        </p:spPr>
-        <p:txBody>
-          <a:bodyPr wrap="none" lIns="45720" rIns="45720" tIns="18288" bIns="18288" anchor="ctr">
-            <a:noAutofit/>
-          </a:bodyPr>
-          <a:lstStyle/>
-          <a:p>
-            <a:pPr algn="l"/>
-            <a:r>
-              <a:rPr sz="2330" b="0" i="0">
-                <a:solidFill>
-                  <a:srgbClr val="1A1A1A"/>
-                </a:solidFill>
-                <a:latin typeface="Lexend"/>
-              </a:rPr>
-              <a:t>   and   </a:t>
-            </a:r>
-          </a:p>
-        </p:txBody>
-      </p:sp>
-      <p:pic>
-        <p:nvPicPr>
-          <p:cNvPr id="18" name="Picture 17" descr="e5d4b81feea7d9a0.png"/>
-          <p:cNvPicPr>
-            <a:picLocks noChangeAspect="1"/>
-          </p:cNvPicPr>
-          <p:nvPr/>
-        </p:nvPicPr>
-        <p:blipFill>
-          <a:blip r:embed="rId6"/>
-          <a:stretch>
-            <a:fillRect/>
-          </a:stretch>
-        </p:blipFill>
-        <p:spPr>
-          <a:xfrm>
-            <a:off x="4455057" y="4576572"/>
-            <a:ext cx="1972056" cy="262128"/>
-          </a:xfrm>
-          <a:prstGeom prst="rect">
-            <a:avLst/>
-          </a:prstGeom>
-        </p:spPr>
-      </p:pic>
-      <p:pic>
-        <p:nvPicPr>
-          <p:cNvPr id="19" name="Picture 18" descr="9fe0ce93fe0b7e96.png"/>
-          <p:cNvPicPr>
-            <a:picLocks noChangeAspect="1"/>
-          </p:cNvPicPr>
-          <p:nvPr/>
-        </p:nvPicPr>
-        <p:blipFill>
-          <a:blip r:embed="rId7"/>
-          <a:stretch>
-            <a:fillRect/>
-          </a:stretch>
-        </p:blipFill>
-        <p:spPr>
-          <a:xfrm>
-            <a:off x="1775600" y="5082539"/>
-            <a:ext cx="841248" cy="256032"/>
-          </a:xfrm>
-          <a:prstGeom prst="rect">
-            <a:avLst/>
-          </a:prstGeom>
-        </p:spPr>
-      </p:pic>
-      <p:sp>
-        <p:nvSpPr>
-          <p:cNvPr id="20" name="TextBox 19"/>
-          <p:cNvSpPr txBox="1"/>
-          <p:nvPr/>
-        </p:nvSpPr>
-        <p:spPr>
-          <a:xfrm>
-            <a:off x="777240" y="5553456"/>
-            <a:ext cx="10607040" cy="548640"/>
+            <a:off x="777240" y="4343400"/>
+            <a:ext cx="10607040" cy="457200"/>
           </a:xfrm>
           <a:prstGeom prst="rect">
             <a:avLst/>
@@ -14561,22 +14232,13 @@
           <a:p>
             <a:pPr algn="ctr"/>
             <a:r>
-              <a:rPr sz="3040" b="1" i="0">
-                <a:solidFill>
-                  <a:srgbClr val="9E1B32"/>
-                </a:solidFill>
-                <a:latin typeface="Lexend"/>
-              </a:rPr>
-              <a:t>Answer:   3 × 10</a:t>
-            </a:r>
-            <a:r>
-              <a:rPr sz="3040" b="1" i="0" baseline="30000">
-                <a:solidFill>
-                  <a:srgbClr val="9E1B32"/>
-                </a:solidFill>
-                <a:latin typeface="Lexend"/>
-              </a:rPr>
-              <a:t>8</a:t>
+              <a:rPr sz="2470" b="1" i="0">
+                <a:solidFill>
+                  <a:srgbClr val="1A1A1A"/>
+                </a:solidFill>
+                <a:latin typeface="Lexend"/>
+              </a:rPr>
+              <a:t>Write your answer in sentences.</a:t>
             </a:r>
           </a:p>
         </p:txBody>
@@ -14623,13 +14285,13 @@
           <a:p>
             <a:pPr algn="l"/>
             <a:r>
-              <a:rPr sz="3420" b="1" i="0">
+              <a:rPr sz="3229" b="1" i="0">
                 <a:solidFill>
                   <a:srgbClr val="1A1A1A"/>
                 </a:solidFill>
                 <a:latin typeface="Lexend"/>
               </a:rPr>
-              <a:t>Independent Set</a:t>
+              <a:t>Whiteboards   ·   Question 9 of 9</a:t>
             </a:r>
           </a:p>
         </p:txBody>
@@ -14817,36 +14479,36 @@
         </p:nvSpPr>
         <p:spPr>
           <a:xfrm>
-            <a:off x="960120" y="1495043"/>
-            <a:ext cx="548640" cy="457200"/>
-          </a:xfrm>
-          <a:prstGeom prst="rect">
-            <a:avLst/>
-          </a:prstGeom>
-          <a:noFill/>
-        </p:spPr>
-        <p:txBody>
-          <a:bodyPr wrap="square" lIns="45720" rIns="45720" tIns="18288" bIns="18288" anchor="ctr">
-            <a:spAutoFit/>
+            <a:off x="2850631" y="1816608"/>
+            <a:ext cx="930187" cy="457200"/>
+          </a:xfrm>
+          <a:prstGeom prst="rect">
+            <a:avLst/>
+          </a:prstGeom>
+          <a:noFill/>
+        </p:spPr>
+        <p:txBody>
+          <a:bodyPr wrap="none" lIns="45720" rIns="45720" tIns="18288" bIns="18288" anchor="ctr">
+            <a:noAutofit/>
           </a:bodyPr>
           <a:lstStyle/>
           <a:p>
             <a:pPr algn="l"/>
             <a:r>
-              <a:rPr sz="2180" b="1" i="0">
-                <a:solidFill>
-                  <a:srgbClr val="0B5394"/>
-                </a:solidFill>
-                <a:latin typeface="Lexend"/>
-              </a:rPr>
-              <a:t>1.</a:t>
+              <a:rPr sz="2470" b="0" i="0">
+                <a:solidFill>
+                  <a:srgbClr val="1A1A1A"/>
+                </a:solidFill>
+                <a:latin typeface="Lexend"/>
+              </a:rPr>
+              <a:t>For  </a:t>
             </a:r>
           </a:p>
         </p:txBody>
       </p:sp>
       <p:pic>
         <p:nvPicPr>
-          <p:cNvPr id="9" name="Picture 8" descr="6e0be8365ac4f5b7.png"/>
+          <p:cNvPr id="9" name="Picture 8" descr="eb274165a95bfcd1.png"/>
           <p:cNvPicPr>
             <a:picLocks noChangeAspect="1"/>
           </p:cNvPicPr>
@@ -14860,8 +14522,8 @@
         </p:blipFill>
         <p:spPr>
           <a:xfrm>
-            <a:off x="1627632" y="1559051"/>
-            <a:ext cx="2292096" cy="329184"/>
+            <a:off x="3643658" y="1645920"/>
+            <a:ext cx="1548384" cy="798576"/>
           </a:xfrm>
           <a:prstGeom prst="rect">
             <a:avLst/>
@@ -14876,36 +14538,36 @@
         </p:nvSpPr>
         <p:spPr>
           <a:xfrm>
-            <a:off x="960120" y="2205227"/>
-            <a:ext cx="548640" cy="457200"/>
-          </a:xfrm>
-          <a:prstGeom prst="rect">
-            <a:avLst/>
-          </a:prstGeom>
-          <a:noFill/>
-        </p:spPr>
-        <p:txBody>
-          <a:bodyPr wrap="square" lIns="45720" rIns="45720" tIns="18288" bIns="18288" anchor="ctr">
-            <a:spAutoFit/>
+            <a:off x="5192042" y="1816608"/>
+            <a:ext cx="2811254" cy="457200"/>
+          </a:xfrm>
+          <a:prstGeom prst="rect">
+            <a:avLst/>
+          </a:prstGeom>
+          <a:noFill/>
+        </p:spPr>
+        <p:txBody>
+          <a:bodyPr wrap="none" lIns="45720" rIns="45720" tIns="18288" bIns="18288" anchor="ctr">
+            <a:noAutofit/>
           </a:bodyPr>
           <a:lstStyle/>
           <a:p>
             <a:pPr algn="l"/>
             <a:r>
-              <a:rPr sz="2180" b="1" i="0">
-                <a:solidFill>
-                  <a:srgbClr val="0B5394"/>
-                </a:solidFill>
-                <a:latin typeface="Lexend"/>
-              </a:rPr>
-              <a:t>2.</a:t>
+              <a:rPr sz="2470" b="0" i="0">
+                <a:solidFill>
+                  <a:srgbClr val="1A1A1A"/>
+                </a:solidFill>
+                <a:latin typeface="Lexend"/>
+              </a:rPr>
+              <a:t>  Marcus writes  </a:t>
             </a:r>
           </a:p>
         </p:txBody>
       </p:sp>
       <p:pic>
         <p:nvPicPr>
-          <p:cNvPr id="11" name="Picture 10" descr="62a20c5f23ea4ba0.png"/>
+          <p:cNvPr id="11" name="Picture 10" descr="031963a342c3fd42.png"/>
           <p:cNvPicPr>
             <a:picLocks noChangeAspect="1"/>
           </p:cNvPicPr>
@@ -14919,8 +14581,8 @@
         </p:blipFill>
         <p:spPr>
           <a:xfrm>
-            <a:off x="1627632" y="2112263"/>
-            <a:ext cx="1167384" cy="643128"/>
+            <a:off x="7866136" y="1876044"/>
+            <a:ext cx="1444752" cy="338328"/>
           </a:xfrm>
           <a:prstGeom prst="rect">
             <a:avLst/>
@@ -14935,36 +14597,36 @@
         </p:nvSpPr>
         <p:spPr>
           <a:xfrm>
-            <a:off x="960120" y="2915411"/>
-            <a:ext cx="548640" cy="457200"/>
-          </a:xfrm>
-          <a:prstGeom prst="rect">
-            <a:avLst/>
-          </a:prstGeom>
-          <a:noFill/>
-        </p:spPr>
-        <p:txBody>
-          <a:bodyPr wrap="square" lIns="45720" rIns="45720" tIns="18288" bIns="18288" anchor="ctr">
-            <a:spAutoFit/>
+            <a:off x="4058200" y="2695956"/>
+            <a:ext cx="2929551" cy="457200"/>
+          </a:xfrm>
+          <a:prstGeom prst="rect">
+            <a:avLst/>
+          </a:prstGeom>
+          <a:noFill/>
+        </p:spPr>
+        <p:txBody>
+          <a:bodyPr wrap="none" lIns="45720" rIns="45720" tIns="18288" bIns="18288" anchor="ctr">
+            <a:noAutofit/>
           </a:bodyPr>
           <a:lstStyle/>
           <a:p>
             <a:pPr algn="l"/>
             <a:r>
-              <a:rPr sz="2180" b="1" i="0">
-                <a:solidFill>
-                  <a:srgbClr val="0B5394"/>
-                </a:solidFill>
-                <a:latin typeface="Lexend"/>
-              </a:rPr>
-              <a:t>3.</a:t>
+              <a:rPr sz="2470" b="0" i="0">
+                <a:solidFill>
+                  <a:srgbClr val="1A1A1A"/>
+                </a:solidFill>
+                <a:latin typeface="Lexend"/>
+              </a:rPr>
+              <a:t>and Sara writes  </a:t>
             </a:r>
           </a:p>
         </p:txBody>
       </p:sp>
       <p:pic>
         <p:nvPicPr>
-          <p:cNvPr id="13" name="Picture 12" descr="d61c32ba4971b571.png"/>
+          <p:cNvPr id="13" name="Picture 12" descr="f762cb430573f291.png"/>
           <p:cNvPicPr>
             <a:picLocks noChangeAspect="1"/>
           </p:cNvPicPr>
@@ -14978,8 +14640,8 @@
         </p:blipFill>
         <p:spPr>
           <a:xfrm>
-            <a:off x="1627632" y="2977895"/>
-            <a:ext cx="2407920" cy="332232"/>
+            <a:off x="6850591" y="2753868"/>
+            <a:ext cx="1252728" cy="341376"/>
           </a:xfrm>
           <a:prstGeom prst="rect">
             <a:avLst/>
@@ -14994,36 +14656,71 @@
         </p:nvSpPr>
         <p:spPr>
           <a:xfrm>
-            <a:off x="960120" y="3625595"/>
-            <a:ext cx="548640" cy="457200"/>
-          </a:xfrm>
-          <a:prstGeom prst="rect">
-            <a:avLst/>
-          </a:prstGeom>
-          <a:noFill/>
-        </p:spPr>
-        <p:txBody>
-          <a:bodyPr wrap="square" lIns="45720" rIns="45720" tIns="18288" bIns="18288" anchor="ctr">
+            <a:off x="777240" y="3404616"/>
+            <a:ext cx="10607040" cy="411480"/>
+          </a:xfrm>
+          <a:prstGeom prst="rect">
+            <a:avLst/>
+          </a:prstGeom>
+          <a:noFill/>
+        </p:spPr>
+        <p:txBody>
+          <a:bodyPr wrap="square" lIns="45720" rIns="45720" tIns="18288" bIns="18288" anchor="t">
             <a:spAutoFit/>
           </a:bodyPr>
           <a:lstStyle/>
           <a:p>
+            <a:pPr algn="ctr"/>
+            <a:r>
+              <a:rPr sz="2180" b="0" i="0">
+                <a:solidFill>
+                  <a:srgbClr val="1A1A1A"/>
+                </a:solidFill>
+                <a:latin typeface="Lexend"/>
+              </a:rPr>
+              <a:t>Name what each one did wrong, and give the correct quotient.</a:t>
+            </a:r>
+          </a:p>
+        </p:txBody>
+      </p:sp>
+      <p:sp>
+        <p:nvSpPr>
+          <p:cNvPr id="15" name="TextBox 14"/>
+          <p:cNvSpPr txBox="1"/>
+          <p:nvPr/>
+        </p:nvSpPr>
+        <p:spPr>
+          <a:xfrm>
+            <a:off x="1720736" y="3976115"/>
+            <a:ext cx="8857207" cy="457200"/>
+          </a:xfrm>
+          <a:prstGeom prst="rect">
+            <a:avLst/>
+          </a:prstGeom>
+          <a:noFill/>
+        </p:spPr>
+        <p:txBody>
+          <a:bodyPr wrap="none" lIns="45720" rIns="45720" tIns="18288" bIns="18288" anchor="ctr">
+            <a:noAutofit/>
+          </a:bodyPr>
+          <a:lstStyle/>
+          <a:p>
             <a:pPr algn="l"/>
             <a:r>
-              <a:rPr sz="2180" b="1" i="0">
-                <a:solidFill>
-                  <a:srgbClr val="0B5394"/>
-                </a:solidFill>
-                <a:latin typeface="Lexend"/>
-              </a:rPr>
-              <a:t>4.</a:t>
+              <a:rPr sz="2330" b="0" i="0">
+                <a:solidFill>
+                  <a:srgbClr val="1A1A1A"/>
+                </a:solidFill>
+                <a:latin typeface="Lexend"/>
+              </a:rPr>
+              <a:t>Marcus subtracted the fronts. Sara added the exponents.</a:t>
             </a:r>
           </a:p>
         </p:txBody>
       </p:sp>
       <p:pic>
         <p:nvPicPr>
-          <p:cNvPr id="15" name="Picture 14" descr="8867f8a3b1816d89.png"/>
+          <p:cNvPr id="16" name="Picture 15" descr="da3880d224472433.png"/>
           <p:cNvPicPr>
             <a:picLocks noChangeAspect="1"/>
           </p:cNvPicPr>
@@ -15037,8 +14734,8 @@
         </p:blipFill>
         <p:spPr>
           <a:xfrm>
-            <a:off x="1627632" y="3532631"/>
-            <a:ext cx="1155192" cy="643128"/>
+            <a:off x="1775600" y="4600956"/>
+            <a:ext cx="1496568" cy="213360"/>
           </a:xfrm>
           <a:prstGeom prst="rect">
             <a:avLst/>
@@ -15047,42 +14744,42 @@
       </p:pic>
       <p:sp>
         <p:nvSpPr>
-          <p:cNvPr id="16" name="TextBox 15"/>
-          <p:cNvSpPr txBox="1"/>
-          <p:nvPr/>
-        </p:nvSpPr>
-        <p:spPr>
-          <a:xfrm>
-            <a:off x="960120" y="4454651"/>
-            <a:ext cx="548640" cy="457200"/>
-          </a:xfrm>
-          <a:prstGeom prst="rect">
-            <a:avLst/>
-          </a:prstGeom>
-          <a:noFill/>
-        </p:spPr>
-        <p:txBody>
-          <a:bodyPr wrap="square" lIns="45720" rIns="45720" tIns="18288" bIns="18288" anchor="ctr">
-            <a:spAutoFit/>
+          <p:cNvPr id="17" name="TextBox 16"/>
+          <p:cNvSpPr txBox="1"/>
+          <p:nvPr/>
+        </p:nvSpPr>
+        <p:spPr>
+          <a:xfrm>
+            <a:off x="3272168" y="4479035"/>
+            <a:ext cx="1320048" cy="457200"/>
+          </a:xfrm>
+          <a:prstGeom prst="rect">
+            <a:avLst/>
+          </a:prstGeom>
+          <a:noFill/>
+        </p:spPr>
+        <p:txBody>
+          <a:bodyPr wrap="none" lIns="45720" rIns="45720" tIns="18288" bIns="18288" anchor="ctr">
+            <a:noAutofit/>
           </a:bodyPr>
           <a:lstStyle/>
           <a:p>
             <a:pPr algn="l"/>
             <a:r>
-              <a:rPr sz="2180" b="1" i="0">
-                <a:solidFill>
-                  <a:srgbClr val="0B5394"/>
-                </a:solidFill>
-                <a:latin typeface="Lexend"/>
-              </a:rPr>
-              <a:t>5.</a:t>
+              <a:rPr sz="2330" b="0" i="0">
+                <a:solidFill>
+                  <a:srgbClr val="1A1A1A"/>
+                </a:solidFill>
+                <a:latin typeface="Lexend"/>
+              </a:rPr>
+              <a:t>   and   </a:t>
             </a:r>
           </a:p>
         </p:txBody>
       </p:sp>
       <p:pic>
         <p:nvPicPr>
-          <p:cNvPr id="17" name="Picture 16" descr="b725906188c6ae12.png"/>
+          <p:cNvPr id="18" name="Picture 17" descr="e5d4b81feea7d9a0.png"/>
           <p:cNvPicPr>
             <a:picLocks noChangeAspect="1"/>
           </p:cNvPicPr>
@@ -15096,87 +14793,17 @@
         </p:blipFill>
         <p:spPr>
           <a:xfrm>
-            <a:off x="1627632" y="4358639"/>
-            <a:ext cx="1060704" cy="649224"/>
+            <a:off x="4455057" y="4576572"/>
+            <a:ext cx="1972056" cy="262128"/>
           </a:xfrm>
           <a:prstGeom prst="rect">
             <a:avLst/>
           </a:prstGeom>
         </p:spPr>
       </p:pic>
-      <p:sp>
-        <p:nvSpPr>
-          <p:cNvPr id="18" name="TextBox 17"/>
-          <p:cNvSpPr txBox="1"/>
-          <p:nvPr/>
-        </p:nvSpPr>
-        <p:spPr>
-          <a:xfrm>
-            <a:off x="960120" y="5167883"/>
-            <a:ext cx="548640" cy="457200"/>
-          </a:xfrm>
-          <a:prstGeom prst="rect">
-            <a:avLst/>
-          </a:prstGeom>
-          <a:noFill/>
-        </p:spPr>
-        <p:txBody>
-          <a:bodyPr wrap="square" lIns="45720" rIns="45720" tIns="18288" bIns="18288" anchor="ctr">
-            <a:spAutoFit/>
-          </a:bodyPr>
-          <a:lstStyle/>
-          <a:p>
-            <a:pPr algn="l"/>
-            <a:r>
-              <a:rPr sz="2180" b="1" i="0">
-                <a:solidFill>
-                  <a:srgbClr val="0B5394"/>
-                </a:solidFill>
-                <a:latin typeface="Lexend"/>
-              </a:rPr>
-              <a:t>6.</a:t>
-            </a:r>
-          </a:p>
-        </p:txBody>
-      </p:sp>
-      <p:sp>
-        <p:nvSpPr>
-          <p:cNvPr id="19" name="TextBox 18"/>
-          <p:cNvSpPr txBox="1"/>
-          <p:nvPr/>
-        </p:nvSpPr>
-        <p:spPr>
-          <a:xfrm>
-            <a:off x="1554480" y="5167883"/>
-            <a:ext cx="913052" cy="457200"/>
-          </a:xfrm>
-          <a:prstGeom prst="rect">
-            <a:avLst/>
-          </a:prstGeom>
-          <a:noFill/>
-        </p:spPr>
-        <p:txBody>
-          <a:bodyPr wrap="none" lIns="45720" rIns="45720" tIns="18288" bIns="18288" anchor="ctr">
-            <a:noAutofit/>
-          </a:bodyPr>
-          <a:lstStyle/>
-          <a:p>
-            <a:pPr algn="l"/>
-            <a:r>
-              <a:rPr sz="2180" b="0" i="0">
-                <a:solidFill>
-                  <a:srgbClr val="1A1A1A"/>
-                </a:solidFill>
-                <a:latin typeface="Lexend"/>
-              </a:rPr>
-              <a:t>Find </a:t>
-            </a:r>
-          </a:p>
-        </p:txBody>
-      </p:sp>
       <p:pic>
         <p:nvPicPr>
-          <p:cNvPr id="20" name="Picture 19" descr="6d78c2be12150bf5.png"/>
+          <p:cNvPr id="19" name="Picture 18" descr="9fe0ce93fe0b7e96.png"/>
           <p:cNvPicPr>
             <a:picLocks noChangeAspect="1"/>
           </p:cNvPicPr>
@@ -15190,8 +14817,8 @@
         </p:blipFill>
         <p:spPr>
           <a:xfrm>
-            <a:off x="2330372" y="5312664"/>
-            <a:ext cx="146304" cy="167640"/>
+            <a:off x="1775600" y="5082539"/>
+            <a:ext cx="841248" cy="256032"/>
           </a:xfrm>
           <a:prstGeom prst="rect">
             <a:avLst/>
@@ -15200,63 +14827,48 @@
       </p:pic>
       <p:sp>
         <p:nvSpPr>
-          <p:cNvPr id="21" name="TextBox 20"/>
-          <p:cNvSpPr txBox="1"/>
-          <p:nvPr/>
-        </p:nvSpPr>
-        <p:spPr>
-          <a:xfrm>
-            <a:off x="2476676" y="5167883"/>
-            <a:ext cx="442110" cy="457200"/>
-          </a:xfrm>
-          <a:prstGeom prst="rect">
-            <a:avLst/>
-          </a:prstGeom>
-          <a:noFill/>
-        </p:spPr>
-        <p:txBody>
-          <a:bodyPr wrap="none" lIns="45720" rIns="45720" tIns="18288" bIns="18288" anchor="ctr">
-            <a:noAutofit/>
-          </a:bodyPr>
-          <a:lstStyle/>
-          <a:p>
-            <a:pPr algn="l"/>
-            <a:r>
-              <a:rPr sz="2180" b="0" i="0">
-                <a:solidFill>
-                  <a:srgbClr val="1A1A1A"/>
-                </a:solidFill>
-                <a:latin typeface="Lexend"/>
-              </a:rPr>
-              <a:t>.  </a:t>
-            </a:r>
-          </a:p>
-        </p:txBody>
-      </p:sp>
-      <p:pic>
-        <p:nvPicPr>
-          <p:cNvPr id="22" name="Picture 21" descr="d7bf46933a52690e.png"/>
-          <p:cNvPicPr>
-            <a:picLocks noChangeAspect="1"/>
-          </p:cNvPicPr>
-          <p:nvPr/>
-        </p:nvPicPr>
-        <p:blipFill>
-          <a:blip r:embed="rId8"/>
-          <a:stretch>
-            <a:fillRect/>
-          </a:stretch>
-        </p:blipFill>
-        <p:spPr>
-          <a:xfrm>
-            <a:off x="2781626" y="5228844"/>
-            <a:ext cx="3621024" cy="335280"/>
-          </a:xfrm>
-          <a:prstGeom prst="rect">
-            <a:avLst/>
-          </a:prstGeom>
-        </p:spPr>
-      </p:pic>
+          <p:cNvPr id="20" name="TextBox 19"/>
+          <p:cNvSpPr txBox="1"/>
+          <p:nvPr/>
+        </p:nvSpPr>
+        <p:spPr>
+          <a:xfrm>
+            <a:off x="777240" y="5553456"/>
+            <a:ext cx="10607040" cy="548640"/>
+          </a:xfrm>
+          <a:prstGeom prst="rect">
+            <a:avLst/>
+          </a:prstGeom>
+          <a:noFill/>
+        </p:spPr>
+        <p:txBody>
+          <a:bodyPr wrap="square" lIns="45720" rIns="45720" tIns="18288" bIns="18288" anchor="t">
+            <a:spAutoFit/>
+          </a:bodyPr>
+          <a:lstStyle/>
+          <a:p>
+            <a:pPr algn="ctr"/>
+            <a:r>
+              <a:rPr sz="3040" b="1" i="0">
+                <a:solidFill>
+                  <a:srgbClr val="9E1B32"/>
+                </a:solidFill>
+                <a:latin typeface="Lexend"/>
+              </a:rPr>
+              <a:t>Answer:   3 × 10</a:t>
+            </a:r>
+            <a:r>
+              <a:rPr sz="3040" b="1" i="0" baseline="30000">
+                <a:solidFill>
+                  <a:srgbClr val="9E1B32"/>
+                </a:solidFill>
+                <a:latin typeface="Lexend"/>
+              </a:rPr>
+              <a:t>8</a:t>
+            </a:r>
+          </a:p>
+        </p:txBody>
+      </p:sp>
     </p:spTree>
   </p:cSld>
   <p:clrMapOvr>
@@ -15305,7 +14917,7 @@
                 </a:solidFill>
                 <a:latin typeface="Lexend"/>
               </a:rPr>
-              <a:t>IXL</a:t>
+              <a:t>Independent Set</a:t>
             </a:r>
           </a:p>
         </p:txBody>
@@ -15481,6 +15093,682 @@
                 <a:latin typeface="Lexend"/>
               </a:rPr>
               <a:t>34</a:t>
+            </a:r>
+          </a:p>
+        </p:txBody>
+      </p:sp>
+      <p:sp>
+        <p:nvSpPr>
+          <p:cNvPr id="8" name="TextBox 7"/>
+          <p:cNvSpPr txBox="1"/>
+          <p:nvPr/>
+        </p:nvSpPr>
+        <p:spPr>
+          <a:xfrm>
+            <a:off x="960120" y="1495043"/>
+            <a:ext cx="548640" cy="457200"/>
+          </a:xfrm>
+          <a:prstGeom prst="rect">
+            <a:avLst/>
+          </a:prstGeom>
+          <a:noFill/>
+        </p:spPr>
+        <p:txBody>
+          <a:bodyPr wrap="square" lIns="45720" rIns="45720" tIns="18288" bIns="18288" anchor="ctr">
+            <a:spAutoFit/>
+          </a:bodyPr>
+          <a:lstStyle/>
+          <a:p>
+            <a:pPr algn="l"/>
+            <a:r>
+              <a:rPr sz="2180" b="1" i="0">
+                <a:solidFill>
+                  <a:srgbClr val="0B5394"/>
+                </a:solidFill>
+                <a:latin typeface="Lexend"/>
+              </a:rPr>
+              <a:t>1.</a:t>
+            </a:r>
+          </a:p>
+        </p:txBody>
+      </p:sp>
+      <p:pic>
+        <p:nvPicPr>
+          <p:cNvPr id="9" name="Picture 8" descr="6e0be8365ac4f5b7.png"/>
+          <p:cNvPicPr>
+            <a:picLocks noChangeAspect="1"/>
+          </p:cNvPicPr>
+          <p:nvPr/>
+        </p:nvPicPr>
+        <p:blipFill>
+          <a:blip r:embed="rId2"/>
+          <a:stretch>
+            <a:fillRect/>
+          </a:stretch>
+        </p:blipFill>
+        <p:spPr>
+          <a:xfrm>
+            <a:off x="1627632" y="1559051"/>
+            <a:ext cx="2292096" cy="329184"/>
+          </a:xfrm>
+          <a:prstGeom prst="rect">
+            <a:avLst/>
+          </a:prstGeom>
+        </p:spPr>
+      </p:pic>
+      <p:sp>
+        <p:nvSpPr>
+          <p:cNvPr id="10" name="TextBox 9"/>
+          <p:cNvSpPr txBox="1"/>
+          <p:nvPr/>
+        </p:nvSpPr>
+        <p:spPr>
+          <a:xfrm>
+            <a:off x="960120" y="2205227"/>
+            <a:ext cx="548640" cy="457200"/>
+          </a:xfrm>
+          <a:prstGeom prst="rect">
+            <a:avLst/>
+          </a:prstGeom>
+          <a:noFill/>
+        </p:spPr>
+        <p:txBody>
+          <a:bodyPr wrap="square" lIns="45720" rIns="45720" tIns="18288" bIns="18288" anchor="ctr">
+            <a:spAutoFit/>
+          </a:bodyPr>
+          <a:lstStyle/>
+          <a:p>
+            <a:pPr algn="l"/>
+            <a:r>
+              <a:rPr sz="2180" b="1" i="0">
+                <a:solidFill>
+                  <a:srgbClr val="0B5394"/>
+                </a:solidFill>
+                <a:latin typeface="Lexend"/>
+              </a:rPr>
+              <a:t>2.</a:t>
+            </a:r>
+          </a:p>
+        </p:txBody>
+      </p:sp>
+      <p:pic>
+        <p:nvPicPr>
+          <p:cNvPr id="11" name="Picture 10" descr="62a20c5f23ea4ba0.png"/>
+          <p:cNvPicPr>
+            <a:picLocks noChangeAspect="1"/>
+          </p:cNvPicPr>
+          <p:nvPr/>
+        </p:nvPicPr>
+        <p:blipFill>
+          <a:blip r:embed="rId3"/>
+          <a:stretch>
+            <a:fillRect/>
+          </a:stretch>
+        </p:blipFill>
+        <p:spPr>
+          <a:xfrm>
+            <a:off x="1627632" y="2112263"/>
+            <a:ext cx="1167384" cy="643128"/>
+          </a:xfrm>
+          <a:prstGeom prst="rect">
+            <a:avLst/>
+          </a:prstGeom>
+        </p:spPr>
+      </p:pic>
+      <p:sp>
+        <p:nvSpPr>
+          <p:cNvPr id="12" name="TextBox 11"/>
+          <p:cNvSpPr txBox="1"/>
+          <p:nvPr/>
+        </p:nvSpPr>
+        <p:spPr>
+          <a:xfrm>
+            <a:off x="960120" y="2915411"/>
+            <a:ext cx="548640" cy="457200"/>
+          </a:xfrm>
+          <a:prstGeom prst="rect">
+            <a:avLst/>
+          </a:prstGeom>
+          <a:noFill/>
+        </p:spPr>
+        <p:txBody>
+          <a:bodyPr wrap="square" lIns="45720" rIns="45720" tIns="18288" bIns="18288" anchor="ctr">
+            <a:spAutoFit/>
+          </a:bodyPr>
+          <a:lstStyle/>
+          <a:p>
+            <a:pPr algn="l"/>
+            <a:r>
+              <a:rPr sz="2180" b="1" i="0">
+                <a:solidFill>
+                  <a:srgbClr val="0B5394"/>
+                </a:solidFill>
+                <a:latin typeface="Lexend"/>
+              </a:rPr>
+              <a:t>3.</a:t>
+            </a:r>
+          </a:p>
+        </p:txBody>
+      </p:sp>
+      <p:pic>
+        <p:nvPicPr>
+          <p:cNvPr id="13" name="Picture 12" descr="d61c32ba4971b571.png"/>
+          <p:cNvPicPr>
+            <a:picLocks noChangeAspect="1"/>
+          </p:cNvPicPr>
+          <p:nvPr/>
+        </p:nvPicPr>
+        <p:blipFill>
+          <a:blip r:embed="rId4"/>
+          <a:stretch>
+            <a:fillRect/>
+          </a:stretch>
+        </p:blipFill>
+        <p:spPr>
+          <a:xfrm>
+            <a:off x="1627632" y="2977895"/>
+            <a:ext cx="2407920" cy="332232"/>
+          </a:xfrm>
+          <a:prstGeom prst="rect">
+            <a:avLst/>
+          </a:prstGeom>
+        </p:spPr>
+      </p:pic>
+      <p:sp>
+        <p:nvSpPr>
+          <p:cNvPr id="14" name="TextBox 13"/>
+          <p:cNvSpPr txBox="1"/>
+          <p:nvPr/>
+        </p:nvSpPr>
+        <p:spPr>
+          <a:xfrm>
+            <a:off x="960120" y="3625595"/>
+            <a:ext cx="548640" cy="457200"/>
+          </a:xfrm>
+          <a:prstGeom prst="rect">
+            <a:avLst/>
+          </a:prstGeom>
+          <a:noFill/>
+        </p:spPr>
+        <p:txBody>
+          <a:bodyPr wrap="square" lIns="45720" rIns="45720" tIns="18288" bIns="18288" anchor="ctr">
+            <a:spAutoFit/>
+          </a:bodyPr>
+          <a:lstStyle/>
+          <a:p>
+            <a:pPr algn="l"/>
+            <a:r>
+              <a:rPr sz="2180" b="1" i="0">
+                <a:solidFill>
+                  <a:srgbClr val="0B5394"/>
+                </a:solidFill>
+                <a:latin typeface="Lexend"/>
+              </a:rPr>
+              <a:t>4.</a:t>
+            </a:r>
+          </a:p>
+        </p:txBody>
+      </p:sp>
+      <p:pic>
+        <p:nvPicPr>
+          <p:cNvPr id="15" name="Picture 14" descr="8867f8a3b1816d89.png"/>
+          <p:cNvPicPr>
+            <a:picLocks noChangeAspect="1"/>
+          </p:cNvPicPr>
+          <p:nvPr/>
+        </p:nvPicPr>
+        <p:blipFill>
+          <a:blip r:embed="rId5"/>
+          <a:stretch>
+            <a:fillRect/>
+          </a:stretch>
+        </p:blipFill>
+        <p:spPr>
+          <a:xfrm>
+            <a:off x="1627632" y="3532631"/>
+            <a:ext cx="1155192" cy="643128"/>
+          </a:xfrm>
+          <a:prstGeom prst="rect">
+            <a:avLst/>
+          </a:prstGeom>
+        </p:spPr>
+      </p:pic>
+      <p:sp>
+        <p:nvSpPr>
+          <p:cNvPr id="16" name="TextBox 15"/>
+          <p:cNvSpPr txBox="1"/>
+          <p:nvPr/>
+        </p:nvSpPr>
+        <p:spPr>
+          <a:xfrm>
+            <a:off x="960120" y="4454651"/>
+            <a:ext cx="548640" cy="457200"/>
+          </a:xfrm>
+          <a:prstGeom prst="rect">
+            <a:avLst/>
+          </a:prstGeom>
+          <a:noFill/>
+        </p:spPr>
+        <p:txBody>
+          <a:bodyPr wrap="square" lIns="45720" rIns="45720" tIns="18288" bIns="18288" anchor="ctr">
+            <a:spAutoFit/>
+          </a:bodyPr>
+          <a:lstStyle/>
+          <a:p>
+            <a:pPr algn="l"/>
+            <a:r>
+              <a:rPr sz="2180" b="1" i="0">
+                <a:solidFill>
+                  <a:srgbClr val="0B5394"/>
+                </a:solidFill>
+                <a:latin typeface="Lexend"/>
+              </a:rPr>
+              <a:t>5.</a:t>
+            </a:r>
+          </a:p>
+        </p:txBody>
+      </p:sp>
+      <p:pic>
+        <p:nvPicPr>
+          <p:cNvPr id="17" name="Picture 16" descr="b725906188c6ae12.png"/>
+          <p:cNvPicPr>
+            <a:picLocks noChangeAspect="1"/>
+          </p:cNvPicPr>
+          <p:nvPr/>
+        </p:nvPicPr>
+        <p:blipFill>
+          <a:blip r:embed="rId6"/>
+          <a:stretch>
+            <a:fillRect/>
+          </a:stretch>
+        </p:blipFill>
+        <p:spPr>
+          <a:xfrm>
+            <a:off x="1627632" y="4358639"/>
+            <a:ext cx="1060704" cy="649224"/>
+          </a:xfrm>
+          <a:prstGeom prst="rect">
+            <a:avLst/>
+          </a:prstGeom>
+        </p:spPr>
+      </p:pic>
+      <p:sp>
+        <p:nvSpPr>
+          <p:cNvPr id="18" name="TextBox 17"/>
+          <p:cNvSpPr txBox="1"/>
+          <p:nvPr/>
+        </p:nvSpPr>
+        <p:spPr>
+          <a:xfrm>
+            <a:off x="960120" y="5167883"/>
+            <a:ext cx="548640" cy="457200"/>
+          </a:xfrm>
+          <a:prstGeom prst="rect">
+            <a:avLst/>
+          </a:prstGeom>
+          <a:noFill/>
+        </p:spPr>
+        <p:txBody>
+          <a:bodyPr wrap="square" lIns="45720" rIns="45720" tIns="18288" bIns="18288" anchor="ctr">
+            <a:spAutoFit/>
+          </a:bodyPr>
+          <a:lstStyle/>
+          <a:p>
+            <a:pPr algn="l"/>
+            <a:r>
+              <a:rPr sz="2180" b="1" i="0">
+                <a:solidFill>
+                  <a:srgbClr val="0B5394"/>
+                </a:solidFill>
+                <a:latin typeface="Lexend"/>
+              </a:rPr>
+              <a:t>6.</a:t>
+            </a:r>
+          </a:p>
+        </p:txBody>
+      </p:sp>
+      <p:sp>
+        <p:nvSpPr>
+          <p:cNvPr id="19" name="TextBox 18"/>
+          <p:cNvSpPr txBox="1"/>
+          <p:nvPr/>
+        </p:nvSpPr>
+        <p:spPr>
+          <a:xfrm>
+            <a:off x="1554480" y="5167883"/>
+            <a:ext cx="913052" cy="457200"/>
+          </a:xfrm>
+          <a:prstGeom prst="rect">
+            <a:avLst/>
+          </a:prstGeom>
+          <a:noFill/>
+        </p:spPr>
+        <p:txBody>
+          <a:bodyPr wrap="none" lIns="45720" rIns="45720" tIns="18288" bIns="18288" anchor="ctr">
+            <a:noAutofit/>
+          </a:bodyPr>
+          <a:lstStyle/>
+          <a:p>
+            <a:pPr algn="l"/>
+            <a:r>
+              <a:rPr sz="2180" b="0" i="0">
+                <a:solidFill>
+                  <a:srgbClr val="1A1A1A"/>
+                </a:solidFill>
+                <a:latin typeface="Lexend"/>
+              </a:rPr>
+              <a:t>Find </a:t>
+            </a:r>
+          </a:p>
+        </p:txBody>
+      </p:sp>
+      <p:pic>
+        <p:nvPicPr>
+          <p:cNvPr id="20" name="Picture 19" descr="6d78c2be12150bf5.png"/>
+          <p:cNvPicPr>
+            <a:picLocks noChangeAspect="1"/>
+          </p:cNvPicPr>
+          <p:nvPr/>
+        </p:nvPicPr>
+        <p:blipFill>
+          <a:blip r:embed="rId7"/>
+          <a:stretch>
+            <a:fillRect/>
+          </a:stretch>
+        </p:blipFill>
+        <p:spPr>
+          <a:xfrm>
+            <a:off x="2330372" y="5312664"/>
+            <a:ext cx="146304" cy="167640"/>
+          </a:xfrm>
+          <a:prstGeom prst="rect">
+            <a:avLst/>
+          </a:prstGeom>
+        </p:spPr>
+      </p:pic>
+      <p:sp>
+        <p:nvSpPr>
+          <p:cNvPr id="21" name="TextBox 20"/>
+          <p:cNvSpPr txBox="1"/>
+          <p:nvPr/>
+        </p:nvSpPr>
+        <p:spPr>
+          <a:xfrm>
+            <a:off x="2476676" y="5167883"/>
+            <a:ext cx="442110" cy="457200"/>
+          </a:xfrm>
+          <a:prstGeom prst="rect">
+            <a:avLst/>
+          </a:prstGeom>
+          <a:noFill/>
+        </p:spPr>
+        <p:txBody>
+          <a:bodyPr wrap="none" lIns="45720" rIns="45720" tIns="18288" bIns="18288" anchor="ctr">
+            <a:noAutofit/>
+          </a:bodyPr>
+          <a:lstStyle/>
+          <a:p>
+            <a:pPr algn="l"/>
+            <a:r>
+              <a:rPr sz="2180" b="0" i="0">
+                <a:solidFill>
+                  <a:srgbClr val="1A1A1A"/>
+                </a:solidFill>
+                <a:latin typeface="Lexend"/>
+              </a:rPr>
+              <a:t>.  </a:t>
+            </a:r>
+          </a:p>
+        </p:txBody>
+      </p:sp>
+      <p:pic>
+        <p:nvPicPr>
+          <p:cNvPr id="22" name="Picture 21" descr="d7bf46933a52690e.png"/>
+          <p:cNvPicPr>
+            <a:picLocks noChangeAspect="1"/>
+          </p:cNvPicPr>
+          <p:nvPr/>
+        </p:nvPicPr>
+        <p:blipFill>
+          <a:blip r:embed="rId8"/>
+          <a:stretch>
+            <a:fillRect/>
+          </a:stretch>
+        </p:blipFill>
+        <p:spPr>
+          <a:xfrm>
+            <a:off x="2781626" y="5228844"/>
+            <a:ext cx="3621024" cy="335280"/>
+          </a:xfrm>
+          <a:prstGeom prst="rect">
+            <a:avLst/>
+          </a:prstGeom>
+        </p:spPr>
+      </p:pic>
+    </p:spTree>
+  </p:cSld>
+  <p:clrMapOvr>
+    <a:masterClrMapping/>
+  </p:clrMapOvr>
+</p:sld>
+</file>
+
+<file path=ppt/slides/slide35.xml><?xml version="1.0" encoding="utf-8"?>
+<p:sld xmlns:a="http://schemas.openxmlformats.org/drawingml/2006/main" xmlns:p="http://schemas.openxmlformats.org/presentationml/2006/main" xmlns:r="http://schemas.openxmlformats.org/officeDocument/2006/relationships">
+  <p:cSld>
+    <p:spTree>
+      <p:nvGrpSpPr>
+        <p:cNvPr id="1" name=""/>
+        <p:cNvGrpSpPr/>
+        <p:nvPr/>
+      </p:nvGrpSpPr>
+      <p:grpSpPr/>
+      <p:sp>
+        <p:nvSpPr>
+          <p:cNvPr id="2" name="TextBox 1"/>
+          <p:cNvSpPr txBox="1"/>
+          <p:nvPr/>
+        </p:nvSpPr>
+        <p:spPr>
+          <a:xfrm>
+            <a:off x="777240" y="365760"/>
+            <a:ext cx="10607040" cy="640080"/>
+          </a:xfrm>
+          <a:prstGeom prst="rect">
+            <a:avLst/>
+          </a:prstGeom>
+          <a:noFill/>
+        </p:spPr>
+        <p:txBody>
+          <a:bodyPr wrap="square" lIns="45720" rIns="45720" tIns="18288" bIns="18288" anchor="t">
+            <a:spAutoFit/>
+          </a:bodyPr>
+          <a:lstStyle/>
+          <a:p>
+            <a:pPr algn="l"/>
+            <a:r>
+              <a:rPr sz="3420" b="1" i="0">
+                <a:solidFill>
+                  <a:srgbClr val="1A1A1A"/>
+                </a:solidFill>
+                <a:latin typeface="Lexend"/>
+              </a:rPr>
+              <a:t>IXL</a:t>
+            </a:r>
+          </a:p>
+        </p:txBody>
+      </p:sp>
+      <p:cxnSp>
+        <p:nvCxnSpPr>
+          <p:cNvPr id="3" name="Connector 2"/>
+          <p:cNvCxnSpPr/>
+          <p:nvPr/>
+        </p:nvCxnSpPr>
+        <p:spPr>
+          <a:xfrm>
+            <a:off x="777240" y="1097280"/>
+            <a:ext cx="10607040" cy="0"/>
+          </a:xfrm>
+          <a:prstGeom prst="line">
+            <a:avLst/>
+          </a:prstGeom>
+          <a:ln w="19050">
+            <a:solidFill>
+              <a:srgbClr val="1A1A1A"/>
+            </a:solidFill>
+          </a:ln>
+        </p:spPr>
+        <p:style>
+          <a:lnRef idx="2">
+            <a:schemeClr val="accent1"/>
+          </a:lnRef>
+          <a:fillRef idx="0">
+            <a:schemeClr val="accent1"/>
+          </a:fillRef>
+          <a:effectRef idx="1">
+            <a:schemeClr val="accent1"/>
+          </a:effectRef>
+          <a:fontRef idx="minor">
+            <a:schemeClr val="tx1"/>
+          </a:fontRef>
+        </p:style>
+      </p:cxnSp>
+      <p:cxnSp>
+        <p:nvCxnSpPr>
+          <p:cNvPr id="4" name="Connector 3"/>
+          <p:cNvCxnSpPr/>
+          <p:nvPr/>
+        </p:nvCxnSpPr>
+        <p:spPr>
+          <a:xfrm>
+            <a:off x="777240" y="1179576"/>
+            <a:ext cx="10607040" cy="0"/>
+          </a:xfrm>
+          <a:prstGeom prst="line">
+            <a:avLst/>
+          </a:prstGeom>
+          <a:ln w="9525">
+            <a:solidFill>
+              <a:srgbClr val="1A1A1A"/>
+            </a:solidFill>
+          </a:ln>
+        </p:spPr>
+        <p:style>
+          <a:lnRef idx="2">
+            <a:schemeClr val="accent1"/>
+          </a:lnRef>
+          <a:fillRef idx="0">
+            <a:schemeClr val="accent1"/>
+          </a:fillRef>
+          <a:effectRef idx="1">
+            <a:schemeClr val="accent1"/>
+          </a:effectRef>
+          <a:fontRef idx="minor">
+            <a:schemeClr val="tx1"/>
+          </a:fontRef>
+        </p:style>
+      </p:cxnSp>
+      <p:cxnSp>
+        <p:nvCxnSpPr>
+          <p:cNvPr id="5" name="Connector 4"/>
+          <p:cNvCxnSpPr/>
+          <p:nvPr/>
+        </p:nvCxnSpPr>
+        <p:spPr>
+          <a:xfrm>
+            <a:off x="777240" y="6199632"/>
+            <a:ext cx="10607040" cy="0"/>
+          </a:xfrm>
+          <a:prstGeom prst="line">
+            <a:avLst/>
+          </a:prstGeom>
+          <a:ln w="9525">
+            <a:solidFill>
+              <a:srgbClr val="6B6B6B"/>
+            </a:solidFill>
+          </a:ln>
+        </p:spPr>
+        <p:style>
+          <a:lnRef idx="2">
+            <a:schemeClr val="accent1"/>
+          </a:lnRef>
+          <a:fillRef idx="0">
+            <a:schemeClr val="accent1"/>
+          </a:fillRef>
+          <a:effectRef idx="1">
+            <a:schemeClr val="accent1"/>
+          </a:effectRef>
+          <a:fontRef idx="minor">
+            <a:schemeClr val="tx1"/>
+          </a:fontRef>
+        </p:style>
+      </p:cxnSp>
+      <p:sp>
+        <p:nvSpPr>
+          <p:cNvPr id="6" name="TextBox 5"/>
+          <p:cNvSpPr txBox="1"/>
+          <p:nvPr/>
+        </p:nvSpPr>
+        <p:spPr>
+          <a:xfrm>
+            <a:off x="777240" y="6272784"/>
+            <a:ext cx="9692640" cy="274320"/>
+          </a:xfrm>
+          <a:prstGeom prst="rect">
+            <a:avLst/>
+          </a:prstGeom>
+          <a:noFill/>
+        </p:spPr>
+        <p:txBody>
+          <a:bodyPr wrap="square" lIns="45720" rIns="45720" tIns="18288" bIns="18288" anchor="t">
+            <a:spAutoFit/>
+          </a:bodyPr>
+          <a:lstStyle/>
+          <a:p>
+            <a:pPr algn="l"/>
+            <a:r>
+              <a:rPr sz="1040" b="0" i="0">
+                <a:solidFill>
+                  <a:srgbClr val="6B6B6B"/>
+                </a:solidFill>
+                <a:latin typeface="Lexend"/>
+              </a:rPr>
+              <a:t>Grade 7 Accelerated · Unit 4 · Lessons 2–3 — Multiplying and Dividing in Scientific Notation</a:t>
+            </a:r>
+          </a:p>
+        </p:txBody>
+      </p:sp>
+      <p:sp>
+        <p:nvSpPr>
+          <p:cNvPr id="7" name="TextBox 6"/>
+          <p:cNvSpPr txBox="1"/>
+          <p:nvPr/>
+        </p:nvSpPr>
+        <p:spPr>
+          <a:xfrm>
+            <a:off x="10744200" y="6272784"/>
+            <a:ext cx="640080" cy="274320"/>
+          </a:xfrm>
+          <a:prstGeom prst="rect">
+            <a:avLst/>
+          </a:prstGeom>
+          <a:noFill/>
+        </p:spPr>
+        <p:txBody>
+          <a:bodyPr wrap="square" lIns="45720" rIns="45720" tIns="18288" bIns="18288" anchor="t">
+            <a:spAutoFit/>
+          </a:bodyPr>
+          <a:lstStyle/>
+          <a:p>
+            <a:pPr algn="r"/>
+            <a:r>
+              <a:rPr sz="1040" b="0" i="0">
+                <a:solidFill>
+                  <a:srgbClr val="6B6B6B"/>
+                </a:solidFill>
+                <a:latin typeface="Lexend"/>
+              </a:rPr>
+              <a:t>35</a:t>
             </a:r>
           </a:p>
         </p:txBody>
@@ -15848,7 +16136,7 @@
                 </a:solidFill>
                 <a:latin typeface="Lexend"/>
               </a:rPr>
-              <a:t>Notes</a:t>
+              <a:t>Vocabulary</a:t>
             </a:r>
           </a:p>
         </p:txBody>
@@ -16036,8 +16324,8 @@
         </p:nvSpPr>
         <p:spPr>
           <a:xfrm>
-            <a:off x="777240" y="1389888"/>
-            <a:ext cx="10607040" cy="402336"/>
+            <a:off x="777240" y="1463040"/>
+            <a:ext cx="10607040" cy="429370"/>
           </a:xfrm>
           <a:prstGeom prst="rect">
             <a:avLst/>
@@ -16052,55 +16340,20 @@
           <a:p>
             <a:pPr algn="l"/>
             <a:r>
-              <a:rPr sz="2380" b="1" i="0">
-                <a:solidFill>
-                  <a:srgbClr val="1A1A1A"/>
-                </a:solidFill>
-                <a:latin typeface="Lexend"/>
-              </a:rPr>
-              <a:t>I.  Multiplying: regroup, then use the laws</a:t>
-            </a:r>
-          </a:p>
-        </p:txBody>
-      </p:sp>
-      <p:cxnSp>
-        <p:nvCxnSpPr>
-          <p:cNvPr id="9" name="Connector 8"/>
-          <p:cNvCxnSpPr/>
-          <p:nvPr/>
-        </p:nvCxnSpPr>
-        <p:spPr>
-          <a:xfrm>
-            <a:off x="777240" y="1828800"/>
-            <a:ext cx="10607040" cy="0"/>
-          </a:xfrm>
-          <a:prstGeom prst="line">
-            <a:avLst/>
-          </a:prstGeom>
-          <a:ln w="9525">
-            <a:solidFill>
-              <a:srgbClr val="1A1A1A"/>
-            </a:solidFill>
-          </a:ln>
-        </p:spPr>
-        <p:style>
-          <a:lnRef idx="2">
-            <a:schemeClr val="accent1"/>
-          </a:lnRef>
-          <a:fillRef idx="0">
-            <a:schemeClr val="accent1"/>
-          </a:fillRef>
-          <a:effectRef idx="1">
-            <a:schemeClr val="accent1"/>
-          </a:effectRef>
-          <a:fontRef idx="minor">
-            <a:schemeClr val="tx1"/>
-          </a:fontRef>
-        </p:style>
-      </p:cxnSp>
+              <a:rPr sz="2280" b="1" i="0">
+                <a:solidFill>
+                  <a:srgbClr val="0B5394"/>
+                </a:solidFill>
+                <a:latin typeface="Lexend"/>
+              </a:rPr>
+              <a:t>product of powers law</a:t>
+            </a:r>
+          </a:p>
+        </p:txBody>
+      </p:sp>
       <p:pic>
         <p:nvPicPr>
-          <p:cNvPr id="10" name="Picture 9" descr="24f6cc700f63110a.png"/>
+          <p:cNvPr id="9" name="Picture 8" descr="50a410785dbdd900.png"/>
           <p:cNvPicPr>
             <a:picLocks noChangeAspect="1"/>
           </p:cNvPicPr>
@@ -16114,17 +16367,122 @@
         </p:blipFill>
         <p:spPr>
           <a:xfrm>
-            <a:off x="2420112" y="1993392"/>
-            <a:ext cx="7321295" cy="414528"/>
+            <a:off x="1143000" y="1953370"/>
+            <a:ext cx="2935224" cy="289560"/>
           </a:xfrm>
           <a:prstGeom prst="rect">
             <a:avLst/>
           </a:prstGeom>
         </p:spPr>
       </p:pic>
+      <p:sp>
+        <p:nvSpPr>
+          <p:cNvPr id="10" name="TextBox 9"/>
+          <p:cNvSpPr txBox="1"/>
+          <p:nvPr/>
+        </p:nvSpPr>
+        <p:spPr>
+          <a:xfrm>
+            <a:off x="4078224" y="1869550"/>
+            <a:ext cx="3007634" cy="457200"/>
+          </a:xfrm>
+          <a:prstGeom prst="rect">
+            <a:avLst/>
+          </a:prstGeom>
+          <a:noFill/>
+        </p:spPr>
+        <p:txBody>
+          <a:bodyPr wrap="none" lIns="45720" rIns="45720" tIns="18288" bIns="18288" anchor="ctr">
+            <a:noAutofit/>
+          </a:bodyPr>
+          <a:lstStyle/>
+          <a:p>
+            <a:pPr algn="l"/>
+            <a:r>
+              <a:rPr sz="2090" b="0" i="0">
+                <a:solidFill>
+                  <a:srgbClr val="1A1A1A"/>
+                </a:solidFill>
+                <a:latin typeface="Lexend"/>
+              </a:rPr>
+              <a:t> — the law from 3.01,</a:t>
+            </a:r>
+          </a:p>
+        </p:txBody>
+      </p:sp>
+      <p:sp>
+        <p:nvSpPr>
+          <p:cNvPr id="11" name="TextBox 10"/>
+          <p:cNvSpPr txBox="1"/>
+          <p:nvPr/>
+        </p:nvSpPr>
+        <p:spPr>
+          <a:xfrm>
+            <a:off x="1143000" y="2354182"/>
+            <a:ext cx="5764191" cy="457200"/>
+          </a:xfrm>
+          <a:prstGeom prst="rect">
+            <a:avLst/>
+          </a:prstGeom>
+          <a:noFill/>
+        </p:spPr>
+        <p:txBody>
+          <a:bodyPr wrap="none" lIns="45720" rIns="45720" tIns="18288" bIns="18288" anchor="ctr">
+            <a:noAutofit/>
+          </a:bodyPr>
+          <a:lstStyle/>
+          <a:p>
+            <a:pPr algn="l"/>
+            <a:r>
+              <a:rPr sz="2090" b="0" i="0">
+                <a:solidFill>
+                  <a:srgbClr val="1A1A1A"/>
+                </a:solidFill>
+                <a:latin typeface="Lexend"/>
+              </a:rPr>
+              <a:t>now doing the work on the powers of ten</a:t>
+            </a:r>
+          </a:p>
+        </p:txBody>
+      </p:sp>
+      <p:sp>
+        <p:nvSpPr>
+          <p:cNvPr id="12" name="TextBox 11"/>
+          <p:cNvSpPr txBox="1"/>
+          <p:nvPr/>
+        </p:nvSpPr>
+        <p:spPr>
+          <a:xfrm>
+            <a:off x="777240" y="2989690"/>
+            <a:ext cx="10607040" cy="429370"/>
+          </a:xfrm>
+          <a:prstGeom prst="rect">
+            <a:avLst/>
+          </a:prstGeom>
+          <a:noFill/>
+        </p:spPr>
+        <p:txBody>
+          <a:bodyPr wrap="square" lIns="45720" rIns="45720" tIns="18288" bIns="18288" anchor="t">
+            <a:spAutoFit/>
+          </a:bodyPr>
+          <a:lstStyle/>
+          <a:p>
+            <a:pPr algn="l"/>
+            <a:r>
+              <a:rPr sz="2280" b="1" i="0">
+                <a:solidFill>
+                  <a:srgbClr val="0B5394"/>
+                </a:solidFill>
+                <a:latin typeface="Lexend"/>
+              </a:rPr>
+              <a:t>quotient of powers law</a:t>
+            </a:r>
+          </a:p>
+        </p:txBody>
+      </p:sp>
       <p:pic>
         <p:nvPicPr>
-          <p:cNvPr id="11" name="Picture 10" descr="d894b08558ca6ca2.png"/>
+          <p:cNvPr id="13" name="Picture 12" descr="5b8488cf2680dc25.png"/>
           <p:cNvPicPr>
             <a:picLocks noChangeAspect="1"/>
           </p:cNvPicPr>
@@ -16138,8 +16496,8 @@
         </p:blipFill>
         <p:spPr>
           <a:xfrm>
-            <a:off x="3994387" y="2717292"/>
-            <a:ext cx="1100328" cy="341376"/>
+            <a:off x="1143000" y="3419060"/>
+            <a:ext cx="2176272" cy="701040"/>
           </a:xfrm>
           <a:prstGeom prst="rect">
             <a:avLst/>
@@ -16148,14 +16506,14 @@
       </p:pic>
       <p:sp>
         <p:nvSpPr>
-          <p:cNvPr id="12" name="TextBox 11"/>
-          <p:cNvSpPr txBox="1"/>
-          <p:nvPr/>
-        </p:nvSpPr>
-        <p:spPr>
-          <a:xfrm>
-            <a:off x="5094715" y="2659380"/>
-            <a:ext cx="1947704" cy="457200"/>
+          <p:cNvPr id="14" name="TextBox 13"/>
+          <p:cNvSpPr txBox="1"/>
+          <p:nvPr/>
+        </p:nvSpPr>
+        <p:spPr>
+          <a:xfrm>
+            <a:off x="3319272" y="3540980"/>
+            <a:ext cx="4454428" cy="457200"/>
           </a:xfrm>
           <a:prstGeom prst="rect">
             <a:avLst/>
@@ -16170,20 +16528,90 @@
           <a:p>
             <a:pPr algn="l"/>
             <a:r>
-              <a:rPr sz="2470" b="0" i="0">
+              <a:rPr sz="2090" b="0" i="0">
                 <a:solidFill>
                   <a:srgbClr val="1A1A1A"/>
                 </a:solidFill>
                 <a:latin typeface="Lexend"/>
               </a:rPr>
-              <a:t>,    never    </a:t>
+              <a:t> — top minus bottom, from 3.02</a:t>
+            </a:r>
+          </a:p>
+        </p:txBody>
+      </p:sp>
+      <p:sp>
+        <p:nvSpPr>
+          <p:cNvPr id="15" name="TextBox 14"/>
+          <p:cNvSpPr txBox="1"/>
+          <p:nvPr/>
+        </p:nvSpPr>
+        <p:spPr>
+          <a:xfrm>
+            <a:off x="777240" y="4321268"/>
+            <a:ext cx="10607040" cy="429370"/>
+          </a:xfrm>
+          <a:prstGeom prst="rect">
+            <a:avLst/>
+          </a:prstGeom>
+          <a:noFill/>
+        </p:spPr>
+        <p:txBody>
+          <a:bodyPr wrap="square" lIns="45720" rIns="45720" tIns="18288" bIns="18288" anchor="t">
+            <a:spAutoFit/>
+          </a:bodyPr>
+          <a:lstStyle/>
+          <a:p>
+            <a:pPr algn="l"/>
+            <a:r>
+              <a:rPr sz="2280" b="1" i="0">
+                <a:solidFill>
+                  <a:srgbClr val="0B5394"/>
+                </a:solidFill>
+                <a:latin typeface="Lexend"/>
+              </a:rPr>
+              <a:t>regrouping a product</a:t>
+            </a:r>
+          </a:p>
+        </p:txBody>
+      </p:sp>
+      <p:sp>
+        <p:nvSpPr>
+          <p:cNvPr id="16" name="TextBox 15"/>
+          <p:cNvSpPr txBox="1"/>
+          <p:nvPr/>
+        </p:nvSpPr>
+        <p:spPr>
+          <a:xfrm>
+            <a:off x="1143000" y="4727779"/>
+            <a:ext cx="8173000" cy="457200"/>
+          </a:xfrm>
+          <a:prstGeom prst="rect">
+            <a:avLst/>
+          </a:prstGeom>
+          <a:noFill/>
+        </p:spPr>
+        <p:txBody>
+          <a:bodyPr wrap="none" lIns="45720" rIns="45720" tIns="18288" bIns="18288" anchor="ctr">
+            <a:noAutofit/>
+          </a:bodyPr>
+          <a:lstStyle/>
+          <a:p>
+            <a:pPr algn="l"/>
+            <a:r>
+              <a:rPr sz="2090" b="0" i="0">
+                <a:solidFill>
+                  <a:srgbClr val="1A1A1A"/>
+                </a:solidFill>
+                <a:latin typeface="Lexend"/>
+              </a:rPr>
+              <a:t>using the commutative and associative properties to write</a:t>
             </a:r>
           </a:p>
         </p:txBody>
       </p:sp>
       <p:pic>
         <p:nvPicPr>
-          <p:cNvPr id="13" name="Picture 12" descr="f59bf4b41a85edbd.png"/>
+          <p:cNvPr id="17" name="Picture 16" descr="030f336ef028bc09.png"/>
           <p:cNvPicPr>
             <a:picLocks noChangeAspect="1"/>
           </p:cNvPicPr>
@@ -16197,8 +16625,8 @@
         </p:blipFill>
         <p:spPr>
           <a:xfrm>
-            <a:off x="6905260" y="2717292"/>
-            <a:ext cx="1261872" cy="341376"/>
+            <a:off x="1143000" y="5238319"/>
+            <a:ext cx="2810256" cy="405384"/>
           </a:xfrm>
           <a:prstGeom prst="rect">
             <a:avLst/>
@@ -16207,39 +16635,63 @@
       </p:pic>
       <p:sp>
         <p:nvSpPr>
-          <p:cNvPr id="14" name="TextBox 13"/>
-          <p:cNvSpPr txBox="1"/>
-          <p:nvPr/>
-        </p:nvSpPr>
-        <p:spPr>
-          <a:xfrm>
-            <a:off x="987552" y="3432047"/>
-            <a:ext cx="10131551" cy="950976"/>
-          </a:xfrm>
-          <a:prstGeom prst="rect">
-            <a:avLst/>
-          </a:prstGeom>
-          <a:noFill/>
-        </p:spPr>
-        <p:txBody>
-          <a:bodyPr wrap="square" lIns="45720" rIns="45720" tIns="18288" bIns="18288" anchor="t">
-            <a:spAutoFit/>
+          <p:cNvPr id="18" name="TextBox 17"/>
+          <p:cNvSpPr txBox="1"/>
+          <p:nvPr/>
+        </p:nvSpPr>
+        <p:spPr>
+          <a:xfrm>
+            <a:off x="3953256" y="5212411"/>
+            <a:ext cx="680753" cy="457200"/>
+          </a:xfrm>
+          <a:prstGeom prst="rect">
+            <a:avLst/>
+          </a:prstGeom>
+          <a:noFill/>
+        </p:spPr>
+        <p:txBody>
+          <a:bodyPr wrap="none" lIns="45720" rIns="45720" tIns="18288" bIns="18288" anchor="ctr">
+            <a:noAutofit/>
           </a:bodyPr>
           <a:lstStyle/>
           <a:p>
             <a:pPr algn="l"/>
             <a:r>
-              <a:rPr sz="2180" b="1" i="0">
+              <a:rPr sz="2090" b="0" i="0">
                 <a:solidFill>
                   <a:srgbClr val="1A1A1A"/>
                 </a:solidFill>
                 <a:latin typeface="Lexend"/>
               </a:rPr>
-              <a:t>Multiply the coefficients. Add the exponents — that is the product of powers law, not a new rule.</a:t>
-            </a:r>
-          </a:p>
-        </p:txBody>
-      </p:sp>
+              <a:t> as </a:t>
+            </a:r>
+          </a:p>
+        </p:txBody>
+      </p:sp>
+      <p:pic>
+        <p:nvPicPr>
+          <p:cNvPr id="19" name="Picture 18" descr="b19aa5f8730d723a.png"/>
+          <p:cNvPicPr>
+            <a:picLocks noChangeAspect="1"/>
+          </p:cNvPicPr>
+          <p:nvPr/>
+        </p:nvPicPr>
+        <p:blipFill>
+          <a:blip r:embed="rId5"/>
+          <a:stretch>
+            <a:fillRect/>
+          </a:stretch>
+        </p:blipFill>
+        <p:spPr>
+          <a:xfrm>
+            <a:off x="4496849" y="5238319"/>
+            <a:ext cx="2627376" cy="405384"/>
+          </a:xfrm>
+          <a:prstGeom prst="rect">
+            <a:avLst/>
+          </a:prstGeom>
+        </p:spPr>
+      </p:pic>
     </p:spTree>
   </p:cSld>
   <p:clrMapOvr>
@@ -16498,7 +16950,7 @@
                 </a:solidFill>
                 <a:latin typeface="Lexend"/>
               </a:rPr>
-              <a:t>II.  Dividing: the same move with the quotient law</a:t>
+              <a:t>I.  Multiplying: regroup, then use the laws</a:t>
             </a:r>
           </a:p>
         </p:txBody>
@@ -16540,7 +16992,7 @@
       </p:cxnSp>
       <p:pic>
         <p:nvPicPr>
-          <p:cNvPr id="10" name="Picture 9" descr="5efa08aa797f4490.png"/>
+          <p:cNvPr id="10" name="Picture 9" descr="24f6cc700f63110a.png"/>
           <p:cNvPicPr>
             <a:picLocks noChangeAspect="1"/>
           </p:cNvPicPr>
@@ -16554,8 +17006,8 @@
         </p:blipFill>
         <p:spPr>
           <a:xfrm>
-            <a:off x="3421380" y="1993392"/>
-            <a:ext cx="5318760" cy="798576"/>
+            <a:off x="2420112" y="1993392"/>
+            <a:ext cx="7321295" cy="414528"/>
           </a:xfrm>
           <a:prstGeom prst="rect">
             <a:avLst/>
@@ -16564,7 +17016,7 @@
       </p:pic>
       <p:pic>
         <p:nvPicPr>
-          <p:cNvPr id="11" name="Picture 10" descr="44f28ecf0a9cf88b.png"/>
+          <p:cNvPr id="11" name="Picture 10" descr="d894b08558ca6ca2.png"/>
           <p:cNvPicPr>
             <a:picLocks noChangeAspect="1"/>
           </p:cNvPicPr>
@@ -16578,8 +17030,8 @@
         </p:blipFill>
         <p:spPr>
           <a:xfrm>
-            <a:off x="3483864" y="3066288"/>
-            <a:ext cx="5193792" cy="795528"/>
+            <a:off x="3994387" y="2717292"/>
+            <a:ext cx="1100328" cy="341376"/>
           </a:xfrm>
           <a:prstGeom prst="rect">
             <a:avLst/>
@@ -16594,8 +17046,67 @@
         </p:nvSpPr>
         <p:spPr>
           <a:xfrm>
-            <a:off x="987552" y="4200144"/>
-            <a:ext cx="10131551" cy="475488"/>
+            <a:off x="5094715" y="2659380"/>
+            <a:ext cx="1947704" cy="457200"/>
+          </a:xfrm>
+          <a:prstGeom prst="rect">
+            <a:avLst/>
+          </a:prstGeom>
+          <a:noFill/>
+        </p:spPr>
+        <p:txBody>
+          <a:bodyPr wrap="none" lIns="45720" rIns="45720" tIns="18288" bIns="18288" anchor="ctr">
+            <a:noAutofit/>
+          </a:bodyPr>
+          <a:lstStyle/>
+          <a:p>
+            <a:pPr algn="l"/>
+            <a:r>
+              <a:rPr sz="2470" b="0" i="0">
+                <a:solidFill>
+                  <a:srgbClr val="1A1A1A"/>
+                </a:solidFill>
+                <a:latin typeface="Lexend"/>
+              </a:rPr>
+              <a:t>,    never    </a:t>
+            </a:r>
+          </a:p>
+        </p:txBody>
+      </p:sp>
+      <p:pic>
+        <p:nvPicPr>
+          <p:cNvPr id="13" name="Picture 12" descr="f59bf4b41a85edbd.png"/>
+          <p:cNvPicPr>
+            <a:picLocks noChangeAspect="1"/>
+          </p:cNvPicPr>
+          <p:nvPr/>
+        </p:nvPicPr>
+        <p:blipFill>
+          <a:blip r:embed="rId4"/>
+          <a:stretch>
+            <a:fillRect/>
+          </a:stretch>
+        </p:blipFill>
+        <p:spPr>
+          <a:xfrm>
+            <a:off x="6905260" y="2717292"/>
+            <a:ext cx="1261872" cy="341376"/>
+          </a:xfrm>
+          <a:prstGeom prst="rect">
+            <a:avLst/>
+          </a:prstGeom>
+        </p:spPr>
+      </p:pic>
+      <p:sp>
+        <p:nvSpPr>
+          <p:cNvPr id="14" name="TextBox 13"/>
+          <p:cNvSpPr txBox="1"/>
+          <p:nvPr/>
+        </p:nvSpPr>
+        <p:spPr>
+          <a:xfrm>
+            <a:off x="987552" y="3432047"/>
+            <a:ext cx="10131551" cy="950976"/>
           </a:xfrm>
           <a:prstGeom prst="rect">
             <a:avLst/>
@@ -16616,7 +17127,7 @@
                 </a:solidFill>
                 <a:latin typeface="Lexend"/>
               </a:rPr>
-              <a:t>Divide the coefficients. Subtract the exponents, top minus bottom.</a:t>
+              <a:t>Multiply the coefficients. Add the exponents — that is the product of powers law, not a new rule.</a:t>
             </a:r>
           </a:p>
         </p:txBody>
@@ -16879,7 +17390,7 @@
                 </a:solidFill>
                 <a:latin typeface="Lexend"/>
               </a:rPr>
-              <a:t>III.  Finish the answer — both directions</a:t>
+              <a:t>II.  Dividing: the same move with the quotient law</a:t>
             </a:r>
           </a:p>
         </p:txBody>
@@ -16921,7 +17432,7 @@
       </p:cxnSp>
       <p:pic>
         <p:nvPicPr>
-          <p:cNvPr id="10" name="Picture 9" descr="040551c03da2cd15.png"/>
+          <p:cNvPr id="10" name="Picture 9" descr="5efa08aa797f4490.png"/>
           <p:cNvPicPr>
             <a:picLocks noChangeAspect="1"/>
           </p:cNvPicPr>
@@ -16935,8 +17446,8 @@
         </p:blipFill>
         <p:spPr>
           <a:xfrm>
-            <a:off x="2906268" y="1993392"/>
-            <a:ext cx="6348984" cy="414528"/>
+            <a:off x="3421380" y="1993392"/>
+            <a:ext cx="5318760" cy="798576"/>
           </a:xfrm>
           <a:prstGeom prst="rect">
             <a:avLst/>
@@ -16945,7 +17456,7 @@
       </p:pic>
       <p:pic>
         <p:nvPicPr>
-          <p:cNvPr id="11" name="Picture 10" descr="acee3a8d1b672089.png"/>
+          <p:cNvPr id="11" name="Picture 10" descr="44f28ecf0a9cf88b.png"/>
           <p:cNvPicPr>
             <a:picLocks noChangeAspect="1"/>
           </p:cNvPicPr>
@@ -16959,8 +17470,8 @@
         </p:blipFill>
         <p:spPr>
           <a:xfrm>
-            <a:off x="3116580" y="2682240"/>
-            <a:ext cx="5928360" cy="801624"/>
+            <a:off x="3483864" y="3066288"/>
+            <a:ext cx="5193792" cy="795528"/>
           </a:xfrm>
           <a:prstGeom prst="rect">
             <a:avLst/>
@@ -16975,7 +17486,7 @@
         </p:nvSpPr>
         <p:spPr>
           <a:xfrm>
-            <a:off x="987552" y="3822191"/>
+            <a:off x="987552" y="4200144"/>
             <a:ext cx="10131551" cy="475488"/>
           </a:xfrm>
           <a:prstGeom prst="rect">
@@ -16997,7 +17508,7 @@
                 </a:solidFill>
                 <a:latin typeface="Lexend"/>
               </a:rPr>
-              <a:t>Every answer ends with a coefficient at least 1 and less than 10.</a:t>
+              <a:t>Divide the coefficients. Subtract the exponents, top minus bottom.</a:t>
             </a:r>
           </a:p>
         </p:txBody>
@@ -17050,7 +17561,7 @@
                 </a:solidFill>
                 <a:latin typeface="Lexend"/>
               </a:rPr>
-              <a:t>Example 1</a:t>
+              <a:t>Notes</a:t>
             </a:r>
           </a:p>
         </p:txBody>
@@ -17230,9 +17741,79 @@
           </a:p>
         </p:txBody>
       </p:sp>
+      <p:sp>
+        <p:nvSpPr>
+          <p:cNvPr id="8" name="TextBox 7"/>
+          <p:cNvSpPr txBox="1"/>
+          <p:nvPr/>
+        </p:nvSpPr>
+        <p:spPr>
+          <a:xfrm>
+            <a:off x="777240" y="1389888"/>
+            <a:ext cx="10607040" cy="402336"/>
+          </a:xfrm>
+          <a:prstGeom prst="rect">
+            <a:avLst/>
+          </a:prstGeom>
+          <a:noFill/>
+        </p:spPr>
+        <p:txBody>
+          <a:bodyPr wrap="square" lIns="45720" rIns="45720" tIns="18288" bIns="18288" anchor="t">
+            <a:spAutoFit/>
+          </a:bodyPr>
+          <a:lstStyle/>
+          <a:p>
+            <a:pPr algn="l"/>
+            <a:r>
+              <a:rPr sz="2380" b="1" i="0">
+                <a:solidFill>
+                  <a:srgbClr val="1A1A1A"/>
+                </a:solidFill>
+                <a:latin typeface="Lexend"/>
+              </a:rPr>
+              <a:t>III.  Finish the answer — both directions</a:t>
+            </a:r>
+          </a:p>
+        </p:txBody>
+      </p:sp>
+      <p:cxnSp>
+        <p:nvCxnSpPr>
+          <p:cNvPr id="9" name="Connector 8"/>
+          <p:cNvCxnSpPr/>
+          <p:nvPr/>
+        </p:nvCxnSpPr>
+        <p:spPr>
+          <a:xfrm>
+            <a:off x="777240" y="1828800"/>
+            <a:ext cx="10607040" cy="0"/>
+          </a:xfrm>
+          <a:prstGeom prst="line">
+            <a:avLst/>
+          </a:prstGeom>
+          <a:ln w="9525">
+            <a:solidFill>
+              <a:srgbClr val="1A1A1A"/>
+            </a:solidFill>
+          </a:ln>
+        </p:spPr>
+        <p:style>
+          <a:lnRef idx="2">
+            <a:schemeClr val="accent1"/>
+          </a:lnRef>
+          <a:fillRef idx="0">
+            <a:schemeClr val="accent1"/>
+          </a:fillRef>
+          <a:effectRef idx="1">
+            <a:schemeClr val="accent1"/>
+          </a:effectRef>
+          <a:fontRef idx="minor">
+            <a:schemeClr val="tx1"/>
+          </a:fontRef>
+        </p:style>
+      </p:cxnSp>
       <p:pic>
         <p:nvPicPr>
-          <p:cNvPr id="8" name="Picture 7" descr="c7ebac9815df250f.png"/>
+          <p:cNvPr id="10" name="Picture 9" descr="040551c03da2cd15.png"/>
           <p:cNvPicPr>
             <a:picLocks noChangeAspect="1"/>
           </p:cNvPicPr>
@@ -17246,24 +17827,48 @@
         </p:blipFill>
         <p:spPr>
           <a:xfrm>
-            <a:off x="4439412" y="2104643"/>
-            <a:ext cx="3282696" cy="408432"/>
+            <a:off x="2906268" y="1993392"/>
+            <a:ext cx="6348984" cy="414528"/>
           </a:xfrm>
           <a:prstGeom prst="rect">
             <a:avLst/>
           </a:prstGeom>
         </p:spPr>
       </p:pic>
-      <p:sp>
-        <p:nvSpPr>
-          <p:cNvPr id="9" name="TextBox 8"/>
-          <p:cNvSpPr txBox="1"/>
-          <p:nvPr/>
-        </p:nvSpPr>
-        <p:spPr>
-          <a:xfrm>
-            <a:off x="777240" y="3017520"/>
-            <a:ext cx="10607040" cy="429370"/>
+      <p:pic>
+        <p:nvPicPr>
+          <p:cNvPr id="11" name="Picture 10" descr="acee3a8d1b672089.png"/>
+          <p:cNvPicPr>
+            <a:picLocks noChangeAspect="1"/>
+          </p:cNvPicPr>
+          <p:nvPr/>
+        </p:nvPicPr>
+        <p:blipFill>
+          <a:blip r:embed="rId3"/>
+          <a:stretch>
+            <a:fillRect/>
+          </a:stretch>
+        </p:blipFill>
+        <p:spPr>
+          <a:xfrm>
+            <a:off x="3116580" y="2682240"/>
+            <a:ext cx="5928360" cy="801624"/>
+          </a:xfrm>
+          <a:prstGeom prst="rect">
+            <a:avLst/>
+          </a:prstGeom>
+        </p:spPr>
+      </p:pic>
+      <p:sp>
+        <p:nvSpPr>
+          <p:cNvPr id="12" name="TextBox 11"/>
+          <p:cNvSpPr txBox="1"/>
+          <p:nvPr/>
+        </p:nvSpPr>
+        <p:spPr>
+          <a:xfrm>
+            <a:off x="987552" y="3822191"/>
+            <a:ext cx="10131551" cy="475488"/>
           </a:xfrm>
           <a:prstGeom prst="rect">
             <a:avLst/>
@@ -17276,15 +17881,15 @@
           </a:bodyPr>
           <a:lstStyle/>
           <a:p>
-            <a:pPr algn="ctr"/>
-            <a:r>
-              <a:rPr sz="2280" b="1" i="0">
+            <a:pPr algn="l"/>
+            <a:r>
+              <a:rPr sz="2180" b="1" i="0">
                 <a:solidFill>
                   <a:srgbClr val="1A1A1A"/>
                 </a:solidFill>
                 <a:latin typeface="Lexend"/>
               </a:rPr>
-              <a:t>Multiply. Write the answer in scientific notation.</a:t>
+              <a:t>Every answer ends with a coefficient at least 1 and less than 10.</a:t>
             </a:r>
           </a:p>
         </p:txBody>
@@ -17519,7 +18124,7 @@
       </p:sp>
       <p:pic>
         <p:nvPicPr>
-          <p:cNvPr id="8" name="Picture 7" descr="25f7ed4f25353ce0.png"/>
+          <p:cNvPr id="8" name="Picture 7" descr="c7ebac9815df250f.png"/>
           <p:cNvPicPr>
             <a:picLocks noChangeAspect="1"/>
           </p:cNvPicPr>
@@ -17533,72 +18138,24 @@
         </p:blipFill>
         <p:spPr>
           <a:xfrm>
-            <a:off x="1828800" y="1920240"/>
-            <a:ext cx="6772656" cy="408432"/>
+            <a:off x="4439412" y="2104643"/>
+            <a:ext cx="3282696" cy="408432"/>
           </a:xfrm>
           <a:prstGeom prst="rect">
             <a:avLst/>
           </a:prstGeom>
         </p:spPr>
       </p:pic>
-      <p:pic>
-        <p:nvPicPr>
-          <p:cNvPr id="9" name="Picture 8" descr="54ffb222fc56be80.png"/>
-          <p:cNvPicPr>
-            <a:picLocks noChangeAspect="1"/>
-          </p:cNvPicPr>
-          <p:nvPr/>
-        </p:nvPicPr>
-        <p:blipFill>
-          <a:blip r:embed="rId3"/>
-          <a:stretch>
-            <a:fillRect/>
-          </a:stretch>
-        </p:blipFill>
-        <p:spPr>
-          <a:xfrm>
-            <a:off x="1828800" y="2602992"/>
-            <a:ext cx="1609344" cy="338328"/>
-          </a:xfrm>
-          <a:prstGeom prst="rect">
-            <a:avLst/>
-          </a:prstGeom>
-        </p:spPr>
-      </p:pic>
-      <p:pic>
-        <p:nvPicPr>
-          <p:cNvPr id="10" name="Picture 9" descr="bb053a1b63579351.png"/>
-          <p:cNvPicPr>
-            <a:picLocks noChangeAspect="1"/>
-          </p:cNvPicPr>
-          <p:nvPr/>
-        </p:nvPicPr>
-        <p:blipFill>
-          <a:blip r:embed="rId4"/>
-          <a:stretch>
-            <a:fillRect/>
-          </a:stretch>
-        </p:blipFill>
-        <p:spPr>
-          <a:xfrm>
-            <a:off x="1828800" y="3215640"/>
-            <a:ext cx="3108960" cy="338328"/>
-          </a:xfrm>
-          <a:prstGeom prst="rect">
-            <a:avLst/>
-          </a:prstGeom>
-        </p:spPr>
-      </p:pic>
-      <p:sp>
-        <p:nvSpPr>
-          <p:cNvPr id="11" name="TextBox 10"/>
-          <p:cNvSpPr txBox="1"/>
-          <p:nvPr/>
-        </p:nvSpPr>
-        <p:spPr>
-          <a:xfrm>
-            <a:off x="777240" y="4572000"/>
-            <a:ext cx="10607040" cy="548640"/>
+      <p:sp>
+        <p:nvSpPr>
+          <p:cNvPr id="9" name="TextBox 8"/>
+          <p:cNvSpPr txBox="1"/>
+          <p:nvPr/>
+        </p:nvSpPr>
+        <p:spPr>
+          <a:xfrm>
+            <a:off x="777240" y="3017520"/>
+            <a:ext cx="10607040" cy="429370"/>
           </a:xfrm>
           <a:prstGeom prst="rect">
             <a:avLst/>
@@ -17613,22 +18170,13 @@
           <a:p>
             <a:pPr algn="ctr"/>
             <a:r>
-              <a:rPr sz="3040" b="1" i="0">
-                <a:solidFill>
-                  <a:srgbClr val="9E1B32"/>
-                </a:solidFill>
-                <a:latin typeface="Lexend"/>
-              </a:rPr>
-              <a:t>Answer:   2.7 × 10</a:t>
-            </a:r>
-            <a:r>
-              <a:rPr sz="3040" b="1" i="0" baseline="30000">
-                <a:solidFill>
-                  <a:srgbClr val="9E1B32"/>
-                </a:solidFill>
-                <a:latin typeface="Lexend"/>
-              </a:rPr>
-              <a:t>5</a:t>
+              <a:rPr sz="2280" b="1" i="0">
+                <a:solidFill>
+                  <a:srgbClr val="1A1A1A"/>
+                </a:solidFill>
+                <a:latin typeface="Lexend"/>
+              </a:rPr>
+              <a:t>Multiply. Write the answer in scientific notation.</a:t>
             </a:r>
           </a:p>
         </p:txBody>
@@ -17681,7 +18229,7 @@
                 </a:solidFill>
                 <a:latin typeface="Lexend"/>
               </a:rPr>
-              <a:t>Your Turn</a:t>
+              <a:t>Example 1</a:t>
             </a:r>
           </a:p>
         </p:txBody>
@@ -17863,7 +18411,7 @@
       </p:sp>
       <p:pic>
         <p:nvPicPr>
-          <p:cNvPr id="8" name="Picture 7" descr="a28d7c387e5fd6b7.png"/>
+          <p:cNvPr id="8" name="Picture 7" descr="25f7ed4f25353ce0.png"/>
           <p:cNvPicPr>
             <a:picLocks noChangeAspect="1"/>
           </p:cNvPicPr>
@@ -17877,24 +18425,72 @@
         </p:blipFill>
         <p:spPr>
           <a:xfrm>
-            <a:off x="4034027" y="1600200"/>
-            <a:ext cx="4093464" cy="512064"/>
+            <a:off x="1828800" y="1920240"/>
+            <a:ext cx="6772656" cy="408432"/>
           </a:xfrm>
           <a:prstGeom prst="rect">
             <a:avLst/>
           </a:prstGeom>
         </p:spPr>
       </p:pic>
-      <p:sp>
-        <p:nvSpPr>
-          <p:cNvPr id="9" name="TextBox 8"/>
-          <p:cNvSpPr txBox="1"/>
-          <p:nvPr/>
-        </p:nvSpPr>
-        <p:spPr>
-          <a:xfrm>
-            <a:off x="777240" y="2615184"/>
-            <a:ext cx="10607040" cy="429370"/>
+      <p:pic>
+        <p:nvPicPr>
+          <p:cNvPr id="9" name="Picture 8" descr="54ffb222fc56be80.png"/>
+          <p:cNvPicPr>
+            <a:picLocks noChangeAspect="1"/>
+          </p:cNvPicPr>
+          <p:nvPr/>
+        </p:nvPicPr>
+        <p:blipFill>
+          <a:blip r:embed="rId3"/>
+          <a:stretch>
+            <a:fillRect/>
+          </a:stretch>
+        </p:blipFill>
+        <p:spPr>
+          <a:xfrm>
+            <a:off x="1828800" y="2602992"/>
+            <a:ext cx="1609344" cy="338328"/>
+          </a:xfrm>
+          <a:prstGeom prst="rect">
+            <a:avLst/>
+          </a:prstGeom>
+        </p:spPr>
+      </p:pic>
+      <p:pic>
+        <p:nvPicPr>
+          <p:cNvPr id="10" name="Picture 9" descr="bb053a1b63579351.png"/>
+          <p:cNvPicPr>
+            <a:picLocks noChangeAspect="1"/>
+          </p:cNvPicPr>
+          <p:nvPr/>
+        </p:nvPicPr>
+        <p:blipFill>
+          <a:blip r:embed="rId4"/>
+          <a:stretch>
+            <a:fillRect/>
+          </a:stretch>
+        </p:blipFill>
+        <p:spPr>
+          <a:xfrm>
+            <a:off x="1828800" y="3215640"/>
+            <a:ext cx="3108960" cy="338328"/>
+          </a:xfrm>
+          <a:prstGeom prst="rect">
+            <a:avLst/>
+          </a:prstGeom>
+        </p:spPr>
+      </p:pic>
+      <p:sp>
+        <p:nvSpPr>
+          <p:cNvPr id="11" name="TextBox 10"/>
+          <p:cNvSpPr txBox="1"/>
+          <p:nvPr/>
+        </p:nvSpPr>
+        <p:spPr>
+          <a:xfrm>
+            <a:off x="777240" y="4572000"/>
+            <a:ext cx="10607040" cy="548640"/>
           </a:xfrm>
           <a:prstGeom prst="rect">
             <a:avLst/>
@@ -17909,13 +18505,22 @@
           <a:p>
             <a:pPr algn="ctr"/>
             <a:r>
-              <a:rPr sz="2280" b="1" i="0">
-                <a:solidFill>
-                  <a:srgbClr val="1A1A1A"/>
-                </a:solidFill>
-                <a:latin typeface="Lexend"/>
-              </a:rPr>
-              <a:t>Multiply. Write the answer in scientific notation.</a:t>
+              <a:rPr sz="3040" b="1" i="0">
+                <a:solidFill>
+                  <a:srgbClr val="9E1B32"/>
+                </a:solidFill>
+                <a:latin typeface="Lexend"/>
+              </a:rPr>
+              <a:t>Answer:   2.7 × 10</a:t>
+            </a:r>
+            <a:r>
+              <a:rPr sz="3040" b="1" i="0" baseline="30000">
+                <a:solidFill>
+                  <a:srgbClr val="9E1B32"/>
+                </a:solidFill>
+                <a:latin typeface="Lexend"/>
+              </a:rPr>
+              <a:t>5</a:t>
             </a:r>
           </a:p>
         </p:txBody>

--- a/a7/packages/A7 Unit 4 - Solving Problems with Rational Numbers/Lessons/4.02/A7 4.02 Multiplying and Dividing in Scientific Notation - Slides.pptx
+++ b/a7/packages/A7 Unit 4 - Solving Problems with Rational Numbers/Lessons/4.02/A7 4.02 Multiplying and Dividing in Scientific Notation - Slides.pptx
@@ -4019,7 +4019,7 @@
         </p:nvSpPr>
         <p:spPr>
           <a:xfrm>
-            <a:off x="3502505" y="3204574"/>
+            <a:off x="3503291" y="3204574"/>
             <a:ext cx="3220349" cy="457200"/>
           </a:xfrm>
           <a:prstGeom prst="rect">
@@ -4048,7 +4048,7 @@
       </p:sp>
       <p:pic>
         <p:nvPicPr>
-          <p:cNvPr id="11" name="Picture 10" descr="04263b59ab134a8d.png"/>
+          <p:cNvPr id="11" name="Picture 10" descr="ea6a661eb9c799b5.png"/>
           <p:cNvPicPr>
             <a:picLocks noChangeAspect="1"/>
           </p:cNvPicPr>
@@ -4062,8 +4062,8 @@
         </p:blipFill>
         <p:spPr>
           <a:xfrm>
-            <a:off x="6585695" y="3326494"/>
-            <a:ext cx="1414272" cy="213360"/>
+            <a:off x="6586480" y="3342163"/>
+            <a:ext cx="1414176" cy="212359"/>
           </a:xfrm>
           <a:prstGeom prst="rect">
             <a:avLst/>
@@ -4078,7 +4078,7 @@
         </p:nvSpPr>
         <p:spPr>
           <a:xfrm>
-            <a:off x="3502505" y="3707494"/>
+            <a:off x="3503291" y="3707494"/>
             <a:ext cx="3315516" cy="457200"/>
           </a:xfrm>
           <a:prstGeom prst="rect">
@@ -4107,7 +4107,7 @@
       </p:sp>
       <p:pic>
         <p:nvPicPr>
-          <p:cNvPr id="13" name="Picture 12" descr="2e6e8e2b001e1a7e.png"/>
+          <p:cNvPr id="13" name="Picture 12" descr="65dec0c199cc0149.png"/>
           <p:cNvPicPr>
             <a:picLocks noChangeAspect="1"/>
           </p:cNvPicPr>
@@ -4121,8 +4121,8 @@
         </p:blipFill>
         <p:spPr>
           <a:xfrm>
-            <a:off x="6680862" y="3805030"/>
-            <a:ext cx="1981199" cy="262128"/>
+            <a:off x="6681648" y="3796076"/>
+            <a:ext cx="1976580" cy="261366"/>
           </a:xfrm>
           <a:prstGeom prst="rect">
             <a:avLst/>
@@ -4145,7 +4145,7 @@
         </p:blipFill>
         <p:spPr>
           <a:xfrm>
-            <a:off x="3557369" y="4310998"/>
+            <a:off x="3558155" y="4302711"/>
             <a:ext cx="2173224" cy="256032"/>
           </a:xfrm>
           <a:prstGeom prst="rect">
@@ -5410,7 +5410,7 @@
         </p:nvSpPr>
         <p:spPr>
           <a:xfrm>
-            <a:off x="3234773" y="3768454"/>
+            <a:off x="3235083" y="3768454"/>
             <a:ext cx="996779" cy="457200"/>
           </a:xfrm>
           <a:prstGeom prst="rect">
@@ -5439,7 +5439,7 @@
       </p:sp>
       <p:pic>
         <p:nvPicPr>
-          <p:cNvPr id="11" name="Picture 10" descr="a056522f38be1085.png"/>
+          <p:cNvPr id="11" name="Picture 10" descr="088335619175ea32.png"/>
           <p:cNvPicPr>
             <a:picLocks noChangeAspect="1"/>
           </p:cNvPicPr>
@@ -5453,8 +5453,8 @@
         </p:blipFill>
         <p:spPr>
           <a:xfrm>
-            <a:off x="4094393" y="3891898"/>
-            <a:ext cx="1203960" cy="210312"/>
+            <a:off x="4094702" y="3901375"/>
+            <a:ext cx="1201816" cy="212359"/>
           </a:xfrm>
           <a:prstGeom prst="rect">
             <a:avLst/>
@@ -5469,7 +5469,7 @@
         </p:nvSpPr>
         <p:spPr>
           <a:xfrm>
-            <a:off x="5298353" y="3768454"/>
+            <a:off x="5296519" y="3768454"/>
             <a:ext cx="1320048" cy="457200"/>
           </a:xfrm>
           <a:prstGeom prst="rect">
@@ -5498,7 +5498,7 @@
       </p:sp>
       <p:pic>
         <p:nvPicPr>
-          <p:cNvPr id="13" name="Picture 12" descr="d07cb81e712af369.png"/>
+          <p:cNvPr id="13" name="Picture 12" descr="9063011fd4a202de.png"/>
           <p:cNvPicPr>
             <a:picLocks noChangeAspect="1"/>
           </p:cNvPicPr>
@@ -5512,8 +5512,8 @@
         </p:blipFill>
         <p:spPr>
           <a:xfrm>
-            <a:off x="6481242" y="3865990"/>
-            <a:ext cx="1965960" cy="262128"/>
+            <a:off x="6479408" y="3857036"/>
+            <a:ext cx="1960244" cy="261366"/>
           </a:xfrm>
           <a:prstGeom prst="rect">
             <a:avLst/>
@@ -5528,7 +5528,7 @@
         </p:nvSpPr>
         <p:spPr>
           <a:xfrm>
-            <a:off x="3234773" y="4271374"/>
+            <a:off x="3235083" y="4271374"/>
             <a:ext cx="1427555" cy="457200"/>
           </a:xfrm>
           <a:prstGeom prst="rect">
@@ -5557,7 +5557,7 @@
       </p:sp>
       <p:pic>
         <p:nvPicPr>
-          <p:cNvPr id="15" name="Picture 14" descr="5bba082eb9d24892.png"/>
+          <p:cNvPr id="15" name="Picture 14" descr="e6738f5137934c1d.png"/>
           <p:cNvPicPr>
             <a:picLocks noChangeAspect="1"/>
           </p:cNvPicPr>
@@ -5571,8 +5571,8 @@
         </p:blipFill>
         <p:spPr>
           <a:xfrm>
-            <a:off x="4525169" y="4393294"/>
-            <a:ext cx="1213104" cy="213360"/>
+            <a:off x="4525478" y="4408963"/>
+            <a:ext cx="1211151" cy="212359"/>
           </a:xfrm>
           <a:prstGeom prst="rect">
             <a:avLst/>
@@ -5587,7 +5587,7 @@
         </p:nvSpPr>
         <p:spPr>
           <a:xfrm>
-            <a:off x="5738273" y="4271374"/>
+            <a:off x="5736630" y="4271374"/>
             <a:ext cx="1320048" cy="457200"/>
           </a:xfrm>
           <a:prstGeom prst="rect">
@@ -5616,7 +5616,7 @@
       </p:sp>
       <p:pic>
         <p:nvPicPr>
-          <p:cNvPr id="17" name="Picture 16" descr="256bb6140aa7aee4.png"/>
+          <p:cNvPr id="17" name="Picture 16" descr="0ffcd1c9127d2ea1.png"/>
           <p:cNvPicPr>
             <a:picLocks noChangeAspect="1"/>
           </p:cNvPicPr>
@@ -5630,8 +5630,8 @@
         </p:blipFill>
         <p:spPr>
           <a:xfrm>
-            <a:off x="6921162" y="4368910"/>
-            <a:ext cx="2011680" cy="262128"/>
+            <a:off x="6919519" y="4359956"/>
+            <a:ext cx="2009251" cy="261366"/>
           </a:xfrm>
           <a:prstGeom prst="rect">
             <a:avLst/>
@@ -5654,7 +5654,7 @@
         </p:blipFill>
         <p:spPr>
           <a:xfrm>
-            <a:off x="3289637" y="4871830"/>
+            <a:off x="3289947" y="4860495"/>
             <a:ext cx="957072" cy="262128"/>
           </a:xfrm>
           <a:prstGeom prst="rect">
@@ -5950,7 +5950,7 @@
         </p:blipFill>
         <p:spPr>
           <a:xfrm>
-            <a:off x="4687823" y="2196083"/>
+            <a:off x="4687823" y="2194560"/>
             <a:ext cx="2785872" cy="408432"/>
           </a:xfrm>
           <a:prstGeom prst="rect">
@@ -6253,7 +6253,7 @@
         </p:nvSpPr>
         <p:spPr>
           <a:xfrm>
-            <a:off x="3523841" y="2842259"/>
+            <a:off x="3524294" y="2842259"/>
             <a:ext cx="3220349" cy="457200"/>
           </a:xfrm>
           <a:prstGeom prst="rect">
@@ -6282,7 +6282,7 @@
       </p:sp>
       <p:pic>
         <p:nvPicPr>
-          <p:cNvPr id="10" name="Picture 9" descr="515cb46100c89924.png"/>
+          <p:cNvPr id="10" name="Picture 9" descr="66ed94db7950c196.png"/>
           <p:cNvPicPr>
             <a:picLocks noChangeAspect="1"/>
           </p:cNvPicPr>
@@ -6296,8 +6296,8 @@
         </p:blipFill>
         <p:spPr>
           <a:xfrm>
-            <a:off x="6607031" y="2964179"/>
-            <a:ext cx="987552" cy="213360"/>
+            <a:off x="6607483" y="2977514"/>
+            <a:ext cx="991790" cy="214693"/>
           </a:xfrm>
           <a:prstGeom prst="rect">
             <a:avLst/>
@@ -6312,7 +6312,7 @@
         </p:nvSpPr>
         <p:spPr>
           <a:xfrm>
-            <a:off x="3523841" y="3345179"/>
+            <a:off x="3524294" y="3345179"/>
             <a:ext cx="3315516" cy="457200"/>
           </a:xfrm>
           <a:prstGeom prst="rect">
@@ -6341,7 +6341,7 @@
       </p:sp>
       <p:pic>
         <p:nvPicPr>
-          <p:cNvPr id="12" name="Picture 11" descr="b08638df285abcbf.png"/>
+          <p:cNvPr id="12" name="Picture 11" descr="4e53ca6ef94821c0.png"/>
           <p:cNvPicPr>
             <a:picLocks noChangeAspect="1"/>
           </p:cNvPicPr>
@@ -6355,8 +6355,8 @@
         </p:blipFill>
         <p:spPr>
           <a:xfrm>
-            <a:off x="6702198" y="3442715"/>
-            <a:ext cx="1941576" cy="262128"/>
+            <a:off x="6702650" y="3433762"/>
+            <a:ext cx="1934575" cy="261366"/>
           </a:xfrm>
           <a:prstGeom prst="rect">
             <a:avLst/>
@@ -6379,7 +6379,7 @@
         </p:blipFill>
         <p:spPr>
           <a:xfrm>
-            <a:off x="3578705" y="3945635"/>
+            <a:off x="3579158" y="3934301"/>
             <a:ext cx="932688" cy="262128"/>
           </a:xfrm>
           <a:prstGeom prst="rect">
@@ -6696,7 +6696,7 @@
       </p:sp>
       <p:pic>
         <p:nvPicPr>
-          <p:cNvPr id="9" name="Picture 8" descr="63d362095a3f347d.png"/>
+          <p:cNvPr id="9" name="Picture 8" descr="06cea9a990494b36.png"/>
           <p:cNvPicPr>
             <a:picLocks noChangeAspect="1"/>
           </p:cNvPicPr>
@@ -6710,8 +6710,8 @@
         </p:blipFill>
         <p:spPr>
           <a:xfrm>
-            <a:off x="3842791" y="1944623"/>
-            <a:ext cx="911352" cy="271272"/>
+            <a:off x="3842791" y="1924621"/>
+            <a:ext cx="911351" cy="274891"/>
           </a:xfrm>
           <a:prstGeom prst="rect">
             <a:avLst/>
@@ -6790,7 +6790,7 @@
       </p:sp>
       <p:pic>
         <p:nvPicPr>
-          <p:cNvPr id="12" name="Picture 11" descr="9fc66bb1f34c491c.png"/>
+          <p:cNvPr id="12" name="Picture 11" descr="ba28393e900a8793.png"/>
           <p:cNvPicPr>
             <a:picLocks noChangeAspect="1"/>
           </p:cNvPicPr>
@@ -6804,8 +6804,8 @@
         </p:blipFill>
         <p:spPr>
           <a:xfrm>
-            <a:off x="2981888" y="2554224"/>
-            <a:ext cx="1136904" cy="277368"/>
+            <a:off x="2981888" y="2534793"/>
+            <a:ext cx="1136713" cy="277368"/>
           </a:xfrm>
           <a:prstGeom prst="rect">
             <a:avLst/>
@@ -6820,7 +6820,7 @@
         </p:nvSpPr>
         <p:spPr>
           <a:xfrm>
-            <a:off x="4118792" y="2464308"/>
+            <a:off x="4118602" y="2464308"/>
             <a:ext cx="5481137" cy="457200"/>
           </a:xfrm>
           <a:prstGeom prst="rect">
@@ -7182,7 +7182,7 @@
       </p:sp>
       <p:pic>
         <p:nvPicPr>
-          <p:cNvPr id="9" name="Picture 8" descr="e21453500b587993.png"/>
+          <p:cNvPr id="9" name="Picture 8" descr="7d5296eed19f353a.png"/>
           <p:cNvPicPr>
             <a:picLocks noChangeAspect="1"/>
           </p:cNvPicPr>
@@ -7196,8 +7196,8 @@
         </p:blipFill>
         <p:spPr>
           <a:xfrm>
-            <a:off x="3842791" y="1944623"/>
-            <a:ext cx="914400" cy="271272"/>
+            <a:off x="3842791" y="1924621"/>
+            <a:ext cx="913828" cy="274891"/>
           </a:xfrm>
           <a:prstGeom prst="rect">
             <a:avLst/>
@@ -7212,7 +7212,7 @@
         </p:nvSpPr>
         <p:spPr>
           <a:xfrm>
-            <a:off x="4757191" y="1851660"/>
+            <a:off x="4756620" y="1851660"/>
             <a:ext cx="2725928" cy="457200"/>
           </a:xfrm>
           <a:prstGeom prst="rect">
@@ -7276,7 +7276,7 @@
       </p:sp>
       <p:pic>
         <p:nvPicPr>
-          <p:cNvPr id="12" name="Picture 11" descr="dcfe01e2266e7d45.png"/>
+          <p:cNvPr id="12" name="Picture 11" descr="d9d812d5ce25cf4b.png"/>
           <p:cNvPicPr>
             <a:picLocks noChangeAspect="1"/>
           </p:cNvPicPr>
@@ -7290,8 +7290,8 @@
         </p:blipFill>
         <p:spPr>
           <a:xfrm>
-            <a:off x="2981888" y="2554224"/>
-            <a:ext cx="1143000" cy="277368"/>
+            <a:off x="2981888" y="2534793"/>
+            <a:ext cx="1139190" cy="277368"/>
           </a:xfrm>
           <a:prstGeom prst="rect">
             <a:avLst/>
@@ -7306,7 +7306,7 @@
         </p:nvSpPr>
         <p:spPr>
           <a:xfrm>
-            <a:off x="4124888" y="2464308"/>
+            <a:off x="4121078" y="2464308"/>
             <a:ext cx="5481137" cy="457200"/>
           </a:xfrm>
           <a:prstGeom prst="rect">
@@ -7376,7 +7376,7 @@
         </p:nvSpPr>
         <p:spPr>
           <a:xfrm>
-            <a:off x="3572609" y="3734926"/>
+            <a:off x="3574466" y="3734926"/>
             <a:ext cx="3220349" cy="457200"/>
           </a:xfrm>
           <a:prstGeom prst="rect">
@@ -7405,7 +7405,7 @@
       </p:sp>
       <p:pic>
         <p:nvPicPr>
-          <p:cNvPr id="16" name="Picture 15" descr="4841b499496deb7b.png"/>
+          <p:cNvPr id="16" name="Picture 15" descr="13f318c4be705491.png"/>
           <p:cNvPicPr>
             <a:picLocks noChangeAspect="1"/>
           </p:cNvPicPr>
@@ -7419,8 +7419,8 @@
         </p:blipFill>
         <p:spPr>
           <a:xfrm>
-            <a:off x="6655799" y="3856846"/>
-            <a:ext cx="1417320" cy="213360"/>
+            <a:off x="6657656" y="3872515"/>
+            <a:ext cx="1416510" cy="212359"/>
           </a:xfrm>
           <a:prstGeom prst="rect">
             <a:avLst/>
@@ -7435,7 +7435,7 @@
         </p:nvSpPr>
         <p:spPr>
           <a:xfrm>
-            <a:off x="3572609" y="4237846"/>
+            <a:off x="3574466" y="4237846"/>
             <a:ext cx="3315516" cy="457200"/>
           </a:xfrm>
           <a:prstGeom prst="rect">
@@ -7464,7 +7464,7 @@
       </p:sp>
       <p:pic>
         <p:nvPicPr>
-          <p:cNvPr id="18" name="Picture 17" descr="a2fcaba2a23dd202.png"/>
+          <p:cNvPr id="18" name="Picture 17" descr="978c2af6aaa0fead.png"/>
           <p:cNvPicPr>
             <a:picLocks noChangeAspect="1"/>
           </p:cNvPicPr>
@@ -7478,8 +7478,8 @@
         </p:blipFill>
         <p:spPr>
           <a:xfrm>
-            <a:off x="6750966" y="4335382"/>
-            <a:ext cx="1840991" cy="262128"/>
+            <a:off x="6752823" y="4326428"/>
+            <a:ext cx="1834229" cy="261366"/>
           </a:xfrm>
           <a:prstGeom prst="rect">
             <a:avLst/>
@@ -7502,7 +7502,7 @@
         </p:blipFill>
         <p:spPr>
           <a:xfrm>
-            <a:off x="3627473" y="4838302"/>
+            <a:off x="3629330" y="4826967"/>
             <a:ext cx="2127504" cy="262128"/>
           </a:xfrm>
           <a:prstGeom prst="rect">
@@ -7833,7 +7833,7 @@
         </p:blipFill>
         <p:spPr>
           <a:xfrm>
-            <a:off x="2408921" y="1502664"/>
+            <a:off x="2408921" y="1507045"/>
             <a:ext cx="3087624" cy="332232"/>
           </a:xfrm>
           <a:prstGeom prst="rect">
@@ -7849,7 +7849,7 @@
         </p:nvSpPr>
         <p:spPr>
           <a:xfrm>
-            <a:off x="1874519" y="2170176"/>
+            <a:off x="1874519" y="2156805"/>
             <a:ext cx="3678551" cy="457200"/>
           </a:xfrm>
           <a:prstGeom prst="rect">
@@ -7878,7 +7878,7 @@
       </p:sp>
       <p:pic>
         <p:nvPicPr>
-          <p:cNvPr id="11" name="Picture 10" descr="164f8cc20815187e.png"/>
+          <p:cNvPr id="11" name="Picture 10" descr="a52f8f8855a86073.png"/>
           <p:cNvPicPr>
             <a:picLocks noChangeAspect="1"/>
           </p:cNvPicPr>
@@ -7893,7 +7893,7 @@
         <p:spPr>
           <a:xfrm>
             <a:off x="5415911" y="2075688"/>
-            <a:ext cx="499871" cy="646176"/>
+            <a:ext cx="477035" cy="619434"/>
           </a:xfrm>
           <a:prstGeom prst="rect">
             <a:avLst/>
@@ -7908,7 +7908,7 @@
         </p:nvSpPr>
         <p:spPr>
           <a:xfrm>
-            <a:off x="1874519" y="2900172"/>
+            <a:off x="1874519" y="2873430"/>
             <a:ext cx="2930351" cy="457200"/>
           </a:xfrm>
           <a:prstGeom prst="rect">
@@ -7937,7 +7937,7 @@
       </p:sp>
       <p:pic>
         <p:nvPicPr>
-          <p:cNvPr id="13" name="Picture 12" descr="1cd87bae707e9a4b.png"/>
+          <p:cNvPr id="13" name="Picture 12" descr="f8833b322411a1a4.png"/>
           <p:cNvPicPr>
             <a:picLocks noChangeAspect="1"/>
           </p:cNvPicPr>
@@ -7951,8 +7951,8 @@
         </p:blipFill>
         <p:spPr>
           <a:xfrm>
-            <a:off x="4667711" y="2933700"/>
-            <a:ext cx="844296" cy="390144"/>
+            <a:off x="4667711" y="2917277"/>
+            <a:ext cx="806926" cy="372610"/>
           </a:xfrm>
           <a:prstGeom prst="rect">
             <a:avLst/>
@@ -7967,7 +7967,7 @@
         </p:nvSpPr>
         <p:spPr>
           <a:xfrm>
-            <a:off x="1874519" y="3579876"/>
+            <a:off x="1874519" y="3542589"/>
             <a:ext cx="3383258" cy="457200"/>
           </a:xfrm>
           <a:prstGeom prst="rect">
@@ -7996,7 +7996,7 @@
       </p:sp>
       <p:pic>
         <p:nvPicPr>
-          <p:cNvPr id="15" name="Picture 14" descr="fe7c9d77350b9ea3.png"/>
+          <p:cNvPr id="15" name="Picture 14" descr="960b9ab8e07f4c1e.png"/>
           <p:cNvPicPr>
             <a:picLocks noChangeAspect="1"/>
           </p:cNvPicPr>
@@ -8010,8 +8010,8 @@
         </p:blipFill>
         <p:spPr>
           <a:xfrm>
-            <a:off x="5120618" y="3535680"/>
-            <a:ext cx="451104" cy="545592"/>
+            <a:off x="5120618" y="3508938"/>
+            <a:ext cx="431942" cy="524502"/>
           </a:xfrm>
           <a:prstGeom prst="rect">
             <a:avLst/>
@@ -8565,7 +8565,7 @@
         </p:nvSpPr>
         <p:spPr>
           <a:xfrm>
-            <a:off x="3203725" y="3223260"/>
+            <a:off x="3205559" y="3223260"/>
             <a:ext cx="2991598" cy="457200"/>
           </a:xfrm>
           <a:prstGeom prst="rect">
@@ -8594,7 +8594,7 @@
       </p:sp>
       <p:pic>
         <p:nvPicPr>
-          <p:cNvPr id="10" name="Picture 9" descr="68d052e64ee55838.png"/>
+          <p:cNvPr id="10" name="Picture 9" descr="2afa0ecaaccf2cfe.png"/>
           <p:cNvPicPr>
             <a:picLocks noChangeAspect="1"/>
           </p:cNvPicPr>
@@ -8608,8 +8608,8 @@
         </p:blipFill>
         <p:spPr>
           <a:xfrm>
-            <a:off x="6058163" y="3345180"/>
-            <a:ext cx="1481328" cy="213360"/>
+            <a:off x="6059997" y="3358515"/>
+            <a:ext cx="1481851" cy="214693"/>
           </a:xfrm>
           <a:prstGeom prst="rect">
             <a:avLst/>
@@ -8624,7 +8624,7 @@
         </p:nvSpPr>
         <p:spPr>
           <a:xfrm>
-            <a:off x="3203725" y="3726179"/>
+            <a:off x="3205559" y="3726179"/>
             <a:ext cx="4013660" cy="457200"/>
           </a:xfrm>
           <a:prstGeom prst="rect">
@@ -8653,7 +8653,7 @@
       </p:sp>
       <p:pic>
         <p:nvPicPr>
-          <p:cNvPr id="12" name="Picture 11" descr="93ba4e388683b6a2.png"/>
+          <p:cNvPr id="12" name="Picture 11" descr="effc1051f2cab5fb.png"/>
           <p:cNvPicPr>
             <a:picLocks noChangeAspect="1"/>
           </p:cNvPicPr>
@@ -8667,8 +8667,8 @@
         </p:blipFill>
         <p:spPr>
           <a:xfrm>
-            <a:off x="7080226" y="3826763"/>
-            <a:ext cx="1880616" cy="256032"/>
+            <a:off x="7082060" y="3817096"/>
+            <a:ext cx="1873900" cy="259032"/>
           </a:xfrm>
           <a:prstGeom prst="rect">
             <a:avLst/>
@@ -8691,7 +8691,7 @@
         </p:blipFill>
         <p:spPr>
           <a:xfrm>
-            <a:off x="3258589" y="4329683"/>
+            <a:off x="3260423" y="4321397"/>
             <a:ext cx="847344" cy="256032"/>
           </a:xfrm>
           <a:prstGeom prst="rect">
@@ -9290,7 +9290,7 @@
         </p:nvSpPr>
         <p:spPr>
           <a:xfrm>
-            <a:off x="3089425" y="3223260"/>
+            <a:off x="3091211" y="3223260"/>
             <a:ext cx="2991598" cy="457200"/>
           </a:xfrm>
           <a:prstGeom prst="rect">
@@ -9319,7 +9319,7 @@
       </p:sp>
       <p:pic>
         <p:nvPicPr>
-          <p:cNvPr id="10" name="Picture 9" descr="b4106f1670f34932.png"/>
+          <p:cNvPr id="10" name="Picture 9" descr="873dff747dac941e.png"/>
           <p:cNvPicPr>
             <a:picLocks noChangeAspect="1"/>
           </p:cNvPicPr>
@@ -9333,8 +9333,8 @@
         </p:blipFill>
         <p:spPr>
           <a:xfrm>
-            <a:off x="5943863" y="3345180"/>
-            <a:ext cx="1865376" cy="213360"/>
+            <a:off x="5945649" y="3360848"/>
+            <a:ext cx="1869233" cy="212359"/>
           </a:xfrm>
           <a:prstGeom prst="rect">
             <a:avLst/>
@@ -9349,7 +9349,7 @@
         </p:nvSpPr>
         <p:spPr>
           <a:xfrm>
-            <a:off x="3089425" y="3726179"/>
+            <a:off x="3091211" y="3726179"/>
             <a:ext cx="4013660" cy="457200"/>
           </a:xfrm>
           <a:prstGeom prst="rect">
@@ -9378,7 +9378,7 @@
       </p:sp>
       <p:pic>
         <p:nvPicPr>
-          <p:cNvPr id="12" name="Picture 11" descr="006020145e462521.png"/>
+          <p:cNvPr id="12" name="Picture 11" descr="bb59bb17419b6b48.png"/>
           <p:cNvPicPr>
             <a:picLocks noChangeAspect="1"/>
           </p:cNvPicPr>
@@ -9392,8 +9392,8 @@
         </p:blipFill>
         <p:spPr>
           <a:xfrm>
-            <a:off x="6965926" y="3823716"/>
-            <a:ext cx="2109216" cy="262128"/>
+            <a:off x="6967712" y="3814762"/>
+            <a:ext cx="2104929" cy="261366"/>
           </a:xfrm>
           <a:prstGeom prst="rect">
             <a:avLst/>
@@ -9416,7 +9416,7 @@
         </p:blipFill>
         <p:spPr>
           <a:xfrm>
-            <a:off x="3144289" y="4329683"/>
+            <a:off x="3146075" y="4324445"/>
             <a:ext cx="2889504" cy="256032"/>
           </a:xfrm>
           <a:prstGeom prst="rect">
@@ -9712,7 +9712,7 @@
         </p:blipFill>
         <p:spPr>
           <a:xfrm>
-            <a:off x="4669536" y="2196083"/>
+            <a:off x="4669536" y="2194560"/>
             <a:ext cx="2822448" cy="408432"/>
           </a:xfrm>
           <a:prstGeom prst="rect">
@@ -10297,7 +10297,7 @@
         </p:nvSpPr>
         <p:spPr>
           <a:xfrm>
-            <a:off x="3517745" y="3417139"/>
+            <a:off x="3518459" y="3417139"/>
             <a:ext cx="3220349" cy="457200"/>
           </a:xfrm>
           <a:prstGeom prst="rect">
@@ -10326,7 +10326,7 @@
       </p:sp>
       <p:pic>
         <p:nvPicPr>
-          <p:cNvPr id="11" name="Picture 10" descr="441dd60a023e07e4.png"/>
+          <p:cNvPr id="11" name="Picture 10" descr="08d09ea86a993431.png"/>
           <p:cNvPicPr>
             <a:picLocks noChangeAspect="1"/>
           </p:cNvPicPr>
@@ -10340,8 +10340,8 @@
         </p:blipFill>
         <p:spPr>
           <a:xfrm>
-            <a:off x="6600935" y="3540583"/>
-            <a:ext cx="1021080" cy="210312"/>
+            <a:off x="6601649" y="3554727"/>
+            <a:ext cx="1022127" cy="210026"/>
           </a:xfrm>
           <a:prstGeom prst="rect">
             <a:avLst/>
@@ -10356,7 +10356,7 @@
         </p:nvSpPr>
         <p:spPr>
           <a:xfrm>
-            <a:off x="3517745" y="3920059"/>
+            <a:off x="3518459" y="3920059"/>
             <a:ext cx="3315516" cy="457200"/>
           </a:xfrm>
           <a:prstGeom prst="rect">
@@ -10385,7 +10385,7 @@
       </p:sp>
       <p:pic>
         <p:nvPicPr>
-          <p:cNvPr id="13" name="Picture 12" descr="579cc9c9ffeab55b.png"/>
+          <p:cNvPr id="13" name="Picture 12" descr="65dc7db8ffa94a68.png"/>
           <p:cNvPicPr>
             <a:picLocks noChangeAspect="1"/>
           </p:cNvPicPr>
@@ -10399,8 +10399,8 @@
         </p:blipFill>
         <p:spPr>
           <a:xfrm>
-            <a:off x="6696102" y="4017595"/>
-            <a:ext cx="1950720" cy="262128"/>
+            <a:off x="6696816" y="4008641"/>
+            <a:ext cx="1946243" cy="261366"/>
           </a:xfrm>
           <a:prstGeom prst="rect">
             <a:avLst/>
@@ -10423,7 +10423,7 @@
         </p:blipFill>
         <p:spPr>
           <a:xfrm>
-            <a:off x="3572609" y="4520515"/>
+            <a:off x="3573323" y="4509180"/>
             <a:ext cx="954023" cy="262128"/>
           </a:xfrm>
           <a:prstGeom prst="rect">
@@ -10719,7 +10719,7 @@
         </p:blipFill>
         <p:spPr>
           <a:xfrm>
-            <a:off x="4668012" y="2196083"/>
+            <a:off x="4668012" y="2194560"/>
             <a:ext cx="2825496" cy="408432"/>
           </a:xfrm>
           <a:prstGeom prst="rect">
@@ -11304,7 +11304,7 @@
         </p:nvSpPr>
         <p:spPr>
           <a:xfrm>
-            <a:off x="3572609" y="3417139"/>
+            <a:off x="3572133" y="3417139"/>
             <a:ext cx="3220349" cy="457200"/>
           </a:xfrm>
           <a:prstGeom prst="rect">
@@ -11333,7 +11333,7 @@
       </p:sp>
       <p:pic>
         <p:nvPicPr>
-          <p:cNvPr id="11" name="Picture 10" descr="95ecba0795db8e3b.png"/>
+          <p:cNvPr id="11" name="Picture 10" descr="85e851d4ab26f983.png"/>
           <p:cNvPicPr>
             <a:picLocks noChangeAspect="1"/>
           </p:cNvPicPr>
@@ -11347,8 +11347,8 @@
         </p:blipFill>
         <p:spPr>
           <a:xfrm>
-            <a:off x="6655799" y="3539059"/>
-            <a:ext cx="1197864" cy="213360"/>
+            <a:off x="6655322" y="3554727"/>
+            <a:ext cx="1199483" cy="212359"/>
           </a:xfrm>
           <a:prstGeom prst="rect">
             <a:avLst/>
@@ -11363,7 +11363,7 @@
         </p:nvSpPr>
         <p:spPr>
           <a:xfrm>
-            <a:off x="3572609" y="3920059"/>
+            <a:off x="3572133" y="3920059"/>
             <a:ext cx="3315516" cy="457200"/>
           </a:xfrm>
           <a:prstGeom prst="rect">
@@ -11392,7 +11392,7 @@
       </p:sp>
       <p:pic>
         <p:nvPicPr>
-          <p:cNvPr id="13" name="Picture 12" descr="d8f8e59949bbed45.png"/>
+          <p:cNvPr id="13" name="Picture 12" descr="0bfdc3409913d163.png"/>
           <p:cNvPicPr>
             <a:picLocks noChangeAspect="1"/>
           </p:cNvPicPr>
@@ -11406,8 +11406,8 @@
         </p:blipFill>
         <p:spPr>
           <a:xfrm>
-            <a:off x="6750966" y="4017595"/>
-            <a:ext cx="1840991" cy="262128"/>
+            <a:off x="6750490" y="4008641"/>
+            <a:ext cx="1838896" cy="261366"/>
           </a:xfrm>
           <a:prstGeom prst="rect">
             <a:avLst/>
@@ -11430,7 +11430,7 @@
         </p:blipFill>
         <p:spPr>
           <a:xfrm>
-            <a:off x="3627473" y="4520515"/>
+            <a:off x="3626997" y="4509180"/>
             <a:ext cx="2273808" cy="262128"/>
           </a:xfrm>
           <a:prstGeom prst="rect">
@@ -11726,7 +11726,7 @@
         </p:blipFill>
         <p:spPr>
           <a:xfrm>
-            <a:off x="5434583" y="2194560"/>
+            <a:off x="5434583" y="2194559"/>
             <a:ext cx="1292352" cy="801624"/>
           </a:xfrm>
           <a:prstGeom prst="rect">
@@ -12029,7 +12029,7 @@
         </p:nvSpPr>
         <p:spPr>
           <a:xfrm>
-            <a:off x="2437153" y="3229356"/>
+            <a:off x="2438963" y="3229356"/>
             <a:ext cx="2991598" cy="457200"/>
           </a:xfrm>
           <a:prstGeom prst="rect">
@@ -12058,7 +12058,7 @@
       </p:sp>
       <p:pic>
         <p:nvPicPr>
-          <p:cNvPr id="10" name="Picture 9" descr="e20244de15a0b935.png"/>
+          <p:cNvPr id="10" name="Picture 9" descr="f8e310da8c2a7a15.png"/>
           <p:cNvPicPr>
             <a:picLocks noChangeAspect="1"/>
           </p:cNvPicPr>
@@ -12072,8 +12072,8 @@
         </p:blipFill>
         <p:spPr>
           <a:xfrm>
-            <a:off x="5291591" y="3352800"/>
-            <a:ext cx="996696" cy="210312"/>
+            <a:off x="5293401" y="3364611"/>
+            <a:ext cx="996457" cy="210026"/>
           </a:xfrm>
           <a:prstGeom prst="rect">
             <a:avLst/>
@@ -12088,7 +12088,7 @@
         </p:nvSpPr>
         <p:spPr>
           <a:xfrm>
-            <a:off x="2437153" y="3732275"/>
+            <a:off x="2438963" y="3732275"/>
             <a:ext cx="4013660" cy="457200"/>
           </a:xfrm>
           <a:prstGeom prst="rect">
@@ -12117,7 +12117,7 @@
       </p:sp>
       <p:pic>
         <p:nvPicPr>
-          <p:cNvPr id="12" name="Picture 11" descr="03a763d23ef38bc8.png"/>
+          <p:cNvPr id="12" name="Picture 11" descr="ff9e89295ad61d49.png"/>
           <p:cNvPicPr>
             <a:picLocks noChangeAspect="1"/>
           </p:cNvPicPr>
@@ -12131,8 +12131,8 @@
         </p:blipFill>
         <p:spPr>
           <a:xfrm>
-            <a:off x="6313654" y="3829812"/>
-            <a:ext cx="3416808" cy="262128"/>
+            <a:off x="6315464" y="3820858"/>
+            <a:ext cx="3407092" cy="261366"/>
           </a:xfrm>
           <a:prstGeom prst="rect">
             <a:avLst/>
@@ -12155,7 +12155,7 @@
         </p:blipFill>
         <p:spPr>
           <a:xfrm>
-            <a:off x="2492017" y="4332732"/>
+            <a:off x="2493827" y="4321397"/>
             <a:ext cx="917448" cy="262128"/>
           </a:xfrm>
           <a:prstGeom prst="rect">
@@ -12486,7 +12486,7 @@
         </p:blipFill>
         <p:spPr>
           <a:xfrm>
-            <a:off x="2408921" y="1502664"/>
+            <a:off x="2408921" y="1507045"/>
             <a:ext cx="3087624" cy="332232"/>
           </a:xfrm>
           <a:prstGeom prst="rect">
@@ -12546,7 +12546,7 @@
         </p:nvSpPr>
         <p:spPr>
           <a:xfrm>
-            <a:off x="1874519" y="2170176"/>
+            <a:off x="1874519" y="2156805"/>
             <a:ext cx="3678551" cy="457200"/>
           </a:xfrm>
           <a:prstGeom prst="rect">
@@ -12575,7 +12575,7 @@
       </p:sp>
       <p:pic>
         <p:nvPicPr>
-          <p:cNvPr id="12" name="Picture 11" descr="164f8cc20815187e.png"/>
+          <p:cNvPr id="12" name="Picture 11" descr="a52f8f8855a86073.png"/>
           <p:cNvPicPr>
             <a:picLocks noChangeAspect="1"/>
           </p:cNvPicPr>
@@ -12590,7 +12590,7 @@
         <p:spPr>
           <a:xfrm>
             <a:off x="5415911" y="2075688"/>
-            <a:ext cx="499871" cy="646176"/>
+            <a:ext cx="477035" cy="619434"/>
           </a:xfrm>
           <a:prstGeom prst="rect">
             <a:avLst/>
@@ -12605,7 +12605,7 @@
         </p:nvSpPr>
         <p:spPr>
           <a:xfrm>
-            <a:off x="6464423" y="2052828"/>
+            <a:off x="6441587" y="2052828"/>
             <a:ext cx="682102" cy="457200"/>
           </a:xfrm>
           <a:prstGeom prst="rect">
@@ -12649,7 +12649,7 @@
         </p:nvSpPr>
         <p:spPr>
           <a:xfrm>
-            <a:off x="1874519" y="2900172"/>
+            <a:off x="1874519" y="2873430"/>
             <a:ext cx="2930351" cy="457200"/>
           </a:xfrm>
           <a:prstGeom prst="rect">
@@ -12678,7 +12678,7 @@
       </p:sp>
       <p:pic>
         <p:nvPicPr>
-          <p:cNvPr id="15" name="Picture 14" descr="1cd87bae707e9a4b.png"/>
+          <p:cNvPr id="15" name="Picture 14" descr="f8833b322411a1a4.png"/>
           <p:cNvPicPr>
             <a:picLocks noChangeAspect="1"/>
           </p:cNvPicPr>
@@ -12692,8 +12692,8 @@
         </p:blipFill>
         <p:spPr>
           <a:xfrm>
-            <a:off x="4667711" y="2933700"/>
-            <a:ext cx="844296" cy="390144"/>
+            <a:off x="4667711" y="2917277"/>
+            <a:ext cx="806926" cy="372610"/>
           </a:xfrm>
           <a:prstGeom prst="rect">
             <a:avLst/>
@@ -12708,7 +12708,7 @@
         </p:nvSpPr>
         <p:spPr>
           <a:xfrm>
-            <a:off x="6060647" y="2900172"/>
+            <a:off x="6023277" y="2873430"/>
             <a:ext cx="549167" cy="457200"/>
           </a:xfrm>
           <a:prstGeom prst="rect">
@@ -12743,7 +12743,7 @@
         </p:nvSpPr>
         <p:spPr>
           <a:xfrm>
-            <a:off x="1874519" y="3579876"/>
+            <a:off x="1874519" y="3542589"/>
             <a:ext cx="3383258" cy="457200"/>
           </a:xfrm>
           <a:prstGeom prst="rect">
@@ -12772,7 +12772,7 @@
       </p:sp>
       <p:pic>
         <p:nvPicPr>
-          <p:cNvPr id="18" name="Picture 17" descr="fe7c9d77350b9ea3.png"/>
+          <p:cNvPr id="18" name="Picture 17" descr="960b9ab8e07f4c1e.png"/>
           <p:cNvPicPr>
             <a:picLocks noChangeAspect="1"/>
           </p:cNvPicPr>
@@ -12786,8 +12786,8 @@
         </p:blipFill>
         <p:spPr>
           <a:xfrm>
-            <a:off x="5120618" y="3535680"/>
-            <a:ext cx="451104" cy="545592"/>
+            <a:off x="5120618" y="3508938"/>
+            <a:ext cx="431942" cy="524502"/>
           </a:xfrm>
           <a:prstGeom prst="rect">
             <a:avLst/>
@@ -12802,7 +12802,7 @@
         </p:nvSpPr>
         <p:spPr>
           <a:xfrm>
-            <a:off x="6120362" y="3512820"/>
+            <a:off x="6101200" y="3486078"/>
             <a:ext cx="384161" cy="457200"/>
           </a:xfrm>
           <a:prstGeom prst="rect">
@@ -13089,8 +13089,8 @@
         </p:nvSpPr>
         <p:spPr>
           <a:xfrm>
-            <a:off x="4134140" y="3241548"/>
-            <a:ext cx="3517441" cy="457200"/>
+            <a:off x="4288069" y="3241548"/>
+            <a:ext cx="3262962" cy="457200"/>
           </a:xfrm>
           <a:prstGeom prst="rect">
             <a:avLst/>
@@ -13105,7 +13105,7 @@
           <a:p>
             <a:pPr algn="l"/>
             <a:r>
-              <a:rPr sz="2470" b="0" i="0">
+              <a:rPr sz="2280" b="0" i="0">
                 <a:solidFill>
                   <a:srgbClr val="1A1A1A"/>
                 </a:solidFill>
@@ -13132,8 +13132,8 @@
         </p:blipFill>
         <p:spPr>
           <a:xfrm>
-            <a:off x="7514421" y="3366516"/>
-            <a:ext cx="176784" cy="207264"/>
+            <a:off x="7413872" y="3416046"/>
+            <a:ext cx="143637" cy="168401"/>
           </a:xfrm>
           <a:prstGeom prst="rect">
             <a:avLst/>
@@ -13148,8 +13148,8 @@
         </p:nvSpPr>
         <p:spPr>
           <a:xfrm>
-            <a:off x="7691205" y="3241548"/>
-            <a:ext cx="473333" cy="457200"/>
+            <a:off x="7557509" y="3241548"/>
+            <a:ext cx="453101" cy="457200"/>
           </a:xfrm>
           <a:prstGeom prst="rect">
             <a:avLst/>
@@ -13164,7 +13164,7 @@
           <a:p>
             <a:pPr algn="l"/>
             <a:r>
-              <a:rPr sz="2470" b="0" i="0">
+              <a:rPr sz="2280" b="0" i="0">
                 <a:solidFill>
                   <a:srgbClr val="1A1A1A"/>
                 </a:solidFill>
@@ -13470,8 +13470,8 @@
         </p:nvSpPr>
         <p:spPr>
           <a:xfrm>
-            <a:off x="4134140" y="3150108"/>
-            <a:ext cx="3517441" cy="457200"/>
+            <a:off x="4288069" y="3150108"/>
+            <a:ext cx="3262962" cy="457200"/>
           </a:xfrm>
           <a:prstGeom prst="rect">
             <a:avLst/>
@@ -13486,7 +13486,7 @@
           <a:p>
             <a:pPr algn="l"/>
             <a:r>
-              <a:rPr sz="2470" b="0" i="0">
+              <a:rPr sz="2280" b="0" i="0">
                 <a:solidFill>
                   <a:srgbClr val="1A1A1A"/>
                 </a:solidFill>
@@ -13513,8 +13513,8 @@
         </p:blipFill>
         <p:spPr>
           <a:xfrm>
-            <a:off x="7514421" y="3275076"/>
-            <a:ext cx="176784" cy="207264"/>
+            <a:off x="7413872" y="3324606"/>
+            <a:ext cx="143637" cy="168401"/>
           </a:xfrm>
           <a:prstGeom prst="rect">
             <a:avLst/>
@@ -13529,8 +13529,8 @@
         </p:nvSpPr>
         <p:spPr>
           <a:xfrm>
-            <a:off x="7691205" y="3150108"/>
-            <a:ext cx="473333" cy="457200"/>
+            <a:off x="7557509" y="3150108"/>
+            <a:ext cx="453101" cy="457200"/>
           </a:xfrm>
           <a:prstGeom prst="rect">
             <a:avLst/>
@@ -13545,7 +13545,7 @@
           <a:p>
             <a:pPr algn="l"/>
             <a:r>
-              <a:rPr sz="2470" b="0" i="0">
+              <a:rPr sz="2280" b="0" i="0">
                 <a:solidFill>
                   <a:srgbClr val="1A1A1A"/>
                 </a:solidFill>
@@ -13564,7 +13564,7 @@
         </p:nvSpPr>
         <p:spPr>
           <a:xfrm>
-            <a:off x="2640887" y="3909059"/>
+            <a:off x="2641888" y="3909059"/>
             <a:ext cx="1640071" cy="457200"/>
           </a:xfrm>
           <a:prstGeom prst="rect">
@@ -13593,7 +13593,7 @@
       </p:sp>
       <p:pic>
         <p:nvPicPr>
-          <p:cNvPr id="13" name="Picture 12" descr="e920add2c6370e50.png"/>
+          <p:cNvPr id="13" name="Picture 12" descr="775bb7f5e11f7619.png"/>
           <p:cNvPicPr>
             <a:picLocks noChangeAspect="1"/>
           </p:cNvPicPr>
@@ -13607,8 +13607,8 @@
         </p:blipFill>
         <p:spPr>
           <a:xfrm>
-            <a:off x="4143799" y="4011168"/>
-            <a:ext cx="1834896" cy="252984"/>
+            <a:off x="4144799" y="4029932"/>
+            <a:ext cx="1831371" cy="251364"/>
           </a:xfrm>
           <a:prstGeom prst="rect">
             <a:avLst/>
@@ -13623,7 +13623,7 @@
         </p:nvSpPr>
         <p:spPr>
           <a:xfrm>
-            <a:off x="5978695" y="3909059"/>
+            <a:off x="5976170" y="3909059"/>
             <a:ext cx="1338233" cy="457200"/>
           </a:xfrm>
           <a:prstGeom prst="rect">
@@ -13652,7 +13652,7 @@
       </p:sp>
       <p:pic>
         <p:nvPicPr>
-          <p:cNvPr id="15" name="Picture 14" descr="8691e6c5c0ab487f.png"/>
+          <p:cNvPr id="15" name="Picture 14" descr="99f2245ca8eda252.png"/>
           <p:cNvPicPr>
             <a:picLocks noChangeAspect="1"/>
           </p:cNvPicPr>
@@ -13666,8 +13666,8 @@
         </p:blipFill>
         <p:spPr>
           <a:xfrm>
-            <a:off x="7179768" y="4011168"/>
-            <a:ext cx="2346960" cy="252984"/>
+            <a:off x="7177243" y="4029932"/>
+            <a:ext cx="2345150" cy="251364"/>
           </a:xfrm>
           <a:prstGeom prst="rect">
             <a:avLst/>
@@ -13682,7 +13682,7 @@
         </p:nvSpPr>
         <p:spPr>
           <a:xfrm>
-            <a:off x="2640887" y="4602480"/>
+            <a:off x="2641888" y="4603289"/>
             <a:ext cx="1601504" cy="457200"/>
           </a:xfrm>
           <a:prstGeom prst="rect">
@@ -13711,7 +13711,7 @@
       </p:sp>
       <p:pic>
         <p:nvPicPr>
-          <p:cNvPr id="17" name="Picture 16" descr="dedb3e2327f40b65.png"/>
+          <p:cNvPr id="17" name="Picture 16" descr="973861c4e17ee299.png"/>
           <p:cNvPicPr>
             <a:picLocks noChangeAspect="1"/>
           </p:cNvPicPr>
@@ -13725,8 +13725,8 @@
         </p:blipFill>
         <p:spPr>
           <a:xfrm>
-            <a:off x="4105232" y="4471416"/>
-            <a:ext cx="3002280" cy="719328"/>
+            <a:off x="4106232" y="4471416"/>
+            <a:ext cx="3002565" cy="720947"/>
           </a:xfrm>
           <a:prstGeom prst="rect">
             <a:avLst/>
@@ -13741,7 +13741,7 @@
         </p:nvSpPr>
         <p:spPr>
           <a:xfrm>
-            <a:off x="777240" y="5327904"/>
+            <a:off x="777240" y="5329523"/>
             <a:ext cx="10607040" cy="548640"/>
           </a:xfrm>
           <a:prstGeom prst="rect">
@@ -14004,8 +14004,8 @@
         </p:nvSpPr>
         <p:spPr>
           <a:xfrm>
-            <a:off x="2849107" y="1816608"/>
-            <a:ext cx="930187" cy="457200"/>
+            <a:off x="3257813" y="1741741"/>
+            <a:ext cx="874835" cy="457200"/>
           </a:xfrm>
           <a:prstGeom prst="rect">
             <a:avLst/>
@@ -14020,7 +14020,7 @@
           <a:p>
             <a:pPr algn="l"/>
             <a:r>
-              <a:rPr sz="2470" b="0" i="0">
+              <a:rPr sz="2280" b="0" i="0">
                 <a:solidFill>
                   <a:srgbClr val="1A1A1A"/>
                 </a:solidFill>
@@ -14047,8 +14047,8 @@
         </p:blipFill>
         <p:spPr>
           <a:xfrm>
-            <a:off x="3642134" y="1645920"/>
-            <a:ext cx="1554480" cy="798576"/>
+            <a:off x="3995488" y="1645920"/>
+            <a:ext cx="1263014" cy="648843"/>
           </a:xfrm>
           <a:prstGeom prst="rect">
             <a:avLst/>
@@ -14063,8 +14063,8 @@
         </p:nvSpPr>
         <p:spPr>
           <a:xfrm>
-            <a:off x="5196614" y="1816608"/>
-            <a:ext cx="2811254" cy="457200"/>
+            <a:off x="5258503" y="1741741"/>
+            <a:ext cx="2610978" cy="457200"/>
           </a:xfrm>
           <a:prstGeom prst="rect">
             <a:avLst/>
@@ -14079,7 +14079,7 @@
           <a:p>
             <a:pPr algn="l"/>
             <a:r>
-              <a:rPr sz="2470" b="0" i="0">
+              <a:rPr sz="2280" b="0" i="0">
                 <a:solidFill>
                   <a:srgbClr val="1A1A1A"/>
                 </a:solidFill>
@@ -14106,8 +14106,8 @@
         </p:blipFill>
         <p:spPr>
           <a:xfrm>
-            <a:off x="7870708" y="1876044"/>
-            <a:ext cx="1441704" cy="338328"/>
+            <a:off x="7732322" y="1814703"/>
+            <a:ext cx="1171384" cy="274891"/>
           </a:xfrm>
           <a:prstGeom prst="rect">
             <a:avLst/>
@@ -14122,8 +14122,8 @@
         </p:nvSpPr>
         <p:spPr>
           <a:xfrm>
-            <a:off x="4059724" y="2695956"/>
-            <a:ext cx="2929551" cy="457200"/>
+            <a:off x="4281515" y="2546223"/>
+            <a:ext cx="2720283" cy="457200"/>
           </a:xfrm>
           <a:prstGeom prst="rect">
             <a:avLst/>
@@ -14138,7 +14138,7 @@
           <a:p>
             <a:pPr algn="l"/>
             <a:r>
-              <a:rPr sz="2470" b="0" i="0">
+              <a:rPr sz="2280" b="0" i="0">
                 <a:solidFill>
                   <a:srgbClr val="1A1A1A"/>
                 </a:solidFill>
@@ -14165,8 +14165,8 @@
         </p:blipFill>
         <p:spPr>
           <a:xfrm>
-            <a:off x="6852115" y="2753868"/>
-            <a:ext cx="1249680" cy="341376"/>
+            <a:off x="6864639" y="2616708"/>
+            <a:ext cx="1015365" cy="277368"/>
           </a:xfrm>
           <a:prstGeom prst="rect">
             <a:avLst/>
@@ -14181,7 +14181,7 @@
         </p:nvSpPr>
         <p:spPr>
           <a:xfrm>
-            <a:off x="777240" y="3404616"/>
+            <a:off x="777240" y="3254883"/>
             <a:ext cx="10607040" cy="411480"/>
           </a:xfrm>
           <a:prstGeom prst="rect">
@@ -14479,8 +14479,8 @@
         </p:nvSpPr>
         <p:spPr>
           <a:xfrm>
-            <a:off x="2850631" y="1816608"/>
-            <a:ext cx="930187" cy="457200"/>
+            <a:off x="3259051" y="1741741"/>
+            <a:ext cx="874835" cy="457200"/>
           </a:xfrm>
           <a:prstGeom prst="rect">
             <a:avLst/>
@@ -14495,7 +14495,7 @@
           <a:p>
             <a:pPr algn="l"/>
             <a:r>
-              <a:rPr sz="2470" b="0" i="0">
+              <a:rPr sz="2280" b="0" i="0">
                 <a:solidFill>
                   <a:srgbClr val="1A1A1A"/>
                 </a:solidFill>
@@ -14522,8 +14522,8 @@
         </p:blipFill>
         <p:spPr>
           <a:xfrm>
-            <a:off x="3643658" y="1645920"/>
-            <a:ext cx="1548384" cy="798576"/>
+            <a:off x="3996726" y="1645920"/>
+            <a:ext cx="1258062" cy="648843"/>
           </a:xfrm>
           <a:prstGeom prst="rect">
             <a:avLst/>
@@ -14538,8 +14538,8 @@
         </p:nvSpPr>
         <p:spPr>
           <a:xfrm>
-            <a:off x="5192042" y="1816608"/>
-            <a:ext cx="2811254" cy="457200"/>
+            <a:off x="5254788" y="1741741"/>
+            <a:ext cx="2610978" cy="457200"/>
           </a:xfrm>
           <a:prstGeom prst="rect">
             <a:avLst/>
@@ -14554,7 +14554,7 @@
           <a:p>
             <a:pPr algn="l"/>
             <a:r>
-              <a:rPr sz="2470" b="0" i="0">
+              <a:rPr sz="2280" b="0" i="0">
                 <a:solidFill>
                   <a:srgbClr val="1A1A1A"/>
                 </a:solidFill>
@@ -14581,8 +14581,8 @@
         </p:blipFill>
         <p:spPr>
           <a:xfrm>
-            <a:off x="7866136" y="1876044"/>
-            <a:ext cx="1444752" cy="338328"/>
+            <a:off x="7728607" y="1814703"/>
+            <a:ext cx="1173861" cy="274891"/>
           </a:xfrm>
           <a:prstGeom prst="rect">
             <a:avLst/>
@@ -14597,8 +14597,8 @@
         </p:nvSpPr>
         <p:spPr>
           <a:xfrm>
-            <a:off x="4058200" y="2695956"/>
-            <a:ext cx="2929551" cy="457200"/>
+            <a:off x="4280277" y="2546223"/>
+            <a:ext cx="2720283" cy="457200"/>
           </a:xfrm>
           <a:prstGeom prst="rect">
             <a:avLst/>
@@ -14613,7 +14613,7 @@
           <a:p>
             <a:pPr algn="l"/>
             <a:r>
-              <a:rPr sz="2470" b="0" i="0">
+              <a:rPr sz="2280" b="0" i="0">
                 <a:solidFill>
                   <a:srgbClr val="1A1A1A"/>
                 </a:solidFill>
@@ -14640,8 +14640,8 @@
         </p:blipFill>
         <p:spPr>
           <a:xfrm>
-            <a:off x="6850591" y="2753868"/>
-            <a:ext cx="1252728" cy="341376"/>
+            <a:off x="6863400" y="2616708"/>
+            <a:ext cx="1017841" cy="277368"/>
           </a:xfrm>
           <a:prstGeom prst="rect">
             <a:avLst/>
@@ -14656,7 +14656,7 @@
         </p:nvSpPr>
         <p:spPr>
           <a:xfrm>
-            <a:off x="777240" y="3404616"/>
+            <a:off x="777240" y="3254883"/>
             <a:ext cx="10607040" cy="411480"/>
           </a:xfrm>
           <a:prstGeom prst="rect">
@@ -14691,7 +14691,7 @@
         </p:nvSpPr>
         <p:spPr>
           <a:xfrm>
-            <a:off x="1720736" y="3976115"/>
+            <a:off x="1720736" y="3826383"/>
             <a:ext cx="8857207" cy="457200"/>
           </a:xfrm>
           <a:prstGeom prst="rect">
@@ -14720,7 +14720,7 @@
       </p:sp>
       <p:pic>
         <p:nvPicPr>
-          <p:cNvPr id="16" name="Picture 15" descr="da3880d224472433.png"/>
+          <p:cNvPr id="16" name="Picture 15" descr="9b1aa9fd86bde0fd.png"/>
           <p:cNvPicPr>
             <a:picLocks noChangeAspect="1"/>
           </p:cNvPicPr>
@@ -14734,8 +14734,8 @@
         </p:blipFill>
         <p:spPr>
           <a:xfrm>
-            <a:off x="1775600" y="4600956"/>
-            <a:ext cx="1496568" cy="213360"/>
+            <a:off x="1775600" y="4466891"/>
+            <a:ext cx="1493520" cy="212359"/>
           </a:xfrm>
           <a:prstGeom prst="rect">
             <a:avLst/>
@@ -14750,7 +14750,7 @@
         </p:nvSpPr>
         <p:spPr>
           <a:xfrm>
-            <a:off x="3272168" y="4479035"/>
+            <a:off x="3269120" y="4329303"/>
             <a:ext cx="1320048" cy="457200"/>
           </a:xfrm>
           <a:prstGeom prst="rect">
@@ -14779,7 +14779,7 @@
       </p:sp>
       <p:pic>
         <p:nvPicPr>
-          <p:cNvPr id="18" name="Picture 17" descr="e5d4b81feea7d9a0.png"/>
+          <p:cNvPr id="18" name="Picture 17" descr="6cba3e2ec22eaa92.png"/>
           <p:cNvPicPr>
             <a:picLocks noChangeAspect="1"/>
           </p:cNvPicPr>
@@ -14793,8 +14793,8 @@
         </p:blipFill>
         <p:spPr>
           <a:xfrm>
-            <a:off x="4455057" y="4576572"/>
-            <a:ext cx="1972056" cy="262128"/>
+            <a:off x="4452009" y="4417885"/>
+            <a:ext cx="1967245" cy="261366"/>
           </a:xfrm>
           <a:prstGeom prst="rect">
             <a:avLst/>
@@ -14817,7 +14817,7 @@
         </p:blipFill>
         <p:spPr>
           <a:xfrm>
-            <a:off x="1775600" y="5082539"/>
+            <a:off x="1775600" y="4924520"/>
             <a:ext cx="841248" cy="256032"/>
           </a:xfrm>
           <a:prstGeom prst="rect">
@@ -14833,7 +14833,7 @@
         </p:nvSpPr>
         <p:spPr>
           <a:xfrm>
-            <a:off x="777240" y="5553456"/>
+            <a:off x="777240" y="5403723"/>
             <a:ext cx="10607040" cy="548640"/>
           </a:xfrm>
           <a:prstGeom prst="rect">
@@ -15978,7 +15978,7 @@
                 </a:solidFill>
                 <a:latin typeface="Lexend"/>
               </a:rPr>
-              <a:t>Every skill listed is required, to a SmartScore of 67. Due at the start of the next class.</a:t>
+              <a:t>Every skill listed is required, to a SmartScore of 67. Due by the Unit 4 test.</a:t>
             </a:r>
           </a:p>
         </p:txBody>
@@ -16367,8 +16367,8 @@
         </p:blipFill>
         <p:spPr>
           <a:xfrm>
-            <a:off x="1143000" y="1953370"/>
-            <a:ext cx="2935224" cy="289560"/>
+            <a:off x="1143000" y="1991803"/>
+            <a:ext cx="2186130" cy="215661"/>
           </a:xfrm>
           <a:prstGeom prst="rect">
             <a:avLst/>
@@ -16383,7 +16383,7 @@
         </p:nvSpPr>
         <p:spPr>
           <a:xfrm>
-            <a:off x="4078224" y="1869550"/>
+            <a:off x="3329130" y="1869550"/>
             <a:ext cx="3007634" cy="457200"/>
           </a:xfrm>
           <a:prstGeom prst="rect">
@@ -16497,7 +16497,7 @@
         <p:spPr>
           <a:xfrm>
             <a:off x="1143000" y="3419060"/>
-            <a:ext cx="2176272" cy="701040"/>
+            <a:ext cx="1620869" cy="522128"/>
           </a:xfrm>
           <a:prstGeom prst="rect">
             <a:avLst/>
@@ -16512,7 +16512,7 @@
         </p:nvSpPr>
         <p:spPr>
           <a:xfrm>
-            <a:off x="3319272" y="3540980"/>
+            <a:off x="2763869" y="3451525"/>
             <a:ext cx="4454428" cy="457200"/>
           </a:xfrm>
           <a:prstGeom prst="rect">
@@ -16547,7 +16547,7 @@
         </p:nvSpPr>
         <p:spPr>
           <a:xfrm>
-            <a:off x="777240" y="4321268"/>
+            <a:off x="777240" y="4142357"/>
             <a:ext cx="10607040" cy="429370"/>
           </a:xfrm>
           <a:prstGeom prst="rect">
@@ -16582,8 +16582,8 @@
         </p:nvSpPr>
         <p:spPr>
           <a:xfrm>
-            <a:off x="1143000" y="4727779"/>
-            <a:ext cx="8173000" cy="457200"/>
+            <a:off x="1143000" y="4548868"/>
+            <a:ext cx="8251782" cy="457200"/>
           </a:xfrm>
           <a:prstGeom prst="rect">
             <a:avLst/>
@@ -16604,7 +16604,7 @@
                 </a:solidFill>
                 <a:latin typeface="Lexend"/>
               </a:rPr>
-              <a:t>using the commutative and associative properties to write</a:t>
+              <a:t>using the commutative and associative properties to write </a:t>
             </a:r>
           </a:p>
         </p:txBody>
@@ -16625,8 +16625,8 @@
         </p:blipFill>
         <p:spPr>
           <a:xfrm>
-            <a:off x="1143000" y="5238319"/>
-            <a:ext cx="2810256" cy="405384"/>
+            <a:off x="9257622" y="4634799"/>
+            <a:ext cx="2093055" cy="301926"/>
           </a:xfrm>
           <a:prstGeom prst="rect">
             <a:avLst/>
@@ -16641,8 +16641,8 @@
         </p:nvSpPr>
         <p:spPr>
           <a:xfrm>
-            <a:off x="3953256" y="5212411"/>
-            <a:ext cx="680753" cy="457200"/>
+            <a:off x="1143000" y="5033500"/>
+            <a:ext cx="601972" cy="457200"/>
           </a:xfrm>
           <a:prstGeom prst="rect">
             <a:avLst/>
@@ -16663,7 +16663,7 @@
                 </a:solidFill>
                 <a:latin typeface="Lexend"/>
               </a:rPr>
-              <a:t> as </a:t>
+              <a:t>as </a:t>
             </a:r>
           </a:p>
         </p:txBody>
@@ -16684,8 +16684,8 @@
         </p:blipFill>
         <p:spPr>
           <a:xfrm>
-            <a:off x="4496849" y="5238319"/>
-            <a:ext cx="2627376" cy="405384"/>
+            <a:off x="1607812" y="5119431"/>
+            <a:ext cx="1956847" cy="301926"/>
           </a:xfrm>
           <a:prstGeom prst="rect">
             <a:avLst/>
@@ -17006,7 +17006,7 @@
         </p:blipFill>
         <p:spPr>
           <a:xfrm>
-            <a:off x="2420112" y="1993392"/>
+            <a:off x="2420112" y="2194560"/>
             <a:ext cx="7321295" cy="414528"/>
           </a:xfrm>
           <a:prstGeom prst="rect">
@@ -17030,8 +17030,8 @@
         </p:blipFill>
         <p:spPr>
           <a:xfrm>
-            <a:off x="3994387" y="2717292"/>
-            <a:ext cx="1100328" cy="341376"/>
+            <a:off x="4135873" y="3027584"/>
+            <a:ext cx="968517" cy="300482"/>
           </a:xfrm>
           <a:prstGeom prst="rect">
             <a:avLst/>
@@ -17046,7 +17046,7 @@
         </p:nvSpPr>
         <p:spPr>
           <a:xfrm>
-            <a:off x="5094715" y="2659380"/>
+            <a:off x="5104391" y="2970276"/>
             <a:ext cx="1947704" cy="457200"/>
           </a:xfrm>
           <a:prstGeom prst="rect">
@@ -17089,8 +17089,8 @@
         </p:blipFill>
         <p:spPr>
           <a:xfrm>
-            <a:off x="6905260" y="2717292"/>
-            <a:ext cx="1261872" cy="341376"/>
+            <a:off x="6914935" y="3027584"/>
+            <a:ext cx="1110710" cy="300482"/>
           </a:xfrm>
           <a:prstGeom prst="rect">
             <a:avLst/>
@@ -17105,7 +17105,7 @@
         </p:nvSpPr>
         <p:spPr>
           <a:xfrm>
-            <a:off x="987552" y="3432047"/>
+            <a:off x="987552" y="3944112"/>
             <a:ext cx="10131551" cy="950976"/>
           </a:xfrm>
           <a:prstGeom prst="rect">
@@ -17446,7 +17446,7 @@
         </p:blipFill>
         <p:spPr>
           <a:xfrm>
-            <a:off x="3421380" y="1993392"/>
+            <a:off x="3421380" y="2194560"/>
             <a:ext cx="5318760" cy="798576"/>
           </a:xfrm>
           <a:prstGeom prst="rect">
@@ -17470,7 +17470,7 @@
         </p:blipFill>
         <p:spPr>
           <a:xfrm>
-            <a:off x="3483864" y="3066288"/>
+            <a:off x="3483864" y="3377184"/>
             <a:ext cx="5193792" cy="795528"/>
           </a:xfrm>
           <a:prstGeom prst="rect">
@@ -17486,7 +17486,7 @@
         </p:nvSpPr>
         <p:spPr>
           <a:xfrm>
-            <a:off x="987552" y="4200144"/>
+            <a:off x="987552" y="4712208"/>
             <a:ext cx="10131551" cy="475488"/>
           </a:xfrm>
           <a:prstGeom prst="rect">
@@ -17827,7 +17827,7 @@
         </p:blipFill>
         <p:spPr>
           <a:xfrm>
-            <a:off x="2906268" y="1993392"/>
+            <a:off x="2906268" y="2194560"/>
             <a:ext cx="6348984" cy="414528"/>
           </a:xfrm>
           <a:prstGeom prst="rect">
@@ -17851,7 +17851,7 @@
         </p:blipFill>
         <p:spPr>
           <a:xfrm>
-            <a:off x="3116580" y="2682240"/>
+            <a:off x="3116580" y="2993136"/>
             <a:ext cx="5928360" cy="801624"/>
           </a:xfrm>
           <a:prstGeom prst="rect">
@@ -17867,7 +17867,7 @@
         </p:nvSpPr>
         <p:spPr>
           <a:xfrm>
-            <a:off x="987552" y="3822191"/>
+            <a:off x="987552" y="4334256"/>
             <a:ext cx="10131551" cy="475488"/>
           </a:xfrm>
           <a:prstGeom prst="rect">
@@ -18138,7 +18138,7 @@
         </p:blipFill>
         <p:spPr>
           <a:xfrm>
-            <a:off x="4439412" y="2104643"/>
+            <a:off x="4439412" y="2103120"/>
             <a:ext cx="3282696" cy="408432"/>
           </a:xfrm>
           <a:prstGeom prst="rect">
